--- a/downloads/presentations/modules/gov-110.pptx
+++ b/downloads/presentations/modules/gov-110.pptx
@@ -4267,13 +4267,11 @@
             </a:avLst>
           </a:prstGeom>
           <a:solidFill>
-            <a:srgbClr val="FFFFFF">
-              <a:alpha val="88000"/>
-            </a:srgbClr>
+            <a:srgbClr val="FFFFFF"/>
           </a:solidFill>
           <a:ln w="12700">
             <a:solidFill>
-              <a:srgbClr val="D6E8F2"/>
+              <a:srgbClr val="B9D7E6"/>
             </a:solidFill>
             <a:prstDash val="solid"/>
           </a:ln>
@@ -4281,190 +4279,112 @@
       </p:sp>
       <p:sp>
         <p:nvSpPr>
-          <p:cNvPr id="14" name="Shape 12"/>
-          <p:cNvSpPr/>
-          <p:nvPr/>
-        </p:nvSpPr>
-        <p:spPr>
-          <a:xfrm>
-            <a:off x="7891272" y="3108960"/>
-            <a:ext cx="566928" cy="566928"/>
-          </a:xfrm>
-          <a:prstGeom prst="ellipse">
-            <a:avLst/>
-          </a:prstGeom>
-          <a:solidFill>
-            <a:srgbClr val="0068B7"/>
-          </a:solidFill>
-          <a:ln w="12700">
-            <a:solidFill>
-              <a:srgbClr val="0068B7"/>
-            </a:solidFill>
-            <a:prstDash val="solid"/>
-          </a:ln>
-        </p:spPr>
-      </p:sp>
-      <p:sp>
-        <p:nvSpPr>
-          <p:cNvPr id="15" name="Shape 13"/>
-          <p:cNvSpPr/>
-          <p:nvPr/>
-        </p:nvSpPr>
-        <p:spPr>
-          <a:xfrm>
-            <a:off x="10287000" y="3108960"/>
-            <a:ext cx="566928" cy="566928"/>
-          </a:xfrm>
-          <a:prstGeom prst="ellipse">
-            <a:avLst/>
-          </a:prstGeom>
-          <a:solidFill>
-            <a:srgbClr val="2F8A28"/>
-          </a:solidFill>
-          <a:ln w="12700">
-            <a:solidFill>
-              <a:srgbClr val="2F8A28"/>
-            </a:solidFill>
-            <a:prstDash val="solid"/>
-          </a:ln>
-        </p:spPr>
+          <p:cNvPr id="14" name="Text 12"/>
+          <p:cNvSpPr/>
+          <p:nvPr/>
+        </p:nvSpPr>
+        <p:spPr>
+          <a:xfrm>
+            <a:off x="7799832" y="2935224"/>
+            <a:ext cx="3145536" cy="256032"/>
+          </a:xfrm>
+          <a:prstGeom prst="rect">
+            <a:avLst/>
+          </a:prstGeom>
+          <a:noFill/>
+          <a:ln/>
+        </p:spPr>
+        <p:txBody>
+          <a:bodyPr wrap="square" lIns="0" tIns="0" rIns="0" bIns="0" rtlCol="0" anchor="ctr"/>
+          <a:lstStyle/>
+          <a:p>
+            <a:pPr indent="0" marL="0">
+              <a:buNone/>
+            </a:pPr>
+            <a:r>
+              <a:rPr lang="en-US" sz="1300" b="1" dirty="0">
+                <a:solidFill>
+                  <a:srgbClr val="0068B7"/>
+                </a:solidFill>
+                <a:latin typeface="Aptos" pitchFamily="34" charset="0"/>
+                <a:ea typeface="Aptos" pitchFamily="34" charset="-122"/>
+                <a:cs typeface="Aptos" pitchFamily="34" charset="-120"/>
+              </a:rPr>
+              <a:t>Concept checkpoints</a:t>
+            </a:r>
+            <a:endParaRPr lang="en-US" sz="1300" dirty="0"/>
+          </a:p>
+        </p:txBody>
+      </p:sp>
+      <p:sp>
+        <p:nvSpPr>
+          <p:cNvPr id="15" name="Text 13"/>
+          <p:cNvSpPr/>
+          <p:nvPr/>
+        </p:nvSpPr>
+        <p:spPr>
+          <a:xfrm>
+            <a:off x="7818120" y="3300984"/>
+            <a:ext cx="3090672" cy="877824"/>
+          </a:xfrm>
+          <a:prstGeom prst="rect">
+            <a:avLst/>
+          </a:prstGeom>
+          <a:noFill/>
+          <a:ln/>
+        </p:spPr>
+        <p:txBody>
+          <a:bodyPr wrap="square" lIns="254" tIns="254" rIns="254" bIns="254" rtlCol="0" anchor="t">
+            <a:normAutofit/>
+          </a:bodyPr>
+          <a:lstStyle/>
+          <a:p>
+            <a:r>
+              <a:rPr lang="en-US" sz="1380" dirty="0">
+                <a:solidFill>
+                  <a:srgbClr val="17364A"/>
+                </a:solidFill>
+                <a:latin typeface="Aptos" pitchFamily="34" charset="0"/>
+                <a:ea typeface="Aptos" pitchFamily="34" charset="-122"/>
+                <a:cs typeface="Aptos" pitchFamily="34" charset="-120"/>
+              </a:rPr>
+              <a:t>It does not replace Tribal law, Tribal policy, Tribal consultation, Tribal IRB review,.</a:t>
+            </a:r>
+            <a:endParaRPr lang="en-US" sz="1380" dirty="0"/>
+          </a:p>
+          <a:p>
+            <a:r>
+              <a:rPr lang="en-US" sz="1380" dirty="0">
+                <a:solidFill>
+                  <a:srgbClr val="17364A"/>
+                </a:solidFill>
+                <a:latin typeface="Aptos" pitchFamily="34" charset="0"/>
+                <a:ea typeface="Aptos" pitchFamily="34" charset="-122"/>
+                <a:cs typeface="Aptos" pitchFamily="34" charset="-120"/>
+              </a:rPr>
+              <a:t>Requirements may vary by Tribal Nation, jurisdiction, funding source, data sharing.</a:t>
+            </a:r>
+            <a:endParaRPr lang="en-US" sz="1380" dirty="0"/>
+          </a:p>
+          <a:p>
+            <a:r>
+              <a:rPr lang="en-US" sz="1380" dirty="0">
+                <a:solidFill>
+                  <a:srgbClr val="17364A"/>
+                </a:solidFill>
+                <a:latin typeface="Aptos" pitchFamily="34" charset="0"/>
+                <a:ea typeface="Aptos" pitchFamily="34" charset="-122"/>
+                <a:cs typeface="Aptos" pitchFamily="34" charset="-120"/>
+              </a:rPr>
+              <a:t>Learners should confirm applicable requirements before approving, procuring, deploying,.</a:t>
+            </a:r>
+            <a:endParaRPr lang="en-US" sz="1380" dirty="0"/>
+          </a:p>
+        </p:txBody>
       </p:sp>
       <p:sp>
         <p:nvSpPr>
           <p:cNvPr id="16" name="Shape 14"/>
-          <p:cNvSpPr/>
-          <p:nvPr/>
-        </p:nvSpPr>
-        <p:spPr>
-          <a:xfrm>
-            <a:off x="9089136" y="3456432"/>
-            <a:ext cx="566928" cy="566928"/>
-          </a:xfrm>
-          <a:prstGeom prst="ellipse">
-            <a:avLst/>
-          </a:prstGeom>
-          <a:solidFill>
-            <a:srgbClr val="6A4CA3"/>
-          </a:solidFill>
-          <a:ln w="12700">
-            <a:solidFill>
-              <a:srgbClr val="6A4CA3"/>
-            </a:solidFill>
-            <a:prstDash val="solid"/>
-          </a:ln>
-        </p:spPr>
-      </p:sp>
-      <p:sp>
-        <p:nvSpPr>
-          <p:cNvPr id="17" name="Shape 15"/>
-          <p:cNvSpPr/>
-          <p:nvPr/>
-        </p:nvSpPr>
-        <p:spPr>
-          <a:xfrm>
-            <a:off x="8385048" y="3419856"/>
-            <a:ext cx="1975104" cy="0"/>
-          </a:xfrm>
-          <a:prstGeom prst="line">
-            <a:avLst/>
-          </a:prstGeom>
-          <a:noFill/>
-          <a:ln w="25400">
-            <a:solidFill>
-              <a:srgbClr val="8ABBD8"/>
-            </a:solidFill>
-            <a:prstDash val="solid"/>
-          </a:ln>
-        </p:spPr>
-      </p:sp>
-      <p:sp>
-        <p:nvSpPr>
-          <p:cNvPr id="18" name="Shape 16"/>
-          <p:cNvSpPr/>
-          <p:nvPr/>
-        </p:nvSpPr>
-        <p:spPr>
-          <a:xfrm>
-            <a:off x="8202168" y="3630168"/>
-            <a:ext cx="1170432" cy="118872"/>
-          </a:xfrm>
-          <a:prstGeom prst="line">
-            <a:avLst/>
-          </a:prstGeom>
-          <a:noFill/>
-          <a:ln w="25400">
-            <a:solidFill>
-              <a:srgbClr val="8ABBD8"/>
-            </a:solidFill>
-            <a:prstDash val="solid"/>
-          </a:ln>
-        </p:spPr>
-      </p:sp>
-      <p:sp>
-        <p:nvSpPr>
-          <p:cNvPr id="19" name="Shape 17"/>
-          <p:cNvSpPr/>
-          <p:nvPr/>
-        </p:nvSpPr>
-        <p:spPr>
-          <a:xfrm>
-            <a:off x="10543032" y="3630168"/>
-            <a:ext cx="-1170432" cy="118872"/>
-          </a:xfrm>
-          <a:prstGeom prst="line">
-            <a:avLst/>
-          </a:prstGeom>
-          <a:noFill/>
-          <a:ln w="25400">
-            <a:solidFill>
-              <a:srgbClr val="8ABBD8"/>
-            </a:solidFill>
-            <a:prstDash val="solid"/>
-          </a:ln>
-        </p:spPr>
-      </p:sp>
-      <p:sp>
-        <p:nvSpPr>
-          <p:cNvPr id="20" name="Text 18"/>
-          <p:cNvSpPr/>
-          <p:nvPr/>
-        </p:nvSpPr>
-        <p:spPr>
-          <a:xfrm>
-            <a:off x="7863840" y="4069080"/>
-            <a:ext cx="3017520" cy="164592"/>
-          </a:xfrm>
-          <a:prstGeom prst="rect">
-            <a:avLst/>
-          </a:prstGeom>
-          <a:noFill/>
-          <a:ln/>
-        </p:spPr>
-        <p:txBody>
-          <a:bodyPr wrap="square" lIns="0" tIns="0" rIns="0" bIns="0" rtlCol="0" anchor="ctr"/>
-          <a:lstStyle/>
-          <a:p>
-            <a:pPr algn="ctr" indent="0" marL="0">
-              <a:buNone/>
-            </a:pPr>
-            <a:r>
-              <a:rPr lang="en-US" sz="900" b="1" dirty="0">
-                <a:solidFill>
-                  <a:srgbClr val="003A63"/>
-                </a:solidFill>
-                <a:latin typeface="Aptos" pitchFamily="34" charset="0"/>
-                <a:ea typeface="Aptos" pitchFamily="34" charset="-122"/>
-                <a:cs typeface="Aptos" pitchFamily="34" charset="-120"/>
-              </a:rPr>
-              <a:t>Decision rights</a:t>
-            </a:r>
-            <a:endParaRPr lang="en-US" sz="900" dirty="0"/>
-          </a:p>
-        </p:txBody>
-      </p:sp>
-      <p:sp>
-        <p:nvSpPr>
-          <p:cNvPr id="21" name="Shape 19"/>
           <p:cNvSpPr/>
           <p:nvPr/>
         </p:nvSpPr>
@@ -4491,7 +4411,7 @@
       </p:sp>
       <p:sp>
         <p:nvSpPr>
-          <p:cNvPr id="22" name="Text 20"/>
+          <p:cNvPr id="17" name="Text 15"/>
           <p:cNvSpPr/>
           <p:nvPr/>
         </p:nvSpPr>
@@ -4530,7 +4450,7 @@
       </p:sp>
       <p:sp>
         <p:nvSpPr>
-          <p:cNvPr id="23" name="Text 21"/>
+          <p:cNvPr id="18" name="Text 16"/>
           <p:cNvSpPr/>
           <p:nvPr/>
         </p:nvSpPr>
@@ -5038,13 +4958,11 @@
             </a:avLst>
           </a:prstGeom>
           <a:solidFill>
-            <a:srgbClr val="FFFFFF">
-              <a:alpha val="88000"/>
-            </a:srgbClr>
+            <a:srgbClr val="FFFFFF"/>
           </a:solidFill>
           <a:ln w="12700">
             <a:solidFill>
-              <a:srgbClr val="D6E8F2"/>
+              <a:srgbClr val="B9D7E6"/>
             </a:solidFill>
             <a:prstDash val="solid"/>
           </a:ln>
@@ -5052,190 +4970,112 @@
       </p:sp>
       <p:sp>
         <p:nvSpPr>
-          <p:cNvPr id="14" name="Shape 12"/>
-          <p:cNvSpPr/>
-          <p:nvPr/>
-        </p:nvSpPr>
-        <p:spPr>
-          <a:xfrm>
-            <a:off x="7891272" y="3108960"/>
-            <a:ext cx="566928" cy="566928"/>
-          </a:xfrm>
-          <a:prstGeom prst="ellipse">
-            <a:avLst/>
-          </a:prstGeom>
-          <a:solidFill>
-            <a:srgbClr val="0068B7"/>
-          </a:solidFill>
-          <a:ln w="12700">
-            <a:solidFill>
-              <a:srgbClr val="0068B7"/>
-            </a:solidFill>
-            <a:prstDash val="solid"/>
-          </a:ln>
-        </p:spPr>
-      </p:sp>
-      <p:sp>
-        <p:nvSpPr>
-          <p:cNvPr id="15" name="Shape 13"/>
-          <p:cNvSpPr/>
-          <p:nvPr/>
-        </p:nvSpPr>
-        <p:spPr>
-          <a:xfrm>
-            <a:off x="10287000" y="3108960"/>
-            <a:ext cx="566928" cy="566928"/>
-          </a:xfrm>
-          <a:prstGeom prst="ellipse">
-            <a:avLst/>
-          </a:prstGeom>
-          <a:solidFill>
-            <a:srgbClr val="2F8A28"/>
-          </a:solidFill>
-          <a:ln w="12700">
-            <a:solidFill>
-              <a:srgbClr val="2F8A28"/>
-            </a:solidFill>
-            <a:prstDash val="solid"/>
-          </a:ln>
-        </p:spPr>
+          <p:cNvPr id="14" name="Text 12"/>
+          <p:cNvSpPr/>
+          <p:nvPr/>
+        </p:nvSpPr>
+        <p:spPr>
+          <a:xfrm>
+            <a:off x="7799832" y="2935224"/>
+            <a:ext cx="3145536" cy="256032"/>
+          </a:xfrm>
+          <a:prstGeom prst="rect">
+            <a:avLst/>
+          </a:prstGeom>
+          <a:noFill/>
+          <a:ln/>
+        </p:spPr>
+        <p:txBody>
+          <a:bodyPr wrap="square" lIns="0" tIns="0" rIns="0" bIns="0" rtlCol="0" anchor="ctr"/>
+          <a:lstStyle/>
+          <a:p>
+            <a:pPr indent="0" marL="0">
+              <a:buNone/>
+            </a:pPr>
+            <a:r>
+              <a:rPr lang="en-US" sz="1300" b="1" dirty="0">
+                <a:solidFill>
+                  <a:srgbClr val="0068B7"/>
+                </a:solidFill>
+                <a:latin typeface="Aptos" pitchFamily="34" charset="0"/>
+                <a:ea typeface="Aptos" pitchFamily="34" charset="-122"/>
+                <a:cs typeface="Aptos" pitchFamily="34" charset="-120"/>
+              </a:rPr>
+              <a:t>Concept checkpoints</a:t>
+            </a:r>
+            <a:endParaRPr lang="en-US" sz="1300" dirty="0"/>
+          </a:p>
+        </p:txBody>
+      </p:sp>
+      <p:sp>
+        <p:nvSpPr>
+          <p:cNvPr id="15" name="Text 13"/>
+          <p:cNvSpPr/>
+          <p:nvPr/>
+        </p:nvSpPr>
+        <p:spPr>
+          <a:xfrm>
+            <a:off x="7818120" y="3300984"/>
+            <a:ext cx="3090672" cy="877824"/>
+          </a:xfrm>
+          <a:prstGeom prst="rect">
+            <a:avLst/>
+          </a:prstGeom>
+          <a:noFill/>
+          <a:ln/>
+        </p:spPr>
+        <p:txBody>
+          <a:bodyPr wrap="square" lIns="254" tIns="254" rIns="254" bIns="254" rtlCol="0" anchor="t">
+            <a:normAutofit/>
+          </a:bodyPr>
+          <a:lstStyle/>
+          <a:p>
+            <a:r>
+              <a:rPr lang="en-US" sz="1380" dirty="0">
+                <a:solidFill>
+                  <a:srgbClr val="17364A"/>
+                </a:solidFill>
+                <a:latin typeface="Aptos" pitchFamily="34" charset="0"/>
+                <a:ea typeface="Aptos" pitchFamily="34" charset="-122"/>
+                <a:cs typeface="Aptos" pitchFamily="34" charset="-120"/>
+              </a:rPr>
+              <a:t>AI projects can magnify the consequences of weak data governance because AI systems depend.</a:t>
+            </a:r>
+            <a:endParaRPr lang="en-US" sz="1380" dirty="0"/>
+          </a:p>
+          <a:p>
+            <a:r>
+              <a:rPr lang="en-US" sz="1380" dirty="0">
+                <a:solidFill>
+                  <a:srgbClr val="17364A"/>
+                </a:solidFill>
+                <a:latin typeface="Aptos" pitchFamily="34" charset="0"/>
+                <a:ea typeface="Aptos" pitchFamily="34" charset="-122"/>
+                <a:cs typeface="Aptos" pitchFamily="34" charset="-120"/>
+              </a:rPr>
+              <a:t>When health data involve Tribal Nations or AI/AN participants, those consequences can.</a:t>
+            </a:r>
+            <a:endParaRPr lang="en-US" sz="1380" dirty="0"/>
+          </a:p>
+          <a:p>
+            <a:r>
+              <a:rPr lang="en-US" sz="1380" dirty="0">
+                <a:solidFill>
+                  <a:srgbClr val="17364A"/>
+                </a:solidFill>
+                <a:latin typeface="Aptos" pitchFamily="34" charset="0"/>
+                <a:ea typeface="Aptos" pitchFamily="34" charset="-122"/>
+                <a:cs typeface="Aptos" pitchFamily="34" charset="-120"/>
+              </a:rPr>
+              <a:t>Public health agencies may intend to improve services, reduce disparities, or strengthen.</a:t>
+            </a:r>
+            <a:endParaRPr lang="en-US" sz="1380" dirty="0"/>
+          </a:p>
+        </p:txBody>
       </p:sp>
       <p:sp>
         <p:nvSpPr>
           <p:cNvPr id="16" name="Shape 14"/>
-          <p:cNvSpPr/>
-          <p:nvPr/>
-        </p:nvSpPr>
-        <p:spPr>
-          <a:xfrm>
-            <a:off x="9089136" y="3456432"/>
-            <a:ext cx="566928" cy="566928"/>
-          </a:xfrm>
-          <a:prstGeom prst="ellipse">
-            <a:avLst/>
-          </a:prstGeom>
-          <a:solidFill>
-            <a:srgbClr val="6A4CA3"/>
-          </a:solidFill>
-          <a:ln w="12700">
-            <a:solidFill>
-              <a:srgbClr val="6A4CA3"/>
-            </a:solidFill>
-            <a:prstDash val="solid"/>
-          </a:ln>
-        </p:spPr>
-      </p:sp>
-      <p:sp>
-        <p:nvSpPr>
-          <p:cNvPr id="17" name="Shape 15"/>
-          <p:cNvSpPr/>
-          <p:nvPr/>
-        </p:nvSpPr>
-        <p:spPr>
-          <a:xfrm>
-            <a:off x="8385048" y="3419856"/>
-            <a:ext cx="1975104" cy="0"/>
-          </a:xfrm>
-          <a:prstGeom prst="line">
-            <a:avLst/>
-          </a:prstGeom>
-          <a:noFill/>
-          <a:ln w="25400">
-            <a:solidFill>
-              <a:srgbClr val="8ABBD8"/>
-            </a:solidFill>
-            <a:prstDash val="solid"/>
-          </a:ln>
-        </p:spPr>
-      </p:sp>
-      <p:sp>
-        <p:nvSpPr>
-          <p:cNvPr id="18" name="Shape 16"/>
-          <p:cNvSpPr/>
-          <p:nvPr/>
-        </p:nvSpPr>
-        <p:spPr>
-          <a:xfrm>
-            <a:off x="8202168" y="3630168"/>
-            <a:ext cx="1170432" cy="118872"/>
-          </a:xfrm>
-          <a:prstGeom prst="line">
-            <a:avLst/>
-          </a:prstGeom>
-          <a:noFill/>
-          <a:ln w="25400">
-            <a:solidFill>
-              <a:srgbClr val="8ABBD8"/>
-            </a:solidFill>
-            <a:prstDash val="solid"/>
-          </a:ln>
-        </p:spPr>
-      </p:sp>
-      <p:sp>
-        <p:nvSpPr>
-          <p:cNvPr id="19" name="Shape 17"/>
-          <p:cNvSpPr/>
-          <p:nvPr/>
-        </p:nvSpPr>
-        <p:spPr>
-          <a:xfrm>
-            <a:off x="10543032" y="3630168"/>
-            <a:ext cx="-1170432" cy="118872"/>
-          </a:xfrm>
-          <a:prstGeom prst="line">
-            <a:avLst/>
-          </a:prstGeom>
-          <a:noFill/>
-          <a:ln w="25400">
-            <a:solidFill>
-              <a:srgbClr val="8ABBD8"/>
-            </a:solidFill>
-            <a:prstDash val="solid"/>
-          </a:ln>
-        </p:spPr>
-      </p:sp>
-      <p:sp>
-        <p:nvSpPr>
-          <p:cNvPr id="20" name="Text 18"/>
-          <p:cNvSpPr/>
-          <p:nvPr/>
-        </p:nvSpPr>
-        <p:spPr>
-          <a:xfrm>
-            <a:off x="7863840" y="4069080"/>
-            <a:ext cx="3017520" cy="164592"/>
-          </a:xfrm>
-          <a:prstGeom prst="rect">
-            <a:avLst/>
-          </a:prstGeom>
-          <a:noFill/>
-          <a:ln/>
-        </p:spPr>
-        <p:txBody>
-          <a:bodyPr wrap="square" lIns="0" tIns="0" rIns="0" bIns="0" rtlCol="0" anchor="ctr"/>
-          <a:lstStyle/>
-          <a:p>
-            <a:pPr algn="ctr" indent="0" marL="0">
-              <a:buNone/>
-            </a:pPr>
-            <a:r>
-              <a:rPr lang="en-US" sz="900" b="1" dirty="0">
-                <a:solidFill>
-                  <a:srgbClr val="003A63"/>
-                </a:solidFill>
-                <a:latin typeface="Aptos" pitchFamily="34" charset="0"/>
-                <a:ea typeface="Aptos" pitchFamily="34" charset="-122"/>
-                <a:cs typeface="Aptos" pitchFamily="34" charset="-120"/>
-              </a:rPr>
-              <a:t>Decision rights</a:t>
-            </a:r>
-            <a:endParaRPr lang="en-US" sz="900" dirty="0"/>
-          </a:p>
-        </p:txBody>
-      </p:sp>
-      <p:sp>
-        <p:nvSpPr>
-          <p:cNvPr id="21" name="Shape 19"/>
           <p:cNvSpPr/>
           <p:nvPr/>
         </p:nvSpPr>
@@ -5262,7 +5102,7 @@
       </p:sp>
       <p:sp>
         <p:nvSpPr>
-          <p:cNvPr id="22" name="Text 20"/>
+          <p:cNvPr id="17" name="Text 15"/>
           <p:cNvSpPr/>
           <p:nvPr/>
         </p:nvSpPr>
@@ -5301,7 +5141,7 @@
       </p:sp>
       <p:sp>
         <p:nvSpPr>
-          <p:cNvPr id="23" name="Text 21"/>
+          <p:cNvPr id="18" name="Text 16"/>
           <p:cNvSpPr/>
           <p:nvPr/>
         </p:nvSpPr>
@@ -5809,13 +5649,11 @@
             </a:avLst>
           </a:prstGeom>
           <a:solidFill>
-            <a:srgbClr val="FFFFFF">
-              <a:alpha val="88000"/>
-            </a:srgbClr>
+            <a:srgbClr val="FFFFFF"/>
           </a:solidFill>
           <a:ln w="12700">
             <a:solidFill>
-              <a:srgbClr val="D6E8F2"/>
+              <a:srgbClr val="B9D7E6"/>
             </a:solidFill>
             <a:prstDash val="solid"/>
           </a:ln>
@@ -5823,190 +5661,112 @@
       </p:sp>
       <p:sp>
         <p:nvSpPr>
-          <p:cNvPr id="14" name="Shape 12"/>
-          <p:cNvSpPr/>
-          <p:nvPr/>
-        </p:nvSpPr>
-        <p:spPr>
-          <a:xfrm>
-            <a:off x="7891272" y="3108960"/>
-            <a:ext cx="566928" cy="566928"/>
-          </a:xfrm>
-          <a:prstGeom prst="ellipse">
-            <a:avLst/>
-          </a:prstGeom>
-          <a:solidFill>
-            <a:srgbClr val="0068B7"/>
-          </a:solidFill>
-          <a:ln w="12700">
-            <a:solidFill>
-              <a:srgbClr val="0068B7"/>
-            </a:solidFill>
-            <a:prstDash val="solid"/>
-          </a:ln>
-        </p:spPr>
-      </p:sp>
-      <p:sp>
-        <p:nvSpPr>
-          <p:cNvPr id="15" name="Shape 13"/>
-          <p:cNvSpPr/>
-          <p:nvPr/>
-        </p:nvSpPr>
-        <p:spPr>
-          <a:xfrm>
-            <a:off x="10287000" y="3108960"/>
-            <a:ext cx="566928" cy="566928"/>
-          </a:xfrm>
-          <a:prstGeom prst="ellipse">
-            <a:avLst/>
-          </a:prstGeom>
-          <a:solidFill>
-            <a:srgbClr val="2F8A28"/>
-          </a:solidFill>
-          <a:ln w="12700">
-            <a:solidFill>
-              <a:srgbClr val="2F8A28"/>
-            </a:solidFill>
-            <a:prstDash val="solid"/>
-          </a:ln>
-        </p:spPr>
+          <p:cNvPr id="14" name="Text 12"/>
+          <p:cNvSpPr/>
+          <p:nvPr/>
+        </p:nvSpPr>
+        <p:spPr>
+          <a:xfrm>
+            <a:off x="7799832" y="2935224"/>
+            <a:ext cx="3145536" cy="256032"/>
+          </a:xfrm>
+          <a:prstGeom prst="rect">
+            <a:avLst/>
+          </a:prstGeom>
+          <a:noFill/>
+          <a:ln/>
+        </p:spPr>
+        <p:txBody>
+          <a:bodyPr wrap="square" lIns="0" tIns="0" rIns="0" bIns="0" rtlCol="0" anchor="ctr"/>
+          <a:lstStyle/>
+          <a:p>
+            <a:pPr indent="0" marL="0">
+              <a:buNone/>
+            </a:pPr>
+            <a:r>
+              <a:rPr lang="en-US" sz="1300" b="1" dirty="0">
+                <a:solidFill>
+                  <a:srgbClr val="0068B7"/>
+                </a:solidFill>
+                <a:latin typeface="Aptos" pitchFamily="34" charset="0"/>
+                <a:ea typeface="Aptos" pitchFamily="34" charset="-122"/>
+                <a:cs typeface="Aptos" pitchFamily="34" charset="-120"/>
+              </a:rPr>
+              <a:t>Concept checkpoints</a:t>
+            </a:r>
+            <a:endParaRPr lang="en-US" sz="1300" dirty="0"/>
+          </a:p>
+        </p:txBody>
+      </p:sp>
+      <p:sp>
+        <p:nvSpPr>
+          <p:cNvPr id="15" name="Text 13"/>
+          <p:cNvSpPr/>
+          <p:nvPr/>
+        </p:nvSpPr>
+        <p:spPr>
+          <a:xfrm>
+            <a:off x="7818120" y="3300984"/>
+            <a:ext cx="3090672" cy="877824"/>
+          </a:xfrm>
+          <a:prstGeom prst="rect">
+            <a:avLst/>
+          </a:prstGeom>
+          <a:noFill/>
+          <a:ln/>
+        </p:spPr>
+        <p:txBody>
+          <a:bodyPr wrap="square" lIns="254" tIns="254" rIns="254" bIns="254" rtlCol="0" anchor="t">
+            <a:normAutofit/>
+          </a:bodyPr>
+          <a:lstStyle/>
+          <a:p>
+            <a:r>
+              <a:rPr lang="en-US" sz="1380" dirty="0">
+                <a:solidFill>
+                  <a:srgbClr val="17364A"/>
+                </a:solidFill>
+                <a:latin typeface="Aptos" pitchFamily="34" charset="0"/>
+                <a:ea typeface="Aptos" pitchFamily="34" charset="-122"/>
+                <a:cs typeface="Aptos" pitchFamily="34" charset="-120"/>
+              </a:rPr>
+              <a:t>Tribal sovereignty means the inherent authority of Tribal Nations to govern themselves and.</a:t>
+            </a:r>
+            <a:endParaRPr lang="en-US" sz="1380" dirty="0"/>
+          </a:p>
+          <a:p>
+            <a:r>
+              <a:rPr lang="en-US" sz="1380" dirty="0">
+                <a:solidFill>
+                  <a:srgbClr val="17364A"/>
+                </a:solidFill>
+                <a:latin typeface="Aptos" pitchFamily="34" charset="0"/>
+                <a:ea typeface="Aptos" pitchFamily="34" charset="-122"/>
+                <a:cs typeface="Aptos" pitchFamily="34" charset="-120"/>
+              </a:rPr>
+              <a:t>In public health AI work, this means a Tribal Nation may have its own laws, research.</a:t>
+            </a:r>
+            <a:endParaRPr lang="en-US" sz="1380" dirty="0"/>
+          </a:p>
+          <a:p>
+            <a:r>
+              <a:rPr lang="en-US" sz="1380" dirty="0">
+                <a:solidFill>
+                  <a:srgbClr val="17364A"/>
+                </a:solidFill>
+                <a:latin typeface="Aptos" pitchFamily="34" charset="0"/>
+                <a:ea typeface="Aptos" pitchFamily="34" charset="-122"/>
+                <a:cs typeface="Aptos" pitchFamily="34" charset="-120"/>
+              </a:rPr>
+              <a:t>Public health staff should not treat Tribal input as optional stakeholder feedback when.</a:t>
+            </a:r>
+            <a:endParaRPr lang="en-US" sz="1380" dirty="0"/>
+          </a:p>
+        </p:txBody>
       </p:sp>
       <p:sp>
         <p:nvSpPr>
           <p:cNvPr id="16" name="Shape 14"/>
-          <p:cNvSpPr/>
-          <p:nvPr/>
-        </p:nvSpPr>
-        <p:spPr>
-          <a:xfrm>
-            <a:off x="9089136" y="3456432"/>
-            <a:ext cx="566928" cy="566928"/>
-          </a:xfrm>
-          <a:prstGeom prst="ellipse">
-            <a:avLst/>
-          </a:prstGeom>
-          <a:solidFill>
-            <a:srgbClr val="6A4CA3"/>
-          </a:solidFill>
-          <a:ln w="12700">
-            <a:solidFill>
-              <a:srgbClr val="6A4CA3"/>
-            </a:solidFill>
-            <a:prstDash val="solid"/>
-          </a:ln>
-        </p:spPr>
-      </p:sp>
-      <p:sp>
-        <p:nvSpPr>
-          <p:cNvPr id="17" name="Shape 15"/>
-          <p:cNvSpPr/>
-          <p:nvPr/>
-        </p:nvSpPr>
-        <p:spPr>
-          <a:xfrm>
-            <a:off x="8385048" y="3419856"/>
-            <a:ext cx="1975104" cy="0"/>
-          </a:xfrm>
-          <a:prstGeom prst="line">
-            <a:avLst/>
-          </a:prstGeom>
-          <a:noFill/>
-          <a:ln w="25400">
-            <a:solidFill>
-              <a:srgbClr val="8ABBD8"/>
-            </a:solidFill>
-            <a:prstDash val="solid"/>
-          </a:ln>
-        </p:spPr>
-      </p:sp>
-      <p:sp>
-        <p:nvSpPr>
-          <p:cNvPr id="18" name="Shape 16"/>
-          <p:cNvSpPr/>
-          <p:nvPr/>
-        </p:nvSpPr>
-        <p:spPr>
-          <a:xfrm>
-            <a:off x="8202168" y="3630168"/>
-            <a:ext cx="1170432" cy="118872"/>
-          </a:xfrm>
-          <a:prstGeom prst="line">
-            <a:avLst/>
-          </a:prstGeom>
-          <a:noFill/>
-          <a:ln w="25400">
-            <a:solidFill>
-              <a:srgbClr val="8ABBD8"/>
-            </a:solidFill>
-            <a:prstDash val="solid"/>
-          </a:ln>
-        </p:spPr>
-      </p:sp>
-      <p:sp>
-        <p:nvSpPr>
-          <p:cNvPr id="19" name="Shape 17"/>
-          <p:cNvSpPr/>
-          <p:nvPr/>
-        </p:nvSpPr>
-        <p:spPr>
-          <a:xfrm>
-            <a:off x="10543032" y="3630168"/>
-            <a:ext cx="-1170432" cy="118872"/>
-          </a:xfrm>
-          <a:prstGeom prst="line">
-            <a:avLst/>
-          </a:prstGeom>
-          <a:noFill/>
-          <a:ln w="25400">
-            <a:solidFill>
-              <a:srgbClr val="8ABBD8"/>
-            </a:solidFill>
-            <a:prstDash val="solid"/>
-          </a:ln>
-        </p:spPr>
-      </p:sp>
-      <p:sp>
-        <p:nvSpPr>
-          <p:cNvPr id="20" name="Text 18"/>
-          <p:cNvSpPr/>
-          <p:nvPr/>
-        </p:nvSpPr>
-        <p:spPr>
-          <a:xfrm>
-            <a:off x="7863840" y="4069080"/>
-            <a:ext cx="3017520" cy="164592"/>
-          </a:xfrm>
-          <a:prstGeom prst="rect">
-            <a:avLst/>
-          </a:prstGeom>
-          <a:noFill/>
-          <a:ln/>
-        </p:spPr>
-        <p:txBody>
-          <a:bodyPr wrap="square" lIns="0" tIns="0" rIns="0" bIns="0" rtlCol="0" anchor="ctr"/>
-          <a:lstStyle/>
-          <a:p>
-            <a:pPr algn="ctr" indent="0" marL="0">
-              <a:buNone/>
-            </a:pPr>
-            <a:r>
-              <a:rPr lang="en-US" sz="900" b="1" dirty="0">
-                <a:solidFill>
-                  <a:srgbClr val="003A63"/>
-                </a:solidFill>
-                <a:latin typeface="Aptos" pitchFamily="34" charset="0"/>
-                <a:ea typeface="Aptos" pitchFamily="34" charset="-122"/>
-                <a:cs typeface="Aptos" pitchFamily="34" charset="-120"/>
-              </a:rPr>
-              <a:t>Decision rights</a:t>
-            </a:r>
-            <a:endParaRPr lang="en-US" sz="900" dirty="0"/>
-          </a:p>
-        </p:txBody>
-      </p:sp>
-      <p:sp>
-        <p:nvSpPr>
-          <p:cNvPr id="21" name="Shape 19"/>
           <p:cNvSpPr/>
           <p:nvPr/>
         </p:nvSpPr>
@@ -6033,7 +5793,7 @@
       </p:sp>
       <p:sp>
         <p:nvSpPr>
-          <p:cNvPr id="22" name="Text 20"/>
+          <p:cNvPr id="17" name="Text 15"/>
           <p:cNvSpPr/>
           <p:nvPr/>
         </p:nvSpPr>
@@ -6072,7 +5832,7 @@
       </p:sp>
       <p:sp>
         <p:nvSpPr>
-          <p:cNvPr id="23" name="Text 21"/>
+          <p:cNvPr id="18" name="Text 16"/>
           <p:cNvSpPr/>
           <p:nvPr/>
         </p:nvSpPr>
@@ -6580,13 +6340,11 @@
             </a:avLst>
           </a:prstGeom>
           <a:solidFill>
-            <a:srgbClr val="FFFFFF">
-              <a:alpha val="88000"/>
-            </a:srgbClr>
+            <a:srgbClr val="FFFFFF"/>
           </a:solidFill>
           <a:ln w="12700">
             <a:solidFill>
-              <a:srgbClr val="D6E8F2"/>
+              <a:srgbClr val="B9D7E6"/>
             </a:solidFill>
             <a:prstDash val="solid"/>
           </a:ln>
@@ -6594,190 +6352,112 @@
       </p:sp>
       <p:sp>
         <p:nvSpPr>
-          <p:cNvPr id="14" name="Shape 12"/>
-          <p:cNvSpPr/>
-          <p:nvPr/>
-        </p:nvSpPr>
-        <p:spPr>
-          <a:xfrm>
-            <a:off x="7891272" y="3108960"/>
-            <a:ext cx="566928" cy="566928"/>
-          </a:xfrm>
-          <a:prstGeom prst="ellipse">
-            <a:avLst/>
-          </a:prstGeom>
-          <a:solidFill>
-            <a:srgbClr val="0068B7"/>
-          </a:solidFill>
-          <a:ln w="12700">
-            <a:solidFill>
-              <a:srgbClr val="0068B7"/>
-            </a:solidFill>
-            <a:prstDash val="solid"/>
-          </a:ln>
-        </p:spPr>
-      </p:sp>
-      <p:sp>
-        <p:nvSpPr>
-          <p:cNvPr id="15" name="Shape 13"/>
-          <p:cNvSpPr/>
-          <p:nvPr/>
-        </p:nvSpPr>
-        <p:spPr>
-          <a:xfrm>
-            <a:off x="10287000" y="3108960"/>
-            <a:ext cx="566928" cy="566928"/>
-          </a:xfrm>
-          <a:prstGeom prst="ellipse">
-            <a:avLst/>
-          </a:prstGeom>
-          <a:solidFill>
-            <a:srgbClr val="2F8A28"/>
-          </a:solidFill>
-          <a:ln w="12700">
-            <a:solidFill>
-              <a:srgbClr val="2F8A28"/>
-            </a:solidFill>
-            <a:prstDash val="solid"/>
-          </a:ln>
-        </p:spPr>
+          <p:cNvPr id="14" name="Text 12"/>
+          <p:cNvSpPr/>
+          <p:nvPr/>
+        </p:nvSpPr>
+        <p:spPr>
+          <a:xfrm>
+            <a:off x="7799832" y="2935224"/>
+            <a:ext cx="3145536" cy="256032"/>
+          </a:xfrm>
+          <a:prstGeom prst="rect">
+            <a:avLst/>
+          </a:prstGeom>
+          <a:noFill/>
+          <a:ln/>
+        </p:spPr>
+        <p:txBody>
+          <a:bodyPr wrap="square" lIns="0" tIns="0" rIns="0" bIns="0" rtlCol="0" anchor="ctr"/>
+          <a:lstStyle/>
+          <a:p>
+            <a:pPr indent="0" marL="0">
+              <a:buNone/>
+            </a:pPr>
+            <a:r>
+              <a:rPr lang="en-US" sz="1300" b="1" dirty="0">
+                <a:solidFill>
+                  <a:srgbClr val="0068B7"/>
+                </a:solidFill>
+                <a:latin typeface="Aptos" pitchFamily="34" charset="0"/>
+                <a:ea typeface="Aptos" pitchFamily="34" charset="-122"/>
+                <a:cs typeface="Aptos" pitchFamily="34" charset="-120"/>
+              </a:rPr>
+              <a:t>Concept checkpoints</a:t>
+            </a:r>
+            <a:endParaRPr lang="en-US" sz="1300" dirty="0"/>
+          </a:p>
+        </p:txBody>
+      </p:sp>
+      <p:sp>
+        <p:nvSpPr>
+          <p:cNvPr id="15" name="Text 13"/>
+          <p:cNvSpPr/>
+          <p:nvPr/>
+        </p:nvSpPr>
+        <p:spPr>
+          <a:xfrm>
+            <a:off x="7818120" y="3300984"/>
+            <a:ext cx="3090672" cy="877824"/>
+          </a:xfrm>
+          <a:prstGeom prst="rect">
+            <a:avLst/>
+          </a:prstGeom>
+          <a:noFill/>
+          <a:ln/>
+        </p:spPr>
+        <p:txBody>
+          <a:bodyPr wrap="square" lIns="254" tIns="254" rIns="254" bIns="254" rtlCol="0" anchor="t">
+            <a:normAutofit/>
+          </a:bodyPr>
+          <a:lstStyle/>
+          <a:p>
+            <a:r>
+              <a:rPr lang="en-US" sz="1380" dirty="0">
+                <a:solidFill>
+                  <a:srgbClr val="17364A"/>
+                </a:solidFill>
+                <a:latin typeface="Aptos" pitchFamily="34" charset="0"/>
+                <a:ea typeface="Aptos" pitchFamily="34" charset="-122"/>
+                <a:cs typeface="Aptos" pitchFamily="34" charset="-120"/>
+              </a:rPr>
+              <a:t>The CARE Principles for Indigenous Data Governance provide a practical framework for.</a:t>
+            </a:r>
+            <a:endParaRPr lang="en-US" sz="1380" dirty="0"/>
+          </a:p>
+          <a:p>
+            <a:r>
+              <a:rPr lang="en-US" sz="1380" dirty="0">
+                <a:solidFill>
+                  <a:srgbClr val="17364A"/>
+                </a:solidFill>
+                <a:latin typeface="Aptos" pitchFamily="34" charset="0"/>
+                <a:ea typeface="Aptos" pitchFamily="34" charset="-122"/>
+                <a:cs typeface="Aptos" pitchFamily="34" charset="-120"/>
+              </a:rPr>
+              <a:t>These principles complement FAIR data practices by adding attention to people, purpose,.</a:t>
+            </a:r>
+            <a:endParaRPr lang="en-US" sz="1380" dirty="0"/>
+          </a:p>
+          <a:p>
+            <a:r>
+              <a:rPr lang="en-US" sz="1380" dirty="0">
+                <a:solidFill>
+                  <a:srgbClr val="17364A"/>
+                </a:solidFill>
+                <a:latin typeface="Aptos" pitchFamily="34" charset="0"/>
+                <a:ea typeface="Aptos" pitchFamily="34" charset="-122"/>
+                <a:cs typeface="Aptos" pitchFamily="34" charset="-120"/>
+              </a:rPr>
+              <a:t>For AI projects, CARE can be used as a review lens for deciding whether a proposed data.</a:t>
+            </a:r>
+            <a:endParaRPr lang="en-US" sz="1380" dirty="0"/>
+          </a:p>
+        </p:txBody>
       </p:sp>
       <p:sp>
         <p:nvSpPr>
           <p:cNvPr id="16" name="Shape 14"/>
-          <p:cNvSpPr/>
-          <p:nvPr/>
-        </p:nvSpPr>
-        <p:spPr>
-          <a:xfrm>
-            <a:off x="9089136" y="3456432"/>
-            <a:ext cx="566928" cy="566928"/>
-          </a:xfrm>
-          <a:prstGeom prst="ellipse">
-            <a:avLst/>
-          </a:prstGeom>
-          <a:solidFill>
-            <a:srgbClr val="6A4CA3"/>
-          </a:solidFill>
-          <a:ln w="12700">
-            <a:solidFill>
-              <a:srgbClr val="6A4CA3"/>
-            </a:solidFill>
-            <a:prstDash val="solid"/>
-          </a:ln>
-        </p:spPr>
-      </p:sp>
-      <p:sp>
-        <p:nvSpPr>
-          <p:cNvPr id="17" name="Shape 15"/>
-          <p:cNvSpPr/>
-          <p:nvPr/>
-        </p:nvSpPr>
-        <p:spPr>
-          <a:xfrm>
-            <a:off x="8385048" y="3419856"/>
-            <a:ext cx="1975104" cy="0"/>
-          </a:xfrm>
-          <a:prstGeom prst="line">
-            <a:avLst/>
-          </a:prstGeom>
-          <a:noFill/>
-          <a:ln w="25400">
-            <a:solidFill>
-              <a:srgbClr val="8ABBD8"/>
-            </a:solidFill>
-            <a:prstDash val="solid"/>
-          </a:ln>
-        </p:spPr>
-      </p:sp>
-      <p:sp>
-        <p:nvSpPr>
-          <p:cNvPr id="18" name="Shape 16"/>
-          <p:cNvSpPr/>
-          <p:nvPr/>
-        </p:nvSpPr>
-        <p:spPr>
-          <a:xfrm>
-            <a:off x="8202168" y="3630168"/>
-            <a:ext cx="1170432" cy="118872"/>
-          </a:xfrm>
-          <a:prstGeom prst="line">
-            <a:avLst/>
-          </a:prstGeom>
-          <a:noFill/>
-          <a:ln w="25400">
-            <a:solidFill>
-              <a:srgbClr val="8ABBD8"/>
-            </a:solidFill>
-            <a:prstDash val="solid"/>
-          </a:ln>
-        </p:spPr>
-      </p:sp>
-      <p:sp>
-        <p:nvSpPr>
-          <p:cNvPr id="19" name="Shape 17"/>
-          <p:cNvSpPr/>
-          <p:nvPr/>
-        </p:nvSpPr>
-        <p:spPr>
-          <a:xfrm>
-            <a:off x="10543032" y="3630168"/>
-            <a:ext cx="-1170432" cy="118872"/>
-          </a:xfrm>
-          <a:prstGeom prst="line">
-            <a:avLst/>
-          </a:prstGeom>
-          <a:noFill/>
-          <a:ln w="25400">
-            <a:solidFill>
-              <a:srgbClr val="8ABBD8"/>
-            </a:solidFill>
-            <a:prstDash val="solid"/>
-          </a:ln>
-        </p:spPr>
-      </p:sp>
-      <p:sp>
-        <p:nvSpPr>
-          <p:cNvPr id="20" name="Text 18"/>
-          <p:cNvSpPr/>
-          <p:nvPr/>
-        </p:nvSpPr>
-        <p:spPr>
-          <a:xfrm>
-            <a:off x="7863840" y="4069080"/>
-            <a:ext cx="3017520" cy="164592"/>
-          </a:xfrm>
-          <a:prstGeom prst="rect">
-            <a:avLst/>
-          </a:prstGeom>
-          <a:noFill/>
-          <a:ln/>
-        </p:spPr>
-        <p:txBody>
-          <a:bodyPr wrap="square" lIns="0" tIns="0" rIns="0" bIns="0" rtlCol="0" anchor="ctr"/>
-          <a:lstStyle/>
-          <a:p>
-            <a:pPr algn="ctr" indent="0" marL="0">
-              <a:buNone/>
-            </a:pPr>
-            <a:r>
-              <a:rPr lang="en-US" sz="900" b="1" dirty="0">
-                <a:solidFill>
-                  <a:srgbClr val="003A63"/>
-                </a:solidFill>
-                <a:latin typeface="Aptos" pitchFamily="34" charset="0"/>
-                <a:ea typeface="Aptos" pitchFamily="34" charset="-122"/>
-                <a:cs typeface="Aptos" pitchFamily="34" charset="-120"/>
-              </a:rPr>
-              <a:t>Decision rights</a:t>
-            </a:r>
-            <a:endParaRPr lang="en-US" sz="900" dirty="0"/>
-          </a:p>
-        </p:txBody>
-      </p:sp>
-      <p:sp>
-        <p:nvSpPr>
-          <p:cNvPr id="21" name="Shape 19"/>
           <p:cNvSpPr/>
           <p:nvPr/>
         </p:nvSpPr>
@@ -6804,7 +6484,7 @@
       </p:sp>
       <p:sp>
         <p:nvSpPr>
-          <p:cNvPr id="22" name="Text 20"/>
+          <p:cNvPr id="17" name="Text 15"/>
           <p:cNvSpPr/>
           <p:nvPr/>
         </p:nvSpPr>
@@ -6843,7 +6523,7 @@
       </p:sp>
       <p:sp>
         <p:nvSpPr>
-          <p:cNvPr id="23" name="Text 21"/>
+          <p:cNvPr id="18" name="Text 16"/>
           <p:cNvSpPr/>
           <p:nvPr/>
         </p:nvSpPr>
@@ -7351,13 +7031,11 @@
             </a:avLst>
           </a:prstGeom>
           <a:solidFill>
-            <a:srgbClr val="FFFFFF">
-              <a:alpha val="88000"/>
-            </a:srgbClr>
+            <a:srgbClr val="FFFFFF"/>
           </a:solidFill>
           <a:ln w="12700">
             <a:solidFill>
-              <a:srgbClr val="D6E8F2"/>
+              <a:srgbClr val="B9D7E6"/>
             </a:solidFill>
             <a:prstDash val="solid"/>
           </a:ln>
@@ -7365,190 +7043,112 @@
       </p:sp>
       <p:sp>
         <p:nvSpPr>
-          <p:cNvPr id="14" name="Shape 12"/>
-          <p:cNvSpPr/>
-          <p:nvPr/>
-        </p:nvSpPr>
-        <p:spPr>
-          <a:xfrm>
-            <a:off x="7891272" y="3108960"/>
-            <a:ext cx="566928" cy="566928"/>
-          </a:xfrm>
-          <a:prstGeom prst="ellipse">
-            <a:avLst/>
-          </a:prstGeom>
-          <a:solidFill>
-            <a:srgbClr val="0068B7"/>
-          </a:solidFill>
-          <a:ln w="12700">
-            <a:solidFill>
-              <a:srgbClr val="0068B7"/>
-            </a:solidFill>
-            <a:prstDash val="solid"/>
-          </a:ln>
-        </p:spPr>
-      </p:sp>
-      <p:sp>
-        <p:nvSpPr>
-          <p:cNvPr id="15" name="Shape 13"/>
-          <p:cNvSpPr/>
-          <p:nvPr/>
-        </p:nvSpPr>
-        <p:spPr>
-          <a:xfrm>
-            <a:off x="10287000" y="3108960"/>
-            <a:ext cx="566928" cy="566928"/>
-          </a:xfrm>
-          <a:prstGeom prst="ellipse">
-            <a:avLst/>
-          </a:prstGeom>
-          <a:solidFill>
-            <a:srgbClr val="2F8A28"/>
-          </a:solidFill>
-          <a:ln w="12700">
-            <a:solidFill>
-              <a:srgbClr val="2F8A28"/>
-            </a:solidFill>
-            <a:prstDash val="solid"/>
-          </a:ln>
-        </p:spPr>
+          <p:cNvPr id="14" name="Text 12"/>
+          <p:cNvSpPr/>
+          <p:nvPr/>
+        </p:nvSpPr>
+        <p:spPr>
+          <a:xfrm>
+            <a:off x="7799832" y="2935224"/>
+            <a:ext cx="3145536" cy="256032"/>
+          </a:xfrm>
+          <a:prstGeom prst="rect">
+            <a:avLst/>
+          </a:prstGeom>
+          <a:noFill/>
+          <a:ln/>
+        </p:spPr>
+        <p:txBody>
+          <a:bodyPr wrap="square" lIns="0" tIns="0" rIns="0" bIns="0" rtlCol="0" anchor="ctr"/>
+          <a:lstStyle/>
+          <a:p>
+            <a:pPr indent="0" marL="0">
+              <a:buNone/>
+            </a:pPr>
+            <a:r>
+              <a:rPr lang="en-US" sz="1300" b="1" dirty="0">
+                <a:solidFill>
+                  <a:srgbClr val="0068B7"/>
+                </a:solidFill>
+                <a:latin typeface="Aptos" pitchFamily="34" charset="0"/>
+                <a:ea typeface="Aptos" pitchFamily="34" charset="-122"/>
+                <a:cs typeface="Aptos" pitchFamily="34" charset="-120"/>
+              </a:rPr>
+              <a:t>Concept checkpoints</a:t>
+            </a:r>
+            <a:endParaRPr lang="en-US" sz="1300" dirty="0"/>
+          </a:p>
+        </p:txBody>
+      </p:sp>
+      <p:sp>
+        <p:nvSpPr>
+          <p:cNvPr id="15" name="Text 13"/>
+          <p:cNvSpPr/>
+          <p:nvPr/>
+        </p:nvSpPr>
+        <p:spPr>
+          <a:xfrm>
+            <a:off x="7818120" y="3300984"/>
+            <a:ext cx="3090672" cy="877824"/>
+          </a:xfrm>
+          <a:prstGeom prst="rect">
+            <a:avLst/>
+          </a:prstGeom>
+          <a:noFill/>
+          <a:ln/>
+        </p:spPr>
+        <p:txBody>
+          <a:bodyPr wrap="square" lIns="254" tIns="254" rIns="254" bIns="254" rtlCol="0" anchor="t">
+            <a:normAutofit/>
+          </a:bodyPr>
+          <a:lstStyle/>
+          <a:p>
+            <a:r>
+              <a:rPr lang="en-US" sz="1380" dirty="0">
+                <a:solidFill>
+                  <a:srgbClr val="17364A"/>
+                </a:solidFill>
+                <a:latin typeface="Aptos" pitchFamily="34" charset="0"/>
+                <a:ea typeface="Aptos" pitchFamily="34" charset="-122"/>
+                <a:cs typeface="Aptos" pitchFamily="34" charset="-120"/>
+              </a:rPr>
+              <a:t>A state health department wants to develop an AI-assisted analytics workflow to summarize.</a:t>
+            </a:r>
+            <a:endParaRPr lang="en-US" sz="1380" dirty="0"/>
+          </a:p>
+          <a:p>
+            <a:r>
+              <a:rPr lang="en-US" sz="1380" dirty="0">
+                <a:solidFill>
+                  <a:srgbClr val="17364A"/>
+                </a:solidFill>
+                <a:latin typeface="Aptos" pitchFamily="34" charset="0"/>
+                <a:ea typeface="Aptos" pitchFamily="34" charset="-122"/>
+                <a:cs typeface="Aptos" pitchFamily="34" charset="-120"/>
+              </a:rPr>
+              <a:t>The initial technical design includes free-text chief complaint data, facility location,.</a:t>
+            </a:r>
+            <a:endParaRPr lang="en-US" sz="1380" dirty="0"/>
+          </a:p>
+          <a:p>
+            <a:r>
+              <a:rPr lang="en-US" sz="1380" dirty="0">
+                <a:solidFill>
+                  <a:srgbClr val="17364A"/>
+                </a:solidFill>
+                <a:latin typeface="Aptos" pitchFamily="34" charset="0"/>
+                <a:ea typeface="Aptos" pitchFamily="34" charset="-122"/>
+                <a:cs typeface="Aptos" pitchFamily="34" charset="-120"/>
+              </a:rPr>
+              <a:t>Several counties include Tribal lands, and some small-area summaries could indirectly.</a:t>
+            </a:r>
+            <a:endParaRPr lang="en-US" sz="1380" dirty="0"/>
+          </a:p>
+        </p:txBody>
       </p:sp>
       <p:sp>
         <p:nvSpPr>
           <p:cNvPr id="16" name="Shape 14"/>
-          <p:cNvSpPr/>
-          <p:nvPr/>
-        </p:nvSpPr>
-        <p:spPr>
-          <a:xfrm>
-            <a:off x="9089136" y="3456432"/>
-            <a:ext cx="566928" cy="566928"/>
-          </a:xfrm>
-          <a:prstGeom prst="ellipse">
-            <a:avLst/>
-          </a:prstGeom>
-          <a:solidFill>
-            <a:srgbClr val="6A4CA3"/>
-          </a:solidFill>
-          <a:ln w="12700">
-            <a:solidFill>
-              <a:srgbClr val="6A4CA3"/>
-            </a:solidFill>
-            <a:prstDash val="solid"/>
-          </a:ln>
-        </p:spPr>
-      </p:sp>
-      <p:sp>
-        <p:nvSpPr>
-          <p:cNvPr id="17" name="Shape 15"/>
-          <p:cNvSpPr/>
-          <p:nvPr/>
-        </p:nvSpPr>
-        <p:spPr>
-          <a:xfrm>
-            <a:off x="8385048" y="3419856"/>
-            <a:ext cx="1975104" cy="0"/>
-          </a:xfrm>
-          <a:prstGeom prst="line">
-            <a:avLst/>
-          </a:prstGeom>
-          <a:noFill/>
-          <a:ln w="25400">
-            <a:solidFill>
-              <a:srgbClr val="8ABBD8"/>
-            </a:solidFill>
-            <a:prstDash val="solid"/>
-          </a:ln>
-        </p:spPr>
-      </p:sp>
-      <p:sp>
-        <p:nvSpPr>
-          <p:cNvPr id="18" name="Shape 16"/>
-          <p:cNvSpPr/>
-          <p:nvPr/>
-        </p:nvSpPr>
-        <p:spPr>
-          <a:xfrm>
-            <a:off x="8202168" y="3630168"/>
-            <a:ext cx="1170432" cy="118872"/>
-          </a:xfrm>
-          <a:prstGeom prst="line">
-            <a:avLst/>
-          </a:prstGeom>
-          <a:noFill/>
-          <a:ln w="25400">
-            <a:solidFill>
-              <a:srgbClr val="8ABBD8"/>
-            </a:solidFill>
-            <a:prstDash val="solid"/>
-          </a:ln>
-        </p:spPr>
-      </p:sp>
-      <p:sp>
-        <p:nvSpPr>
-          <p:cNvPr id="19" name="Shape 17"/>
-          <p:cNvSpPr/>
-          <p:nvPr/>
-        </p:nvSpPr>
-        <p:spPr>
-          <a:xfrm>
-            <a:off x="10543032" y="3630168"/>
-            <a:ext cx="-1170432" cy="118872"/>
-          </a:xfrm>
-          <a:prstGeom prst="line">
-            <a:avLst/>
-          </a:prstGeom>
-          <a:noFill/>
-          <a:ln w="25400">
-            <a:solidFill>
-              <a:srgbClr val="8ABBD8"/>
-            </a:solidFill>
-            <a:prstDash val="solid"/>
-          </a:ln>
-        </p:spPr>
-      </p:sp>
-      <p:sp>
-        <p:nvSpPr>
-          <p:cNvPr id="20" name="Text 18"/>
-          <p:cNvSpPr/>
-          <p:nvPr/>
-        </p:nvSpPr>
-        <p:spPr>
-          <a:xfrm>
-            <a:off x="7863840" y="4069080"/>
-            <a:ext cx="3017520" cy="164592"/>
-          </a:xfrm>
-          <a:prstGeom prst="rect">
-            <a:avLst/>
-          </a:prstGeom>
-          <a:noFill/>
-          <a:ln/>
-        </p:spPr>
-        <p:txBody>
-          <a:bodyPr wrap="square" lIns="0" tIns="0" rIns="0" bIns="0" rtlCol="0" anchor="ctr"/>
-          <a:lstStyle/>
-          <a:p>
-            <a:pPr algn="ctr" indent="0" marL="0">
-              <a:buNone/>
-            </a:pPr>
-            <a:r>
-              <a:rPr lang="en-US" sz="900" b="1" dirty="0">
-                <a:solidFill>
-                  <a:srgbClr val="003A63"/>
-                </a:solidFill>
-                <a:latin typeface="Aptos" pitchFamily="34" charset="0"/>
-                <a:ea typeface="Aptos" pitchFamily="34" charset="-122"/>
-                <a:cs typeface="Aptos" pitchFamily="34" charset="-120"/>
-              </a:rPr>
-              <a:t>Decision rights</a:t>
-            </a:r>
-            <a:endParaRPr lang="en-US" sz="900" dirty="0"/>
-          </a:p>
-        </p:txBody>
-      </p:sp>
-      <p:sp>
-        <p:nvSpPr>
-          <p:cNvPr id="21" name="Shape 19"/>
           <p:cNvSpPr/>
           <p:nvPr/>
         </p:nvSpPr>
@@ -7575,7 +7175,7 @@
       </p:sp>
       <p:sp>
         <p:nvSpPr>
-          <p:cNvPr id="22" name="Text 20"/>
+          <p:cNvPr id="17" name="Text 15"/>
           <p:cNvSpPr/>
           <p:nvPr/>
         </p:nvSpPr>
@@ -7614,7 +7214,7 @@
       </p:sp>
       <p:sp>
         <p:nvSpPr>
-          <p:cNvPr id="23" name="Text 21"/>
+          <p:cNvPr id="18" name="Text 16"/>
           <p:cNvSpPr/>
           <p:nvPr/>
         </p:nvSpPr>
@@ -8122,13 +7722,11 @@
             </a:avLst>
           </a:prstGeom>
           <a:solidFill>
-            <a:srgbClr val="FFFFFF">
-              <a:alpha val="88000"/>
-            </a:srgbClr>
+            <a:srgbClr val="FFFFFF"/>
           </a:solidFill>
           <a:ln w="12700">
             <a:solidFill>
-              <a:srgbClr val="D6E8F2"/>
+              <a:srgbClr val="B9D7E6"/>
             </a:solidFill>
             <a:prstDash val="solid"/>
           </a:ln>
@@ -8136,190 +7734,112 @@
       </p:sp>
       <p:sp>
         <p:nvSpPr>
-          <p:cNvPr id="14" name="Shape 12"/>
-          <p:cNvSpPr/>
-          <p:nvPr/>
-        </p:nvSpPr>
-        <p:spPr>
-          <a:xfrm>
-            <a:off x="7891272" y="3108960"/>
-            <a:ext cx="566928" cy="566928"/>
-          </a:xfrm>
-          <a:prstGeom prst="ellipse">
-            <a:avLst/>
-          </a:prstGeom>
-          <a:solidFill>
-            <a:srgbClr val="0068B7"/>
-          </a:solidFill>
-          <a:ln w="12700">
-            <a:solidFill>
-              <a:srgbClr val="0068B7"/>
-            </a:solidFill>
-            <a:prstDash val="solid"/>
-          </a:ln>
-        </p:spPr>
-      </p:sp>
-      <p:sp>
-        <p:nvSpPr>
-          <p:cNvPr id="15" name="Shape 13"/>
-          <p:cNvSpPr/>
-          <p:nvPr/>
-        </p:nvSpPr>
-        <p:spPr>
-          <a:xfrm>
-            <a:off x="10287000" y="3108960"/>
-            <a:ext cx="566928" cy="566928"/>
-          </a:xfrm>
-          <a:prstGeom prst="ellipse">
-            <a:avLst/>
-          </a:prstGeom>
-          <a:solidFill>
-            <a:srgbClr val="2F8A28"/>
-          </a:solidFill>
-          <a:ln w="12700">
-            <a:solidFill>
-              <a:srgbClr val="2F8A28"/>
-            </a:solidFill>
-            <a:prstDash val="solid"/>
-          </a:ln>
-        </p:spPr>
+          <p:cNvPr id="14" name="Text 12"/>
+          <p:cNvSpPr/>
+          <p:nvPr/>
+        </p:nvSpPr>
+        <p:spPr>
+          <a:xfrm>
+            <a:off x="7799832" y="2935224"/>
+            <a:ext cx="3145536" cy="256032"/>
+          </a:xfrm>
+          <a:prstGeom prst="rect">
+            <a:avLst/>
+          </a:prstGeom>
+          <a:noFill/>
+          <a:ln/>
+        </p:spPr>
+        <p:txBody>
+          <a:bodyPr wrap="square" lIns="0" tIns="0" rIns="0" bIns="0" rtlCol="0" anchor="ctr"/>
+          <a:lstStyle/>
+          <a:p>
+            <a:pPr indent="0" marL="0">
+              <a:buNone/>
+            </a:pPr>
+            <a:r>
+              <a:rPr lang="en-US" sz="1300" b="1" dirty="0">
+                <a:solidFill>
+                  <a:srgbClr val="0068B7"/>
+                </a:solidFill>
+                <a:latin typeface="Aptos" pitchFamily="34" charset="0"/>
+                <a:ea typeface="Aptos" pitchFamily="34" charset="-122"/>
+                <a:cs typeface="Aptos" pitchFamily="34" charset="-120"/>
+              </a:rPr>
+              <a:t>Concept checkpoints</a:t>
+            </a:r>
+            <a:endParaRPr lang="en-US" sz="1300" dirty="0"/>
+          </a:p>
+        </p:txBody>
+      </p:sp>
+      <p:sp>
+        <p:nvSpPr>
+          <p:cNvPr id="15" name="Text 13"/>
+          <p:cNvSpPr/>
+          <p:nvPr/>
+        </p:nvSpPr>
+        <p:spPr>
+          <a:xfrm>
+            <a:off x="7818120" y="3300984"/>
+            <a:ext cx="3090672" cy="877824"/>
+          </a:xfrm>
+          <a:prstGeom prst="rect">
+            <a:avLst/>
+          </a:prstGeom>
+          <a:noFill/>
+          <a:ln/>
+        </p:spPr>
+        <p:txBody>
+          <a:bodyPr wrap="square" lIns="254" tIns="254" rIns="254" bIns="254" rtlCol="0" anchor="t">
+            <a:normAutofit/>
+          </a:bodyPr>
+          <a:lstStyle/>
+          <a:p>
+            <a:r>
+              <a:rPr lang="en-US" sz="1380" dirty="0">
+                <a:solidFill>
+                  <a:srgbClr val="17364A"/>
+                </a:solidFill>
+                <a:latin typeface="Aptos" pitchFamily="34" charset="0"/>
+                <a:ea typeface="Aptos" pitchFamily="34" charset="-122"/>
+                <a:cs typeface="Aptos" pitchFamily="34" charset="-120"/>
+              </a:rPr>
+              <a:t>AI project teams should begin by asking whether the proposed use involves Tribal Nations,.</a:t>
+            </a:r>
+            <a:endParaRPr lang="en-US" sz="1380" dirty="0"/>
+          </a:p>
+          <a:p>
+            <a:r>
+              <a:rPr lang="en-US" sz="1380" dirty="0">
+                <a:solidFill>
+                  <a:srgbClr val="17364A"/>
+                </a:solidFill>
+                <a:latin typeface="Aptos" pitchFamily="34" charset="0"/>
+                <a:ea typeface="Aptos" pitchFamily="34" charset="-122"/>
+                <a:cs typeface="Aptos" pitchFamily="34" charset="-120"/>
+              </a:rPr>
+              <a:t>The answer may not be obvious because Tribal relevance can appear through geography,.</a:t>
+            </a:r>
+            <a:endParaRPr lang="en-US" sz="1380" dirty="0"/>
+          </a:p>
+          <a:p>
+            <a:r>
+              <a:rPr lang="en-US" sz="1380" dirty="0">
+                <a:solidFill>
+                  <a:srgbClr val="17364A"/>
+                </a:solidFill>
+                <a:latin typeface="Aptos" pitchFamily="34" charset="0"/>
+                <a:ea typeface="Aptos" pitchFamily="34" charset="-122"/>
+                <a:cs typeface="Aptos" pitchFamily="34" charset="-120"/>
+              </a:rPr>
+              <a:t>If the answer is uncertain, the team should treat the project as requiring additional.</a:t>
+            </a:r>
+            <a:endParaRPr lang="en-US" sz="1380" dirty="0"/>
+          </a:p>
+        </p:txBody>
       </p:sp>
       <p:sp>
         <p:nvSpPr>
           <p:cNvPr id="16" name="Shape 14"/>
-          <p:cNvSpPr/>
-          <p:nvPr/>
-        </p:nvSpPr>
-        <p:spPr>
-          <a:xfrm>
-            <a:off x="9089136" y="3456432"/>
-            <a:ext cx="566928" cy="566928"/>
-          </a:xfrm>
-          <a:prstGeom prst="ellipse">
-            <a:avLst/>
-          </a:prstGeom>
-          <a:solidFill>
-            <a:srgbClr val="6A4CA3"/>
-          </a:solidFill>
-          <a:ln w="12700">
-            <a:solidFill>
-              <a:srgbClr val="6A4CA3"/>
-            </a:solidFill>
-            <a:prstDash val="solid"/>
-          </a:ln>
-        </p:spPr>
-      </p:sp>
-      <p:sp>
-        <p:nvSpPr>
-          <p:cNvPr id="17" name="Shape 15"/>
-          <p:cNvSpPr/>
-          <p:nvPr/>
-        </p:nvSpPr>
-        <p:spPr>
-          <a:xfrm>
-            <a:off x="8385048" y="3419856"/>
-            <a:ext cx="1975104" cy="0"/>
-          </a:xfrm>
-          <a:prstGeom prst="line">
-            <a:avLst/>
-          </a:prstGeom>
-          <a:noFill/>
-          <a:ln w="25400">
-            <a:solidFill>
-              <a:srgbClr val="8ABBD8"/>
-            </a:solidFill>
-            <a:prstDash val="solid"/>
-          </a:ln>
-        </p:spPr>
-      </p:sp>
-      <p:sp>
-        <p:nvSpPr>
-          <p:cNvPr id="18" name="Shape 16"/>
-          <p:cNvSpPr/>
-          <p:nvPr/>
-        </p:nvSpPr>
-        <p:spPr>
-          <a:xfrm>
-            <a:off x="8202168" y="3630168"/>
-            <a:ext cx="1170432" cy="118872"/>
-          </a:xfrm>
-          <a:prstGeom prst="line">
-            <a:avLst/>
-          </a:prstGeom>
-          <a:noFill/>
-          <a:ln w="25400">
-            <a:solidFill>
-              <a:srgbClr val="8ABBD8"/>
-            </a:solidFill>
-            <a:prstDash val="solid"/>
-          </a:ln>
-        </p:spPr>
-      </p:sp>
-      <p:sp>
-        <p:nvSpPr>
-          <p:cNvPr id="19" name="Shape 17"/>
-          <p:cNvSpPr/>
-          <p:nvPr/>
-        </p:nvSpPr>
-        <p:spPr>
-          <a:xfrm>
-            <a:off x="10543032" y="3630168"/>
-            <a:ext cx="-1170432" cy="118872"/>
-          </a:xfrm>
-          <a:prstGeom prst="line">
-            <a:avLst/>
-          </a:prstGeom>
-          <a:noFill/>
-          <a:ln w="25400">
-            <a:solidFill>
-              <a:srgbClr val="8ABBD8"/>
-            </a:solidFill>
-            <a:prstDash val="solid"/>
-          </a:ln>
-        </p:spPr>
-      </p:sp>
-      <p:sp>
-        <p:nvSpPr>
-          <p:cNvPr id="20" name="Text 18"/>
-          <p:cNvSpPr/>
-          <p:nvPr/>
-        </p:nvSpPr>
-        <p:spPr>
-          <a:xfrm>
-            <a:off x="7863840" y="4069080"/>
-            <a:ext cx="3017520" cy="164592"/>
-          </a:xfrm>
-          <a:prstGeom prst="rect">
-            <a:avLst/>
-          </a:prstGeom>
-          <a:noFill/>
-          <a:ln/>
-        </p:spPr>
-        <p:txBody>
-          <a:bodyPr wrap="square" lIns="0" tIns="0" rIns="0" bIns="0" rtlCol="0" anchor="ctr"/>
-          <a:lstStyle/>
-          <a:p>
-            <a:pPr algn="ctr" indent="0" marL="0">
-              <a:buNone/>
-            </a:pPr>
-            <a:r>
-              <a:rPr lang="en-US" sz="900" b="1" dirty="0">
-                <a:solidFill>
-                  <a:srgbClr val="003A63"/>
-                </a:solidFill>
-                <a:latin typeface="Aptos" pitchFamily="34" charset="0"/>
-                <a:ea typeface="Aptos" pitchFamily="34" charset="-122"/>
-                <a:cs typeface="Aptos" pitchFamily="34" charset="-120"/>
-              </a:rPr>
-              <a:t>Decision rights</a:t>
-            </a:r>
-            <a:endParaRPr lang="en-US" sz="900" dirty="0"/>
-          </a:p>
-        </p:txBody>
-      </p:sp>
-      <p:sp>
-        <p:nvSpPr>
-          <p:cNvPr id="21" name="Shape 19"/>
           <p:cNvSpPr/>
           <p:nvPr/>
         </p:nvSpPr>
@@ -8346,7 +7866,7 @@
       </p:sp>
       <p:sp>
         <p:nvSpPr>
-          <p:cNvPr id="22" name="Text 20"/>
+          <p:cNvPr id="17" name="Text 15"/>
           <p:cNvSpPr/>
           <p:nvPr/>
         </p:nvSpPr>
@@ -8385,7 +7905,7 @@
       </p:sp>
       <p:sp>
         <p:nvSpPr>
-          <p:cNvPr id="23" name="Text 21"/>
+          <p:cNvPr id="18" name="Text 16"/>
           <p:cNvSpPr/>
           <p:nvPr/>
         </p:nvSpPr>
@@ -8893,13 +8413,11 @@
             </a:avLst>
           </a:prstGeom>
           <a:solidFill>
-            <a:srgbClr val="FFFFFF">
-              <a:alpha val="88000"/>
-            </a:srgbClr>
+            <a:srgbClr val="FFFFFF"/>
           </a:solidFill>
           <a:ln w="12700">
             <a:solidFill>
-              <a:srgbClr val="D6E8F2"/>
+              <a:srgbClr val="B9D7E6"/>
             </a:solidFill>
             <a:prstDash val="solid"/>
           </a:ln>
@@ -8907,190 +8425,112 @@
       </p:sp>
       <p:sp>
         <p:nvSpPr>
-          <p:cNvPr id="14" name="Shape 12"/>
-          <p:cNvSpPr/>
-          <p:nvPr/>
-        </p:nvSpPr>
-        <p:spPr>
-          <a:xfrm>
-            <a:off x="7891272" y="3108960"/>
-            <a:ext cx="566928" cy="566928"/>
-          </a:xfrm>
-          <a:prstGeom prst="ellipse">
-            <a:avLst/>
-          </a:prstGeom>
-          <a:solidFill>
-            <a:srgbClr val="0068B7"/>
-          </a:solidFill>
-          <a:ln w="12700">
-            <a:solidFill>
-              <a:srgbClr val="0068B7"/>
-            </a:solidFill>
-            <a:prstDash val="solid"/>
-          </a:ln>
-        </p:spPr>
-      </p:sp>
-      <p:sp>
-        <p:nvSpPr>
-          <p:cNvPr id="15" name="Shape 13"/>
-          <p:cNvSpPr/>
-          <p:nvPr/>
-        </p:nvSpPr>
-        <p:spPr>
-          <a:xfrm>
-            <a:off x="10287000" y="3108960"/>
-            <a:ext cx="566928" cy="566928"/>
-          </a:xfrm>
-          <a:prstGeom prst="ellipse">
-            <a:avLst/>
-          </a:prstGeom>
-          <a:solidFill>
-            <a:srgbClr val="2F8A28"/>
-          </a:solidFill>
-          <a:ln w="12700">
-            <a:solidFill>
-              <a:srgbClr val="2F8A28"/>
-            </a:solidFill>
-            <a:prstDash val="solid"/>
-          </a:ln>
-        </p:spPr>
+          <p:cNvPr id="14" name="Text 12"/>
+          <p:cNvSpPr/>
+          <p:nvPr/>
+        </p:nvSpPr>
+        <p:spPr>
+          <a:xfrm>
+            <a:off x="7799832" y="2935224"/>
+            <a:ext cx="3145536" cy="256032"/>
+          </a:xfrm>
+          <a:prstGeom prst="rect">
+            <a:avLst/>
+          </a:prstGeom>
+          <a:noFill/>
+          <a:ln/>
+        </p:spPr>
+        <p:txBody>
+          <a:bodyPr wrap="square" lIns="0" tIns="0" rIns="0" bIns="0" rtlCol="0" anchor="ctr"/>
+          <a:lstStyle/>
+          <a:p>
+            <a:pPr indent="0" marL="0">
+              <a:buNone/>
+            </a:pPr>
+            <a:r>
+              <a:rPr lang="en-US" sz="1300" b="1" dirty="0">
+                <a:solidFill>
+                  <a:srgbClr val="0068B7"/>
+                </a:solidFill>
+                <a:latin typeface="Aptos" pitchFamily="34" charset="0"/>
+                <a:ea typeface="Aptos" pitchFamily="34" charset="-122"/>
+                <a:cs typeface="Aptos" pitchFamily="34" charset="-120"/>
+              </a:rPr>
+              <a:t>Concept checkpoints</a:t>
+            </a:r>
+            <a:endParaRPr lang="en-US" sz="1300" dirty="0"/>
+          </a:p>
+        </p:txBody>
+      </p:sp>
+      <p:sp>
+        <p:nvSpPr>
+          <p:cNvPr id="15" name="Text 13"/>
+          <p:cNvSpPr/>
+          <p:nvPr/>
+        </p:nvSpPr>
+        <p:spPr>
+          <a:xfrm>
+            <a:off x="7818120" y="3300984"/>
+            <a:ext cx="3090672" cy="877824"/>
+          </a:xfrm>
+          <a:prstGeom prst="rect">
+            <a:avLst/>
+          </a:prstGeom>
+          <a:noFill/>
+          <a:ln/>
+        </p:spPr>
+        <p:txBody>
+          <a:bodyPr wrap="square" lIns="254" tIns="254" rIns="254" bIns="254" rtlCol="0" anchor="t">
+            <a:normAutofit/>
+          </a:bodyPr>
+          <a:lstStyle/>
+          <a:p>
+            <a:r>
+              <a:rPr lang="en-US" sz="1380" dirty="0">
+                <a:solidFill>
+                  <a:srgbClr val="17364A"/>
+                </a:solidFill>
+                <a:latin typeface="Aptos" pitchFamily="34" charset="0"/>
+                <a:ea typeface="Aptos" pitchFamily="34" charset="-122"/>
+                <a:cs typeface="Aptos" pitchFamily="34" charset="-120"/>
+              </a:rPr>
+              <a:t>AI teams should not infer Tribal affiliation from residential location, ZIP code, facility.</a:t>
+            </a:r>
+            <a:endParaRPr lang="en-US" sz="1380" dirty="0"/>
+          </a:p>
+          <a:p>
+            <a:r>
+              <a:rPr lang="en-US" sz="1380" dirty="0">
+                <a:solidFill>
+                  <a:srgbClr val="17364A"/>
+                </a:solidFill>
+                <a:latin typeface="Aptos" pitchFamily="34" charset="0"/>
+                <a:ea typeface="Aptos" pitchFamily="34" charset="-122"/>
+                <a:cs typeface="Aptos" pitchFamily="34" charset="-120"/>
+              </a:rPr>
+              <a:t>It can also undermine Tribal authority if outside organizations create AI-derived labels.</a:t>
+            </a:r>
+            <a:endParaRPr lang="en-US" sz="1380" dirty="0"/>
+          </a:p>
+          <a:p>
+            <a:r>
+              <a:rPr lang="en-US" sz="1380" dirty="0">
+                <a:solidFill>
+                  <a:srgbClr val="17364A"/>
+                </a:solidFill>
+                <a:latin typeface="Aptos" pitchFamily="34" charset="0"/>
+                <a:ea typeface="Aptos" pitchFamily="34" charset="-122"/>
+                <a:cs typeface="Aptos" pitchFamily="34" charset="-120"/>
+              </a:rPr>
+              <a:t>If affiliation or Tribal relevance is needed, the project should address how that.</a:t>
+            </a:r>
+            <a:endParaRPr lang="en-US" sz="1380" dirty="0"/>
+          </a:p>
+        </p:txBody>
       </p:sp>
       <p:sp>
         <p:nvSpPr>
           <p:cNvPr id="16" name="Shape 14"/>
-          <p:cNvSpPr/>
-          <p:nvPr/>
-        </p:nvSpPr>
-        <p:spPr>
-          <a:xfrm>
-            <a:off x="9089136" y="3456432"/>
-            <a:ext cx="566928" cy="566928"/>
-          </a:xfrm>
-          <a:prstGeom prst="ellipse">
-            <a:avLst/>
-          </a:prstGeom>
-          <a:solidFill>
-            <a:srgbClr val="6A4CA3"/>
-          </a:solidFill>
-          <a:ln w="12700">
-            <a:solidFill>
-              <a:srgbClr val="6A4CA3"/>
-            </a:solidFill>
-            <a:prstDash val="solid"/>
-          </a:ln>
-        </p:spPr>
-      </p:sp>
-      <p:sp>
-        <p:nvSpPr>
-          <p:cNvPr id="17" name="Shape 15"/>
-          <p:cNvSpPr/>
-          <p:nvPr/>
-        </p:nvSpPr>
-        <p:spPr>
-          <a:xfrm>
-            <a:off x="8385048" y="3419856"/>
-            <a:ext cx="1975104" cy="0"/>
-          </a:xfrm>
-          <a:prstGeom prst="line">
-            <a:avLst/>
-          </a:prstGeom>
-          <a:noFill/>
-          <a:ln w="25400">
-            <a:solidFill>
-              <a:srgbClr val="8ABBD8"/>
-            </a:solidFill>
-            <a:prstDash val="solid"/>
-          </a:ln>
-        </p:spPr>
-      </p:sp>
-      <p:sp>
-        <p:nvSpPr>
-          <p:cNvPr id="18" name="Shape 16"/>
-          <p:cNvSpPr/>
-          <p:nvPr/>
-        </p:nvSpPr>
-        <p:spPr>
-          <a:xfrm>
-            <a:off x="8202168" y="3630168"/>
-            <a:ext cx="1170432" cy="118872"/>
-          </a:xfrm>
-          <a:prstGeom prst="line">
-            <a:avLst/>
-          </a:prstGeom>
-          <a:noFill/>
-          <a:ln w="25400">
-            <a:solidFill>
-              <a:srgbClr val="8ABBD8"/>
-            </a:solidFill>
-            <a:prstDash val="solid"/>
-          </a:ln>
-        </p:spPr>
-      </p:sp>
-      <p:sp>
-        <p:nvSpPr>
-          <p:cNvPr id="19" name="Shape 17"/>
-          <p:cNvSpPr/>
-          <p:nvPr/>
-        </p:nvSpPr>
-        <p:spPr>
-          <a:xfrm>
-            <a:off x="10543032" y="3630168"/>
-            <a:ext cx="-1170432" cy="118872"/>
-          </a:xfrm>
-          <a:prstGeom prst="line">
-            <a:avLst/>
-          </a:prstGeom>
-          <a:noFill/>
-          <a:ln w="25400">
-            <a:solidFill>
-              <a:srgbClr val="8ABBD8"/>
-            </a:solidFill>
-            <a:prstDash val="solid"/>
-          </a:ln>
-        </p:spPr>
-      </p:sp>
-      <p:sp>
-        <p:nvSpPr>
-          <p:cNvPr id="20" name="Text 18"/>
-          <p:cNvSpPr/>
-          <p:nvPr/>
-        </p:nvSpPr>
-        <p:spPr>
-          <a:xfrm>
-            <a:off x="7863840" y="4069080"/>
-            <a:ext cx="3017520" cy="164592"/>
-          </a:xfrm>
-          <a:prstGeom prst="rect">
-            <a:avLst/>
-          </a:prstGeom>
-          <a:noFill/>
-          <a:ln/>
-        </p:spPr>
-        <p:txBody>
-          <a:bodyPr wrap="square" lIns="0" tIns="0" rIns="0" bIns="0" rtlCol="0" anchor="ctr"/>
-          <a:lstStyle/>
-          <a:p>
-            <a:pPr algn="ctr" indent="0" marL="0">
-              <a:buNone/>
-            </a:pPr>
-            <a:r>
-              <a:rPr lang="en-US" sz="900" b="1" dirty="0">
-                <a:solidFill>
-                  <a:srgbClr val="003A63"/>
-                </a:solidFill>
-                <a:latin typeface="Aptos" pitchFamily="34" charset="0"/>
-                <a:ea typeface="Aptos" pitchFamily="34" charset="-122"/>
-                <a:cs typeface="Aptos" pitchFamily="34" charset="-120"/>
-              </a:rPr>
-              <a:t>Decision rights</a:t>
-            </a:r>
-            <a:endParaRPr lang="en-US" sz="900" dirty="0"/>
-          </a:p>
-        </p:txBody>
-      </p:sp>
-      <p:sp>
-        <p:nvSpPr>
-          <p:cNvPr id="21" name="Shape 19"/>
           <p:cNvSpPr/>
           <p:nvPr/>
         </p:nvSpPr>
@@ -9117,7 +8557,7 @@
       </p:sp>
       <p:sp>
         <p:nvSpPr>
-          <p:cNvPr id="22" name="Text 20"/>
+          <p:cNvPr id="17" name="Text 15"/>
           <p:cNvSpPr/>
           <p:nvPr/>
         </p:nvSpPr>
@@ -9156,7 +8596,7 @@
       </p:sp>
       <p:sp>
         <p:nvSpPr>
-          <p:cNvPr id="23" name="Text 21"/>
+          <p:cNvPr id="18" name="Text 16"/>
           <p:cNvSpPr/>
           <p:nvPr/>
         </p:nvSpPr>
@@ -9664,13 +9104,11 @@
             </a:avLst>
           </a:prstGeom>
           <a:solidFill>
-            <a:srgbClr val="FFFFFF">
-              <a:alpha val="88000"/>
-            </a:srgbClr>
+            <a:srgbClr val="FFFFFF"/>
           </a:solidFill>
           <a:ln w="12700">
             <a:solidFill>
-              <a:srgbClr val="D6E8F2"/>
+              <a:srgbClr val="B9D7E6"/>
             </a:solidFill>
             <a:prstDash val="solid"/>
           </a:ln>
@@ -9678,190 +9116,112 @@
       </p:sp>
       <p:sp>
         <p:nvSpPr>
-          <p:cNvPr id="14" name="Shape 12"/>
-          <p:cNvSpPr/>
-          <p:nvPr/>
-        </p:nvSpPr>
-        <p:spPr>
-          <a:xfrm>
-            <a:off x="7891272" y="3108960"/>
-            <a:ext cx="566928" cy="566928"/>
-          </a:xfrm>
-          <a:prstGeom prst="ellipse">
-            <a:avLst/>
-          </a:prstGeom>
-          <a:solidFill>
-            <a:srgbClr val="0068B7"/>
-          </a:solidFill>
-          <a:ln w="12700">
-            <a:solidFill>
-              <a:srgbClr val="0068B7"/>
-            </a:solidFill>
-            <a:prstDash val="solid"/>
-          </a:ln>
-        </p:spPr>
-      </p:sp>
-      <p:sp>
-        <p:nvSpPr>
-          <p:cNvPr id="15" name="Shape 13"/>
-          <p:cNvSpPr/>
-          <p:nvPr/>
-        </p:nvSpPr>
-        <p:spPr>
-          <a:xfrm>
-            <a:off x="10287000" y="3108960"/>
-            <a:ext cx="566928" cy="566928"/>
-          </a:xfrm>
-          <a:prstGeom prst="ellipse">
-            <a:avLst/>
-          </a:prstGeom>
-          <a:solidFill>
-            <a:srgbClr val="2F8A28"/>
-          </a:solidFill>
-          <a:ln w="12700">
-            <a:solidFill>
-              <a:srgbClr val="2F8A28"/>
-            </a:solidFill>
-            <a:prstDash val="solid"/>
-          </a:ln>
-        </p:spPr>
+          <p:cNvPr id="14" name="Text 12"/>
+          <p:cNvSpPr/>
+          <p:nvPr/>
+        </p:nvSpPr>
+        <p:spPr>
+          <a:xfrm>
+            <a:off x="7799832" y="2935224"/>
+            <a:ext cx="3145536" cy="256032"/>
+          </a:xfrm>
+          <a:prstGeom prst="rect">
+            <a:avLst/>
+          </a:prstGeom>
+          <a:noFill/>
+          <a:ln/>
+        </p:spPr>
+        <p:txBody>
+          <a:bodyPr wrap="square" lIns="0" tIns="0" rIns="0" bIns="0" rtlCol="0" anchor="ctr"/>
+          <a:lstStyle/>
+          <a:p>
+            <a:pPr indent="0" marL="0">
+              <a:buNone/>
+            </a:pPr>
+            <a:r>
+              <a:rPr lang="en-US" sz="1300" b="1" dirty="0">
+                <a:solidFill>
+                  <a:srgbClr val="0068B7"/>
+                </a:solidFill>
+                <a:latin typeface="Aptos" pitchFamily="34" charset="0"/>
+                <a:ea typeface="Aptos" pitchFamily="34" charset="-122"/>
+                <a:cs typeface="Aptos" pitchFamily="34" charset="-120"/>
+              </a:rPr>
+              <a:t>Concept checkpoints</a:t>
+            </a:r>
+            <a:endParaRPr lang="en-US" sz="1300" dirty="0"/>
+          </a:p>
+        </p:txBody>
+      </p:sp>
+      <p:sp>
+        <p:nvSpPr>
+          <p:cNvPr id="15" name="Text 13"/>
+          <p:cNvSpPr/>
+          <p:nvPr/>
+        </p:nvSpPr>
+        <p:spPr>
+          <a:xfrm>
+            <a:off x="7818120" y="3300984"/>
+            <a:ext cx="3090672" cy="877824"/>
+          </a:xfrm>
+          <a:prstGeom prst="rect">
+            <a:avLst/>
+          </a:prstGeom>
+          <a:noFill/>
+          <a:ln/>
+        </p:spPr>
+        <p:txBody>
+          <a:bodyPr wrap="square" lIns="254" tIns="254" rIns="254" bIns="254" rtlCol="0" anchor="t">
+            <a:normAutofit/>
+          </a:bodyPr>
+          <a:lstStyle/>
+          <a:p>
+            <a:r>
+              <a:rPr lang="en-US" sz="1380" dirty="0">
+                <a:solidFill>
+                  <a:srgbClr val="17364A"/>
+                </a:solidFill>
+                <a:latin typeface="Aptos" pitchFamily="34" charset="0"/>
+                <a:ea typeface="Aptos" pitchFamily="34" charset="-122"/>
+                <a:cs typeface="Aptos" pitchFamily="34" charset="-120"/>
+              </a:rPr>
+              <a:t>Communication and dissemination require special care because AI outputs can be polished,.</a:t>
+            </a:r>
+            <a:endParaRPr lang="en-US" sz="1380" dirty="0"/>
+          </a:p>
+          <a:p>
+            <a:r>
+              <a:rPr lang="en-US" sz="1380" dirty="0">
+                <a:solidFill>
+                  <a:srgbClr val="17364A"/>
+                </a:solidFill>
+                <a:latin typeface="Aptos" pitchFamily="34" charset="0"/>
+                <a:ea typeface="Aptos" pitchFamily="34" charset="-122"/>
+                <a:cs typeface="Aptos" pitchFamily="34" charset="-120"/>
+              </a:rPr>
+              <a:t>Public-facing summaries, dashboards, maps, chatbots, and reports may create harm if they.</a:t>
+            </a:r>
+            <a:endParaRPr lang="en-US" sz="1380" dirty="0"/>
+          </a:p>
+          <a:p>
+            <a:r>
+              <a:rPr lang="en-US" sz="1380" dirty="0">
+                <a:solidFill>
+                  <a:srgbClr val="17364A"/>
+                </a:solidFill>
+                <a:latin typeface="Aptos" pitchFamily="34" charset="0"/>
+                <a:ea typeface="Aptos" pitchFamily="34" charset="-122"/>
+                <a:cs typeface="Aptos" pitchFamily="34" charset="-120"/>
+              </a:rPr>
+              <a:t>Tribal partners may require pre-review of reports, presentations, manuscripts, dashboard.</a:t>
+            </a:r>
+            <a:endParaRPr lang="en-US" sz="1380" dirty="0"/>
+          </a:p>
+        </p:txBody>
       </p:sp>
       <p:sp>
         <p:nvSpPr>
           <p:cNvPr id="16" name="Shape 14"/>
-          <p:cNvSpPr/>
-          <p:nvPr/>
-        </p:nvSpPr>
-        <p:spPr>
-          <a:xfrm>
-            <a:off x="9089136" y="3456432"/>
-            <a:ext cx="566928" cy="566928"/>
-          </a:xfrm>
-          <a:prstGeom prst="ellipse">
-            <a:avLst/>
-          </a:prstGeom>
-          <a:solidFill>
-            <a:srgbClr val="6A4CA3"/>
-          </a:solidFill>
-          <a:ln w="12700">
-            <a:solidFill>
-              <a:srgbClr val="6A4CA3"/>
-            </a:solidFill>
-            <a:prstDash val="solid"/>
-          </a:ln>
-        </p:spPr>
-      </p:sp>
-      <p:sp>
-        <p:nvSpPr>
-          <p:cNvPr id="17" name="Shape 15"/>
-          <p:cNvSpPr/>
-          <p:nvPr/>
-        </p:nvSpPr>
-        <p:spPr>
-          <a:xfrm>
-            <a:off x="8385048" y="3419856"/>
-            <a:ext cx="1975104" cy="0"/>
-          </a:xfrm>
-          <a:prstGeom prst="line">
-            <a:avLst/>
-          </a:prstGeom>
-          <a:noFill/>
-          <a:ln w="25400">
-            <a:solidFill>
-              <a:srgbClr val="8ABBD8"/>
-            </a:solidFill>
-            <a:prstDash val="solid"/>
-          </a:ln>
-        </p:spPr>
-      </p:sp>
-      <p:sp>
-        <p:nvSpPr>
-          <p:cNvPr id="18" name="Shape 16"/>
-          <p:cNvSpPr/>
-          <p:nvPr/>
-        </p:nvSpPr>
-        <p:spPr>
-          <a:xfrm>
-            <a:off x="8202168" y="3630168"/>
-            <a:ext cx="1170432" cy="118872"/>
-          </a:xfrm>
-          <a:prstGeom prst="line">
-            <a:avLst/>
-          </a:prstGeom>
-          <a:noFill/>
-          <a:ln w="25400">
-            <a:solidFill>
-              <a:srgbClr val="8ABBD8"/>
-            </a:solidFill>
-            <a:prstDash val="solid"/>
-          </a:ln>
-        </p:spPr>
-      </p:sp>
-      <p:sp>
-        <p:nvSpPr>
-          <p:cNvPr id="19" name="Shape 17"/>
-          <p:cNvSpPr/>
-          <p:nvPr/>
-        </p:nvSpPr>
-        <p:spPr>
-          <a:xfrm>
-            <a:off x="10543032" y="3630168"/>
-            <a:ext cx="-1170432" cy="118872"/>
-          </a:xfrm>
-          <a:prstGeom prst="line">
-            <a:avLst/>
-          </a:prstGeom>
-          <a:noFill/>
-          <a:ln w="25400">
-            <a:solidFill>
-              <a:srgbClr val="8ABBD8"/>
-            </a:solidFill>
-            <a:prstDash val="solid"/>
-          </a:ln>
-        </p:spPr>
-      </p:sp>
-      <p:sp>
-        <p:nvSpPr>
-          <p:cNvPr id="20" name="Text 18"/>
-          <p:cNvSpPr/>
-          <p:nvPr/>
-        </p:nvSpPr>
-        <p:spPr>
-          <a:xfrm>
-            <a:off x="7863840" y="4069080"/>
-            <a:ext cx="3017520" cy="164592"/>
-          </a:xfrm>
-          <a:prstGeom prst="rect">
-            <a:avLst/>
-          </a:prstGeom>
-          <a:noFill/>
-          <a:ln/>
-        </p:spPr>
-        <p:txBody>
-          <a:bodyPr wrap="square" lIns="0" tIns="0" rIns="0" bIns="0" rtlCol="0" anchor="ctr"/>
-          <a:lstStyle/>
-          <a:p>
-            <a:pPr algn="ctr" indent="0" marL="0">
-              <a:buNone/>
-            </a:pPr>
-            <a:r>
-              <a:rPr lang="en-US" sz="900" b="1" dirty="0">
-                <a:solidFill>
-                  <a:srgbClr val="003A63"/>
-                </a:solidFill>
-                <a:latin typeface="Aptos" pitchFamily="34" charset="0"/>
-                <a:ea typeface="Aptos" pitchFamily="34" charset="-122"/>
-                <a:cs typeface="Aptos" pitchFamily="34" charset="-120"/>
-              </a:rPr>
-              <a:t>Decision rights</a:t>
-            </a:r>
-            <a:endParaRPr lang="en-US" sz="900" dirty="0"/>
-          </a:p>
-        </p:txBody>
-      </p:sp>
-      <p:sp>
-        <p:nvSpPr>
-          <p:cNvPr id="21" name="Shape 19"/>
           <p:cNvSpPr/>
           <p:nvPr/>
         </p:nvSpPr>
@@ -9888,7 +9248,7 @@
       </p:sp>
       <p:sp>
         <p:nvSpPr>
-          <p:cNvPr id="22" name="Text 20"/>
+          <p:cNvPr id="17" name="Text 15"/>
           <p:cNvSpPr/>
           <p:nvPr/>
         </p:nvSpPr>
@@ -9927,7 +9287,7 @@
       </p:sp>
       <p:sp>
         <p:nvSpPr>
-          <p:cNvPr id="23" name="Text 21"/>
+          <p:cNvPr id="18" name="Text 16"/>
           <p:cNvSpPr/>
           <p:nvPr/>
         </p:nvSpPr>
@@ -10435,13 +9795,11 @@
             </a:avLst>
           </a:prstGeom>
           <a:solidFill>
-            <a:srgbClr val="FFFFFF">
-              <a:alpha val="88000"/>
-            </a:srgbClr>
+            <a:srgbClr val="FFFFFF"/>
           </a:solidFill>
           <a:ln w="12700">
             <a:solidFill>
-              <a:srgbClr val="D6E8F2"/>
+              <a:srgbClr val="B9D7E6"/>
             </a:solidFill>
             <a:prstDash val="solid"/>
           </a:ln>
@@ -10449,190 +9807,112 @@
       </p:sp>
       <p:sp>
         <p:nvSpPr>
-          <p:cNvPr id="14" name="Shape 12"/>
-          <p:cNvSpPr/>
-          <p:nvPr/>
-        </p:nvSpPr>
-        <p:spPr>
-          <a:xfrm>
-            <a:off x="7891272" y="3108960"/>
-            <a:ext cx="566928" cy="566928"/>
-          </a:xfrm>
-          <a:prstGeom prst="ellipse">
-            <a:avLst/>
-          </a:prstGeom>
-          <a:solidFill>
-            <a:srgbClr val="0068B7"/>
-          </a:solidFill>
-          <a:ln w="12700">
-            <a:solidFill>
-              <a:srgbClr val="0068B7"/>
-            </a:solidFill>
-            <a:prstDash val="solid"/>
-          </a:ln>
-        </p:spPr>
-      </p:sp>
-      <p:sp>
-        <p:nvSpPr>
-          <p:cNvPr id="15" name="Shape 13"/>
-          <p:cNvSpPr/>
-          <p:nvPr/>
-        </p:nvSpPr>
-        <p:spPr>
-          <a:xfrm>
-            <a:off x="10287000" y="3108960"/>
-            <a:ext cx="566928" cy="566928"/>
-          </a:xfrm>
-          <a:prstGeom prst="ellipse">
-            <a:avLst/>
-          </a:prstGeom>
-          <a:solidFill>
-            <a:srgbClr val="2F8A28"/>
-          </a:solidFill>
-          <a:ln w="12700">
-            <a:solidFill>
-              <a:srgbClr val="2F8A28"/>
-            </a:solidFill>
-            <a:prstDash val="solid"/>
-          </a:ln>
-        </p:spPr>
+          <p:cNvPr id="14" name="Text 12"/>
+          <p:cNvSpPr/>
+          <p:nvPr/>
+        </p:nvSpPr>
+        <p:spPr>
+          <a:xfrm>
+            <a:off x="7799832" y="2935224"/>
+            <a:ext cx="3145536" cy="256032"/>
+          </a:xfrm>
+          <a:prstGeom prst="rect">
+            <a:avLst/>
+          </a:prstGeom>
+          <a:noFill/>
+          <a:ln/>
+        </p:spPr>
+        <p:txBody>
+          <a:bodyPr wrap="square" lIns="0" tIns="0" rIns="0" bIns="0" rtlCol="0" anchor="ctr"/>
+          <a:lstStyle/>
+          <a:p>
+            <a:pPr indent="0" marL="0">
+              <a:buNone/>
+            </a:pPr>
+            <a:r>
+              <a:rPr lang="en-US" sz="1300" b="1" dirty="0">
+                <a:solidFill>
+                  <a:srgbClr val="0068B7"/>
+                </a:solidFill>
+                <a:latin typeface="Aptos" pitchFamily="34" charset="0"/>
+                <a:ea typeface="Aptos" pitchFamily="34" charset="-122"/>
+                <a:cs typeface="Aptos" pitchFamily="34" charset="-120"/>
+              </a:rPr>
+              <a:t>Concept checkpoints</a:t>
+            </a:r>
+            <a:endParaRPr lang="en-US" sz="1300" dirty="0"/>
+          </a:p>
+        </p:txBody>
+      </p:sp>
+      <p:sp>
+        <p:nvSpPr>
+          <p:cNvPr id="15" name="Text 13"/>
+          <p:cNvSpPr/>
+          <p:nvPr/>
+        </p:nvSpPr>
+        <p:spPr>
+          <a:xfrm>
+            <a:off x="7818120" y="3300984"/>
+            <a:ext cx="3090672" cy="877824"/>
+          </a:xfrm>
+          <a:prstGeom prst="rect">
+            <a:avLst/>
+          </a:prstGeom>
+          <a:noFill/>
+          <a:ln/>
+        </p:spPr>
+        <p:txBody>
+          <a:bodyPr wrap="square" lIns="254" tIns="254" rIns="254" bIns="254" rtlCol="0" anchor="t">
+            <a:normAutofit/>
+          </a:bodyPr>
+          <a:lstStyle/>
+          <a:p>
+            <a:r>
+              <a:rPr lang="en-US" sz="1380" dirty="0">
+                <a:solidFill>
+                  <a:srgbClr val="17364A"/>
+                </a:solidFill>
+                <a:latin typeface="Aptos" pitchFamily="34" charset="0"/>
+                <a:ea typeface="Aptos" pitchFamily="34" charset="-122"/>
+                <a:cs typeface="Aptos" pitchFamily="34" charset="-120"/>
+              </a:rPr>
+              <a:t>A major risk is treating Tribal health data as if it were ordinary administrative or.</a:t>
+            </a:r>
+            <a:endParaRPr lang="en-US" sz="1380" dirty="0"/>
+          </a:p>
+          <a:p>
+            <a:r>
+              <a:rPr lang="en-US" sz="1380" dirty="0">
+                <a:solidFill>
+                  <a:srgbClr val="17364A"/>
+                </a:solidFill>
+                <a:latin typeface="Aptos" pitchFamily="34" charset="0"/>
+                <a:ea typeface="Aptos" pitchFamily="34" charset="-122"/>
+                <a:cs typeface="Aptos" pitchFamily="34" charset="-120"/>
+              </a:rPr>
+              <a:t>This can lead to AI development without Tribal consultation, data sharing without.</a:t>
+            </a:r>
+            <a:endParaRPr lang="en-US" sz="1380" dirty="0"/>
+          </a:p>
+          <a:p>
+            <a:r>
+              <a:rPr lang="en-US" sz="1380" dirty="0">
+                <a:solidFill>
+                  <a:srgbClr val="17364A"/>
+                </a:solidFill>
+                <a:latin typeface="Aptos" pitchFamily="34" charset="0"/>
+                <a:ea typeface="Aptos" pitchFamily="34" charset="-122"/>
+                <a:cs typeface="Aptos" pitchFamily="34" charset="-120"/>
+              </a:rPr>
+              <a:t>The failure mode is often procedural rather than malicious: staff follow routine analytics.</a:t>
+            </a:r>
+            <a:endParaRPr lang="en-US" sz="1380" dirty="0"/>
+          </a:p>
+        </p:txBody>
       </p:sp>
       <p:sp>
         <p:nvSpPr>
           <p:cNvPr id="16" name="Shape 14"/>
-          <p:cNvSpPr/>
-          <p:nvPr/>
-        </p:nvSpPr>
-        <p:spPr>
-          <a:xfrm>
-            <a:off x="9089136" y="3456432"/>
-            <a:ext cx="566928" cy="566928"/>
-          </a:xfrm>
-          <a:prstGeom prst="ellipse">
-            <a:avLst/>
-          </a:prstGeom>
-          <a:solidFill>
-            <a:srgbClr val="6A4CA3"/>
-          </a:solidFill>
-          <a:ln w="12700">
-            <a:solidFill>
-              <a:srgbClr val="6A4CA3"/>
-            </a:solidFill>
-            <a:prstDash val="solid"/>
-          </a:ln>
-        </p:spPr>
-      </p:sp>
-      <p:sp>
-        <p:nvSpPr>
-          <p:cNvPr id="17" name="Shape 15"/>
-          <p:cNvSpPr/>
-          <p:nvPr/>
-        </p:nvSpPr>
-        <p:spPr>
-          <a:xfrm>
-            <a:off x="8385048" y="3419856"/>
-            <a:ext cx="1975104" cy="0"/>
-          </a:xfrm>
-          <a:prstGeom prst="line">
-            <a:avLst/>
-          </a:prstGeom>
-          <a:noFill/>
-          <a:ln w="25400">
-            <a:solidFill>
-              <a:srgbClr val="8ABBD8"/>
-            </a:solidFill>
-            <a:prstDash val="solid"/>
-          </a:ln>
-        </p:spPr>
-      </p:sp>
-      <p:sp>
-        <p:nvSpPr>
-          <p:cNvPr id="18" name="Shape 16"/>
-          <p:cNvSpPr/>
-          <p:nvPr/>
-        </p:nvSpPr>
-        <p:spPr>
-          <a:xfrm>
-            <a:off x="8202168" y="3630168"/>
-            <a:ext cx="1170432" cy="118872"/>
-          </a:xfrm>
-          <a:prstGeom prst="line">
-            <a:avLst/>
-          </a:prstGeom>
-          <a:noFill/>
-          <a:ln w="25400">
-            <a:solidFill>
-              <a:srgbClr val="8ABBD8"/>
-            </a:solidFill>
-            <a:prstDash val="solid"/>
-          </a:ln>
-        </p:spPr>
-      </p:sp>
-      <p:sp>
-        <p:nvSpPr>
-          <p:cNvPr id="19" name="Shape 17"/>
-          <p:cNvSpPr/>
-          <p:nvPr/>
-        </p:nvSpPr>
-        <p:spPr>
-          <a:xfrm>
-            <a:off x="10543032" y="3630168"/>
-            <a:ext cx="-1170432" cy="118872"/>
-          </a:xfrm>
-          <a:prstGeom prst="line">
-            <a:avLst/>
-          </a:prstGeom>
-          <a:noFill/>
-          <a:ln w="25400">
-            <a:solidFill>
-              <a:srgbClr val="8ABBD8"/>
-            </a:solidFill>
-            <a:prstDash val="solid"/>
-          </a:ln>
-        </p:spPr>
-      </p:sp>
-      <p:sp>
-        <p:nvSpPr>
-          <p:cNvPr id="20" name="Text 18"/>
-          <p:cNvSpPr/>
-          <p:nvPr/>
-        </p:nvSpPr>
-        <p:spPr>
-          <a:xfrm>
-            <a:off x="7863840" y="4069080"/>
-            <a:ext cx="3017520" cy="164592"/>
-          </a:xfrm>
-          <a:prstGeom prst="rect">
-            <a:avLst/>
-          </a:prstGeom>
-          <a:noFill/>
-          <a:ln/>
-        </p:spPr>
-        <p:txBody>
-          <a:bodyPr wrap="square" lIns="0" tIns="0" rIns="0" bIns="0" rtlCol="0" anchor="ctr"/>
-          <a:lstStyle/>
-          <a:p>
-            <a:pPr algn="ctr" indent="0" marL="0">
-              <a:buNone/>
-            </a:pPr>
-            <a:r>
-              <a:rPr lang="en-US" sz="900" b="1" dirty="0">
-                <a:solidFill>
-                  <a:srgbClr val="003A63"/>
-                </a:solidFill>
-                <a:latin typeface="Aptos" pitchFamily="34" charset="0"/>
-                <a:ea typeface="Aptos" pitchFamily="34" charset="-122"/>
-                <a:cs typeface="Aptos" pitchFamily="34" charset="-120"/>
-              </a:rPr>
-              <a:t>Decision rights</a:t>
-            </a:r>
-            <a:endParaRPr lang="en-US" sz="900" dirty="0"/>
-          </a:p>
-        </p:txBody>
-      </p:sp>
-      <p:sp>
-        <p:nvSpPr>
-          <p:cNvPr id="21" name="Shape 19"/>
           <p:cNvSpPr/>
           <p:nvPr/>
         </p:nvSpPr>
@@ -10659,7 +9939,7 @@
       </p:sp>
       <p:sp>
         <p:nvSpPr>
-          <p:cNvPr id="22" name="Text 20"/>
+          <p:cNvPr id="17" name="Text 15"/>
           <p:cNvSpPr/>
           <p:nvPr/>
         </p:nvSpPr>
@@ -10698,7 +9978,7 @@
       </p:sp>
       <p:sp>
         <p:nvSpPr>
-          <p:cNvPr id="23" name="Text 21"/>
+          <p:cNvPr id="18" name="Text 16"/>
           <p:cNvSpPr/>
           <p:nvPr/>
         </p:nvSpPr>
@@ -11206,13 +10486,11 @@
             </a:avLst>
           </a:prstGeom>
           <a:solidFill>
-            <a:srgbClr val="FFFFFF">
-              <a:alpha val="88000"/>
-            </a:srgbClr>
+            <a:srgbClr val="FFFFFF"/>
           </a:solidFill>
           <a:ln w="12700">
             <a:solidFill>
-              <a:srgbClr val="D6E8F2"/>
+              <a:srgbClr val="B9D7E6"/>
             </a:solidFill>
             <a:prstDash val="solid"/>
           </a:ln>
@@ -11220,190 +10498,112 @@
       </p:sp>
       <p:sp>
         <p:nvSpPr>
-          <p:cNvPr id="14" name="Shape 12"/>
-          <p:cNvSpPr/>
-          <p:nvPr/>
-        </p:nvSpPr>
-        <p:spPr>
-          <a:xfrm>
-            <a:off x="7891272" y="3108960"/>
-            <a:ext cx="566928" cy="566928"/>
-          </a:xfrm>
-          <a:prstGeom prst="ellipse">
-            <a:avLst/>
-          </a:prstGeom>
-          <a:solidFill>
-            <a:srgbClr val="0068B7"/>
-          </a:solidFill>
-          <a:ln w="12700">
-            <a:solidFill>
-              <a:srgbClr val="0068B7"/>
-            </a:solidFill>
-            <a:prstDash val="solid"/>
-          </a:ln>
-        </p:spPr>
-      </p:sp>
-      <p:sp>
-        <p:nvSpPr>
-          <p:cNvPr id="15" name="Shape 13"/>
-          <p:cNvSpPr/>
-          <p:nvPr/>
-        </p:nvSpPr>
-        <p:spPr>
-          <a:xfrm>
-            <a:off x="10287000" y="3108960"/>
-            <a:ext cx="566928" cy="566928"/>
-          </a:xfrm>
-          <a:prstGeom prst="ellipse">
-            <a:avLst/>
-          </a:prstGeom>
-          <a:solidFill>
-            <a:srgbClr val="2F8A28"/>
-          </a:solidFill>
-          <a:ln w="12700">
-            <a:solidFill>
-              <a:srgbClr val="2F8A28"/>
-            </a:solidFill>
-            <a:prstDash val="solid"/>
-          </a:ln>
-        </p:spPr>
+          <p:cNvPr id="14" name="Text 12"/>
+          <p:cNvSpPr/>
+          <p:nvPr/>
+        </p:nvSpPr>
+        <p:spPr>
+          <a:xfrm>
+            <a:off x="7799832" y="2935224"/>
+            <a:ext cx="3145536" cy="256032"/>
+          </a:xfrm>
+          <a:prstGeom prst="rect">
+            <a:avLst/>
+          </a:prstGeom>
+          <a:noFill/>
+          <a:ln/>
+        </p:spPr>
+        <p:txBody>
+          <a:bodyPr wrap="square" lIns="0" tIns="0" rIns="0" bIns="0" rtlCol="0" anchor="ctr"/>
+          <a:lstStyle/>
+          <a:p>
+            <a:pPr indent="0" marL="0">
+              <a:buNone/>
+            </a:pPr>
+            <a:r>
+              <a:rPr lang="en-US" sz="1300" b="1" dirty="0">
+                <a:solidFill>
+                  <a:srgbClr val="0068B7"/>
+                </a:solidFill>
+                <a:latin typeface="Aptos" pitchFamily="34" charset="0"/>
+                <a:ea typeface="Aptos" pitchFamily="34" charset="-122"/>
+                <a:cs typeface="Aptos" pitchFamily="34" charset="-120"/>
+              </a:rPr>
+              <a:t>Concept checkpoints</a:t>
+            </a:r>
+            <a:endParaRPr lang="en-US" sz="1300" dirty="0"/>
+          </a:p>
+        </p:txBody>
+      </p:sp>
+      <p:sp>
+        <p:nvSpPr>
+          <p:cNvPr id="15" name="Text 13"/>
+          <p:cNvSpPr/>
+          <p:nvPr/>
+        </p:nvSpPr>
+        <p:spPr>
+          <a:xfrm>
+            <a:off x="7818120" y="3300984"/>
+            <a:ext cx="3090672" cy="877824"/>
+          </a:xfrm>
+          <a:prstGeom prst="rect">
+            <a:avLst/>
+          </a:prstGeom>
+          <a:noFill/>
+          <a:ln/>
+        </p:spPr>
+        <p:txBody>
+          <a:bodyPr wrap="square" lIns="254" tIns="254" rIns="254" bIns="254" rtlCol="0" anchor="t">
+            <a:normAutofit/>
+          </a:bodyPr>
+          <a:lstStyle/>
+          <a:p>
+            <a:r>
+              <a:rPr lang="en-US" sz="1380" dirty="0">
+                <a:solidFill>
+                  <a:srgbClr val="17364A"/>
+                </a:solidFill>
+                <a:latin typeface="Aptos" pitchFamily="34" charset="0"/>
+                <a:ea typeface="Aptos" pitchFamily="34" charset="-122"/>
+                <a:cs typeface="Aptos" pitchFamily="34" charset="-120"/>
+              </a:rPr>
+              <a:t>If the project is already funded, contracted, designed, or near deployment before Tribal.</a:t>
+            </a:r>
+            <a:endParaRPr lang="en-US" sz="1380" dirty="0"/>
+          </a:p>
+          <a:p>
+            <a:r>
+              <a:rPr lang="en-US" sz="1380" dirty="0">
+                <a:solidFill>
+                  <a:srgbClr val="17364A"/>
+                </a:solidFill>
+                <a:latin typeface="Aptos" pitchFamily="34" charset="0"/>
+                <a:ea typeface="Aptos" pitchFamily="34" charset="-122"/>
+                <a:cs typeface="Aptos" pitchFamily="34" charset="-120"/>
+              </a:rPr>
+              <a:t>This can create extractive relationships in which data and expertise flow outward while.</a:t>
+            </a:r>
+            <a:endParaRPr lang="en-US" sz="1380" dirty="0"/>
+          </a:p>
+          <a:p>
+            <a:r>
+              <a:rPr lang="en-US" sz="1380" dirty="0">
+                <a:solidFill>
+                  <a:srgbClr val="17364A"/>
+                </a:solidFill>
+                <a:latin typeface="Aptos" pitchFamily="34" charset="0"/>
+                <a:ea typeface="Aptos" pitchFamily="34" charset="-122"/>
+                <a:cs typeface="Aptos" pitchFamily="34" charset="-120"/>
+              </a:rPr>
+              <a:t>The guardrail is to define community benefit, capacity building, shared decision-making,.</a:t>
+            </a:r>
+            <a:endParaRPr lang="en-US" sz="1380" dirty="0"/>
+          </a:p>
+        </p:txBody>
       </p:sp>
       <p:sp>
         <p:nvSpPr>
           <p:cNvPr id="16" name="Shape 14"/>
-          <p:cNvSpPr/>
-          <p:nvPr/>
-        </p:nvSpPr>
-        <p:spPr>
-          <a:xfrm>
-            <a:off x="9089136" y="3456432"/>
-            <a:ext cx="566928" cy="566928"/>
-          </a:xfrm>
-          <a:prstGeom prst="ellipse">
-            <a:avLst/>
-          </a:prstGeom>
-          <a:solidFill>
-            <a:srgbClr val="6A4CA3"/>
-          </a:solidFill>
-          <a:ln w="12700">
-            <a:solidFill>
-              <a:srgbClr val="6A4CA3"/>
-            </a:solidFill>
-            <a:prstDash val="solid"/>
-          </a:ln>
-        </p:spPr>
-      </p:sp>
-      <p:sp>
-        <p:nvSpPr>
-          <p:cNvPr id="17" name="Shape 15"/>
-          <p:cNvSpPr/>
-          <p:nvPr/>
-        </p:nvSpPr>
-        <p:spPr>
-          <a:xfrm>
-            <a:off x="8385048" y="3419856"/>
-            <a:ext cx="1975104" cy="0"/>
-          </a:xfrm>
-          <a:prstGeom prst="line">
-            <a:avLst/>
-          </a:prstGeom>
-          <a:noFill/>
-          <a:ln w="25400">
-            <a:solidFill>
-              <a:srgbClr val="8ABBD8"/>
-            </a:solidFill>
-            <a:prstDash val="solid"/>
-          </a:ln>
-        </p:spPr>
-      </p:sp>
-      <p:sp>
-        <p:nvSpPr>
-          <p:cNvPr id="18" name="Shape 16"/>
-          <p:cNvSpPr/>
-          <p:nvPr/>
-        </p:nvSpPr>
-        <p:spPr>
-          <a:xfrm>
-            <a:off x="8202168" y="3630168"/>
-            <a:ext cx="1170432" cy="118872"/>
-          </a:xfrm>
-          <a:prstGeom prst="line">
-            <a:avLst/>
-          </a:prstGeom>
-          <a:noFill/>
-          <a:ln w="25400">
-            <a:solidFill>
-              <a:srgbClr val="8ABBD8"/>
-            </a:solidFill>
-            <a:prstDash val="solid"/>
-          </a:ln>
-        </p:spPr>
-      </p:sp>
-      <p:sp>
-        <p:nvSpPr>
-          <p:cNvPr id="19" name="Shape 17"/>
-          <p:cNvSpPr/>
-          <p:nvPr/>
-        </p:nvSpPr>
-        <p:spPr>
-          <a:xfrm>
-            <a:off x="10543032" y="3630168"/>
-            <a:ext cx="-1170432" cy="118872"/>
-          </a:xfrm>
-          <a:prstGeom prst="line">
-            <a:avLst/>
-          </a:prstGeom>
-          <a:noFill/>
-          <a:ln w="25400">
-            <a:solidFill>
-              <a:srgbClr val="8ABBD8"/>
-            </a:solidFill>
-            <a:prstDash val="solid"/>
-          </a:ln>
-        </p:spPr>
-      </p:sp>
-      <p:sp>
-        <p:nvSpPr>
-          <p:cNvPr id="20" name="Text 18"/>
-          <p:cNvSpPr/>
-          <p:nvPr/>
-        </p:nvSpPr>
-        <p:spPr>
-          <a:xfrm>
-            <a:off x="7863840" y="4069080"/>
-            <a:ext cx="3017520" cy="164592"/>
-          </a:xfrm>
-          <a:prstGeom prst="rect">
-            <a:avLst/>
-          </a:prstGeom>
-          <a:noFill/>
-          <a:ln/>
-        </p:spPr>
-        <p:txBody>
-          <a:bodyPr wrap="square" lIns="0" tIns="0" rIns="0" bIns="0" rtlCol="0" anchor="ctr"/>
-          <a:lstStyle/>
-          <a:p>
-            <a:pPr algn="ctr" indent="0" marL="0">
-              <a:buNone/>
-            </a:pPr>
-            <a:r>
-              <a:rPr lang="en-US" sz="900" b="1" dirty="0">
-                <a:solidFill>
-                  <a:srgbClr val="003A63"/>
-                </a:solidFill>
-                <a:latin typeface="Aptos" pitchFamily="34" charset="0"/>
-                <a:ea typeface="Aptos" pitchFamily="34" charset="-122"/>
-                <a:cs typeface="Aptos" pitchFamily="34" charset="-120"/>
-              </a:rPr>
-              <a:t>Decision rights</a:t>
-            </a:r>
-            <a:endParaRPr lang="en-US" sz="900" dirty="0"/>
-          </a:p>
-        </p:txBody>
-      </p:sp>
-      <p:sp>
-        <p:nvSpPr>
-          <p:cNvPr id="21" name="Shape 19"/>
           <p:cNvSpPr/>
           <p:nvPr/>
         </p:nvSpPr>
@@ -11430,7 +10630,7 @@
       </p:sp>
       <p:sp>
         <p:nvSpPr>
-          <p:cNvPr id="22" name="Text 20"/>
+          <p:cNvPr id="17" name="Text 15"/>
           <p:cNvSpPr/>
           <p:nvPr/>
         </p:nvSpPr>
@@ -11469,7 +10669,7 @@
       </p:sp>
       <p:sp>
         <p:nvSpPr>
-          <p:cNvPr id="23" name="Text 21"/>
+          <p:cNvPr id="18" name="Text 16"/>
           <p:cNvSpPr/>
           <p:nvPr/>
         </p:nvSpPr>
@@ -12002,20 +11202,20 @@
         </p:nvSpPr>
         <p:spPr>
           <a:xfrm>
-            <a:off x="7635240" y="3730752"/>
-            <a:ext cx="1033272" cy="749808"/>
+            <a:off x="7909560" y="3675888"/>
+            <a:ext cx="3154680" cy="1691640"/>
           </a:xfrm>
           <a:prstGeom prst="roundRect">
             <a:avLst>
-              <a:gd name="adj" fmla="val 14634"/>
+              <a:gd name="adj" fmla="val 6486"/>
             </a:avLst>
           </a:prstGeom>
           <a:solidFill>
-            <a:srgbClr val="0068B7"/>
+            <a:srgbClr val="FFFFFF"/>
           </a:solidFill>
           <a:ln w="12700">
             <a:solidFill>
-              <a:srgbClr val="0068B7"/>
+              <a:srgbClr val="B9D7E6"/>
             </a:solidFill>
             <a:prstDash val="solid"/>
           </a:ln>
@@ -12029,172 +11229,100 @@
         </p:nvSpPr>
         <p:spPr>
           <a:xfrm>
-            <a:off x="7708392" y="3922776"/>
-            <a:ext cx="886968" cy="310896"/>
-          </a:xfrm>
-          <a:prstGeom prst="rect">
-            <a:avLst/>
-          </a:prstGeom>
-          <a:noFill/>
-          <a:ln/>
-        </p:spPr>
-        <p:txBody>
-          <a:bodyPr wrap="square" lIns="0" tIns="0" rIns="0" bIns="0" rtlCol="0" anchor="ctr">
+            <a:off x="8074152" y="3822192"/>
+            <a:ext cx="2825496" cy="256032"/>
+          </a:xfrm>
+          <a:prstGeom prst="rect">
+            <a:avLst/>
+          </a:prstGeom>
+          <a:noFill/>
+          <a:ln/>
+        </p:spPr>
+        <p:txBody>
+          <a:bodyPr wrap="square" lIns="0" tIns="0" rIns="0" bIns="0" rtlCol="0" anchor="ctr"/>
+          <a:lstStyle/>
+          <a:p>
+            <a:pPr indent="0" marL="0">
+              <a:buNone/>
+            </a:pPr>
+            <a:r>
+              <a:rPr lang="en-US" sz="1300" b="1" dirty="0">
+                <a:solidFill>
+                  <a:srgbClr val="0068B7"/>
+                </a:solidFill>
+                <a:latin typeface="Aptos" pitchFamily="34" charset="0"/>
+                <a:ea typeface="Aptos" pitchFamily="34" charset="-122"/>
+                <a:cs typeface="Aptos" pitchFamily="34" charset="-120"/>
+              </a:rPr>
+              <a:t>Learning sequence</a:t>
+            </a:r>
+            <a:endParaRPr lang="en-US" sz="1300" dirty="0"/>
+          </a:p>
+        </p:txBody>
+      </p:sp>
+      <p:sp>
+        <p:nvSpPr>
+          <p:cNvPr id="15" name="Text 13"/>
+          <p:cNvSpPr/>
+          <p:nvPr/>
+        </p:nvSpPr>
+        <p:spPr>
+          <a:xfrm>
+            <a:off x="8092440" y="4187952"/>
+            <a:ext cx="2770632" cy="1033272"/>
+          </a:xfrm>
+          <a:prstGeom prst="rect">
+            <a:avLst/>
+          </a:prstGeom>
+          <a:noFill/>
+          <a:ln/>
+        </p:spPr>
+        <p:txBody>
+          <a:bodyPr wrap="square" lIns="254" tIns="254" rIns="254" bIns="254" rtlCol="0" anchor="t">
             <a:normAutofit/>
           </a:bodyPr>
           <a:lstStyle/>
           <a:p>
-            <a:pPr algn="ctr" indent="0" marL="0">
-              <a:buNone/>
-            </a:pPr>
-            <a:r>
-              <a:rPr lang="en-US" sz="1500" b="1" dirty="0">
-                <a:solidFill>
-                  <a:srgbClr val="FFFFFF"/>
-                </a:solidFill>
-                <a:latin typeface="Aptos" pitchFamily="34" charset="0"/>
-                <a:ea typeface="Aptos" pitchFamily="34" charset="-122"/>
-                <a:cs typeface="Aptos" pitchFamily="34" charset="-120"/>
-              </a:rPr>
-              <a:t>Learn</a:t>
-            </a:r>
-            <a:endParaRPr lang="en-US" sz="1500" dirty="0"/>
-          </a:p>
-        </p:txBody>
-      </p:sp>
-      <p:sp>
-        <p:nvSpPr>
-          <p:cNvPr id="15" name="Shape 13"/>
-          <p:cNvSpPr/>
-          <p:nvPr/>
-        </p:nvSpPr>
-        <p:spPr>
-          <a:xfrm>
-            <a:off x="8924544" y="3730752"/>
-            <a:ext cx="1033272" cy="749808"/>
-          </a:xfrm>
-          <a:prstGeom prst="roundRect">
-            <a:avLst>
-              <a:gd name="adj" fmla="val 14634"/>
-            </a:avLst>
-          </a:prstGeom>
-          <a:solidFill>
-            <a:srgbClr val="2F8A28"/>
-          </a:solidFill>
-          <a:ln w="12700">
-            <a:solidFill>
-              <a:srgbClr val="2F8A28"/>
-            </a:solidFill>
-            <a:prstDash val="solid"/>
-          </a:ln>
-        </p:spPr>
-      </p:sp>
-      <p:sp>
-        <p:nvSpPr>
-          <p:cNvPr id="16" name="Text 14"/>
-          <p:cNvSpPr/>
-          <p:nvPr/>
-        </p:nvSpPr>
-        <p:spPr>
-          <a:xfrm>
-            <a:off x="8997696" y="3922776"/>
-            <a:ext cx="886968" cy="310896"/>
-          </a:xfrm>
-          <a:prstGeom prst="rect">
-            <a:avLst/>
-          </a:prstGeom>
-          <a:noFill/>
-          <a:ln/>
-        </p:spPr>
-        <p:txBody>
-          <a:bodyPr wrap="square" lIns="0" tIns="0" rIns="0" bIns="0" rtlCol="0" anchor="ctr">
-            <a:normAutofit/>
-          </a:bodyPr>
-          <a:lstStyle/>
-          <a:p>
-            <a:pPr algn="ctr" indent="0" marL="0">
-              <a:buNone/>
-            </a:pPr>
-            <a:r>
-              <a:rPr lang="en-US" sz="1500" b="1" dirty="0">
-                <a:solidFill>
-                  <a:srgbClr val="FFFFFF"/>
-                </a:solidFill>
-                <a:latin typeface="Aptos" pitchFamily="34" charset="0"/>
-                <a:ea typeface="Aptos" pitchFamily="34" charset="-122"/>
-                <a:cs typeface="Aptos" pitchFamily="34" charset="-120"/>
-              </a:rPr>
-              <a:t>Apply</a:t>
-            </a:r>
-            <a:endParaRPr lang="en-US" sz="1500" dirty="0"/>
-          </a:p>
-        </p:txBody>
-      </p:sp>
-      <p:sp>
-        <p:nvSpPr>
-          <p:cNvPr id="17" name="Shape 15"/>
-          <p:cNvSpPr/>
-          <p:nvPr/>
-        </p:nvSpPr>
-        <p:spPr>
-          <a:xfrm>
-            <a:off x="10213848" y="3730752"/>
-            <a:ext cx="1033272" cy="749808"/>
-          </a:xfrm>
-          <a:prstGeom prst="roundRect">
-            <a:avLst>
-              <a:gd name="adj" fmla="val 14634"/>
-            </a:avLst>
-          </a:prstGeom>
-          <a:solidFill>
-            <a:srgbClr val="6A4CA3"/>
-          </a:solidFill>
-          <a:ln w="12700">
-            <a:solidFill>
-              <a:srgbClr val="6A4CA3"/>
-            </a:solidFill>
-            <a:prstDash val="solid"/>
-          </a:ln>
-        </p:spPr>
-      </p:sp>
-      <p:sp>
-        <p:nvSpPr>
-          <p:cNvPr id="18" name="Text 16"/>
-          <p:cNvSpPr/>
-          <p:nvPr/>
-        </p:nvSpPr>
-        <p:spPr>
-          <a:xfrm>
-            <a:off x="10287000" y="3922776"/>
-            <a:ext cx="886968" cy="310896"/>
-          </a:xfrm>
-          <a:prstGeom prst="rect">
-            <a:avLst/>
-          </a:prstGeom>
-          <a:noFill/>
-          <a:ln/>
-        </p:spPr>
-        <p:txBody>
-          <a:bodyPr wrap="square" lIns="0" tIns="0" rIns="0" bIns="0" rtlCol="0" anchor="ctr">
-            <a:normAutofit/>
-          </a:bodyPr>
-          <a:lstStyle/>
-          <a:p>
-            <a:pPr algn="ctr" indent="0" marL="0">
-              <a:buNone/>
-            </a:pPr>
-            <a:r>
-              <a:rPr lang="en-US" sz="1500" b="1" dirty="0">
-                <a:solidFill>
-                  <a:srgbClr val="FFFFFF"/>
-                </a:solidFill>
-                <a:latin typeface="Aptos" pitchFamily="34" charset="0"/>
-                <a:ea typeface="Aptos" pitchFamily="34" charset="-122"/>
-                <a:cs typeface="Aptos" pitchFamily="34" charset="-120"/>
-              </a:rPr>
-              <a:t>Document</a:t>
-            </a:r>
-            <a:endParaRPr lang="en-US" sz="1500" dirty="0"/>
+            <a:r>
+              <a:rPr lang="en-US" sz="1380" dirty="0">
+                <a:solidFill>
+                  <a:srgbClr val="17364A"/>
+                </a:solidFill>
+                <a:latin typeface="Aptos" pitchFamily="34" charset="0"/>
+                <a:ea typeface="Aptos" pitchFamily="34" charset="-122"/>
+                <a:cs typeface="Aptos" pitchFamily="34" charset="-120"/>
+              </a:rPr>
+              <a:t>Read the module for shared vocabulary and context.</a:t>
+            </a:r>
+            <a:endParaRPr lang="en-US" sz="1380" dirty="0"/>
+          </a:p>
+          <a:p>
+            <a:r>
+              <a:rPr lang="en-US" sz="1380" dirty="0">
+                <a:solidFill>
+                  <a:srgbClr val="17364A"/>
+                </a:solidFill>
+                <a:latin typeface="Aptos" pitchFamily="34" charset="0"/>
+                <a:ea typeface="Aptos" pitchFamily="34" charset="-122"/>
+                <a:cs typeface="Aptos" pitchFamily="34" charset="-120"/>
+              </a:rPr>
+              <a:t>Complete the practical exercise to apply the concept.</a:t>
+            </a:r>
+            <a:endParaRPr lang="en-US" sz="1380" dirty="0"/>
+          </a:p>
+          <a:p>
+            <a:r>
+              <a:rPr lang="en-US" sz="1380" dirty="0">
+                <a:solidFill>
+                  <a:srgbClr val="17364A"/>
+                </a:solidFill>
+                <a:latin typeface="Aptos" pitchFamily="34" charset="0"/>
+                <a:ea typeface="Aptos" pitchFamily="34" charset="-122"/>
+                <a:cs typeface="Aptos" pitchFamily="34" charset="-120"/>
+              </a:rPr>
+              <a:t>Use the notes and references for deeper review.</a:t>
+            </a:r>
+            <a:endParaRPr lang="en-US" sz="1380" dirty="0"/>
           </a:p>
         </p:txBody>
       </p:sp>
@@ -12667,13 +11795,11 @@
             </a:avLst>
           </a:prstGeom>
           <a:solidFill>
-            <a:srgbClr val="FFFFFF">
-              <a:alpha val="88000"/>
-            </a:srgbClr>
+            <a:srgbClr val="FFFFFF"/>
           </a:solidFill>
           <a:ln w="12700">
             <a:solidFill>
-              <a:srgbClr val="D6E8F2"/>
+              <a:srgbClr val="B9D7E6"/>
             </a:solidFill>
             <a:prstDash val="solid"/>
           </a:ln>
@@ -12681,190 +11807,112 @@
       </p:sp>
       <p:sp>
         <p:nvSpPr>
-          <p:cNvPr id="14" name="Shape 12"/>
-          <p:cNvSpPr/>
-          <p:nvPr/>
-        </p:nvSpPr>
-        <p:spPr>
-          <a:xfrm>
-            <a:off x="7891272" y="3108960"/>
-            <a:ext cx="566928" cy="566928"/>
-          </a:xfrm>
-          <a:prstGeom prst="ellipse">
-            <a:avLst/>
-          </a:prstGeom>
-          <a:solidFill>
-            <a:srgbClr val="0068B7"/>
-          </a:solidFill>
-          <a:ln w="12700">
-            <a:solidFill>
-              <a:srgbClr val="0068B7"/>
-            </a:solidFill>
-            <a:prstDash val="solid"/>
-          </a:ln>
-        </p:spPr>
-      </p:sp>
-      <p:sp>
-        <p:nvSpPr>
-          <p:cNvPr id="15" name="Shape 13"/>
-          <p:cNvSpPr/>
-          <p:nvPr/>
-        </p:nvSpPr>
-        <p:spPr>
-          <a:xfrm>
-            <a:off x="10287000" y="3108960"/>
-            <a:ext cx="566928" cy="566928"/>
-          </a:xfrm>
-          <a:prstGeom prst="ellipse">
-            <a:avLst/>
-          </a:prstGeom>
-          <a:solidFill>
-            <a:srgbClr val="2F8A28"/>
-          </a:solidFill>
-          <a:ln w="12700">
-            <a:solidFill>
-              <a:srgbClr val="2F8A28"/>
-            </a:solidFill>
-            <a:prstDash val="solid"/>
-          </a:ln>
-        </p:spPr>
+          <p:cNvPr id="14" name="Text 12"/>
+          <p:cNvSpPr/>
+          <p:nvPr/>
+        </p:nvSpPr>
+        <p:spPr>
+          <a:xfrm>
+            <a:off x="7799832" y="2935224"/>
+            <a:ext cx="3145536" cy="256032"/>
+          </a:xfrm>
+          <a:prstGeom prst="rect">
+            <a:avLst/>
+          </a:prstGeom>
+          <a:noFill/>
+          <a:ln/>
+        </p:spPr>
+        <p:txBody>
+          <a:bodyPr wrap="square" lIns="0" tIns="0" rIns="0" bIns="0" rtlCol="0" anchor="ctr"/>
+          <a:lstStyle/>
+          <a:p>
+            <a:pPr indent="0" marL="0">
+              <a:buNone/>
+            </a:pPr>
+            <a:r>
+              <a:rPr lang="en-US" sz="1300" b="1" dirty="0">
+                <a:solidFill>
+                  <a:srgbClr val="0068B7"/>
+                </a:solidFill>
+                <a:latin typeface="Aptos" pitchFamily="34" charset="0"/>
+                <a:ea typeface="Aptos" pitchFamily="34" charset="-122"/>
+                <a:cs typeface="Aptos" pitchFamily="34" charset="-120"/>
+              </a:rPr>
+              <a:t>Concept checkpoints</a:t>
+            </a:r>
+            <a:endParaRPr lang="en-US" sz="1300" dirty="0"/>
+          </a:p>
+        </p:txBody>
+      </p:sp>
+      <p:sp>
+        <p:nvSpPr>
+          <p:cNvPr id="15" name="Text 13"/>
+          <p:cNvSpPr/>
+          <p:nvPr/>
+        </p:nvSpPr>
+        <p:spPr>
+          <a:xfrm>
+            <a:off x="7818120" y="3300984"/>
+            <a:ext cx="3090672" cy="877824"/>
+          </a:xfrm>
+          <a:prstGeom prst="rect">
+            <a:avLst/>
+          </a:prstGeom>
+          <a:noFill/>
+          <a:ln/>
+        </p:spPr>
+        <p:txBody>
+          <a:bodyPr wrap="square" lIns="254" tIns="254" rIns="254" bIns="254" rtlCol="0" anchor="t">
+            <a:normAutofit/>
+          </a:bodyPr>
+          <a:lstStyle/>
+          <a:p>
+            <a:r>
+              <a:rPr lang="en-US" sz="1380" dirty="0">
+                <a:solidFill>
+                  <a:srgbClr val="17364A"/>
+                </a:solidFill>
+                <a:latin typeface="Aptos" pitchFamily="34" charset="0"/>
+                <a:ea typeface="Aptos" pitchFamily="34" charset="-122"/>
+                <a:cs typeface="Aptos" pitchFamily="34" charset="-120"/>
+              </a:rPr>
+              <a:t>For AI use case intake, teams should add screening questions that identify whether the.</a:t>
+            </a:r>
+            <a:endParaRPr lang="en-US" sz="1380" dirty="0"/>
+          </a:p>
+          <a:p>
+            <a:r>
+              <a:rPr lang="en-US" sz="1380" dirty="0">
+                <a:solidFill>
+                  <a:srgbClr val="17364A"/>
+                </a:solidFill>
+                <a:latin typeface="Aptos" pitchFamily="34" charset="0"/>
+                <a:ea typeface="Aptos" pitchFamily="34" charset="-122"/>
+                <a:cs typeface="Aptos" pitchFamily="34" charset="-120"/>
+              </a:rPr>
+              <a:t>The intake form should require the proposer to identify known Tribal partners, anticipated.</a:t>
+            </a:r>
+            <a:endParaRPr lang="en-US" sz="1380" dirty="0"/>
+          </a:p>
+          <a:p>
+            <a:r>
+              <a:rPr lang="en-US" sz="1380" dirty="0">
+                <a:solidFill>
+                  <a:srgbClr val="17364A"/>
+                </a:solidFill>
+                <a:latin typeface="Aptos" pitchFamily="34" charset="0"/>
+                <a:ea typeface="Aptos" pitchFamily="34" charset="-122"/>
+                <a:cs typeface="Aptos" pitchFamily="34" charset="-120"/>
+              </a:rPr>
+              <a:t>A project should not advance to procurement, model development, pilot testing, or public.</a:t>
+            </a:r>
+            <a:endParaRPr lang="en-US" sz="1380" dirty="0"/>
+          </a:p>
+        </p:txBody>
       </p:sp>
       <p:sp>
         <p:nvSpPr>
           <p:cNvPr id="16" name="Shape 14"/>
-          <p:cNvSpPr/>
-          <p:nvPr/>
-        </p:nvSpPr>
-        <p:spPr>
-          <a:xfrm>
-            <a:off x="9089136" y="3456432"/>
-            <a:ext cx="566928" cy="566928"/>
-          </a:xfrm>
-          <a:prstGeom prst="ellipse">
-            <a:avLst/>
-          </a:prstGeom>
-          <a:solidFill>
-            <a:srgbClr val="6A4CA3"/>
-          </a:solidFill>
-          <a:ln w="12700">
-            <a:solidFill>
-              <a:srgbClr val="6A4CA3"/>
-            </a:solidFill>
-            <a:prstDash val="solid"/>
-          </a:ln>
-        </p:spPr>
-      </p:sp>
-      <p:sp>
-        <p:nvSpPr>
-          <p:cNvPr id="17" name="Shape 15"/>
-          <p:cNvSpPr/>
-          <p:nvPr/>
-        </p:nvSpPr>
-        <p:spPr>
-          <a:xfrm>
-            <a:off x="8385048" y="3419856"/>
-            <a:ext cx="1975104" cy="0"/>
-          </a:xfrm>
-          <a:prstGeom prst="line">
-            <a:avLst/>
-          </a:prstGeom>
-          <a:noFill/>
-          <a:ln w="25400">
-            <a:solidFill>
-              <a:srgbClr val="8ABBD8"/>
-            </a:solidFill>
-            <a:prstDash val="solid"/>
-          </a:ln>
-        </p:spPr>
-      </p:sp>
-      <p:sp>
-        <p:nvSpPr>
-          <p:cNvPr id="18" name="Shape 16"/>
-          <p:cNvSpPr/>
-          <p:nvPr/>
-        </p:nvSpPr>
-        <p:spPr>
-          <a:xfrm>
-            <a:off x="8202168" y="3630168"/>
-            <a:ext cx="1170432" cy="118872"/>
-          </a:xfrm>
-          <a:prstGeom prst="line">
-            <a:avLst/>
-          </a:prstGeom>
-          <a:noFill/>
-          <a:ln w="25400">
-            <a:solidFill>
-              <a:srgbClr val="8ABBD8"/>
-            </a:solidFill>
-            <a:prstDash val="solid"/>
-          </a:ln>
-        </p:spPr>
-      </p:sp>
-      <p:sp>
-        <p:nvSpPr>
-          <p:cNvPr id="19" name="Shape 17"/>
-          <p:cNvSpPr/>
-          <p:nvPr/>
-        </p:nvSpPr>
-        <p:spPr>
-          <a:xfrm>
-            <a:off x="10543032" y="3630168"/>
-            <a:ext cx="-1170432" cy="118872"/>
-          </a:xfrm>
-          <a:prstGeom prst="line">
-            <a:avLst/>
-          </a:prstGeom>
-          <a:noFill/>
-          <a:ln w="25400">
-            <a:solidFill>
-              <a:srgbClr val="8ABBD8"/>
-            </a:solidFill>
-            <a:prstDash val="solid"/>
-          </a:ln>
-        </p:spPr>
-      </p:sp>
-      <p:sp>
-        <p:nvSpPr>
-          <p:cNvPr id="20" name="Text 18"/>
-          <p:cNvSpPr/>
-          <p:nvPr/>
-        </p:nvSpPr>
-        <p:spPr>
-          <a:xfrm>
-            <a:off x="7863840" y="4069080"/>
-            <a:ext cx="3017520" cy="164592"/>
-          </a:xfrm>
-          <a:prstGeom prst="rect">
-            <a:avLst/>
-          </a:prstGeom>
-          <a:noFill/>
-          <a:ln/>
-        </p:spPr>
-        <p:txBody>
-          <a:bodyPr wrap="square" lIns="0" tIns="0" rIns="0" bIns="0" rtlCol="0" anchor="ctr"/>
-          <a:lstStyle/>
-          <a:p>
-            <a:pPr algn="ctr" indent="0" marL="0">
-              <a:buNone/>
-            </a:pPr>
-            <a:r>
-              <a:rPr lang="en-US" sz="900" b="1" dirty="0">
-                <a:solidFill>
-                  <a:srgbClr val="003A63"/>
-                </a:solidFill>
-                <a:latin typeface="Aptos" pitchFamily="34" charset="0"/>
-                <a:ea typeface="Aptos" pitchFamily="34" charset="-122"/>
-                <a:cs typeface="Aptos" pitchFamily="34" charset="-120"/>
-              </a:rPr>
-              <a:t>Decision rights</a:t>
-            </a:r>
-            <a:endParaRPr lang="en-US" sz="900" dirty="0"/>
-          </a:p>
-        </p:txBody>
-      </p:sp>
-      <p:sp>
-        <p:nvSpPr>
-          <p:cNvPr id="21" name="Shape 19"/>
           <p:cNvSpPr/>
           <p:nvPr/>
         </p:nvSpPr>
@@ -12891,7 +11939,7 @@
       </p:sp>
       <p:sp>
         <p:nvSpPr>
-          <p:cNvPr id="22" name="Text 20"/>
+          <p:cNvPr id="17" name="Text 15"/>
           <p:cNvSpPr/>
           <p:nvPr/>
         </p:nvSpPr>
@@ -12930,7 +11978,7 @@
       </p:sp>
       <p:sp>
         <p:nvSpPr>
-          <p:cNvPr id="23" name="Text 21"/>
+          <p:cNvPr id="18" name="Text 16"/>
           <p:cNvSpPr/>
           <p:nvPr/>
         </p:nvSpPr>
@@ -13438,13 +12486,11 @@
             </a:avLst>
           </a:prstGeom>
           <a:solidFill>
-            <a:srgbClr val="FFFFFF">
-              <a:alpha val="88000"/>
-            </a:srgbClr>
+            <a:srgbClr val="FFFFFF"/>
           </a:solidFill>
           <a:ln w="12700">
             <a:solidFill>
-              <a:srgbClr val="D6E8F2"/>
+              <a:srgbClr val="B9D7E6"/>
             </a:solidFill>
             <a:prstDash val="solid"/>
           </a:ln>
@@ -13452,190 +12498,112 @@
       </p:sp>
       <p:sp>
         <p:nvSpPr>
-          <p:cNvPr id="14" name="Shape 12"/>
-          <p:cNvSpPr/>
-          <p:nvPr/>
-        </p:nvSpPr>
-        <p:spPr>
-          <a:xfrm>
-            <a:off x="7891272" y="3108960"/>
-            <a:ext cx="566928" cy="566928"/>
-          </a:xfrm>
-          <a:prstGeom prst="ellipse">
-            <a:avLst/>
-          </a:prstGeom>
-          <a:solidFill>
-            <a:srgbClr val="0068B7"/>
-          </a:solidFill>
-          <a:ln w="12700">
-            <a:solidFill>
-              <a:srgbClr val="0068B7"/>
-            </a:solidFill>
-            <a:prstDash val="solid"/>
-          </a:ln>
-        </p:spPr>
-      </p:sp>
-      <p:sp>
-        <p:nvSpPr>
-          <p:cNvPr id="15" name="Shape 13"/>
-          <p:cNvSpPr/>
-          <p:nvPr/>
-        </p:nvSpPr>
-        <p:spPr>
-          <a:xfrm>
-            <a:off x="10287000" y="3108960"/>
-            <a:ext cx="566928" cy="566928"/>
-          </a:xfrm>
-          <a:prstGeom prst="ellipse">
-            <a:avLst/>
-          </a:prstGeom>
-          <a:solidFill>
-            <a:srgbClr val="2F8A28"/>
-          </a:solidFill>
-          <a:ln w="12700">
-            <a:solidFill>
-              <a:srgbClr val="2F8A28"/>
-            </a:solidFill>
-            <a:prstDash val="solid"/>
-          </a:ln>
-        </p:spPr>
+          <p:cNvPr id="14" name="Text 12"/>
+          <p:cNvSpPr/>
+          <p:nvPr/>
+        </p:nvSpPr>
+        <p:spPr>
+          <a:xfrm>
+            <a:off x="7799832" y="2935224"/>
+            <a:ext cx="3145536" cy="256032"/>
+          </a:xfrm>
+          <a:prstGeom prst="rect">
+            <a:avLst/>
+          </a:prstGeom>
+          <a:noFill/>
+          <a:ln/>
+        </p:spPr>
+        <p:txBody>
+          <a:bodyPr wrap="square" lIns="0" tIns="0" rIns="0" bIns="0" rtlCol="0" anchor="ctr"/>
+          <a:lstStyle/>
+          <a:p>
+            <a:pPr indent="0" marL="0">
+              <a:buNone/>
+            </a:pPr>
+            <a:r>
+              <a:rPr lang="en-US" sz="1300" b="1" dirty="0">
+                <a:solidFill>
+                  <a:srgbClr val="0068B7"/>
+                </a:solidFill>
+                <a:latin typeface="Aptos" pitchFamily="34" charset="0"/>
+                <a:ea typeface="Aptos" pitchFamily="34" charset="-122"/>
+                <a:cs typeface="Aptos" pitchFamily="34" charset="-120"/>
+              </a:rPr>
+              <a:t>Concept checkpoints</a:t>
+            </a:r>
+            <a:endParaRPr lang="en-US" sz="1300" dirty="0"/>
+          </a:p>
+        </p:txBody>
+      </p:sp>
+      <p:sp>
+        <p:nvSpPr>
+          <p:cNvPr id="15" name="Text 13"/>
+          <p:cNvSpPr/>
+          <p:nvPr/>
+        </p:nvSpPr>
+        <p:spPr>
+          <a:xfrm>
+            <a:off x="7818120" y="3300984"/>
+            <a:ext cx="3090672" cy="877824"/>
+          </a:xfrm>
+          <a:prstGeom prst="rect">
+            <a:avLst/>
+          </a:prstGeom>
+          <a:noFill/>
+          <a:ln/>
+        </p:spPr>
+        <p:txBody>
+          <a:bodyPr wrap="square" lIns="254" tIns="254" rIns="254" bIns="254" rtlCol="0" anchor="t">
+            <a:normAutofit/>
+          </a:bodyPr>
+          <a:lstStyle/>
+          <a:p>
+            <a:r>
+              <a:rPr lang="en-US" sz="1380" dirty="0">
+                <a:solidFill>
+                  <a:srgbClr val="17364A"/>
+                </a:solidFill>
+                <a:latin typeface="Aptos" pitchFamily="34" charset="0"/>
+                <a:ea typeface="Aptos" pitchFamily="34" charset="-122"/>
+                <a:cs typeface="Aptos" pitchFamily="34" charset="-120"/>
+              </a:rPr>
+              <a:t>Before using AI with health data that may involve Tribal Nations or AI/AN participants,.</a:t>
+            </a:r>
+            <a:endParaRPr lang="en-US" sz="1380" dirty="0"/>
+          </a:p>
+          <a:p>
+            <a:r>
+              <a:rPr lang="en-US" sz="1380" dirty="0">
+                <a:solidFill>
+                  <a:srgbClr val="17364A"/>
+                </a:solidFill>
+                <a:latin typeface="Aptos" pitchFamily="34" charset="0"/>
+                <a:ea typeface="Aptos" pitchFamily="34" charset="-122"/>
+                <a:cs typeface="Aptos" pitchFamily="34" charset="-120"/>
+              </a:rPr>
+              <a:t>They should ask whether the project has identified affected Tribal Nations, relevant.</a:t>
+            </a:r>
+            <a:endParaRPr lang="en-US" sz="1380" dirty="0"/>
+          </a:p>
+          <a:p>
+            <a:r>
+              <a:rPr lang="en-US" sz="1380" dirty="0">
+                <a:solidFill>
+                  <a:srgbClr val="17364A"/>
+                </a:solidFill>
+                <a:latin typeface="Aptos" pitchFamily="34" charset="0"/>
+                <a:ea typeface="Aptos" pitchFamily="34" charset="-122"/>
+                <a:cs typeface="Aptos" pitchFamily="34" charset="-120"/>
+              </a:rPr>
+              <a:t>They should also consider whether the proposed AI use creates community benefit as defined.</a:t>
+            </a:r>
+            <a:endParaRPr lang="en-US" sz="1380" dirty="0"/>
+          </a:p>
+        </p:txBody>
       </p:sp>
       <p:sp>
         <p:nvSpPr>
           <p:cNvPr id="16" name="Shape 14"/>
-          <p:cNvSpPr/>
-          <p:nvPr/>
-        </p:nvSpPr>
-        <p:spPr>
-          <a:xfrm>
-            <a:off x="9089136" y="3456432"/>
-            <a:ext cx="566928" cy="566928"/>
-          </a:xfrm>
-          <a:prstGeom prst="ellipse">
-            <a:avLst/>
-          </a:prstGeom>
-          <a:solidFill>
-            <a:srgbClr val="6A4CA3"/>
-          </a:solidFill>
-          <a:ln w="12700">
-            <a:solidFill>
-              <a:srgbClr val="6A4CA3"/>
-            </a:solidFill>
-            <a:prstDash val="solid"/>
-          </a:ln>
-        </p:spPr>
-      </p:sp>
-      <p:sp>
-        <p:nvSpPr>
-          <p:cNvPr id="17" name="Shape 15"/>
-          <p:cNvSpPr/>
-          <p:nvPr/>
-        </p:nvSpPr>
-        <p:spPr>
-          <a:xfrm>
-            <a:off x="8385048" y="3419856"/>
-            <a:ext cx="1975104" cy="0"/>
-          </a:xfrm>
-          <a:prstGeom prst="line">
-            <a:avLst/>
-          </a:prstGeom>
-          <a:noFill/>
-          <a:ln w="25400">
-            <a:solidFill>
-              <a:srgbClr val="8ABBD8"/>
-            </a:solidFill>
-            <a:prstDash val="solid"/>
-          </a:ln>
-        </p:spPr>
-      </p:sp>
-      <p:sp>
-        <p:nvSpPr>
-          <p:cNvPr id="18" name="Shape 16"/>
-          <p:cNvSpPr/>
-          <p:nvPr/>
-        </p:nvSpPr>
-        <p:spPr>
-          <a:xfrm>
-            <a:off x="8202168" y="3630168"/>
-            <a:ext cx="1170432" cy="118872"/>
-          </a:xfrm>
-          <a:prstGeom prst="line">
-            <a:avLst/>
-          </a:prstGeom>
-          <a:noFill/>
-          <a:ln w="25400">
-            <a:solidFill>
-              <a:srgbClr val="8ABBD8"/>
-            </a:solidFill>
-            <a:prstDash val="solid"/>
-          </a:ln>
-        </p:spPr>
-      </p:sp>
-      <p:sp>
-        <p:nvSpPr>
-          <p:cNvPr id="19" name="Shape 17"/>
-          <p:cNvSpPr/>
-          <p:nvPr/>
-        </p:nvSpPr>
-        <p:spPr>
-          <a:xfrm>
-            <a:off x="10543032" y="3630168"/>
-            <a:ext cx="-1170432" cy="118872"/>
-          </a:xfrm>
-          <a:prstGeom prst="line">
-            <a:avLst/>
-          </a:prstGeom>
-          <a:noFill/>
-          <a:ln w="25400">
-            <a:solidFill>
-              <a:srgbClr val="8ABBD8"/>
-            </a:solidFill>
-            <a:prstDash val="solid"/>
-          </a:ln>
-        </p:spPr>
-      </p:sp>
-      <p:sp>
-        <p:nvSpPr>
-          <p:cNvPr id="20" name="Text 18"/>
-          <p:cNvSpPr/>
-          <p:nvPr/>
-        </p:nvSpPr>
-        <p:spPr>
-          <a:xfrm>
-            <a:off x="7863840" y="4069080"/>
-            <a:ext cx="3017520" cy="164592"/>
-          </a:xfrm>
-          <a:prstGeom prst="rect">
-            <a:avLst/>
-          </a:prstGeom>
-          <a:noFill/>
-          <a:ln/>
-        </p:spPr>
-        <p:txBody>
-          <a:bodyPr wrap="square" lIns="0" tIns="0" rIns="0" bIns="0" rtlCol="0" anchor="ctr"/>
-          <a:lstStyle/>
-          <a:p>
-            <a:pPr algn="ctr" indent="0" marL="0">
-              <a:buNone/>
-            </a:pPr>
-            <a:r>
-              <a:rPr lang="en-US" sz="900" b="1" dirty="0">
-                <a:solidFill>
-                  <a:srgbClr val="003A63"/>
-                </a:solidFill>
-                <a:latin typeface="Aptos" pitchFamily="34" charset="0"/>
-                <a:ea typeface="Aptos" pitchFamily="34" charset="-122"/>
-                <a:cs typeface="Aptos" pitchFamily="34" charset="-120"/>
-              </a:rPr>
-              <a:t>Decision rights</a:t>
-            </a:r>
-            <a:endParaRPr lang="en-US" sz="900" dirty="0"/>
-          </a:p>
-        </p:txBody>
-      </p:sp>
-      <p:sp>
-        <p:nvSpPr>
-          <p:cNvPr id="21" name="Shape 19"/>
           <p:cNvSpPr/>
           <p:nvPr/>
         </p:nvSpPr>
@@ -13662,7 +12630,7 @@
       </p:sp>
       <p:sp>
         <p:nvSpPr>
-          <p:cNvPr id="22" name="Text 20"/>
+          <p:cNvPr id="17" name="Text 15"/>
           <p:cNvSpPr/>
           <p:nvPr/>
         </p:nvSpPr>
@@ -13701,7 +12669,7 @@
       </p:sp>
       <p:sp>
         <p:nvSpPr>
-          <p:cNvPr id="23" name="Text 21"/>
+          <p:cNvPr id="18" name="Text 16"/>
           <p:cNvSpPr/>
           <p:nvPr/>
         </p:nvSpPr>
@@ -14209,13 +13177,11 @@
             </a:avLst>
           </a:prstGeom>
           <a:solidFill>
-            <a:srgbClr val="FFFFFF">
-              <a:alpha val="88000"/>
-            </a:srgbClr>
+            <a:srgbClr val="FFFFFF"/>
           </a:solidFill>
           <a:ln w="12700">
             <a:solidFill>
-              <a:srgbClr val="D6E8F2"/>
+              <a:srgbClr val="B9D7E6"/>
             </a:solidFill>
             <a:prstDash val="solid"/>
           </a:ln>
@@ -14223,190 +13189,112 @@
       </p:sp>
       <p:sp>
         <p:nvSpPr>
-          <p:cNvPr id="14" name="Shape 12"/>
-          <p:cNvSpPr/>
-          <p:nvPr/>
-        </p:nvSpPr>
-        <p:spPr>
-          <a:xfrm>
-            <a:off x="7891272" y="3108960"/>
-            <a:ext cx="566928" cy="566928"/>
-          </a:xfrm>
-          <a:prstGeom prst="ellipse">
-            <a:avLst/>
-          </a:prstGeom>
-          <a:solidFill>
-            <a:srgbClr val="0068B7"/>
-          </a:solidFill>
-          <a:ln w="12700">
-            <a:solidFill>
-              <a:srgbClr val="0068B7"/>
-            </a:solidFill>
-            <a:prstDash val="solid"/>
-          </a:ln>
-        </p:spPr>
-      </p:sp>
-      <p:sp>
-        <p:nvSpPr>
-          <p:cNvPr id="15" name="Shape 13"/>
-          <p:cNvSpPr/>
-          <p:nvPr/>
-        </p:nvSpPr>
-        <p:spPr>
-          <a:xfrm>
-            <a:off x="10287000" y="3108960"/>
-            <a:ext cx="566928" cy="566928"/>
-          </a:xfrm>
-          <a:prstGeom prst="ellipse">
-            <a:avLst/>
-          </a:prstGeom>
-          <a:solidFill>
-            <a:srgbClr val="2F8A28"/>
-          </a:solidFill>
-          <a:ln w="12700">
-            <a:solidFill>
-              <a:srgbClr val="2F8A28"/>
-            </a:solidFill>
-            <a:prstDash val="solid"/>
-          </a:ln>
-        </p:spPr>
+          <p:cNvPr id="14" name="Text 12"/>
+          <p:cNvSpPr/>
+          <p:nvPr/>
+        </p:nvSpPr>
+        <p:spPr>
+          <a:xfrm>
+            <a:off x="7799832" y="2935224"/>
+            <a:ext cx="3145536" cy="256032"/>
+          </a:xfrm>
+          <a:prstGeom prst="rect">
+            <a:avLst/>
+          </a:prstGeom>
+          <a:noFill/>
+          <a:ln/>
+        </p:spPr>
+        <p:txBody>
+          <a:bodyPr wrap="square" lIns="0" tIns="0" rIns="0" bIns="0" rtlCol="0" anchor="ctr"/>
+          <a:lstStyle/>
+          <a:p>
+            <a:pPr indent="0" marL="0">
+              <a:buNone/>
+            </a:pPr>
+            <a:r>
+              <a:rPr lang="en-US" sz="1300" b="1" dirty="0">
+                <a:solidFill>
+                  <a:srgbClr val="0068B7"/>
+                </a:solidFill>
+                <a:latin typeface="Aptos" pitchFamily="34" charset="0"/>
+                <a:ea typeface="Aptos" pitchFamily="34" charset="-122"/>
+                <a:cs typeface="Aptos" pitchFamily="34" charset="-120"/>
+              </a:rPr>
+              <a:t>Concept checkpoints</a:t>
+            </a:r>
+            <a:endParaRPr lang="en-US" sz="1300" dirty="0"/>
+          </a:p>
+        </p:txBody>
+      </p:sp>
+      <p:sp>
+        <p:nvSpPr>
+          <p:cNvPr id="15" name="Text 13"/>
+          <p:cNvSpPr/>
+          <p:nvPr/>
+        </p:nvSpPr>
+        <p:spPr>
+          <a:xfrm>
+            <a:off x="7818120" y="3300984"/>
+            <a:ext cx="3090672" cy="877824"/>
+          </a:xfrm>
+          <a:prstGeom prst="rect">
+            <a:avLst/>
+          </a:prstGeom>
+          <a:noFill/>
+          <a:ln/>
+        </p:spPr>
+        <p:txBody>
+          <a:bodyPr wrap="square" lIns="254" tIns="254" rIns="254" bIns="254" rtlCol="0" anchor="t">
+            <a:normAutofit/>
+          </a:bodyPr>
+          <a:lstStyle/>
+          <a:p>
+            <a:r>
+              <a:rPr lang="en-US" sz="1380" dirty="0">
+                <a:solidFill>
+                  <a:srgbClr val="17364A"/>
+                </a:solidFill>
+                <a:latin typeface="Aptos" pitchFamily="34" charset="0"/>
+                <a:ea typeface="Aptos" pitchFamily="34" charset="-122"/>
+                <a:cs typeface="Aptos" pitchFamily="34" charset="-120"/>
+              </a:rPr>
+              <a:t>Select a proposed AI-supported public health project that could involve Tribal Nations,.</a:t>
+            </a:r>
+            <a:endParaRPr lang="en-US" sz="1380" dirty="0"/>
+          </a:p>
+          <a:p>
+            <a:r>
+              <a:rPr lang="en-US" sz="1380" dirty="0">
+                <a:solidFill>
+                  <a:srgbClr val="17364A"/>
+                </a:solidFill>
+                <a:latin typeface="Aptos" pitchFamily="34" charset="0"/>
+                <a:ea typeface="Aptos" pitchFamily="34" charset="-122"/>
+                <a:cs typeface="Aptos" pitchFamily="34" charset="-120"/>
+              </a:rPr>
+              <a:t>The project may be a surveillance summary tool, predictive model, automated transcription.</a:t>
+            </a:r>
+            <a:endParaRPr lang="en-US" sz="1380" dirty="0"/>
+          </a:p>
+          <a:p>
+            <a:r>
+              <a:rPr lang="en-US" sz="1380" dirty="0">
+                <a:solidFill>
+                  <a:srgbClr val="17364A"/>
+                </a:solidFill>
+                <a:latin typeface="Aptos" pitchFamily="34" charset="0"/>
+                <a:ea typeface="Aptos" pitchFamily="34" charset="-122"/>
+                <a:cs typeface="Aptos" pitchFamily="34" charset="-120"/>
+              </a:rPr>
+              <a:t>The memo should identify the public health purpose, data sources, affected communities,.</a:t>
+            </a:r>
+            <a:endParaRPr lang="en-US" sz="1380" dirty="0"/>
+          </a:p>
+        </p:txBody>
       </p:sp>
       <p:sp>
         <p:nvSpPr>
           <p:cNvPr id="16" name="Shape 14"/>
-          <p:cNvSpPr/>
-          <p:nvPr/>
-        </p:nvSpPr>
-        <p:spPr>
-          <a:xfrm>
-            <a:off x="9089136" y="3456432"/>
-            <a:ext cx="566928" cy="566928"/>
-          </a:xfrm>
-          <a:prstGeom prst="ellipse">
-            <a:avLst/>
-          </a:prstGeom>
-          <a:solidFill>
-            <a:srgbClr val="6A4CA3"/>
-          </a:solidFill>
-          <a:ln w="12700">
-            <a:solidFill>
-              <a:srgbClr val="6A4CA3"/>
-            </a:solidFill>
-            <a:prstDash val="solid"/>
-          </a:ln>
-        </p:spPr>
-      </p:sp>
-      <p:sp>
-        <p:nvSpPr>
-          <p:cNvPr id="17" name="Shape 15"/>
-          <p:cNvSpPr/>
-          <p:nvPr/>
-        </p:nvSpPr>
-        <p:spPr>
-          <a:xfrm>
-            <a:off x="8385048" y="3419856"/>
-            <a:ext cx="1975104" cy="0"/>
-          </a:xfrm>
-          <a:prstGeom prst="line">
-            <a:avLst/>
-          </a:prstGeom>
-          <a:noFill/>
-          <a:ln w="25400">
-            <a:solidFill>
-              <a:srgbClr val="8ABBD8"/>
-            </a:solidFill>
-            <a:prstDash val="solid"/>
-          </a:ln>
-        </p:spPr>
-      </p:sp>
-      <p:sp>
-        <p:nvSpPr>
-          <p:cNvPr id="18" name="Shape 16"/>
-          <p:cNvSpPr/>
-          <p:nvPr/>
-        </p:nvSpPr>
-        <p:spPr>
-          <a:xfrm>
-            <a:off x="8202168" y="3630168"/>
-            <a:ext cx="1170432" cy="118872"/>
-          </a:xfrm>
-          <a:prstGeom prst="line">
-            <a:avLst/>
-          </a:prstGeom>
-          <a:noFill/>
-          <a:ln w="25400">
-            <a:solidFill>
-              <a:srgbClr val="8ABBD8"/>
-            </a:solidFill>
-            <a:prstDash val="solid"/>
-          </a:ln>
-        </p:spPr>
-      </p:sp>
-      <p:sp>
-        <p:nvSpPr>
-          <p:cNvPr id="19" name="Shape 17"/>
-          <p:cNvSpPr/>
-          <p:nvPr/>
-        </p:nvSpPr>
-        <p:spPr>
-          <a:xfrm>
-            <a:off x="10543032" y="3630168"/>
-            <a:ext cx="-1170432" cy="118872"/>
-          </a:xfrm>
-          <a:prstGeom prst="line">
-            <a:avLst/>
-          </a:prstGeom>
-          <a:noFill/>
-          <a:ln w="25400">
-            <a:solidFill>
-              <a:srgbClr val="8ABBD8"/>
-            </a:solidFill>
-            <a:prstDash val="solid"/>
-          </a:ln>
-        </p:spPr>
-      </p:sp>
-      <p:sp>
-        <p:nvSpPr>
-          <p:cNvPr id="20" name="Text 18"/>
-          <p:cNvSpPr/>
-          <p:nvPr/>
-        </p:nvSpPr>
-        <p:spPr>
-          <a:xfrm>
-            <a:off x="7863840" y="4069080"/>
-            <a:ext cx="3017520" cy="164592"/>
-          </a:xfrm>
-          <a:prstGeom prst="rect">
-            <a:avLst/>
-          </a:prstGeom>
-          <a:noFill/>
-          <a:ln/>
-        </p:spPr>
-        <p:txBody>
-          <a:bodyPr wrap="square" lIns="0" tIns="0" rIns="0" bIns="0" rtlCol="0" anchor="ctr"/>
-          <a:lstStyle/>
-          <a:p>
-            <a:pPr algn="ctr" indent="0" marL="0">
-              <a:buNone/>
-            </a:pPr>
-            <a:r>
-              <a:rPr lang="en-US" sz="900" b="1" dirty="0">
-                <a:solidFill>
-                  <a:srgbClr val="003A63"/>
-                </a:solidFill>
-                <a:latin typeface="Aptos" pitchFamily="34" charset="0"/>
-                <a:ea typeface="Aptos" pitchFamily="34" charset="-122"/>
-                <a:cs typeface="Aptos" pitchFamily="34" charset="-120"/>
-              </a:rPr>
-              <a:t>Decision rights</a:t>
-            </a:r>
-            <a:endParaRPr lang="en-US" sz="900" dirty="0"/>
-          </a:p>
-        </p:txBody>
-      </p:sp>
-      <p:sp>
-        <p:nvSpPr>
-          <p:cNvPr id="21" name="Shape 19"/>
           <p:cNvSpPr/>
           <p:nvPr/>
         </p:nvSpPr>
@@ -14433,7 +13321,7 @@
       </p:sp>
       <p:sp>
         <p:nvSpPr>
-          <p:cNvPr id="22" name="Text 20"/>
+          <p:cNvPr id="17" name="Text 15"/>
           <p:cNvSpPr/>
           <p:nvPr/>
         </p:nvSpPr>
@@ -14472,7 +13360,7 @@
       </p:sp>
       <p:sp>
         <p:nvSpPr>
-          <p:cNvPr id="23" name="Text 21"/>
+          <p:cNvPr id="18" name="Text 16"/>
           <p:cNvSpPr/>
           <p:nvPr/>
         </p:nvSpPr>
@@ -14980,13 +13868,11 @@
             </a:avLst>
           </a:prstGeom>
           <a:solidFill>
-            <a:srgbClr val="FFFFFF">
-              <a:alpha val="88000"/>
-            </a:srgbClr>
+            <a:srgbClr val="FFFFFF"/>
           </a:solidFill>
           <a:ln w="12700">
             <a:solidFill>
-              <a:srgbClr val="D6E8F2"/>
+              <a:srgbClr val="B9D7E6"/>
             </a:solidFill>
             <a:prstDash val="solid"/>
           </a:ln>
@@ -14994,190 +13880,112 @@
       </p:sp>
       <p:sp>
         <p:nvSpPr>
-          <p:cNvPr id="14" name="Shape 12"/>
-          <p:cNvSpPr/>
-          <p:nvPr/>
-        </p:nvSpPr>
-        <p:spPr>
-          <a:xfrm>
-            <a:off x="7891272" y="3108960"/>
-            <a:ext cx="566928" cy="566928"/>
-          </a:xfrm>
-          <a:prstGeom prst="ellipse">
-            <a:avLst/>
-          </a:prstGeom>
-          <a:solidFill>
-            <a:srgbClr val="0068B7"/>
-          </a:solidFill>
-          <a:ln w="12700">
-            <a:solidFill>
-              <a:srgbClr val="0068B7"/>
-            </a:solidFill>
-            <a:prstDash val="solid"/>
-          </a:ln>
-        </p:spPr>
-      </p:sp>
-      <p:sp>
-        <p:nvSpPr>
-          <p:cNvPr id="15" name="Shape 13"/>
-          <p:cNvSpPr/>
-          <p:nvPr/>
-        </p:nvSpPr>
-        <p:spPr>
-          <a:xfrm>
-            <a:off x="10287000" y="3108960"/>
-            <a:ext cx="566928" cy="566928"/>
-          </a:xfrm>
-          <a:prstGeom prst="ellipse">
-            <a:avLst/>
-          </a:prstGeom>
-          <a:solidFill>
-            <a:srgbClr val="2F8A28"/>
-          </a:solidFill>
-          <a:ln w="12700">
-            <a:solidFill>
-              <a:srgbClr val="2F8A28"/>
-            </a:solidFill>
-            <a:prstDash val="solid"/>
-          </a:ln>
-        </p:spPr>
+          <p:cNvPr id="14" name="Text 12"/>
+          <p:cNvSpPr/>
+          <p:nvPr/>
+        </p:nvSpPr>
+        <p:spPr>
+          <a:xfrm>
+            <a:off x="7799832" y="2935224"/>
+            <a:ext cx="3145536" cy="256032"/>
+          </a:xfrm>
+          <a:prstGeom prst="rect">
+            <a:avLst/>
+          </a:prstGeom>
+          <a:noFill/>
+          <a:ln/>
+        </p:spPr>
+        <p:txBody>
+          <a:bodyPr wrap="square" lIns="0" tIns="0" rIns="0" bIns="0" rtlCol="0" anchor="ctr"/>
+          <a:lstStyle/>
+          <a:p>
+            <a:pPr indent="0" marL="0">
+              <a:buNone/>
+            </a:pPr>
+            <a:r>
+              <a:rPr lang="en-US" sz="1300" b="1" dirty="0">
+                <a:solidFill>
+                  <a:srgbClr val="0068B7"/>
+                </a:solidFill>
+                <a:latin typeface="Aptos" pitchFamily="34" charset="0"/>
+                <a:ea typeface="Aptos" pitchFamily="34" charset="-122"/>
+                <a:cs typeface="Aptos" pitchFamily="34" charset="-120"/>
+              </a:rPr>
+              <a:t>Concept checkpoints</a:t>
+            </a:r>
+            <a:endParaRPr lang="en-US" sz="1300" dirty="0"/>
+          </a:p>
+        </p:txBody>
+      </p:sp>
+      <p:sp>
+        <p:nvSpPr>
+          <p:cNvPr id="15" name="Text 13"/>
+          <p:cNvSpPr/>
+          <p:nvPr/>
+        </p:nvSpPr>
+        <p:spPr>
+          <a:xfrm>
+            <a:off x="7818120" y="3300984"/>
+            <a:ext cx="3090672" cy="877824"/>
+          </a:xfrm>
+          <a:prstGeom prst="rect">
+            <a:avLst/>
+          </a:prstGeom>
+          <a:noFill/>
+          <a:ln/>
+        </p:spPr>
+        <p:txBody>
+          <a:bodyPr wrap="square" lIns="254" tIns="254" rIns="254" bIns="254" rtlCol="0" anchor="t">
+            <a:normAutofit/>
+          </a:bodyPr>
+          <a:lstStyle/>
+          <a:p>
+            <a:r>
+              <a:rPr lang="en-US" sz="1380" dirty="0">
+                <a:solidFill>
+                  <a:srgbClr val="17364A"/>
+                </a:solidFill>
+                <a:latin typeface="Aptos" pitchFamily="34" charset="0"/>
+                <a:ea typeface="Aptos" pitchFamily="34" charset="-122"/>
+                <a:cs typeface="Aptos" pitchFamily="34" charset="-120"/>
+              </a:rPr>
+              <a:t>The expected artifact is a Tribal Sovereignty and Indigenous Data Governance Screening.</a:t>
+            </a:r>
+            <a:endParaRPr lang="en-US" sz="1380" dirty="0"/>
+          </a:p>
+          <a:p>
+            <a:r>
+              <a:rPr lang="en-US" sz="1380" dirty="0">
+                <a:solidFill>
+                  <a:srgbClr val="17364A"/>
+                </a:solidFill>
+                <a:latin typeface="Aptos" pitchFamily="34" charset="0"/>
+                <a:ea typeface="Aptos" pitchFamily="34" charset="-122"/>
+                <a:cs typeface="Aptos" pitchFamily="34" charset="-120"/>
+              </a:rPr>
+              <a:t>The memo should be complete enough for a supervisor, AI governance body, Tribal liaison,.</a:t>
+            </a:r>
+            <a:endParaRPr lang="en-US" sz="1380" dirty="0"/>
+          </a:p>
+          <a:p>
+            <a:r>
+              <a:rPr lang="en-US" sz="1380" dirty="0">
+                <a:solidFill>
+                  <a:srgbClr val="17364A"/>
+                </a:solidFill>
+                <a:latin typeface="Aptos" pitchFamily="34" charset="0"/>
+                <a:ea typeface="Aptos" pitchFamily="34" charset="-122"/>
+                <a:cs typeface="Aptos" pitchFamily="34" charset="-120"/>
+              </a:rPr>
+              <a:t>It should distinguish known facts from assumptions and identify what cannot be decided.</a:t>
+            </a:r>
+            <a:endParaRPr lang="en-US" sz="1380" dirty="0"/>
+          </a:p>
+        </p:txBody>
       </p:sp>
       <p:sp>
         <p:nvSpPr>
           <p:cNvPr id="16" name="Shape 14"/>
-          <p:cNvSpPr/>
-          <p:nvPr/>
-        </p:nvSpPr>
-        <p:spPr>
-          <a:xfrm>
-            <a:off x="9089136" y="3456432"/>
-            <a:ext cx="566928" cy="566928"/>
-          </a:xfrm>
-          <a:prstGeom prst="ellipse">
-            <a:avLst/>
-          </a:prstGeom>
-          <a:solidFill>
-            <a:srgbClr val="6A4CA3"/>
-          </a:solidFill>
-          <a:ln w="12700">
-            <a:solidFill>
-              <a:srgbClr val="6A4CA3"/>
-            </a:solidFill>
-            <a:prstDash val="solid"/>
-          </a:ln>
-        </p:spPr>
-      </p:sp>
-      <p:sp>
-        <p:nvSpPr>
-          <p:cNvPr id="17" name="Shape 15"/>
-          <p:cNvSpPr/>
-          <p:nvPr/>
-        </p:nvSpPr>
-        <p:spPr>
-          <a:xfrm>
-            <a:off x="8385048" y="3419856"/>
-            <a:ext cx="1975104" cy="0"/>
-          </a:xfrm>
-          <a:prstGeom prst="line">
-            <a:avLst/>
-          </a:prstGeom>
-          <a:noFill/>
-          <a:ln w="25400">
-            <a:solidFill>
-              <a:srgbClr val="8ABBD8"/>
-            </a:solidFill>
-            <a:prstDash val="solid"/>
-          </a:ln>
-        </p:spPr>
-      </p:sp>
-      <p:sp>
-        <p:nvSpPr>
-          <p:cNvPr id="18" name="Shape 16"/>
-          <p:cNvSpPr/>
-          <p:nvPr/>
-        </p:nvSpPr>
-        <p:spPr>
-          <a:xfrm>
-            <a:off x="8202168" y="3630168"/>
-            <a:ext cx="1170432" cy="118872"/>
-          </a:xfrm>
-          <a:prstGeom prst="line">
-            <a:avLst/>
-          </a:prstGeom>
-          <a:noFill/>
-          <a:ln w="25400">
-            <a:solidFill>
-              <a:srgbClr val="8ABBD8"/>
-            </a:solidFill>
-            <a:prstDash val="solid"/>
-          </a:ln>
-        </p:spPr>
-      </p:sp>
-      <p:sp>
-        <p:nvSpPr>
-          <p:cNvPr id="19" name="Shape 17"/>
-          <p:cNvSpPr/>
-          <p:nvPr/>
-        </p:nvSpPr>
-        <p:spPr>
-          <a:xfrm>
-            <a:off x="10543032" y="3630168"/>
-            <a:ext cx="-1170432" cy="118872"/>
-          </a:xfrm>
-          <a:prstGeom prst="line">
-            <a:avLst/>
-          </a:prstGeom>
-          <a:noFill/>
-          <a:ln w="25400">
-            <a:solidFill>
-              <a:srgbClr val="8ABBD8"/>
-            </a:solidFill>
-            <a:prstDash val="solid"/>
-          </a:ln>
-        </p:spPr>
-      </p:sp>
-      <p:sp>
-        <p:nvSpPr>
-          <p:cNvPr id="20" name="Text 18"/>
-          <p:cNvSpPr/>
-          <p:nvPr/>
-        </p:nvSpPr>
-        <p:spPr>
-          <a:xfrm>
-            <a:off x="7863840" y="4069080"/>
-            <a:ext cx="3017520" cy="164592"/>
-          </a:xfrm>
-          <a:prstGeom prst="rect">
-            <a:avLst/>
-          </a:prstGeom>
-          <a:noFill/>
-          <a:ln/>
-        </p:spPr>
-        <p:txBody>
-          <a:bodyPr wrap="square" lIns="0" tIns="0" rIns="0" bIns="0" rtlCol="0" anchor="ctr"/>
-          <a:lstStyle/>
-          <a:p>
-            <a:pPr algn="ctr" indent="0" marL="0">
-              <a:buNone/>
-            </a:pPr>
-            <a:r>
-              <a:rPr lang="en-US" sz="900" b="1" dirty="0">
-                <a:solidFill>
-                  <a:srgbClr val="003A63"/>
-                </a:solidFill>
-                <a:latin typeface="Aptos" pitchFamily="34" charset="0"/>
-                <a:ea typeface="Aptos" pitchFamily="34" charset="-122"/>
-                <a:cs typeface="Aptos" pitchFamily="34" charset="-120"/>
-              </a:rPr>
-              <a:t>Decision rights</a:t>
-            </a:r>
-            <a:endParaRPr lang="en-US" sz="900" dirty="0"/>
-          </a:p>
-        </p:txBody>
-      </p:sp>
-      <p:sp>
-        <p:nvSpPr>
-          <p:cNvPr id="21" name="Shape 19"/>
           <p:cNvSpPr/>
           <p:nvPr/>
         </p:nvSpPr>
@@ -15204,7 +14012,7 @@
       </p:sp>
       <p:sp>
         <p:nvSpPr>
-          <p:cNvPr id="22" name="Text 20"/>
+          <p:cNvPr id="17" name="Text 15"/>
           <p:cNvSpPr/>
           <p:nvPr/>
         </p:nvSpPr>
@@ -15243,7 +14051,7 @@
       </p:sp>
       <p:sp>
         <p:nvSpPr>
-          <p:cNvPr id="23" name="Text 21"/>
+          <p:cNvPr id="18" name="Text 16"/>
           <p:cNvSpPr/>
           <p:nvPr/>
         </p:nvSpPr>
@@ -15751,13 +14559,11 @@
             </a:avLst>
           </a:prstGeom>
           <a:solidFill>
-            <a:srgbClr val="FFFFFF">
-              <a:alpha val="88000"/>
-            </a:srgbClr>
+            <a:srgbClr val="FFFFFF"/>
           </a:solidFill>
           <a:ln w="12700">
             <a:solidFill>
-              <a:srgbClr val="D6E8F2"/>
+              <a:srgbClr val="B9D7E6"/>
             </a:solidFill>
             <a:prstDash val="solid"/>
           </a:ln>
@@ -15765,190 +14571,112 @@
       </p:sp>
       <p:sp>
         <p:nvSpPr>
-          <p:cNvPr id="14" name="Shape 12"/>
-          <p:cNvSpPr/>
-          <p:nvPr/>
-        </p:nvSpPr>
-        <p:spPr>
-          <a:xfrm>
-            <a:off x="7891272" y="3108960"/>
-            <a:ext cx="566928" cy="566928"/>
-          </a:xfrm>
-          <a:prstGeom prst="ellipse">
-            <a:avLst/>
-          </a:prstGeom>
-          <a:solidFill>
-            <a:srgbClr val="0068B7"/>
-          </a:solidFill>
-          <a:ln w="12700">
-            <a:solidFill>
-              <a:srgbClr val="0068B7"/>
-            </a:solidFill>
-            <a:prstDash val="solid"/>
-          </a:ln>
-        </p:spPr>
-      </p:sp>
-      <p:sp>
-        <p:nvSpPr>
-          <p:cNvPr id="15" name="Shape 13"/>
-          <p:cNvSpPr/>
-          <p:nvPr/>
-        </p:nvSpPr>
-        <p:spPr>
-          <a:xfrm>
-            <a:off x="10287000" y="3108960"/>
-            <a:ext cx="566928" cy="566928"/>
-          </a:xfrm>
-          <a:prstGeom prst="ellipse">
-            <a:avLst/>
-          </a:prstGeom>
-          <a:solidFill>
-            <a:srgbClr val="2F8A28"/>
-          </a:solidFill>
-          <a:ln w="12700">
-            <a:solidFill>
-              <a:srgbClr val="2F8A28"/>
-            </a:solidFill>
-            <a:prstDash val="solid"/>
-          </a:ln>
-        </p:spPr>
+          <p:cNvPr id="14" name="Text 12"/>
+          <p:cNvSpPr/>
+          <p:nvPr/>
+        </p:nvSpPr>
+        <p:spPr>
+          <a:xfrm>
+            <a:off x="7799832" y="2935224"/>
+            <a:ext cx="3145536" cy="256032"/>
+          </a:xfrm>
+          <a:prstGeom prst="rect">
+            <a:avLst/>
+          </a:prstGeom>
+          <a:noFill/>
+          <a:ln/>
+        </p:spPr>
+        <p:txBody>
+          <a:bodyPr wrap="square" lIns="0" tIns="0" rIns="0" bIns="0" rtlCol="0" anchor="ctr"/>
+          <a:lstStyle/>
+          <a:p>
+            <a:pPr indent="0" marL="0">
+              <a:buNone/>
+            </a:pPr>
+            <a:r>
+              <a:rPr lang="en-US" sz="1300" b="1" dirty="0">
+                <a:solidFill>
+                  <a:srgbClr val="0068B7"/>
+                </a:solidFill>
+                <a:latin typeface="Aptos" pitchFamily="34" charset="0"/>
+                <a:ea typeface="Aptos" pitchFamily="34" charset="-122"/>
+                <a:cs typeface="Aptos" pitchFamily="34" charset="-120"/>
+              </a:rPr>
+              <a:t>Concept checkpoints</a:t>
+            </a:r>
+            <a:endParaRPr lang="en-US" sz="1300" dirty="0"/>
+          </a:p>
+        </p:txBody>
+      </p:sp>
+      <p:sp>
+        <p:nvSpPr>
+          <p:cNvPr id="15" name="Text 13"/>
+          <p:cNvSpPr/>
+          <p:nvPr/>
+        </p:nvSpPr>
+        <p:spPr>
+          <a:xfrm>
+            <a:off x="7818120" y="3300984"/>
+            <a:ext cx="3090672" cy="877824"/>
+          </a:xfrm>
+          <a:prstGeom prst="rect">
+            <a:avLst/>
+          </a:prstGeom>
+          <a:noFill/>
+          <a:ln/>
+        </p:spPr>
+        <p:txBody>
+          <a:bodyPr wrap="square" lIns="254" tIns="254" rIns="254" bIns="254" rtlCol="0" anchor="t">
+            <a:normAutofit/>
+          </a:bodyPr>
+          <a:lstStyle/>
+          <a:p>
+            <a:r>
+              <a:rPr lang="en-US" sz="1380" dirty="0">
+                <a:solidFill>
+                  <a:srgbClr val="17364A"/>
+                </a:solidFill>
+                <a:latin typeface="Aptos" pitchFamily="34" charset="0"/>
+                <a:ea typeface="Aptos" pitchFamily="34" charset="-122"/>
+                <a:cs typeface="Aptos" pitchFamily="34" charset="-120"/>
+              </a:rPr>
+              <a:t>NOT-OD-22-214: Supplemental Information to the NIH Policy for Data Management and Sharing:.</a:t>
+            </a:r>
+            <a:endParaRPr lang="en-US" sz="1380" dirty="0"/>
+          </a:p>
+          <a:p>
+            <a:r>
+              <a:rPr lang="en-US" sz="1380" dirty="0">
+                <a:solidFill>
+                  <a:srgbClr val="17364A"/>
+                </a:solidFill>
+                <a:latin typeface="Aptos" pitchFamily="34" charset="0"/>
+                <a:ea typeface="Aptos" pitchFamily="34" charset="-122"/>
+                <a:cs typeface="Aptos" pitchFamily="34" charset="-120"/>
+              </a:rPr>
+              <a:t>National Institutes of Health Tribal Health Research Office.</a:t>
+            </a:r>
+            <a:endParaRPr lang="en-US" sz="1380" dirty="0"/>
+          </a:p>
+          <a:p>
+            <a:r>
+              <a:rPr lang="en-US" sz="1380" dirty="0">
+                <a:solidFill>
+                  <a:srgbClr val="17364A"/>
+                </a:solidFill>
+                <a:latin typeface="Aptos" pitchFamily="34" charset="0"/>
+                <a:ea typeface="Aptos" pitchFamily="34" charset="-122"/>
+                <a:cs typeface="Aptos" pitchFamily="34" charset="-120"/>
+              </a:rPr>
+              <a:t>Tribal Health Research Office resources. https://dpcpsi.nih.gov/thro</a:t>
+            </a:r>
+            <a:endParaRPr lang="en-US" sz="1380" dirty="0"/>
+          </a:p>
+        </p:txBody>
       </p:sp>
       <p:sp>
         <p:nvSpPr>
           <p:cNvPr id="16" name="Shape 14"/>
-          <p:cNvSpPr/>
-          <p:nvPr/>
-        </p:nvSpPr>
-        <p:spPr>
-          <a:xfrm>
-            <a:off x="9089136" y="3456432"/>
-            <a:ext cx="566928" cy="566928"/>
-          </a:xfrm>
-          <a:prstGeom prst="ellipse">
-            <a:avLst/>
-          </a:prstGeom>
-          <a:solidFill>
-            <a:srgbClr val="6A4CA3"/>
-          </a:solidFill>
-          <a:ln w="12700">
-            <a:solidFill>
-              <a:srgbClr val="6A4CA3"/>
-            </a:solidFill>
-            <a:prstDash val="solid"/>
-          </a:ln>
-        </p:spPr>
-      </p:sp>
-      <p:sp>
-        <p:nvSpPr>
-          <p:cNvPr id="17" name="Shape 15"/>
-          <p:cNvSpPr/>
-          <p:nvPr/>
-        </p:nvSpPr>
-        <p:spPr>
-          <a:xfrm>
-            <a:off x="8385048" y="3419856"/>
-            <a:ext cx="1975104" cy="0"/>
-          </a:xfrm>
-          <a:prstGeom prst="line">
-            <a:avLst/>
-          </a:prstGeom>
-          <a:noFill/>
-          <a:ln w="25400">
-            <a:solidFill>
-              <a:srgbClr val="8ABBD8"/>
-            </a:solidFill>
-            <a:prstDash val="solid"/>
-          </a:ln>
-        </p:spPr>
-      </p:sp>
-      <p:sp>
-        <p:nvSpPr>
-          <p:cNvPr id="18" name="Shape 16"/>
-          <p:cNvSpPr/>
-          <p:nvPr/>
-        </p:nvSpPr>
-        <p:spPr>
-          <a:xfrm>
-            <a:off x="8202168" y="3630168"/>
-            <a:ext cx="1170432" cy="118872"/>
-          </a:xfrm>
-          <a:prstGeom prst="line">
-            <a:avLst/>
-          </a:prstGeom>
-          <a:noFill/>
-          <a:ln w="25400">
-            <a:solidFill>
-              <a:srgbClr val="8ABBD8"/>
-            </a:solidFill>
-            <a:prstDash val="solid"/>
-          </a:ln>
-        </p:spPr>
-      </p:sp>
-      <p:sp>
-        <p:nvSpPr>
-          <p:cNvPr id="19" name="Shape 17"/>
-          <p:cNvSpPr/>
-          <p:nvPr/>
-        </p:nvSpPr>
-        <p:spPr>
-          <a:xfrm>
-            <a:off x="10543032" y="3630168"/>
-            <a:ext cx="-1170432" cy="118872"/>
-          </a:xfrm>
-          <a:prstGeom prst="line">
-            <a:avLst/>
-          </a:prstGeom>
-          <a:noFill/>
-          <a:ln w="25400">
-            <a:solidFill>
-              <a:srgbClr val="8ABBD8"/>
-            </a:solidFill>
-            <a:prstDash val="solid"/>
-          </a:ln>
-        </p:spPr>
-      </p:sp>
-      <p:sp>
-        <p:nvSpPr>
-          <p:cNvPr id="20" name="Text 18"/>
-          <p:cNvSpPr/>
-          <p:nvPr/>
-        </p:nvSpPr>
-        <p:spPr>
-          <a:xfrm>
-            <a:off x="7863840" y="4069080"/>
-            <a:ext cx="3017520" cy="164592"/>
-          </a:xfrm>
-          <a:prstGeom prst="rect">
-            <a:avLst/>
-          </a:prstGeom>
-          <a:noFill/>
-          <a:ln/>
-        </p:spPr>
-        <p:txBody>
-          <a:bodyPr wrap="square" lIns="0" tIns="0" rIns="0" bIns="0" rtlCol="0" anchor="ctr"/>
-          <a:lstStyle/>
-          <a:p>
-            <a:pPr algn="ctr" indent="0" marL="0">
-              <a:buNone/>
-            </a:pPr>
-            <a:r>
-              <a:rPr lang="en-US" sz="900" b="1" dirty="0">
-                <a:solidFill>
-                  <a:srgbClr val="003A63"/>
-                </a:solidFill>
-                <a:latin typeface="Aptos" pitchFamily="34" charset="0"/>
-                <a:ea typeface="Aptos" pitchFamily="34" charset="-122"/>
-                <a:cs typeface="Aptos" pitchFamily="34" charset="-120"/>
-              </a:rPr>
-              <a:t>Decision rights</a:t>
-            </a:r>
-            <a:endParaRPr lang="en-US" sz="900" dirty="0"/>
-          </a:p>
-        </p:txBody>
-      </p:sp>
-      <p:sp>
-        <p:nvSpPr>
-          <p:cNvPr id="21" name="Shape 19"/>
           <p:cNvSpPr/>
           <p:nvPr/>
         </p:nvSpPr>
@@ -15975,7 +14703,7 @@
       </p:sp>
       <p:sp>
         <p:nvSpPr>
-          <p:cNvPr id="22" name="Text 20"/>
+          <p:cNvPr id="17" name="Text 15"/>
           <p:cNvSpPr/>
           <p:nvPr/>
         </p:nvSpPr>
@@ -16014,7 +14742,7 @@
       </p:sp>
       <p:sp>
         <p:nvSpPr>
-          <p:cNvPr id="23" name="Text 21"/>
+          <p:cNvPr id="18" name="Text 16"/>
           <p:cNvSpPr/>
           <p:nvPr/>
         </p:nvSpPr>
@@ -16522,13 +15250,11 @@
             </a:avLst>
           </a:prstGeom>
           <a:solidFill>
-            <a:srgbClr val="FFFFFF">
-              <a:alpha val="88000"/>
-            </a:srgbClr>
+            <a:srgbClr val="FFFFFF"/>
           </a:solidFill>
           <a:ln w="12700">
             <a:solidFill>
-              <a:srgbClr val="D6E8F2"/>
+              <a:srgbClr val="B9D7E6"/>
             </a:solidFill>
             <a:prstDash val="solid"/>
           </a:ln>
@@ -16536,190 +15262,112 @@
       </p:sp>
       <p:sp>
         <p:nvSpPr>
-          <p:cNvPr id="14" name="Shape 12"/>
-          <p:cNvSpPr/>
-          <p:nvPr/>
-        </p:nvSpPr>
-        <p:spPr>
-          <a:xfrm>
-            <a:off x="7891272" y="3108960"/>
-            <a:ext cx="566928" cy="566928"/>
-          </a:xfrm>
-          <a:prstGeom prst="ellipse">
-            <a:avLst/>
-          </a:prstGeom>
-          <a:solidFill>
-            <a:srgbClr val="0068B7"/>
-          </a:solidFill>
-          <a:ln w="12700">
-            <a:solidFill>
-              <a:srgbClr val="0068B7"/>
-            </a:solidFill>
-            <a:prstDash val="solid"/>
-          </a:ln>
-        </p:spPr>
-      </p:sp>
-      <p:sp>
-        <p:nvSpPr>
-          <p:cNvPr id="15" name="Shape 13"/>
-          <p:cNvSpPr/>
-          <p:nvPr/>
-        </p:nvSpPr>
-        <p:spPr>
-          <a:xfrm>
-            <a:off x="10287000" y="3108960"/>
-            <a:ext cx="566928" cy="566928"/>
-          </a:xfrm>
-          <a:prstGeom prst="ellipse">
-            <a:avLst/>
-          </a:prstGeom>
-          <a:solidFill>
-            <a:srgbClr val="2F8A28"/>
-          </a:solidFill>
-          <a:ln w="12700">
-            <a:solidFill>
-              <a:srgbClr val="2F8A28"/>
-            </a:solidFill>
-            <a:prstDash val="solid"/>
-          </a:ln>
-        </p:spPr>
+          <p:cNvPr id="14" name="Text 12"/>
+          <p:cNvSpPr/>
+          <p:nvPr/>
+        </p:nvSpPr>
+        <p:spPr>
+          <a:xfrm>
+            <a:off x="7799832" y="2935224"/>
+            <a:ext cx="3145536" cy="256032"/>
+          </a:xfrm>
+          <a:prstGeom prst="rect">
+            <a:avLst/>
+          </a:prstGeom>
+          <a:noFill/>
+          <a:ln/>
+        </p:spPr>
+        <p:txBody>
+          <a:bodyPr wrap="square" lIns="0" tIns="0" rIns="0" bIns="0" rtlCol="0" anchor="ctr"/>
+          <a:lstStyle/>
+          <a:p>
+            <a:pPr indent="0" marL="0">
+              <a:buNone/>
+            </a:pPr>
+            <a:r>
+              <a:rPr lang="en-US" sz="1300" b="1" dirty="0">
+                <a:solidFill>
+                  <a:srgbClr val="0068B7"/>
+                </a:solidFill>
+                <a:latin typeface="Aptos" pitchFamily="34" charset="0"/>
+                <a:ea typeface="Aptos" pitchFamily="34" charset="-122"/>
+                <a:cs typeface="Aptos" pitchFamily="34" charset="-120"/>
+              </a:rPr>
+              <a:t>Concept checkpoints</a:t>
+            </a:r>
+            <a:endParaRPr lang="en-US" sz="1300" dirty="0"/>
+          </a:p>
+        </p:txBody>
+      </p:sp>
+      <p:sp>
+        <p:nvSpPr>
+          <p:cNvPr id="15" name="Text 13"/>
+          <p:cNvSpPr/>
+          <p:nvPr/>
+        </p:nvSpPr>
+        <p:spPr>
+          <a:xfrm>
+            <a:off x="7818120" y="3300984"/>
+            <a:ext cx="3090672" cy="877824"/>
+          </a:xfrm>
+          <a:prstGeom prst="rect">
+            <a:avLst/>
+          </a:prstGeom>
+          <a:noFill/>
+          <a:ln/>
+        </p:spPr>
+        <p:txBody>
+          <a:bodyPr wrap="square" lIns="254" tIns="254" rIns="254" bIns="254" rtlCol="0" anchor="t">
+            <a:normAutofit/>
+          </a:bodyPr>
+          <a:lstStyle/>
+          <a:p>
+            <a:r>
+              <a:rPr lang="en-US" sz="1380" dirty="0">
+                <a:solidFill>
+                  <a:srgbClr val="17364A"/>
+                </a:solidFill>
+                <a:latin typeface="Aptos" pitchFamily="34" charset="0"/>
+                <a:ea typeface="Aptos" pitchFamily="34" charset="-122"/>
+                <a:cs typeface="Aptos" pitchFamily="34" charset="-120"/>
+              </a:rPr>
+              <a:t>Tribal engagement and data use resources. https://www.researchallofus.org/</a:t>
+            </a:r>
+            <a:endParaRPr lang="en-US" sz="1380" dirty="0"/>
+          </a:p>
+          <a:p>
+            <a:r>
+              <a:rPr lang="en-US" sz="1380" dirty="0">
+                <a:solidFill>
+                  <a:srgbClr val="17364A"/>
+                </a:solidFill>
+                <a:latin typeface="Aptos" pitchFamily="34" charset="0"/>
+                <a:ea typeface="Aptos" pitchFamily="34" charset="-122"/>
+                <a:cs typeface="Aptos" pitchFamily="34" charset="-120"/>
+              </a:rPr>
+              <a:t>HHS and CDC Tribal consultation resources.</a:t>
+            </a:r>
+            <a:endParaRPr lang="en-US" sz="1380" dirty="0"/>
+          </a:p>
+          <a:p>
+            <a:r>
+              <a:rPr lang="en-US" sz="1380" dirty="0">
+                <a:solidFill>
+                  <a:srgbClr val="17364A"/>
+                </a:solidFill>
+                <a:latin typeface="Aptos" pitchFamily="34" charset="0"/>
+                <a:ea typeface="Aptos" pitchFamily="34" charset="-122"/>
+                <a:cs typeface="Aptos" pitchFamily="34" charset="-120"/>
+              </a:rPr>
+              <a:t>Use relevant agency consultation policies and Tribal liaison guidance before starting.</a:t>
+            </a:r>
+            <a:endParaRPr lang="en-US" sz="1380" dirty="0"/>
+          </a:p>
+        </p:txBody>
       </p:sp>
       <p:sp>
         <p:nvSpPr>
           <p:cNvPr id="16" name="Shape 14"/>
-          <p:cNvSpPr/>
-          <p:nvPr/>
-        </p:nvSpPr>
-        <p:spPr>
-          <a:xfrm>
-            <a:off x="9089136" y="3456432"/>
-            <a:ext cx="566928" cy="566928"/>
-          </a:xfrm>
-          <a:prstGeom prst="ellipse">
-            <a:avLst/>
-          </a:prstGeom>
-          <a:solidFill>
-            <a:srgbClr val="6A4CA3"/>
-          </a:solidFill>
-          <a:ln w="12700">
-            <a:solidFill>
-              <a:srgbClr val="6A4CA3"/>
-            </a:solidFill>
-            <a:prstDash val="solid"/>
-          </a:ln>
-        </p:spPr>
-      </p:sp>
-      <p:sp>
-        <p:nvSpPr>
-          <p:cNvPr id="17" name="Shape 15"/>
-          <p:cNvSpPr/>
-          <p:nvPr/>
-        </p:nvSpPr>
-        <p:spPr>
-          <a:xfrm>
-            <a:off x="8385048" y="3419856"/>
-            <a:ext cx="1975104" cy="0"/>
-          </a:xfrm>
-          <a:prstGeom prst="line">
-            <a:avLst/>
-          </a:prstGeom>
-          <a:noFill/>
-          <a:ln w="25400">
-            <a:solidFill>
-              <a:srgbClr val="8ABBD8"/>
-            </a:solidFill>
-            <a:prstDash val="solid"/>
-          </a:ln>
-        </p:spPr>
-      </p:sp>
-      <p:sp>
-        <p:nvSpPr>
-          <p:cNvPr id="18" name="Shape 16"/>
-          <p:cNvSpPr/>
-          <p:nvPr/>
-        </p:nvSpPr>
-        <p:spPr>
-          <a:xfrm>
-            <a:off x="8202168" y="3630168"/>
-            <a:ext cx="1170432" cy="118872"/>
-          </a:xfrm>
-          <a:prstGeom prst="line">
-            <a:avLst/>
-          </a:prstGeom>
-          <a:noFill/>
-          <a:ln w="25400">
-            <a:solidFill>
-              <a:srgbClr val="8ABBD8"/>
-            </a:solidFill>
-            <a:prstDash val="solid"/>
-          </a:ln>
-        </p:spPr>
-      </p:sp>
-      <p:sp>
-        <p:nvSpPr>
-          <p:cNvPr id="19" name="Shape 17"/>
-          <p:cNvSpPr/>
-          <p:nvPr/>
-        </p:nvSpPr>
-        <p:spPr>
-          <a:xfrm>
-            <a:off x="10543032" y="3630168"/>
-            <a:ext cx="-1170432" cy="118872"/>
-          </a:xfrm>
-          <a:prstGeom prst="line">
-            <a:avLst/>
-          </a:prstGeom>
-          <a:noFill/>
-          <a:ln w="25400">
-            <a:solidFill>
-              <a:srgbClr val="8ABBD8"/>
-            </a:solidFill>
-            <a:prstDash val="solid"/>
-          </a:ln>
-        </p:spPr>
-      </p:sp>
-      <p:sp>
-        <p:nvSpPr>
-          <p:cNvPr id="20" name="Text 18"/>
-          <p:cNvSpPr/>
-          <p:nvPr/>
-        </p:nvSpPr>
-        <p:spPr>
-          <a:xfrm>
-            <a:off x="7863840" y="4069080"/>
-            <a:ext cx="3017520" cy="164592"/>
-          </a:xfrm>
-          <a:prstGeom prst="rect">
-            <a:avLst/>
-          </a:prstGeom>
-          <a:noFill/>
-          <a:ln/>
-        </p:spPr>
-        <p:txBody>
-          <a:bodyPr wrap="square" lIns="0" tIns="0" rIns="0" bIns="0" rtlCol="0" anchor="ctr"/>
-          <a:lstStyle/>
-          <a:p>
-            <a:pPr algn="ctr" indent="0" marL="0">
-              <a:buNone/>
-            </a:pPr>
-            <a:r>
-              <a:rPr lang="en-US" sz="900" b="1" dirty="0">
-                <a:solidFill>
-                  <a:srgbClr val="003A63"/>
-                </a:solidFill>
-                <a:latin typeface="Aptos" pitchFamily="34" charset="0"/>
-                <a:ea typeface="Aptos" pitchFamily="34" charset="-122"/>
-                <a:cs typeface="Aptos" pitchFamily="34" charset="-120"/>
-              </a:rPr>
-              <a:t>Decision rights</a:t>
-            </a:r>
-            <a:endParaRPr lang="en-US" sz="900" dirty="0"/>
-          </a:p>
-        </p:txBody>
-      </p:sp>
-      <p:sp>
-        <p:nvSpPr>
-          <p:cNvPr id="21" name="Shape 19"/>
           <p:cNvSpPr/>
           <p:nvPr/>
         </p:nvSpPr>
@@ -16746,7 +15394,7 @@
       </p:sp>
       <p:sp>
         <p:nvSpPr>
-          <p:cNvPr id="22" name="Text 20"/>
+          <p:cNvPr id="17" name="Text 15"/>
           <p:cNvSpPr/>
           <p:nvPr/>
         </p:nvSpPr>
@@ -16785,7 +15433,7 @@
       </p:sp>
       <p:sp>
         <p:nvSpPr>
-          <p:cNvPr id="23" name="Text 21"/>
+          <p:cNvPr id="18" name="Text 16"/>
           <p:cNvSpPr/>
           <p:nvPr/>
         </p:nvSpPr>
@@ -17279,13 +15927,11 @@
             </a:avLst>
           </a:prstGeom>
           <a:solidFill>
-            <a:srgbClr val="FFFFFF">
-              <a:alpha val="88000"/>
-            </a:srgbClr>
+            <a:srgbClr val="FFFFFF"/>
           </a:solidFill>
           <a:ln w="12700">
             <a:solidFill>
-              <a:srgbClr val="D6E8F2"/>
+              <a:srgbClr val="B9D7E6"/>
             </a:solidFill>
             <a:prstDash val="solid"/>
           </a:ln>
@@ -17293,190 +15939,98 @@
       </p:sp>
       <p:sp>
         <p:nvSpPr>
-          <p:cNvPr id="14" name="Shape 12"/>
-          <p:cNvSpPr/>
-          <p:nvPr/>
-        </p:nvSpPr>
-        <p:spPr>
-          <a:xfrm>
-            <a:off x="7891272" y="3108960"/>
-            <a:ext cx="566928" cy="566928"/>
-          </a:xfrm>
-          <a:prstGeom prst="ellipse">
-            <a:avLst/>
-          </a:prstGeom>
-          <a:solidFill>
-            <a:srgbClr val="0068B7"/>
-          </a:solidFill>
-          <a:ln w="12700">
-            <a:solidFill>
-              <a:srgbClr val="0068B7"/>
-            </a:solidFill>
-            <a:prstDash val="solid"/>
-          </a:ln>
-        </p:spPr>
-      </p:sp>
-      <p:sp>
-        <p:nvSpPr>
-          <p:cNvPr id="15" name="Shape 13"/>
-          <p:cNvSpPr/>
-          <p:nvPr/>
-        </p:nvSpPr>
-        <p:spPr>
-          <a:xfrm>
-            <a:off x="10287000" y="3108960"/>
-            <a:ext cx="566928" cy="566928"/>
-          </a:xfrm>
-          <a:prstGeom prst="ellipse">
-            <a:avLst/>
-          </a:prstGeom>
-          <a:solidFill>
-            <a:srgbClr val="2F8A28"/>
-          </a:solidFill>
-          <a:ln w="12700">
-            <a:solidFill>
-              <a:srgbClr val="2F8A28"/>
-            </a:solidFill>
-            <a:prstDash val="solid"/>
-          </a:ln>
-        </p:spPr>
+          <p:cNvPr id="14" name="Text 12"/>
+          <p:cNvSpPr/>
+          <p:nvPr/>
+        </p:nvSpPr>
+        <p:spPr>
+          <a:xfrm>
+            <a:off x="7799832" y="2935224"/>
+            <a:ext cx="3145536" cy="256032"/>
+          </a:xfrm>
+          <a:prstGeom prst="rect">
+            <a:avLst/>
+          </a:prstGeom>
+          <a:noFill/>
+          <a:ln/>
+        </p:spPr>
+        <p:txBody>
+          <a:bodyPr wrap="square" lIns="0" tIns="0" rIns="0" bIns="0" rtlCol="0" anchor="ctr"/>
+          <a:lstStyle/>
+          <a:p>
+            <a:pPr indent="0" marL="0">
+              <a:buNone/>
+            </a:pPr>
+            <a:r>
+              <a:rPr lang="en-US" sz="1300" b="1" dirty="0">
+                <a:solidFill>
+                  <a:srgbClr val="0068B7"/>
+                </a:solidFill>
+                <a:latin typeface="Aptos" pitchFamily="34" charset="0"/>
+                <a:ea typeface="Aptos" pitchFamily="34" charset="-122"/>
+                <a:cs typeface="Aptos" pitchFamily="34" charset="-120"/>
+              </a:rPr>
+              <a:t>Concept checkpoints</a:t>
+            </a:r>
+            <a:endParaRPr lang="en-US" sz="1300" dirty="0"/>
+          </a:p>
+        </p:txBody>
+      </p:sp>
+      <p:sp>
+        <p:nvSpPr>
+          <p:cNvPr id="15" name="Text 13"/>
+          <p:cNvSpPr/>
+          <p:nvPr/>
+        </p:nvSpPr>
+        <p:spPr>
+          <a:xfrm>
+            <a:off x="7818120" y="3300984"/>
+            <a:ext cx="3090672" cy="877824"/>
+          </a:xfrm>
+          <a:prstGeom prst="rect">
+            <a:avLst/>
+          </a:prstGeom>
+          <a:noFill/>
+          <a:ln/>
+        </p:spPr>
+        <p:txBody>
+          <a:bodyPr wrap="square" lIns="254" tIns="254" rIns="254" bIns="254" rtlCol="0" anchor="t">
+            <a:normAutofit/>
+          </a:bodyPr>
+          <a:lstStyle/>
+          <a:p>
+            <a:r>
+              <a:rPr lang="en-US" sz="1380" dirty="0">
+                <a:solidFill>
+                  <a:srgbClr val="17364A"/>
+                </a:solidFill>
+                <a:latin typeface="Aptos" pitchFamily="34" charset="0"/>
+                <a:ea typeface="Aptos" pitchFamily="34" charset="-122"/>
+                <a:cs typeface="Aptos" pitchFamily="34" charset="-120"/>
+              </a:rPr>
+              <a:t>Brookings.</a:t>
+            </a:r>
+            <a:endParaRPr lang="en-US" sz="1380" dirty="0"/>
+          </a:p>
+          <a:p>
+            <a:r>
+              <a:rPr lang="en-US" sz="1380" dirty="0">
+                <a:solidFill>
+                  <a:srgbClr val="17364A"/>
+                </a:solidFill>
+                <a:latin typeface="Aptos" pitchFamily="34" charset="0"/>
+                <a:ea typeface="Aptos" pitchFamily="34" charset="-122"/>
+                <a:cs typeface="Aptos" pitchFamily="34" charset="-120"/>
+              </a:rPr>
+              <a:t>Digital sovereignty and Indigenous Nations resources. https://www.brookings.edu/</a:t>
+            </a:r>
+            <a:endParaRPr lang="en-US" sz="1380" dirty="0"/>
+          </a:p>
+        </p:txBody>
       </p:sp>
       <p:sp>
         <p:nvSpPr>
           <p:cNvPr id="16" name="Shape 14"/>
-          <p:cNvSpPr/>
-          <p:nvPr/>
-        </p:nvSpPr>
-        <p:spPr>
-          <a:xfrm>
-            <a:off x="9089136" y="3456432"/>
-            <a:ext cx="566928" cy="566928"/>
-          </a:xfrm>
-          <a:prstGeom prst="ellipse">
-            <a:avLst/>
-          </a:prstGeom>
-          <a:solidFill>
-            <a:srgbClr val="6A4CA3"/>
-          </a:solidFill>
-          <a:ln w="12700">
-            <a:solidFill>
-              <a:srgbClr val="6A4CA3"/>
-            </a:solidFill>
-            <a:prstDash val="solid"/>
-          </a:ln>
-        </p:spPr>
-      </p:sp>
-      <p:sp>
-        <p:nvSpPr>
-          <p:cNvPr id="17" name="Shape 15"/>
-          <p:cNvSpPr/>
-          <p:nvPr/>
-        </p:nvSpPr>
-        <p:spPr>
-          <a:xfrm>
-            <a:off x="8385048" y="3419856"/>
-            <a:ext cx="1975104" cy="0"/>
-          </a:xfrm>
-          <a:prstGeom prst="line">
-            <a:avLst/>
-          </a:prstGeom>
-          <a:noFill/>
-          <a:ln w="25400">
-            <a:solidFill>
-              <a:srgbClr val="8ABBD8"/>
-            </a:solidFill>
-            <a:prstDash val="solid"/>
-          </a:ln>
-        </p:spPr>
-      </p:sp>
-      <p:sp>
-        <p:nvSpPr>
-          <p:cNvPr id="18" name="Shape 16"/>
-          <p:cNvSpPr/>
-          <p:nvPr/>
-        </p:nvSpPr>
-        <p:spPr>
-          <a:xfrm>
-            <a:off x="8202168" y="3630168"/>
-            <a:ext cx="1170432" cy="118872"/>
-          </a:xfrm>
-          <a:prstGeom prst="line">
-            <a:avLst/>
-          </a:prstGeom>
-          <a:noFill/>
-          <a:ln w="25400">
-            <a:solidFill>
-              <a:srgbClr val="8ABBD8"/>
-            </a:solidFill>
-            <a:prstDash val="solid"/>
-          </a:ln>
-        </p:spPr>
-      </p:sp>
-      <p:sp>
-        <p:nvSpPr>
-          <p:cNvPr id="19" name="Shape 17"/>
-          <p:cNvSpPr/>
-          <p:nvPr/>
-        </p:nvSpPr>
-        <p:spPr>
-          <a:xfrm>
-            <a:off x="10543032" y="3630168"/>
-            <a:ext cx="-1170432" cy="118872"/>
-          </a:xfrm>
-          <a:prstGeom prst="line">
-            <a:avLst/>
-          </a:prstGeom>
-          <a:noFill/>
-          <a:ln w="25400">
-            <a:solidFill>
-              <a:srgbClr val="8ABBD8"/>
-            </a:solidFill>
-            <a:prstDash val="solid"/>
-          </a:ln>
-        </p:spPr>
-      </p:sp>
-      <p:sp>
-        <p:nvSpPr>
-          <p:cNvPr id="20" name="Text 18"/>
-          <p:cNvSpPr/>
-          <p:nvPr/>
-        </p:nvSpPr>
-        <p:spPr>
-          <a:xfrm>
-            <a:off x="7863840" y="4069080"/>
-            <a:ext cx="3017520" cy="164592"/>
-          </a:xfrm>
-          <a:prstGeom prst="rect">
-            <a:avLst/>
-          </a:prstGeom>
-          <a:noFill/>
-          <a:ln/>
-        </p:spPr>
-        <p:txBody>
-          <a:bodyPr wrap="square" lIns="0" tIns="0" rIns="0" bIns="0" rtlCol="0" anchor="ctr"/>
-          <a:lstStyle/>
-          <a:p>
-            <a:pPr algn="ctr" indent="0" marL="0">
-              <a:buNone/>
-            </a:pPr>
-            <a:r>
-              <a:rPr lang="en-US" sz="900" b="1" dirty="0">
-                <a:solidFill>
-                  <a:srgbClr val="003A63"/>
-                </a:solidFill>
-                <a:latin typeface="Aptos" pitchFamily="34" charset="0"/>
-                <a:ea typeface="Aptos" pitchFamily="34" charset="-122"/>
-                <a:cs typeface="Aptos" pitchFamily="34" charset="-120"/>
-              </a:rPr>
-              <a:t>Decision rights</a:t>
-            </a:r>
-            <a:endParaRPr lang="en-US" sz="900" dirty="0"/>
-          </a:p>
-        </p:txBody>
-      </p:sp>
-      <p:sp>
-        <p:nvSpPr>
-          <p:cNvPr id="21" name="Shape 19"/>
           <p:cNvSpPr/>
           <p:nvPr/>
         </p:nvSpPr>
@@ -17503,7 +16057,7 @@
       </p:sp>
       <p:sp>
         <p:nvSpPr>
-          <p:cNvPr id="22" name="Text 20"/>
+          <p:cNvPr id="17" name="Text 15"/>
           <p:cNvSpPr/>
           <p:nvPr/>
         </p:nvSpPr>
@@ -17542,7 +16096,7 @@
       </p:sp>
       <p:sp>
         <p:nvSpPr>
-          <p:cNvPr id="23" name="Text 21"/>
+          <p:cNvPr id="18" name="Text 16"/>
           <p:cNvSpPr/>
           <p:nvPr/>
         </p:nvSpPr>
@@ -18022,13 +16576,11 @@
             </a:avLst>
           </a:prstGeom>
           <a:solidFill>
-            <a:srgbClr val="FFFFFF">
-              <a:alpha val="88000"/>
-            </a:srgbClr>
+            <a:srgbClr val="FFFFFF"/>
           </a:solidFill>
           <a:ln w="12700">
             <a:solidFill>
-              <a:srgbClr val="D6E8F2"/>
+              <a:srgbClr val="B9D7E6"/>
             </a:solidFill>
             <a:prstDash val="solid"/>
           </a:ln>
@@ -18036,190 +16588,84 @@
       </p:sp>
       <p:sp>
         <p:nvSpPr>
-          <p:cNvPr id="14" name="Shape 12"/>
-          <p:cNvSpPr/>
-          <p:nvPr/>
-        </p:nvSpPr>
-        <p:spPr>
-          <a:xfrm>
-            <a:off x="7891272" y="3108960"/>
-            <a:ext cx="566928" cy="566928"/>
-          </a:xfrm>
-          <a:prstGeom prst="ellipse">
-            <a:avLst/>
-          </a:prstGeom>
-          <a:solidFill>
-            <a:srgbClr val="0068B7"/>
-          </a:solidFill>
-          <a:ln w="12700">
-            <a:solidFill>
-              <a:srgbClr val="0068B7"/>
-            </a:solidFill>
-            <a:prstDash val="solid"/>
-          </a:ln>
-        </p:spPr>
-      </p:sp>
-      <p:sp>
-        <p:nvSpPr>
-          <p:cNvPr id="15" name="Shape 13"/>
-          <p:cNvSpPr/>
-          <p:nvPr/>
-        </p:nvSpPr>
-        <p:spPr>
-          <a:xfrm>
-            <a:off x="10287000" y="3108960"/>
-            <a:ext cx="566928" cy="566928"/>
-          </a:xfrm>
-          <a:prstGeom prst="ellipse">
-            <a:avLst/>
-          </a:prstGeom>
-          <a:solidFill>
-            <a:srgbClr val="2F8A28"/>
-          </a:solidFill>
-          <a:ln w="12700">
-            <a:solidFill>
-              <a:srgbClr val="2F8A28"/>
-            </a:solidFill>
-            <a:prstDash val="solid"/>
-          </a:ln>
-        </p:spPr>
+          <p:cNvPr id="14" name="Text 12"/>
+          <p:cNvSpPr/>
+          <p:nvPr/>
+        </p:nvSpPr>
+        <p:spPr>
+          <a:xfrm>
+            <a:off x="7799832" y="2935224"/>
+            <a:ext cx="3145536" cy="256032"/>
+          </a:xfrm>
+          <a:prstGeom prst="rect">
+            <a:avLst/>
+          </a:prstGeom>
+          <a:noFill/>
+          <a:ln/>
+        </p:spPr>
+        <p:txBody>
+          <a:bodyPr wrap="square" lIns="0" tIns="0" rIns="0" bIns="0" rtlCol="0" anchor="ctr"/>
+          <a:lstStyle/>
+          <a:p>
+            <a:pPr indent="0" marL="0">
+              <a:buNone/>
+            </a:pPr>
+            <a:r>
+              <a:rPr lang="en-US" sz="1300" b="1" dirty="0">
+                <a:solidFill>
+                  <a:srgbClr val="0068B7"/>
+                </a:solidFill>
+                <a:latin typeface="Aptos" pitchFamily="34" charset="0"/>
+                <a:ea typeface="Aptos" pitchFamily="34" charset="-122"/>
+                <a:cs typeface="Aptos" pitchFamily="34" charset="-120"/>
+              </a:rPr>
+              <a:t>Concept checkpoints</a:t>
+            </a:r>
+            <a:endParaRPr lang="en-US" sz="1300" dirty="0"/>
+          </a:p>
+        </p:txBody>
+      </p:sp>
+      <p:sp>
+        <p:nvSpPr>
+          <p:cNvPr id="15" name="Text 13"/>
+          <p:cNvSpPr/>
+          <p:nvPr/>
+        </p:nvSpPr>
+        <p:spPr>
+          <a:xfrm>
+            <a:off x="7818120" y="3300984"/>
+            <a:ext cx="3090672" cy="877824"/>
+          </a:xfrm>
+          <a:prstGeom prst="rect">
+            <a:avLst/>
+          </a:prstGeom>
+          <a:noFill/>
+          <a:ln/>
+        </p:spPr>
+        <p:txBody>
+          <a:bodyPr wrap="square" lIns="254" tIns="254" rIns="254" bIns="254" rtlCol="0" anchor="t">
+            <a:normAutofit/>
+          </a:bodyPr>
+          <a:lstStyle/>
+          <a:p>
+            <a:r>
+              <a:rPr lang="en-US" sz="1380" dirty="0">
+                <a:solidFill>
+                  <a:srgbClr val="17364A"/>
+                </a:solidFill>
+                <a:latin typeface="Aptos" pitchFamily="34" charset="0"/>
+                <a:ea typeface="Aptos" pitchFamily="34" charset="-122"/>
+                <a:cs typeface="Aptos" pitchFamily="34" charset="-120"/>
+              </a:rPr>
+              <a:t>Tribal Sovereignty and Indigenous Data Governance Screening Memo</a:t>
+            </a:r>
+            <a:endParaRPr lang="en-US" sz="1380" dirty="0"/>
+          </a:p>
+        </p:txBody>
       </p:sp>
       <p:sp>
         <p:nvSpPr>
           <p:cNvPr id="16" name="Shape 14"/>
-          <p:cNvSpPr/>
-          <p:nvPr/>
-        </p:nvSpPr>
-        <p:spPr>
-          <a:xfrm>
-            <a:off x="9089136" y="3456432"/>
-            <a:ext cx="566928" cy="566928"/>
-          </a:xfrm>
-          <a:prstGeom prst="ellipse">
-            <a:avLst/>
-          </a:prstGeom>
-          <a:solidFill>
-            <a:srgbClr val="6A4CA3"/>
-          </a:solidFill>
-          <a:ln w="12700">
-            <a:solidFill>
-              <a:srgbClr val="6A4CA3"/>
-            </a:solidFill>
-            <a:prstDash val="solid"/>
-          </a:ln>
-        </p:spPr>
-      </p:sp>
-      <p:sp>
-        <p:nvSpPr>
-          <p:cNvPr id="17" name="Shape 15"/>
-          <p:cNvSpPr/>
-          <p:nvPr/>
-        </p:nvSpPr>
-        <p:spPr>
-          <a:xfrm>
-            <a:off x="8385048" y="3419856"/>
-            <a:ext cx="1975104" cy="0"/>
-          </a:xfrm>
-          <a:prstGeom prst="line">
-            <a:avLst/>
-          </a:prstGeom>
-          <a:noFill/>
-          <a:ln w="25400">
-            <a:solidFill>
-              <a:srgbClr val="8ABBD8"/>
-            </a:solidFill>
-            <a:prstDash val="solid"/>
-          </a:ln>
-        </p:spPr>
-      </p:sp>
-      <p:sp>
-        <p:nvSpPr>
-          <p:cNvPr id="18" name="Shape 16"/>
-          <p:cNvSpPr/>
-          <p:nvPr/>
-        </p:nvSpPr>
-        <p:spPr>
-          <a:xfrm>
-            <a:off x="8202168" y="3630168"/>
-            <a:ext cx="1170432" cy="118872"/>
-          </a:xfrm>
-          <a:prstGeom prst="line">
-            <a:avLst/>
-          </a:prstGeom>
-          <a:noFill/>
-          <a:ln w="25400">
-            <a:solidFill>
-              <a:srgbClr val="8ABBD8"/>
-            </a:solidFill>
-            <a:prstDash val="solid"/>
-          </a:ln>
-        </p:spPr>
-      </p:sp>
-      <p:sp>
-        <p:nvSpPr>
-          <p:cNvPr id="19" name="Shape 17"/>
-          <p:cNvSpPr/>
-          <p:nvPr/>
-        </p:nvSpPr>
-        <p:spPr>
-          <a:xfrm>
-            <a:off x="10543032" y="3630168"/>
-            <a:ext cx="-1170432" cy="118872"/>
-          </a:xfrm>
-          <a:prstGeom prst="line">
-            <a:avLst/>
-          </a:prstGeom>
-          <a:noFill/>
-          <a:ln w="25400">
-            <a:solidFill>
-              <a:srgbClr val="8ABBD8"/>
-            </a:solidFill>
-            <a:prstDash val="solid"/>
-          </a:ln>
-        </p:spPr>
-      </p:sp>
-      <p:sp>
-        <p:nvSpPr>
-          <p:cNvPr id="20" name="Text 18"/>
-          <p:cNvSpPr/>
-          <p:nvPr/>
-        </p:nvSpPr>
-        <p:spPr>
-          <a:xfrm>
-            <a:off x="7863840" y="4069080"/>
-            <a:ext cx="3017520" cy="164592"/>
-          </a:xfrm>
-          <a:prstGeom prst="rect">
-            <a:avLst/>
-          </a:prstGeom>
-          <a:noFill/>
-          <a:ln/>
-        </p:spPr>
-        <p:txBody>
-          <a:bodyPr wrap="square" lIns="0" tIns="0" rIns="0" bIns="0" rtlCol="0" anchor="ctr"/>
-          <a:lstStyle/>
-          <a:p>
-            <a:pPr algn="ctr" indent="0" marL="0">
-              <a:buNone/>
-            </a:pPr>
-            <a:r>
-              <a:rPr lang="en-US" sz="900" b="1" dirty="0">
-                <a:solidFill>
-                  <a:srgbClr val="003A63"/>
-                </a:solidFill>
-                <a:latin typeface="Aptos" pitchFamily="34" charset="0"/>
-                <a:ea typeface="Aptos" pitchFamily="34" charset="-122"/>
-                <a:cs typeface="Aptos" pitchFamily="34" charset="-120"/>
-              </a:rPr>
-              <a:t>Decision rights</a:t>
-            </a:r>
-            <a:endParaRPr lang="en-US" sz="900" dirty="0"/>
-          </a:p>
-        </p:txBody>
-      </p:sp>
-      <p:sp>
-        <p:nvSpPr>
-          <p:cNvPr id="21" name="Shape 19"/>
           <p:cNvSpPr/>
           <p:nvPr/>
         </p:nvSpPr>
@@ -18246,7 +16692,7 @@
       </p:sp>
       <p:sp>
         <p:nvSpPr>
-          <p:cNvPr id="22" name="Text 20"/>
+          <p:cNvPr id="17" name="Text 15"/>
           <p:cNvSpPr/>
           <p:nvPr/>
         </p:nvSpPr>
@@ -18285,7 +16731,7 @@
       </p:sp>
       <p:sp>
         <p:nvSpPr>
-          <p:cNvPr id="23" name="Text 21"/>
+          <p:cNvPr id="18" name="Text 16"/>
           <p:cNvSpPr/>
           <p:nvPr/>
         </p:nvSpPr>
@@ -18793,13 +17239,11 @@
             </a:avLst>
           </a:prstGeom>
           <a:solidFill>
-            <a:srgbClr val="FFFFFF">
-              <a:alpha val="88000"/>
-            </a:srgbClr>
+            <a:srgbClr val="FFFFFF"/>
           </a:solidFill>
           <a:ln w="12700">
             <a:solidFill>
-              <a:srgbClr val="D6E8F2"/>
+              <a:srgbClr val="B9D7E6"/>
             </a:solidFill>
             <a:prstDash val="solid"/>
           </a:ln>
@@ -18807,190 +17251,112 @@
       </p:sp>
       <p:sp>
         <p:nvSpPr>
-          <p:cNvPr id="14" name="Shape 12"/>
-          <p:cNvSpPr/>
-          <p:nvPr/>
-        </p:nvSpPr>
-        <p:spPr>
-          <a:xfrm>
-            <a:off x="7891272" y="3108960"/>
-            <a:ext cx="566928" cy="566928"/>
-          </a:xfrm>
-          <a:prstGeom prst="ellipse">
-            <a:avLst/>
-          </a:prstGeom>
-          <a:solidFill>
-            <a:srgbClr val="0068B7"/>
-          </a:solidFill>
-          <a:ln w="12700">
-            <a:solidFill>
-              <a:srgbClr val="0068B7"/>
-            </a:solidFill>
-            <a:prstDash val="solid"/>
-          </a:ln>
-        </p:spPr>
-      </p:sp>
-      <p:sp>
-        <p:nvSpPr>
-          <p:cNvPr id="15" name="Shape 13"/>
-          <p:cNvSpPr/>
-          <p:nvPr/>
-        </p:nvSpPr>
-        <p:spPr>
-          <a:xfrm>
-            <a:off x="10287000" y="3108960"/>
-            <a:ext cx="566928" cy="566928"/>
-          </a:xfrm>
-          <a:prstGeom prst="ellipse">
-            <a:avLst/>
-          </a:prstGeom>
-          <a:solidFill>
-            <a:srgbClr val="2F8A28"/>
-          </a:solidFill>
-          <a:ln w="12700">
-            <a:solidFill>
-              <a:srgbClr val="2F8A28"/>
-            </a:solidFill>
-            <a:prstDash val="solid"/>
-          </a:ln>
-        </p:spPr>
+          <p:cNvPr id="14" name="Text 12"/>
+          <p:cNvSpPr/>
+          <p:nvPr/>
+        </p:nvSpPr>
+        <p:spPr>
+          <a:xfrm>
+            <a:off x="7799832" y="2935224"/>
+            <a:ext cx="3145536" cy="256032"/>
+          </a:xfrm>
+          <a:prstGeom prst="rect">
+            <a:avLst/>
+          </a:prstGeom>
+          <a:noFill/>
+          <a:ln/>
+        </p:spPr>
+        <p:txBody>
+          <a:bodyPr wrap="square" lIns="0" tIns="0" rIns="0" bIns="0" rtlCol="0" anchor="ctr"/>
+          <a:lstStyle/>
+          <a:p>
+            <a:pPr indent="0" marL="0">
+              <a:buNone/>
+            </a:pPr>
+            <a:r>
+              <a:rPr lang="en-US" sz="1300" b="1" dirty="0">
+                <a:solidFill>
+                  <a:srgbClr val="0068B7"/>
+                </a:solidFill>
+                <a:latin typeface="Aptos" pitchFamily="34" charset="0"/>
+                <a:ea typeface="Aptos" pitchFamily="34" charset="-122"/>
+                <a:cs typeface="Aptos" pitchFamily="34" charset="-120"/>
+              </a:rPr>
+              <a:t>Concept checkpoints</a:t>
+            </a:r>
+            <a:endParaRPr lang="en-US" sz="1300" dirty="0"/>
+          </a:p>
+        </p:txBody>
+      </p:sp>
+      <p:sp>
+        <p:nvSpPr>
+          <p:cNvPr id="15" name="Text 13"/>
+          <p:cNvSpPr/>
+          <p:nvPr/>
+        </p:nvSpPr>
+        <p:spPr>
+          <a:xfrm>
+            <a:off x="7818120" y="3300984"/>
+            <a:ext cx="3090672" cy="877824"/>
+          </a:xfrm>
+          <a:prstGeom prst="rect">
+            <a:avLst/>
+          </a:prstGeom>
+          <a:noFill/>
+          <a:ln/>
+        </p:spPr>
+        <p:txBody>
+          <a:bodyPr wrap="square" lIns="254" tIns="254" rIns="254" bIns="254" rtlCol="0" anchor="t">
+            <a:normAutofit/>
+          </a:bodyPr>
+          <a:lstStyle/>
+          <a:p>
+            <a:r>
+              <a:rPr lang="en-US" sz="1380" dirty="0">
+                <a:solidFill>
+                  <a:srgbClr val="17364A"/>
+                </a:solidFill>
+                <a:latin typeface="Aptos" pitchFamily="34" charset="0"/>
+                <a:ea typeface="Aptos" pitchFamily="34" charset="-122"/>
+                <a:cs typeface="Aptos" pitchFamily="34" charset="-120"/>
+              </a:rPr>
+              <a:t>1.</a:t>
+            </a:r>
+            <a:endParaRPr lang="en-US" sz="1380" dirty="0"/>
+          </a:p>
+          <a:p>
+            <a:r>
+              <a:rPr lang="en-US" sz="1380" dirty="0">
+                <a:solidFill>
+                  <a:srgbClr val="17364A"/>
+                </a:solidFill>
+                <a:latin typeface="Aptos" pitchFamily="34" charset="0"/>
+                <a:ea typeface="Aptos" pitchFamily="34" charset="-122"/>
+                <a:cs typeface="Aptos" pitchFamily="34" charset="-120"/>
+              </a:rPr>
+              <a:t>Why should Tribal sovereignty be considered before an AI project with health data begins?</a:t>
+            </a:r>
+            <a:endParaRPr lang="en-US" sz="1380" dirty="0"/>
+          </a:p>
+          <a:p>
+            <a:r>
+              <a:rPr lang="en-US" sz="1380" dirty="0">
+                <a:solidFill>
+                  <a:srgbClr val="17364A"/>
+                </a:solidFill>
+                <a:latin typeface="Aptos" pitchFamily="34" charset="0"/>
+                <a:ea typeface="Aptos" pitchFamily="34" charset="-122"/>
+                <a:cs typeface="Aptos" pitchFamily="34" charset="-120"/>
+              </a:rPr>
+              <a:t>2.</a:t>
+            </a:r>
+            <a:endParaRPr lang="en-US" sz="1380" dirty="0"/>
+          </a:p>
+        </p:txBody>
       </p:sp>
       <p:sp>
         <p:nvSpPr>
           <p:cNvPr id="16" name="Shape 14"/>
-          <p:cNvSpPr/>
-          <p:nvPr/>
-        </p:nvSpPr>
-        <p:spPr>
-          <a:xfrm>
-            <a:off x="9089136" y="3456432"/>
-            <a:ext cx="566928" cy="566928"/>
-          </a:xfrm>
-          <a:prstGeom prst="ellipse">
-            <a:avLst/>
-          </a:prstGeom>
-          <a:solidFill>
-            <a:srgbClr val="6A4CA3"/>
-          </a:solidFill>
-          <a:ln w="12700">
-            <a:solidFill>
-              <a:srgbClr val="6A4CA3"/>
-            </a:solidFill>
-            <a:prstDash val="solid"/>
-          </a:ln>
-        </p:spPr>
-      </p:sp>
-      <p:sp>
-        <p:nvSpPr>
-          <p:cNvPr id="17" name="Shape 15"/>
-          <p:cNvSpPr/>
-          <p:nvPr/>
-        </p:nvSpPr>
-        <p:spPr>
-          <a:xfrm>
-            <a:off x="8385048" y="3419856"/>
-            <a:ext cx="1975104" cy="0"/>
-          </a:xfrm>
-          <a:prstGeom prst="line">
-            <a:avLst/>
-          </a:prstGeom>
-          <a:noFill/>
-          <a:ln w="25400">
-            <a:solidFill>
-              <a:srgbClr val="8ABBD8"/>
-            </a:solidFill>
-            <a:prstDash val="solid"/>
-          </a:ln>
-        </p:spPr>
-      </p:sp>
-      <p:sp>
-        <p:nvSpPr>
-          <p:cNvPr id="18" name="Shape 16"/>
-          <p:cNvSpPr/>
-          <p:nvPr/>
-        </p:nvSpPr>
-        <p:spPr>
-          <a:xfrm>
-            <a:off x="8202168" y="3630168"/>
-            <a:ext cx="1170432" cy="118872"/>
-          </a:xfrm>
-          <a:prstGeom prst="line">
-            <a:avLst/>
-          </a:prstGeom>
-          <a:noFill/>
-          <a:ln w="25400">
-            <a:solidFill>
-              <a:srgbClr val="8ABBD8"/>
-            </a:solidFill>
-            <a:prstDash val="solid"/>
-          </a:ln>
-        </p:spPr>
-      </p:sp>
-      <p:sp>
-        <p:nvSpPr>
-          <p:cNvPr id="19" name="Shape 17"/>
-          <p:cNvSpPr/>
-          <p:nvPr/>
-        </p:nvSpPr>
-        <p:spPr>
-          <a:xfrm>
-            <a:off x="10543032" y="3630168"/>
-            <a:ext cx="-1170432" cy="118872"/>
-          </a:xfrm>
-          <a:prstGeom prst="line">
-            <a:avLst/>
-          </a:prstGeom>
-          <a:noFill/>
-          <a:ln w="25400">
-            <a:solidFill>
-              <a:srgbClr val="8ABBD8"/>
-            </a:solidFill>
-            <a:prstDash val="solid"/>
-          </a:ln>
-        </p:spPr>
-      </p:sp>
-      <p:sp>
-        <p:nvSpPr>
-          <p:cNvPr id="20" name="Text 18"/>
-          <p:cNvSpPr/>
-          <p:nvPr/>
-        </p:nvSpPr>
-        <p:spPr>
-          <a:xfrm>
-            <a:off x="7863840" y="4069080"/>
-            <a:ext cx="3017520" cy="164592"/>
-          </a:xfrm>
-          <a:prstGeom prst="rect">
-            <a:avLst/>
-          </a:prstGeom>
-          <a:noFill/>
-          <a:ln/>
-        </p:spPr>
-        <p:txBody>
-          <a:bodyPr wrap="square" lIns="0" tIns="0" rIns="0" bIns="0" rtlCol="0" anchor="ctr"/>
-          <a:lstStyle/>
-          <a:p>
-            <a:pPr algn="ctr" indent="0" marL="0">
-              <a:buNone/>
-            </a:pPr>
-            <a:r>
-              <a:rPr lang="en-US" sz="900" b="1" dirty="0">
-                <a:solidFill>
-                  <a:srgbClr val="003A63"/>
-                </a:solidFill>
-                <a:latin typeface="Aptos" pitchFamily="34" charset="0"/>
-                <a:ea typeface="Aptos" pitchFamily="34" charset="-122"/>
-                <a:cs typeface="Aptos" pitchFamily="34" charset="-120"/>
-              </a:rPr>
-              <a:t>Decision rights</a:t>
-            </a:r>
-            <a:endParaRPr lang="en-US" sz="900" dirty="0"/>
-          </a:p>
-        </p:txBody>
-      </p:sp>
-      <p:sp>
-        <p:nvSpPr>
-          <p:cNvPr id="21" name="Shape 19"/>
           <p:cNvSpPr/>
           <p:nvPr/>
         </p:nvSpPr>
@@ -19017,7 +17383,7 @@
       </p:sp>
       <p:sp>
         <p:nvSpPr>
-          <p:cNvPr id="22" name="Text 20"/>
+          <p:cNvPr id="17" name="Text 15"/>
           <p:cNvSpPr/>
           <p:nvPr/>
         </p:nvSpPr>
@@ -19056,7 +17422,7 @@
       </p:sp>
       <p:sp>
         <p:nvSpPr>
-          <p:cNvPr id="23" name="Text 21"/>
+          <p:cNvPr id="18" name="Text 16"/>
           <p:cNvSpPr/>
           <p:nvPr/>
         </p:nvSpPr>
@@ -19564,13 +17930,11 @@
             </a:avLst>
           </a:prstGeom>
           <a:solidFill>
-            <a:srgbClr val="FFFFFF">
-              <a:alpha val="88000"/>
-            </a:srgbClr>
+            <a:srgbClr val="FFFFFF"/>
           </a:solidFill>
           <a:ln w="12700">
             <a:solidFill>
-              <a:srgbClr val="D6E8F2"/>
+              <a:srgbClr val="B9D7E6"/>
             </a:solidFill>
             <a:prstDash val="solid"/>
           </a:ln>
@@ -19578,190 +17942,112 @@
       </p:sp>
       <p:sp>
         <p:nvSpPr>
-          <p:cNvPr id="14" name="Shape 12"/>
-          <p:cNvSpPr/>
-          <p:nvPr/>
-        </p:nvSpPr>
-        <p:spPr>
-          <a:xfrm>
-            <a:off x="7891272" y="3108960"/>
-            <a:ext cx="566928" cy="566928"/>
-          </a:xfrm>
-          <a:prstGeom prst="ellipse">
-            <a:avLst/>
-          </a:prstGeom>
-          <a:solidFill>
-            <a:srgbClr val="0068B7"/>
-          </a:solidFill>
-          <a:ln w="12700">
-            <a:solidFill>
-              <a:srgbClr val="0068B7"/>
-            </a:solidFill>
-            <a:prstDash val="solid"/>
-          </a:ln>
-        </p:spPr>
-      </p:sp>
-      <p:sp>
-        <p:nvSpPr>
-          <p:cNvPr id="15" name="Shape 13"/>
-          <p:cNvSpPr/>
-          <p:nvPr/>
-        </p:nvSpPr>
-        <p:spPr>
-          <a:xfrm>
-            <a:off x="10287000" y="3108960"/>
-            <a:ext cx="566928" cy="566928"/>
-          </a:xfrm>
-          <a:prstGeom prst="ellipse">
-            <a:avLst/>
-          </a:prstGeom>
-          <a:solidFill>
-            <a:srgbClr val="2F8A28"/>
-          </a:solidFill>
-          <a:ln w="12700">
-            <a:solidFill>
-              <a:srgbClr val="2F8A28"/>
-            </a:solidFill>
-            <a:prstDash val="solid"/>
-          </a:ln>
-        </p:spPr>
+          <p:cNvPr id="14" name="Text 12"/>
+          <p:cNvSpPr/>
+          <p:nvPr/>
+        </p:nvSpPr>
+        <p:spPr>
+          <a:xfrm>
+            <a:off x="7799832" y="2935224"/>
+            <a:ext cx="3145536" cy="256032"/>
+          </a:xfrm>
+          <a:prstGeom prst="rect">
+            <a:avLst/>
+          </a:prstGeom>
+          <a:noFill/>
+          <a:ln/>
+        </p:spPr>
+        <p:txBody>
+          <a:bodyPr wrap="square" lIns="0" tIns="0" rIns="0" bIns="0" rtlCol="0" anchor="ctr"/>
+          <a:lstStyle/>
+          <a:p>
+            <a:pPr indent="0" marL="0">
+              <a:buNone/>
+            </a:pPr>
+            <a:r>
+              <a:rPr lang="en-US" sz="1300" b="1" dirty="0">
+                <a:solidFill>
+                  <a:srgbClr val="0068B7"/>
+                </a:solidFill>
+                <a:latin typeface="Aptos" pitchFamily="34" charset="0"/>
+                <a:ea typeface="Aptos" pitchFamily="34" charset="-122"/>
+                <a:cs typeface="Aptos" pitchFamily="34" charset="-120"/>
+              </a:rPr>
+              <a:t>Concept checkpoints</a:t>
+            </a:r>
+            <a:endParaRPr lang="en-US" sz="1300" dirty="0"/>
+          </a:p>
+        </p:txBody>
+      </p:sp>
+      <p:sp>
+        <p:nvSpPr>
+          <p:cNvPr id="15" name="Text 13"/>
+          <p:cNvSpPr/>
+          <p:nvPr/>
+        </p:nvSpPr>
+        <p:spPr>
+          <a:xfrm>
+            <a:off x="7818120" y="3300984"/>
+            <a:ext cx="3090672" cy="877824"/>
+          </a:xfrm>
+          <a:prstGeom prst="rect">
+            <a:avLst/>
+          </a:prstGeom>
+          <a:noFill/>
+          <a:ln/>
+        </p:spPr>
+        <p:txBody>
+          <a:bodyPr wrap="square" lIns="254" tIns="254" rIns="254" bIns="254" rtlCol="0" anchor="t">
+            <a:normAutofit/>
+          </a:bodyPr>
+          <a:lstStyle/>
+          <a:p>
+            <a:r>
+              <a:rPr lang="en-US" sz="1380" dirty="0">
+                <a:solidFill>
+                  <a:srgbClr val="17364A"/>
+                </a:solidFill>
+                <a:latin typeface="Aptos" pitchFamily="34" charset="0"/>
+                <a:ea typeface="Aptos" pitchFamily="34" charset="-122"/>
+                <a:cs typeface="Aptos" pitchFamily="34" charset="-120"/>
+              </a:rPr>
+              <a:t>Global Indigenous Data Alliance.</a:t>
+            </a:r>
+            <a:endParaRPr lang="en-US" sz="1380" dirty="0"/>
+          </a:p>
+          <a:p>
+            <a:r>
+              <a:rPr lang="en-US" sz="1380" dirty="0">
+                <a:solidFill>
+                  <a:srgbClr val="17364A"/>
+                </a:solidFill>
+                <a:latin typeface="Aptos" pitchFamily="34" charset="0"/>
+                <a:ea typeface="Aptos" pitchFamily="34" charset="-122"/>
+                <a:cs typeface="Aptos" pitchFamily="34" charset="-120"/>
+              </a:rPr>
+              <a:t>CARE Principles for Indigenous Data Governance.: https://www.gida-global.org/care</a:t>
+            </a:r>
+            <a:endParaRPr lang="en-US" sz="1380" dirty="0"/>
+          </a:p>
+          <a:p>
+            <a:r>
+              <a:rPr lang="en-US" sz="1380" dirty="0">
+                <a:solidFill>
+                  <a:srgbClr val="17364A"/>
+                </a:solidFill>
+                <a:latin typeface="Aptos" pitchFamily="34" charset="0"/>
+                <a:ea typeface="Aptos" pitchFamily="34" charset="-122"/>
+                <a:cs typeface="Aptos" pitchFamily="34" charset="-120"/>
+              </a:rPr>
+              <a:t>National Institutes of Health.</a:t>
+            </a:r>
+            <a:endParaRPr lang="en-US" sz="1380" dirty="0"/>
+          </a:p>
+        </p:txBody>
       </p:sp>
       <p:sp>
         <p:nvSpPr>
           <p:cNvPr id="16" name="Shape 14"/>
-          <p:cNvSpPr/>
-          <p:nvPr/>
-        </p:nvSpPr>
-        <p:spPr>
-          <a:xfrm>
-            <a:off x="9089136" y="3456432"/>
-            <a:ext cx="566928" cy="566928"/>
-          </a:xfrm>
-          <a:prstGeom prst="ellipse">
-            <a:avLst/>
-          </a:prstGeom>
-          <a:solidFill>
-            <a:srgbClr val="6A4CA3"/>
-          </a:solidFill>
-          <a:ln w="12700">
-            <a:solidFill>
-              <a:srgbClr val="6A4CA3"/>
-            </a:solidFill>
-            <a:prstDash val="solid"/>
-          </a:ln>
-        </p:spPr>
-      </p:sp>
-      <p:sp>
-        <p:nvSpPr>
-          <p:cNvPr id="17" name="Shape 15"/>
-          <p:cNvSpPr/>
-          <p:nvPr/>
-        </p:nvSpPr>
-        <p:spPr>
-          <a:xfrm>
-            <a:off x="8385048" y="3419856"/>
-            <a:ext cx="1975104" cy="0"/>
-          </a:xfrm>
-          <a:prstGeom prst="line">
-            <a:avLst/>
-          </a:prstGeom>
-          <a:noFill/>
-          <a:ln w="25400">
-            <a:solidFill>
-              <a:srgbClr val="8ABBD8"/>
-            </a:solidFill>
-            <a:prstDash val="solid"/>
-          </a:ln>
-        </p:spPr>
-      </p:sp>
-      <p:sp>
-        <p:nvSpPr>
-          <p:cNvPr id="18" name="Shape 16"/>
-          <p:cNvSpPr/>
-          <p:nvPr/>
-        </p:nvSpPr>
-        <p:spPr>
-          <a:xfrm>
-            <a:off x="8202168" y="3630168"/>
-            <a:ext cx="1170432" cy="118872"/>
-          </a:xfrm>
-          <a:prstGeom prst="line">
-            <a:avLst/>
-          </a:prstGeom>
-          <a:noFill/>
-          <a:ln w="25400">
-            <a:solidFill>
-              <a:srgbClr val="8ABBD8"/>
-            </a:solidFill>
-            <a:prstDash val="solid"/>
-          </a:ln>
-        </p:spPr>
-      </p:sp>
-      <p:sp>
-        <p:nvSpPr>
-          <p:cNvPr id="19" name="Shape 17"/>
-          <p:cNvSpPr/>
-          <p:nvPr/>
-        </p:nvSpPr>
-        <p:spPr>
-          <a:xfrm>
-            <a:off x="10543032" y="3630168"/>
-            <a:ext cx="-1170432" cy="118872"/>
-          </a:xfrm>
-          <a:prstGeom prst="line">
-            <a:avLst/>
-          </a:prstGeom>
-          <a:noFill/>
-          <a:ln w="25400">
-            <a:solidFill>
-              <a:srgbClr val="8ABBD8"/>
-            </a:solidFill>
-            <a:prstDash val="solid"/>
-          </a:ln>
-        </p:spPr>
-      </p:sp>
-      <p:sp>
-        <p:nvSpPr>
-          <p:cNvPr id="20" name="Text 18"/>
-          <p:cNvSpPr/>
-          <p:nvPr/>
-        </p:nvSpPr>
-        <p:spPr>
-          <a:xfrm>
-            <a:off x="7863840" y="4069080"/>
-            <a:ext cx="3017520" cy="164592"/>
-          </a:xfrm>
-          <a:prstGeom prst="rect">
-            <a:avLst/>
-          </a:prstGeom>
-          <a:noFill/>
-          <a:ln/>
-        </p:spPr>
-        <p:txBody>
-          <a:bodyPr wrap="square" lIns="0" tIns="0" rIns="0" bIns="0" rtlCol="0" anchor="ctr"/>
-          <a:lstStyle/>
-          <a:p>
-            <a:pPr algn="ctr" indent="0" marL="0">
-              <a:buNone/>
-            </a:pPr>
-            <a:r>
-              <a:rPr lang="en-US" sz="900" b="1" dirty="0">
-                <a:solidFill>
-                  <a:srgbClr val="003A63"/>
-                </a:solidFill>
-                <a:latin typeface="Aptos" pitchFamily="34" charset="0"/>
-                <a:ea typeface="Aptos" pitchFamily="34" charset="-122"/>
-                <a:cs typeface="Aptos" pitchFamily="34" charset="-120"/>
-              </a:rPr>
-              <a:t>Decision rights</a:t>
-            </a:r>
-            <a:endParaRPr lang="en-US" sz="900" dirty="0"/>
-          </a:p>
-        </p:txBody>
-      </p:sp>
-      <p:sp>
-        <p:nvSpPr>
-          <p:cNvPr id="21" name="Shape 19"/>
           <p:cNvSpPr/>
           <p:nvPr/>
         </p:nvSpPr>
@@ -19788,7 +18074,7 @@
       </p:sp>
       <p:sp>
         <p:nvSpPr>
-          <p:cNvPr id="22" name="Text 20"/>
+          <p:cNvPr id="17" name="Text 15"/>
           <p:cNvSpPr/>
           <p:nvPr/>
         </p:nvSpPr>
@@ -19827,7 +18113,7 @@
       </p:sp>
       <p:sp>
         <p:nvSpPr>
-          <p:cNvPr id="23" name="Text 21"/>
+          <p:cNvPr id="18" name="Text 16"/>
           <p:cNvSpPr/>
           <p:nvPr/>
         </p:nvSpPr>
@@ -20340,20 +18626,20 @@
         </p:nvSpPr>
         <p:spPr>
           <a:xfrm>
-            <a:off x="7818120" y="3977640"/>
-            <a:ext cx="972312" cy="749808"/>
+            <a:off x="8046720" y="3794760"/>
+            <a:ext cx="3063240" cy="1600200"/>
           </a:xfrm>
           <a:prstGeom prst="roundRect">
             <a:avLst>
-              <a:gd name="adj" fmla="val 14634"/>
+              <a:gd name="adj" fmla="val 6857"/>
             </a:avLst>
           </a:prstGeom>
           <a:solidFill>
-            <a:srgbClr val="0068B7"/>
+            <a:srgbClr val="FFFFFF"/>
           </a:solidFill>
           <a:ln w="12700">
             <a:solidFill>
-              <a:srgbClr val="0068B7"/>
+              <a:srgbClr val="B9D7E6"/>
             </a:solidFill>
             <a:prstDash val="solid"/>
           </a:ln>
@@ -20367,172 +18653,100 @@
         </p:nvSpPr>
         <p:spPr>
           <a:xfrm>
-            <a:off x="7891272" y="4169664"/>
-            <a:ext cx="826008" cy="310896"/>
-          </a:xfrm>
-          <a:prstGeom prst="rect">
-            <a:avLst/>
-          </a:prstGeom>
-          <a:noFill/>
-          <a:ln/>
-        </p:spPr>
-        <p:txBody>
-          <a:bodyPr wrap="square" lIns="0" tIns="0" rIns="0" bIns="0" rtlCol="0" anchor="ctr">
+            <a:off x="8211312" y="3941064"/>
+            <a:ext cx="2734056" cy="256032"/>
+          </a:xfrm>
+          <a:prstGeom prst="rect">
+            <a:avLst/>
+          </a:prstGeom>
+          <a:noFill/>
+          <a:ln/>
+        </p:spPr>
+        <p:txBody>
+          <a:bodyPr wrap="square" lIns="0" tIns="0" rIns="0" bIns="0" rtlCol="0" anchor="ctr"/>
+          <a:lstStyle/>
+          <a:p>
+            <a:pPr indent="0" marL="0">
+              <a:buNone/>
+            </a:pPr>
+            <a:r>
+              <a:rPr lang="en-US" sz="1300" b="1" dirty="0">
+                <a:solidFill>
+                  <a:srgbClr val="0068B7"/>
+                </a:solidFill>
+                <a:latin typeface="Aptos" pitchFamily="34" charset="0"/>
+                <a:ea typeface="Aptos" pitchFamily="34" charset="-122"/>
+                <a:cs typeface="Aptos" pitchFamily="34" charset="-120"/>
+              </a:rPr>
+              <a:t>Use the play links to</a:t>
+            </a:r>
+            <a:endParaRPr lang="en-US" sz="1300" dirty="0"/>
+          </a:p>
+        </p:txBody>
+      </p:sp>
+      <p:sp>
+        <p:nvSpPr>
+          <p:cNvPr id="15" name="Text 13"/>
+          <p:cNvSpPr/>
+          <p:nvPr/>
+        </p:nvSpPr>
+        <p:spPr>
+          <a:xfrm>
+            <a:off x="8229600" y="4306824"/>
+            <a:ext cx="2679192" cy="941832"/>
+          </a:xfrm>
+          <a:prstGeom prst="rect">
+            <a:avLst/>
+          </a:prstGeom>
+          <a:noFill/>
+          <a:ln/>
+        </p:spPr>
+        <p:txBody>
+          <a:bodyPr wrap="square" lIns="254" tIns="254" rIns="254" bIns="254" rtlCol="0" anchor="t">
             <a:normAutofit/>
           </a:bodyPr>
           <a:lstStyle/>
           <a:p>
-            <a:pPr algn="ctr" indent="0" marL="0">
-              <a:buNone/>
-            </a:pPr>
-            <a:r>
-              <a:rPr lang="en-US" sz="1500" b="1" dirty="0">
-                <a:solidFill>
-                  <a:srgbClr val="FFFFFF"/>
-                </a:solidFill>
-                <a:latin typeface="Aptos" pitchFamily="34" charset="0"/>
-                <a:ea typeface="Aptos" pitchFamily="34" charset="-122"/>
-                <a:cs typeface="Aptos" pitchFamily="34" charset="-120"/>
-              </a:rPr>
-              <a:t>Lesson</a:t>
-            </a:r>
-            <a:endParaRPr lang="en-US" sz="1500" dirty="0"/>
-          </a:p>
-        </p:txBody>
-      </p:sp>
-      <p:sp>
-        <p:nvSpPr>
-          <p:cNvPr id="15" name="Shape 13"/>
-          <p:cNvSpPr/>
-          <p:nvPr/>
-        </p:nvSpPr>
-        <p:spPr>
-          <a:xfrm>
-            <a:off x="9046464" y="3977640"/>
-            <a:ext cx="972312" cy="749808"/>
-          </a:xfrm>
-          <a:prstGeom prst="roundRect">
-            <a:avLst>
-              <a:gd name="adj" fmla="val 14634"/>
-            </a:avLst>
-          </a:prstGeom>
-          <a:solidFill>
-            <a:srgbClr val="2F8A28"/>
-          </a:solidFill>
-          <a:ln w="12700">
-            <a:solidFill>
-              <a:srgbClr val="2F8A28"/>
-            </a:solidFill>
-            <a:prstDash val="solid"/>
-          </a:ln>
-        </p:spPr>
-      </p:sp>
-      <p:sp>
-        <p:nvSpPr>
-          <p:cNvPr id="16" name="Text 14"/>
-          <p:cNvSpPr/>
-          <p:nvPr/>
-        </p:nvSpPr>
-        <p:spPr>
-          <a:xfrm>
-            <a:off x="9119616" y="4169664"/>
-            <a:ext cx="826008" cy="310896"/>
-          </a:xfrm>
-          <a:prstGeom prst="rect">
-            <a:avLst/>
-          </a:prstGeom>
-          <a:noFill/>
-          <a:ln/>
-        </p:spPr>
-        <p:txBody>
-          <a:bodyPr wrap="square" lIns="0" tIns="0" rIns="0" bIns="0" rtlCol="0" anchor="ctr">
-            <a:normAutofit/>
-          </a:bodyPr>
-          <a:lstStyle/>
-          <a:p>
-            <a:pPr algn="ctr" indent="0" marL="0">
-              <a:buNone/>
-            </a:pPr>
-            <a:r>
-              <a:rPr lang="en-US" sz="1500" b="1" dirty="0">
-                <a:solidFill>
-                  <a:srgbClr val="FFFFFF"/>
-                </a:solidFill>
-                <a:latin typeface="Aptos" pitchFamily="34" charset="0"/>
-                <a:ea typeface="Aptos" pitchFamily="34" charset="-122"/>
-                <a:cs typeface="Aptos" pitchFamily="34" charset="-120"/>
-              </a:rPr>
-              <a:t>Plays</a:t>
-            </a:r>
-            <a:endParaRPr lang="en-US" sz="1500" dirty="0"/>
-          </a:p>
-        </p:txBody>
-      </p:sp>
-      <p:sp>
-        <p:nvSpPr>
-          <p:cNvPr id="17" name="Shape 15"/>
-          <p:cNvSpPr/>
-          <p:nvPr/>
-        </p:nvSpPr>
-        <p:spPr>
-          <a:xfrm>
-            <a:off x="10274808" y="3977640"/>
-            <a:ext cx="972312" cy="749808"/>
-          </a:xfrm>
-          <a:prstGeom prst="roundRect">
-            <a:avLst>
-              <a:gd name="adj" fmla="val 14634"/>
-            </a:avLst>
-          </a:prstGeom>
-          <a:solidFill>
-            <a:srgbClr val="6A4CA3"/>
-          </a:solidFill>
-          <a:ln w="12700">
-            <a:solidFill>
-              <a:srgbClr val="6A4CA3"/>
-            </a:solidFill>
-            <a:prstDash val="solid"/>
-          </a:ln>
-        </p:spPr>
-      </p:sp>
-      <p:sp>
-        <p:nvSpPr>
-          <p:cNvPr id="18" name="Text 16"/>
-          <p:cNvSpPr/>
-          <p:nvPr/>
-        </p:nvSpPr>
-        <p:spPr>
-          <a:xfrm>
-            <a:off x="10347960" y="4169664"/>
-            <a:ext cx="826008" cy="310896"/>
-          </a:xfrm>
-          <a:prstGeom prst="rect">
-            <a:avLst/>
-          </a:prstGeom>
-          <a:noFill/>
-          <a:ln/>
-        </p:spPr>
-        <p:txBody>
-          <a:bodyPr wrap="square" lIns="0" tIns="0" rIns="0" bIns="0" rtlCol="0" anchor="ctr">
-            <a:normAutofit/>
-          </a:bodyPr>
-          <a:lstStyle/>
-          <a:p>
-            <a:pPr algn="ctr" indent="0" marL="0">
-              <a:buNone/>
-            </a:pPr>
-            <a:r>
-              <a:rPr lang="en-US" sz="1500" b="1" dirty="0">
-                <a:solidFill>
-                  <a:srgbClr val="FFFFFF"/>
-                </a:solidFill>
-                <a:latin typeface="Aptos" pitchFamily="34" charset="0"/>
-                <a:ea typeface="Aptos" pitchFamily="34" charset="-122"/>
-                <a:cs typeface="Aptos" pitchFamily="34" charset="-120"/>
-              </a:rPr>
-              <a:t>Action</a:t>
-            </a:r>
-            <a:endParaRPr lang="en-US" sz="1500" dirty="0"/>
+            <a:r>
+              <a:rPr lang="en-US" sz="1380" dirty="0">
+                <a:solidFill>
+                  <a:srgbClr val="17364A"/>
+                </a:solidFill>
+                <a:latin typeface="Aptos" pitchFamily="34" charset="0"/>
+                <a:ea typeface="Aptos" pitchFamily="34" charset="-122"/>
+                <a:cs typeface="Aptos" pitchFamily="34" charset="-120"/>
+              </a:rPr>
+              <a:t>Locate the decision point in the playbook sequence.</a:t>
+            </a:r>
+            <a:endParaRPr lang="en-US" sz="1380" dirty="0"/>
+          </a:p>
+          <a:p>
+            <a:r>
+              <a:rPr lang="en-US" sz="1380" dirty="0">
+                <a:solidFill>
+                  <a:srgbClr val="17364A"/>
+                </a:solidFill>
+                <a:latin typeface="Aptos" pitchFamily="34" charset="0"/>
+                <a:ea typeface="Aptos" pitchFamily="34" charset="-122"/>
+                <a:cs typeface="Aptos" pitchFamily="34" charset="-120"/>
+              </a:rPr>
+              <a:t>Identify who should participate in the work.</a:t>
+            </a:r>
+            <a:endParaRPr lang="en-US" sz="1380" dirty="0"/>
+          </a:p>
+          <a:p>
+            <a:r>
+              <a:rPr lang="en-US" sz="1380" dirty="0">
+                <a:solidFill>
+                  <a:srgbClr val="17364A"/>
+                </a:solidFill>
+                <a:latin typeface="Aptos" pitchFamily="34" charset="0"/>
+                <a:ea typeface="Aptos" pitchFamily="34" charset="-122"/>
+                <a:cs typeface="Aptos" pitchFamily="34" charset="-120"/>
+              </a:rPr>
+              <a:t>Document the review, approval, or implementation step.</a:t>
+            </a:r>
+            <a:endParaRPr lang="en-US" sz="1380" dirty="0"/>
           </a:p>
         </p:txBody>
       </p:sp>
@@ -20991,13 +19205,11 @@
             </a:avLst>
           </a:prstGeom>
           <a:solidFill>
-            <a:srgbClr val="FFFFFF">
-              <a:alpha val="88000"/>
-            </a:srgbClr>
+            <a:srgbClr val="FFFFFF"/>
           </a:solidFill>
           <a:ln w="12700">
             <a:solidFill>
-              <a:srgbClr val="D6E8F2"/>
+              <a:srgbClr val="B9D7E6"/>
             </a:solidFill>
             <a:prstDash val="solid"/>
           </a:ln>
@@ -21005,190 +19217,112 @@
       </p:sp>
       <p:sp>
         <p:nvSpPr>
-          <p:cNvPr id="14" name="Shape 12"/>
-          <p:cNvSpPr/>
-          <p:nvPr/>
-        </p:nvSpPr>
-        <p:spPr>
-          <a:xfrm>
-            <a:off x="7891272" y="3108960"/>
-            <a:ext cx="566928" cy="566928"/>
-          </a:xfrm>
-          <a:prstGeom prst="ellipse">
-            <a:avLst/>
-          </a:prstGeom>
-          <a:solidFill>
-            <a:srgbClr val="0068B7"/>
-          </a:solidFill>
-          <a:ln w="12700">
-            <a:solidFill>
-              <a:srgbClr val="0068B7"/>
-            </a:solidFill>
-            <a:prstDash val="solid"/>
-          </a:ln>
-        </p:spPr>
-      </p:sp>
-      <p:sp>
-        <p:nvSpPr>
-          <p:cNvPr id="15" name="Shape 13"/>
-          <p:cNvSpPr/>
-          <p:nvPr/>
-        </p:nvSpPr>
-        <p:spPr>
-          <a:xfrm>
-            <a:off x="10287000" y="3108960"/>
-            <a:ext cx="566928" cy="566928"/>
-          </a:xfrm>
-          <a:prstGeom prst="ellipse">
-            <a:avLst/>
-          </a:prstGeom>
-          <a:solidFill>
-            <a:srgbClr val="2F8A28"/>
-          </a:solidFill>
-          <a:ln w="12700">
-            <a:solidFill>
-              <a:srgbClr val="2F8A28"/>
-            </a:solidFill>
-            <a:prstDash val="solid"/>
-          </a:ln>
-        </p:spPr>
+          <p:cNvPr id="14" name="Text 12"/>
+          <p:cNvSpPr/>
+          <p:nvPr/>
+        </p:nvSpPr>
+        <p:spPr>
+          <a:xfrm>
+            <a:off x="7799832" y="2935224"/>
+            <a:ext cx="3145536" cy="256032"/>
+          </a:xfrm>
+          <a:prstGeom prst="rect">
+            <a:avLst/>
+          </a:prstGeom>
+          <a:noFill/>
+          <a:ln/>
+        </p:spPr>
+        <p:txBody>
+          <a:bodyPr wrap="square" lIns="0" tIns="0" rIns="0" bIns="0" rtlCol="0" anchor="ctr"/>
+          <a:lstStyle/>
+          <a:p>
+            <a:pPr indent="0" marL="0">
+              <a:buNone/>
+            </a:pPr>
+            <a:r>
+              <a:rPr lang="en-US" sz="1300" b="1" dirty="0">
+                <a:solidFill>
+                  <a:srgbClr val="0068B7"/>
+                </a:solidFill>
+                <a:latin typeface="Aptos" pitchFamily="34" charset="0"/>
+                <a:ea typeface="Aptos" pitchFamily="34" charset="-122"/>
+                <a:cs typeface="Aptos" pitchFamily="34" charset="-120"/>
+              </a:rPr>
+              <a:t>Concept checkpoints</a:t>
+            </a:r>
+            <a:endParaRPr lang="en-US" sz="1300" dirty="0"/>
+          </a:p>
+        </p:txBody>
+      </p:sp>
+      <p:sp>
+        <p:nvSpPr>
+          <p:cNvPr id="15" name="Text 13"/>
+          <p:cNvSpPr/>
+          <p:nvPr/>
+        </p:nvSpPr>
+        <p:spPr>
+          <a:xfrm>
+            <a:off x="7818120" y="3300984"/>
+            <a:ext cx="3090672" cy="877824"/>
+          </a:xfrm>
+          <a:prstGeom prst="rect">
+            <a:avLst/>
+          </a:prstGeom>
+          <a:noFill/>
+          <a:ln/>
+        </p:spPr>
+        <p:txBody>
+          <a:bodyPr wrap="square" lIns="254" tIns="254" rIns="254" bIns="254" rtlCol="0" anchor="t">
+            <a:normAutofit/>
+          </a:bodyPr>
+          <a:lstStyle/>
+          <a:p>
+            <a:r>
+              <a:rPr lang="en-US" sz="1380" dirty="0">
+                <a:solidFill>
+                  <a:srgbClr val="17364A"/>
+                </a:solidFill>
+                <a:latin typeface="Aptos" pitchFamily="34" charset="0"/>
+                <a:ea typeface="Aptos" pitchFamily="34" charset="-122"/>
+                <a:cs typeface="Aptos" pitchFamily="34" charset="-120"/>
+              </a:rPr>
+              <a:t>HHS and CDC Tribal consultation resources.</a:t>
+            </a:r>
+            <a:endParaRPr lang="en-US" sz="1380" dirty="0"/>
+          </a:p>
+          <a:p>
+            <a:r>
+              <a:rPr lang="en-US" sz="1380" dirty="0">
+                <a:solidFill>
+                  <a:srgbClr val="17364A"/>
+                </a:solidFill>
+                <a:latin typeface="Aptos" pitchFamily="34" charset="0"/>
+                <a:ea typeface="Aptos" pitchFamily="34" charset="-122"/>
+                <a:cs typeface="Aptos" pitchFamily="34" charset="-120"/>
+              </a:rPr>
+              <a:t>Use relevant agency consultation policies and Tribal liaison guidance before starting.</a:t>
+            </a:r>
+            <a:endParaRPr lang="en-US" sz="1380" dirty="0"/>
+          </a:p>
+          <a:p>
+            <a:r>
+              <a:rPr lang="en-US" sz="1380" dirty="0">
+                <a:solidFill>
+                  <a:srgbClr val="17364A"/>
+                </a:solidFill>
+                <a:latin typeface="Aptos" pitchFamily="34" charset="0"/>
+                <a:ea typeface="Aptos" pitchFamily="34" charset="-122"/>
+                <a:cs typeface="Aptos" pitchFamily="34" charset="-120"/>
+              </a:rPr>
+              <a:t>Brookings.</a:t>
+            </a:r>
+            <a:endParaRPr lang="en-US" sz="1380" dirty="0"/>
+          </a:p>
+        </p:txBody>
       </p:sp>
       <p:sp>
         <p:nvSpPr>
           <p:cNvPr id="16" name="Shape 14"/>
-          <p:cNvSpPr/>
-          <p:nvPr/>
-        </p:nvSpPr>
-        <p:spPr>
-          <a:xfrm>
-            <a:off x="9089136" y="3456432"/>
-            <a:ext cx="566928" cy="566928"/>
-          </a:xfrm>
-          <a:prstGeom prst="ellipse">
-            <a:avLst/>
-          </a:prstGeom>
-          <a:solidFill>
-            <a:srgbClr val="6A4CA3"/>
-          </a:solidFill>
-          <a:ln w="12700">
-            <a:solidFill>
-              <a:srgbClr val="6A4CA3"/>
-            </a:solidFill>
-            <a:prstDash val="solid"/>
-          </a:ln>
-        </p:spPr>
-      </p:sp>
-      <p:sp>
-        <p:nvSpPr>
-          <p:cNvPr id="17" name="Shape 15"/>
-          <p:cNvSpPr/>
-          <p:nvPr/>
-        </p:nvSpPr>
-        <p:spPr>
-          <a:xfrm>
-            <a:off x="8385048" y="3419856"/>
-            <a:ext cx="1975104" cy="0"/>
-          </a:xfrm>
-          <a:prstGeom prst="line">
-            <a:avLst/>
-          </a:prstGeom>
-          <a:noFill/>
-          <a:ln w="25400">
-            <a:solidFill>
-              <a:srgbClr val="8ABBD8"/>
-            </a:solidFill>
-            <a:prstDash val="solid"/>
-          </a:ln>
-        </p:spPr>
-      </p:sp>
-      <p:sp>
-        <p:nvSpPr>
-          <p:cNvPr id="18" name="Shape 16"/>
-          <p:cNvSpPr/>
-          <p:nvPr/>
-        </p:nvSpPr>
-        <p:spPr>
-          <a:xfrm>
-            <a:off x="8202168" y="3630168"/>
-            <a:ext cx="1170432" cy="118872"/>
-          </a:xfrm>
-          <a:prstGeom prst="line">
-            <a:avLst/>
-          </a:prstGeom>
-          <a:noFill/>
-          <a:ln w="25400">
-            <a:solidFill>
-              <a:srgbClr val="8ABBD8"/>
-            </a:solidFill>
-            <a:prstDash val="solid"/>
-          </a:ln>
-        </p:spPr>
-      </p:sp>
-      <p:sp>
-        <p:nvSpPr>
-          <p:cNvPr id="19" name="Shape 17"/>
-          <p:cNvSpPr/>
-          <p:nvPr/>
-        </p:nvSpPr>
-        <p:spPr>
-          <a:xfrm>
-            <a:off x="10543032" y="3630168"/>
-            <a:ext cx="-1170432" cy="118872"/>
-          </a:xfrm>
-          <a:prstGeom prst="line">
-            <a:avLst/>
-          </a:prstGeom>
-          <a:noFill/>
-          <a:ln w="25400">
-            <a:solidFill>
-              <a:srgbClr val="8ABBD8"/>
-            </a:solidFill>
-            <a:prstDash val="solid"/>
-          </a:ln>
-        </p:spPr>
-      </p:sp>
-      <p:sp>
-        <p:nvSpPr>
-          <p:cNvPr id="20" name="Text 18"/>
-          <p:cNvSpPr/>
-          <p:nvPr/>
-        </p:nvSpPr>
-        <p:spPr>
-          <a:xfrm>
-            <a:off x="7863840" y="4069080"/>
-            <a:ext cx="3017520" cy="164592"/>
-          </a:xfrm>
-          <a:prstGeom prst="rect">
-            <a:avLst/>
-          </a:prstGeom>
-          <a:noFill/>
-          <a:ln/>
-        </p:spPr>
-        <p:txBody>
-          <a:bodyPr wrap="square" lIns="0" tIns="0" rIns="0" bIns="0" rtlCol="0" anchor="ctr"/>
-          <a:lstStyle/>
-          <a:p>
-            <a:pPr algn="ctr" indent="0" marL="0">
-              <a:buNone/>
-            </a:pPr>
-            <a:r>
-              <a:rPr lang="en-US" sz="900" b="1" dirty="0">
-                <a:solidFill>
-                  <a:srgbClr val="003A63"/>
-                </a:solidFill>
-                <a:latin typeface="Aptos" pitchFamily="34" charset="0"/>
-                <a:ea typeface="Aptos" pitchFamily="34" charset="-122"/>
-                <a:cs typeface="Aptos" pitchFamily="34" charset="-120"/>
-              </a:rPr>
-              <a:t>Decision rights</a:t>
-            </a:r>
-            <a:endParaRPr lang="en-US" sz="900" dirty="0"/>
-          </a:p>
-        </p:txBody>
-      </p:sp>
-      <p:sp>
-        <p:nvSpPr>
-          <p:cNvPr id="21" name="Shape 19"/>
           <p:cNvSpPr/>
           <p:nvPr/>
         </p:nvSpPr>
@@ -21215,7 +19349,7 @@
       </p:sp>
       <p:sp>
         <p:nvSpPr>
-          <p:cNvPr id="22" name="Text 20"/>
+          <p:cNvPr id="17" name="Text 15"/>
           <p:cNvSpPr/>
           <p:nvPr/>
         </p:nvSpPr>
@@ -21254,7 +19388,7 @@
       </p:sp>
       <p:sp>
         <p:nvSpPr>
-          <p:cNvPr id="23" name="Text 21"/>
+          <p:cNvPr id="18" name="Text 16"/>
           <p:cNvSpPr/>
           <p:nvPr/>
         </p:nvSpPr>
@@ -21767,20 +19901,20 @@
         </p:nvSpPr>
         <p:spPr>
           <a:xfrm>
-            <a:off x="7818120" y="3977640"/>
-            <a:ext cx="972312" cy="749808"/>
+            <a:off x="8046720" y="3794760"/>
+            <a:ext cx="3063240" cy="1600200"/>
           </a:xfrm>
           <a:prstGeom prst="roundRect">
             <a:avLst>
-              <a:gd name="adj" fmla="val 14634"/>
+              <a:gd name="adj" fmla="val 6857"/>
             </a:avLst>
           </a:prstGeom>
           <a:solidFill>
-            <a:srgbClr val="0068B7"/>
+            <a:srgbClr val="FFFFFF"/>
           </a:solidFill>
           <a:ln w="12700">
             <a:solidFill>
-              <a:srgbClr val="0068B7"/>
+              <a:srgbClr val="B9D7E6"/>
             </a:solidFill>
             <a:prstDash val="solid"/>
           </a:ln>
@@ -21794,172 +19928,100 @@
         </p:nvSpPr>
         <p:spPr>
           <a:xfrm>
-            <a:off x="7891272" y="4169664"/>
-            <a:ext cx="826008" cy="310896"/>
-          </a:xfrm>
-          <a:prstGeom prst="rect">
-            <a:avLst/>
-          </a:prstGeom>
-          <a:noFill/>
-          <a:ln/>
-        </p:spPr>
-        <p:txBody>
-          <a:bodyPr wrap="square" lIns="0" tIns="0" rIns="0" bIns="0" rtlCol="0" anchor="ctr">
+            <a:off x="8211312" y="3941064"/>
+            <a:ext cx="2734056" cy="256032"/>
+          </a:xfrm>
+          <a:prstGeom prst="rect">
+            <a:avLst/>
+          </a:prstGeom>
+          <a:noFill/>
+          <a:ln/>
+        </p:spPr>
+        <p:txBody>
+          <a:bodyPr wrap="square" lIns="0" tIns="0" rIns="0" bIns="0" rtlCol="0" anchor="ctr"/>
+          <a:lstStyle/>
+          <a:p>
+            <a:pPr indent="0" marL="0">
+              <a:buNone/>
+            </a:pPr>
+            <a:r>
+              <a:rPr lang="en-US" sz="1300" b="1" dirty="0">
+                <a:solidFill>
+                  <a:srgbClr val="0068B7"/>
+                </a:solidFill>
+                <a:latin typeface="Aptos" pitchFamily="34" charset="0"/>
+                <a:ea typeface="Aptos" pitchFamily="34" charset="-122"/>
+                <a:cs typeface="Aptos" pitchFamily="34" charset="-120"/>
+              </a:rPr>
+              <a:t>Tool selection cues</a:t>
+            </a:r>
+            <a:endParaRPr lang="en-US" sz="1300" dirty="0"/>
+          </a:p>
+        </p:txBody>
+      </p:sp>
+      <p:sp>
+        <p:nvSpPr>
+          <p:cNvPr id="15" name="Text 13"/>
+          <p:cNvSpPr/>
+          <p:nvPr/>
+        </p:nvSpPr>
+        <p:spPr>
+          <a:xfrm>
+            <a:off x="8229600" y="4306824"/>
+            <a:ext cx="2679192" cy="941832"/>
+          </a:xfrm>
+          <a:prstGeom prst="rect">
+            <a:avLst/>
+          </a:prstGeom>
+          <a:noFill/>
+          <a:ln/>
+        </p:spPr>
+        <p:txBody>
+          <a:bodyPr wrap="square" lIns="254" tIns="254" rIns="254" bIns="254" rtlCol="0" anchor="t">
             <a:normAutofit/>
           </a:bodyPr>
           <a:lstStyle/>
           <a:p>
-            <a:pPr algn="ctr" indent="0" marL="0">
-              <a:buNone/>
-            </a:pPr>
-            <a:r>
-              <a:rPr lang="en-US" sz="1500" b="1" dirty="0">
-                <a:solidFill>
-                  <a:srgbClr val="FFFFFF"/>
-                </a:solidFill>
-                <a:latin typeface="Aptos" pitchFamily="34" charset="0"/>
-                <a:ea typeface="Aptos" pitchFamily="34" charset="-122"/>
-                <a:cs typeface="Aptos" pitchFamily="34" charset="-120"/>
-              </a:rPr>
-              <a:t>Concept</a:t>
-            </a:r>
-            <a:endParaRPr lang="en-US" sz="1500" dirty="0"/>
-          </a:p>
-        </p:txBody>
-      </p:sp>
-      <p:sp>
-        <p:nvSpPr>
-          <p:cNvPr id="15" name="Shape 13"/>
-          <p:cNvSpPr/>
-          <p:nvPr/>
-        </p:nvSpPr>
-        <p:spPr>
-          <a:xfrm>
-            <a:off x="9046464" y="3977640"/>
-            <a:ext cx="972312" cy="749808"/>
-          </a:xfrm>
-          <a:prstGeom prst="roundRect">
-            <a:avLst>
-              <a:gd name="adj" fmla="val 14634"/>
-            </a:avLst>
-          </a:prstGeom>
-          <a:solidFill>
-            <a:srgbClr val="2F8A28"/>
-          </a:solidFill>
-          <a:ln w="12700">
-            <a:solidFill>
-              <a:srgbClr val="2F8A28"/>
-            </a:solidFill>
-            <a:prstDash val="solid"/>
-          </a:ln>
-        </p:spPr>
-      </p:sp>
-      <p:sp>
-        <p:nvSpPr>
-          <p:cNvPr id="16" name="Text 14"/>
-          <p:cNvSpPr/>
-          <p:nvPr/>
-        </p:nvSpPr>
-        <p:spPr>
-          <a:xfrm>
-            <a:off x="9119616" y="4169664"/>
-            <a:ext cx="826008" cy="310896"/>
-          </a:xfrm>
-          <a:prstGeom prst="rect">
-            <a:avLst/>
-          </a:prstGeom>
-          <a:noFill/>
-          <a:ln/>
-        </p:spPr>
-        <p:txBody>
-          <a:bodyPr wrap="square" lIns="0" tIns="0" rIns="0" bIns="0" rtlCol="0" anchor="ctr">
-            <a:normAutofit/>
-          </a:bodyPr>
-          <a:lstStyle/>
-          <a:p>
-            <a:pPr algn="ctr" indent="0" marL="0">
-              <a:buNone/>
-            </a:pPr>
-            <a:r>
-              <a:rPr lang="en-US" sz="1500" b="1" dirty="0">
-                <a:solidFill>
-                  <a:srgbClr val="FFFFFF"/>
-                </a:solidFill>
-                <a:latin typeface="Aptos" pitchFamily="34" charset="0"/>
-                <a:ea typeface="Aptos" pitchFamily="34" charset="-122"/>
-                <a:cs typeface="Aptos" pitchFamily="34" charset="-120"/>
-              </a:rPr>
-              <a:t>Tool</a:t>
-            </a:r>
-            <a:endParaRPr lang="en-US" sz="1500" dirty="0"/>
-          </a:p>
-        </p:txBody>
-      </p:sp>
-      <p:sp>
-        <p:nvSpPr>
-          <p:cNvPr id="17" name="Shape 15"/>
-          <p:cNvSpPr/>
-          <p:nvPr/>
-        </p:nvSpPr>
-        <p:spPr>
-          <a:xfrm>
-            <a:off x="10274808" y="3977640"/>
-            <a:ext cx="972312" cy="749808"/>
-          </a:xfrm>
-          <a:prstGeom prst="roundRect">
-            <a:avLst>
-              <a:gd name="adj" fmla="val 14634"/>
-            </a:avLst>
-          </a:prstGeom>
-          <a:solidFill>
-            <a:srgbClr val="D69A2D"/>
-          </a:solidFill>
-          <a:ln w="12700">
-            <a:solidFill>
-              <a:srgbClr val="D69A2D"/>
-            </a:solidFill>
-            <a:prstDash val="solid"/>
-          </a:ln>
-        </p:spPr>
-      </p:sp>
-      <p:sp>
-        <p:nvSpPr>
-          <p:cNvPr id="18" name="Text 16"/>
-          <p:cNvSpPr/>
-          <p:nvPr/>
-        </p:nvSpPr>
-        <p:spPr>
-          <a:xfrm>
-            <a:off x="10347960" y="4169664"/>
-            <a:ext cx="826008" cy="310896"/>
-          </a:xfrm>
-          <a:prstGeom prst="rect">
-            <a:avLst/>
-          </a:prstGeom>
-          <a:noFill/>
-          <a:ln/>
-        </p:spPr>
-        <p:txBody>
-          <a:bodyPr wrap="square" lIns="0" tIns="0" rIns="0" bIns="0" rtlCol="0" anchor="ctr">
-            <a:normAutofit/>
-          </a:bodyPr>
-          <a:lstStyle/>
-          <a:p>
-            <a:pPr algn="ctr" indent="0" marL="0">
-              <a:buNone/>
-            </a:pPr>
-            <a:r>
-              <a:rPr lang="en-US" sz="1500" b="1" dirty="0">
-                <a:solidFill>
-                  <a:srgbClr val="FFFFFF"/>
-                </a:solidFill>
-                <a:latin typeface="Aptos" pitchFamily="34" charset="0"/>
-                <a:ea typeface="Aptos" pitchFamily="34" charset="-122"/>
-                <a:cs typeface="Aptos" pitchFamily="34" charset="-120"/>
-              </a:rPr>
-              <a:t>Artifact</a:t>
-            </a:r>
-            <a:endParaRPr lang="en-US" sz="1500" dirty="0"/>
+            <a:r>
+              <a:rPr lang="en-US" sz="1380" dirty="0">
+                <a:solidFill>
+                  <a:srgbClr val="17364A"/>
+                </a:solidFill>
+                <a:latin typeface="Aptos" pitchFamily="34" charset="0"/>
+                <a:ea typeface="Aptos" pitchFamily="34" charset="-122"/>
+                <a:cs typeface="Aptos" pitchFamily="34" charset="-120"/>
+              </a:rPr>
+              <a:t>Use a tool when no comparable local process exists.</a:t>
+            </a:r>
+            <a:endParaRPr lang="en-US" sz="1380" dirty="0"/>
+          </a:p>
+          <a:p>
+            <a:r>
+              <a:rPr lang="en-US" sz="1380" dirty="0">
+                <a:solidFill>
+                  <a:srgbClr val="17364A"/>
+                </a:solidFill>
+                <a:latin typeface="Aptos" pitchFamily="34" charset="0"/>
+                <a:ea typeface="Aptos" pitchFamily="34" charset="-122"/>
+                <a:cs typeface="Aptos" pitchFamily="34" charset="-120"/>
+              </a:rPr>
+              <a:t>Adapt existing department templates when they already fit the purpose.</a:t>
+            </a:r>
+            <a:endParaRPr lang="en-US" sz="1380" dirty="0"/>
+          </a:p>
+          <a:p>
+            <a:r>
+              <a:rPr lang="en-US" sz="1380" dirty="0">
+                <a:solidFill>
+                  <a:srgbClr val="17364A"/>
+                </a:solidFill>
+                <a:latin typeface="Aptos" pitchFamily="34" charset="0"/>
+                <a:ea typeface="Aptos" pitchFamily="34" charset="-122"/>
+                <a:cs typeface="Aptos" pitchFamily="34" charset="-120"/>
+              </a:rPr>
+              <a:t>Save the completed artifact as evidence of the decision.</a:t>
+            </a:r>
+            <a:endParaRPr lang="en-US" sz="1380" dirty="0"/>
           </a:p>
         </p:txBody>
       </p:sp>
@@ -22432,13 +20494,11 @@
             </a:avLst>
           </a:prstGeom>
           <a:solidFill>
-            <a:srgbClr val="FFFFFF">
-              <a:alpha val="88000"/>
-            </a:srgbClr>
+            <a:srgbClr val="FFFFFF"/>
           </a:solidFill>
           <a:ln w="12700">
             <a:solidFill>
-              <a:srgbClr val="D6E8F2"/>
+              <a:srgbClr val="B9D7E6"/>
             </a:solidFill>
             <a:prstDash val="solid"/>
           </a:ln>
@@ -22446,190 +20506,112 @@
       </p:sp>
       <p:sp>
         <p:nvSpPr>
-          <p:cNvPr id="14" name="Shape 12"/>
-          <p:cNvSpPr/>
-          <p:nvPr/>
-        </p:nvSpPr>
-        <p:spPr>
-          <a:xfrm>
-            <a:off x="7891272" y="3108960"/>
-            <a:ext cx="566928" cy="566928"/>
-          </a:xfrm>
-          <a:prstGeom prst="ellipse">
-            <a:avLst/>
-          </a:prstGeom>
-          <a:solidFill>
-            <a:srgbClr val="0068B7"/>
-          </a:solidFill>
-          <a:ln w="12700">
-            <a:solidFill>
-              <a:srgbClr val="0068B7"/>
-            </a:solidFill>
-            <a:prstDash val="solid"/>
-          </a:ln>
-        </p:spPr>
-      </p:sp>
-      <p:sp>
-        <p:nvSpPr>
-          <p:cNvPr id="15" name="Shape 13"/>
-          <p:cNvSpPr/>
-          <p:nvPr/>
-        </p:nvSpPr>
-        <p:spPr>
-          <a:xfrm>
-            <a:off x="10287000" y="3108960"/>
-            <a:ext cx="566928" cy="566928"/>
-          </a:xfrm>
-          <a:prstGeom prst="ellipse">
-            <a:avLst/>
-          </a:prstGeom>
-          <a:solidFill>
-            <a:srgbClr val="2F8A28"/>
-          </a:solidFill>
-          <a:ln w="12700">
-            <a:solidFill>
-              <a:srgbClr val="2F8A28"/>
-            </a:solidFill>
-            <a:prstDash val="solid"/>
-          </a:ln>
-        </p:spPr>
+          <p:cNvPr id="14" name="Text 12"/>
+          <p:cNvSpPr/>
+          <p:nvPr/>
+        </p:nvSpPr>
+        <p:spPr>
+          <a:xfrm>
+            <a:off x="7799832" y="2935224"/>
+            <a:ext cx="3145536" cy="256032"/>
+          </a:xfrm>
+          <a:prstGeom prst="rect">
+            <a:avLst/>
+          </a:prstGeom>
+          <a:noFill/>
+          <a:ln/>
+        </p:spPr>
+        <p:txBody>
+          <a:bodyPr wrap="square" lIns="0" tIns="0" rIns="0" bIns="0" rtlCol="0" anchor="ctr"/>
+          <a:lstStyle/>
+          <a:p>
+            <a:pPr indent="0" marL="0">
+              <a:buNone/>
+            </a:pPr>
+            <a:r>
+              <a:rPr lang="en-US" sz="1300" b="1" dirty="0">
+                <a:solidFill>
+                  <a:srgbClr val="0068B7"/>
+                </a:solidFill>
+                <a:latin typeface="Aptos" pitchFamily="34" charset="0"/>
+                <a:ea typeface="Aptos" pitchFamily="34" charset="-122"/>
+                <a:cs typeface="Aptos" pitchFamily="34" charset="-120"/>
+              </a:rPr>
+              <a:t>Concept checkpoints</a:t>
+            </a:r>
+            <a:endParaRPr lang="en-US" sz="1300" dirty="0"/>
+          </a:p>
+        </p:txBody>
+      </p:sp>
+      <p:sp>
+        <p:nvSpPr>
+          <p:cNvPr id="15" name="Text 13"/>
+          <p:cNvSpPr/>
+          <p:nvPr/>
+        </p:nvSpPr>
+        <p:spPr>
+          <a:xfrm>
+            <a:off x="7818120" y="3300984"/>
+            <a:ext cx="3090672" cy="877824"/>
+          </a:xfrm>
+          <a:prstGeom prst="rect">
+            <a:avLst/>
+          </a:prstGeom>
+          <a:noFill/>
+          <a:ln/>
+        </p:spPr>
+        <p:txBody>
+          <a:bodyPr wrap="square" lIns="254" tIns="254" rIns="254" bIns="254" rtlCol="0" anchor="t">
+            <a:normAutofit/>
+          </a:bodyPr>
+          <a:lstStyle/>
+          <a:p>
+            <a:r>
+              <a:rPr lang="en-US" sz="1380" dirty="0">
+                <a:solidFill>
+                  <a:srgbClr val="17364A"/>
+                </a:solidFill>
+                <a:latin typeface="Aptos" pitchFamily="34" charset="0"/>
+                <a:ea typeface="Aptos" pitchFamily="34" charset="-122"/>
+                <a:cs typeface="Aptos" pitchFamily="34" charset="-120"/>
+              </a:rPr>
+              <a:t>Explain why Tribal sovereignty must be considered before starting AI projects that involve.</a:t>
+            </a:r>
+            <a:endParaRPr lang="en-US" sz="1380" dirty="0"/>
+          </a:p>
+          <a:p>
+            <a:r>
+              <a:rPr lang="en-US" sz="1380" dirty="0">
+                <a:solidFill>
+                  <a:srgbClr val="17364A"/>
+                </a:solidFill>
+                <a:latin typeface="Aptos" pitchFamily="34" charset="0"/>
+                <a:ea typeface="Aptos" pitchFamily="34" charset="-122"/>
+                <a:cs typeface="Aptos" pitchFamily="34" charset="-120"/>
+              </a:rPr>
+              <a:t>Describe Indigenous Data Sovereignty, Indigenous Data Governance, Digital Sovereignty, and.</a:t>
+            </a:r>
+            <a:endParaRPr lang="en-US" sz="1380" dirty="0"/>
+          </a:p>
+          <a:p>
+            <a:r>
+              <a:rPr lang="en-US" sz="1380" dirty="0">
+                <a:solidFill>
+                  <a:srgbClr val="17364A"/>
+                </a:solidFill>
+                <a:latin typeface="Aptos" pitchFamily="34" charset="0"/>
+                <a:ea typeface="Aptos" pitchFamily="34" charset="-122"/>
+                <a:cs typeface="Aptos" pitchFamily="34" charset="-120"/>
+              </a:rPr>
+              <a:t>Identify governance questions that should be addressed before using Tribal data or AI.</a:t>
+            </a:r>
+            <a:endParaRPr lang="en-US" sz="1380" dirty="0"/>
+          </a:p>
+        </p:txBody>
       </p:sp>
       <p:sp>
         <p:nvSpPr>
           <p:cNvPr id="16" name="Shape 14"/>
-          <p:cNvSpPr/>
-          <p:nvPr/>
-        </p:nvSpPr>
-        <p:spPr>
-          <a:xfrm>
-            <a:off x="9089136" y="3456432"/>
-            <a:ext cx="566928" cy="566928"/>
-          </a:xfrm>
-          <a:prstGeom prst="ellipse">
-            <a:avLst/>
-          </a:prstGeom>
-          <a:solidFill>
-            <a:srgbClr val="6A4CA3"/>
-          </a:solidFill>
-          <a:ln w="12700">
-            <a:solidFill>
-              <a:srgbClr val="6A4CA3"/>
-            </a:solidFill>
-            <a:prstDash val="solid"/>
-          </a:ln>
-        </p:spPr>
-      </p:sp>
-      <p:sp>
-        <p:nvSpPr>
-          <p:cNvPr id="17" name="Shape 15"/>
-          <p:cNvSpPr/>
-          <p:nvPr/>
-        </p:nvSpPr>
-        <p:spPr>
-          <a:xfrm>
-            <a:off x="8385048" y="3419856"/>
-            <a:ext cx="1975104" cy="0"/>
-          </a:xfrm>
-          <a:prstGeom prst="line">
-            <a:avLst/>
-          </a:prstGeom>
-          <a:noFill/>
-          <a:ln w="25400">
-            <a:solidFill>
-              <a:srgbClr val="8ABBD8"/>
-            </a:solidFill>
-            <a:prstDash val="solid"/>
-          </a:ln>
-        </p:spPr>
-      </p:sp>
-      <p:sp>
-        <p:nvSpPr>
-          <p:cNvPr id="18" name="Shape 16"/>
-          <p:cNvSpPr/>
-          <p:nvPr/>
-        </p:nvSpPr>
-        <p:spPr>
-          <a:xfrm>
-            <a:off x="8202168" y="3630168"/>
-            <a:ext cx="1170432" cy="118872"/>
-          </a:xfrm>
-          <a:prstGeom prst="line">
-            <a:avLst/>
-          </a:prstGeom>
-          <a:noFill/>
-          <a:ln w="25400">
-            <a:solidFill>
-              <a:srgbClr val="8ABBD8"/>
-            </a:solidFill>
-            <a:prstDash val="solid"/>
-          </a:ln>
-        </p:spPr>
-      </p:sp>
-      <p:sp>
-        <p:nvSpPr>
-          <p:cNvPr id="19" name="Shape 17"/>
-          <p:cNvSpPr/>
-          <p:nvPr/>
-        </p:nvSpPr>
-        <p:spPr>
-          <a:xfrm>
-            <a:off x="10543032" y="3630168"/>
-            <a:ext cx="-1170432" cy="118872"/>
-          </a:xfrm>
-          <a:prstGeom prst="line">
-            <a:avLst/>
-          </a:prstGeom>
-          <a:noFill/>
-          <a:ln w="25400">
-            <a:solidFill>
-              <a:srgbClr val="8ABBD8"/>
-            </a:solidFill>
-            <a:prstDash val="solid"/>
-          </a:ln>
-        </p:spPr>
-      </p:sp>
-      <p:sp>
-        <p:nvSpPr>
-          <p:cNvPr id="20" name="Text 18"/>
-          <p:cNvSpPr/>
-          <p:nvPr/>
-        </p:nvSpPr>
-        <p:spPr>
-          <a:xfrm>
-            <a:off x="7863840" y="4069080"/>
-            <a:ext cx="3017520" cy="164592"/>
-          </a:xfrm>
-          <a:prstGeom prst="rect">
-            <a:avLst/>
-          </a:prstGeom>
-          <a:noFill/>
-          <a:ln/>
-        </p:spPr>
-        <p:txBody>
-          <a:bodyPr wrap="square" lIns="0" tIns="0" rIns="0" bIns="0" rtlCol="0" anchor="ctr"/>
-          <a:lstStyle/>
-          <a:p>
-            <a:pPr algn="ctr" indent="0" marL="0">
-              <a:buNone/>
-            </a:pPr>
-            <a:r>
-              <a:rPr lang="en-US" sz="900" b="1" dirty="0">
-                <a:solidFill>
-                  <a:srgbClr val="003A63"/>
-                </a:solidFill>
-                <a:latin typeface="Aptos" pitchFamily="34" charset="0"/>
-                <a:ea typeface="Aptos" pitchFamily="34" charset="-122"/>
-                <a:cs typeface="Aptos" pitchFamily="34" charset="-120"/>
-              </a:rPr>
-              <a:t>Decision rights</a:t>
-            </a:r>
-            <a:endParaRPr lang="en-US" sz="900" dirty="0"/>
-          </a:p>
-        </p:txBody>
-      </p:sp>
-      <p:sp>
-        <p:nvSpPr>
-          <p:cNvPr id="21" name="Shape 19"/>
           <p:cNvSpPr/>
           <p:nvPr/>
         </p:nvSpPr>
@@ -22656,7 +20638,7 @@
       </p:sp>
       <p:sp>
         <p:nvSpPr>
-          <p:cNvPr id="22" name="Text 20"/>
+          <p:cNvPr id="17" name="Text 15"/>
           <p:cNvSpPr/>
           <p:nvPr/>
         </p:nvSpPr>
@@ -22695,7 +20677,7 @@
       </p:sp>
       <p:sp>
         <p:nvSpPr>
-          <p:cNvPr id="23" name="Text 21"/>
+          <p:cNvPr id="18" name="Text 16"/>
           <p:cNvSpPr/>
           <p:nvPr/>
         </p:nvSpPr>
@@ -23189,13 +21171,11 @@
             </a:avLst>
           </a:prstGeom>
           <a:solidFill>
-            <a:srgbClr val="FFFFFF">
-              <a:alpha val="88000"/>
-            </a:srgbClr>
+            <a:srgbClr val="FFFFFF"/>
           </a:solidFill>
           <a:ln w="12700">
             <a:solidFill>
-              <a:srgbClr val="D6E8F2"/>
+              <a:srgbClr val="B9D7E6"/>
             </a:solidFill>
             <a:prstDash val="solid"/>
           </a:ln>
@@ -23203,190 +21183,98 @@
       </p:sp>
       <p:sp>
         <p:nvSpPr>
-          <p:cNvPr id="14" name="Shape 12"/>
-          <p:cNvSpPr/>
-          <p:nvPr/>
-        </p:nvSpPr>
-        <p:spPr>
-          <a:xfrm>
-            <a:off x="7891272" y="3108960"/>
-            <a:ext cx="566928" cy="566928"/>
-          </a:xfrm>
-          <a:prstGeom prst="ellipse">
-            <a:avLst/>
-          </a:prstGeom>
-          <a:solidFill>
-            <a:srgbClr val="0068B7"/>
-          </a:solidFill>
-          <a:ln w="12700">
-            <a:solidFill>
-              <a:srgbClr val="0068B7"/>
-            </a:solidFill>
-            <a:prstDash val="solid"/>
-          </a:ln>
-        </p:spPr>
-      </p:sp>
-      <p:sp>
-        <p:nvSpPr>
-          <p:cNvPr id="15" name="Shape 13"/>
-          <p:cNvSpPr/>
-          <p:nvPr/>
-        </p:nvSpPr>
-        <p:spPr>
-          <a:xfrm>
-            <a:off x="10287000" y="3108960"/>
-            <a:ext cx="566928" cy="566928"/>
-          </a:xfrm>
-          <a:prstGeom prst="ellipse">
-            <a:avLst/>
-          </a:prstGeom>
-          <a:solidFill>
-            <a:srgbClr val="2F8A28"/>
-          </a:solidFill>
-          <a:ln w="12700">
-            <a:solidFill>
-              <a:srgbClr val="2F8A28"/>
-            </a:solidFill>
-            <a:prstDash val="solid"/>
-          </a:ln>
-        </p:spPr>
+          <p:cNvPr id="14" name="Text 12"/>
+          <p:cNvSpPr/>
+          <p:nvPr/>
+        </p:nvSpPr>
+        <p:spPr>
+          <a:xfrm>
+            <a:off x="7799832" y="2935224"/>
+            <a:ext cx="3145536" cy="256032"/>
+          </a:xfrm>
+          <a:prstGeom prst="rect">
+            <a:avLst/>
+          </a:prstGeom>
+          <a:noFill/>
+          <a:ln/>
+        </p:spPr>
+        <p:txBody>
+          <a:bodyPr wrap="square" lIns="0" tIns="0" rIns="0" bIns="0" rtlCol="0" anchor="ctr"/>
+          <a:lstStyle/>
+          <a:p>
+            <a:pPr indent="0" marL="0">
+              <a:buNone/>
+            </a:pPr>
+            <a:r>
+              <a:rPr lang="en-US" sz="1300" b="1" dirty="0">
+                <a:solidFill>
+                  <a:srgbClr val="0068B7"/>
+                </a:solidFill>
+                <a:latin typeface="Aptos" pitchFamily="34" charset="0"/>
+                <a:ea typeface="Aptos" pitchFamily="34" charset="-122"/>
+                <a:cs typeface="Aptos" pitchFamily="34" charset="-120"/>
+              </a:rPr>
+              <a:t>Concept checkpoints</a:t>
+            </a:r>
+            <a:endParaRPr lang="en-US" sz="1300" dirty="0"/>
+          </a:p>
+        </p:txBody>
+      </p:sp>
+      <p:sp>
+        <p:nvSpPr>
+          <p:cNvPr id="15" name="Text 13"/>
+          <p:cNvSpPr/>
+          <p:nvPr/>
+        </p:nvSpPr>
+        <p:spPr>
+          <a:xfrm>
+            <a:off x="7818120" y="3300984"/>
+            <a:ext cx="3090672" cy="877824"/>
+          </a:xfrm>
+          <a:prstGeom prst="rect">
+            <a:avLst/>
+          </a:prstGeom>
+          <a:noFill/>
+          <a:ln/>
+        </p:spPr>
+        <p:txBody>
+          <a:bodyPr wrap="square" lIns="254" tIns="254" rIns="254" bIns="254" rtlCol="0" anchor="t">
+            <a:normAutofit/>
+          </a:bodyPr>
+          <a:lstStyle/>
+          <a:p>
+            <a:r>
+              <a:rPr lang="en-US" sz="1380" dirty="0">
+                <a:solidFill>
+                  <a:srgbClr val="17364A"/>
+                </a:solidFill>
+                <a:latin typeface="Aptos" pitchFamily="34" charset="0"/>
+                <a:ea typeface="Aptos" pitchFamily="34" charset="-122"/>
+                <a:cs typeface="Aptos" pitchFamily="34" charset="-120"/>
+              </a:rPr>
+              <a:t>Connect sovereignty protections to practical project artifacts, including Tribal data.</a:t>
+            </a:r>
+            <a:endParaRPr lang="en-US" sz="1380" dirty="0"/>
+          </a:p>
+          <a:p>
+            <a:r>
+              <a:rPr lang="en-US" sz="1380" dirty="0">
+                <a:solidFill>
+                  <a:srgbClr val="17364A"/>
+                </a:solidFill>
+                <a:latin typeface="Aptos" pitchFamily="34" charset="0"/>
+                <a:ea typeface="Aptos" pitchFamily="34" charset="-122"/>
+                <a:cs typeface="Aptos" pitchFamily="34" charset="-120"/>
+              </a:rPr>
+              <a:t>Draft an initial Tribal sovereignty and Indigenous data governance screening memo for a.</a:t>
+            </a:r>
+            <a:endParaRPr lang="en-US" sz="1380" dirty="0"/>
+          </a:p>
+        </p:txBody>
       </p:sp>
       <p:sp>
         <p:nvSpPr>
           <p:cNvPr id="16" name="Shape 14"/>
-          <p:cNvSpPr/>
-          <p:nvPr/>
-        </p:nvSpPr>
-        <p:spPr>
-          <a:xfrm>
-            <a:off x="9089136" y="3456432"/>
-            <a:ext cx="566928" cy="566928"/>
-          </a:xfrm>
-          <a:prstGeom prst="ellipse">
-            <a:avLst/>
-          </a:prstGeom>
-          <a:solidFill>
-            <a:srgbClr val="6A4CA3"/>
-          </a:solidFill>
-          <a:ln w="12700">
-            <a:solidFill>
-              <a:srgbClr val="6A4CA3"/>
-            </a:solidFill>
-            <a:prstDash val="solid"/>
-          </a:ln>
-        </p:spPr>
-      </p:sp>
-      <p:sp>
-        <p:nvSpPr>
-          <p:cNvPr id="17" name="Shape 15"/>
-          <p:cNvSpPr/>
-          <p:nvPr/>
-        </p:nvSpPr>
-        <p:spPr>
-          <a:xfrm>
-            <a:off x="8385048" y="3419856"/>
-            <a:ext cx="1975104" cy="0"/>
-          </a:xfrm>
-          <a:prstGeom prst="line">
-            <a:avLst/>
-          </a:prstGeom>
-          <a:noFill/>
-          <a:ln w="25400">
-            <a:solidFill>
-              <a:srgbClr val="8ABBD8"/>
-            </a:solidFill>
-            <a:prstDash val="solid"/>
-          </a:ln>
-        </p:spPr>
-      </p:sp>
-      <p:sp>
-        <p:nvSpPr>
-          <p:cNvPr id="18" name="Shape 16"/>
-          <p:cNvSpPr/>
-          <p:nvPr/>
-        </p:nvSpPr>
-        <p:spPr>
-          <a:xfrm>
-            <a:off x="8202168" y="3630168"/>
-            <a:ext cx="1170432" cy="118872"/>
-          </a:xfrm>
-          <a:prstGeom prst="line">
-            <a:avLst/>
-          </a:prstGeom>
-          <a:noFill/>
-          <a:ln w="25400">
-            <a:solidFill>
-              <a:srgbClr val="8ABBD8"/>
-            </a:solidFill>
-            <a:prstDash val="solid"/>
-          </a:ln>
-        </p:spPr>
-      </p:sp>
-      <p:sp>
-        <p:nvSpPr>
-          <p:cNvPr id="19" name="Shape 17"/>
-          <p:cNvSpPr/>
-          <p:nvPr/>
-        </p:nvSpPr>
-        <p:spPr>
-          <a:xfrm>
-            <a:off x="10543032" y="3630168"/>
-            <a:ext cx="-1170432" cy="118872"/>
-          </a:xfrm>
-          <a:prstGeom prst="line">
-            <a:avLst/>
-          </a:prstGeom>
-          <a:noFill/>
-          <a:ln w="25400">
-            <a:solidFill>
-              <a:srgbClr val="8ABBD8"/>
-            </a:solidFill>
-            <a:prstDash val="solid"/>
-          </a:ln>
-        </p:spPr>
-      </p:sp>
-      <p:sp>
-        <p:nvSpPr>
-          <p:cNvPr id="20" name="Text 18"/>
-          <p:cNvSpPr/>
-          <p:nvPr/>
-        </p:nvSpPr>
-        <p:spPr>
-          <a:xfrm>
-            <a:off x="7863840" y="4069080"/>
-            <a:ext cx="3017520" cy="164592"/>
-          </a:xfrm>
-          <a:prstGeom prst="rect">
-            <a:avLst/>
-          </a:prstGeom>
-          <a:noFill/>
-          <a:ln/>
-        </p:spPr>
-        <p:txBody>
-          <a:bodyPr wrap="square" lIns="0" tIns="0" rIns="0" bIns="0" rtlCol="0" anchor="ctr"/>
-          <a:lstStyle/>
-          <a:p>
-            <a:pPr algn="ctr" indent="0" marL="0">
-              <a:buNone/>
-            </a:pPr>
-            <a:r>
-              <a:rPr lang="en-US" sz="900" b="1" dirty="0">
-                <a:solidFill>
-                  <a:srgbClr val="003A63"/>
-                </a:solidFill>
-                <a:latin typeface="Aptos" pitchFamily="34" charset="0"/>
-                <a:ea typeface="Aptos" pitchFamily="34" charset="-122"/>
-                <a:cs typeface="Aptos" pitchFamily="34" charset="-120"/>
-              </a:rPr>
-              <a:t>Decision rights</a:t>
-            </a:r>
-            <a:endParaRPr lang="en-US" sz="900" dirty="0"/>
-          </a:p>
-        </p:txBody>
-      </p:sp>
-      <p:sp>
-        <p:nvSpPr>
-          <p:cNvPr id="21" name="Shape 19"/>
           <p:cNvSpPr/>
           <p:nvPr/>
         </p:nvSpPr>
@@ -23413,7 +21301,7 @@
       </p:sp>
       <p:sp>
         <p:nvSpPr>
-          <p:cNvPr id="22" name="Text 20"/>
+          <p:cNvPr id="17" name="Text 15"/>
           <p:cNvSpPr/>
           <p:nvPr/>
         </p:nvSpPr>
@@ -23452,7 +21340,7 @@
       </p:sp>
       <p:sp>
         <p:nvSpPr>
-          <p:cNvPr id="23" name="Text 21"/>
+          <p:cNvPr id="18" name="Text 16"/>
           <p:cNvSpPr/>
           <p:nvPr/>
         </p:nvSpPr>
@@ -23960,13 +21848,11 @@
             </a:avLst>
           </a:prstGeom>
           <a:solidFill>
-            <a:srgbClr val="FFFFFF">
-              <a:alpha val="88000"/>
-            </a:srgbClr>
+            <a:srgbClr val="FFFFFF"/>
           </a:solidFill>
           <a:ln w="12700">
             <a:solidFill>
-              <a:srgbClr val="D6E8F2"/>
+              <a:srgbClr val="B9D7E6"/>
             </a:solidFill>
             <a:prstDash val="solid"/>
           </a:ln>
@@ -23974,190 +21860,112 @@
       </p:sp>
       <p:sp>
         <p:nvSpPr>
-          <p:cNvPr id="14" name="Shape 12"/>
-          <p:cNvSpPr/>
-          <p:nvPr/>
-        </p:nvSpPr>
-        <p:spPr>
-          <a:xfrm>
-            <a:off x="7891272" y="3108960"/>
-            <a:ext cx="566928" cy="566928"/>
-          </a:xfrm>
-          <a:prstGeom prst="ellipse">
-            <a:avLst/>
-          </a:prstGeom>
-          <a:solidFill>
-            <a:srgbClr val="0068B7"/>
-          </a:solidFill>
-          <a:ln w="12700">
-            <a:solidFill>
-              <a:srgbClr val="0068B7"/>
-            </a:solidFill>
-            <a:prstDash val="solid"/>
-          </a:ln>
-        </p:spPr>
-      </p:sp>
-      <p:sp>
-        <p:nvSpPr>
-          <p:cNvPr id="15" name="Shape 13"/>
-          <p:cNvSpPr/>
-          <p:nvPr/>
-        </p:nvSpPr>
-        <p:spPr>
-          <a:xfrm>
-            <a:off x="10287000" y="3108960"/>
-            <a:ext cx="566928" cy="566928"/>
-          </a:xfrm>
-          <a:prstGeom prst="ellipse">
-            <a:avLst/>
-          </a:prstGeom>
-          <a:solidFill>
-            <a:srgbClr val="2F8A28"/>
-          </a:solidFill>
-          <a:ln w="12700">
-            <a:solidFill>
-              <a:srgbClr val="2F8A28"/>
-            </a:solidFill>
-            <a:prstDash val="solid"/>
-          </a:ln>
-        </p:spPr>
+          <p:cNvPr id="14" name="Text 12"/>
+          <p:cNvSpPr/>
+          <p:nvPr/>
+        </p:nvSpPr>
+        <p:spPr>
+          <a:xfrm>
+            <a:off x="7799832" y="2935224"/>
+            <a:ext cx="3145536" cy="256032"/>
+          </a:xfrm>
+          <a:prstGeom prst="rect">
+            <a:avLst/>
+          </a:prstGeom>
+          <a:noFill/>
+          <a:ln/>
+        </p:spPr>
+        <p:txBody>
+          <a:bodyPr wrap="square" lIns="0" tIns="0" rIns="0" bIns="0" rtlCol="0" anchor="ctr"/>
+          <a:lstStyle/>
+          <a:p>
+            <a:pPr indent="0" marL="0">
+              <a:buNone/>
+            </a:pPr>
+            <a:r>
+              <a:rPr lang="en-US" sz="1300" b="1" dirty="0">
+                <a:solidFill>
+                  <a:srgbClr val="0068B7"/>
+                </a:solidFill>
+                <a:latin typeface="Aptos" pitchFamily="34" charset="0"/>
+                <a:ea typeface="Aptos" pitchFamily="34" charset="-122"/>
+                <a:cs typeface="Aptos" pitchFamily="34" charset="-120"/>
+              </a:rPr>
+              <a:t>Concept checkpoints</a:t>
+            </a:r>
+            <a:endParaRPr lang="en-US" sz="1300" dirty="0"/>
+          </a:p>
+        </p:txBody>
+      </p:sp>
+      <p:sp>
+        <p:nvSpPr>
+          <p:cNvPr id="15" name="Text 13"/>
+          <p:cNvSpPr/>
+          <p:nvPr/>
+        </p:nvSpPr>
+        <p:spPr>
+          <a:xfrm>
+            <a:off x="7818120" y="3300984"/>
+            <a:ext cx="3090672" cy="877824"/>
+          </a:xfrm>
+          <a:prstGeom prst="rect">
+            <a:avLst/>
+          </a:prstGeom>
+          <a:noFill/>
+          <a:ln/>
+        </p:spPr>
+        <p:txBody>
+          <a:bodyPr wrap="square" lIns="254" tIns="254" rIns="254" bIns="254" rtlCol="0" anchor="t">
+            <a:normAutofit/>
+          </a:bodyPr>
+          <a:lstStyle/>
+          <a:p>
+            <a:r>
+              <a:rPr lang="en-US" sz="1380" dirty="0">
+                <a:solidFill>
+                  <a:srgbClr val="17364A"/>
+                </a:solidFill>
+                <a:latin typeface="Aptos" pitchFamily="34" charset="0"/>
+                <a:ea typeface="Aptos" pitchFamily="34" charset="-122"/>
+                <a:cs typeface="Aptos" pitchFamily="34" charset="-120"/>
+              </a:rPr>
+              <a:t>This module introduces public health staff to the responsibilities that arise when AI.</a:t>
+            </a:r>
+            <a:endParaRPr lang="en-US" sz="1380" dirty="0"/>
+          </a:p>
+          <a:p>
+            <a:r>
+              <a:rPr lang="en-US" sz="1380" dirty="0">
+                <a:solidFill>
+                  <a:srgbClr val="17364A"/>
+                </a:solidFill>
+                <a:latin typeface="Aptos" pitchFamily="34" charset="0"/>
+                <a:ea typeface="Aptos" pitchFamily="34" charset="-122"/>
+                <a:cs typeface="Aptos" pitchFamily="34" charset="-120"/>
+              </a:rPr>
+              <a:t>The central message is that Tribal Nations are sovereign governments, not stakeholder.</a:t>
+            </a:r>
+            <a:endParaRPr lang="en-US" sz="1380" dirty="0"/>
+          </a:p>
+          <a:p>
+            <a:r>
+              <a:rPr lang="en-US" sz="1380" dirty="0">
+                <a:solidFill>
+                  <a:srgbClr val="17364A"/>
+                </a:solidFill>
+                <a:latin typeface="Aptos" pitchFamily="34" charset="0"/>
+                <a:ea typeface="Aptos" pitchFamily="34" charset="-122"/>
+                <a:cs typeface="Aptos" pitchFamily="34" charset="-120"/>
+              </a:rPr>
+              <a:t>AI projects must be shaped through early consultation, formal partnership, and clear.</a:t>
+            </a:r>
+            <a:endParaRPr lang="en-US" sz="1380" dirty="0"/>
+          </a:p>
+        </p:txBody>
       </p:sp>
       <p:sp>
         <p:nvSpPr>
           <p:cNvPr id="16" name="Shape 14"/>
-          <p:cNvSpPr/>
-          <p:nvPr/>
-        </p:nvSpPr>
-        <p:spPr>
-          <a:xfrm>
-            <a:off x="9089136" y="3456432"/>
-            <a:ext cx="566928" cy="566928"/>
-          </a:xfrm>
-          <a:prstGeom prst="ellipse">
-            <a:avLst/>
-          </a:prstGeom>
-          <a:solidFill>
-            <a:srgbClr val="6A4CA3"/>
-          </a:solidFill>
-          <a:ln w="12700">
-            <a:solidFill>
-              <a:srgbClr val="6A4CA3"/>
-            </a:solidFill>
-            <a:prstDash val="solid"/>
-          </a:ln>
-        </p:spPr>
-      </p:sp>
-      <p:sp>
-        <p:nvSpPr>
-          <p:cNvPr id="17" name="Shape 15"/>
-          <p:cNvSpPr/>
-          <p:nvPr/>
-        </p:nvSpPr>
-        <p:spPr>
-          <a:xfrm>
-            <a:off x="8385048" y="3419856"/>
-            <a:ext cx="1975104" cy="0"/>
-          </a:xfrm>
-          <a:prstGeom prst="line">
-            <a:avLst/>
-          </a:prstGeom>
-          <a:noFill/>
-          <a:ln w="25400">
-            <a:solidFill>
-              <a:srgbClr val="8ABBD8"/>
-            </a:solidFill>
-            <a:prstDash val="solid"/>
-          </a:ln>
-        </p:spPr>
-      </p:sp>
-      <p:sp>
-        <p:nvSpPr>
-          <p:cNvPr id="18" name="Shape 16"/>
-          <p:cNvSpPr/>
-          <p:nvPr/>
-        </p:nvSpPr>
-        <p:spPr>
-          <a:xfrm>
-            <a:off x="8202168" y="3630168"/>
-            <a:ext cx="1170432" cy="118872"/>
-          </a:xfrm>
-          <a:prstGeom prst="line">
-            <a:avLst/>
-          </a:prstGeom>
-          <a:noFill/>
-          <a:ln w="25400">
-            <a:solidFill>
-              <a:srgbClr val="8ABBD8"/>
-            </a:solidFill>
-            <a:prstDash val="solid"/>
-          </a:ln>
-        </p:spPr>
-      </p:sp>
-      <p:sp>
-        <p:nvSpPr>
-          <p:cNvPr id="19" name="Shape 17"/>
-          <p:cNvSpPr/>
-          <p:nvPr/>
-        </p:nvSpPr>
-        <p:spPr>
-          <a:xfrm>
-            <a:off x="10543032" y="3630168"/>
-            <a:ext cx="-1170432" cy="118872"/>
-          </a:xfrm>
-          <a:prstGeom prst="line">
-            <a:avLst/>
-          </a:prstGeom>
-          <a:noFill/>
-          <a:ln w="25400">
-            <a:solidFill>
-              <a:srgbClr val="8ABBD8"/>
-            </a:solidFill>
-            <a:prstDash val="solid"/>
-          </a:ln>
-        </p:spPr>
-      </p:sp>
-      <p:sp>
-        <p:nvSpPr>
-          <p:cNvPr id="20" name="Text 18"/>
-          <p:cNvSpPr/>
-          <p:nvPr/>
-        </p:nvSpPr>
-        <p:spPr>
-          <a:xfrm>
-            <a:off x="7863840" y="4069080"/>
-            <a:ext cx="3017520" cy="164592"/>
-          </a:xfrm>
-          <a:prstGeom prst="rect">
-            <a:avLst/>
-          </a:prstGeom>
-          <a:noFill/>
-          <a:ln/>
-        </p:spPr>
-        <p:txBody>
-          <a:bodyPr wrap="square" lIns="0" tIns="0" rIns="0" bIns="0" rtlCol="0" anchor="ctr"/>
-          <a:lstStyle/>
-          <a:p>
-            <a:pPr algn="ctr" indent="0" marL="0">
-              <a:buNone/>
-            </a:pPr>
-            <a:r>
-              <a:rPr lang="en-US" sz="900" b="1" dirty="0">
-                <a:solidFill>
-                  <a:srgbClr val="003A63"/>
-                </a:solidFill>
-                <a:latin typeface="Aptos" pitchFamily="34" charset="0"/>
-                <a:ea typeface="Aptos" pitchFamily="34" charset="-122"/>
-                <a:cs typeface="Aptos" pitchFamily="34" charset="-120"/>
-              </a:rPr>
-              <a:t>Decision rights</a:t>
-            </a:r>
-            <a:endParaRPr lang="en-US" sz="900" dirty="0"/>
-          </a:p>
-        </p:txBody>
-      </p:sp>
-      <p:sp>
-        <p:nvSpPr>
-          <p:cNvPr id="21" name="Shape 19"/>
           <p:cNvSpPr/>
           <p:nvPr/>
         </p:nvSpPr>
@@ -24184,7 +21992,7 @@
       </p:sp>
       <p:sp>
         <p:nvSpPr>
-          <p:cNvPr id="22" name="Text 20"/>
+          <p:cNvPr id="17" name="Text 15"/>
           <p:cNvSpPr/>
           <p:nvPr/>
         </p:nvSpPr>
@@ -24223,7 +22031,7 @@
       </p:sp>
       <p:sp>
         <p:nvSpPr>
-          <p:cNvPr id="23" name="Text 21"/>
+          <p:cNvPr id="18" name="Text 16"/>
           <p:cNvSpPr/>
           <p:nvPr/>
         </p:nvSpPr>
@@ -24731,13 +22539,11 @@
             </a:avLst>
           </a:prstGeom>
           <a:solidFill>
-            <a:srgbClr val="FFFFFF">
-              <a:alpha val="88000"/>
-            </a:srgbClr>
+            <a:srgbClr val="FFFFFF"/>
           </a:solidFill>
           <a:ln w="12700">
             <a:solidFill>
-              <a:srgbClr val="D6E8F2"/>
+              <a:srgbClr val="B9D7E6"/>
             </a:solidFill>
             <a:prstDash val="solid"/>
           </a:ln>
@@ -24745,190 +22551,112 @@
       </p:sp>
       <p:sp>
         <p:nvSpPr>
-          <p:cNvPr id="14" name="Shape 12"/>
-          <p:cNvSpPr/>
-          <p:nvPr/>
-        </p:nvSpPr>
-        <p:spPr>
-          <a:xfrm>
-            <a:off x="7891272" y="3108960"/>
-            <a:ext cx="566928" cy="566928"/>
-          </a:xfrm>
-          <a:prstGeom prst="ellipse">
-            <a:avLst/>
-          </a:prstGeom>
-          <a:solidFill>
-            <a:srgbClr val="0068B7"/>
-          </a:solidFill>
-          <a:ln w="12700">
-            <a:solidFill>
-              <a:srgbClr val="0068B7"/>
-            </a:solidFill>
-            <a:prstDash val="solid"/>
-          </a:ln>
-        </p:spPr>
-      </p:sp>
-      <p:sp>
-        <p:nvSpPr>
-          <p:cNvPr id="15" name="Shape 13"/>
-          <p:cNvSpPr/>
-          <p:nvPr/>
-        </p:nvSpPr>
-        <p:spPr>
-          <a:xfrm>
-            <a:off x="10287000" y="3108960"/>
-            <a:ext cx="566928" cy="566928"/>
-          </a:xfrm>
-          <a:prstGeom prst="ellipse">
-            <a:avLst/>
-          </a:prstGeom>
-          <a:solidFill>
-            <a:srgbClr val="2F8A28"/>
-          </a:solidFill>
-          <a:ln w="12700">
-            <a:solidFill>
-              <a:srgbClr val="2F8A28"/>
-            </a:solidFill>
-            <a:prstDash val="solid"/>
-          </a:ln>
-        </p:spPr>
+          <p:cNvPr id="14" name="Text 12"/>
+          <p:cNvSpPr/>
+          <p:nvPr/>
+        </p:nvSpPr>
+        <p:spPr>
+          <a:xfrm>
+            <a:off x="7799832" y="2935224"/>
+            <a:ext cx="3145536" cy="256032"/>
+          </a:xfrm>
+          <a:prstGeom prst="rect">
+            <a:avLst/>
+          </a:prstGeom>
+          <a:noFill/>
+          <a:ln/>
+        </p:spPr>
+        <p:txBody>
+          <a:bodyPr wrap="square" lIns="0" tIns="0" rIns="0" bIns="0" rtlCol="0" anchor="ctr"/>
+          <a:lstStyle/>
+          <a:p>
+            <a:pPr indent="0" marL="0">
+              <a:buNone/>
+            </a:pPr>
+            <a:r>
+              <a:rPr lang="en-US" sz="1300" b="1" dirty="0">
+                <a:solidFill>
+                  <a:srgbClr val="0068B7"/>
+                </a:solidFill>
+                <a:latin typeface="Aptos" pitchFamily="34" charset="0"/>
+                <a:ea typeface="Aptos" pitchFamily="34" charset="-122"/>
+                <a:cs typeface="Aptos" pitchFamily="34" charset="-120"/>
+              </a:rPr>
+              <a:t>Concept checkpoints</a:t>
+            </a:r>
+            <a:endParaRPr lang="en-US" sz="1300" dirty="0"/>
+          </a:p>
+        </p:txBody>
+      </p:sp>
+      <p:sp>
+        <p:nvSpPr>
+          <p:cNvPr id="15" name="Text 13"/>
+          <p:cNvSpPr/>
+          <p:nvPr/>
+        </p:nvSpPr>
+        <p:spPr>
+          <a:xfrm>
+            <a:off x="7818120" y="3300984"/>
+            <a:ext cx="3090672" cy="877824"/>
+          </a:xfrm>
+          <a:prstGeom prst="rect">
+            <a:avLst/>
+          </a:prstGeom>
+          <a:noFill/>
+          <a:ln/>
+        </p:spPr>
+        <p:txBody>
+          <a:bodyPr wrap="square" lIns="254" tIns="254" rIns="254" bIns="254" rtlCol="0" anchor="t">
+            <a:normAutofit/>
+          </a:bodyPr>
+          <a:lstStyle/>
+          <a:p>
+            <a:r>
+              <a:rPr lang="en-US" sz="1380" dirty="0">
+                <a:solidFill>
+                  <a:srgbClr val="17364A"/>
+                </a:solidFill>
+                <a:latin typeface="Aptos" pitchFamily="34" charset="0"/>
+                <a:ea typeface="Aptos" pitchFamily="34" charset="-122"/>
+                <a:cs typeface="Aptos" pitchFamily="34" charset="-120"/>
+              </a:rPr>
+              <a:t>Tribal sovereignty: The inherent authority of Tribal Nations to govern themselves and.</a:t>
+            </a:r>
+            <a:endParaRPr lang="en-US" sz="1380" dirty="0"/>
+          </a:p>
+          <a:p>
+            <a:r>
+              <a:rPr lang="en-US" sz="1380" dirty="0">
+                <a:solidFill>
+                  <a:srgbClr val="17364A"/>
+                </a:solidFill>
+                <a:latin typeface="Aptos" pitchFamily="34" charset="0"/>
+                <a:ea typeface="Aptos" pitchFamily="34" charset="-122"/>
+                <a:cs typeface="Aptos" pitchFamily="34" charset="-120"/>
+              </a:rPr>
+              <a:t>Indigenous Data Sovereignty: The right of Indigenous Peoples and Nations to govern data.</a:t>
+            </a:r>
+            <a:endParaRPr lang="en-US" sz="1380" dirty="0"/>
+          </a:p>
+          <a:p>
+            <a:r>
+              <a:rPr lang="en-US" sz="1380" dirty="0">
+                <a:solidFill>
+                  <a:srgbClr val="17364A"/>
+                </a:solidFill>
+                <a:latin typeface="Aptos" pitchFamily="34" charset="0"/>
+                <a:ea typeface="Aptos" pitchFamily="34" charset="-122"/>
+                <a:cs typeface="Aptos" pitchFamily="34" charset="-120"/>
+              </a:rPr>
+              <a:t>Indigenous Data Governance: The policies, agreements, relationships, roles, and oversight.</a:t>
+            </a:r>
+            <a:endParaRPr lang="en-US" sz="1380" dirty="0"/>
+          </a:p>
+        </p:txBody>
       </p:sp>
       <p:sp>
         <p:nvSpPr>
           <p:cNvPr id="16" name="Shape 14"/>
-          <p:cNvSpPr/>
-          <p:nvPr/>
-        </p:nvSpPr>
-        <p:spPr>
-          <a:xfrm>
-            <a:off x="9089136" y="3456432"/>
-            <a:ext cx="566928" cy="566928"/>
-          </a:xfrm>
-          <a:prstGeom prst="ellipse">
-            <a:avLst/>
-          </a:prstGeom>
-          <a:solidFill>
-            <a:srgbClr val="6A4CA3"/>
-          </a:solidFill>
-          <a:ln w="12700">
-            <a:solidFill>
-              <a:srgbClr val="6A4CA3"/>
-            </a:solidFill>
-            <a:prstDash val="solid"/>
-          </a:ln>
-        </p:spPr>
-      </p:sp>
-      <p:sp>
-        <p:nvSpPr>
-          <p:cNvPr id="17" name="Shape 15"/>
-          <p:cNvSpPr/>
-          <p:nvPr/>
-        </p:nvSpPr>
-        <p:spPr>
-          <a:xfrm>
-            <a:off x="8385048" y="3419856"/>
-            <a:ext cx="1975104" cy="0"/>
-          </a:xfrm>
-          <a:prstGeom prst="line">
-            <a:avLst/>
-          </a:prstGeom>
-          <a:noFill/>
-          <a:ln w="25400">
-            <a:solidFill>
-              <a:srgbClr val="8ABBD8"/>
-            </a:solidFill>
-            <a:prstDash val="solid"/>
-          </a:ln>
-        </p:spPr>
-      </p:sp>
-      <p:sp>
-        <p:nvSpPr>
-          <p:cNvPr id="18" name="Shape 16"/>
-          <p:cNvSpPr/>
-          <p:nvPr/>
-        </p:nvSpPr>
-        <p:spPr>
-          <a:xfrm>
-            <a:off x="8202168" y="3630168"/>
-            <a:ext cx="1170432" cy="118872"/>
-          </a:xfrm>
-          <a:prstGeom prst="line">
-            <a:avLst/>
-          </a:prstGeom>
-          <a:noFill/>
-          <a:ln w="25400">
-            <a:solidFill>
-              <a:srgbClr val="8ABBD8"/>
-            </a:solidFill>
-            <a:prstDash val="solid"/>
-          </a:ln>
-        </p:spPr>
-      </p:sp>
-      <p:sp>
-        <p:nvSpPr>
-          <p:cNvPr id="19" name="Shape 17"/>
-          <p:cNvSpPr/>
-          <p:nvPr/>
-        </p:nvSpPr>
-        <p:spPr>
-          <a:xfrm>
-            <a:off x="10543032" y="3630168"/>
-            <a:ext cx="-1170432" cy="118872"/>
-          </a:xfrm>
-          <a:prstGeom prst="line">
-            <a:avLst/>
-          </a:prstGeom>
-          <a:noFill/>
-          <a:ln w="25400">
-            <a:solidFill>
-              <a:srgbClr val="8ABBD8"/>
-            </a:solidFill>
-            <a:prstDash val="solid"/>
-          </a:ln>
-        </p:spPr>
-      </p:sp>
-      <p:sp>
-        <p:nvSpPr>
-          <p:cNvPr id="20" name="Text 18"/>
-          <p:cNvSpPr/>
-          <p:nvPr/>
-        </p:nvSpPr>
-        <p:spPr>
-          <a:xfrm>
-            <a:off x="7863840" y="4069080"/>
-            <a:ext cx="3017520" cy="164592"/>
-          </a:xfrm>
-          <a:prstGeom prst="rect">
-            <a:avLst/>
-          </a:prstGeom>
-          <a:noFill/>
-          <a:ln/>
-        </p:spPr>
-        <p:txBody>
-          <a:bodyPr wrap="square" lIns="0" tIns="0" rIns="0" bIns="0" rtlCol="0" anchor="ctr"/>
-          <a:lstStyle/>
-          <a:p>
-            <a:pPr algn="ctr" indent="0" marL="0">
-              <a:buNone/>
-            </a:pPr>
-            <a:r>
-              <a:rPr lang="en-US" sz="900" b="1" dirty="0">
-                <a:solidFill>
-                  <a:srgbClr val="003A63"/>
-                </a:solidFill>
-                <a:latin typeface="Aptos" pitchFamily="34" charset="0"/>
-                <a:ea typeface="Aptos" pitchFamily="34" charset="-122"/>
-                <a:cs typeface="Aptos" pitchFamily="34" charset="-120"/>
-              </a:rPr>
-              <a:t>Decision rights</a:t>
-            </a:r>
-            <a:endParaRPr lang="en-US" sz="900" dirty="0"/>
-          </a:p>
-        </p:txBody>
-      </p:sp>
-      <p:sp>
-        <p:nvSpPr>
-          <p:cNvPr id="21" name="Shape 19"/>
           <p:cNvSpPr/>
           <p:nvPr/>
         </p:nvSpPr>
@@ -24955,7 +22683,7 @@
       </p:sp>
       <p:sp>
         <p:nvSpPr>
-          <p:cNvPr id="22" name="Text 20"/>
+          <p:cNvPr id="17" name="Text 15"/>
           <p:cNvSpPr/>
           <p:nvPr/>
         </p:nvSpPr>
@@ -24994,7 +22722,7 @@
       </p:sp>
       <p:sp>
         <p:nvSpPr>
-          <p:cNvPr id="23" name="Text 21"/>
+          <p:cNvPr id="18" name="Text 16"/>
           <p:cNvSpPr/>
           <p:nvPr/>
         </p:nvSpPr>
@@ -25474,13 +23202,11 @@
             </a:avLst>
           </a:prstGeom>
           <a:solidFill>
-            <a:srgbClr val="FFFFFF">
-              <a:alpha val="88000"/>
-            </a:srgbClr>
+            <a:srgbClr val="FFFFFF"/>
           </a:solidFill>
           <a:ln w="12700">
             <a:solidFill>
-              <a:srgbClr val="D6E8F2"/>
+              <a:srgbClr val="B9D7E6"/>
             </a:solidFill>
             <a:prstDash val="solid"/>
           </a:ln>
@@ -25488,190 +23214,84 @@
       </p:sp>
       <p:sp>
         <p:nvSpPr>
-          <p:cNvPr id="14" name="Shape 12"/>
-          <p:cNvSpPr/>
-          <p:nvPr/>
-        </p:nvSpPr>
-        <p:spPr>
-          <a:xfrm>
-            <a:off x="7891272" y="3108960"/>
-            <a:ext cx="566928" cy="566928"/>
-          </a:xfrm>
-          <a:prstGeom prst="ellipse">
-            <a:avLst/>
-          </a:prstGeom>
-          <a:solidFill>
-            <a:srgbClr val="0068B7"/>
-          </a:solidFill>
-          <a:ln w="12700">
-            <a:solidFill>
-              <a:srgbClr val="0068B7"/>
-            </a:solidFill>
-            <a:prstDash val="solid"/>
-          </a:ln>
-        </p:spPr>
-      </p:sp>
-      <p:sp>
-        <p:nvSpPr>
-          <p:cNvPr id="15" name="Shape 13"/>
-          <p:cNvSpPr/>
-          <p:nvPr/>
-        </p:nvSpPr>
-        <p:spPr>
-          <a:xfrm>
-            <a:off x="10287000" y="3108960"/>
-            <a:ext cx="566928" cy="566928"/>
-          </a:xfrm>
-          <a:prstGeom prst="ellipse">
-            <a:avLst/>
-          </a:prstGeom>
-          <a:solidFill>
-            <a:srgbClr val="2F8A28"/>
-          </a:solidFill>
-          <a:ln w="12700">
-            <a:solidFill>
-              <a:srgbClr val="2F8A28"/>
-            </a:solidFill>
-            <a:prstDash val="solid"/>
-          </a:ln>
-        </p:spPr>
+          <p:cNvPr id="14" name="Text 12"/>
+          <p:cNvSpPr/>
+          <p:nvPr/>
+        </p:nvSpPr>
+        <p:spPr>
+          <a:xfrm>
+            <a:off x="7799832" y="2935224"/>
+            <a:ext cx="3145536" cy="256032"/>
+          </a:xfrm>
+          <a:prstGeom prst="rect">
+            <a:avLst/>
+          </a:prstGeom>
+          <a:noFill/>
+          <a:ln/>
+        </p:spPr>
+        <p:txBody>
+          <a:bodyPr wrap="square" lIns="0" tIns="0" rIns="0" bIns="0" rtlCol="0" anchor="ctr"/>
+          <a:lstStyle/>
+          <a:p>
+            <a:pPr indent="0" marL="0">
+              <a:buNone/>
+            </a:pPr>
+            <a:r>
+              <a:rPr lang="en-US" sz="1300" b="1" dirty="0">
+                <a:solidFill>
+                  <a:srgbClr val="0068B7"/>
+                </a:solidFill>
+                <a:latin typeface="Aptos" pitchFamily="34" charset="0"/>
+                <a:ea typeface="Aptos" pitchFamily="34" charset="-122"/>
+                <a:cs typeface="Aptos" pitchFamily="34" charset="-120"/>
+              </a:rPr>
+              <a:t>Concept checkpoints</a:t>
+            </a:r>
+            <a:endParaRPr lang="en-US" sz="1300" dirty="0"/>
+          </a:p>
+        </p:txBody>
+      </p:sp>
+      <p:sp>
+        <p:nvSpPr>
+          <p:cNvPr id="15" name="Text 13"/>
+          <p:cNvSpPr/>
+          <p:nvPr/>
+        </p:nvSpPr>
+        <p:spPr>
+          <a:xfrm>
+            <a:off x="7818120" y="3300984"/>
+            <a:ext cx="3090672" cy="877824"/>
+          </a:xfrm>
+          <a:prstGeom prst="rect">
+            <a:avLst/>
+          </a:prstGeom>
+          <a:noFill/>
+          <a:ln/>
+        </p:spPr>
+        <p:txBody>
+          <a:bodyPr wrap="square" lIns="254" tIns="254" rIns="254" bIns="254" rtlCol="0" anchor="t">
+            <a:normAutofit/>
+          </a:bodyPr>
+          <a:lstStyle/>
+          <a:p>
+            <a:r>
+              <a:rPr lang="en-US" sz="1380" dirty="0">
+                <a:solidFill>
+                  <a:srgbClr val="17364A"/>
+                </a:solidFill>
+                <a:latin typeface="Aptos" pitchFamily="34" charset="0"/>
+                <a:ea typeface="Aptos" pitchFamily="34" charset="-122"/>
+                <a:cs typeface="Aptos" pitchFamily="34" charset="-120"/>
+              </a:rPr>
+              <a:t>Cultural humility: An ongoing practice of learning, accountability, and respect that.</a:t>
+            </a:r>
+            <a:endParaRPr lang="en-US" sz="1380" dirty="0"/>
+          </a:p>
+        </p:txBody>
       </p:sp>
       <p:sp>
         <p:nvSpPr>
           <p:cNvPr id="16" name="Shape 14"/>
-          <p:cNvSpPr/>
-          <p:nvPr/>
-        </p:nvSpPr>
-        <p:spPr>
-          <a:xfrm>
-            <a:off x="9089136" y="3456432"/>
-            <a:ext cx="566928" cy="566928"/>
-          </a:xfrm>
-          <a:prstGeom prst="ellipse">
-            <a:avLst/>
-          </a:prstGeom>
-          <a:solidFill>
-            <a:srgbClr val="6A4CA3"/>
-          </a:solidFill>
-          <a:ln w="12700">
-            <a:solidFill>
-              <a:srgbClr val="6A4CA3"/>
-            </a:solidFill>
-            <a:prstDash val="solid"/>
-          </a:ln>
-        </p:spPr>
-      </p:sp>
-      <p:sp>
-        <p:nvSpPr>
-          <p:cNvPr id="17" name="Shape 15"/>
-          <p:cNvSpPr/>
-          <p:nvPr/>
-        </p:nvSpPr>
-        <p:spPr>
-          <a:xfrm>
-            <a:off x="8385048" y="3419856"/>
-            <a:ext cx="1975104" cy="0"/>
-          </a:xfrm>
-          <a:prstGeom prst="line">
-            <a:avLst/>
-          </a:prstGeom>
-          <a:noFill/>
-          <a:ln w="25400">
-            <a:solidFill>
-              <a:srgbClr val="8ABBD8"/>
-            </a:solidFill>
-            <a:prstDash val="solid"/>
-          </a:ln>
-        </p:spPr>
-      </p:sp>
-      <p:sp>
-        <p:nvSpPr>
-          <p:cNvPr id="18" name="Shape 16"/>
-          <p:cNvSpPr/>
-          <p:nvPr/>
-        </p:nvSpPr>
-        <p:spPr>
-          <a:xfrm>
-            <a:off x="8202168" y="3630168"/>
-            <a:ext cx="1170432" cy="118872"/>
-          </a:xfrm>
-          <a:prstGeom prst="line">
-            <a:avLst/>
-          </a:prstGeom>
-          <a:noFill/>
-          <a:ln w="25400">
-            <a:solidFill>
-              <a:srgbClr val="8ABBD8"/>
-            </a:solidFill>
-            <a:prstDash val="solid"/>
-          </a:ln>
-        </p:spPr>
-      </p:sp>
-      <p:sp>
-        <p:nvSpPr>
-          <p:cNvPr id="19" name="Shape 17"/>
-          <p:cNvSpPr/>
-          <p:nvPr/>
-        </p:nvSpPr>
-        <p:spPr>
-          <a:xfrm>
-            <a:off x="10543032" y="3630168"/>
-            <a:ext cx="-1170432" cy="118872"/>
-          </a:xfrm>
-          <a:prstGeom prst="line">
-            <a:avLst/>
-          </a:prstGeom>
-          <a:noFill/>
-          <a:ln w="25400">
-            <a:solidFill>
-              <a:srgbClr val="8ABBD8"/>
-            </a:solidFill>
-            <a:prstDash val="solid"/>
-          </a:ln>
-        </p:spPr>
-      </p:sp>
-      <p:sp>
-        <p:nvSpPr>
-          <p:cNvPr id="20" name="Text 18"/>
-          <p:cNvSpPr/>
-          <p:nvPr/>
-        </p:nvSpPr>
-        <p:spPr>
-          <a:xfrm>
-            <a:off x="7863840" y="4069080"/>
-            <a:ext cx="3017520" cy="164592"/>
-          </a:xfrm>
-          <a:prstGeom prst="rect">
-            <a:avLst/>
-          </a:prstGeom>
-          <a:noFill/>
-          <a:ln/>
-        </p:spPr>
-        <p:txBody>
-          <a:bodyPr wrap="square" lIns="0" tIns="0" rIns="0" bIns="0" rtlCol="0" anchor="ctr"/>
-          <a:lstStyle/>
-          <a:p>
-            <a:pPr algn="ctr" indent="0" marL="0">
-              <a:buNone/>
-            </a:pPr>
-            <a:r>
-              <a:rPr lang="en-US" sz="900" b="1" dirty="0">
-                <a:solidFill>
-                  <a:srgbClr val="003A63"/>
-                </a:solidFill>
-                <a:latin typeface="Aptos" pitchFamily="34" charset="0"/>
-                <a:ea typeface="Aptos" pitchFamily="34" charset="-122"/>
-                <a:cs typeface="Aptos" pitchFamily="34" charset="-120"/>
-              </a:rPr>
-              <a:t>Decision rights</a:t>
-            </a:r>
-            <a:endParaRPr lang="en-US" sz="900" dirty="0"/>
-          </a:p>
-        </p:txBody>
-      </p:sp>
-      <p:sp>
-        <p:nvSpPr>
-          <p:cNvPr id="21" name="Shape 19"/>
           <p:cNvSpPr/>
           <p:nvPr/>
         </p:nvSpPr>
@@ -25698,7 +23318,7 @@
       </p:sp>
       <p:sp>
         <p:nvSpPr>
-          <p:cNvPr id="22" name="Text 20"/>
+          <p:cNvPr id="17" name="Text 15"/>
           <p:cNvSpPr/>
           <p:nvPr/>
         </p:nvSpPr>
@@ -25737,7 +23357,7 @@
       </p:sp>
       <p:sp>
         <p:nvSpPr>
-          <p:cNvPr id="23" name="Text 21"/>
+          <p:cNvPr id="18" name="Text 16"/>
           <p:cNvSpPr/>
           <p:nvPr/>
         </p:nvSpPr>

--- a/downloads/presentations/modules/gov-110.pptx
+++ b/downloads/presentations/modules/gov-110.pptx
@@ -4095,49 +4095,58 @@
           <a:ln/>
         </p:spPr>
         <p:txBody>
-          <a:bodyPr wrap="square" lIns="635" tIns="635" rIns="635" bIns="635" rtlCol="0" anchor="t">
+          <a:bodyPr wrap="square" lIns="1016" tIns="1016" rIns="1016" bIns="1016" rtlCol="0" anchor="t">
             <a:normAutofit/>
           </a:bodyPr>
           <a:lstStyle/>
           <a:p>
+            <a:pPr indent="0" marL="0">
+              <a:buNone/>
+            </a:pPr>
             <a:r>
               <a:rPr lang="en-US" sz="2100" dirty="0">
                 <a:solidFill>
-                  <a:srgbClr val="17364A"/>
-                </a:solidFill>
-                <a:latin typeface="Aptos" pitchFamily="34" charset="0"/>
-                <a:ea typeface="Aptos" pitchFamily="34" charset="-122"/>
-                <a:cs typeface="Aptos" pitchFamily="34" charset="-120"/>
-              </a:rPr>
-              <a:t>This national-level module is intended for training and planning purposes.</a:t>
+                  <a:srgbClr val="003A63"/>
+                </a:solidFill>
+                <a:latin typeface="Aptos" pitchFamily="34" charset="0"/>
+                <a:ea typeface="Aptos" pitchFamily="34" charset="-122"/>
+                <a:cs typeface="Aptos" pitchFamily="34" charset="-120"/>
+              </a:rPr>
+              <a:t>• This national-level module is intended for training and planning purposes.</a:t>
             </a:r>
             <a:endParaRPr lang="en-US" sz="2100" dirty="0"/>
           </a:p>
           <a:p>
+            <a:pPr indent="0" marL="0">
+              <a:buNone/>
+            </a:pPr>
             <a:r>
               <a:rPr lang="en-US" sz="2100" dirty="0">
                 <a:solidFill>
-                  <a:srgbClr val="17364A"/>
-                </a:solidFill>
-                <a:latin typeface="Aptos" pitchFamily="34" charset="0"/>
-                <a:ea typeface="Aptos" pitchFamily="34" charset="-122"/>
-                <a:cs typeface="Aptos" pitchFamily="34" charset="-120"/>
-              </a:rPr>
-              <a:t>It does not replace Tribal law, Tribal policy, Tribal consultation, Tribal IRB review, legal counsel,.</a:t>
+                  <a:srgbClr val="003A63"/>
+                </a:solidFill>
+                <a:latin typeface="Aptos" pitchFamily="34" charset="0"/>
+                <a:ea typeface="Aptos" pitchFamily="34" charset="-122"/>
+                <a:cs typeface="Aptos" pitchFamily="34" charset="-120"/>
+              </a:rPr>
+              <a:t>• It does not replace Tribal law, Tribal policy, Tribal consultation, Tribal IRB review, legal.</a:t>
             </a:r>
             <a:endParaRPr lang="en-US" sz="2100" dirty="0"/>
           </a:p>
           <a:p>
+            <a:pPr indent="0" marL="0">
+              <a:buNone/>
+            </a:pPr>
             <a:r>
               <a:rPr lang="en-US" sz="2100" dirty="0">
                 <a:solidFill>
-                  <a:srgbClr val="17364A"/>
-                </a:solidFill>
-                <a:latin typeface="Aptos" pitchFamily="34" charset="0"/>
-                <a:ea typeface="Aptos" pitchFamily="34" charset="-122"/>
-                <a:cs typeface="Aptos" pitchFamily="34" charset="-120"/>
-              </a:rPr>
-              <a:t>Requirements may vary by Tribal Nation, jurisdiction, funding source, data sharing agreement, research.</a:t>
+                  <a:srgbClr val="003A63"/>
+                </a:solidFill>
+                <a:latin typeface="Aptos" pitchFamily="34" charset="0"/>
+                <a:ea typeface="Aptos" pitchFamily="34" charset="-122"/>
+                <a:cs typeface="Aptos" pitchFamily="34" charset="-120"/>
+              </a:rPr>
+              <a:t>• Requirements may vary by Tribal Nation, jurisdiction, funding source, data sharing agreement,.</a:t>
             </a:r>
             <a:endParaRPr lang="en-US" sz="2100" dirty="0"/>
           </a:p>
@@ -4217,17 +4226,17 @@
         </p:nvSpPr>
         <p:spPr>
           <a:xfrm>
-            <a:off x="7799832" y="1828800"/>
-            <a:ext cx="3145536" cy="685800"/>
-          </a:xfrm>
-          <a:prstGeom prst="rect">
-            <a:avLst/>
-          </a:prstGeom>
-          <a:noFill/>
-          <a:ln/>
-        </p:spPr>
-        <p:txBody>
-          <a:bodyPr wrap="square" lIns="0" tIns="0" rIns="0" bIns="0" rtlCol="0" anchor="t">
+            <a:off x="7799832" y="1801368"/>
+            <a:ext cx="3145536" cy="758952"/>
+          </a:xfrm>
+          <a:prstGeom prst="rect">
+            <a:avLst/>
+          </a:prstGeom>
+          <a:noFill/>
+          <a:ln/>
+        </p:spPr>
+        <p:txBody>
+          <a:bodyPr wrap="square" lIns="254" tIns="254" rIns="254" bIns="254" rtlCol="0" anchor="t">
             <a:normAutofit/>
           </a:bodyPr>
           <a:lstStyle/>
@@ -4236,7 +4245,7 @@
               <a:buNone/>
             </a:pPr>
             <a:r>
-              <a:rPr lang="en-US" sz="1550" dirty="0">
+              <a:rPr lang="en-US" sz="1320" dirty="0">
                 <a:solidFill>
                   <a:srgbClr val="17364A"/>
                 </a:solidFill>
@@ -4246,7 +4255,7 @@
               </a:rPr>
               <a:t>This national-level module is intended for training and planning purposes.</a:t>
             </a:r>
-            <a:endParaRPr lang="en-US" sz="1550" dirty="0"/>
+            <a:endParaRPr lang="en-US" sz="1320" dirty="0"/>
           </a:p>
         </p:txBody>
       </p:sp>
@@ -4334,13 +4343,16 @@
           <a:ln/>
         </p:spPr>
         <p:txBody>
-          <a:bodyPr wrap="square" lIns="254" tIns="254" rIns="254" bIns="254" rtlCol="0" anchor="t">
+          <a:bodyPr wrap="square" lIns="508" tIns="508" rIns="508" bIns="508" rtlCol="0" anchor="t">
             <a:normAutofit/>
           </a:bodyPr>
           <a:lstStyle/>
           <a:p>
-            <a:r>
-              <a:rPr lang="en-US" sz="1380" dirty="0">
+            <a:pPr indent="0" marL="0">
+              <a:buNone/>
+            </a:pPr>
+            <a:r>
+              <a:rPr lang="en-US" sz="1220" dirty="0">
                 <a:solidFill>
                   <a:srgbClr val="17364A"/>
                 </a:solidFill>
@@ -4348,13 +4360,16 @@
                 <a:ea typeface="Aptos" pitchFamily="34" charset="-122"/>
                 <a:cs typeface="Aptos" pitchFamily="34" charset="-120"/>
               </a:rPr>
-              <a:t>It does not replace Tribal law, Tribal policy, Tribal consultation, Tribal IRB review,.</a:t>
-            </a:r>
-            <a:endParaRPr lang="en-US" sz="1380" dirty="0"/>
-          </a:p>
-          <a:p>
-            <a:r>
-              <a:rPr lang="en-US" sz="1380" dirty="0">
+              <a:t>It does not replace Tribal law, Tribal policy, Tribal.</a:t>
+            </a:r>
+            <a:endParaRPr lang="en-US" sz="1220" dirty="0"/>
+          </a:p>
+          <a:p>
+            <a:pPr indent="0" marL="0">
+              <a:buNone/>
+            </a:pPr>
+            <a:r>
+              <a:rPr lang="en-US" sz="1220" dirty="0">
                 <a:solidFill>
                   <a:srgbClr val="17364A"/>
                 </a:solidFill>
@@ -4362,13 +4377,16 @@
                 <a:ea typeface="Aptos" pitchFamily="34" charset="-122"/>
                 <a:cs typeface="Aptos" pitchFamily="34" charset="-120"/>
               </a:rPr>
-              <a:t>Requirements may vary by Tribal Nation, jurisdiction, funding source, data sharing.</a:t>
-            </a:r>
-            <a:endParaRPr lang="en-US" sz="1380" dirty="0"/>
-          </a:p>
-          <a:p>
-            <a:r>
-              <a:rPr lang="en-US" sz="1380" dirty="0">
+              <a:t>Requirements may vary by Tribal Nation, jurisdiction, funding.</a:t>
+            </a:r>
+            <a:endParaRPr lang="en-US" sz="1220" dirty="0"/>
+          </a:p>
+          <a:p>
+            <a:pPr indent="0" marL="0">
+              <a:buNone/>
+            </a:pPr>
+            <a:r>
+              <a:rPr lang="en-US" sz="1220" dirty="0">
                 <a:solidFill>
                   <a:srgbClr val="17364A"/>
                 </a:solidFill>
@@ -4376,9 +4394,9 @@
                 <a:ea typeface="Aptos" pitchFamily="34" charset="-122"/>
                 <a:cs typeface="Aptos" pitchFamily="34" charset="-120"/>
               </a:rPr>
-              <a:t>Learners should confirm applicable requirements before approving, procuring, deploying,.</a:t>
-            </a:r>
-            <a:endParaRPr lang="en-US" sz="1380" dirty="0"/>
+              <a:t>Learners should confirm applicable requirements before approving,.</a:t>
+            </a:r>
+            <a:endParaRPr lang="en-US" sz="1220" dirty="0"/>
           </a:p>
         </p:txBody>
       </p:sp>
@@ -4456,17 +4474,17 @@
         </p:nvSpPr>
         <p:spPr>
           <a:xfrm>
-            <a:off x="7799832" y="5001768"/>
-            <a:ext cx="3145536" cy="502920"/>
-          </a:xfrm>
-          <a:prstGeom prst="rect">
-            <a:avLst/>
-          </a:prstGeom>
-          <a:noFill/>
-          <a:ln/>
-        </p:spPr>
-        <p:txBody>
-          <a:bodyPr wrap="square" lIns="0" tIns="0" rIns="0" bIns="0" rtlCol="0" anchor="t">
+            <a:off x="7799832" y="4974336"/>
+            <a:ext cx="3145536" cy="576072"/>
+          </a:xfrm>
+          <a:prstGeom prst="rect">
+            <a:avLst/>
+          </a:prstGeom>
+          <a:noFill/>
+          <a:ln/>
+        </p:spPr>
+        <p:txBody>
+          <a:bodyPr wrap="square" lIns="254" tIns="254" rIns="254" bIns="254" rtlCol="0" anchor="t">
             <a:normAutofit/>
           </a:bodyPr>
           <a:lstStyle/>
@@ -4475,7 +4493,7 @@
               <a:buNone/>
             </a:pPr>
             <a:r>
-              <a:rPr lang="en-US" sz="1550" dirty="0">
+              <a:rPr lang="en-US" sz="1320" dirty="0">
                 <a:solidFill>
                   <a:srgbClr val="17364A"/>
                 </a:solidFill>
@@ -4483,9 +4501,9 @@
                 <a:ea typeface="Aptos" pitchFamily="34" charset="-122"/>
                 <a:cs typeface="Aptos" pitchFamily="34" charset="-120"/>
               </a:rPr>
-              <a:t>Translate this concept into clear decision rights, review steps, documentation expectations, and escalation paths before an AI-supported workflow is approved.</a:t>
-            </a:r>
-            <a:endParaRPr lang="en-US" sz="1550" dirty="0"/>
+              <a:t>Translate this concept into clear decision rights, review steps, documentation expectations, and escalation paths before.</a:t>
+            </a:r>
+            <a:endParaRPr lang="en-US" sz="1320" dirty="0"/>
           </a:p>
         </p:txBody>
       </p:sp>
@@ -4786,49 +4804,58 @@
           <a:ln/>
         </p:spPr>
         <p:txBody>
-          <a:bodyPr wrap="square" lIns="635" tIns="635" rIns="635" bIns="635" rtlCol="0" anchor="t">
+          <a:bodyPr wrap="square" lIns="1016" tIns="1016" rIns="1016" bIns="1016" rtlCol="0" anchor="t">
             <a:normAutofit/>
           </a:bodyPr>
           <a:lstStyle/>
           <a:p>
+            <a:pPr indent="0" marL="0">
+              <a:buNone/>
+            </a:pPr>
             <a:r>
               <a:rPr lang="en-US" sz="2100" dirty="0">
                 <a:solidFill>
-                  <a:srgbClr val="17364A"/>
-                </a:solidFill>
-                <a:latin typeface="Aptos" pitchFamily="34" charset="0"/>
-                <a:ea typeface="Aptos" pitchFamily="34" charset="-122"/>
-                <a:cs typeface="Aptos" pitchFamily="34" charset="-120"/>
-              </a:rPr>
-              <a:t>AI projects can magnify the consequences of weak data governance because AI systems depend on data.</a:t>
+                  <a:srgbClr val="003A63"/>
+                </a:solidFill>
+                <a:latin typeface="Aptos" pitchFamily="34" charset="0"/>
+                <a:ea typeface="Aptos" pitchFamily="34" charset="-122"/>
+                <a:cs typeface="Aptos" pitchFamily="34" charset="-120"/>
+              </a:rPr>
+              <a:t>• AI projects can magnify the consequences of weak data governance because AI systems depend on.</a:t>
             </a:r>
             <a:endParaRPr lang="en-US" sz="2100" dirty="0"/>
           </a:p>
           <a:p>
+            <a:pPr indent="0" marL="0">
+              <a:buNone/>
+            </a:pPr>
             <a:r>
               <a:rPr lang="en-US" sz="2100" dirty="0">
                 <a:solidFill>
-                  <a:srgbClr val="17364A"/>
-                </a:solidFill>
-                <a:latin typeface="Aptos" pitchFamily="34" charset="0"/>
-                <a:ea typeface="Aptos" pitchFamily="34" charset="-122"/>
-                <a:cs typeface="Aptos" pitchFamily="34" charset="-120"/>
-              </a:rPr>
-              <a:t>When health data involve Tribal Nations or AI/AN participants, those consequences can include.</a:t>
+                  <a:srgbClr val="003A63"/>
+                </a:solidFill>
+                <a:latin typeface="Aptos" pitchFamily="34" charset="0"/>
+                <a:ea typeface="Aptos" pitchFamily="34" charset="-122"/>
+                <a:cs typeface="Aptos" pitchFamily="34" charset="-120"/>
+              </a:rPr>
+              <a:t>• When health data involve Tribal Nations or AI/AN participants, those consequences can include.</a:t>
             </a:r>
             <a:endParaRPr lang="en-US" sz="2100" dirty="0"/>
           </a:p>
           <a:p>
+            <a:pPr indent="0" marL="0">
+              <a:buNone/>
+            </a:pPr>
             <a:r>
               <a:rPr lang="en-US" sz="2100" dirty="0">
                 <a:solidFill>
-                  <a:srgbClr val="17364A"/>
-                </a:solidFill>
-                <a:latin typeface="Aptos" pitchFamily="34" charset="0"/>
-                <a:ea typeface="Aptos" pitchFamily="34" charset="-122"/>
-                <a:cs typeface="Aptos" pitchFamily="34" charset="-120"/>
-              </a:rPr>
-              <a:t>Public health agencies may intend to improve services, reduce disparities, or strengthen emergency.</a:t>
+                  <a:srgbClr val="003A63"/>
+                </a:solidFill>
+                <a:latin typeface="Aptos" pitchFamily="34" charset="0"/>
+                <a:ea typeface="Aptos" pitchFamily="34" charset="-122"/>
+                <a:cs typeface="Aptos" pitchFamily="34" charset="-120"/>
+              </a:rPr>
+              <a:t>• Public health agencies may intend to improve services, reduce disparities, or strengthen.</a:t>
             </a:r>
             <a:endParaRPr lang="en-US" sz="2100" dirty="0"/>
           </a:p>
@@ -4908,17 +4935,17 @@
         </p:nvSpPr>
         <p:spPr>
           <a:xfrm>
-            <a:off x="7799832" y="1828800"/>
-            <a:ext cx="3145536" cy="685800"/>
-          </a:xfrm>
-          <a:prstGeom prst="rect">
-            <a:avLst/>
-          </a:prstGeom>
-          <a:noFill/>
-          <a:ln/>
-        </p:spPr>
-        <p:txBody>
-          <a:bodyPr wrap="square" lIns="0" tIns="0" rIns="0" bIns="0" rtlCol="0" anchor="t">
+            <a:off x="7799832" y="1801368"/>
+            <a:ext cx="3145536" cy="758952"/>
+          </a:xfrm>
+          <a:prstGeom prst="rect">
+            <a:avLst/>
+          </a:prstGeom>
+          <a:noFill/>
+          <a:ln/>
+        </p:spPr>
+        <p:txBody>
+          <a:bodyPr wrap="square" lIns="254" tIns="254" rIns="254" bIns="254" rtlCol="0" anchor="t">
             <a:normAutofit/>
           </a:bodyPr>
           <a:lstStyle/>
@@ -4927,7 +4954,7 @@
               <a:buNone/>
             </a:pPr>
             <a:r>
-              <a:rPr lang="en-US" sz="1550" dirty="0">
+              <a:rPr lang="en-US" sz="1320" dirty="0">
                 <a:solidFill>
                   <a:srgbClr val="17364A"/>
                 </a:solidFill>
@@ -4937,7 +4964,7 @@
               </a:rPr>
               <a:t>AI projects can magnify the consequences of weak data governance because AI systems depend on data.</a:t>
             </a:r>
-            <a:endParaRPr lang="en-US" sz="1550" dirty="0"/>
+            <a:endParaRPr lang="en-US" sz="1320" dirty="0"/>
           </a:p>
         </p:txBody>
       </p:sp>
@@ -5025,13 +5052,16 @@
           <a:ln/>
         </p:spPr>
         <p:txBody>
-          <a:bodyPr wrap="square" lIns="254" tIns="254" rIns="254" bIns="254" rtlCol="0" anchor="t">
+          <a:bodyPr wrap="square" lIns="508" tIns="508" rIns="508" bIns="508" rtlCol="0" anchor="t">
             <a:normAutofit/>
           </a:bodyPr>
           <a:lstStyle/>
           <a:p>
-            <a:r>
-              <a:rPr lang="en-US" sz="1380" dirty="0">
+            <a:pPr indent="0" marL="0">
+              <a:buNone/>
+            </a:pPr>
+            <a:r>
+              <a:rPr lang="en-US" sz="1220" dirty="0">
                 <a:solidFill>
                   <a:srgbClr val="17364A"/>
                 </a:solidFill>
@@ -5039,13 +5069,16 @@
                 <a:ea typeface="Aptos" pitchFamily="34" charset="-122"/>
                 <a:cs typeface="Aptos" pitchFamily="34" charset="-120"/>
               </a:rPr>
-              <a:t>AI projects can magnify the consequences of weak data governance because AI systems depend.</a:t>
-            </a:r>
-            <a:endParaRPr lang="en-US" sz="1380" dirty="0"/>
-          </a:p>
-          <a:p>
-            <a:r>
-              <a:rPr lang="en-US" sz="1380" dirty="0">
+              <a:t>AI projects can magnify the consequences of weak data governance.</a:t>
+            </a:r>
+            <a:endParaRPr lang="en-US" sz="1220" dirty="0"/>
+          </a:p>
+          <a:p>
+            <a:pPr indent="0" marL="0">
+              <a:buNone/>
+            </a:pPr>
+            <a:r>
+              <a:rPr lang="en-US" sz="1220" dirty="0">
                 <a:solidFill>
                   <a:srgbClr val="17364A"/>
                 </a:solidFill>
@@ -5053,13 +5086,16 @@
                 <a:ea typeface="Aptos" pitchFamily="34" charset="-122"/>
                 <a:cs typeface="Aptos" pitchFamily="34" charset="-120"/>
               </a:rPr>
-              <a:t>When health data involve Tribal Nations or AI/AN participants, those consequences can.</a:t>
-            </a:r>
-            <a:endParaRPr lang="en-US" sz="1380" dirty="0"/>
-          </a:p>
-          <a:p>
-            <a:r>
-              <a:rPr lang="en-US" sz="1380" dirty="0">
+              <a:t>When health data involve Tribal Nations or AI/AN participants,.</a:t>
+            </a:r>
+            <a:endParaRPr lang="en-US" sz="1220" dirty="0"/>
+          </a:p>
+          <a:p>
+            <a:pPr indent="0" marL="0">
+              <a:buNone/>
+            </a:pPr>
+            <a:r>
+              <a:rPr lang="en-US" sz="1220" dirty="0">
                 <a:solidFill>
                   <a:srgbClr val="17364A"/>
                 </a:solidFill>
@@ -5067,9 +5103,9 @@
                 <a:ea typeface="Aptos" pitchFamily="34" charset="-122"/>
                 <a:cs typeface="Aptos" pitchFamily="34" charset="-120"/>
               </a:rPr>
-              <a:t>Public health agencies may intend to improve services, reduce disparities, or strengthen.</a:t>
-            </a:r>
-            <a:endParaRPr lang="en-US" sz="1380" dirty="0"/>
+              <a:t>Public health agencies may intend to improve services, reduce.</a:t>
+            </a:r>
+            <a:endParaRPr lang="en-US" sz="1220" dirty="0"/>
           </a:p>
         </p:txBody>
       </p:sp>
@@ -5147,17 +5183,17 @@
         </p:nvSpPr>
         <p:spPr>
           <a:xfrm>
-            <a:off x="7799832" y="5001768"/>
-            <a:ext cx="3145536" cy="502920"/>
-          </a:xfrm>
-          <a:prstGeom prst="rect">
-            <a:avLst/>
-          </a:prstGeom>
-          <a:noFill/>
-          <a:ln/>
-        </p:spPr>
-        <p:txBody>
-          <a:bodyPr wrap="square" lIns="0" tIns="0" rIns="0" bIns="0" rtlCol="0" anchor="t">
+            <a:off x="7799832" y="4974336"/>
+            <a:ext cx="3145536" cy="576072"/>
+          </a:xfrm>
+          <a:prstGeom prst="rect">
+            <a:avLst/>
+          </a:prstGeom>
+          <a:noFill/>
+          <a:ln/>
+        </p:spPr>
+        <p:txBody>
+          <a:bodyPr wrap="square" lIns="254" tIns="254" rIns="254" bIns="254" rtlCol="0" anchor="t">
             <a:normAutofit/>
           </a:bodyPr>
           <a:lstStyle/>
@@ -5166,7 +5202,7 @@
               <a:buNone/>
             </a:pPr>
             <a:r>
-              <a:rPr lang="en-US" sz="1550" dirty="0">
+              <a:rPr lang="en-US" sz="1320" dirty="0">
                 <a:solidFill>
                   <a:srgbClr val="17364A"/>
                 </a:solidFill>
@@ -5174,9 +5210,9 @@
                 <a:ea typeface="Aptos" pitchFamily="34" charset="-122"/>
                 <a:cs typeface="Aptos" pitchFamily="34" charset="-120"/>
               </a:rPr>
-              <a:t>Translate this concept into clear decision rights, review steps, documentation expectations, and escalation paths before an AI-supported workflow is approved.</a:t>
-            </a:r>
-            <a:endParaRPr lang="en-US" sz="1550" dirty="0"/>
+              <a:t>Translate this concept into clear decision rights, review steps, documentation expectations, and escalation paths before.</a:t>
+            </a:r>
+            <a:endParaRPr lang="en-US" sz="1320" dirty="0"/>
           </a:p>
         </p:txBody>
       </p:sp>
@@ -5477,49 +5513,58 @@
           <a:ln/>
         </p:spPr>
         <p:txBody>
-          <a:bodyPr wrap="square" lIns="635" tIns="635" rIns="635" bIns="635" rtlCol="0" anchor="t">
+          <a:bodyPr wrap="square" lIns="1016" tIns="1016" rIns="1016" bIns="1016" rtlCol="0" anchor="t">
             <a:normAutofit/>
           </a:bodyPr>
           <a:lstStyle/>
           <a:p>
+            <a:pPr indent="0" marL="0">
+              <a:buNone/>
+            </a:pPr>
             <a:r>
               <a:rPr lang="en-US" sz="2100" dirty="0">
                 <a:solidFill>
-                  <a:srgbClr val="17364A"/>
-                </a:solidFill>
-                <a:latin typeface="Aptos" pitchFamily="34" charset="0"/>
-                <a:ea typeface="Aptos" pitchFamily="34" charset="-122"/>
-                <a:cs typeface="Aptos" pitchFamily="34" charset="-120"/>
-              </a:rPr>
-              <a:t>Tribal sovereignty means the inherent authority of Tribal Nations to govern themselves and protect the.</a:t>
+                  <a:srgbClr val="003A63"/>
+                </a:solidFill>
+                <a:latin typeface="Aptos" pitchFamily="34" charset="0"/>
+                <a:ea typeface="Aptos" pitchFamily="34" charset="-122"/>
+                <a:cs typeface="Aptos" pitchFamily="34" charset="-120"/>
+              </a:rPr>
+              <a:t>• Tribal sovereignty means the inherent authority of Tribal Nations to govern themselves and.</a:t>
             </a:r>
             <a:endParaRPr lang="en-US" sz="2100" dirty="0"/>
           </a:p>
           <a:p>
+            <a:pPr indent="0" marL="0">
+              <a:buNone/>
+            </a:pPr>
             <a:r>
               <a:rPr lang="en-US" sz="2100" dirty="0">
                 <a:solidFill>
-                  <a:srgbClr val="17364A"/>
-                </a:solidFill>
-                <a:latin typeface="Aptos" pitchFamily="34" charset="0"/>
-                <a:ea typeface="Aptos" pitchFamily="34" charset="-122"/>
-                <a:cs typeface="Aptos" pitchFamily="34" charset="-120"/>
-              </a:rPr>
-              <a:t>In public health AI work, this means a Tribal Nation may have its own laws, research codes, review.</a:t>
+                  <a:srgbClr val="003A63"/>
+                </a:solidFill>
+                <a:latin typeface="Aptos" pitchFamily="34" charset="0"/>
+                <a:ea typeface="Aptos" pitchFamily="34" charset="-122"/>
+                <a:cs typeface="Aptos" pitchFamily="34" charset="-120"/>
+              </a:rPr>
+              <a:t>• In public health AI work, this means a Tribal Nation may have its own laws, research codes,.</a:t>
             </a:r>
             <a:endParaRPr lang="en-US" sz="2100" dirty="0"/>
           </a:p>
           <a:p>
+            <a:pPr indent="0" marL="0">
+              <a:buNone/>
+            </a:pPr>
             <a:r>
               <a:rPr lang="en-US" sz="2100" dirty="0">
                 <a:solidFill>
-                  <a:srgbClr val="17364A"/>
-                </a:solidFill>
-                <a:latin typeface="Aptos" pitchFamily="34" charset="0"/>
-                <a:ea typeface="Aptos" pitchFamily="34" charset="-122"/>
-                <a:cs typeface="Aptos" pitchFamily="34" charset="-120"/>
-              </a:rPr>
-              <a:t>Public health staff should not treat Tribal input as optional stakeholder feedback when Tribal.</a:t>
+                  <a:srgbClr val="003A63"/>
+                </a:solidFill>
+                <a:latin typeface="Aptos" pitchFamily="34" charset="0"/>
+                <a:ea typeface="Aptos" pitchFamily="34" charset="-122"/>
+                <a:cs typeface="Aptos" pitchFamily="34" charset="-120"/>
+              </a:rPr>
+              <a:t>• Public health staff should not treat Tribal input as optional stakeholder feedback when Tribal.</a:t>
             </a:r>
             <a:endParaRPr lang="en-US" sz="2100" dirty="0"/>
           </a:p>
@@ -5599,17 +5644,17 @@
         </p:nvSpPr>
         <p:spPr>
           <a:xfrm>
-            <a:off x="7799832" y="1828800"/>
-            <a:ext cx="3145536" cy="685800"/>
-          </a:xfrm>
-          <a:prstGeom prst="rect">
-            <a:avLst/>
-          </a:prstGeom>
-          <a:noFill/>
-          <a:ln/>
-        </p:spPr>
-        <p:txBody>
-          <a:bodyPr wrap="square" lIns="0" tIns="0" rIns="0" bIns="0" rtlCol="0" anchor="t">
+            <a:off x="7799832" y="1801368"/>
+            <a:ext cx="3145536" cy="758952"/>
+          </a:xfrm>
+          <a:prstGeom prst="rect">
+            <a:avLst/>
+          </a:prstGeom>
+          <a:noFill/>
+          <a:ln/>
+        </p:spPr>
+        <p:txBody>
+          <a:bodyPr wrap="square" lIns="254" tIns="254" rIns="254" bIns="254" rtlCol="0" anchor="t">
             <a:normAutofit/>
           </a:bodyPr>
           <a:lstStyle/>
@@ -5618,7 +5663,7 @@
               <a:buNone/>
             </a:pPr>
             <a:r>
-              <a:rPr lang="en-US" sz="1550" dirty="0">
+              <a:rPr lang="en-US" sz="1320" dirty="0">
                 <a:solidFill>
                   <a:srgbClr val="17364A"/>
                 </a:solidFill>
@@ -5628,7 +5673,7 @@
               </a:rPr>
               <a:t>Tribal sovereignty means the inherent authority of Tribal Nations to govern themselves and protect the.</a:t>
             </a:r>
-            <a:endParaRPr lang="en-US" sz="1550" dirty="0"/>
+            <a:endParaRPr lang="en-US" sz="1320" dirty="0"/>
           </a:p>
         </p:txBody>
       </p:sp>
@@ -5716,13 +5761,16 @@
           <a:ln/>
         </p:spPr>
         <p:txBody>
-          <a:bodyPr wrap="square" lIns="254" tIns="254" rIns="254" bIns="254" rtlCol="0" anchor="t">
+          <a:bodyPr wrap="square" lIns="508" tIns="508" rIns="508" bIns="508" rtlCol="0" anchor="t">
             <a:normAutofit/>
           </a:bodyPr>
           <a:lstStyle/>
           <a:p>
-            <a:r>
-              <a:rPr lang="en-US" sz="1380" dirty="0">
+            <a:pPr indent="0" marL="0">
+              <a:buNone/>
+            </a:pPr>
+            <a:r>
+              <a:rPr lang="en-US" sz="1220" dirty="0">
                 <a:solidFill>
                   <a:srgbClr val="17364A"/>
                 </a:solidFill>
@@ -5730,13 +5778,16 @@
                 <a:ea typeface="Aptos" pitchFamily="34" charset="-122"/>
                 <a:cs typeface="Aptos" pitchFamily="34" charset="-120"/>
               </a:rPr>
-              <a:t>Tribal sovereignty means the inherent authority of Tribal Nations to govern themselves and.</a:t>
-            </a:r>
-            <a:endParaRPr lang="en-US" sz="1380" dirty="0"/>
-          </a:p>
-          <a:p>
-            <a:r>
-              <a:rPr lang="en-US" sz="1380" dirty="0">
+              <a:t>Tribal sovereignty means the inherent authority of Tribal Nations.</a:t>
+            </a:r>
+            <a:endParaRPr lang="en-US" sz="1220" dirty="0"/>
+          </a:p>
+          <a:p>
+            <a:pPr indent="0" marL="0">
+              <a:buNone/>
+            </a:pPr>
+            <a:r>
+              <a:rPr lang="en-US" sz="1220" dirty="0">
                 <a:solidFill>
                   <a:srgbClr val="17364A"/>
                 </a:solidFill>
@@ -5744,13 +5795,16 @@
                 <a:ea typeface="Aptos" pitchFamily="34" charset="-122"/>
                 <a:cs typeface="Aptos" pitchFamily="34" charset="-120"/>
               </a:rPr>
-              <a:t>In public health AI work, this means a Tribal Nation may have its own laws, research.</a:t>
-            </a:r>
-            <a:endParaRPr lang="en-US" sz="1380" dirty="0"/>
-          </a:p>
-          <a:p>
-            <a:r>
-              <a:rPr lang="en-US" sz="1380" dirty="0">
+              <a:t>In public health AI work, this means a Tribal Nation may have its.</a:t>
+            </a:r>
+            <a:endParaRPr lang="en-US" sz="1220" dirty="0"/>
+          </a:p>
+          <a:p>
+            <a:pPr indent="0" marL="0">
+              <a:buNone/>
+            </a:pPr>
+            <a:r>
+              <a:rPr lang="en-US" sz="1220" dirty="0">
                 <a:solidFill>
                   <a:srgbClr val="17364A"/>
                 </a:solidFill>
@@ -5758,9 +5812,9 @@
                 <a:ea typeface="Aptos" pitchFamily="34" charset="-122"/>
                 <a:cs typeface="Aptos" pitchFamily="34" charset="-120"/>
               </a:rPr>
-              <a:t>Public health staff should not treat Tribal input as optional stakeholder feedback when.</a:t>
-            </a:r>
-            <a:endParaRPr lang="en-US" sz="1380" dirty="0"/>
+              <a:t>Public health staff should not treat Tribal input as optional.</a:t>
+            </a:r>
+            <a:endParaRPr lang="en-US" sz="1220" dirty="0"/>
           </a:p>
         </p:txBody>
       </p:sp>
@@ -5838,17 +5892,17 @@
         </p:nvSpPr>
         <p:spPr>
           <a:xfrm>
-            <a:off x="7799832" y="5001768"/>
-            <a:ext cx="3145536" cy="502920"/>
-          </a:xfrm>
-          <a:prstGeom prst="rect">
-            <a:avLst/>
-          </a:prstGeom>
-          <a:noFill/>
-          <a:ln/>
-        </p:spPr>
-        <p:txBody>
-          <a:bodyPr wrap="square" lIns="0" tIns="0" rIns="0" bIns="0" rtlCol="0" anchor="t">
+            <a:off x="7799832" y="4974336"/>
+            <a:ext cx="3145536" cy="576072"/>
+          </a:xfrm>
+          <a:prstGeom prst="rect">
+            <a:avLst/>
+          </a:prstGeom>
+          <a:noFill/>
+          <a:ln/>
+        </p:spPr>
+        <p:txBody>
+          <a:bodyPr wrap="square" lIns="254" tIns="254" rIns="254" bIns="254" rtlCol="0" anchor="t">
             <a:normAutofit/>
           </a:bodyPr>
           <a:lstStyle/>
@@ -5857,7 +5911,7 @@
               <a:buNone/>
             </a:pPr>
             <a:r>
-              <a:rPr lang="en-US" sz="1550" dirty="0">
+              <a:rPr lang="en-US" sz="1320" dirty="0">
                 <a:solidFill>
                   <a:srgbClr val="17364A"/>
                 </a:solidFill>
@@ -5865,9 +5919,9 @@
                 <a:ea typeface="Aptos" pitchFamily="34" charset="-122"/>
                 <a:cs typeface="Aptos" pitchFamily="34" charset="-120"/>
               </a:rPr>
-              <a:t>Translate this concept into clear decision rights, review steps, documentation expectations, and escalation paths before an AI-supported workflow is approved.</a:t>
-            </a:r>
-            <a:endParaRPr lang="en-US" sz="1550" dirty="0"/>
+              <a:t>Translate this concept into clear decision rights, review steps, documentation expectations, and escalation paths before.</a:t>
+            </a:r>
+            <a:endParaRPr lang="en-US" sz="1320" dirty="0"/>
           </a:p>
         </p:txBody>
       </p:sp>
@@ -6168,49 +6222,58 @@
           <a:ln/>
         </p:spPr>
         <p:txBody>
-          <a:bodyPr wrap="square" lIns="635" tIns="635" rIns="635" bIns="635" rtlCol="0" anchor="t">
+          <a:bodyPr wrap="square" lIns="1016" tIns="1016" rIns="1016" bIns="1016" rtlCol="0" anchor="t">
             <a:normAutofit/>
           </a:bodyPr>
           <a:lstStyle/>
           <a:p>
+            <a:pPr indent="0" marL="0">
+              <a:buNone/>
+            </a:pPr>
             <a:r>
               <a:rPr lang="en-US" sz="2100" dirty="0">
                 <a:solidFill>
-                  <a:srgbClr val="17364A"/>
-                </a:solidFill>
-                <a:latin typeface="Aptos" pitchFamily="34" charset="0"/>
-                <a:ea typeface="Aptos" pitchFamily="34" charset="-122"/>
-                <a:cs typeface="Aptos" pitchFamily="34" charset="-120"/>
-              </a:rPr>
-              <a:t>The CARE Principles for Indigenous Data Governance provide a practical framework for aligning data work.</a:t>
+                  <a:srgbClr val="003A63"/>
+                </a:solidFill>
+                <a:latin typeface="Aptos" pitchFamily="34" charset="0"/>
+                <a:ea typeface="Aptos" pitchFamily="34" charset="-122"/>
+                <a:cs typeface="Aptos" pitchFamily="34" charset="-120"/>
+              </a:rPr>
+              <a:t>• The CARE Principles for Indigenous Data Governance provide a practical framework for aligning.</a:t>
             </a:r>
             <a:endParaRPr lang="en-US" sz="2100" dirty="0"/>
           </a:p>
           <a:p>
+            <a:pPr indent="0" marL="0">
+              <a:buNone/>
+            </a:pPr>
             <a:r>
               <a:rPr lang="en-US" sz="2100" dirty="0">
                 <a:solidFill>
-                  <a:srgbClr val="17364A"/>
-                </a:solidFill>
-                <a:latin typeface="Aptos" pitchFamily="34" charset="0"/>
-                <a:ea typeface="Aptos" pitchFamily="34" charset="-122"/>
-                <a:cs typeface="Aptos" pitchFamily="34" charset="-120"/>
-              </a:rPr>
-              <a:t>CARE stands for Collective Benefit, Authority to Control, Responsibility, and Ethics.</a:t>
+                  <a:srgbClr val="003A63"/>
+                </a:solidFill>
+                <a:latin typeface="Aptos" pitchFamily="34" charset="0"/>
+                <a:ea typeface="Aptos" pitchFamily="34" charset="-122"/>
+                <a:cs typeface="Aptos" pitchFamily="34" charset="-120"/>
+              </a:rPr>
+              <a:t>• CARE stands for Collective Benefit, Authority to Control, Responsibility, and Ethics.</a:t>
             </a:r>
             <a:endParaRPr lang="en-US" sz="2100" dirty="0"/>
           </a:p>
           <a:p>
+            <a:pPr indent="0" marL="0">
+              <a:buNone/>
+            </a:pPr>
             <a:r>
               <a:rPr lang="en-US" sz="2100" dirty="0">
                 <a:solidFill>
-                  <a:srgbClr val="17364A"/>
-                </a:solidFill>
-                <a:latin typeface="Aptos" pitchFamily="34" charset="0"/>
-                <a:ea typeface="Aptos" pitchFamily="34" charset="-122"/>
-                <a:cs typeface="Aptos" pitchFamily="34" charset="-120"/>
-              </a:rPr>
-              <a:t>These principles complement FAIR data practices by adding attention to people, purpose, power,.</a:t>
+                  <a:srgbClr val="003A63"/>
+                </a:solidFill>
+                <a:latin typeface="Aptos" pitchFamily="34" charset="0"/>
+                <a:ea typeface="Aptos" pitchFamily="34" charset="-122"/>
+                <a:cs typeface="Aptos" pitchFamily="34" charset="-120"/>
+              </a:rPr>
+              <a:t>• These principles complement FAIR data practices by adding attention to people, purpose, power,.</a:t>
             </a:r>
             <a:endParaRPr lang="en-US" sz="2100" dirty="0"/>
           </a:p>
@@ -6290,17 +6353,17 @@
         </p:nvSpPr>
         <p:spPr>
           <a:xfrm>
-            <a:off x="7799832" y="1828800"/>
-            <a:ext cx="3145536" cy="685800"/>
-          </a:xfrm>
-          <a:prstGeom prst="rect">
-            <a:avLst/>
-          </a:prstGeom>
-          <a:noFill/>
-          <a:ln/>
-        </p:spPr>
-        <p:txBody>
-          <a:bodyPr wrap="square" lIns="0" tIns="0" rIns="0" bIns="0" rtlCol="0" anchor="t">
+            <a:off x="7799832" y="1801368"/>
+            <a:ext cx="3145536" cy="758952"/>
+          </a:xfrm>
+          <a:prstGeom prst="rect">
+            <a:avLst/>
+          </a:prstGeom>
+          <a:noFill/>
+          <a:ln/>
+        </p:spPr>
+        <p:txBody>
+          <a:bodyPr wrap="square" lIns="254" tIns="254" rIns="254" bIns="254" rtlCol="0" anchor="t">
             <a:normAutofit/>
           </a:bodyPr>
           <a:lstStyle/>
@@ -6309,7 +6372,7 @@
               <a:buNone/>
             </a:pPr>
             <a:r>
-              <a:rPr lang="en-US" sz="1550" dirty="0">
+              <a:rPr lang="en-US" sz="1320" dirty="0">
                 <a:solidFill>
                   <a:srgbClr val="17364A"/>
                 </a:solidFill>
@@ -6319,7 +6382,7 @@
               </a:rPr>
               <a:t>The CARE Principles for Indigenous Data Governance provide a practical framework for aligning data work.</a:t>
             </a:r>
-            <a:endParaRPr lang="en-US" sz="1550" dirty="0"/>
+            <a:endParaRPr lang="en-US" sz="1320" dirty="0"/>
           </a:p>
         </p:txBody>
       </p:sp>
@@ -6407,13 +6470,16 @@
           <a:ln/>
         </p:spPr>
         <p:txBody>
-          <a:bodyPr wrap="square" lIns="254" tIns="254" rIns="254" bIns="254" rtlCol="0" anchor="t">
+          <a:bodyPr wrap="square" lIns="508" tIns="508" rIns="508" bIns="508" rtlCol="0" anchor="t">
             <a:normAutofit/>
           </a:bodyPr>
           <a:lstStyle/>
           <a:p>
-            <a:r>
-              <a:rPr lang="en-US" sz="1380" dirty="0">
+            <a:pPr indent="0" marL="0">
+              <a:buNone/>
+            </a:pPr>
+            <a:r>
+              <a:rPr lang="en-US" sz="1220" dirty="0">
                 <a:solidFill>
                   <a:srgbClr val="17364A"/>
                 </a:solidFill>
@@ -6421,13 +6487,16 @@
                 <a:ea typeface="Aptos" pitchFamily="34" charset="-122"/>
                 <a:cs typeface="Aptos" pitchFamily="34" charset="-120"/>
               </a:rPr>
-              <a:t>The CARE Principles for Indigenous Data Governance provide a practical framework for.</a:t>
-            </a:r>
-            <a:endParaRPr lang="en-US" sz="1380" dirty="0"/>
-          </a:p>
-          <a:p>
-            <a:r>
-              <a:rPr lang="en-US" sz="1380" dirty="0">
+              <a:t>The CARE Principles for Indigenous Data Governance provide a.</a:t>
+            </a:r>
+            <a:endParaRPr lang="en-US" sz="1220" dirty="0"/>
+          </a:p>
+          <a:p>
+            <a:pPr indent="0" marL="0">
+              <a:buNone/>
+            </a:pPr>
+            <a:r>
+              <a:rPr lang="en-US" sz="1220" dirty="0">
                 <a:solidFill>
                   <a:srgbClr val="17364A"/>
                 </a:solidFill>
@@ -6435,13 +6504,16 @@
                 <a:ea typeface="Aptos" pitchFamily="34" charset="-122"/>
                 <a:cs typeface="Aptos" pitchFamily="34" charset="-120"/>
               </a:rPr>
-              <a:t>These principles complement FAIR data practices by adding attention to people, purpose,.</a:t>
-            </a:r>
-            <a:endParaRPr lang="en-US" sz="1380" dirty="0"/>
-          </a:p>
-          <a:p>
-            <a:r>
-              <a:rPr lang="en-US" sz="1380" dirty="0">
+              <a:t>These principles complement FAIR data practices by adding.</a:t>
+            </a:r>
+            <a:endParaRPr lang="en-US" sz="1220" dirty="0"/>
+          </a:p>
+          <a:p>
+            <a:pPr indent="0" marL="0">
+              <a:buNone/>
+            </a:pPr>
+            <a:r>
+              <a:rPr lang="en-US" sz="1220" dirty="0">
                 <a:solidFill>
                   <a:srgbClr val="17364A"/>
                 </a:solidFill>
@@ -6449,9 +6521,9 @@
                 <a:ea typeface="Aptos" pitchFamily="34" charset="-122"/>
                 <a:cs typeface="Aptos" pitchFamily="34" charset="-120"/>
               </a:rPr>
-              <a:t>For AI projects, CARE can be used as a review lens for deciding whether a proposed data.</a:t>
-            </a:r>
-            <a:endParaRPr lang="en-US" sz="1380" dirty="0"/>
+              <a:t>For AI projects, CARE can be used as a review lens for deciding.</a:t>
+            </a:r>
+            <a:endParaRPr lang="en-US" sz="1220" dirty="0"/>
           </a:p>
         </p:txBody>
       </p:sp>
@@ -6529,17 +6601,17 @@
         </p:nvSpPr>
         <p:spPr>
           <a:xfrm>
-            <a:off x="7799832" y="5001768"/>
-            <a:ext cx="3145536" cy="502920"/>
-          </a:xfrm>
-          <a:prstGeom prst="rect">
-            <a:avLst/>
-          </a:prstGeom>
-          <a:noFill/>
-          <a:ln/>
-        </p:spPr>
-        <p:txBody>
-          <a:bodyPr wrap="square" lIns="0" tIns="0" rIns="0" bIns="0" rtlCol="0" anchor="t">
+            <a:off x="7799832" y="4974336"/>
+            <a:ext cx="3145536" cy="576072"/>
+          </a:xfrm>
+          <a:prstGeom prst="rect">
+            <a:avLst/>
+          </a:prstGeom>
+          <a:noFill/>
+          <a:ln/>
+        </p:spPr>
+        <p:txBody>
+          <a:bodyPr wrap="square" lIns="254" tIns="254" rIns="254" bIns="254" rtlCol="0" anchor="t">
             <a:normAutofit/>
           </a:bodyPr>
           <a:lstStyle/>
@@ -6548,7 +6620,7 @@
               <a:buNone/>
             </a:pPr>
             <a:r>
-              <a:rPr lang="en-US" sz="1550" dirty="0">
+              <a:rPr lang="en-US" sz="1320" dirty="0">
                 <a:solidFill>
                   <a:srgbClr val="17364A"/>
                 </a:solidFill>
@@ -6556,9 +6628,9 @@
                 <a:ea typeface="Aptos" pitchFamily="34" charset="-122"/>
                 <a:cs typeface="Aptos" pitchFamily="34" charset="-120"/>
               </a:rPr>
-              <a:t>Translate this concept into clear decision rights, review steps, documentation expectations, and escalation paths before an AI-supported workflow is approved.</a:t>
-            </a:r>
-            <a:endParaRPr lang="en-US" sz="1550" dirty="0"/>
+              <a:t>Translate this concept into clear decision rights, review steps, documentation expectations, and escalation paths before.</a:t>
+            </a:r>
+            <a:endParaRPr lang="en-US" sz="1320" dirty="0"/>
           </a:p>
         </p:txBody>
       </p:sp>
@@ -6859,49 +6931,58 @@
           <a:ln/>
         </p:spPr>
         <p:txBody>
-          <a:bodyPr wrap="square" lIns="635" tIns="635" rIns="635" bIns="635" rtlCol="0" anchor="t">
+          <a:bodyPr wrap="square" lIns="1016" tIns="1016" rIns="1016" bIns="1016" rtlCol="0" anchor="t">
             <a:normAutofit/>
           </a:bodyPr>
           <a:lstStyle/>
           <a:p>
+            <a:pPr indent="0" marL="0">
+              <a:buNone/>
+            </a:pPr>
             <a:r>
               <a:rPr lang="en-US" sz="2100" dirty="0">
                 <a:solidFill>
-                  <a:srgbClr val="17364A"/>
-                </a:solidFill>
-                <a:latin typeface="Aptos" pitchFamily="34" charset="0"/>
-                <a:ea typeface="Aptos" pitchFamily="34" charset="-122"/>
-                <a:cs typeface="Aptos" pitchFamily="34" charset="-120"/>
-              </a:rPr>
-              <a:t>A state health department wants to develop an AI-assisted analytics workflow to summarize emergency.</a:t>
+                  <a:srgbClr val="003A63"/>
+                </a:solidFill>
+                <a:latin typeface="Aptos" pitchFamily="34" charset="0"/>
+                <a:ea typeface="Aptos" pitchFamily="34" charset="-122"/>
+                <a:cs typeface="Aptos" pitchFamily="34" charset="-120"/>
+              </a:rPr>
+              <a:t>• A state health department wants to develop an AI-assisted analytics workflow to summarize.</a:t>
             </a:r>
             <a:endParaRPr lang="en-US" sz="2100" dirty="0"/>
           </a:p>
           <a:p>
+            <a:pPr indent="0" marL="0">
+              <a:buNone/>
+            </a:pPr>
             <a:r>
               <a:rPr lang="en-US" sz="2100" dirty="0">
                 <a:solidFill>
-                  <a:srgbClr val="17364A"/>
-                </a:solidFill>
-                <a:latin typeface="Aptos" pitchFamily="34" charset="0"/>
-                <a:ea typeface="Aptos" pitchFamily="34" charset="-122"/>
-                <a:cs typeface="Aptos" pitchFamily="34" charset="-120"/>
-              </a:rPr>
-              <a:t>The initial technical design includes free-text chief complaint data, facility location, ZIP code, race.</a:t>
+                  <a:srgbClr val="003A63"/>
+                </a:solidFill>
+                <a:latin typeface="Aptos" pitchFamily="34" charset="0"/>
+                <a:ea typeface="Aptos" pitchFamily="34" charset="-122"/>
+                <a:cs typeface="Aptos" pitchFamily="34" charset="-120"/>
+              </a:rPr>
+              <a:t>• The initial technical design includes free-text chief complaint data, facility location, ZIP.</a:t>
             </a:r>
             <a:endParaRPr lang="en-US" sz="2100" dirty="0"/>
           </a:p>
           <a:p>
+            <a:pPr indent="0" marL="0">
+              <a:buNone/>
+            </a:pPr>
             <a:r>
               <a:rPr lang="en-US" sz="2100" dirty="0">
                 <a:solidFill>
-                  <a:srgbClr val="17364A"/>
-                </a:solidFill>
-                <a:latin typeface="Aptos" pitchFamily="34" charset="0"/>
-                <a:ea typeface="Aptos" pitchFamily="34" charset="-122"/>
-                <a:cs typeface="Aptos" pitchFamily="34" charset="-120"/>
-              </a:rPr>
-              <a:t>Several counties include Tribal lands, and some small-area summaries could indirectly identify Tribal.</a:t>
+                  <a:srgbClr val="003A63"/>
+                </a:solidFill>
+                <a:latin typeface="Aptos" pitchFamily="34" charset="0"/>
+                <a:ea typeface="Aptos" pitchFamily="34" charset="-122"/>
+                <a:cs typeface="Aptos" pitchFamily="34" charset="-120"/>
+              </a:rPr>
+              <a:t>• Several counties include Tribal lands, and some small-area summaries could indirectly identify.</a:t>
             </a:r>
             <a:endParaRPr lang="en-US" sz="2100" dirty="0"/>
           </a:p>
@@ -6981,17 +7062,17 @@
         </p:nvSpPr>
         <p:spPr>
           <a:xfrm>
-            <a:off x="7799832" y="1828800"/>
-            <a:ext cx="3145536" cy="685800"/>
-          </a:xfrm>
-          <a:prstGeom prst="rect">
-            <a:avLst/>
-          </a:prstGeom>
-          <a:noFill/>
-          <a:ln/>
-        </p:spPr>
-        <p:txBody>
-          <a:bodyPr wrap="square" lIns="0" tIns="0" rIns="0" bIns="0" rtlCol="0" anchor="t">
+            <a:off x="7799832" y="1801368"/>
+            <a:ext cx="3145536" cy="758952"/>
+          </a:xfrm>
+          <a:prstGeom prst="rect">
+            <a:avLst/>
+          </a:prstGeom>
+          <a:noFill/>
+          <a:ln/>
+        </p:spPr>
+        <p:txBody>
+          <a:bodyPr wrap="square" lIns="254" tIns="254" rIns="254" bIns="254" rtlCol="0" anchor="t">
             <a:normAutofit/>
           </a:bodyPr>
           <a:lstStyle/>
@@ -7000,7 +7081,7 @@
               <a:buNone/>
             </a:pPr>
             <a:r>
-              <a:rPr lang="en-US" sz="1550" dirty="0">
+              <a:rPr lang="en-US" sz="1320" dirty="0">
                 <a:solidFill>
                   <a:srgbClr val="17364A"/>
                 </a:solidFill>
@@ -7010,7 +7091,7 @@
               </a:rPr>
               <a:t>A state health department wants to develop an AI-assisted analytics workflow to summarize emergency.</a:t>
             </a:r>
-            <a:endParaRPr lang="en-US" sz="1550" dirty="0"/>
+            <a:endParaRPr lang="en-US" sz="1320" dirty="0"/>
           </a:p>
         </p:txBody>
       </p:sp>
@@ -7098,13 +7179,16 @@
           <a:ln/>
         </p:spPr>
         <p:txBody>
-          <a:bodyPr wrap="square" lIns="254" tIns="254" rIns="254" bIns="254" rtlCol="0" anchor="t">
+          <a:bodyPr wrap="square" lIns="508" tIns="508" rIns="508" bIns="508" rtlCol="0" anchor="t">
             <a:normAutofit/>
           </a:bodyPr>
           <a:lstStyle/>
           <a:p>
-            <a:r>
-              <a:rPr lang="en-US" sz="1380" dirty="0">
+            <a:pPr indent="0" marL="0">
+              <a:buNone/>
+            </a:pPr>
+            <a:r>
+              <a:rPr lang="en-US" sz="1220" dirty="0">
                 <a:solidFill>
                   <a:srgbClr val="17364A"/>
                 </a:solidFill>
@@ -7112,13 +7196,16 @@
                 <a:ea typeface="Aptos" pitchFamily="34" charset="-122"/>
                 <a:cs typeface="Aptos" pitchFamily="34" charset="-120"/>
               </a:rPr>
-              <a:t>A state health department wants to develop an AI-assisted analytics workflow to summarize.</a:t>
-            </a:r>
-            <a:endParaRPr lang="en-US" sz="1380" dirty="0"/>
-          </a:p>
-          <a:p>
-            <a:r>
-              <a:rPr lang="en-US" sz="1380" dirty="0">
+              <a:t>A state health department wants to develop an AI-assisted.</a:t>
+            </a:r>
+            <a:endParaRPr lang="en-US" sz="1220" dirty="0"/>
+          </a:p>
+          <a:p>
+            <a:pPr indent="0" marL="0">
+              <a:buNone/>
+            </a:pPr>
+            <a:r>
+              <a:rPr lang="en-US" sz="1220" dirty="0">
                 <a:solidFill>
                   <a:srgbClr val="17364A"/>
                 </a:solidFill>
@@ -7126,13 +7213,16 @@
                 <a:ea typeface="Aptos" pitchFamily="34" charset="-122"/>
                 <a:cs typeface="Aptos" pitchFamily="34" charset="-120"/>
               </a:rPr>
-              <a:t>The initial technical design includes free-text chief complaint data, facility location,.</a:t>
-            </a:r>
-            <a:endParaRPr lang="en-US" sz="1380" dirty="0"/>
-          </a:p>
-          <a:p>
-            <a:r>
-              <a:rPr lang="en-US" sz="1380" dirty="0">
+              <a:t>The initial technical design includes free-text chief complaint.</a:t>
+            </a:r>
+            <a:endParaRPr lang="en-US" sz="1220" dirty="0"/>
+          </a:p>
+          <a:p>
+            <a:pPr indent="0" marL="0">
+              <a:buNone/>
+            </a:pPr>
+            <a:r>
+              <a:rPr lang="en-US" sz="1220" dirty="0">
                 <a:solidFill>
                   <a:srgbClr val="17364A"/>
                 </a:solidFill>
@@ -7140,9 +7230,9 @@
                 <a:ea typeface="Aptos" pitchFamily="34" charset="-122"/>
                 <a:cs typeface="Aptos" pitchFamily="34" charset="-120"/>
               </a:rPr>
-              <a:t>Several counties include Tribal lands, and some small-area summaries could indirectly.</a:t>
-            </a:r>
-            <a:endParaRPr lang="en-US" sz="1380" dirty="0"/>
+              <a:t>Several counties include Tribal lands, and some small-area.</a:t>
+            </a:r>
+            <a:endParaRPr lang="en-US" sz="1220" dirty="0"/>
           </a:p>
         </p:txBody>
       </p:sp>
@@ -7220,17 +7310,17 @@
         </p:nvSpPr>
         <p:spPr>
           <a:xfrm>
-            <a:off x="7799832" y="5001768"/>
-            <a:ext cx="3145536" cy="502920"/>
-          </a:xfrm>
-          <a:prstGeom prst="rect">
-            <a:avLst/>
-          </a:prstGeom>
-          <a:noFill/>
-          <a:ln/>
-        </p:spPr>
-        <p:txBody>
-          <a:bodyPr wrap="square" lIns="0" tIns="0" rIns="0" bIns="0" rtlCol="0" anchor="t">
+            <a:off x="7799832" y="4974336"/>
+            <a:ext cx="3145536" cy="576072"/>
+          </a:xfrm>
+          <a:prstGeom prst="rect">
+            <a:avLst/>
+          </a:prstGeom>
+          <a:noFill/>
+          <a:ln/>
+        </p:spPr>
+        <p:txBody>
+          <a:bodyPr wrap="square" lIns="254" tIns="254" rIns="254" bIns="254" rtlCol="0" anchor="t">
             <a:normAutofit/>
           </a:bodyPr>
           <a:lstStyle/>
@@ -7239,7 +7329,7 @@
               <a:buNone/>
             </a:pPr>
             <a:r>
-              <a:rPr lang="en-US" sz="1550" dirty="0">
+              <a:rPr lang="en-US" sz="1320" dirty="0">
                 <a:solidFill>
                   <a:srgbClr val="17364A"/>
                 </a:solidFill>
@@ -7247,9 +7337,9 @@
                 <a:ea typeface="Aptos" pitchFamily="34" charset="-122"/>
                 <a:cs typeface="Aptos" pitchFamily="34" charset="-120"/>
               </a:rPr>
-              <a:t>Translate this concept into clear decision rights, review steps, documentation expectations, and escalation paths before an AI-supported workflow is approved.</a:t>
-            </a:r>
-            <a:endParaRPr lang="en-US" sz="1550" dirty="0"/>
+              <a:t>Translate this concept into clear decision rights, review steps, documentation expectations, and escalation paths before.</a:t>
+            </a:r>
+            <a:endParaRPr lang="en-US" sz="1320" dirty="0"/>
           </a:p>
         </p:txBody>
       </p:sp>
@@ -7550,49 +7640,58 @@
           <a:ln/>
         </p:spPr>
         <p:txBody>
-          <a:bodyPr wrap="square" lIns="635" tIns="635" rIns="635" bIns="635" rtlCol="0" anchor="t">
+          <a:bodyPr wrap="square" lIns="1016" tIns="1016" rIns="1016" bIns="1016" rtlCol="0" anchor="t">
             <a:normAutofit/>
           </a:bodyPr>
           <a:lstStyle/>
           <a:p>
+            <a:pPr indent="0" marL="0">
+              <a:buNone/>
+            </a:pPr>
             <a:r>
               <a:rPr lang="en-US" sz="2100" dirty="0">
                 <a:solidFill>
-                  <a:srgbClr val="17364A"/>
-                </a:solidFill>
-                <a:latin typeface="Aptos" pitchFamily="34" charset="0"/>
-                <a:ea typeface="Aptos" pitchFamily="34" charset="-122"/>
-                <a:cs typeface="Aptos" pitchFamily="34" charset="-120"/>
-              </a:rPr>
-              <a:t>AI project teams should begin by asking whether the proposed use involves Tribal Nations, Tribal.</a:t>
+                  <a:srgbClr val="003A63"/>
+                </a:solidFill>
+                <a:latin typeface="Aptos" pitchFamily="34" charset="0"/>
+                <a:ea typeface="Aptos" pitchFamily="34" charset="-122"/>
+                <a:cs typeface="Aptos" pitchFamily="34" charset="-120"/>
+              </a:rPr>
+              <a:t>• AI project teams should begin by asking whether the proposed use involves Tribal Nations,.</a:t>
             </a:r>
             <a:endParaRPr lang="en-US" sz="2100" dirty="0"/>
           </a:p>
           <a:p>
+            <a:pPr indent="0" marL="0">
+              <a:buNone/>
+            </a:pPr>
             <a:r>
               <a:rPr lang="en-US" sz="2100" dirty="0">
                 <a:solidFill>
-                  <a:srgbClr val="17364A"/>
-                </a:solidFill>
-                <a:latin typeface="Aptos" pitchFamily="34" charset="0"/>
-                <a:ea typeface="Aptos" pitchFamily="34" charset="-122"/>
-                <a:cs typeface="Aptos" pitchFamily="34" charset="-120"/>
-              </a:rPr>
-              <a:t>This question should be asked during use case intake, not after a data set has been assembled.</a:t>
+                  <a:srgbClr val="003A63"/>
+                </a:solidFill>
+                <a:latin typeface="Aptos" pitchFamily="34" charset="0"/>
+                <a:ea typeface="Aptos" pitchFamily="34" charset="-122"/>
+                <a:cs typeface="Aptos" pitchFamily="34" charset="-120"/>
+              </a:rPr>
+              <a:t>• This question should be asked during use case intake, not after a data set has been assembled.</a:t>
             </a:r>
             <a:endParaRPr lang="en-US" sz="2100" dirty="0"/>
           </a:p>
           <a:p>
+            <a:pPr indent="0" marL="0">
+              <a:buNone/>
+            </a:pPr>
             <a:r>
               <a:rPr lang="en-US" sz="2100" dirty="0">
                 <a:solidFill>
-                  <a:srgbClr val="17364A"/>
-                </a:solidFill>
-                <a:latin typeface="Aptos" pitchFamily="34" charset="0"/>
-                <a:ea typeface="Aptos" pitchFamily="34" charset="-122"/>
-                <a:cs typeface="Aptos" pitchFamily="34" charset="-120"/>
-              </a:rPr>
-              <a:t>The answer may not be obvious because Tribal relevance can appear through geography, facility.</a:t>
+                  <a:srgbClr val="003A63"/>
+                </a:solidFill>
+                <a:latin typeface="Aptos" pitchFamily="34" charset="0"/>
+                <a:ea typeface="Aptos" pitchFamily="34" charset="-122"/>
+                <a:cs typeface="Aptos" pitchFamily="34" charset="-120"/>
+              </a:rPr>
+              <a:t>• The answer may not be obvious because Tribal relevance can appear through geography, facility.</a:t>
             </a:r>
             <a:endParaRPr lang="en-US" sz="2100" dirty="0"/>
           </a:p>
@@ -7672,17 +7771,17 @@
         </p:nvSpPr>
         <p:spPr>
           <a:xfrm>
-            <a:off x="7799832" y="1828800"/>
-            <a:ext cx="3145536" cy="685800"/>
-          </a:xfrm>
-          <a:prstGeom prst="rect">
-            <a:avLst/>
-          </a:prstGeom>
-          <a:noFill/>
-          <a:ln/>
-        </p:spPr>
-        <p:txBody>
-          <a:bodyPr wrap="square" lIns="0" tIns="0" rIns="0" bIns="0" rtlCol="0" anchor="t">
+            <a:off x="7799832" y="1801368"/>
+            <a:ext cx="3145536" cy="758952"/>
+          </a:xfrm>
+          <a:prstGeom prst="rect">
+            <a:avLst/>
+          </a:prstGeom>
+          <a:noFill/>
+          <a:ln/>
+        </p:spPr>
+        <p:txBody>
+          <a:bodyPr wrap="square" lIns="254" tIns="254" rIns="254" bIns="254" rtlCol="0" anchor="t">
             <a:normAutofit/>
           </a:bodyPr>
           <a:lstStyle/>
@@ -7691,7 +7790,7 @@
               <a:buNone/>
             </a:pPr>
             <a:r>
-              <a:rPr lang="en-US" sz="1550" dirty="0">
+              <a:rPr lang="en-US" sz="1320" dirty="0">
                 <a:solidFill>
                   <a:srgbClr val="17364A"/>
                 </a:solidFill>
@@ -7701,7 +7800,7 @@
               </a:rPr>
               <a:t>AI project teams should begin by asking whether the proposed use involves Tribal Nations, Tribal.</a:t>
             </a:r>
-            <a:endParaRPr lang="en-US" sz="1550" dirty="0"/>
+            <a:endParaRPr lang="en-US" sz="1320" dirty="0"/>
           </a:p>
         </p:txBody>
       </p:sp>
@@ -7789,13 +7888,16 @@
           <a:ln/>
         </p:spPr>
         <p:txBody>
-          <a:bodyPr wrap="square" lIns="254" tIns="254" rIns="254" bIns="254" rtlCol="0" anchor="t">
+          <a:bodyPr wrap="square" lIns="508" tIns="508" rIns="508" bIns="508" rtlCol="0" anchor="t">
             <a:normAutofit/>
           </a:bodyPr>
           <a:lstStyle/>
           <a:p>
-            <a:r>
-              <a:rPr lang="en-US" sz="1380" dirty="0">
+            <a:pPr indent="0" marL="0">
+              <a:buNone/>
+            </a:pPr>
+            <a:r>
+              <a:rPr lang="en-US" sz="1220" dirty="0">
                 <a:solidFill>
                   <a:srgbClr val="17364A"/>
                 </a:solidFill>
@@ -7803,13 +7905,16 @@
                 <a:ea typeface="Aptos" pitchFamily="34" charset="-122"/>
                 <a:cs typeface="Aptos" pitchFamily="34" charset="-120"/>
               </a:rPr>
-              <a:t>AI project teams should begin by asking whether the proposed use involves Tribal Nations,.</a:t>
-            </a:r>
-            <a:endParaRPr lang="en-US" sz="1380" dirty="0"/>
-          </a:p>
-          <a:p>
-            <a:r>
-              <a:rPr lang="en-US" sz="1380" dirty="0">
+              <a:t>AI project teams should begin by asking whether the proposed use.</a:t>
+            </a:r>
+            <a:endParaRPr lang="en-US" sz="1220" dirty="0"/>
+          </a:p>
+          <a:p>
+            <a:pPr indent="0" marL="0">
+              <a:buNone/>
+            </a:pPr>
+            <a:r>
+              <a:rPr lang="en-US" sz="1220" dirty="0">
                 <a:solidFill>
                   <a:srgbClr val="17364A"/>
                 </a:solidFill>
@@ -7817,13 +7922,16 @@
                 <a:ea typeface="Aptos" pitchFamily="34" charset="-122"/>
                 <a:cs typeface="Aptos" pitchFamily="34" charset="-120"/>
               </a:rPr>
-              <a:t>The answer may not be obvious because Tribal relevance can appear through geography,.</a:t>
-            </a:r>
-            <a:endParaRPr lang="en-US" sz="1380" dirty="0"/>
-          </a:p>
-          <a:p>
-            <a:r>
-              <a:rPr lang="en-US" sz="1380" dirty="0">
+              <a:t>The answer may not be obvious because Tribal relevance can appear.</a:t>
+            </a:r>
+            <a:endParaRPr lang="en-US" sz="1220" dirty="0"/>
+          </a:p>
+          <a:p>
+            <a:pPr indent="0" marL="0">
+              <a:buNone/>
+            </a:pPr>
+            <a:r>
+              <a:rPr lang="en-US" sz="1220" dirty="0">
                 <a:solidFill>
                   <a:srgbClr val="17364A"/>
                 </a:solidFill>
@@ -7831,9 +7939,9 @@
                 <a:ea typeface="Aptos" pitchFamily="34" charset="-122"/>
                 <a:cs typeface="Aptos" pitchFamily="34" charset="-120"/>
               </a:rPr>
-              <a:t>If the answer is uncertain, the team should treat the project as requiring additional.</a:t>
-            </a:r>
-            <a:endParaRPr lang="en-US" sz="1380" dirty="0"/>
+              <a:t>If the answer is uncertain, the team should treat the project as.</a:t>
+            </a:r>
+            <a:endParaRPr lang="en-US" sz="1220" dirty="0"/>
           </a:p>
         </p:txBody>
       </p:sp>
@@ -7911,17 +8019,17 @@
         </p:nvSpPr>
         <p:spPr>
           <a:xfrm>
-            <a:off x="7799832" y="5001768"/>
-            <a:ext cx="3145536" cy="502920"/>
-          </a:xfrm>
-          <a:prstGeom prst="rect">
-            <a:avLst/>
-          </a:prstGeom>
-          <a:noFill/>
-          <a:ln/>
-        </p:spPr>
-        <p:txBody>
-          <a:bodyPr wrap="square" lIns="0" tIns="0" rIns="0" bIns="0" rtlCol="0" anchor="t">
+            <a:off x="7799832" y="4974336"/>
+            <a:ext cx="3145536" cy="576072"/>
+          </a:xfrm>
+          <a:prstGeom prst="rect">
+            <a:avLst/>
+          </a:prstGeom>
+          <a:noFill/>
+          <a:ln/>
+        </p:spPr>
+        <p:txBody>
+          <a:bodyPr wrap="square" lIns="254" tIns="254" rIns="254" bIns="254" rtlCol="0" anchor="t">
             <a:normAutofit/>
           </a:bodyPr>
           <a:lstStyle/>
@@ -7930,7 +8038,7 @@
               <a:buNone/>
             </a:pPr>
             <a:r>
-              <a:rPr lang="en-US" sz="1550" dirty="0">
+              <a:rPr lang="en-US" sz="1320" dirty="0">
                 <a:solidFill>
                   <a:srgbClr val="17364A"/>
                 </a:solidFill>
@@ -7938,9 +8046,9 @@
                 <a:ea typeface="Aptos" pitchFamily="34" charset="-122"/>
                 <a:cs typeface="Aptos" pitchFamily="34" charset="-120"/>
               </a:rPr>
-              <a:t>Translate this concept into clear decision rights, review steps, documentation expectations, and escalation paths before an AI-supported workflow is approved.</a:t>
-            </a:r>
-            <a:endParaRPr lang="en-US" sz="1550" dirty="0"/>
+              <a:t>Translate this concept into clear decision rights, review steps, documentation expectations, and escalation paths before.</a:t>
+            </a:r>
+            <a:endParaRPr lang="en-US" sz="1320" dirty="0"/>
           </a:p>
         </p:txBody>
       </p:sp>
@@ -8241,49 +8349,58 @@
           <a:ln/>
         </p:spPr>
         <p:txBody>
-          <a:bodyPr wrap="square" lIns="635" tIns="635" rIns="635" bIns="635" rtlCol="0" anchor="t">
+          <a:bodyPr wrap="square" lIns="1016" tIns="1016" rIns="1016" bIns="1016" rtlCol="0" anchor="t">
             <a:normAutofit/>
           </a:bodyPr>
           <a:lstStyle/>
           <a:p>
+            <a:pPr indent="0" marL="0">
+              <a:buNone/>
+            </a:pPr>
             <a:r>
               <a:rPr lang="en-US" sz="2100" dirty="0">
                 <a:solidFill>
-                  <a:srgbClr val="17364A"/>
-                </a:solidFill>
-                <a:latin typeface="Aptos" pitchFamily="34" charset="0"/>
-                <a:ea typeface="Aptos" pitchFamily="34" charset="-122"/>
-                <a:cs typeface="Aptos" pitchFamily="34" charset="-120"/>
-              </a:rPr>
-              <a:t>AI teams should not infer Tribal affiliation from residential location, ZIP code, facility use, names,.</a:t>
+                  <a:srgbClr val="003A63"/>
+                </a:solidFill>
+                <a:latin typeface="Aptos" pitchFamily="34" charset="0"/>
+                <a:ea typeface="Aptos" pitchFamily="34" charset="-122"/>
+                <a:cs typeface="Aptos" pitchFamily="34" charset="-120"/>
+              </a:rPr>
+              <a:t>• AI teams should not infer Tribal affiliation from residential location, ZIP code, facility.</a:t>
             </a:r>
             <a:endParaRPr lang="en-US" sz="2100" dirty="0"/>
           </a:p>
           <a:p>
+            <a:pPr indent="0" marL="0">
+              <a:buNone/>
+            </a:pPr>
             <a:r>
               <a:rPr lang="en-US" sz="2100" dirty="0">
                 <a:solidFill>
-                  <a:srgbClr val="17364A"/>
-                </a:solidFill>
-                <a:latin typeface="Aptos" pitchFamily="34" charset="0"/>
-                <a:ea typeface="Aptos" pitchFamily="34" charset="-122"/>
-                <a:cs typeface="Aptos" pitchFamily="34" charset="-120"/>
-              </a:rPr>
-              <a:t>Proxy inference can create privacy risk, misclassification, and community harm.</a:t>
+                  <a:srgbClr val="003A63"/>
+                </a:solidFill>
+                <a:latin typeface="Aptos" pitchFamily="34" charset="0"/>
+                <a:ea typeface="Aptos" pitchFamily="34" charset="-122"/>
+                <a:cs typeface="Aptos" pitchFamily="34" charset="-120"/>
+              </a:rPr>
+              <a:t>• Proxy inference can create privacy risk, misclassification, and community harm.</a:t>
             </a:r>
             <a:endParaRPr lang="en-US" sz="2100" dirty="0"/>
           </a:p>
           <a:p>
+            <a:pPr indent="0" marL="0">
+              <a:buNone/>
+            </a:pPr>
             <a:r>
               <a:rPr lang="en-US" sz="2100" dirty="0">
                 <a:solidFill>
-                  <a:srgbClr val="17364A"/>
-                </a:solidFill>
-                <a:latin typeface="Aptos" pitchFamily="34" charset="0"/>
-                <a:ea typeface="Aptos" pitchFamily="34" charset="-122"/>
-                <a:cs typeface="Aptos" pitchFamily="34" charset="-120"/>
-              </a:rPr>
-              <a:t>It can also undermine Tribal authority if outside organizations create AI-derived labels about Tribal.</a:t>
+                  <a:srgbClr val="003A63"/>
+                </a:solidFill>
+                <a:latin typeface="Aptos" pitchFamily="34" charset="0"/>
+                <a:ea typeface="Aptos" pitchFamily="34" charset="-122"/>
+                <a:cs typeface="Aptos" pitchFamily="34" charset="-120"/>
+              </a:rPr>
+              <a:t>• It can also undermine Tribal authority if outside organizations create AI-derived labels about.</a:t>
             </a:r>
             <a:endParaRPr lang="en-US" sz="2100" dirty="0"/>
           </a:p>
@@ -8363,17 +8480,17 @@
         </p:nvSpPr>
         <p:spPr>
           <a:xfrm>
-            <a:off x="7799832" y="1828800"/>
-            <a:ext cx="3145536" cy="685800"/>
-          </a:xfrm>
-          <a:prstGeom prst="rect">
-            <a:avLst/>
-          </a:prstGeom>
-          <a:noFill/>
-          <a:ln/>
-        </p:spPr>
-        <p:txBody>
-          <a:bodyPr wrap="square" lIns="0" tIns="0" rIns="0" bIns="0" rtlCol="0" anchor="t">
+            <a:off x="7799832" y="1801368"/>
+            <a:ext cx="3145536" cy="758952"/>
+          </a:xfrm>
+          <a:prstGeom prst="rect">
+            <a:avLst/>
+          </a:prstGeom>
+          <a:noFill/>
+          <a:ln/>
+        </p:spPr>
+        <p:txBody>
+          <a:bodyPr wrap="square" lIns="254" tIns="254" rIns="254" bIns="254" rtlCol="0" anchor="t">
             <a:normAutofit/>
           </a:bodyPr>
           <a:lstStyle/>
@@ -8382,7 +8499,7 @@
               <a:buNone/>
             </a:pPr>
             <a:r>
-              <a:rPr lang="en-US" sz="1550" dirty="0">
+              <a:rPr lang="en-US" sz="1320" dirty="0">
                 <a:solidFill>
                   <a:srgbClr val="17364A"/>
                 </a:solidFill>
@@ -8392,7 +8509,7 @@
               </a:rPr>
               <a:t>AI teams should not infer Tribal affiliation from residential location, ZIP code, facility use, names,.</a:t>
             </a:r>
-            <a:endParaRPr lang="en-US" sz="1550" dirty="0"/>
+            <a:endParaRPr lang="en-US" sz="1320" dirty="0"/>
           </a:p>
         </p:txBody>
       </p:sp>
@@ -8480,13 +8597,16 @@
           <a:ln/>
         </p:spPr>
         <p:txBody>
-          <a:bodyPr wrap="square" lIns="254" tIns="254" rIns="254" bIns="254" rtlCol="0" anchor="t">
+          <a:bodyPr wrap="square" lIns="508" tIns="508" rIns="508" bIns="508" rtlCol="0" anchor="t">
             <a:normAutofit/>
           </a:bodyPr>
           <a:lstStyle/>
           <a:p>
-            <a:r>
-              <a:rPr lang="en-US" sz="1380" dirty="0">
+            <a:pPr indent="0" marL="0">
+              <a:buNone/>
+            </a:pPr>
+            <a:r>
+              <a:rPr lang="en-US" sz="1220" dirty="0">
                 <a:solidFill>
                   <a:srgbClr val="17364A"/>
                 </a:solidFill>
@@ -8494,13 +8614,16 @@
                 <a:ea typeface="Aptos" pitchFamily="34" charset="-122"/>
                 <a:cs typeface="Aptos" pitchFamily="34" charset="-120"/>
               </a:rPr>
-              <a:t>AI teams should not infer Tribal affiliation from residential location, ZIP code, facility.</a:t>
-            </a:r>
-            <a:endParaRPr lang="en-US" sz="1380" dirty="0"/>
-          </a:p>
-          <a:p>
-            <a:r>
-              <a:rPr lang="en-US" sz="1380" dirty="0">
+              <a:t>AI teams should not infer Tribal affiliation from residential.</a:t>
+            </a:r>
+            <a:endParaRPr lang="en-US" sz="1220" dirty="0"/>
+          </a:p>
+          <a:p>
+            <a:pPr indent="0" marL="0">
+              <a:buNone/>
+            </a:pPr>
+            <a:r>
+              <a:rPr lang="en-US" sz="1220" dirty="0">
                 <a:solidFill>
                   <a:srgbClr val="17364A"/>
                 </a:solidFill>
@@ -8508,13 +8631,16 @@
                 <a:ea typeface="Aptos" pitchFamily="34" charset="-122"/>
                 <a:cs typeface="Aptos" pitchFamily="34" charset="-120"/>
               </a:rPr>
-              <a:t>It can also undermine Tribal authority if outside organizations create AI-derived labels.</a:t>
-            </a:r>
-            <a:endParaRPr lang="en-US" sz="1380" dirty="0"/>
-          </a:p>
-          <a:p>
-            <a:r>
-              <a:rPr lang="en-US" sz="1380" dirty="0">
+              <a:t>It can also undermine Tribal authority if outside organizations.</a:t>
+            </a:r>
+            <a:endParaRPr lang="en-US" sz="1220" dirty="0"/>
+          </a:p>
+          <a:p>
+            <a:pPr indent="0" marL="0">
+              <a:buNone/>
+            </a:pPr>
+            <a:r>
+              <a:rPr lang="en-US" sz="1220" dirty="0">
                 <a:solidFill>
                   <a:srgbClr val="17364A"/>
                 </a:solidFill>
@@ -8522,9 +8648,9 @@
                 <a:ea typeface="Aptos" pitchFamily="34" charset="-122"/>
                 <a:cs typeface="Aptos" pitchFamily="34" charset="-120"/>
               </a:rPr>
-              <a:t>If affiliation or Tribal relevance is needed, the project should address how that.</a:t>
-            </a:r>
-            <a:endParaRPr lang="en-US" sz="1380" dirty="0"/>
+              <a:t>If affiliation or Tribal relevance is needed, the project should.</a:t>
+            </a:r>
+            <a:endParaRPr lang="en-US" sz="1220" dirty="0"/>
           </a:p>
         </p:txBody>
       </p:sp>
@@ -8602,17 +8728,17 @@
         </p:nvSpPr>
         <p:spPr>
           <a:xfrm>
-            <a:off x="7799832" y="5001768"/>
-            <a:ext cx="3145536" cy="502920"/>
-          </a:xfrm>
-          <a:prstGeom prst="rect">
-            <a:avLst/>
-          </a:prstGeom>
-          <a:noFill/>
-          <a:ln/>
-        </p:spPr>
-        <p:txBody>
-          <a:bodyPr wrap="square" lIns="0" tIns="0" rIns="0" bIns="0" rtlCol="0" anchor="t">
+            <a:off x="7799832" y="4974336"/>
+            <a:ext cx="3145536" cy="576072"/>
+          </a:xfrm>
+          <a:prstGeom prst="rect">
+            <a:avLst/>
+          </a:prstGeom>
+          <a:noFill/>
+          <a:ln/>
+        </p:spPr>
+        <p:txBody>
+          <a:bodyPr wrap="square" lIns="254" tIns="254" rIns="254" bIns="254" rtlCol="0" anchor="t">
             <a:normAutofit/>
           </a:bodyPr>
           <a:lstStyle/>
@@ -8621,7 +8747,7 @@
               <a:buNone/>
             </a:pPr>
             <a:r>
-              <a:rPr lang="en-US" sz="1550" dirty="0">
+              <a:rPr lang="en-US" sz="1320" dirty="0">
                 <a:solidFill>
                   <a:srgbClr val="17364A"/>
                 </a:solidFill>
@@ -8629,9 +8755,9 @@
                 <a:ea typeface="Aptos" pitchFamily="34" charset="-122"/>
                 <a:cs typeface="Aptos" pitchFamily="34" charset="-120"/>
               </a:rPr>
-              <a:t>Translate this concept into clear decision rights, review steps, documentation expectations, and escalation paths before an AI-supported workflow is approved.</a:t>
-            </a:r>
-            <a:endParaRPr lang="en-US" sz="1550" dirty="0"/>
+              <a:t>Translate this concept into clear decision rights, review steps, documentation expectations, and escalation paths before.</a:t>
+            </a:r>
+            <a:endParaRPr lang="en-US" sz="1320" dirty="0"/>
           </a:p>
         </p:txBody>
       </p:sp>
@@ -8932,49 +9058,58 @@
           <a:ln/>
         </p:spPr>
         <p:txBody>
-          <a:bodyPr wrap="square" lIns="635" tIns="635" rIns="635" bIns="635" rtlCol="0" anchor="t">
+          <a:bodyPr wrap="square" lIns="1016" tIns="1016" rIns="1016" bIns="1016" rtlCol="0" anchor="t">
             <a:normAutofit/>
           </a:bodyPr>
           <a:lstStyle/>
           <a:p>
+            <a:pPr indent="0" marL="0">
+              <a:buNone/>
+            </a:pPr>
             <a:r>
               <a:rPr lang="en-US" sz="2100" dirty="0">
                 <a:solidFill>
-                  <a:srgbClr val="17364A"/>
-                </a:solidFill>
-                <a:latin typeface="Aptos" pitchFamily="34" charset="0"/>
-                <a:ea typeface="Aptos" pitchFamily="34" charset="-122"/>
-                <a:cs typeface="Aptos" pitchFamily="34" charset="-120"/>
-              </a:rPr>
-              <a:t>Communication and dissemination require special care because AI outputs can be polished, confident, and.</a:t>
+                  <a:srgbClr val="003A63"/>
+                </a:solidFill>
+                <a:latin typeface="Aptos" pitchFamily="34" charset="0"/>
+                <a:ea typeface="Aptos" pitchFamily="34" charset="-122"/>
+                <a:cs typeface="Aptos" pitchFamily="34" charset="-120"/>
+              </a:rPr>
+              <a:t>• Communication and dissemination require special care because AI outputs can be polished,.</a:t>
             </a:r>
             <a:endParaRPr lang="en-US" sz="2100" dirty="0"/>
           </a:p>
           <a:p>
+            <a:pPr indent="0" marL="0">
+              <a:buNone/>
+            </a:pPr>
             <a:r>
               <a:rPr lang="en-US" sz="2100" dirty="0">
                 <a:solidFill>
-                  <a:srgbClr val="17364A"/>
-                </a:solidFill>
-                <a:latin typeface="Aptos" pitchFamily="34" charset="0"/>
-                <a:ea typeface="Aptos" pitchFamily="34" charset="-122"/>
-                <a:cs typeface="Aptos" pitchFamily="34" charset="-120"/>
-              </a:rPr>
-              <a:t>Public-facing summaries, dashboards, maps, chatbots, and reports may create harm if they identify small.</a:t>
+                  <a:srgbClr val="003A63"/>
+                </a:solidFill>
+                <a:latin typeface="Aptos" pitchFamily="34" charset="0"/>
+                <a:ea typeface="Aptos" pitchFamily="34" charset="-122"/>
+                <a:cs typeface="Aptos" pitchFamily="34" charset="-120"/>
+              </a:rPr>
+              <a:t>• Public-facing summaries, dashboards, maps, chatbots, and reports may create harm if they.</a:t>
             </a:r>
             <a:endParaRPr lang="en-US" sz="2100" dirty="0"/>
           </a:p>
           <a:p>
+            <a:pPr indent="0" marL="0">
+              <a:buNone/>
+            </a:pPr>
             <a:r>
               <a:rPr lang="en-US" sz="2100" dirty="0">
                 <a:solidFill>
-                  <a:srgbClr val="17364A"/>
-                </a:solidFill>
-                <a:latin typeface="Aptos" pitchFamily="34" charset="0"/>
-                <a:ea typeface="Aptos" pitchFamily="34" charset="-122"/>
-                <a:cs typeface="Aptos" pitchFamily="34" charset="-120"/>
-              </a:rPr>
-              <a:t>Tribal partners may require pre-review of reports, presentations, manuscripts, dashboard text, public.</a:t>
+                  <a:srgbClr val="003A63"/>
+                </a:solidFill>
+                <a:latin typeface="Aptos" pitchFamily="34" charset="0"/>
+                <a:ea typeface="Aptos" pitchFamily="34" charset="-122"/>
+                <a:cs typeface="Aptos" pitchFamily="34" charset="-120"/>
+              </a:rPr>
+              <a:t>• Tribal partners may require pre-review of reports, presentations, manuscripts, dashboard text,.</a:t>
             </a:r>
             <a:endParaRPr lang="en-US" sz="2100" dirty="0"/>
           </a:p>
@@ -9054,17 +9189,17 @@
         </p:nvSpPr>
         <p:spPr>
           <a:xfrm>
-            <a:off x="7799832" y="1828800"/>
-            <a:ext cx="3145536" cy="685800"/>
-          </a:xfrm>
-          <a:prstGeom prst="rect">
-            <a:avLst/>
-          </a:prstGeom>
-          <a:noFill/>
-          <a:ln/>
-        </p:spPr>
-        <p:txBody>
-          <a:bodyPr wrap="square" lIns="0" tIns="0" rIns="0" bIns="0" rtlCol="0" anchor="t">
+            <a:off x="7799832" y="1801368"/>
+            <a:ext cx="3145536" cy="758952"/>
+          </a:xfrm>
+          <a:prstGeom prst="rect">
+            <a:avLst/>
+          </a:prstGeom>
+          <a:noFill/>
+          <a:ln/>
+        </p:spPr>
+        <p:txBody>
+          <a:bodyPr wrap="square" lIns="254" tIns="254" rIns="254" bIns="254" rtlCol="0" anchor="t">
             <a:normAutofit/>
           </a:bodyPr>
           <a:lstStyle/>
@@ -9073,7 +9208,7 @@
               <a:buNone/>
             </a:pPr>
             <a:r>
-              <a:rPr lang="en-US" sz="1550" dirty="0">
+              <a:rPr lang="en-US" sz="1320" dirty="0">
                 <a:solidFill>
                   <a:srgbClr val="17364A"/>
                 </a:solidFill>
@@ -9083,7 +9218,7 @@
               </a:rPr>
               <a:t>Communication and dissemination require special care because AI outputs can be polished, confident, and.</a:t>
             </a:r>
-            <a:endParaRPr lang="en-US" sz="1550" dirty="0"/>
+            <a:endParaRPr lang="en-US" sz="1320" dirty="0"/>
           </a:p>
         </p:txBody>
       </p:sp>
@@ -9171,13 +9306,16 @@
           <a:ln/>
         </p:spPr>
         <p:txBody>
-          <a:bodyPr wrap="square" lIns="254" tIns="254" rIns="254" bIns="254" rtlCol="0" anchor="t">
+          <a:bodyPr wrap="square" lIns="508" tIns="508" rIns="508" bIns="508" rtlCol="0" anchor="t">
             <a:normAutofit/>
           </a:bodyPr>
           <a:lstStyle/>
           <a:p>
-            <a:r>
-              <a:rPr lang="en-US" sz="1380" dirty="0">
+            <a:pPr indent="0" marL="0">
+              <a:buNone/>
+            </a:pPr>
+            <a:r>
+              <a:rPr lang="en-US" sz="1220" dirty="0">
                 <a:solidFill>
                   <a:srgbClr val="17364A"/>
                 </a:solidFill>
@@ -9185,13 +9323,16 @@
                 <a:ea typeface="Aptos" pitchFamily="34" charset="-122"/>
                 <a:cs typeface="Aptos" pitchFamily="34" charset="-120"/>
               </a:rPr>
-              <a:t>Communication and dissemination require special care because AI outputs can be polished,.</a:t>
-            </a:r>
-            <a:endParaRPr lang="en-US" sz="1380" dirty="0"/>
-          </a:p>
-          <a:p>
-            <a:r>
-              <a:rPr lang="en-US" sz="1380" dirty="0">
+              <a:t>Communication and dissemination require special care because AI.</a:t>
+            </a:r>
+            <a:endParaRPr lang="en-US" sz="1220" dirty="0"/>
+          </a:p>
+          <a:p>
+            <a:pPr indent="0" marL="0">
+              <a:buNone/>
+            </a:pPr>
+            <a:r>
+              <a:rPr lang="en-US" sz="1220" dirty="0">
                 <a:solidFill>
                   <a:srgbClr val="17364A"/>
                 </a:solidFill>
@@ -9199,13 +9340,16 @@
                 <a:ea typeface="Aptos" pitchFamily="34" charset="-122"/>
                 <a:cs typeface="Aptos" pitchFamily="34" charset="-120"/>
               </a:rPr>
-              <a:t>Public-facing summaries, dashboards, maps, chatbots, and reports may create harm if they.</a:t>
-            </a:r>
-            <a:endParaRPr lang="en-US" sz="1380" dirty="0"/>
-          </a:p>
-          <a:p>
-            <a:r>
-              <a:rPr lang="en-US" sz="1380" dirty="0">
+              <a:t>Public-facing summaries, dashboards, maps, chatbots, and reports.</a:t>
+            </a:r>
+            <a:endParaRPr lang="en-US" sz="1220" dirty="0"/>
+          </a:p>
+          <a:p>
+            <a:pPr indent="0" marL="0">
+              <a:buNone/>
+            </a:pPr>
+            <a:r>
+              <a:rPr lang="en-US" sz="1220" dirty="0">
                 <a:solidFill>
                   <a:srgbClr val="17364A"/>
                 </a:solidFill>
@@ -9213,9 +9357,9 @@
                 <a:ea typeface="Aptos" pitchFamily="34" charset="-122"/>
                 <a:cs typeface="Aptos" pitchFamily="34" charset="-120"/>
               </a:rPr>
-              <a:t>Tribal partners may require pre-review of reports, presentations, manuscripts, dashboard.</a:t>
-            </a:r>
-            <a:endParaRPr lang="en-US" sz="1380" dirty="0"/>
+              <a:t>Tribal partners may require pre-review of reports, presentations,.</a:t>
+            </a:r>
+            <a:endParaRPr lang="en-US" sz="1220" dirty="0"/>
           </a:p>
         </p:txBody>
       </p:sp>
@@ -9293,17 +9437,17 @@
         </p:nvSpPr>
         <p:spPr>
           <a:xfrm>
-            <a:off x="7799832" y="5001768"/>
-            <a:ext cx="3145536" cy="502920"/>
-          </a:xfrm>
-          <a:prstGeom prst="rect">
-            <a:avLst/>
-          </a:prstGeom>
-          <a:noFill/>
-          <a:ln/>
-        </p:spPr>
-        <p:txBody>
-          <a:bodyPr wrap="square" lIns="0" tIns="0" rIns="0" bIns="0" rtlCol="0" anchor="t">
+            <a:off x="7799832" y="4974336"/>
+            <a:ext cx="3145536" cy="576072"/>
+          </a:xfrm>
+          <a:prstGeom prst="rect">
+            <a:avLst/>
+          </a:prstGeom>
+          <a:noFill/>
+          <a:ln/>
+        </p:spPr>
+        <p:txBody>
+          <a:bodyPr wrap="square" lIns="254" tIns="254" rIns="254" bIns="254" rtlCol="0" anchor="t">
             <a:normAutofit/>
           </a:bodyPr>
           <a:lstStyle/>
@@ -9312,7 +9456,7 @@
               <a:buNone/>
             </a:pPr>
             <a:r>
-              <a:rPr lang="en-US" sz="1550" dirty="0">
+              <a:rPr lang="en-US" sz="1320" dirty="0">
                 <a:solidFill>
                   <a:srgbClr val="17364A"/>
                 </a:solidFill>
@@ -9320,9 +9464,9 @@
                 <a:ea typeface="Aptos" pitchFamily="34" charset="-122"/>
                 <a:cs typeface="Aptos" pitchFamily="34" charset="-120"/>
               </a:rPr>
-              <a:t>Translate this concept into clear decision rights, review steps, documentation expectations, and escalation paths before an AI-supported workflow is approved.</a:t>
-            </a:r>
-            <a:endParaRPr lang="en-US" sz="1550" dirty="0"/>
+              <a:t>Translate this concept into clear decision rights, review steps, documentation expectations, and escalation paths before.</a:t>
+            </a:r>
+            <a:endParaRPr lang="en-US" sz="1320" dirty="0"/>
           </a:p>
         </p:txBody>
       </p:sp>
@@ -9623,49 +9767,58 @@
           <a:ln/>
         </p:spPr>
         <p:txBody>
-          <a:bodyPr wrap="square" lIns="635" tIns="635" rIns="635" bIns="635" rtlCol="0" anchor="t">
+          <a:bodyPr wrap="square" lIns="1016" tIns="1016" rIns="1016" bIns="1016" rtlCol="0" anchor="t">
             <a:normAutofit/>
           </a:bodyPr>
           <a:lstStyle/>
           <a:p>
+            <a:pPr indent="0" marL="0">
+              <a:buNone/>
+            </a:pPr>
             <a:r>
               <a:rPr lang="en-US" sz="2100" dirty="0">
                 <a:solidFill>
-                  <a:srgbClr val="17364A"/>
-                </a:solidFill>
-                <a:latin typeface="Aptos" pitchFamily="34" charset="0"/>
-                <a:ea typeface="Aptos" pitchFamily="34" charset="-122"/>
-                <a:cs typeface="Aptos" pitchFamily="34" charset="-120"/>
-              </a:rPr>
-              <a:t>A major risk is treating Tribal health data as if it were ordinary administrative or research data.</a:t>
+                  <a:srgbClr val="003A63"/>
+                </a:solidFill>
+                <a:latin typeface="Aptos" pitchFamily="34" charset="0"/>
+                <a:ea typeface="Aptos" pitchFamily="34" charset="-122"/>
+                <a:cs typeface="Aptos" pitchFamily="34" charset="-120"/>
+              </a:rPr>
+              <a:t>• A major risk is treating Tribal health data as if it were ordinary administrative or research.</a:t>
             </a:r>
             <a:endParaRPr lang="en-US" sz="2100" dirty="0"/>
           </a:p>
           <a:p>
+            <a:pPr indent="0" marL="0">
+              <a:buNone/>
+            </a:pPr>
             <a:r>
               <a:rPr lang="en-US" sz="2100" dirty="0">
                 <a:solidFill>
-                  <a:srgbClr val="17364A"/>
-                </a:solidFill>
-                <a:latin typeface="Aptos" pitchFamily="34" charset="0"/>
-                <a:ea typeface="Aptos" pitchFamily="34" charset="-122"/>
-                <a:cs typeface="Aptos" pitchFamily="34" charset="-120"/>
-              </a:rPr>
-              <a:t>This can lead to AI development without Tribal consultation, data sharing without appropriate.</a:t>
+                  <a:srgbClr val="003A63"/>
+                </a:solidFill>
+                <a:latin typeface="Aptos" pitchFamily="34" charset="0"/>
+                <a:ea typeface="Aptos" pitchFamily="34" charset="-122"/>
+                <a:cs typeface="Aptos" pitchFamily="34" charset="-120"/>
+              </a:rPr>
+              <a:t>• This can lead to AI development without Tribal consultation, data sharing without appropriate.</a:t>
             </a:r>
             <a:endParaRPr lang="en-US" sz="2100" dirty="0"/>
           </a:p>
           <a:p>
+            <a:pPr indent="0" marL="0">
+              <a:buNone/>
+            </a:pPr>
             <a:r>
               <a:rPr lang="en-US" sz="2100" dirty="0">
                 <a:solidFill>
-                  <a:srgbClr val="17364A"/>
-                </a:solidFill>
-                <a:latin typeface="Aptos" pitchFamily="34" charset="0"/>
-                <a:ea typeface="Aptos" pitchFamily="34" charset="-122"/>
-                <a:cs typeface="Aptos" pitchFamily="34" charset="-120"/>
-              </a:rPr>
-              <a:t>The failure mode is often procedural rather than malicious: staff follow routine analytics practices.</a:t>
+                  <a:srgbClr val="003A63"/>
+                </a:solidFill>
+                <a:latin typeface="Aptos" pitchFamily="34" charset="0"/>
+                <a:ea typeface="Aptos" pitchFamily="34" charset="-122"/>
+                <a:cs typeface="Aptos" pitchFamily="34" charset="-120"/>
+              </a:rPr>
+              <a:t>• The failure mode is often procedural rather than malicious: staff follow routine analytics.</a:t>
             </a:r>
             <a:endParaRPr lang="en-US" sz="2100" dirty="0"/>
           </a:p>
@@ -9745,17 +9898,17 @@
         </p:nvSpPr>
         <p:spPr>
           <a:xfrm>
-            <a:off x="7799832" y="1828800"/>
-            <a:ext cx="3145536" cy="685800"/>
-          </a:xfrm>
-          <a:prstGeom prst="rect">
-            <a:avLst/>
-          </a:prstGeom>
-          <a:noFill/>
-          <a:ln/>
-        </p:spPr>
-        <p:txBody>
-          <a:bodyPr wrap="square" lIns="0" tIns="0" rIns="0" bIns="0" rtlCol="0" anchor="t">
+            <a:off x="7799832" y="1801368"/>
+            <a:ext cx="3145536" cy="758952"/>
+          </a:xfrm>
+          <a:prstGeom prst="rect">
+            <a:avLst/>
+          </a:prstGeom>
+          <a:noFill/>
+          <a:ln/>
+        </p:spPr>
+        <p:txBody>
+          <a:bodyPr wrap="square" lIns="254" tIns="254" rIns="254" bIns="254" rtlCol="0" anchor="t">
             <a:normAutofit/>
           </a:bodyPr>
           <a:lstStyle/>
@@ -9764,7 +9917,7 @@
               <a:buNone/>
             </a:pPr>
             <a:r>
-              <a:rPr lang="en-US" sz="1550" dirty="0">
+              <a:rPr lang="en-US" sz="1320" dirty="0">
                 <a:solidFill>
                   <a:srgbClr val="17364A"/>
                 </a:solidFill>
@@ -9774,7 +9927,7 @@
               </a:rPr>
               <a:t>A major risk is treating Tribal health data as if it were ordinary administrative or research data.</a:t>
             </a:r>
-            <a:endParaRPr lang="en-US" sz="1550" dirty="0"/>
+            <a:endParaRPr lang="en-US" sz="1320" dirty="0"/>
           </a:p>
         </p:txBody>
       </p:sp>
@@ -9862,13 +10015,16 @@
           <a:ln/>
         </p:spPr>
         <p:txBody>
-          <a:bodyPr wrap="square" lIns="254" tIns="254" rIns="254" bIns="254" rtlCol="0" anchor="t">
+          <a:bodyPr wrap="square" lIns="508" tIns="508" rIns="508" bIns="508" rtlCol="0" anchor="t">
             <a:normAutofit/>
           </a:bodyPr>
           <a:lstStyle/>
           <a:p>
-            <a:r>
-              <a:rPr lang="en-US" sz="1380" dirty="0">
+            <a:pPr indent="0" marL="0">
+              <a:buNone/>
+            </a:pPr>
+            <a:r>
+              <a:rPr lang="en-US" sz="1220" dirty="0">
                 <a:solidFill>
                   <a:srgbClr val="17364A"/>
                 </a:solidFill>
@@ -9876,13 +10032,16 @@
                 <a:ea typeface="Aptos" pitchFamily="34" charset="-122"/>
                 <a:cs typeface="Aptos" pitchFamily="34" charset="-120"/>
               </a:rPr>
-              <a:t>A major risk is treating Tribal health data as if it were ordinary administrative or.</a:t>
-            </a:r>
-            <a:endParaRPr lang="en-US" sz="1380" dirty="0"/>
-          </a:p>
-          <a:p>
-            <a:r>
-              <a:rPr lang="en-US" sz="1380" dirty="0">
+              <a:t>A major risk is treating Tribal health data as if it were ordinary.</a:t>
+            </a:r>
+            <a:endParaRPr lang="en-US" sz="1220" dirty="0"/>
+          </a:p>
+          <a:p>
+            <a:pPr indent="0" marL="0">
+              <a:buNone/>
+            </a:pPr>
+            <a:r>
+              <a:rPr lang="en-US" sz="1220" dirty="0">
                 <a:solidFill>
                   <a:srgbClr val="17364A"/>
                 </a:solidFill>
@@ -9890,13 +10049,16 @@
                 <a:ea typeface="Aptos" pitchFamily="34" charset="-122"/>
                 <a:cs typeface="Aptos" pitchFamily="34" charset="-120"/>
               </a:rPr>
-              <a:t>This can lead to AI development without Tribal consultation, data sharing without.</a:t>
-            </a:r>
-            <a:endParaRPr lang="en-US" sz="1380" dirty="0"/>
-          </a:p>
-          <a:p>
-            <a:r>
-              <a:rPr lang="en-US" sz="1380" dirty="0">
+              <a:t>This can lead to AI development without Tribal consultation, data.</a:t>
+            </a:r>
+            <a:endParaRPr lang="en-US" sz="1220" dirty="0"/>
+          </a:p>
+          <a:p>
+            <a:pPr indent="0" marL="0">
+              <a:buNone/>
+            </a:pPr>
+            <a:r>
+              <a:rPr lang="en-US" sz="1220" dirty="0">
                 <a:solidFill>
                   <a:srgbClr val="17364A"/>
                 </a:solidFill>
@@ -9904,9 +10066,9 @@
                 <a:ea typeface="Aptos" pitchFamily="34" charset="-122"/>
                 <a:cs typeface="Aptos" pitchFamily="34" charset="-120"/>
               </a:rPr>
-              <a:t>The failure mode is often procedural rather than malicious: staff follow routine analytics.</a:t>
-            </a:r>
-            <a:endParaRPr lang="en-US" sz="1380" dirty="0"/>
+              <a:t>The failure mode is often procedural rather than malicious: staff.</a:t>
+            </a:r>
+            <a:endParaRPr lang="en-US" sz="1220" dirty="0"/>
           </a:p>
         </p:txBody>
       </p:sp>
@@ -9984,17 +10146,17 @@
         </p:nvSpPr>
         <p:spPr>
           <a:xfrm>
-            <a:off x="7799832" y="5001768"/>
-            <a:ext cx="3145536" cy="502920"/>
-          </a:xfrm>
-          <a:prstGeom prst="rect">
-            <a:avLst/>
-          </a:prstGeom>
-          <a:noFill/>
-          <a:ln/>
-        </p:spPr>
-        <p:txBody>
-          <a:bodyPr wrap="square" lIns="0" tIns="0" rIns="0" bIns="0" rtlCol="0" anchor="t">
+            <a:off x="7799832" y="4974336"/>
+            <a:ext cx="3145536" cy="576072"/>
+          </a:xfrm>
+          <a:prstGeom prst="rect">
+            <a:avLst/>
+          </a:prstGeom>
+          <a:noFill/>
+          <a:ln/>
+        </p:spPr>
+        <p:txBody>
+          <a:bodyPr wrap="square" lIns="254" tIns="254" rIns="254" bIns="254" rtlCol="0" anchor="t">
             <a:normAutofit/>
           </a:bodyPr>
           <a:lstStyle/>
@@ -10003,7 +10165,7 @@
               <a:buNone/>
             </a:pPr>
             <a:r>
-              <a:rPr lang="en-US" sz="1550" dirty="0">
+              <a:rPr lang="en-US" sz="1320" dirty="0">
                 <a:solidFill>
                   <a:srgbClr val="17364A"/>
                 </a:solidFill>
@@ -10011,9 +10173,9 @@
                 <a:ea typeface="Aptos" pitchFamily="34" charset="-122"/>
                 <a:cs typeface="Aptos" pitchFamily="34" charset="-120"/>
               </a:rPr>
-              <a:t>Translate this concept into clear decision rights, review steps, documentation expectations, and escalation paths before an AI-supported workflow is approved.</a:t>
-            </a:r>
-            <a:endParaRPr lang="en-US" sz="1550" dirty="0"/>
+              <a:t>Translate this concept into clear decision rights, review steps, documentation expectations, and escalation paths before.</a:t>
+            </a:r>
+            <a:endParaRPr lang="en-US" sz="1320" dirty="0"/>
           </a:p>
         </p:txBody>
       </p:sp>
@@ -10314,49 +10476,58 @@
           <a:ln/>
         </p:spPr>
         <p:txBody>
-          <a:bodyPr wrap="square" lIns="635" tIns="635" rIns="635" bIns="635" rtlCol="0" anchor="t">
+          <a:bodyPr wrap="square" lIns="1016" tIns="1016" rIns="1016" bIns="1016" rtlCol="0" anchor="t">
             <a:normAutofit/>
           </a:bodyPr>
           <a:lstStyle/>
           <a:p>
+            <a:pPr indent="0" marL="0">
+              <a:buNone/>
+            </a:pPr>
             <a:r>
               <a:rPr lang="en-US" sz="2100" dirty="0">
                 <a:solidFill>
-                  <a:srgbClr val="17364A"/>
-                </a:solidFill>
-                <a:latin typeface="Aptos" pitchFamily="34" charset="0"/>
-                <a:ea typeface="Aptos" pitchFamily="34" charset="-122"/>
-                <a:cs typeface="Aptos" pitchFamily="34" charset="-120"/>
-              </a:rPr>
-              <a:t>A fourth risk is considering equity, accessibility, and community benefit too late.</a:t>
+                  <a:srgbClr val="003A63"/>
+                </a:solidFill>
+                <a:latin typeface="Aptos" pitchFamily="34" charset="0"/>
+                <a:ea typeface="Aptos" pitchFamily="34" charset="-122"/>
+                <a:cs typeface="Aptos" pitchFamily="34" charset="-120"/>
+              </a:rPr>
+              <a:t>• A fourth risk is considering equity, accessibility, and community benefit too late.</a:t>
             </a:r>
             <a:endParaRPr lang="en-US" sz="2100" dirty="0"/>
           </a:p>
           <a:p>
+            <a:pPr indent="0" marL="0">
+              <a:buNone/>
+            </a:pPr>
             <a:r>
               <a:rPr lang="en-US" sz="2100" dirty="0">
                 <a:solidFill>
-                  <a:srgbClr val="17364A"/>
-                </a:solidFill>
-                <a:latin typeface="Aptos" pitchFamily="34" charset="0"/>
-                <a:ea typeface="Aptos" pitchFamily="34" charset="-122"/>
-                <a:cs typeface="Aptos" pitchFamily="34" charset="-120"/>
-              </a:rPr>
-              <a:t>If the project is already funded, contracted, designed, or near deployment before Tribal partners are.</a:t>
+                  <a:srgbClr val="003A63"/>
+                </a:solidFill>
+                <a:latin typeface="Aptos" pitchFamily="34" charset="0"/>
+                <a:ea typeface="Aptos" pitchFamily="34" charset="-122"/>
+                <a:cs typeface="Aptos" pitchFamily="34" charset="-120"/>
+              </a:rPr>
+              <a:t>• If the project is already funded, contracted, designed, or near deployment before Tribal.</a:t>
             </a:r>
             <a:endParaRPr lang="en-US" sz="2100" dirty="0"/>
           </a:p>
           <a:p>
+            <a:pPr indent="0" marL="0">
+              <a:buNone/>
+            </a:pPr>
             <a:r>
               <a:rPr lang="en-US" sz="2100" dirty="0">
                 <a:solidFill>
-                  <a:srgbClr val="17364A"/>
-                </a:solidFill>
-                <a:latin typeface="Aptos" pitchFamily="34" charset="0"/>
-                <a:ea typeface="Aptos" pitchFamily="34" charset="-122"/>
-                <a:cs typeface="Aptos" pitchFamily="34" charset="-120"/>
-              </a:rPr>
-              <a:t>This can create extractive relationships in which data and expertise flow outward while benefits,.</a:t>
+                  <a:srgbClr val="003A63"/>
+                </a:solidFill>
+                <a:latin typeface="Aptos" pitchFamily="34" charset="0"/>
+                <a:ea typeface="Aptos" pitchFamily="34" charset="-122"/>
+                <a:cs typeface="Aptos" pitchFamily="34" charset="-120"/>
+              </a:rPr>
+              <a:t>• This can create extractive relationships in which data and expertise flow outward while.</a:t>
             </a:r>
             <a:endParaRPr lang="en-US" sz="2100" dirty="0"/>
           </a:p>
@@ -10436,17 +10607,17 @@
         </p:nvSpPr>
         <p:spPr>
           <a:xfrm>
-            <a:off x="7799832" y="1828800"/>
-            <a:ext cx="3145536" cy="685800"/>
-          </a:xfrm>
-          <a:prstGeom prst="rect">
-            <a:avLst/>
-          </a:prstGeom>
-          <a:noFill/>
-          <a:ln/>
-        </p:spPr>
-        <p:txBody>
-          <a:bodyPr wrap="square" lIns="0" tIns="0" rIns="0" bIns="0" rtlCol="0" anchor="t">
+            <a:off x="7799832" y="1801368"/>
+            <a:ext cx="3145536" cy="758952"/>
+          </a:xfrm>
+          <a:prstGeom prst="rect">
+            <a:avLst/>
+          </a:prstGeom>
+          <a:noFill/>
+          <a:ln/>
+        </p:spPr>
+        <p:txBody>
+          <a:bodyPr wrap="square" lIns="254" tIns="254" rIns="254" bIns="254" rtlCol="0" anchor="t">
             <a:normAutofit/>
           </a:bodyPr>
           <a:lstStyle/>
@@ -10455,7 +10626,7 @@
               <a:buNone/>
             </a:pPr>
             <a:r>
-              <a:rPr lang="en-US" sz="1550" dirty="0">
+              <a:rPr lang="en-US" sz="1320" dirty="0">
                 <a:solidFill>
                   <a:srgbClr val="17364A"/>
                 </a:solidFill>
@@ -10465,7 +10636,7 @@
               </a:rPr>
               <a:t>A fourth risk is considering equity, accessibility, and community benefit too late.</a:t>
             </a:r>
-            <a:endParaRPr lang="en-US" sz="1550" dirty="0"/>
+            <a:endParaRPr lang="en-US" sz="1320" dirty="0"/>
           </a:p>
         </p:txBody>
       </p:sp>
@@ -10553,13 +10724,16 @@
           <a:ln/>
         </p:spPr>
         <p:txBody>
-          <a:bodyPr wrap="square" lIns="254" tIns="254" rIns="254" bIns="254" rtlCol="0" anchor="t">
+          <a:bodyPr wrap="square" lIns="508" tIns="508" rIns="508" bIns="508" rtlCol="0" anchor="t">
             <a:normAutofit/>
           </a:bodyPr>
           <a:lstStyle/>
           <a:p>
-            <a:r>
-              <a:rPr lang="en-US" sz="1380" dirty="0">
+            <a:pPr indent="0" marL="0">
+              <a:buNone/>
+            </a:pPr>
+            <a:r>
+              <a:rPr lang="en-US" sz="1220" dirty="0">
                 <a:solidFill>
                   <a:srgbClr val="17364A"/>
                 </a:solidFill>
@@ -10567,13 +10741,16 @@
                 <a:ea typeface="Aptos" pitchFamily="34" charset="-122"/>
                 <a:cs typeface="Aptos" pitchFamily="34" charset="-120"/>
               </a:rPr>
-              <a:t>If the project is already funded, contracted, designed, or near deployment before Tribal.</a:t>
-            </a:r>
-            <a:endParaRPr lang="en-US" sz="1380" dirty="0"/>
-          </a:p>
-          <a:p>
-            <a:r>
-              <a:rPr lang="en-US" sz="1380" dirty="0">
+              <a:t>If the project is already funded, contracted, designed, or near.</a:t>
+            </a:r>
+            <a:endParaRPr lang="en-US" sz="1220" dirty="0"/>
+          </a:p>
+          <a:p>
+            <a:pPr indent="0" marL="0">
+              <a:buNone/>
+            </a:pPr>
+            <a:r>
+              <a:rPr lang="en-US" sz="1220" dirty="0">
                 <a:solidFill>
                   <a:srgbClr val="17364A"/>
                 </a:solidFill>
@@ -10581,13 +10758,16 @@
                 <a:ea typeface="Aptos" pitchFamily="34" charset="-122"/>
                 <a:cs typeface="Aptos" pitchFamily="34" charset="-120"/>
               </a:rPr>
-              <a:t>This can create extractive relationships in which data and expertise flow outward while.</a:t>
-            </a:r>
-            <a:endParaRPr lang="en-US" sz="1380" dirty="0"/>
-          </a:p>
-          <a:p>
-            <a:r>
-              <a:rPr lang="en-US" sz="1380" dirty="0">
+              <a:t>This can create extractive relationships in which data and.</a:t>
+            </a:r>
+            <a:endParaRPr lang="en-US" sz="1220" dirty="0"/>
+          </a:p>
+          <a:p>
+            <a:pPr indent="0" marL="0">
+              <a:buNone/>
+            </a:pPr>
+            <a:r>
+              <a:rPr lang="en-US" sz="1220" dirty="0">
                 <a:solidFill>
                   <a:srgbClr val="17364A"/>
                 </a:solidFill>
@@ -10595,9 +10775,9 @@
                 <a:ea typeface="Aptos" pitchFamily="34" charset="-122"/>
                 <a:cs typeface="Aptos" pitchFamily="34" charset="-120"/>
               </a:rPr>
-              <a:t>The guardrail is to define community benefit, capacity building, shared decision-making,.</a:t>
-            </a:r>
-            <a:endParaRPr lang="en-US" sz="1380" dirty="0"/>
+              <a:t>The guardrail is to define community benefit, capacity building,.</a:t>
+            </a:r>
+            <a:endParaRPr lang="en-US" sz="1220" dirty="0"/>
           </a:p>
         </p:txBody>
       </p:sp>
@@ -10675,17 +10855,17 @@
         </p:nvSpPr>
         <p:spPr>
           <a:xfrm>
-            <a:off x="7799832" y="5001768"/>
-            <a:ext cx="3145536" cy="502920"/>
-          </a:xfrm>
-          <a:prstGeom prst="rect">
-            <a:avLst/>
-          </a:prstGeom>
-          <a:noFill/>
-          <a:ln/>
-        </p:spPr>
-        <p:txBody>
-          <a:bodyPr wrap="square" lIns="0" tIns="0" rIns="0" bIns="0" rtlCol="0" anchor="t">
+            <a:off x="7799832" y="4974336"/>
+            <a:ext cx="3145536" cy="576072"/>
+          </a:xfrm>
+          <a:prstGeom prst="rect">
+            <a:avLst/>
+          </a:prstGeom>
+          <a:noFill/>
+          <a:ln/>
+        </p:spPr>
+        <p:txBody>
+          <a:bodyPr wrap="square" lIns="254" tIns="254" rIns="254" bIns="254" rtlCol="0" anchor="t">
             <a:normAutofit/>
           </a:bodyPr>
           <a:lstStyle/>
@@ -10694,7 +10874,7 @@
               <a:buNone/>
             </a:pPr>
             <a:r>
-              <a:rPr lang="en-US" sz="1550" dirty="0">
+              <a:rPr lang="en-US" sz="1320" dirty="0">
                 <a:solidFill>
                   <a:srgbClr val="17364A"/>
                 </a:solidFill>
@@ -10702,9 +10882,9 @@
                 <a:ea typeface="Aptos" pitchFamily="34" charset="-122"/>
                 <a:cs typeface="Aptos" pitchFamily="34" charset="-120"/>
               </a:rPr>
-              <a:t>Translate this concept into clear decision rights, review steps, documentation expectations, and escalation paths before an AI-supported workflow is approved.</a:t>
-            </a:r>
-            <a:endParaRPr lang="en-US" sz="1550" dirty="0"/>
+              <a:t>Translate this concept into clear decision rights, review steps, documentation expectations, and escalation paths before.</a:t>
+            </a:r>
+            <a:endParaRPr lang="en-US" sz="1320" dirty="0"/>
           </a:p>
         </p:txBody>
       </p:sp>
@@ -11005,49 +11185,58 @@
           <a:ln/>
         </p:spPr>
         <p:txBody>
-          <a:bodyPr wrap="square" lIns="635" tIns="635" rIns="635" bIns="635" rtlCol="0" anchor="t">
+          <a:bodyPr wrap="square" lIns="1016" tIns="1016" rIns="1016" bIns="1016" rtlCol="0" anchor="t">
             <a:normAutofit/>
           </a:bodyPr>
           <a:lstStyle/>
           <a:p>
+            <a:pPr indent="0" marL="0">
+              <a:buNone/>
+            </a:pPr>
             <a:r>
               <a:rPr lang="en-US" sz="2100" dirty="0">
                 <a:solidFill>
-                  <a:srgbClr val="17364A"/>
-                </a:solidFill>
-                <a:latin typeface="Aptos" pitchFamily="34" charset="0"/>
-                <a:ea typeface="Aptos" pitchFamily="34" charset="-122"/>
-                <a:cs typeface="Aptos" pitchFamily="34" charset="-120"/>
-              </a:rPr>
-              <a:t>This module introduces public health staff to the responsibilities that arise when AI projects involve Tribal.</a:t>
+                  <a:srgbClr val="003A63"/>
+                </a:solidFill>
+                <a:latin typeface="Aptos" pitchFamily="34" charset="0"/>
+                <a:ea typeface="Aptos" pitchFamily="34" charset="-122"/>
+                <a:cs typeface="Aptos" pitchFamily="34" charset="-120"/>
+              </a:rPr>
+              <a:t>• This module introduces public health staff to the responsibilities that arise when AI projects.</a:t>
             </a:r>
             <a:endParaRPr lang="en-US" sz="2100" dirty="0"/>
           </a:p>
           <a:p>
+            <a:pPr indent="0" marL="0">
+              <a:buNone/>
+            </a:pPr>
             <a:r>
               <a:rPr lang="en-US" sz="2100" dirty="0">
                 <a:solidFill>
-                  <a:srgbClr val="17364A"/>
-                </a:solidFill>
-                <a:latin typeface="Aptos" pitchFamily="34" charset="0"/>
-                <a:ea typeface="Aptos" pitchFamily="34" charset="-122"/>
-                <a:cs typeface="Aptos" pitchFamily="34" charset="-120"/>
-              </a:rPr>
-              <a:t>The central message is that Tribal Nations are sovereign governments, not stakeholder groups, and their health.</a:t>
+                  <a:srgbClr val="003A63"/>
+                </a:solidFill>
+                <a:latin typeface="Aptos" pitchFamily="34" charset="0"/>
+                <a:ea typeface="Aptos" pitchFamily="34" charset="-122"/>
+                <a:cs typeface="Aptos" pitchFamily="34" charset="-120"/>
+              </a:rPr>
+              <a:t>• The central message is that Tribal Nations are sovereign governments, not stakeholder groups,.</a:t>
             </a:r>
             <a:endParaRPr lang="en-US" sz="2100" dirty="0"/>
           </a:p>
           <a:p>
+            <a:pPr indent="0" marL="0">
+              <a:buNone/>
+            </a:pPr>
             <a:r>
               <a:rPr lang="en-US" sz="2100" dirty="0">
                 <a:solidFill>
-                  <a:srgbClr val="17364A"/>
-                </a:solidFill>
-                <a:latin typeface="Aptos" pitchFamily="34" charset="0"/>
-                <a:ea typeface="Aptos" pitchFamily="34" charset="-122"/>
-                <a:cs typeface="Aptos" pitchFamily="34" charset="-120"/>
-              </a:rPr>
-              <a:t>AI projects must be shaped through early consultation, formal partnership, and clear agreements before data are.</a:t>
+                  <a:srgbClr val="003A63"/>
+                </a:solidFill>
+                <a:latin typeface="Aptos" pitchFamily="34" charset="0"/>
+                <a:ea typeface="Aptos" pitchFamily="34" charset="-122"/>
+                <a:cs typeface="Aptos" pitchFamily="34" charset="-120"/>
+              </a:rPr>
+              <a:t>• AI projects must be shaped through early consultation, formal partnership, and clear.</a:t>
             </a:r>
             <a:endParaRPr lang="en-US" sz="2100" dirty="0"/>
           </a:p>
@@ -11127,17 +11316,17 @@
         </p:nvSpPr>
         <p:spPr>
           <a:xfrm>
-            <a:off x="8074152" y="1920240"/>
-            <a:ext cx="2825496" cy="1280160"/>
-          </a:xfrm>
-          <a:prstGeom prst="rect">
-            <a:avLst/>
-          </a:prstGeom>
-          <a:noFill/>
-          <a:ln/>
-        </p:spPr>
-        <p:txBody>
-          <a:bodyPr wrap="square" lIns="0" tIns="0" rIns="0" bIns="0" rtlCol="0" anchor="t">
+            <a:off x="8074152" y="1892808"/>
+            <a:ext cx="2825496" cy="1353312"/>
+          </a:xfrm>
+          <a:prstGeom prst="rect">
+            <a:avLst/>
+          </a:prstGeom>
+          <a:noFill/>
+          <a:ln/>
+        </p:spPr>
+        <p:txBody>
+          <a:bodyPr wrap="square" lIns="254" tIns="254" rIns="254" bIns="254" rtlCol="0" anchor="t">
             <a:normAutofit/>
           </a:bodyPr>
           <a:lstStyle/>
@@ -11146,7 +11335,7 @@
               <a:buNone/>
             </a:pPr>
             <a:r>
-              <a:rPr lang="en-US" sz="1550" dirty="0">
+              <a:rPr lang="en-US" sz="1320" dirty="0">
                 <a:solidFill>
                   <a:srgbClr val="17364A"/>
                 </a:solidFill>
@@ -11154,43 +11343,9 @@
                 <a:ea typeface="Aptos" pitchFamily="34" charset="-122"/>
                 <a:cs typeface="Aptos" pitchFamily="34" charset="-120"/>
               </a:rPr>
-              <a:t>Level: Introductory</a:t>
-            </a:r>
-            <a:endParaRPr lang="en-US" sz="1550" dirty="0"/>
-          </a:p>
-          <a:p>
-            <a:pPr indent="0" marL="0">
-              <a:buNone/>
-            </a:pPr>
-            <a:r>
-              <a:rPr lang="en-US" sz="1550" dirty="0">
-                <a:solidFill>
-                  <a:srgbClr val="17364A"/>
-                </a:solidFill>
-                <a:latin typeface="Aptos" pitchFamily="34" charset="0"/>
-                <a:ea typeface="Aptos" pitchFamily="34" charset="-122"/>
-                <a:cs typeface="Aptos" pitchFamily="34" charset="-120"/>
-              </a:rPr>
-              <a:t>Primary track: Governance and Security</a:t>
-            </a:r>
-            <a:endParaRPr lang="en-US" sz="1550" dirty="0"/>
-          </a:p>
-          <a:p>
-            <a:pPr indent="0" marL="0">
-              <a:buNone/>
-            </a:pPr>
-            <a:r>
-              <a:rPr lang="en-US" sz="1550" dirty="0">
-                <a:solidFill>
-                  <a:srgbClr val="17364A"/>
-                </a:solidFill>
-                <a:latin typeface="Aptos" pitchFamily="34" charset="0"/>
-                <a:ea typeface="Aptos" pitchFamily="34" charset="-122"/>
-                <a:cs typeface="Aptos" pitchFamily="34" charset="-120"/>
-              </a:rPr>
-              <a:t>Appears in tracks: shared-foundational, governance-security, policy, program-management</a:t>
-            </a:r>
-            <a:endParaRPr lang="en-US" sz="1550" dirty="0"/>
+              <a:t>Level: Introductory Primary track: Governance and Security Appears in tracks: shared-foundational, governance-security,.</a:t>
+            </a:r>
+            <a:endParaRPr lang="en-US" sz="1320" dirty="0"/>
           </a:p>
         </p:txBody>
       </p:sp>
@@ -11278,13 +11433,16 @@
           <a:ln/>
         </p:spPr>
         <p:txBody>
-          <a:bodyPr wrap="square" lIns="254" tIns="254" rIns="254" bIns="254" rtlCol="0" anchor="t">
+          <a:bodyPr wrap="square" lIns="508" tIns="508" rIns="508" bIns="508" rtlCol="0" anchor="t">
             <a:normAutofit/>
           </a:bodyPr>
           <a:lstStyle/>
           <a:p>
-            <a:r>
-              <a:rPr lang="en-US" sz="1380" dirty="0">
+            <a:pPr indent="0" marL="0">
+              <a:buNone/>
+            </a:pPr>
+            <a:r>
+              <a:rPr lang="en-US" sz="1220" dirty="0">
                 <a:solidFill>
                   <a:srgbClr val="17364A"/>
                 </a:solidFill>
@@ -11294,11 +11452,14 @@
               </a:rPr>
               <a:t>Read the module for shared vocabulary and context.</a:t>
             </a:r>
-            <a:endParaRPr lang="en-US" sz="1380" dirty="0"/>
-          </a:p>
-          <a:p>
-            <a:r>
-              <a:rPr lang="en-US" sz="1380" dirty="0">
+            <a:endParaRPr lang="en-US" sz="1220" dirty="0"/>
+          </a:p>
+          <a:p>
+            <a:pPr indent="0" marL="0">
+              <a:buNone/>
+            </a:pPr>
+            <a:r>
+              <a:rPr lang="en-US" sz="1220" dirty="0">
                 <a:solidFill>
                   <a:srgbClr val="17364A"/>
                 </a:solidFill>
@@ -11308,11 +11469,14 @@
               </a:rPr>
               <a:t>Complete the practical exercise to apply the concept.</a:t>
             </a:r>
-            <a:endParaRPr lang="en-US" sz="1380" dirty="0"/>
-          </a:p>
-          <a:p>
-            <a:r>
-              <a:rPr lang="en-US" sz="1380" dirty="0">
+            <a:endParaRPr lang="en-US" sz="1220" dirty="0"/>
+          </a:p>
+          <a:p>
+            <a:pPr indent="0" marL="0">
+              <a:buNone/>
+            </a:pPr>
+            <a:r>
+              <a:rPr lang="en-US" sz="1220" dirty="0">
                 <a:solidFill>
                   <a:srgbClr val="17364A"/>
                 </a:solidFill>
@@ -11322,7 +11486,7 @@
               </a:rPr>
               <a:t>Use the notes and references for deeper review.</a:t>
             </a:r>
-            <a:endParaRPr lang="en-US" sz="1380" dirty="0"/>
+            <a:endParaRPr lang="en-US" sz="1220" dirty="0"/>
           </a:p>
         </p:txBody>
       </p:sp>
@@ -11623,49 +11787,58 @@
           <a:ln/>
         </p:spPr>
         <p:txBody>
-          <a:bodyPr wrap="square" lIns="635" tIns="635" rIns="635" bIns="635" rtlCol="0" anchor="t">
+          <a:bodyPr wrap="square" lIns="1016" tIns="1016" rIns="1016" bIns="1016" rtlCol="0" anchor="t">
             <a:normAutofit/>
           </a:bodyPr>
           <a:lstStyle/>
           <a:p>
+            <a:pPr indent="0" marL="0">
+              <a:buNone/>
+            </a:pPr>
             <a:r>
               <a:rPr lang="en-US" sz="2100" dirty="0">
                 <a:solidFill>
-                  <a:srgbClr val="17364A"/>
-                </a:solidFill>
-                <a:latin typeface="Aptos" pitchFamily="34" charset="0"/>
-                <a:ea typeface="Aptos" pitchFamily="34" charset="-122"/>
-                <a:cs typeface="Aptos" pitchFamily="34" charset="-120"/>
-              </a:rPr>
-              <a:t>For AI use case intake, teams should add screening questions that identify whether the proposed project.</a:t>
+                  <a:srgbClr val="003A63"/>
+                </a:solidFill>
+                <a:latin typeface="Aptos" pitchFamily="34" charset="0"/>
+                <a:ea typeface="Aptos" pitchFamily="34" charset="-122"/>
+                <a:cs typeface="Aptos" pitchFamily="34" charset="-120"/>
+              </a:rPr>
+              <a:t>• For AI use case intake, teams should add screening questions that identify whether the.</a:t>
             </a:r>
             <a:endParaRPr lang="en-US" sz="2100" dirty="0"/>
           </a:p>
           <a:p>
+            <a:pPr indent="0" marL="0">
+              <a:buNone/>
+            </a:pPr>
             <a:r>
               <a:rPr lang="en-US" sz="2100" dirty="0">
                 <a:solidFill>
-                  <a:srgbClr val="17364A"/>
-                </a:solidFill>
-                <a:latin typeface="Aptos" pitchFamily="34" charset="0"/>
-                <a:ea typeface="Aptos" pitchFamily="34" charset="-122"/>
-                <a:cs typeface="Aptos" pitchFamily="34" charset="-120"/>
-              </a:rPr>
-              <a:t>The intake form should require the proposer to identify known Tribal partners, anticipated benefits,.</a:t>
+                  <a:srgbClr val="003A63"/>
+                </a:solidFill>
+                <a:latin typeface="Aptos" pitchFamily="34" charset="0"/>
+                <a:ea typeface="Aptos" pitchFamily="34" charset="-122"/>
+                <a:cs typeface="Aptos" pitchFamily="34" charset="-120"/>
+              </a:rPr>
+              <a:t>• The intake form should require the proposer to identify known Tribal partners, anticipated.</a:t>
             </a:r>
             <a:endParaRPr lang="en-US" sz="2100" dirty="0"/>
           </a:p>
           <a:p>
+            <a:pPr indent="0" marL="0">
+              <a:buNone/>
+            </a:pPr>
             <a:r>
               <a:rPr lang="en-US" sz="2100" dirty="0">
                 <a:solidFill>
-                  <a:srgbClr val="17364A"/>
-                </a:solidFill>
-                <a:latin typeface="Aptos" pitchFamily="34" charset="0"/>
-                <a:ea typeface="Aptos" pitchFamily="34" charset="-122"/>
-                <a:cs typeface="Aptos" pitchFamily="34" charset="-120"/>
-              </a:rPr>
-              <a:t>A project should not advance to procurement, model development, pilot testing, or public release until.</a:t>
+                  <a:srgbClr val="003A63"/>
+                </a:solidFill>
+                <a:latin typeface="Aptos" pitchFamily="34" charset="0"/>
+                <a:ea typeface="Aptos" pitchFamily="34" charset="-122"/>
+                <a:cs typeface="Aptos" pitchFamily="34" charset="-120"/>
+              </a:rPr>
+              <a:t>• A project should not advance to procurement, model development, pilot testing, or public.</a:t>
             </a:r>
             <a:endParaRPr lang="en-US" sz="2100" dirty="0"/>
           </a:p>
@@ -11745,17 +11918,17 @@
         </p:nvSpPr>
         <p:spPr>
           <a:xfrm>
-            <a:off x="7799832" y="1828800"/>
-            <a:ext cx="3145536" cy="685800"/>
-          </a:xfrm>
-          <a:prstGeom prst="rect">
-            <a:avLst/>
-          </a:prstGeom>
-          <a:noFill/>
-          <a:ln/>
-        </p:spPr>
-        <p:txBody>
-          <a:bodyPr wrap="square" lIns="0" tIns="0" rIns="0" bIns="0" rtlCol="0" anchor="t">
+            <a:off x="7799832" y="1801368"/>
+            <a:ext cx="3145536" cy="758952"/>
+          </a:xfrm>
+          <a:prstGeom prst="rect">
+            <a:avLst/>
+          </a:prstGeom>
+          <a:noFill/>
+          <a:ln/>
+        </p:spPr>
+        <p:txBody>
+          <a:bodyPr wrap="square" lIns="254" tIns="254" rIns="254" bIns="254" rtlCol="0" anchor="t">
             <a:normAutofit/>
           </a:bodyPr>
           <a:lstStyle/>
@@ -11764,7 +11937,7 @@
               <a:buNone/>
             </a:pPr>
             <a:r>
-              <a:rPr lang="en-US" sz="1550" dirty="0">
+              <a:rPr lang="en-US" sz="1320" dirty="0">
                 <a:solidFill>
                   <a:srgbClr val="17364A"/>
                 </a:solidFill>
@@ -11774,7 +11947,7 @@
               </a:rPr>
               <a:t>For AI use case intake, teams should add screening questions that identify whether the proposed project.</a:t>
             </a:r>
-            <a:endParaRPr lang="en-US" sz="1550" dirty="0"/>
+            <a:endParaRPr lang="en-US" sz="1320" dirty="0"/>
           </a:p>
         </p:txBody>
       </p:sp>
@@ -11862,13 +12035,16 @@
           <a:ln/>
         </p:spPr>
         <p:txBody>
-          <a:bodyPr wrap="square" lIns="254" tIns="254" rIns="254" bIns="254" rtlCol="0" anchor="t">
+          <a:bodyPr wrap="square" lIns="508" tIns="508" rIns="508" bIns="508" rtlCol="0" anchor="t">
             <a:normAutofit/>
           </a:bodyPr>
           <a:lstStyle/>
           <a:p>
-            <a:r>
-              <a:rPr lang="en-US" sz="1380" dirty="0">
+            <a:pPr indent="0" marL="0">
+              <a:buNone/>
+            </a:pPr>
+            <a:r>
+              <a:rPr lang="en-US" sz="1220" dirty="0">
                 <a:solidFill>
                   <a:srgbClr val="17364A"/>
                 </a:solidFill>
@@ -11876,13 +12052,16 @@
                 <a:ea typeface="Aptos" pitchFamily="34" charset="-122"/>
                 <a:cs typeface="Aptos" pitchFamily="34" charset="-120"/>
               </a:rPr>
-              <a:t>For AI use case intake, teams should add screening questions that identify whether the.</a:t>
-            </a:r>
-            <a:endParaRPr lang="en-US" sz="1380" dirty="0"/>
-          </a:p>
-          <a:p>
-            <a:r>
-              <a:rPr lang="en-US" sz="1380" dirty="0">
+              <a:t>For AI use case intake, teams should add screening questions that.</a:t>
+            </a:r>
+            <a:endParaRPr lang="en-US" sz="1220" dirty="0"/>
+          </a:p>
+          <a:p>
+            <a:pPr indent="0" marL="0">
+              <a:buNone/>
+            </a:pPr>
+            <a:r>
+              <a:rPr lang="en-US" sz="1220" dirty="0">
                 <a:solidFill>
                   <a:srgbClr val="17364A"/>
                 </a:solidFill>
@@ -11890,13 +12069,16 @@
                 <a:ea typeface="Aptos" pitchFamily="34" charset="-122"/>
                 <a:cs typeface="Aptos" pitchFamily="34" charset="-120"/>
               </a:rPr>
-              <a:t>The intake form should require the proposer to identify known Tribal partners, anticipated.</a:t>
-            </a:r>
-            <a:endParaRPr lang="en-US" sz="1380" dirty="0"/>
-          </a:p>
-          <a:p>
-            <a:r>
-              <a:rPr lang="en-US" sz="1380" dirty="0">
+              <a:t>The intake form should require the proposer to identify known.</a:t>
+            </a:r>
+            <a:endParaRPr lang="en-US" sz="1220" dirty="0"/>
+          </a:p>
+          <a:p>
+            <a:pPr indent="0" marL="0">
+              <a:buNone/>
+            </a:pPr>
+            <a:r>
+              <a:rPr lang="en-US" sz="1220" dirty="0">
                 <a:solidFill>
                   <a:srgbClr val="17364A"/>
                 </a:solidFill>
@@ -11904,9 +12086,9 @@
                 <a:ea typeface="Aptos" pitchFamily="34" charset="-122"/>
                 <a:cs typeface="Aptos" pitchFamily="34" charset="-120"/>
               </a:rPr>
-              <a:t>A project should not advance to procurement, model development, pilot testing, or public.</a:t>
-            </a:r>
-            <a:endParaRPr lang="en-US" sz="1380" dirty="0"/>
+              <a:t>A project should not advance to procurement, model development,.</a:t>
+            </a:r>
+            <a:endParaRPr lang="en-US" sz="1220" dirty="0"/>
           </a:p>
         </p:txBody>
       </p:sp>
@@ -11984,17 +12166,17 @@
         </p:nvSpPr>
         <p:spPr>
           <a:xfrm>
-            <a:off x="7799832" y="5001768"/>
-            <a:ext cx="3145536" cy="502920"/>
-          </a:xfrm>
-          <a:prstGeom prst="rect">
-            <a:avLst/>
-          </a:prstGeom>
-          <a:noFill/>
-          <a:ln/>
-        </p:spPr>
-        <p:txBody>
-          <a:bodyPr wrap="square" lIns="0" tIns="0" rIns="0" bIns="0" rtlCol="0" anchor="t">
+            <a:off x="7799832" y="4974336"/>
+            <a:ext cx="3145536" cy="576072"/>
+          </a:xfrm>
+          <a:prstGeom prst="rect">
+            <a:avLst/>
+          </a:prstGeom>
+          <a:noFill/>
+          <a:ln/>
+        </p:spPr>
+        <p:txBody>
+          <a:bodyPr wrap="square" lIns="254" tIns="254" rIns="254" bIns="254" rtlCol="0" anchor="t">
             <a:normAutofit/>
           </a:bodyPr>
           <a:lstStyle/>
@@ -12003,7 +12185,7 @@
               <a:buNone/>
             </a:pPr>
             <a:r>
-              <a:rPr lang="en-US" sz="1550" dirty="0">
+              <a:rPr lang="en-US" sz="1320" dirty="0">
                 <a:solidFill>
                   <a:srgbClr val="17364A"/>
                 </a:solidFill>
@@ -12011,9 +12193,9 @@
                 <a:ea typeface="Aptos" pitchFamily="34" charset="-122"/>
                 <a:cs typeface="Aptos" pitchFamily="34" charset="-120"/>
               </a:rPr>
-              <a:t>Translate this concept into clear decision rights, review steps, documentation expectations, and escalation paths before an AI-supported workflow is approved.</a:t>
-            </a:r>
-            <a:endParaRPr lang="en-US" sz="1550" dirty="0"/>
+              <a:t>Translate this concept into clear decision rights, review steps, documentation expectations, and escalation paths before.</a:t>
+            </a:r>
+            <a:endParaRPr lang="en-US" sz="1320" dirty="0"/>
           </a:p>
         </p:txBody>
       </p:sp>
@@ -12314,49 +12496,58 @@
           <a:ln/>
         </p:spPr>
         <p:txBody>
-          <a:bodyPr wrap="square" lIns="635" tIns="635" rIns="635" bIns="635" rtlCol="0" anchor="t">
+          <a:bodyPr wrap="square" lIns="1016" tIns="1016" rIns="1016" bIns="1016" rtlCol="0" anchor="t">
             <a:normAutofit/>
           </a:bodyPr>
           <a:lstStyle/>
           <a:p>
+            <a:pPr indent="0" marL="0">
+              <a:buNone/>
+            </a:pPr>
             <a:r>
               <a:rPr lang="en-US" sz="2100" dirty="0">
                 <a:solidFill>
-                  <a:srgbClr val="17364A"/>
-                </a:solidFill>
-                <a:latin typeface="Aptos" pitchFamily="34" charset="0"/>
-                <a:ea typeface="Aptos" pitchFamily="34" charset="-122"/>
-                <a:cs typeface="Aptos" pitchFamily="34" charset="-120"/>
-              </a:rPr>
-              <a:t>Before using AI with health data that may involve Tribal Nations or AI/AN participants, learners should.</a:t>
+                  <a:srgbClr val="003A63"/>
+                </a:solidFill>
+                <a:latin typeface="Aptos" pitchFamily="34" charset="0"/>
+                <a:ea typeface="Aptos" pitchFamily="34" charset="-122"/>
+                <a:cs typeface="Aptos" pitchFamily="34" charset="-120"/>
+              </a:rPr>
+              <a:t>• Before using AI with health data that may involve Tribal Nations or AI/AN participants,.</a:t>
             </a:r>
             <a:endParaRPr lang="en-US" sz="2100" dirty="0"/>
           </a:p>
           <a:p>
+            <a:pPr indent="0" marL="0">
+              <a:buNone/>
+            </a:pPr>
             <a:r>
               <a:rPr lang="en-US" sz="2100" dirty="0">
                 <a:solidFill>
-                  <a:srgbClr val="17364A"/>
-                </a:solidFill>
-                <a:latin typeface="Aptos" pitchFamily="34" charset="0"/>
-                <a:ea typeface="Aptos" pitchFamily="34" charset="-122"/>
-                <a:cs typeface="Aptos" pitchFamily="34" charset="-120"/>
-              </a:rPr>
-              <a:t>They should ask whether the project has identified affected Tribal Nations, relevant Tribal laws or.</a:t>
+                  <a:srgbClr val="003A63"/>
+                </a:solidFill>
+                <a:latin typeface="Aptos" pitchFamily="34" charset="0"/>
+                <a:ea typeface="Aptos" pitchFamily="34" charset="-122"/>
+                <a:cs typeface="Aptos" pitchFamily="34" charset="-120"/>
+              </a:rPr>
+              <a:t>• They should ask whether the project has identified affected Tribal Nations, relevant Tribal.</a:t>
             </a:r>
             <a:endParaRPr lang="en-US" sz="2100" dirty="0"/>
           </a:p>
           <a:p>
+            <a:pPr indent="0" marL="0">
+              <a:buNone/>
+            </a:pPr>
             <a:r>
               <a:rPr lang="en-US" sz="2100" dirty="0">
                 <a:solidFill>
-                  <a:srgbClr val="17364A"/>
-                </a:solidFill>
-                <a:latin typeface="Aptos" pitchFamily="34" charset="0"/>
-                <a:ea typeface="Aptos" pitchFamily="34" charset="-122"/>
-                <a:cs typeface="Aptos" pitchFamily="34" charset="-120"/>
-              </a:rPr>
-              <a:t>They should also consider whether the proposed AI use creates community benefit as defined by Tribal.</a:t>
+                  <a:srgbClr val="003A63"/>
+                </a:solidFill>
+                <a:latin typeface="Aptos" pitchFamily="34" charset="0"/>
+                <a:ea typeface="Aptos" pitchFamily="34" charset="-122"/>
+                <a:cs typeface="Aptos" pitchFamily="34" charset="-120"/>
+              </a:rPr>
+              <a:t>• They should also consider whether the proposed AI use creates community benefit as defined by.</a:t>
             </a:r>
             <a:endParaRPr lang="en-US" sz="2100" dirty="0"/>
           </a:p>
@@ -12436,17 +12627,17 @@
         </p:nvSpPr>
         <p:spPr>
           <a:xfrm>
-            <a:off x="7799832" y="1828800"/>
-            <a:ext cx="3145536" cy="685800"/>
-          </a:xfrm>
-          <a:prstGeom prst="rect">
-            <a:avLst/>
-          </a:prstGeom>
-          <a:noFill/>
-          <a:ln/>
-        </p:spPr>
-        <p:txBody>
-          <a:bodyPr wrap="square" lIns="0" tIns="0" rIns="0" bIns="0" rtlCol="0" anchor="t">
+            <a:off x="7799832" y="1801368"/>
+            <a:ext cx="3145536" cy="758952"/>
+          </a:xfrm>
+          <a:prstGeom prst="rect">
+            <a:avLst/>
+          </a:prstGeom>
+          <a:noFill/>
+          <a:ln/>
+        </p:spPr>
+        <p:txBody>
+          <a:bodyPr wrap="square" lIns="254" tIns="254" rIns="254" bIns="254" rtlCol="0" anchor="t">
             <a:normAutofit/>
           </a:bodyPr>
           <a:lstStyle/>
@@ -12455,7 +12646,7 @@
               <a:buNone/>
             </a:pPr>
             <a:r>
-              <a:rPr lang="en-US" sz="1550" dirty="0">
+              <a:rPr lang="en-US" sz="1320" dirty="0">
                 <a:solidFill>
                   <a:srgbClr val="17364A"/>
                 </a:solidFill>
@@ -12465,7 +12656,7 @@
               </a:rPr>
               <a:t>Before using AI with health data that may involve Tribal Nations or AI/AN participants, learners should.</a:t>
             </a:r>
-            <a:endParaRPr lang="en-US" sz="1550" dirty="0"/>
+            <a:endParaRPr lang="en-US" sz="1320" dirty="0"/>
           </a:p>
         </p:txBody>
       </p:sp>
@@ -12553,13 +12744,16 @@
           <a:ln/>
         </p:spPr>
         <p:txBody>
-          <a:bodyPr wrap="square" lIns="254" tIns="254" rIns="254" bIns="254" rtlCol="0" anchor="t">
+          <a:bodyPr wrap="square" lIns="508" tIns="508" rIns="508" bIns="508" rtlCol="0" anchor="t">
             <a:normAutofit/>
           </a:bodyPr>
           <a:lstStyle/>
           <a:p>
-            <a:r>
-              <a:rPr lang="en-US" sz="1380" dirty="0">
+            <a:pPr indent="0" marL="0">
+              <a:buNone/>
+            </a:pPr>
+            <a:r>
+              <a:rPr lang="en-US" sz="1220" dirty="0">
                 <a:solidFill>
                   <a:srgbClr val="17364A"/>
                 </a:solidFill>
@@ -12567,13 +12761,16 @@
                 <a:ea typeface="Aptos" pitchFamily="34" charset="-122"/>
                 <a:cs typeface="Aptos" pitchFamily="34" charset="-120"/>
               </a:rPr>
-              <a:t>Before using AI with health data that may involve Tribal Nations or AI/AN participants,.</a:t>
-            </a:r>
-            <a:endParaRPr lang="en-US" sz="1380" dirty="0"/>
-          </a:p>
-          <a:p>
-            <a:r>
-              <a:rPr lang="en-US" sz="1380" dirty="0">
+              <a:t>Before using AI with health data that may involve Tribal Nations.</a:t>
+            </a:r>
+            <a:endParaRPr lang="en-US" sz="1220" dirty="0"/>
+          </a:p>
+          <a:p>
+            <a:pPr indent="0" marL="0">
+              <a:buNone/>
+            </a:pPr>
+            <a:r>
+              <a:rPr lang="en-US" sz="1220" dirty="0">
                 <a:solidFill>
                   <a:srgbClr val="17364A"/>
                 </a:solidFill>
@@ -12581,13 +12778,16 @@
                 <a:ea typeface="Aptos" pitchFamily="34" charset="-122"/>
                 <a:cs typeface="Aptos" pitchFamily="34" charset="-120"/>
               </a:rPr>
-              <a:t>They should ask whether the project has identified affected Tribal Nations, relevant.</a:t>
-            </a:r>
-            <a:endParaRPr lang="en-US" sz="1380" dirty="0"/>
-          </a:p>
-          <a:p>
-            <a:r>
-              <a:rPr lang="en-US" sz="1380" dirty="0">
+              <a:t>They should ask whether the project has identified affected Tribal.</a:t>
+            </a:r>
+            <a:endParaRPr lang="en-US" sz="1220" dirty="0"/>
+          </a:p>
+          <a:p>
+            <a:pPr indent="0" marL="0">
+              <a:buNone/>
+            </a:pPr>
+            <a:r>
+              <a:rPr lang="en-US" sz="1220" dirty="0">
                 <a:solidFill>
                   <a:srgbClr val="17364A"/>
                 </a:solidFill>
@@ -12595,9 +12795,9 @@
                 <a:ea typeface="Aptos" pitchFamily="34" charset="-122"/>
                 <a:cs typeface="Aptos" pitchFamily="34" charset="-120"/>
               </a:rPr>
-              <a:t>They should also consider whether the proposed AI use creates community benefit as defined.</a:t>
-            </a:r>
-            <a:endParaRPr lang="en-US" sz="1380" dirty="0"/>
+              <a:t>They should also consider whether the proposed AI use creates.</a:t>
+            </a:r>
+            <a:endParaRPr lang="en-US" sz="1220" dirty="0"/>
           </a:p>
         </p:txBody>
       </p:sp>
@@ -12675,17 +12875,17 @@
         </p:nvSpPr>
         <p:spPr>
           <a:xfrm>
-            <a:off x="7799832" y="5001768"/>
-            <a:ext cx="3145536" cy="502920"/>
-          </a:xfrm>
-          <a:prstGeom prst="rect">
-            <a:avLst/>
-          </a:prstGeom>
-          <a:noFill/>
-          <a:ln/>
-        </p:spPr>
-        <p:txBody>
-          <a:bodyPr wrap="square" lIns="0" tIns="0" rIns="0" bIns="0" rtlCol="0" anchor="t">
+            <a:off x="7799832" y="4974336"/>
+            <a:ext cx="3145536" cy="576072"/>
+          </a:xfrm>
+          <a:prstGeom prst="rect">
+            <a:avLst/>
+          </a:prstGeom>
+          <a:noFill/>
+          <a:ln/>
+        </p:spPr>
+        <p:txBody>
+          <a:bodyPr wrap="square" lIns="254" tIns="254" rIns="254" bIns="254" rtlCol="0" anchor="t">
             <a:normAutofit/>
           </a:bodyPr>
           <a:lstStyle/>
@@ -12694,7 +12894,7 @@
               <a:buNone/>
             </a:pPr>
             <a:r>
-              <a:rPr lang="en-US" sz="1550" dirty="0">
+              <a:rPr lang="en-US" sz="1320" dirty="0">
                 <a:solidFill>
                   <a:srgbClr val="17364A"/>
                 </a:solidFill>
@@ -12702,9 +12902,9 @@
                 <a:ea typeface="Aptos" pitchFamily="34" charset="-122"/>
                 <a:cs typeface="Aptos" pitchFamily="34" charset="-120"/>
               </a:rPr>
-              <a:t>Translate this concept into clear decision rights, review steps, documentation expectations, and escalation paths before an AI-supported workflow is approved.</a:t>
-            </a:r>
-            <a:endParaRPr lang="en-US" sz="1550" dirty="0"/>
+              <a:t>Translate this concept into clear decision rights, review steps, documentation expectations, and escalation paths before.</a:t>
+            </a:r>
+            <a:endParaRPr lang="en-US" sz="1320" dirty="0"/>
           </a:p>
         </p:txBody>
       </p:sp>
@@ -13005,49 +13205,58 @@
           <a:ln/>
         </p:spPr>
         <p:txBody>
-          <a:bodyPr wrap="square" lIns="635" tIns="635" rIns="635" bIns="635" rtlCol="0" anchor="t">
+          <a:bodyPr wrap="square" lIns="1016" tIns="1016" rIns="1016" bIns="1016" rtlCol="0" anchor="t">
             <a:normAutofit/>
           </a:bodyPr>
           <a:lstStyle/>
           <a:p>
+            <a:pPr indent="0" marL="0">
+              <a:buNone/>
+            </a:pPr>
             <a:r>
               <a:rPr lang="en-US" sz="2100" dirty="0">
                 <a:solidFill>
-                  <a:srgbClr val="17364A"/>
-                </a:solidFill>
-                <a:latin typeface="Aptos" pitchFamily="34" charset="0"/>
-                <a:ea typeface="Aptos" pitchFamily="34" charset="-122"/>
-                <a:cs typeface="Aptos" pitchFamily="34" charset="-120"/>
-              </a:rPr>
-              <a:t>Select a proposed AI-supported public health project that could involve Tribal Nations, AI/AN.</a:t>
+                  <a:srgbClr val="003A63"/>
+                </a:solidFill>
+                <a:latin typeface="Aptos" pitchFamily="34" charset="0"/>
+                <a:ea typeface="Aptos" pitchFamily="34" charset="-122"/>
+                <a:cs typeface="Aptos" pitchFamily="34" charset="-120"/>
+              </a:rPr>
+              <a:t>• Select a proposed AI-supported public health project that could involve Tribal Nations, AI/AN.</a:t>
             </a:r>
             <a:endParaRPr lang="en-US" sz="2100" dirty="0"/>
           </a:p>
           <a:p>
+            <a:pPr indent="0" marL="0">
+              <a:buNone/>
+            </a:pPr>
             <a:r>
               <a:rPr lang="en-US" sz="2100" dirty="0">
                 <a:solidFill>
-                  <a:srgbClr val="17364A"/>
-                </a:solidFill>
-                <a:latin typeface="Aptos" pitchFamily="34" charset="0"/>
-                <a:ea typeface="Aptos" pitchFamily="34" charset="-122"/>
-                <a:cs typeface="Aptos" pitchFamily="34" charset="-120"/>
-              </a:rPr>
-              <a:t>The project may be a surveillance summary tool, predictive model, automated transcription workflow,.</a:t>
+                  <a:srgbClr val="003A63"/>
+                </a:solidFill>
+                <a:latin typeface="Aptos" pitchFamily="34" charset="0"/>
+                <a:ea typeface="Aptos" pitchFamily="34" charset="-122"/>
+                <a:cs typeface="Aptos" pitchFamily="34" charset="-120"/>
+              </a:rPr>
+              <a:t>• The project may be a surveillance summary tool, predictive model, automated transcription.</a:t>
             </a:r>
             <a:endParaRPr lang="en-US" sz="2100" dirty="0"/>
           </a:p>
           <a:p>
+            <a:pPr indent="0" marL="0">
+              <a:buNone/>
+            </a:pPr>
             <a:r>
               <a:rPr lang="en-US" sz="2100" dirty="0">
                 <a:solidFill>
-                  <a:srgbClr val="17364A"/>
-                </a:solidFill>
-                <a:latin typeface="Aptos" pitchFamily="34" charset="0"/>
-                <a:ea typeface="Aptos" pitchFamily="34" charset="-122"/>
-                <a:cs typeface="Aptos" pitchFamily="34" charset="-120"/>
-              </a:rPr>
-              <a:t>Complete a Tribal sovereignty and Indigenous data governance screening memo for the project.</a:t>
+                  <a:srgbClr val="003A63"/>
+                </a:solidFill>
+                <a:latin typeface="Aptos" pitchFamily="34" charset="0"/>
+                <a:ea typeface="Aptos" pitchFamily="34" charset="-122"/>
+                <a:cs typeface="Aptos" pitchFamily="34" charset="-120"/>
+              </a:rPr>
+              <a:t>• Complete a Tribal sovereignty and Indigenous data governance screening memo for the project.</a:t>
             </a:r>
             <a:endParaRPr lang="en-US" sz="2100" dirty="0"/>
           </a:p>
@@ -13127,17 +13336,17 @@
         </p:nvSpPr>
         <p:spPr>
           <a:xfrm>
-            <a:off x="7799832" y="1828800"/>
-            <a:ext cx="3145536" cy="685800"/>
-          </a:xfrm>
-          <a:prstGeom prst="rect">
-            <a:avLst/>
-          </a:prstGeom>
-          <a:noFill/>
-          <a:ln/>
-        </p:spPr>
-        <p:txBody>
-          <a:bodyPr wrap="square" lIns="0" tIns="0" rIns="0" bIns="0" rtlCol="0" anchor="t">
+            <a:off x="7799832" y="1801368"/>
+            <a:ext cx="3145536" cy="758952"/>
+          </a:xfrm>
+          <a:prstGeom prst="rect">
+            <a:avLst/>
+          </a:prstGeom>
+          <a:noFill/>
+          <a:ln/>
+        </p:spPr>
+        <p:txBody>
+          <a:bodyPr wrap="square" lIns="254" tIns="254" rIns="254" bIns="254" rtlCol="0" anchor="t">
             <a:normAutofit/>
           </a:bodyPr>
           <a:lstStyle/>
@@ -13146,7 +13355,7 @@
               <a:buNone/>
             </a:pPr>
             <a:r>
-              <a:rPr lang="en-US" sz="1550" dirty="0">
+              <a:rPr lang="en-US" sz="1320" dirty="0">
                 <a:solidFill>
                   <a:srgbClr val="17364A"/>
                 </a:solidFill>
@@ -13156,7 +13365,7 @@
               </a:rPr>
               <a:t>Select a proposed AI-supported public health project that could involve Tribal Nations, AI/AN.</a:t>
             </a:r>
-            <a:endParaRPr lang="en-US" sz="1550" dirty="0"/>
+            <a:endParaRPr lang="en-US" sz="1320" dirty="0"/>
           </a:p>
         </p:txBody>
       </p:sp>
@@ -13244,13 +13453,16 @@
           <a:ln/>
         </p:spPr>
         <p:txBody>
-          <a:bodyPr wrap="square" lIns="254" tIns="254" rIns="254" bIns="254" rtlCol="0" anchor="t">
+          <a:bodyPr wrap="square" lIns="508" tIns="508" rIns="508" bIns="508" rtlCol="0" anchor="t">
             <a:normAutofit/>
           </a:bodyPr>
           <a:lstStyle/>
           <a:p>
-            <a:r>
-              <a:rPr lang="en-US" sz="1380" dirty="0">
+            <a:pPr indent="0" marL="0">
+              <a:buNone/>
+            </a:pPr>
+            <a:r>
+              <a:rPr lang="en-US" sz="1220" dirty="0">
                 <a:solidFill>
                   <a:srgbClr val="17364A"/>
                 </a:solidFill>
@@ -13258,13 +13470,16 @@
                 <a:ea typeface="Aptos" pitchFamily="34" charset="-122"/>
                 <a:cs typeface="Aptos" pitchFamily="34" charset="-120"/>
               </a:rPr>
-              <a:t>Select a proposed AI-supported public health project that could involve Tribal Nations,.</a:t>
-            </a:r>
-            <a:endParaRPr lang="en-US" sz="1380" dirty="0"/>
-          </a:p>
-          <a:p>
-            <a:r>
-              <a:rPr lang="en-US" sz="1380" dirty="0">
+              <a:t>Select a proposed AI-supported public health project that could.</a:t>
+            </a:r>
+            <a:endParaRPr lang="en-US" sz="1220" dirty="0"/>
+          </a:p>
+          <a:p>
+            <a:pPr indent="0" marL="0">
+              <a:buNone/>
+            </a:pPr>
+            <a:r>
+              <a:rPr lang="en-US" sz="1220" dirty="0">
                 <a:solidFill>
                   <a:srgbClr val="17364A"/>
                 </a:solidFill>
@@ -13272,13 +13487,16 @@
                 <a:ea typeface="Aptos" pitchFamily="34" charset="-122"/>
                 <a:cs typeface="Aptos" pitchFamily="34" charset="-120"/>
               </a:rPr>
-              <a:t>The project may be a surveillance summary tool, predictive model, automated transcription.</a:t>
-            </a:r>
-            <a:endParaRPr lang="en-US" sz="1380" dirty="0"/>
-          </a:p>
-          <a:p>
-            <a:r>
-              <a:rPr lang="en-US" sz="1380" dirty="0">
+              <a:t>The project may be a surveillance summary tool, predictive model,.</a:t>
+            </a:r>
+            <a:endParaRPr lang="en-US" sz="1220" dirty="0"/>
+          </a:p>
+          <a:p>
+            <a:pPr indent="0" marL="0">
+              <a:buNone/>
+            </a:pPr>
+            <a:r>
+              <a:rPr lang="en-US" sz="1220" dirty="0">
                 <a:solidFill>
                   <a:srgbClr val="17364A"/>
                 </a:solidFill>
@@ -13286,9 +13504,9 @@
                 <a:ea typeface="Aptos" pitchFamily="34" charset="-122"/>
                 <a:cs typeface="Aptos" pitchFamily="34" charset="-120"/>
               </a:rPr>
-              <a:t>The memo should identify the public health purpose, data sources, affected communities,.</a:t>
-            </a:r>
-            <a:endParaRPr lang="en-US" sz="1380" dirty="0"/>
+              <a:t>The memo should identify the public health purpose, data sources,.</a:t>
+            </a:r>
+            <a:endParaRPr lang="en-US" sz="1220" dirty="0"/>
           </a:p>
         </p:txBody>
       </p:sp>
@@ -13366,17 +13584,17 @@
         </p:nvSpPr>
         <p:spPr>
           <a:xfrm>
-            <a:off x="7799832" y="5001768"/>
-            <a:ext cx="3145536" cy="502920"/>
-          </a:xfrm>
-          <a:prstGeom prst="rect">
-            <a:avLst/>
-          </a:prstGeom>
-          <a:noFill/>
-          <a:ln/>
-        </p:spPr>
-        <p:txBody>
-          <a:bodyPr wrap="square" lIns="0" tIns="0" rIns="0" bIns="0" rtlCol="0" anchor="t">
+            <a:off x="7799832" y="4974336"/>
+            <a:ext cx="3145536" cy="576072"/>
+          </a:xfrm>
+          <a:prstGeom prst="rect">
+            <a:avLst/>
+          </a:prstGeom>
+          <a:noFill/>
+          <a:ln/>
+        </p:spPr>
+        <p:txBody>
+          <a:bodyPr wrap="square" lIns="254" tIns="254" rIns="254" bIns="254" rtlCol="0" anchor="t">
             <a:normAutofit/>
           </a:bodyPr>
           <a:lstStyle/>
@@ -13385,7 +13603,7 @@
               <a:buNone/>
             </a:pPr>
             <a:r>
-              <a:rPr lang="en-US" sz="1550" dirty="0">
+              <a:rPr lang="en-US" sz="1320" dirty="0">
                 <a:solidFill>
                   <a:srgbClr val="17364A"/>
                 </a:solidFill>
@@ -13393,9 +13611,9 @@
                 <a:ea typeface="Aptos" pitchFamily="34" charset="-122"/>
                 <a:cs typeface="Aptos" pitchFamily="34" charset="-120"/>
               </a:rPr>
-              <a:t>Use the assignment to test whether you can explain the concept, apply it to a realistic public health situation, and identify what would need review before the work moves forward.</a:t>
-            </a:r>
-            <a:endParaRPr lang="en-US" sz="1550" dirty="0"/>
+              <a:t>Use the assignment to test whether you can explain the concept, apply it to a realistic public health situation, and.</a:t>
+            </a:r>
+            <a:endParaRPr lang="en-US" sz="1320" dirty="0"/>
           </a:p>
         </p:txBody>
       </p:sp>
@@ -13696,49 +13914,58 @@
           <a:ln/>
         </p:spPr>
         <p:txBody>
-          <a:bodyPr wrap="square" lIns="635" tIns="635" rIns="635" bIns="635" rtlCol="0" anchor="t">
+          <a:bodyPr wrap="square" lIns="1016" tIns="1016" rIns="1016" bIns="1016" rtlCol="0" anchor="t">
             <a:normAutofit/>
           </a:bodyPr>
           <a:lstStyle/>
           <a:p>
+            <a:pPr indent="0" marL="0">
+              <a:buNone/>
+            </a:pPr>
             <a:r>
               <a:rPr lang="en-US" sz="2100" dirty="0">
                 <a:solidFill>
-                  <a:srgbClr val="17364A"/>
-                </a:solidFill>
-                <a:latin typeface="Aptos" pitchFamily="34" charset="0"/>
-                <a:ea typeface="Aptos" pitchFamily="34" charset="-122"/>
-                <a:cs typeface="Aptos" pitchFamily="34" charset="-120"/>
-              </a:rPr>
-              <a:t>The expected artifact is a Tribal Sovereignty and Indigenous Data Governance Screening Memo for one.</a:t>
+                  <a:srgbClr val="003A63"/>
+                </a:solidFill>
+                <a:latin typeface="Aptos" pitchFamily="34" charset="0"/>
+                <a:ea typeface="Aptos" pitchFamily="34" charset="-122"/>
+                <a:cs typeface="Aptos" pitchFamily="34" charset="-120"/>
+              </a:rPr>
+              <a:t>• The expected artifact is a Tribal Sovereignty and Indigenous Data Governance Screening Memo.</a:t>
             </a:r>
             <a:endParaRPr lang="en-US" sz="2100" dirty="0"/>
           </a:p>
           <a:p>
+            <a:pPr indent="0" marL="0">
+              <a:buNone/>
+            </a:pPr>
             <a:r>
               <a:rPr lang="en-US" sz="2100" dirty="0">
                 <a:solidFill>
-                  <a:srgbClr val="17364A"/>
-                </a:solidFill>
-                <a:latin typeface="Aptos" pitchFamily="34" charset="0"/>
-                <a:ea typeface="Aptos" pitchFamily="34" charset="-122"/>
-                <a:cs typeface="Aptos" pitchFamily="34" charset="-120"/>
-              </a:rPr>
-              <a:t>The memo should be complete enough for a supervisor, AI governance body, Tribal liaison, legal counsel,.</a:t>
+                  <a:srgbClr val="003A63"/>
+                </a:solidFill>
+                <a:latin typeface="Aptos" pitchFamily="34" charset="0"/>
+                <a:ea typeface="Aptos" pitchFamily="34" charset="-122"/>
+                <a:cs typeface="Aptos" pitchFamily="34" charset="-120"/>
+              </a:rPr>
+              <a:t>• The memo should be complete enough for a supervisor, AI governance body, Tribal liaison, legal.</a:t>
             </a:r>
             <a:endParaRPr lang="en-US" sz="2100" dirty="0"/>
           </a:p>
           <a:p>
+            <a:pPr indent="0" marL="0">
+              <a:buNone/>
+            </a:pPr>
             <a:r>
               <a:rPr lang="en-US" sz="2100" dirty="0">
                 <a:solidFill>
-                  <a:srgbClr val="17364A"/>
-                </a:solidFill>
-                <a:latin typeface="Aptos" pitchFamily="34" charset="0"/>
-                <a:ea typeface="Aptos" pitchFamily="34" charset="-122"/>
-                <a:cs typeface="Aptos" pitchFamily="34" charset="-120"/>
-              </a:rPr>
-              <a:t>It should distinguish known facts from assumptions and identify what cannot be decided until.</a:t>
+                  <a:srgbClr val="003A63"/>
+                </a:solidFill>
+                <a:latin typeface="Aptos" pitchFamily="34" charset="0"/>
+                <a:ea typeface="Aptos" pitchFamily="34" charset="-122"/>
+                <a:cs typeface="Aptos" pitchFamily="34" charset="-120"/>
+              </a:rPr>
+              <a:t>• It should distinguish known facts from assumptions and identify what cannot be decided until.</a:t>
             </a:r>
             <a:endParaRPr lang="en-US" sz="2100" dirty="0"/>
           </a:p>
@@ -13818,17 +14045,17 @@
         </p:nvSpPr>
         <p:spPr>
           <a:xfrm>
-            <a:off x="7799832" y="1828800"/>
-            <a:ext cx="3145536" cy="685800"/>
-          </a:xfrm>
-          <a:prstGeom prst="rect">
-            <a:avLst/>
-          </a:prstGeom>
-          <a:noFill/>
-          <a:ln/>
-        </p:spPr>
-        <p:txBody>
-          <a:bodyPr wrap="square" lIns="0" tIns="0" rIns="0" bIns="0" rtlCol="0" anchor="t">
+            <a:off x="7799832" y="1801368"/>
+            <a:ext cx="3145536" cy="758952"/>
+          </a:xfrm>
+          <a:prstGeom prst="rect">
+            <a:avLst/>
+          </a:prstGeom>
+          <a:noFill/>
+          <a:ln/>
+        </p:spPr>
+        <p:txBody>
+          <a:bodyPr wrap="square" lIns="254" tIns="254" rIns="254" bIns="254" rtlCol="0" anchor="t">
             <a:normAutofit/>
           </a:bodyPr>
           <a:lstStyle/>
@@ -13837,7 +14064,7 @@
               <a:buNone/>
             </a:pPr>
             <a:r>
-              <a:rPr lang="en-US" sz="1550" dirty="0">
+              <a:rPr lang="en-US" sz="1320" dirty="0">
                 <a:solidFill>
                   <a:srgbClr val="17364A"/>
                 </a:solidFill>
@@ -13847,7 +14074,7 @@
               </a:rPr>
               <a:t>The expected artifact is a Tribal Sovereignty and Indigenous Data Governance Screening Memo for one.</a:t>
             </a:r>
-            <a:endParaRPr lang="en-US" sz="1550" dirty="0"/>
+            <a:endParaRPr lang="en-US" sz="1320" dirty="0"/>
           </a:p>
         </p:txBody>
       </p:sp>
@@ -13935,13 +14162,16 @@
           <a:ln/>
         </p:spPr>
         <p:txBody>
-          <a:bodyPr wrap="square" lIns="254" tIns="254" rIns="254" bIns="254" rtlCol="0" anchor="t">
+          <a:bodyPr wrap="square" lIns="508" tIns="508" rIns="508" bIns="508" rtlCol="0" anchor="t">
             <a:normAutofit/>
           </a:bodyPr>
           <a:lstStyle/>
           <a:p>
-            <a:r>
-              <a:rPr lang="en-US" sz="1380" dirty="0">
+            <a:pPr indent="0" marL="0">
+              <a:buNone/>
+            </a:pPr>
+            <a:r>
+              <a:rPr lang="en-US" sz="1220" dirty="0">
                 <a:solidFill>
                   <a:srgbClr val="17364A"/>
                 </a:solidFill>
@@ -13949,13 +14179,16 @@
                 <a:ea typeface="Aptos" pitchFamily="34" charset="-122"/>
                 <a:cs typeface="Aptos" pitchFamily="34" charset="-120"/>
               </a:rPr>
-              <a:t>The expected artifact is a Tribal Sovereignty and Indigenous Data Governance Screening.</a:t>
-            </a:r>
-            <a:endParaRPr lang="en-US" sz="1380" dirty="0"/>
-          </a:p>
-          <a:p>
-            <a:r>
-              <a:rPr lang="en-US" sz="1380" dirty="0">
+              <a:t>The expected artifact is a Tribal Sovereignty and Indigenous Data.</a:t>
+            </a:r>
+            <a:endParaRPr lang="en-US" sz="1220" dirty="0"/>
+          </a:p>
+          <a:p>
+            <a:pPr indent="0" marL="0">
+              <a:buNone/>
+            </a:pPr>
+            <a:r>
+              <a:rPr lang="en-US" sz="1220" dirty="0">
                 <a:solidFill>
                   <a:srgbClr val="17364A"/>
                 </a:solidFill>
@@ -13963,13 +14196,16 @@
                 <a:ea typeface="Aptos" pitchFamily="34" charset="-122"/>
                 <a:cs typeface="Aptos" pitchFamily="34" charset="-120"/>
               </a:rPr>
-              <a:t>The memo should be complete enough for a supervisor, AI governance body, Tribal liaison,.</a:t>
-            </a:r>
-            <a:endParaRPr lang="en-US" sz="1380" dirty="0"/>
-          </a:p>
-          <a:p>
-            <a:r>
-              <a:rPr lang="en-US" sz="1380" dirty="0">
+              <a:t>The memo should be complete enough for a supervisor, AI governance.</a:t>
+            </a:r>
+            <a:endParaRPr lang="en-US" sz="1220" dirty="0"/>
+          </a:p>
+          <a:p>
+            <a:pPr indent="0" marL="0">
+              <a:buNone/>
+            </a:pPr>
+            <a:r>
+              <a:rPr lang="en-US" sz="1220" dirty="0">
                 <a:solidFill>
                   <a:srgbClr val="17364A"/>
                 </a:solidFill>
@@ -13977,9 +14213,9 @@
                 <a:ea typeface="Aptos" pitchFamily="34" charset="-122"/>
                 <a:cs typeface="Aptos" pitchFamily="34" charset="-120"/>
               </a:rPr>
-              <a:t>It should distinguish known facts from assumptions and identify what cannot be decided.</a:t>
-            </a:r>
-            <a:endParaRPr lang="en-US" sz="1380" dirty="0"/>
+              <a:t>It should distinguish known facts from assumptions and identify.</a:t>
+            </a:r>
+            <a:endParaRPr lang="en-US" sz="1220" dirty="0"/>
           </a:p>
         </p:txBody>
       </p:sp>
@@ -14057,17 +14293,17 @@
         </p:nvSpPr>
         <p:spPr>
           <a:xfrm>
-            <a:off x="7799832" y="5001768"/>
-            <a:ext cx="3145536" cy="502920"/>
-          </a:xfrm>
-          <a:prstGeom prst="rect">
-            <a:avLst/>
-          </a:prstGeom>
-          <a:noFill/>
-          <a:ln/>
-        </p:spPr>
-        <p:txBody>
-          <a:bodyPr wrap="square" lIns="0" tIns="0" rIns="0" bIns="0" rtlCol="0" anchor="t">
+            <a:off x="7799832" y="4974336"/>
+            <a:ext cx="3145536" cy="576072"/>
+          </a:xfrm>
+          <a:prstGeom prst="rect">
+            <a:avLst/>
+          </a:prstGeom>
+          <a:noFill/>
+          <a:ln/>
+        </p:spPr>
+        <p:txBody>
+          <a:bodyPr wrap="square" lIns="254" tIns="254" rIns="254" bIns="254" rtlCol="0" anchor="t">
             <a:normAutofit/>
           </a:bodyPr>
           <a:lstStyle/>
@@ -14076,7 +14312,7 @@
               <a:buNone/>
             </a:pPr>
             <a:r>
-              <a:rPr lang="en-US" sz="1550" dirty="0">
+              <a:rPr lang="en-US" sz="1320" dirty="0">
                 <a:solidFill>
                   <a:srgbClr val="17364A"/>
                 </a:solidFill>
@@ -14084,9 +14320,9 @@
                 <a:ea typeface="Aptos" pitchFamily="34" charset="-122"/>
                 <a:cs typeface="Aptos" pitchFamily="34" charset="-120"/>
               </a:rPr>
-              <a:t>Translate this concept into clear decision rights, review steps, documentation expectations, and escalation paths before an AI-supported workflow is approved.</a:t>
-            </a:r>
-            <a:endParaRPr lang="en-US" sz="1550" dirty="0"/>
+              <a:t>Translate this concept into clear decision rights, review steps, documentation expectations, and escalation paths before.</a:t>
+            </a:r>
+            <a:endParaRPr lang="en-US" sz="1320" dirty="0"/>
           </a:p>
         </p:txBody>
       </p:sp>
@@ -14387,49 +14623,58 @@
           <a:ln/>
         </p:spPr>
         <p:txBody>
-          <a:bodyPr wrap="square" lIns="635" tIns="635" rIns="635" bIns="635" rtlCol="0" anchor="t">
+          <a:bodyPr wrap="square" lIns="1016" tIns="1016" rIns="1016" bIns="1016" rtlCol="0" anchor="t">
             <a:normAutofit/>
           </a:bodyPr>
           <a:lstStyle/>
           <a:p>
+            <a:pPr indent="0" marL="0">
+              <a:buNone/>
+            </a:pPr>
             <a:r>
               <a:rPr lang="en-US" sz="2100" dirty="0">
                 <a:solidFill>
-                  <a:srgbClr val="17364A"/>
-                </a:solidFill>
-                <a:latin typeface="Aptos" pitchFamily="34" charset="0"/>
-                <a:ea typeface="Aptos" pitchFamily="34" charset="-122"/>
-                <a:cs typeface="Aptos" pitchFamily="34" charset="-120"/>
-              </a:rPr>
-              <a:t>Global Indigenous Data Alliance.</a:t>
+                  <a:srgbClr val="003A63"/>
+                </a:solidFill>
+                <a:latin typeface="Aptos" pitchFamily="34" charset="0"/>
+                <a:ea typeface="Aptos" pitchFamily="34" charset="-122"/>
+                <a:cs typeface="Aptos" pitchFamily="34" charset="-120"/>
+              </a:rPr>
+              <a:t>• Global Indigenous Data Alliance.</a:t>
             </a:r>
             <a:endParaRPr lang="en-US" sz="2100" dirty="0"/>
           </a:p>
           <a:p>
+            <a:pPr indent="0" marL="0">
+              <a:buNone/>
+            </a:pPr>
             <a:r>
               <a:rPr lang="en-US" sz="2100" dirty="0">
                 <a:solidFill>
-                  <a:srgbClr val="17364A"/>
-                </a:solidFill>
-                <a:latin typeface="Aptos" pitchFamily="34" charset="0"/>
-                <a:ea typeface="Aptos" pitchFamily="34" charset="-122"/>
-                <a:cs typeface="Aptos" pitchFamily="34" charset="-120"/>
-              </a:rPr>
-              <a:t>CARE Principles for Indigenous Data Governance. https://www.gida-global.org/care</a:t>
+                  <a:srgbClr val="003A63"/>
+                </a:solidFill>
+                <a:latin typeface="Aptos" pitchFamily="34" charset="0"/>
+                <a:ea typeface="Aptos" pitchFamily="34" charset="-122"/>
+                <a:cs typeface="Aptos" pitchFamily="34" charset="-120"/>
+              </a:rPr>
+              <a:t>• CARE Principles for Indigenous Data Governance. https://www.gida-global.org/care</a:t>
             </a:r>
             <a:endParaRPr lang="en-US" sz="2100" dirty="0"/>
           </a:p>
           <a:p>
+            <a:pPr indent="0" marL="0">
+              <a:buNone/>
+            </a:pPr>
             <a:r>
               <a:rPr lang="en-US" sz="2100" dirty="0">
                 <a:solidFill>
-                  <a:srgbClr val="17364A"/>
-                </a:solidFill>
-                <a:latin typeface="Aptos" pitchFamily="34" charset="0"/>
-                <a:ea typeface="Aptos" pitchFamily="34" charset="-122"/>
-                <a:cs typeface="Aptos" pitchFamily="34" charset="-120"/>
-              </a:rPr>
-              <a:t>National Institutes of Health.</a:t>
+                  <a:srgbClr val="003A63"/>
+                </a:solidFill>
+                <a:latin typeface="Aptos" pitchFamily="34" charset="0"/>
+                <a:ea typeface="Aptos" pitchFamily="34" charset="-122"/>
+                <a:cs typeface="Aptos" pitchFamily="34" charset="-120"/>
+              </a:rPr>
+              <a:t>• National Institutes of Health.</a:t>
             </a:r>
             <a:endParaRPr lang="en-US" sz="2100" dirty="0"/>
           </a:p>
@@ -14509,17 +14754,17 @@
         </p:nvSpPr>
         <p:spPr>
           <a:xfrm>
-            <a:off x="7799832" y="1828800"/>
-            <a:ext cx="3145536" cy="685800"/>
-          </a:xfrm>
-          <a:prstGeom prst="rect">
-            <a:avLst/>
-          </a:prstGeom>
-          <a:noFill/>
-          <a:ln/>
-        </p:spPr>
-        <p:txBody>
-          <a:bodyPr wrap="square" lIns="0" tIns="0" rIns="0" bIns="0" rtlCol="0" anchor="t">
+            <a:off x="7799832" y="1801368"/>
+            <a:ext cx="3145536" cy="758952"/>
+          </a:xfrm>
+          <a:prstGeom prst="rect">
+            <a:avLst/>
+          </a:prstGeom>
+          <a:noFill/>
+          <a:ln/>
+        </p:spPr>
+        <p:txBody>
+          <a:bodyPr wrap="square" lIns="254" tIns="254" rIns="254" bIns="254" rtlCol="0" anchor="t">
             <a:normAutofit/>
           </a:bodyPr>
           <a:lstStyle/>
@@ -14528,7 +14773,7 @@
               <a:buNone/>
             </a:pPr>
             <a:r>
-              <a:rPr lang="en-US" sz="1550" dirty="0">
+              <a:rPr lang="en-US" sz="1320" dirty="0">
                 <a:solidFill>
                   <a:srgbClr val="17364A"/>
                 </a:solidFill>
@@ -14538,7 +14783,7 @@
               </a:rPr>
               <a:t>Global Indigenous Data Alliance.</a:t>
             </a:r>
-            <a:endParaRPr lang="en-US" sz="1550" dirty="0"/>
+            <a:endParaRPr lang="en-US" sz="1320" dirty="0"/>
           </a:p>
         </p:txBody>
       </p:sp>
@@ -14626,13 +14871,16 @@
           <a:ln/>
         </p:spPr>
         <p:txBody>
-          <a:bodyPr wrap="square" lIns="254" tIns="254" rIns="254" bIns="254" rtlCol="0" anchor="t">
+          <a:bodyPr wrap="square" lIns="508" tIns="508" rIns="508" bIns="508" rtlCol="0" anchor="t">
             <a:normAutofit/>
           </a:bodyPr>
           <a:lstStyle/>
           <a:p>
-            <a:r>
-              <a:rPr lang="en-US" sz="1380" dirty="0">
+            <a:pPr indent="0" marL="0">
+              <a:buNone/>
+            </a:pPr>
+            <a:r>
+              <a:rPr lang="en-US" sz="1220" dirty="0">
                 <a:solidFill>
                   <a:srgbClr val="17364A"/>
                 </a:solidFill>
@@ -14640,13 +14888,16 @@
                 <a:ea typeface="Aptos" pitchFamily="34" charset="-122"/>
                 <a:cs typeface="Aptos" pitchFamily="34" charset="-120"/>
               </a:rPr>
-              <a:t>NOT-OD-22-214: Supplemental Information to the NIH Policy for Data Management and Sharing:.</a:t>
-            </a:r>
-            <a:endParaRPr lang="en-US" sz="1380" dirty="0"/>
-          </a:p>
-          <a:p>
-            <a:r>
-              <a:rPr lang="en-US" sz="1380" dirty="0">
+              <a:t>NOT-OD-22-214: Supplemental Information to the NIH Policy for Data.</a:t>
+            </a:r>
+            <a:endParaRPr lang="en-US" sz="1220" dirty="0"/>
+          </a:p>
+          <a:p>
+            <a:pPr indent="0" marL="0">
+              <a:buNone/>
+            </a:pPr>
+            <a:r>
+              <a:rPr lang="en-US" sz="1220" dirty="0">
                 <a:solidFill>
                   <a:srgbClr val="17364A"/>
                 </a:solidFill>
@@ -14656,11 +14907,14 @@
               </a:rPr>
               <a:t>National Institutes of Health Tribal Health Research Office.</a:t>
             </a:r>
-            <a:endParaRPr lang="en-US" sz="1380" dirty="0"/>
-          </a:p>
-          <a:p>
-            <a:r>
-              <a:rPr lang="en-US" sz="1380" dirty="0">
+            <a:endParaRPr lang="en-US" sz="1220" dirty="0"/>
+          </a:p>
+          <a:p>
+            <a:pPr indent="0" marL="0">
+              <a:buNone/>
+            </a:pPr>
+            <a:r>
+              <a:rPr lang="en-US" sz="1220" dirty="0">
                 <a:solidFill>
                   <a:srgbClr val="17364A"/>
                 </a:solidFill>
@@ -14670,7 +14924,7 @@
               </a:rPr>
               <a:t>Tribal Health Research Office resources. https://dpcpsi.nih.gov/thro</a:t>
             </a:r>
-            <a:endParaRPr lang="en-US" sz="1380" dirty="0"/>
+            <a:endParaRPr lang="en-US" sz="1220" dirty="0"/>
           </a:p>
         </p:txBody>
       </p:sp>
@@ -14748,17 +15002,17 @@
         </p:nvSpPr>
         <p:spPr>
           <a:xfrm>
-            <a:off x="7799832" y="5001768"/>
-            <a:ext cx="3145536" cy="502920"/>
-          </a:xfrm>
-          <a:prstGeom prst="rect">
-            <a:avLst/>
-          </a:prstGeom>
-          <a:noFill/>
-          <a:ln/>
-        </p:spPr>
-        <p:txBody>
-          <a:bodyPr wrap="square" lIns="0" tIns="0" rIns="0" bIns="0" rtlCol="0" anchor="t">
+            <a:off x="7799832" y="4974336"/>
+            <a:ext cx="3145536" cy="576072"/>
+          </a:xfrm>
+          <a:prstGeom prst="rect">
+            <a:avLst/>
+          </a:prstGeom>
+          <a:noFill/>
+          <a:ln/>
+        </p:spPr>
+        <p:txBody>
+          <a:bodyPr wrap="square" lIns="254" tIns="254" rIns="254" bIns="254" rtlCol="0" anchor="t">
             <a:normAutofit/>
           </a:bodyPr>
           <a:lstStyle/>
@@ -14767,7 +15021,7 @@
               <a:buNone/>
             </a:pPr>
             <a:r>
-              <a:rPr lang="en-US" sz="1550" dirty="0">
+              <a:rPr lang="en-US" sz="1320" dirty="0">
                 <a:solidFill>
                   <a:srgbClr val="17364A"/>
                 </a:solidFill>
@@ -14775,9 +15029,9 @@
                 <a:ea typeface="Aptos" pitchFamily="34" charset="-122"/>
                 <a:cs typeface="Aptos" pitchFamily="34" charset="-120"/>
               </a:rPr>
-              <a:t>Translate this concept into clear decision rights, review steps, documentation expectations, and escalation paths before an AI-supported workflow is approved.</a:t>
-            </a:r>
-            <a:endParaRPr lang="en-US" sz="1550" dirty="0"/>
+              <a:t>Translate this concept into clear decision rights, review steps, documentation expectations, and escalation paths before.</a:t>
+            </a:r>
+            <a:endParaRPr lang="en-US" sz="1320" dirty="0"/>
           </a:p>
         </p:txBody>
       </p:sp>
@@ -15078,49 +15332,58 @@
           <a:ln/>
         </p:spPr>
         <p:txBody>
-          <a:bodyPr wrap="square" lIns="635" tIns="635" rIns="635" bIns="635" rtlCol="0" anchor="t">
+          <a:bodyPr wrap="square" lIns="1016" tIns="1016" rIns="1016" bIns="1016" rtlCol="0" anchor="t">
             <a:normAutofit/>
           </a:bodyPr>
           <a:lstStyle/>
           <a:p>
+            <a:pPr indent="0" marL="0">
+              <a:buNone/>
+            </a:pPr>
             <a:r>
               <a:rPr lang="en-US" sz="2100" dirty="0">
                 <a:solidFill>
-                  <a:srgbClr val="17364A"/>
-                </a:solidFill>
-                <a:latin typeface="Aptos" pitchFamily="34" charset="0"/>
-                <a:ea typeface="Aptos" pitchFamily="34" charset="-122"/>
-                <a:cs typeface="Aptos" pitchFamily="34" charset="-120"/>
-              </a:rPr>
-              <a:t>United States Indigenous Data Sovereignty Network.</a:t>
+                  <a:srgbClr val="003A63"/>
+                </a:solidFill>
+                <a:latin typeface="Aptos" pitchFamily="34" charset="0"/>
+                <a:ea typeface="Aptos" pitchFamily="34" charset="-122"/>
+                <a:cs typeface="Aptos" pitchFamily="34" charset="-120"/>
+              </a:rPr>
+              <a:t>• United States Indigenous Data Sovereignty Network.</a:t>
             </a:r>
             <a:endParaRPr lang="en-US" sz="2100" dirty="0"/>
           </a:p>
           <a:p>
+            <a:pPr indent="0" marL="0">
+              <a:buNone/>
+            </a:pPr>
             <a:r>
               <a:rPr lang="en-US" sz="2100" dirty="0">
                 <a:solidFill>
-                  <a:srgbClr val="17364A"/>
-                </a:solidFill>
-                <a:latin typeface="Aptos" pitchFamily="34" charset="0"/>
-                <a:ea typeface="Aptos" pitchFamily="34" charset="-122"/>
-                <a:cs typeface="Aptos" pitchFamily="34" charset="-120"/>
-              </a:rPr>
-              <a:t>Resources and information on Indigenous Data Sovereignty. https://usindigenousdata.org/</a:t>
+                  <a:srgbClr val="003A63"/>
+                </a:solidFill>
+                <a:latin typeface="Aptos" pitchFamily="34" charset="0"/>
+                <a:ea typeface="Aptos" pitchFamily="34" charset="-122"/>
+                <a:cs typeface="Aptos" pitchFamily="34" charset="-120"/>
+              </a:rPr>
+              <a:t>• Resources and information on Indigenous Data Sovereignty. https://usindigenousdata.org/</a:t>
             </a:r>
             <a:endParaRPr lang="en-US" sz="2100" dirty="0"/>
           </a:p>
           <a:p>
+            <a:pPr indent="0" marL="0">
+              <a:buNone/>
+            </a:pPr>
             <a:r>
               <a:rPr lang="en-US" sz="2100" dirty="0">
                 <a:solidFill>
-                  <a:srgbClr val="17364A"/>
-                </a:solidFill>
-                <a:latin typeface="Aptos" pitchFamily="34" charset="0"/>
-                <a:ea typeface="Aptos" pitchFamily="34" charset="-122"/>
-                <a:cs typeface="Aptos" pitchFamily="34" charset="-120"/>
-              </a:rPr>
-              <a:t>All of Us Research Program.</a:t>
+                  <a:srgbClr val="003A63"/>
+                </a:solidFill>
+                <a:latin typeface="Aptos" pitchFamily="34" charset="0"/>
+                <a:ea typeface="Aptos" pitchFamily="34" charset="-122"/>
+                <a:cs typeface="Aptos" pitchFamily="34" charset="-120"/>
+              </a:rPr>
+              <a:t>• All of Us Research Program.</a:t>
             </a:r>
             <a:endParaRPr lang="en-US" sz="2100" dirty="0"/>
           </a:p>
@@ -15200,17 +15463,17 @@
         </p:nvSpPr>
         <p:spPr>
           <a:xfrm>
-            <a:off x="7799832" y="1828800"/>
-            <a:ext cx="3145536" cy="685800"/>
-          </a:xfrm>
-          <a:prstGeom prst="rect">
-            <a:avLst/>
-          </a:prstGeom>
-          <a:noFill/>
-          <a:ln/>
-        </p:spPr>
-        <p:txBody>
-          <a:bodyPr wrap="square" lIns="0" tIns="0" rIns="0" bIns="0" rtlCol="0" anchor="t">
+            <a:off x="7799832" y="1801368"/>
+            <a:ext cx="3145536" cy="758952"/>
+          </a:xfrm>
+          <a:prstGeom prst="rect">
+            <a:avLst/>
+          </a:prstGeom>
+          <a:noFill/>
+          <a:ln/>
+        </p:spPr>
+        <p:txBody>
+          <a:bodyPr wrap="square" lIns="254" tIns="254" rIns="254" bIns="254" rtlCol="0" anchor="t">
             <a:normAutofit/>
           </a:bodyPr>
           <a:lstStyle/>
@@ -15219,7 +15482,7 @@
               <a:buNone/>
             </a:pPr>
             <a:r>
-              <a:rPr lang="en-US" sz="1550" dirty="0">
+              <a:rPr lang="en-US" sz="1320" dirty="0">
                 <a:solidFill>
                   <a:srgbClr val="17364A"/>
                 </a:solidFill>
@@ -15229,7 +15492,7 @@
               </a:rPr>
               <a:t>United States Indigenous Data Sovereignty Network.</a:t>
             </a:r>
-            <a:endParaRPr lang="en-US" sz="1550" dirty="0"/>
+            <a:endParaRPr lang="en-US" sz="1320" dirty="0"/>
           </a:p>
         </p:txBody>
       </p:sp>
@@ -15317,13 +15580,16 @@
           <a:ln/>
         </p:spPr>
         <p:txBody>
-          <a:bodyPr wrap="square" lIns="254" tIns="254" rIns="254" bIns="254" rtlCol="0" anchor="t">
+          <a:bodyPr wrap="square" lIns="508" tIns="508" rIns="508" bIns="508" rtlCol="0" anchor="t">
             <a:normAutofit/>
           </a:bodyPr>
           <a:lstStyle/>
           <a:p>
-            <a:r>
-              <a:rPr lang="en-US" sz="1380" dirty="0">
+            <a:pPr indent="0" marL="0">
+              <a:buNone/>
+            </a:pPr>
+            <a:r>
+              <a:rPr lang="en-US" sz="1220" dirty="0">
                 <a:solidFill>
                   <a:srgbClr val="17364A"/>
                 </a:solidFill>
@@ -15331,13 +15597,16 @@
                 <a:ea typeface="Aptos" pitchFamily="34" charset="-122"/>
                 <a:cs typeface="Aptos" pitchFamily="34" charset="-120"/>
               </a:rPr>
-              <a:t>Tribal engagement and data use resources. https://www.researchallofus.org/</a:t>
-            </a:r>
-            <a:endParaRPr lang="en-US" sz="1380" dirty="0"/>
-          </a:p>
-          <a:p>
-            <a:r>
-              <a:rPr lang="en-US" sz="1380" dirty="0">
+              <a:t>Tribal engagement and data use resources..</a:t>
+            </a:r>
+            <a:endParaRPr lang="en-US" sz="1220" dirty="0"/>
+          </a:p>
+          <a:p>
+            <a:pPr indent="0" marL="0">
+              <a:buNone/>
+            </a:pPr>
+            <a:r>
+              <a:rPr lang="en-US" sz="1220" dirty="0">
                 <a:solidFill>
                   <a:srgbClr val="17364A"/>
                 </a:solidFill>
@@ -15347,11 +15616,14 @@
               </a:rPr>
               <a:t>HHS and CDC Tribal consultation resources.</a:t>
             </a:r>
-            <a:endParaRPr lang="en-US" sz="1380" dirty="0"/>
-          </a:p>
-          <a:p>
-            <a:r>
-              <a:rPr lang="en-US" sz="1380" dirty="0">
+            <a:endParaRPr lang="en-US" sz="1220" dirty="0"/>
+          </a:p>
+          <a:p>
+            <a:pPr indent="0" marL="0">
+              <a:buNone/>
+            </a:pPr>
+            <a:r>
+              <a:rPr lang="en-US" sz="1220" dirty="0">
                 <a:solidFill>
                   <a:srgbClr val="17364A"/>
                 </a:solidFill>
@@ -15359,9 +15631,9 @@
                 <a:ea typeface="Aptos" pitchFamily="34" charset="-122"/>
                 <a:cs typeface="Aptos" pitchFamily="34" charset="-120"/>
               </a:rPr>
-              <a:t>Use relevant agency consultation policies and Tribal liaison guidance before starting.</a:t>
-            </a:r>
-            <a:endParaRPr lang="en-US" sz="1380" dirty="0"/>
+              <a:t>Use relevant agency consultation policies and Tribal liaison.</a:t>
+            </a:r>
+            <a:endParaRPr lang="en-US" sz="1220" dirty="0"/>
           </a:p>
         </p:txBody>
       </p:sp>
@@ -15439,17 +15711,17 @@
         </p:nvSpPr>
         <p:spPr>
           <a:xfrm>
-            <a:off x="7799832" y="5001768"/>
-            <a:ext cx="3145536" cy="502920"/>
-          </a:xfrm>
-          <a:prstGeom prst="rect">
-            <a:avLst/>
-          </a:prstGeom>
-          <a:noFill/>
-          <a:ln/>
-        </p:spPr>
-        <p:txBody>
-          <a:bodyPr wrap="square" lIns="0" tIns="0" rIns="0" bIns="0" rtlCol="0" anchor="t">
+            <a:off x="7799832" y="4974336"/>
+            <a:ext cx="3145536" cy="576072"/>
+          </a:xfrm>
+          <a:prstGeom prst="rect">
+            <a:avLst/>
+          </a:prstGeom>
+          <a:noFill/>
+          <a:ln/>
+        </p:spPr>
+        <p:txBody>
+          <a:bodyPr wrap="square" lIns="254" tIns="254" rIns="254" bIns="254" rtlCol="0" anchor="t">
             <a:normAutofit/>
           </a:bodyPr>
           <a:lstStyle/>
@@ -15458,7 +15730,7 @@
               <a:buNone/>
             </a:pPr>
             <a:r>
-              <a:rPr lang="en-US" sz="1550" dirty="0">
+              <a:rPr lang="en-US" sz="1320" dirty="0">
                 <a:solidFill>
                   <a:srgbClr val="17364A"/>
                 </a:solidFill>
@@ -15466,9 +15738,9 @@
                 <a:ea typeface="Aptos" pitchFamily="34" charset="-122"/>
                 <a:cs typeface="Aptos" pitchFamily="34" charset="-120"/>
               </a:rPr>
-              <a:t>Translate this concept into clear decision rights, review steps, documentation expectations, and escalation paths before an AI-supported workflow is approved.</a:t>
-            </a:r>
-            <a:endParaRPr lang="en-US" sz="1550" dirty="0"/>
+              <a:t>Translate this concept into clear decision rights, review steps, documentation expectations, and escalation paths before.</a:t>
+            </a:r>
+            <a:endParaRPr lang="en-US" sz="1320" dirty="0"/>
           </a:p>
         </p:txBody>
       </p:sp>
@@ -15769,35 +16041,41 @@
           <a:ln/>
         </p:spPr>
         <p:txBody>
-          <a:bodyPr wrap="square" lIns="635" tIns="635" rIns="635" bIns="635" rtlCol="0" anchor="t">
+          <a:bodyPr wrap="square" lIns="1016" tIns="1016" rIns="1016" bIns="1016" rtlCol="0" anchor="t">
             <a:normAutofit/>
           </a:bodyPr>
           <a:lstStyle/>
           <a:p>
+            <a:pPr indent="0" marL="0">
+              <a:buNone/>
+            </a:pPr>
             <a:r>
               <a:rPr lang="en-US" sz="2100" dirty="0">
                 <a:solidFill>
-                  <a:srgbClr val="17364A"/>
-                </a:solidFill>
-                <a:latin typeface="Aptos" pitchFamily="34" charset="0"/>
-                <a:ea typeface="Aptos" pitchFamily="34" charset="-122"/>
-                <a:cs typeface="Aptos" pitchFamily="34" charset="-120"/>
-              </a:rPr>
-              <a:t>Brookings.</a:t>
+                  <a:srgbClr val="003A63"/>
+                </a:solidFill>
+                <a:latin typeface="Aptos" pitchFamily="34" charset="0"/>
+                <a:ea typeface="Aptos" pitchFamily="34" charset="-122"/>
+                <a:cs typeface="Aptos" pitchFamily="34" charset="-120"/>
+              </a:rPr>
+              <a:t>• Brookings.</a:t>
             </a:r>
             <a:endParaRPr lang="en-US" sz="2100" dirty="0"/>
           </a:p>
           <a:p>
+            <a:pPr indent="0" marL="0">
+              <a:buNone/>
+            </a:pPr>
             <a:r>
               <a:rPr lang="en-US" sz="2100" dirty="0">
                 <a:solidFill>
-                  <a:srgbClr val="17364A"/>
-                </a:solidFill>
-                <a:latin typeface="Aptos" pitchFamily="34" charset="0"/>
-                <a:ea typeface="Aptos" pitchFamily="34" charset="-122"/>
-                <a:cs typeface="Aptos" pitchFamily="34" charset="-120"/>
-              </a:rPr>
-              <a:t>Digital sovereignty and Indigenous Nations resources. https://www.brookings.edu/</a:t>
+                  <a:srgbClr val="003A63"/>
+                </a:solidFill>
+                <a:latin typeface="Aptos" pitchFamily="34" charset="0"/>
+                <a:ea typeface="Aptos" pitchFamily="34" charset="-122"/>
+                <a:cs typeface="Aptos" pitchFamily="34" charset="-120"/>
+              </a:rPr>
+              <a:t>• Digital sovereignty and Indigenous Nations resources. https://www.brookings.edu/</a:t>
             </a:r>
             <a:endParaRPr lang="en-US" sz="2100" dirty="0"/>
           </a:p>
@@ -15877,17 +16155,17 @@
         </p:nvSpPr>
         <p:spPr>
           <a:xfrm>
-            <a:off x="7799832" y="1828800"/>
-            <a:ext cx="3145536" cy="685800"/>
-          </a:xfrm>
-          <a:prstGeom prst="rect">
-            <a:avLst/>
-          </a:prstGeom>
-          <a:noFill/>
-          <a:ln/>
-        </p:spPr>
-        <p:txBody>
-          <a:bodyPr wrap="square" lIns="0" tIns="0" rIns="0" bIns="0" rtlCol="0" anchor="t">
+            <a:off x="7799832" y="1801368"/>
+            <a:ext cx="3145536" cy="758952"/>
+          </a:xfrm>
+          <a:prstGeom prst="rect">
+            <a:avLst/>
+          </a:prstGeom>
+          <a:noFill/>
+          <a:ln/>
+        </p:spPr>
+        <p:txBody>
+          <a:bodyPr wrap="square" lIns="254" tIns="254" rIns="254" bIns="254" rtlCol="0" anchor="t">
             <a:normAutofit/>
           </a:bodyPr>
           <a:lstStyle/>
@@ -15896,7 +16174,7 @@
               <a:buNone/>
             </a:pPr>
             <a:r>
-              <a:rPr lang="en-US" sz="1550" dirty="0">
+              <a:rPr lang="en-US" sz="1320" dirty="0">
                 <a:solidFill>
                   <a:srgbClr val="17364A"/>
                 </a:solidFill>
@@ -15906,7 +16184,7 @@
               </a:rPr>
               <a:t>Brookings.</a:t>
             </a:r>
-            <a:endParaRPr lang="en-US" sz="1550" dirty="0"/>
+            <a:endParaRPr lang="en-US" sz="1320" dirty="0"/>
           </a:p>
         </p:txBody>
       </p:sp>
@@ -15994,13 +16272,16 @@
           <a:ln/>
         </p:spPr>
         <p:txBody>
-          <a:bodyPr wrap="square" lIns="254" tIns="254" rIns="254" bIns="254" rtlCol="0" anchor="t">
+          <a:bodyPr wrap="square" lIns="508" tIns="508" rIns="508" bIns="508" rtlCol="0" anchor="t">
             <a:normAutofit/>
           </a:bodyPr>
           <a:lstStyle/>
           <a:p>
-            <a:r>
-              <a:rPr lang="en-US" sz="1380" dirty="0">
+            <a:pPr indent="0" marL="0">
+              <a:buNone/>
+            </a:pPr>
+            <a:r>
+              <a:rPr lang="en-US" sz="1220" dirty="0">
                 <a:solidFill>
                   <a:srgbClr val="17364A"/>
                 </a:solidFill>
@@ -16010,11 +16291,14 @@
               </a:rPr>
               <a:t>Brookings.</a:t>
             </a:r>
-            <a:endParaRPr lang="en-US" sz="1380" dirty="0"/>
-          </a:p>
-          <a:p>
-            <a:r>
-              <a:rPr lang="en-US" sz="1380" dirty="0">
+            <a:endParaRPr lang="en-US" sz="1220" dirty="0"/>
+          </a:p>
+          <a:p>
+            <a:pPr indent="0" marL="0">
+              <a:buNone/>
+            </a:pPr>
+            <a:r>
+              <a:rPr lang="en-US" sz="1220" dirty="0">
                 <a:solidFill>
                   <a:srgbClr val="17364A"/>
                 </a:solidFill>
@@ -16022,9 +16306,9 @@
                 <a:ea typeface="Aptos" pitchFamily="34" charset="-122"/>
                 <a:cs typeface="Aptos" pitchFamily="34" charset="-120"/>
               </a:rPr>
-              <a:t>Digital sovereignty and Indigenous Nations resources. https://www.brookings.edu/</a:t>
-            </a:r>
-            <a:endParaRPr lang="en-US" sz="1380" dirty="0"/>
+              <a:t>Digital sovereignty and Indigenous Nations resources..</a:t>
+            </a:r>
+            <a:endParaRPr lang="en-US" sz="1220" dirty="0"/>
           </a:p>
         </p:txBody>
       </p:sp>
@@ -16102,17 +16386,17 @@
         </p:nvSpPr>
         <p:spPr>
           <a:xfrm>
-            <a:off x="7799832" y="5001768"/>
-            <a:ext cx="3145536" cy="502920"/>
-          </a:xfrm>
-          <a:prstGeom prst="rect">
-            <a:avLst/>
-          </a:prstGeom>
-          <a:noFill/>
-          <a:ln/>
-        </p:spPr>
-        <p:txBody>
-          <a:bodyPr wrap="square" lIns="0" tIns="0" rIns="0" bIns="0" rtlCol="0" anchor="t">
+            <a:off x="7799832" y="4974336"/>
+            <a:ext cx="3145536" cy="576072"/>
+          </a:xfrm>
+          <a:prstGeom prst="rect">
+            <a:avLst/>
+          </a:prstGeom>
+          <a:noFill/>
+          <a:ln/>
+        </p:spPr>
+        <p:txBody>
+          <a:bodyPr wrap="square" lIns="254" tIns="254" rIns="254" bIns="254" rtlCol="0" anchor="t">
             <a:normAutofit/>
           </a:bodyPr>
           <a:lstStyle/>
@@ -16121,7 +16405,7 @@
               <a:buNone/>
             </a:pPr>
             <a:r>
-              <a:rPr lang="en-US" sz="1550" dirty="0">
+              <a:rPr lang="en-US" sz="1320" dirty="0">
                 <a:solidFill>
                   <a:srgbClr val="17364A"/>
                 </a:solidFill>
@@ -16129,9 +16413,9 @@
                 <a:ea typeface="Aptos" pitchFamily="34" charset="-122"/>
                 <a:cs typeface="Aptos" pitchFamily="34" charset="-120"/>
               </a:rPr>
-              <a:t>Translate this concept into clear decision rights, review steps, documentation expectations, and escalation paths before an AI-supported workflow is approved.</a:t>
-            </a:r>
-            <a:endParaRPr lang="en-US" sz="1550" dirty="0"/>
+              <a:t>Translate this concept into clear decision rights, review steps, documentation expectations, and escalation paths before.</a:t>
+            </a:r>
+            <a:endParaRPr lang="en-US" sz="1320" dirty="0"/>
           </a:p>
         </p:txBody>
       </p:sp>
@@ -16432,21 +16716,24 @@
           <a:ln/>
         </p:spPr>
         <p:txBody>
-          <a:bodyPr wrap="square" lIns="635" tIns="635" rIns="635" bIns="635" rtlCol="0" anchor="t">
+          <a:bodyPr wrap="square" lIns="1016" tIns="1016" rIns="1016" bIns="1016" rtlCol="0" anchor="t">
             <a:normAutofit/>
           </a:bodyPr>
           <a:lstStyle/>
           <a:p>
+            <a:pPr indent="0" marL="0">
+              <a:buNone/>
+            </a:pPr>
             <a:r>
               <a:rPr lang="en-US" sz="2100" dirty="0">
                 <a:solidFill>
-                  <a:srgbClr val="17364A"/>
-                </a:solidFill>
-                <a:latin typeface="Aptos" pitchFamily="34" charset="0"/>
-                <a:ea typeface="Aptos" pitchFamily="34" charset="-122"/>
-                <a:cs typeface="Aptos" pitchFamily="34" charset="-120"/>
-              </a:rPr>
-              <a:t>Tribal Sovereignty and Indigenous Data Governance Screening Memo</a:t>
+                  <a:srgbClr val="003A63"/>
+                </a:solidFill>
+                <a:latin typeface="Aptos" pitchFamily="34" charset="0"/>
+                <a:ea typeface="Aptos" pitchFamily="34" charset="-122"/>
+                <a:cs typeface="Aptos" pitchFamily="34" charset="-120"/>
+              </a:rPr>
+              <a:t>• Tribal Sovereignty and Indigenous Data Governance Screening Memo</a:t>
             </a:r>
             <a:endParaRPr lang="en-US" sz="2100" dirty="0"/>
           </a:p>
@@ -16526,17 +16813,17 @@
         </p:nvSpPr>
         <p:spPr>
           <a:xfrm>
-            <a:off x="7799832" y="1828800"/>
-            <a:ext cx="3145536" cy="685800"/>
-          </a:xfrm>
-          <a:prstGeom prst="rect">
-            <a:avLst/>
-          </a:prstGeom>
-          <a:noFill/>
-          <a:ln/>
-        </p:spPr>
-        <p:txBody>
-          <a:bodyPr wrap="square" lIns="0" tIns="0" rIns="0" bIns="0" rtlCol="0" anchor="t">
+            <a:off x="7799832" y="1801368"/>
+            <a:ext cx="3145536" cy="758952"/>
+          </a:xfrm>
+          <a:prstGeom prst="rect">
+            <a:avLst/>
+          </a:prstGeom>
+          <a:noFill/>
+          <a:ln/>
+        </p:spPr>
+        <p:txBody>
+          <a:bodyPr wrap="square" lIns="254" tIns="254" rIns="254" bIns="254" rtlCol="0" anchor="t">
             <a:normAutofit/>
           </a:bodyPr>
           <a:lstStyle/>
@@ -16545,7 +16832,7 @@
               <a:buNone/>
             </a:pPr>
             <a:r>
-              <a:rPr lang="en-US" sz="1550" dirty="0">
+              <a:rPr lang="en-US" sz="1320" dirty="0">
                 <a:solidFill>
                   <a:srgbClr val="17364A"/>
                 </a:solidFill>
@@ -16555,7 +16842,7 @@
               </a:rPr>
               <a:t>Tribal Sovereignty and Indigenous Data Governance Screening Memo</a:t>
             </a:r>
-            <a:endParaRPr lang="en-US" sz="1550" dirty="0"/>
+            <a:endParaRPr lang="en-US" sz="1320" dirty="0"/>
           </a:p>
         </p:txBody>
       </p:sp>
@@ -16643,13 +16930,16 @@
           <a:ln/>
         </p:spPr>
         <p:txBody>
-          <a:bodyPr wrap="square" lIns="254" tIns="254" rIns="254" bIns="254" rtlCol="0" anchor="t">
+          <a:bodyPr wrap="square" lIns="508" tIns="508" rIns="508" bIns="508" rtlCol="0" anchor="t">
             <a:normAutofit/>
           </a:bodyPr>
           <a:lstStyle/>
           <a:p>
-            <a:r>
-              <a:rPr lang="en-US" sz="1380" dirty="0">
+            <a:pPr indent="0" marL="0">
+              <a:buNone/>
+            </a:pPr>
+            <a:r>
+              <a:rPr lang="en-US" sz="1220" dirty="0">
                 <a:solidFill>
                   <a:srgbClr val="17364A"/>
                 </a:solidFill>
@@ -16659,7 +16949,7 @@
               </a:rPr>
               <a:t>Tribal Sovereignty and Indigenous Data Governance Screening Memo</a:t>
             </a:r>
-            <a:endParaRPr lang="en-US" sz="1380" dirty="0"/>
+            <a:endParaRPr lang="en-US" sz="1220" dirty="0"/>
           </a:p>
         </p:txBody>
       </p:sp>
@@ -16737,17 +17027,17 @@
         </p:nvSpPr>
         <p:spPr>
           <a:xfrm>
-            <a:off x="7799832" y="5001768"/>
-            <a:ext cx="3145536" cy="502920"/>
-          </a:xfrm>
-          <a:prstGeom prst="rect">
-            <a:avLst/>
-          </a:prstGeom>
-          <a:noFill/>
-          <a:ln/>
-        </p:spPr>
-        <p:txBody>
-          <a:bodyPr wrap="square" lIns="0" tIns="0" rIns="0" bIns="0" rtlCol="0" anchor="t">
+            <a:off x="7799832" y="4974336"/>
+            <a:ext cx="3145536" cy="576072"/>
+          </a:xfrm>
+          <a:prstGeom prst="rect">
+            <a:avLst/>
+          </a:prstGeom>
+          <a:noFill/>
+          <a:ln/>
+        </p:spPr>
+        <p:txBody>
+          <a:bodyPr wrap="square" lIns="254" tIns="254" rIns="254" bIns="254" rtlCol="0" anchor="t">
             <a:normAutofit/>
           </a:bodyPr>
           <a:lstStyle/>
@@ -16756,7 +17046,7 @@
               <a:buNone/>
             </a:pPr>
             <a:r>
-              <a:rPr lang="en-US" sz="1550" dirty="0">
+              <a:rPr lang="en-US" sz="1320" dirty="0">
                 <a:solidFill>
                   <a:srgbClr val="17364A"/>
                 </a:solidFill>
@@ -16764,9 +17054,9 @@
                 <a:ea typeface="Aptos" pitchFamily="34" charset="-122"/>
                 <a:cs typeface="Aptos" pitchFamily="34" charset="-120"/>
               </a:rPr>
-              <a:t>Use the assignment to test whether you can explain the concept, apply it to a realistic public health situation, and identify what would need review before the work moves forward.</a:t>
-            </a:r>
-            <a:endParaRPr lang="en-US" sz="1550" dirty="0"/>
+              <a:t>Use the assignment to test whether you can explain the concept, apply it to a realistic public health situation, and.</a:t>
+            </a:r>
+            <a:endParaRPr lang="en-US" sz="1320" dirty="0"/>
           </a:p>
         </p:txBody>
       </p:sp>
@@ -17067,49 +17357,58 @@
           <a:ln/>
         </p:spPr>
         <p:txBody>
-          <a:bodyPr wrap="square" lIns="635" tIns="635" rIns="635" bIns="635" rtlCol="0" anchor="t">
+          <a:bodyPr wrap="square" lIns="1016" tIns="1016" rIns="1016" bIns="1016" rtlCol="0" anchor="t">
             <a:normAutofit/>
           </a:bodyPr>
           <a:lstStyle/>
           <a:p>
+            <a:pPr indent="0" marL="0">
+              <a:buNone/>
+            </a:pPr>
             <a:r>
               <a:rPr lang="en-US" sz="2100" dirty="0">
                 <a:solidFill>
-                  <a:srgbClr val="17364A"/>
-                </a:solidFill>
-                <a:latin typeface="Aptos" pitchFamily="34" charset="0"/>
-                <a:ea typeface="Aptos" pitchFamily="34" charset="-122"/>
-                <a:cs typeface="Aptos" pitchFamily="34" charset="-120"/>
-              </a:rPr>
-              <a:t>1. Why should Tribal sovereignty be considered before an AI project with health data begins?</a:t>
+                  <a:srgbClr val="003A63"/>
+                </a:solidFill>
+                <a:latin typeface="Aptos" pitchFamily="34" charset="0"/>
+                <a:ea typeface="Aptos" pitchFamily="34" charset="-122"/>
+                <a:cs typeface="Aptos" pitchFamily="34" charset="-120"/>
+              </a:rPr>
+              <a:t>• 1. Why should Tribal sovereignty be considered before an AI project with health data begins?</a:t>
             </a:r>
             <a:endParaRPr lang="en-US" sz="2100" dirty="0"/>
           </a:p>
           <a:p>
+            <a:pPr indent="0" marL="0">
+              <a:buNone/>
+            </a:pPr>
             <a:r>
               <a:rPr lang="en-US" sz="2100" dirty="0">
                 <a:solidFill>
-                  <a:srgbClr val="17364A"/>
-                </a:solidFill>
-                <a:latin typeface="Aptos" pitchFamily="34" charset="0"/>
-                <a:ea typeface="Aptos" pitchFamily="34" charset="-122"/>
-                <a:cs typeface="Aptos" pitchFamily="34" charset="-120"/>
-              </a:rPr>
-              <a:t>2. Which statement best reflects Indigenous Data Sovereignty?</a:t>
+                  <a:srgbClr val="003A63"/>
+                </a:solidFill>
+                <a:latin typeface="Aptos" pitchFamily="34" charset="0"/>
+                <a:ea typeface="Aptos" pitchFamily="34" charset="-122"/>
+                <a:cs typeface="Aptos" pitchFamily="34" charset="-120"/>
+              </a:rPr>
+              <a:t>• 2. Which statement best reflects Indigenous Data Sovereignty?</a:t>
             </a:r>
             <a:endParaRPr lang="en-US" sz="2100" dirty="0"/>
           </a:p>
           <a:p>
+            <a:pPr indent="0" marL="0">
+              <a:buNone/>
+            </a:pPr>
             <a:r>
               <a:rPr lang="en-US" sz="2100" dirty="0">
                 <a:solidFill>
-                  <a:srgbClr val="17364A"/>
-                </a:solidFill>
-                <a:latin typeface="Aptos" pitchFamily="34" charset="0"/>
-                <a:ea typeface="Aptos" pitchFamily="34" charset="-122"/>
-                <a:cs typeface="Aptos" pitchFamily="34" charset="-120"/>
-              </a:rPr>
-              <a:t>3. Which AI practice should be avoided unless explicitly approved through the appropriate governance.</a:t>
+                  <a:srgbClr val="003A63"/>
+                </a:solidFill>
+                <a:latin typeface="Aptos" pitchFamily="34" charset="0"/>
+                <a:ea typeface="Aptos" pitchFamily="34" charset="-122"/>
+                <a:cs typeface="Aptos" pitchFamily="34" charset="-120"/>
+              </a:rPr>
+              <a:t>• 3. Which AI practice should be avoided unless explicitly approved through the appropriate.</a:t>
             </a:r>
             <a:endParaRPr lang="en-US" sz="2100" dirty="0"/>
           </a:p>
@@ -17189,17 +17488,17 @@
         </p:nvSpPr>
         <p:spPr>
           <a:xfrm>
-            <a:off x="7799832" y="1828800"/>
-            <a:ext cx="3145536" cy="685800"/>
-          </a:xfrm>
-          <a:prstGeom prst="rect">
-            <a:avLst/>
-          </a:prstGeom>
-          <a:noFill/>
-          <a:ln/>
-        </p:spPr>
-        <p:txBody>
-          <a:bodyPr wrap="square" lIns="0" tIns="0" rIns="0" bIns="0" rtlCol="0" anchor="t">
+            <a:off x="7799832" y="1801368"/>
+            <a:ext cx="3145536" cy="758952"/>
+          </a:xfrm>
+          <a:prstGeom prst="rect">
+            <a:avLst/>
+          </a:prstGeom>
+          <a:noFill/>
+          <a:ln/>
+        </p:spPr>
+        <p:txBody>
+          <a:bodyPr wrap="square" lIns="254" tIns="254" rIns="254" bIns="254" rtlCol="0" anchor="t">
             <a:normAutofit/>
           </a:bodyPr>
           <a:lstStyle/>
@@ -17208,7 +17507,7 @@
               <a:buNone/>
             </a:pPr>
             <a:r>
-              <a:rPr lang="en-US" sz="1550" dirty="0">
+              <a:rPr lang="en-US" sz="1320" dirty="0">
                 <a:solidFill>
                   <a:srgbClr val="17364A"/>
                 </a:solidFill>
@@ -17218,7 +17517,7 @@
               </a:rPr>
               <a:t>1. Why should Tribal sovereignty be considered before an AI project with health data begins?</a:t>
             </a:r>
-            <a:endParaRPr lang="en-US" sz="1550" dirty="0"/>
+            <a:endParaRPr lang="en-US" sz="1320" dirty="0"/>
           </a:p>
         </p:txBody>
       </p:sp>
@@ -17306,13 +17605,16 @@
           <a:ln/>
         </p:spPr>
         <p:txBody>
-          <a:bodyPr wrap="square" lIns="254" tIns="254" rIns="254" bIns="254" rtlCol="0" anchor="t">
+          <a:bodyPr wrap="square" lIns="508" tIns="508" rIns="508" bIns="508" rtlCol="0" anchor="t">
             <a:normAutofit/>
           </a:bodyPr>
           <a:lstStyle/>
           <a:p>
-            <a:r>
-              <a:rPr lang="en-US" sz="1380" dirty="0">
+            <a:pPr indent="0" marL="0">
+              <a:buNone/>
+            </a:pPr>
+            <a:r>
+              <a:rPr lang="en-US" sz="1220" dirty="0">
                 <a:solidFill>
                   <a:srgbClr val="17364A"/>
                 </a:solidFill>
@@ -17322,11 +17624,14 @@
               </a:rPr>
               <a:t>1.</a:t>
             </a:r>
-            <a:endParaRPr lang="en-US" sz="1380" dirty="0"/>
-          </a:p>
-          <a:p>
-            <a:r>
-              <a:rPr lang="en-US" sz="1380" dirty="0">
+            <a:endParaRPr lang="en-US" sz="1220" dirty="0"/>
+          </a:p>
+          <a:p>
+            <a:pPr indent="0" marL="0">
+              <a:buNone/>
+            </a:pPr>
+            <a:r>
+              <a:rPr lang="en-US" sz="1220" dirty="0">
                 <a:solidFill>
                   <a:srgbClr val="17364A"/>
                 </a:solidFill>
@@ -17334,13 +17639,16 @@
                 <a:ea typeface="Aptos" pitchFamily="34" charset="-122"/>
                 <a:cs typeface="Aptos" pitchFamily="34" charset="-120"/>
               </a:rPr>
-              <a:t>Why should Tribal sovereignty be considered before an AI project with health data begins?</a:t>
-            </a:r>
-            <a:endParaRPr lang="en-US" sz="1380" dirty="0"/>
-          </a:p>
-          <a:p>
-            <a:r>
-              <a:rPr lang="en-US" sz="1380" dirty="0">
+              <a:t>Why should Tribal sovereignty be considered before an AI project.</a:t>
+            </a:r>
+            <a:endParaRPr lang="en-US" sz="1220" dirty="0"/>
+          </a:p>
+          <a:p>
+            <a:pPr indent="0" marL="0">
+              <a:buNone/>
+            </a:pPr>
+            <a:r>
+              <a:rPr lang="en-US" sz="1220" dirty="0">
                 <a:solidFill>
                   <a:srgbClr val="17364A"/>
                 </a:solidFill>
@@ -17350,7 +17658,7 @@
               </a:rPr>
               <a:t>2.</a:t>
             </a:r>
-            <a:endParaRPr lang="en-US" sz="1380" dirty="0"/>
+            <a:endParaRPr lang="en-US" sz="1220" dirty="0"/>
           </a:p>
         </p:txBody>
       </p:sp>
@@ -17428,17 +17736,17 @@
         </p:nvSpPr>
         <p:spPr>
           <a:xfrm>
-            <a:off x="7799832" y="5001768"/>
-            <a:ext cx="3145536" cy="502920"/>
-          </a:xfrm>
-          <a:prstGeom prst="rect">
-            <a:avLst/>
-          </a:prstGeom>
-          <a:noFill/>
-          <a:ln/>
-        </p:spPr>
-        <p:txBody>
-          <a:bodyPr wrap="square" lIns="0" tIns="0" rIns="0" bIns="0" rtlCol="0" anchor="t">
+            <a:off x="7799832" y="4974336"/>
+            <a:ext cx="3145536" cy="576072"/>
+          </a:xfrm>
+          <a:prstGeom prst="rect">
+            <a:avLst/>
+          </a:prstGeom>
+          <a:noFill/>
+          <a:ln/>
+        </p:spPr>
+        <p:txBody>
+          <a:bodyPr wrap="square" lIns="254" tIns="254" rIns="254" bIns="254" rtlCol="0" anchor="t">
             <a:normAutofit/>
           </a:bodyPr>
           <a:lstStyle/>
@@ -17447,7 +17755,7 @@
               <a:buNone/>
             </a:pPr>
             <a:r>
-              <a:rPr lang="en-US" sz="1550" dirty="0">
+              <a:rPr lang="en-US" sz="1320" dirty="0">
                 <a:solidFill>
                   <a:srgbClr val="17364A"/>
                 </a:solidFill>
@@ -17455,9 +17763,9 @@
                 <a:ea typeface="Aptos" pitchFamily="34" charset="-122"/>
                 <a:cs typeface="Aptos" pitchFamily="34" charset="-120"/>
               </a:rPr>
-              <a:t>Use the assignment to test whether you can explain the concept, apply it to a realistic public health situation, and identify what would need review before the work moves forward.</a:t>
-            </a:r>
-            <a:endParaRPr lang="en-US" sz="1550" dirty="0"/>
+              <a:t>Use the assignment to test whether you can explain the concept, apply it to a realistic public health situation, and.</a:t>
+            </a:r>
+            <a:endParaRPr lang="en-US" sz="1320" dirty="0"/>
           </a:p>
         </p:txBody>
       </p:sp>
@@ -17758,49 +18066,58 @@
           <a:ln/>
         </p:spPr>
         <p:txBody>
-          <a:bodyPr wrap="square" lIns="635" tIns="635" rIns="635" bIns="635" rtlCol="0" anchor="t">
+          <a:bodyPr wrap="square" lIns="1016" tIns="1016" rIns="1016" bIns="1016" rtlCol="0" anchor="t">
             <a:normAutofit/>
           </a:bodyPr>
           <a:lstStyle/>
           <a:p>
+            <a:pPr indent="0" marL="0">
+              <a:buNone/>
+            </a:pPr>
             <a:r>
               <a:rPr lang="en-US" sz="2100" dirty="0">
                 <a:solidFill>
-                  <a:srgbClr val="17364A"/>
-                </a:solidFill>
-                <a:latin typeface="Aptos" pitchFamily="34" charset="0"/>
-                <a:ea typeface="Aptos" pitchFamily="34" charset="-122"/>
-                <a:cs typeface="Aptos" pitchFamily="34" charset="-120"/>
-              </a:rPr>
-              <a:t>Global Indigenous Data Alliance. CARE Principles for Indigenous Data Governance.:.</a:t>
+                  <a:srgbClr val="003A63"/>
+                </a:solidFill>
+                <a:latin typeface="Aptos" pitchFamily="34" charset="0"/>
+                <a:ea typeface="Aptos" pitchFamily="34" charset="-122"/>
+                <a:cs typeface="Aptos" pitchFamily="34" charset="-120"/>
+              </a:rPr>
+              <a:t>• Global Indigenous Data Alliance. CARE Principles for Indigenous Data Governance.:.</a:t>
             </a:r>
             <a:endParaRPr lang="en-US" sz="2100" dirty="0"/>
           </a:p>
           <a:p>
+            <a:pPr indent="0" marL="0">
+              <a:buNone/>
+            </a:pPr>
             <a:r>
               <a:rPr lang="en-US" sz="2100" dirty="0">
                 <a:solidFill>
-                  <a:srgbClr val="17364A"/>
-                </a:solidFill>
-                <a:latin typeface="Aptos" pitchFamily="34" charset="0"/>
-                <a:ea typeface="Aptos" pitchFamily="34" charset="-122"/>
-                <a:cs typeface="Aptos" pitchFamily="34" charset="-120"/>
-              </a:rPr>
-              <a:t>National Institutes of Health. NOT-OD-22-214: Supplemental Information to the NIH Policy for Data.</a:t>
+                  <a:srgbClr val="003A63"/>
+                </a:solidFill>
+                <a:latin typeface="Aptos" pitchFamily="34" charset="0"/>
+                <a:ea typeface="Aptos" pitchFamily="34" charset="-122"/>
+                <a:cs typeface="Aptos" pitchFamily="34" charset="-120"/>
+              </a:rPr>
+              <a:t>• National Institutes of Health. NOT-OD-22-214: Supplemental Information to the NIH Policy for.</a:t>
             </a:r>
             <a:endParaRPr lang="en-US" sz="2100" dirty="0"/>
           </a:p>
           <a:p>
+            <a:pPr indent="0" marL="0">
+              <a:buNone/>
+            </a:pPr>
             <a:r>
               <a:rPr lang="en-US" sz="2100" dirty="0">
                 <a:solidFill>
-                  <a:srgbClr val="17364A"/>
-                </a:solidFill>
-                <a:latin typeface="Aptos" pitchFamily="34" charset="0"/>
-                <a:ea typeface="Aptos" pitchFamily="34" charset="-122"/>
-                <a:cs typeface="Aptos" pitchFamily="34" charset="-120"/>
-              </a:rPr>
-              <a:t>National Institutes of Health Tribal Health Research Office. Tribal Health Research Office resources.:.</a:t>
+                  <a:srgbClr val="003A63"/>
+                </a:solidFill>
+                <a:latin typeface="Aptos" pitchFamily="34" charset="0"/>
+                <a:ea typeface="Aptos" pitchFamily="34" charset="-122"/>
+                <a:cs typeface="Aptos" pitchFamily="34" charset="-120"/>
+              </a:rPr>
+              <a:t>• National Institutes of Health Tribal Health Research Office. Tribal Health Research Office.</a:t>
             </a:r>
             <a:endParaRPr lang="en-US" sz="2100" dirty="0"/>
           </a:p>
@@ -17880,17 +18197,17 @@
         </p:nvSpPr>
         <p:spPr>
           <a:xfrm>
-            <a:off x="7799832" y="1828800"/>
-            <a:ext cx="3145536" cy="685800"/>
-          </a:xfrm>
-          <a:prstGeom prst="rect">
-            <a:avLst/>
-          </a:prstGeom>
-          <a:noFill/>
-          <a:ln/>
-        </p:spPr>
-        <p:txBody>
-          <a:bodyPr wrap="square" lIns="0" tIns="0" rIns="0" bIns="0" rtlCol="0" anchor="t">
+            <a:off x="7799832" y="1801368"/>
+            <a:ext cx="3145536" cy="758952"/>
+          </a:xfrm>
+          <a:prstGeom prst="rect">
+            <a:avLst/>
+          </a:prstGeom>
+          <a:noFill/>
+          <a:ln/>
+        </p:spPr>
+        <p:txBody>
+          <a:bodyPr wrap="square" lIns="254" tIns="254" rIns="254" bIns="254" rtlCol="0" anchor="t">
             <a:normAutofit/>
           </a:bodyPr>
           <a:lstStyle/>
@@ -17899,7 +18216,7 @@
               <a:buNone/>
             </a:pPr>
             <a:r>
-              <a:rPr lang="en-US" sz="1550" dirty="0">
+              <a:rPr lang="en-US" sz="1320" dirty="0">
                 <a:solidFill>
                   <a:srgbClr val="17364A"/>
                 </a:solidFill>
@@ -17909,7 +18226,7 @@
               </a:rPr>
               <a:t>Global Indigenous Data Alliance. CARE Principles for Indigenous Data Governance.:.</a:t>
             </a:r>
-            <a:endParaRPr lang="en-US" sz="1550" dirty="0"/>
+            <a:endParaRPr lang="en-US" sz="1320" dirty="0"/>
           </a:p>
         </p:txBody>
       </p:sp>
@@ -17997,13 +18314,16 @@
           <a:ln/>
         </p:spPr>
         <p:txBody>
-          <a:bodyPr wrap="square" lIns="254" tIns="254" rIns="254" bIns="254" rtlCol="0" anchor="t">
+          <a:bodyPr wrap="square" lIns="508" tIns="508" rIns="508" bIns="508" rtlCol="0" anchor="t">
             <a:normAutofit/>
           </a:bodyPr>
           <a:lstStyle/>
           <a:p>
-            <a:r>
-              <a:rPr lang="en-US" sz="1380" dirty="0">
+            <a:pPr indent="0" marL="0">
+              <a:buNone/>
+            </a:pPr>
+            <a:r>
+              <a:rPr lang="en-US" sz="1220" dirty="0">
                 <a:solidFill>
                   <a:srgbClr val="17364A"/>
                 </a:solidFill>
@@ -18013,11 +18333,14 @@
               </a:rPr>
               <a:t>Global Indigenous Data Alliance.</a:t>
             </a:r>
-            <a:endParaRPr lang="en-US" sz="1380" dirty="0"/>
-          </a:p>
-          <a:p>
-            <a:r>
-              <a:rPr lang="en-US" sz="1380" dirty="0">
+            <a:endParaRPr lang="en-US" sz="1220" dirty="0"/>
+          </a:p>
+          <a:p>
+            <a:pPr indent="0" marL="0">
+              <a:buNone/>
+            </a:pPr>
+            <a:r>
+              <a:rPr lang="en-US" sz="1220" dirty="0">
                 <a:solidFill>
                   <a:srgbClr val="17364A"/>
                 </a:solidFill>
@@ -18025,13 +18348,16 @@
                 <a:ea typeface="Aptos" pitchFamily="34" charset="-122"/>
                 <a:cs typeface="Aptos" pitchFamily="34" charset="-120"/>
               </a:rPr>
-              <a:t>CARE Principles for Indigenous Data Governance.: https://www.gida-global.org/care</a:t>
-            </a:r>
-            <a:endParaRPr lang="en-US" sz="1380" dirty="0"/>
-          </a:p>
-          <a:p>
-            <a:r>
-              <a:rPr lang="en-US" sz="1380" dirty="0">
+              <a:t>CARE Principles for Indigenous Data Governance.:.</a:t>
+            </a:r>
+            <a:endParaRPr lang="en-US" sz="1220" dirty="0"/>
+          </a:p>
+          <a:p>
+            <a:pPr indent="0" marL="0">
+              <a:buNone/>
+            </a:pPr>
+            <a:r>
+              <a:rPr lang="en-US" sz="1220" dirty="0">
                 <a:solidFill>
                   <a:srgbClr val="17364A"/>
                 </a:solidFill>
@@ -18041,7 +18367,7 @@
               </a:rPr>
               <a:t>National Institutes of Health.</a:t>
             </a:r>
-            <a:endParaRPr lang="en-US" sz="1380" dirty="0"/>
+            <a:endParaRPr lang="en-US" sz="1220" dirty="0"/>
           </a:p>
         </p:txBody>
       </p:sp>
@@ -18119,17 +18445,17 @@
         </p:nvSpPr>
         <p:spPr>
           <a:xfrm>
-            <a:off x="7799832" y="5001768"/>
-            <a:ext cx="3145536" cy="502920"/>
-          </a:xfrm>
-          <a:prstGeom prst="rect">
-            <a:avLst/>
-          </a:prstGeom>
-          <a:noFill/>
-          <a:ln/>
-        </p:spPr>
-        <p:txBody>
-          <a:bodyPr wrap="square" lIns="0" tIns="0" rIns="0" bIns="0" rtlCol="0" anchor="t">
+            <a:off x="7799832" y="4974336"/>
+            <a:ext cx="3145536" cy="576072"/>
+          </a:xfrm>
+          <a:prstGeom prst="rect">
+            <a:avLst/>
+          </a:prstGeom>
+          <a:noFill/>
+          <a:ln/>
+        </p:spPr>
+        <p:txBody>
+          <a:bodyPr wrap="square" lIns="254" tIns="254" rIns="254" bIns="254" rtlCol="0" anchor="t">
             <a:normAutofit/>
           </a:bodyPr>
           <a:lstStyle/>
@@ -18138,7 +18464,7 @@
               <a:buNone/>
             </a:pPr>
             <a:r>
-              <a:rPr lang="en-US" sz="1550" dirty="0">
+              <a:rPr lang="en-US" sz="1320" dirty="0">
                 <a:solidFill>
                   <a:srgbClr val="17364A"/>
                 </a:solidFill>
@@ -18146,9 +18472,9 @@
                 <a:ea typeface="Aptos" pitchFamily="34" charset="-122"/>
                 <a:cs typeface="Aptos" pitchFamily="34" charset="-120"/>
               </a:rPr>
-              <a:t>Translate this concept into clear decision rights, review steps, documentation expectations, and escalation paths before an AI-supported workflow is approved.</a:t>
-            </a:r>
-            <a:endParaRPr lang="en-US" sz="1550" dirty="0"/>
+              <a:t>Translate this concept into clear decision rights, review steps, documentation expectations, and escalation paths before.</a:t>
+            </a:r>
+            <a:endParaRPr lang="en-US" sz="1320" dirty="0"/>
           </a:p>
         </p:txBody>
       </p:sp>
@@ -18449,63 +18775,75 @@
           <a:ln/>
         </p:spPr>
         <p:txBody>
-          <a:bodyPr wrap="square" lIns="635" tIns="635" rIns="635" bIns="635" rtlCol="0" anchor="t">
+          <a:bodyPr wrap="square" lIns="1016" tIns="1016" rIns="1016" bIns="1016" rtlCol="0" anchor="t">
             <a:normAutofit/>
           </a:bodyPr>
           <a:lstStyle/>
           <a:p>
+            <a:pPr indent="0" marL="0">
+              <a:buNone/>
+            </a:pPr>
             <a:r>
               <a:rPr lang="en-US" sz="1900" dirty="0">
                 <a:solidFill>
-                  <a:srgbClr val="17364A"/>
-                </a:solidFill>
-                <a:latin typeface="Aptos" pitchFamily="34" charset="0"/>
-                <a:ea typeface="Aptos" pitchFamily="34" charset="-122"/>
-                <a:cs typeface="Aptos" pitchFamily="34" charset="-120"/>
-              </a:rPr>
-              <a:t>Play 11: Build and Deploy AI Solutions - This lesson informs Play 11 by helping learners connect the lesson.</a:t>
+                  <a:srgbClr val="003A63"/>
+                </a:solidFill>
+                <a:latin typeface="Aptos" pitchFamily="34" charset="0"/>
+                <a:ea typeface="Aptos" pitchFamily="34" charset="-122"/>
+                <a:cs typeface="Aptos" pitchFamily="34" charset="-120"/>
+              </a:rPr>
+              <a:t>• Play 11: Build and Deploy AI Solutions - This lesson informs Play 11 by helping learners.</a:t>
             </a:r>
             <a:endParaRPr lang="en-US" sz="1900" dirty="0"/>
           </a:p>
           <a:p>
+            <a:pPr indent="0" marL="0">
+              <a:buNone/>
+            </a:pPr>
             <a:r>
               <a:rPr lang="en-US" sz="1900" dirty="0">
                 <a:solidFill>
-                  <a:srgbClr val="17364A"/>
-                </a:solidFill>
-                <a:latin typeface="Aptos" pitchFamily="34" charset="0"/>
-                <a:ea typeface="Aptos" pitchFamily="34" charset="-122"/>
-                <a:cs typeface="Aptos" pitchFamily="34" charset="-120"/>
-              </a:rPr>
-              <a:t>Play 3: Establish AI Governance - This lesson informs Play 3 by helping learners connect the lesson topic to.</a:t>
+                  <a:srgbClr val="003A63"/>
+                </a:solidFill>
+                <a:latin typeface="Aptos" pitchFamily="34" charset="0"/>
+                <a:ea typeface="Aptos" pitchFamily="34" charset="-122"/>
+                <a:cs typeface="Aptos" pitchFamily="34" charset="-120"/>
+              </a:rPr>
+              <a:t>• Play 3: Establish AI Governance - This lesson informs Play 3 by helping learners connect the.</a:t>
             </a:r>
             <a:endParaRPr lang="en-US" sz="1900" dirty="0"/>
           </a:p>
           <a:p>
+            <a:pPr indent="0" marL="0">
+              <a:buNone/>
+            </a:pPr>
             <a:r>
               <a:rPr lang="en-US" sz="1900" dirty="0">
                 <a:solidFill>
-                  <a:srgbClr val="17364A"/>
-                </a:solidFill>
-                <a:latin typeface="Aptos" pitchFamily="34" charset="0"/>
-                <a:ea typeface="Aptos" pitchFamily="34" charset="-122"/>
-                <a:cs typeface="Aptos" pitchFamily="34" charset="-120"/>
-              </a:rPr>
-              <a:t>Play 7: Prioritize Use Cases - This lesson informs Play 7 by helping learners connect the lesson topic to.</a:t>
+                  <a:srgbClr val="003A63"/>
+                </a:solidFill>
+                <a:latin typeface="Aptos" pitchFamily="34" charset="0"/>
+                <a:ea typeface="Aptos" pitchFamily="34" charset="-122"/>
+                <a:cs typeface="Aptos" pitchFamily="34" charset="-120"/>
+              </a:rPr>
+              <a:t>• Play 7: Prioritize Use Cases - This lesson informs Play 7 by helping learners connect the.</a:t>
             </a:r>
             <a:endParaRPr lang="en-US" sz="1900" dirty="0"/>
           </a:p>
           <a:p>
+            <a:pPr indent="0" marL="0">
+              <a:buNone/>
+            </a:pPr>
             <a:r>
               <a:rPr lang="en-US" sz="1900" dirty="0">
                 <a:solidFill>
-                  <a:srgbClr val="17364A"/>
-                </a:solidFill>
-                <a:latin typeface="Aptos" pitchFamily="34" charset="0"/>
-                <a:ea typeface="Aptos" pitchFamily="34" charset="-122"/>
-                <a:cs typeface="Aptos" pitchFamily="34" charset="-120"/>
-              </a:rPr>
-              <a:t>Play 8: Develop a Funding Strategy - This lesson informs Play 8 by helping learners connect the lesson topic.</a:t>
+                  <a:srgbClr val="003A63"/>
+                </a:solidFill>
+                <a:latin typeface="Aptos" pitchFamily="34" charset="0"/>
+                <a:ea typeface="Aptos" pitchFamily="34" charset="-122"/>
+                <a:cs typeface="Aptos" pitchFamily="34" charset="-120"/>
+              </a:rPr>
+              <a:t>• Play 8: Develop a Funding Strategy - This lesson informs Play 8 by helping learners connect.</a:t>
             </a:r>
             <a:endParaRPr lang="en-US" sz="1900" dirty="0"/>
           </a:p>
@@ -18585,17 +18923,17 @@
         </p:nvSpPr>
         <p:spPr>
           <a:xfrm>
-            <a:off x="8211312" y="1920240"/>
-            <a:ext cx="2734056" cy="1463040"/>
-          </a:xfrm>
-          <a:prstGeom prst="rect">
-            <a:avLst/>
-          </a:prstGeom>
-          <a:noFill/>
-          <a:ln/>
-        </p:spPr>
-        <p:txBody>
-          <a:bodyPr wrap="square" lIns="0" tIns="0" rIns="0" bIns="0" rtlCol="0" anchor="t">
+            <a:off x="8211312" y="1892808"/>
+            <a:ext cx="2734056" cy="1536192"/>
+          </a:xfrm>
+          <a:prstGeom prst="rect">
+            <a:avLst/>
+          </a:prstGeom>
+          <a:noFill/>
+          <a:ln/>
+        </p:spPr>
+        <p:txBody>
+          <a:bodyPr wrap="square" lIns="254" tIns="254" rIns="254" bIns="254" rtlCol="0" anchor="t">
             <a:normAutofit/>
           </a:bodyPr>
           <a:lstStyle/>
@@ -18604,7 +18942,7 @@
               <a:buNone/>
             </a:pPr>
             <a:r>
-              <a:rPr lang="en-US" sz="1550" dirty="0">
+              <a:rPr lang="en-US" sz="1320" dirty="0">
                 <a:solidFill>
                   <a:srgbClr val="17364A"/>
                 </a:solidFill>
@@ -18612,9 +18950,9 @@
                 <a:ea typeface="Aptos" pitchFamily="34" charset="-122"/>
                 <a:cs typeface="Aptos" pitchFamily="34" charset="-120"/>
               </a:rPr>
-              <a:t>Use the related plays to identify decisions, participants, timing, approvals, and documentation needed for responsible implementation.</a:t>
-            </a:r>
-            <a:endParaRPr lang="en-US" sz="1550" dirty="0"/>
+              <a:t>Use the related plays to identify decisions, participants, timing, approvals, and documentation needed for responsible.</a:t>
+            </a:r>
+            <a:endParaRPr lang="en-US" sz="1320" dirty="0"/>
           </a:p>
         </p:txBody>
       </p:sp>
@@ -18702,13 +19040,16 @@
           <a:ln/>
         </p:spPr>
         <p:txBody>
-          <a:bodyPr wrap="square" lIns="254" tIns="254" rIns="254" bIns="254" rtlCol="0" anchor="t">
+          <a:bodyPr wrap="square" lIns="508" tIns="508" rIns="508" bIns="508" rtlCol="0" anchor="t">
             <a:normAutofit/>
           </a:bodyPr>
           <a:lstStyle/>
           <a:p>
-            <a:r>
-              <a:rPr lang="en-US" sz="1380" dirty="0">
+            <a:pPr indent="0" marL="0">
+              <a:buNone/>
+            </a:pPr>
+            <a:r>
+              <a:rPr lang="en-US" sz="1220" dirty="0">
                 <a:solidFill>
                   <a:srgbClr val="17364A"/>
                 </a:solidFill>
@@ -18718,11 +19059,14 @@
               </a:rPr>
               <a:t>Locate the decision point in the playbook sequence.</a:t>
             </a:r>
-            <a:endParaRPr lang="en-US" sz="1380" dirty="0"/>
-          </a:p>
-          <a:p>
-            <a:r>
-              <a:rPr lang="en-US" sz="1380" dirty="0">
+            <a:endParaRPr lang="en-US" sz="1220" dirty="0"/>
+          </a:p>
+          <a:p>
+            <a:pPr indent="0" marL="0">
+              <a:buNone/>
+            </a:pPr>
+            <a:r>
+              <a:rPr lang="en-US" sz="1220" dirty="0">
                 <a:solidFill>
                   <a:srgbClr val="17364A"/>
                 </a:solidFill>
@@ -18732,11 +19076,14 @@
               </a:rPr>
               <a:t>Identify who should participate in the work.</a:t>
             </a:r>
-            <a:endParaRPr lang="en-US" sz="1380" dirty="0"/>
-          </a:p>
-          <a:p>
-            <a:r>
-              <a:rPr lang="en-US" sz="1380" dirty="0">
+            <a:endParaRPr lang="en-US" sz="1220" dirty="0"/>
+          </a:p>
+          <a:p>
+            <a:pPr indent="0" marL="0">
+              <a:buNone/>
+            </a:pPr>
+            <a:r>
+              <a:rPr lang="en-US" sz="1220" dirty="0">
                 <a:solidFill>
                   <a:srgbClr val="17364A"/>
                 </a:solidFill>
@@ -18746,7 +19093,7 @@
               </a:rPr>
               <a:t>Document the review, approval, or implementation step.</a:t>
             </a:r>
-            <a:endParaRPr lang="en-US" sz="1380" dirty="0"/>
+            <a:endParaRPr lang="en-US" sz="1220" dirty="0"/>
           </a:p>
         </p:txBody>
       </p:sp>
@@ -19047,35 +19394,41 @@
           <a:ln/>
         </p:spPr>
         <p:txBody>
-          <a:bodyPr wrap="square" lIns="635" tIns="635" rIns="635" bIns="635" rtlCol="0" anchor="t">
+          <a:bodyPr wrap="square" lIns="1016" tIns="1016" rIns="1016" bIns="1016" rtlCol="0" anchor="t">
             <a:normAutofit/>
           </a:bodyPr>
           <a:lstStyle/>
           <a:p>
+            <a:pPr indent="0" marL="0">
+              <a:buNone/>
+            </a:pPr>
             <a:r>
               <a:rPr lang="en-US" sz="2100" dirty="0">
                 <a:solidFill>
-                  <a:srgbClr val="17364A"/>
-                </a:solidFill>
-                <a:latin typeface="Aptos" pitchFamily="34" charset="0"/>
-                <a:ea typeface="Aptos" pitchFamily="34" charset="-122"/>
-                <a:cs typeface="Aptos" pitchFamily="34" charset="-120"/>
-              </a:rPr>
-              <a:t>HHS and CDC Tribal consultation resources. Use relevant agency consultation policies and Tribal liaison.</a:t>
+                  <a:srgbClr val="003A63"/>
+                </a:solidFill>
+                <a:latin typeface="Aptos" pitchFamily="34" charset="0"/>
+                <a:ea typeface="Aptos" pitchFamily="34" charset="-122"/>
+                <a:cs typeface="Aptos" pitchFamily="34" charset="-120"/>
+              </a:rPr>
+              <a:t>• HHS and CDC Tribal consultation resources. Use relevant agency consultation policies and.</a:t>
             </a:r>
             <a:endParaRPr lang="en-US" sz="2100" dirty="0"/>
           </a:p>
           <a:p>
+            <a:pPr indent="0" marL="0">
+              <a:buNone/>
+            </a:pPr>
             <a:r>
               <a:rPr lang="en-US" sz="2100" dirty="0">
                 <a:solidFill>
-                  <a:srgbClr val="17364A"/>
-                </a:solidFill>
-                <a:latin typeface="Aptos" pitchFamily="34" charset="0"/>
-                <a:ea typeface="Aptos" pitchFamily="34" charset="-122"/>
-                <a:cs typeface="Aptos" pitchFamily="34" charset="-120"/>
-              </a:rPr>
-              <a:t>Brookings. Digital sovereignty and Indigenous Nations resources.: https://www.brookings.edu/</a:t>
+                  <a:srgbClr val="003A63"/>
+                </a:solidFill>
+                <a:latin typeface="Aptos" pitchFamily="34" charset="0"/>
+                <a:ea typeface="Aptos" pitchFamily="34" charset="-122"/>
+                <a:cs typeface="Aptos" pitchFamily="34" charset="-120"/>
+              </a:rPr>
+              <a:t>• Brookings. Digital sovereignty and Indigenous Nations resources.: https://www.brookings.edu/</a:t>
             </a:r>
             <a:endParaRPr lang="en-US" sz="2100" dirty="0"/>
           </a:p>
@@ -19155,17 +19508,17 @@
         </p:nvSpPr>
         <p:spPr>
           <a:xfrm>
-            <a:off x="7799832" y="1828800"/>
-            <a:ext cx="3145536" cy="685800"/>
-          </a:xfrm>
-          <a:prstGeom prst="rect">
-            <a:avLst/>
-          </a:prstGeom>
-          <a:noFill/>
-          <a:ln/>
-        </p:spPr>
-        <p:txBody>
-          <a:bodyPr wrap="square" lIns="0" tIns="0" rIns="0" bIns="0" rtlCol="0" anchor="t">
+            <a:off x="7799832" y="1801368"/>
+            <a:ext cx="3145536" cy="758952"/>
+          </a:xfrm>
+          <a:prstGeom prst="rect">
+            <a:avLst/>
+          </a:prstGeom>
+          <a:noFill/>
+          <a:ln/>
+        </p:spPr>
+        <p:txBody>
+          <a:bodyPr wrap="square" lIns="254" tIns="254" rIns="254" bIns="254" rtlCol="0" anchor="t">
             <a:normAutofit/>
           </a:bodyPr>
           <a:lstStyle/>
@@ -19174,7 +19527,7 @@
               <a:buNone/>
             </a:pPr>
             <a:r>
-              <a:rPr lang="en-US" sz="1550" dirty="0">
+              <a:rPr lang="en-US" sz="1320" dirty="0">
                 <a:solidFill>
                   <a:srgbClr val="17364A"/>
                 </a:solidFill>
@@ -19184,7 +19537,7 @@
               </a:rPr>
               <a:t>HHS and CDC Tribal consultation resources. Use relevant agency consultation policies and Tribal liaison.</a:t>
             </a:r>
-            <a:endParaRPr lang="en-US" sz="1550" dirty="0"/>
+            <a:endParaRPr lang="en-US" sz="1320" dirty="0"/>
           </a:p>
         </p:txBody>
       </p:sp>
@@ -19272,13 +19625,16 @@
           <a:ln/>
         </p:spPr>
         <p:txBody>
-          <a:bodyPr wrap="square" lIns="254" tIns="254" rIns="254" bIns="254" rtlCol="0" anchor="t">
+          <a:bodyPr wrap="square" lIns="508" tIns="508" rIns="508" bIns="508" rtlCol="0" anchor="t">
             <a:normAutofit/>
           </a:bodyPr>
           <a:lstStyle/>
           <a:p>
-            <a:r>
-              <a:rPr lang="en-US" sz="1380" dirty="0">
+            <a:pPr indent="0" marL="0">
+              <a:buNone/>
+            </a:pPr>
+            <a:r>
+              <a:rPr lang="en-US" sz="1220" dirty="0">
                 <a:solidFill>
                   <a:srgbClr val="17364A"/>
                 </a:solidFill>
@@ -19288,11 +19644,14 @@
               </a:rPr>
               <a:t>HHS and CDC Tribal consultation resources.</a:t>
             </a:r>
-            <a:endParaRPr lang="en-US" sz="1380" dirty="0"/>
-          </a:p>
-          <a:p>
-            <a:r>
-              <a:rPr lang="en-US" sz="1380" dirty="0">
+            <a:endParaRPr lang="en-US" sz="1220" dirty="0"/>
+          </a:p>
+          <a:p>
+            <a:pPr indent="0" marL="0">
+              <a:buNone/>
+            </a:pPr>
+            <a:r>
+              <a:rPr lang="en-US" sz="1220" dirty="0">
                 <a:solidFill>
                   <a:srgbClr val="17364A"/>
                 </a:solidFill>
@@ -19300,13 +19659,16 @@
                 <a:ea typeface="Aptos" pitchFamily="34" charset="-122"/>
                 <a:cs typeface="Aptos" pitchFamily="34" charset="-120"/>
               </a:rPr>
-              <a:t>Use relevant agency consultation policies and Tribal liaison guidance before starting.</a:t>
-            </a:r>
-            <a:endParaRPr lang="en-US" sz="1380" dirty="0"/>
-          </a:p>
-          <a:p>
-            <a:r>
-              <a:rPr lang="en-US" sz="1380" dirty="0">
+              <a:t>Use relevant agency consultation policies and Tribal liaison.</a:t>
+            </a:r>
+            <a:endParaRPr lang="en-US" sz="1220" dirty="0"/>
+          </a:p>
+          <a:p>
+            <a:pPr indent="0" marL="0">
+              <a:buNone/>
+            </a:pPr>
+            <a:r>
+              <a:rPr lang="en-US" sz="1220" dirty="0">
                 <a:solidFill>
                   <a:srgbClr val="17364A"/>
                 </a:solidFill>
@@ -19316,7 +19678,7 @@
               </a:rPr>
               <a:t>Brookings.</a:t>
             </a:r>
-            <a:endParaRPr lang="en-US" sz="1380" dirty="0"/>
+            <a:endParaRPr lang="en-US" sz="1220" dirty="0"/>
           </a:p>
         </p:txBody>
       </p:sp>
@@ -19394,17 +19756,17 @@
         </p:nvSpPr>
         <p:spPr>
           <a:xfrm>
-            <a:off x="7799832" y="5001768"/>
-            <a:ext cx="3145536" cy="502920"/>
-          </a:xfrm>
-          <a:prstGeom prst="rect">
-            <a:avLst/>
-          </a:prstGeom>
-          <a:noFill/>
-          <a:ln/>
-        </p:spPr>
-        <p:txBody>
-          <a:bodyPr wrap="square" lIns="0" tIns="0" rIns="0" bIns="0" rtlCol="0" anchor="t">
+            <a:off x="7799832" y="4974336"/>
+            <a:ext cx="3145536" cy="576072"/>
+          </a:xfrm>
+          <a:prstGeom prst="rect">
+            <a:avLst/>
+          </a:prstGeom>
+          <a:noFill/>
+          <a:ln/>
+        </p:spPr>
+        <p:txBody>
+          <a:bodyPr wrap="square" lIns="254" tIns="254" rIns="254" bIns="254" rtlCol="0" anchor="t">
             <a:normAutofit/>
           </a:bodyPr>
           <a:lstStyle/>
@@ -19413,7 +19775,7 @@
               <a:buNone/>
             </a:pPr>
             <a:r>
-              <a:rPr lang="en-US" sz="1550" dirty="0">
+              <a:rPr lang="en-US" sz="1320" dirty="0">
                 <a:solidFill>
                   <a:srgbClr val="17364A"/>
                 </a:solidFill>
@@ -19421,9 +19783,9 @@
                 <a:ea typeface="Aptos" pitchFamily="34" charset="-122"/>
                 <a:cs typeface="Aptos" pitchFamily="34" charset="-120"/>
               </a:rPr>
-              <a:t>Translate this concept into clear decision rights, review steps, documentation expectations, and escalation paths before an AI-supported workflow is approved.</a:t>
-            </a:r>
-            <a:endParaRPr lang="en-US" sz="1550" dirty="0"/>
+              <a:t>Translate this concept into clear decision rights, review steps, documentation expectations, and escalation paths before.</a:t>
+            </a:r>
+            <a:endParaRPr lang="en-US" sz="1320" dirty="0"/>
           </a:p>
         </p:txBody>
       </p:sp>
@@ -19724,63 +20086,75 @@
           <a:ln/>
         </p:spPr>
         <p:txBody>
-          <a:bodyPr wrap="square" lIns="635" tIns="635" rIns="635" bIns="635" rtlCol="0" anchor="t">
+          <a:bodyPr wrap="square" lIns="1016" tIns="1016" rIns="1016" bIns="1016" rtlCol="0" anchor="t">
             <a:normAutofit/>
           </a:bodyPr>
           <a:lstStyle/>
           <a:p>
+            <a:pPr indent="0" marL="0">
+              <a:buNone/>
+            </a:pPr>
             <a:r>
               <a:rPr lang="en-US" sz="1850" dirty="0">
                 <a:solidFill>
-                  <a:srgbClr val="17364A"/>
-                </a:solidFill>
-                <a:latin typeface="Aptos" pitchFamily="34" charset="0"/>
-                <a:ea typeface="Aptos" pitchFamily="34" charset="-122"/>
-                <a:cs typeface="Aptos" pitchFamily="34" charset="-120"/>
-              </a:rPr>
-              <a:t>Tool 3: Equity Impact Assessment Checklist (Checklist) - Use this tool to complete or strengthen the.</a:t>
+                  <a:srgbClr val="003A63"/>
+                </a:solidFill>
+                <a:latin typeface="Aptos" pitchFamily="34" charset="0"/>
+                <a:ea typeface="Aptos" pitchFamily="34" charset="-122"/>
+                <a:cs typeface="Aptos" pitchFamily="34" charset="-120"/>
+              </a:rPr>
+              <a:t>• Tool 3: Equity Impact Assessment Checklist (Checklist) - Use this tool to complete or.</a:t>
             </a:r>
             <a:endParaRPr lang="en-US" sz="1850" dirty="0"/>
           </a:p>
           <a:p>
+            <a:pPr indent="0" marL="0">
+              <a:buNone/>
+            </a:pPr>
             <a:r>
               <a:rPr lang="en-US" sz="1850" dirty="0">
                 <a:solidFill>
-                  <a:srgbClr val="17364A"/>
-                </a:solidFill>
-                <a:latin typeface="Aptos" pitchFamily="34" charset="0"/>
-                <a:ea typeface="Aptos" pitchFamily="34" charset="-122"/>
-                <a:cs typeface="Aptos" pitchFamily="34" charset="-120"/>
-              </a:rPr>
-              <a:t>Tool 14: Model Validation &amp; Documentation Standards (Standard) - Use this tool to complete or strengthen the.</a:t>
+                  <a:srgbClr val="003A63"/>
+                </a:solidFill>
+                <a:latin typeface="Aptos" pitchFamily="34" charset="0"/>
+                <a:ea typeface="Aptos" pitchFamily="34" charset="-122"/>
+                <a:cs typeface="Aptos" pitchFamily="34" charset="-120"/>
+              </a:rPr>
+              <a:t>• Tool 14: Model Validation &amp; Documentation Standards (Standard) - Use this tool to complete or.</a:t>
             </a:r>
             <a:endParaRPr lang="en-US" sz="1850" dirty="0"/>
           </a:p>
           <a:p>
+            <a:pPr indent="0" marL="0">
+              <a:buNone/>
+            </a:pPr>
             <a:r>
               <a:rPr lang="en-US" sz="1850" dirty="0">
                 <a:solidFill>
-                  <a:srgbClr val="17364A"/>
-                </a:solidFill>
-                <a:latin typeface="Aptos" pitchFamily="34" charset="0"/>
-                <a:ea typeface="Aptos" pitchFamily="34" charset="-122"/>
-                <a:cs typeface="Aptos" pitchFamily="34" charset="-120"/>
-              </a:rPr>
-              <a:t>Tool 15: Data Use Agreement (AI) Template (Template) - Use this tool to complete or strengthen the practical.</a:t>
+                  <a:srgbClr val="003A63"/>
+                </a:solidFill>
+                <a:latin typeface="Aptos" pitchFamily="34" charset="0"/>
+                <a:ea typeface="Aptos" pitchFamily="34" charset="-122"/>
+                <a:cs typeface="Aptos" pitchFamily="34" charset="-120"/>
+              </a:rPr>
+              <a:t>• Tool 15: Data Use Agreement (AI) Template (Template) - Use this tool to complete or strengthen.</a:t>
             </a:r>
             <a:endParaRPr lang="en-US" sz="1850" dirty="0"/>
           </a:p>
           <a:p>
+            <a:pPr indent="0" marL="0">
+              <a:buNone/>
+            </a:pPr>
             <a:r>
               <a:rPr lang="en-US" sz="1850" dirty="0">
                 <a:solidFill>
-                  <a:srgbClr val="17364A"/>
-                </a:solidFill>
-                <a:latin typeface="Aptos" pitchFamily="34" charset="0"/>
-                <a:ea typeface="Aptos" pitchFamily="34" charset="-122"/>
-                <a:cs typeface="Aptos" pitchFamily="34" charset="-120"/>
-              </a:rPr>
-              <a:t>Tool 49: AI Use Case Intake and Triage Worksheet (Worksheet) - Use this tool to complete or strengthen the.</a:t>
+                  <a:srgbClr val="003A63"/>
+                </a:solidFill>
+                <a:latin typeface="Aptos" pitchFamily="34" charset="0"/>
+                <a:ea typeface="Aptos" pitchFamily="34" charset="-122"/>
+                <a:cs typeface="Aptos" pitchFamily="34" charset="-120"/>
+              </a:rPr>
+              <a:t>• Tool 49: AI Use Case Intake and Triage Worksheet (Worksheet) - Use this tool to complete or.</a:t>
             </a:r>
             <a:endParaRPr lang="en-US" sz="1850" dirty="0"/>
           </a:p>
@@ -19860,17 +20234,17 @@
         </p:nvSpPr>
         <p:spPr>
           <a:xfrm>
-            <a:off x="8211312" y="1920240"/>
-            <a:ext cx="2734056" cy="1463040"/>
-          </a:xfrm>
-          <a:prstGeom prst="rect">
-            <a:avLst/>
-          </a:prstGeom>
-          <a:noFill/>
-          <a:ln/>
-        </p:spPr>
-        <p:txBody>
-          <a:bodyPr wrap="square" lIns="0" tIns="0" rIns="0" bIns="0" rtlCol="0" anchor="t">
+            <a:off x="8211312" y="1892808"/>
+            <a:ext cx="2734056" cy="1536192"/>
+          </a:xfrm>
+          <a:prstGeom prst="rect">
+            <a:avLst/>
+          </a:prstGeom>
+          <a:noFill/>
+          <a:ln/>
+        </p:spPr>
+        <p:txBody>
+          <a:bodyPr wrap="square" lIns="254" tIns="254" rIns="254" bIns="254" rtlCol="0" anchor="t">
             <a:normAutofit/>
           </a:bodyPr>
           <a:lstStyle/>
@@ -19879,7 +20253,7 @@
               <a:buNone/>
             </a:pPr>
             <a:r>
-              <a:rPr lang="en-US" sz="1550" dirty="0">
+              <a:rPr lang="en-US" sz="1320" dirty="0">
                 <a:solidFill>
                   <a:srgbClr val="17364A"/>
                 </a:solidFill>
@@ -19887,9 +20261,9 @@
                 <a:ea typeface="Aptos" pitchFamily="34" charset="-122"/>
                 <a:cs typeface="Aptos" pitchFamily="34" charset="-120"/>
               </a:rPr>
-              <a:t>Use linked tools when your department needs a structured worksheet, template, checklist, review process, or documentation artifact.</a:t>
-            </a:r>
-            <a:endParaRPr lang="en-US" sz="1550" dirty="0"/>
+              <a:t>Use linked tools when your department needs a structured worksheet, template, checklist, review process, or.</a:t>
+            </a:r>
+            <a:endParaRPr lang="en-US" sz="1320" dirty="0"/>
           </a:p>
         </p:txBody>
       </p:sp>
@@ -19977,13 +20351,16 @@
           <a:ln/>
         </p:spPr>
         <p:txBody>
-          <a:bodyPr wrap="square" lIns="254" tIns="254" rIns="254" bIns="254" rtlCol="0" anchor="t">
+          <a:bodyPr wrap="square" lIns="508" tIns="508" rIns="508" bIns="508" rtlCol="0" anchor="t">
             <a:normAutofit/>
           </a:bodyPr>
           <a:lstStyle/>
           <a:p>
-            <a:r>
-              <a:rPr lang="en-US" sz="1380" dirty="0">
+            <a:pPr indent="0" marL="0">
+              <a:buNone/>
+            </a:pPr>
+            <a:r>
+              <a:rPr lang="en-US" sz="1220" dirty="0">
                 <a:solidFill>
                   <a:srgbClr val="17364A"/>
                 </a:solidFill>
@@ -19993,11 +20370,14 @@
               </a:rPr>
               <a:t>Use a tool when no comparable local process exists.</a:t>
             </a:r>
-            <a:endParaRPr lang="en-US" sz="1380" dirty="0"/>
-          </a:p>
-          <a:p>
-            <a:r>
-              <a:rPr lang="en-US" sz="1380" dirty="0">
+            <a:endParaRPr lang="en-US" sz="1220" dirty="0"/>
+          </a:p>
+          <a:p>
+            <a:pPr indent="0" marL="0">
+              <a:buNone/>
+            </a:pPr>
+            <a:r>
+              <a:rPr lang="en-US" sz="1220" dirty="0">
                 <a:solidFill>
                   <a:srgbClr val="17364A"/>
                 </a:solidFill>
@@ -20005,13 +20385,16 @@
                 <a:ea typeface="Aptos" pitchFamily="34" charset="-122"/>
                 <a:cs typeface="Aptos" pitchFamily="34" charset="-120"/>
               </a:rPr>
-              <a:t>Adapt existing department templates when they already fit the purpose.</a:t>
-            </a:r>
-            <a:endParaRPr lang="en-US" sz="1380" dirty="0"/>
-          </a:p>
-          <a:p>
-            <a:r>
-              <a:rPr lang="en-US" sz="1380" dirty="0">
+              <a:t>Adapt existing department templates when they already fit the.</a:t>
+            </a:r>
+            <a:endParaRPr lang="en-US" sz="1220" dirty="0"/>
+          </a:p>
+          <a:p>
+            <a:pPr indent="0" marL="0">
+              <a:buNone/>
+            </a:pPr>
+            <a:r>
+              <a:rPr lang="en-US" sz="1220" dirty="0">
                 <a:solidFill>
                   <a:srgbClr val="17364A"/>
                 </a:solidFill>
@@ -20021,7 +20404,7 @@
               </a:rPr>
               <a:t>Save the completed artifact as evidence of the decision.</a:t>
             </a:r>
-            <a:endParaRPr lang="en-US" sz="1380" dirty="0"/>
+            <a:endParaRPr lang="en-US" sz="1220" dirty="0"/>
           </a:p>
         </p:txBody>
       </p:sp>
@@ -20322,49 +20705,58 @@
           <a:ln/>
         </p:spPr>
         <p:txBody>
-          <a:bodyPr wrap="square" lIns="635" tIns="635" rIns="635" bIns="635" rtlCol="0" anchor="t">
+          <a:bodyPr wrap="square" lIns="1016" tIns="1016" rIns="1016" bIns="1016" rtlCol="0" anchor="t">
             <a:normAutofit/>
           </a:bodyPr>
           <a:lstStyle/>
           <a:p>
+            <a:pPr indent="0" marL="0">
+              <a:buNone/>
+            </a:pPr>
             <a:r>
               <a:rPr lang="en-US" sz="2100" dirty="0">
                 <a:solidFill>
-                  <a:srgbClr val="17364A"/>
-                </a:solidFill>
-                <a:latin typeface="Aptos" pitchFamily="34" charset="0"/>
-                <a:ea typeface="Aptos" pitchFamily="34" charset="-122"/>
-                <a:cs typeface="Aptos" pitchFamily="34" charset="-120"/>
-              </a:rPr>
-              <a:t>Explain why Tribal sovereignty must be considered before starting AI projects that involve Tribal.</a:t>
+                  <a:srgbClr val="003A63"/>
+                </a:solidFill>
+                <a:latin typeface="Aptos" pitchFamily="34" charset="0"/>
+                <a:ea typeface="Aptos" pitchFamily="34" charset="-122"/>
+                <a:cs typeface="Aptos" pitchFamily="34" charset="-120"/>
+              </a:rPr>
+              <a:t>• Explain why Tribal sovereignty must be considered before starting AI projects that involve.</a:t>
             </a:r>
             <a:endParaRPr lang="en-US" sz="2100" dirty="0"/>
           </a:p>
           <a:p>
+            <a:pPr indent="0" marL="0">
+              <a:buNone/>
+            </a:pPr>
             <a:r>
               <a:rPr lang="en-US" sz="2100" dirty="0">
                 <a:solidFill>
-                  <a:srgbClr val="17364A"/>
-                </a:solidFill>
-                <a:latin typeface="Aptos" pitchFamily="34" charset="0"/>
-                <a:ea typeface="Aptos" pitchFamily="34" charset="-122"/>
-                <a:cs typeface="Aptos" pitchFamily="34" charset="-120"/>
-              </a:rPr>
-              <a:t>Describe Indigenous Data Sovereignty, Indigenous Data Governance, Digital Sovereignty, and the CARE.</a:t>
+                  <a:srgbClr val="003A63"/>
+                </a:solidFill>
+                <a:latin typeface="Aptos" pitchFamily="34" charset="0"/>
+                <a:ea typeface="Aptos" pitchFamily="34" charset="-122"/>
+                <a:cs typeface="Aptos" pitchFamily="34" charset="-120"/>
+              </a:rPr>
+              <a:t>• Describe Indigenous Data Sovereignty, Indigenous Data Governance, Digital Sovereignty, and the.</a:t>
             </a:r>
             <a:endParaRPr lang="en-US" sz="2100" dirty="0"/>
           </a:p>
           <a:p>
+            <a:pPr indent="0" marL="0">
+              <a:buNone/>
+            </a:pPr>
             <a:r>
               <a:rPr lang="en-US" sz="2100" dirty="0">
                 <a:solidFill>
-                  <a:srgbClr val="17364A"/>
-                </a:solidFill>
-                <a:latin typeface="Aptos" pitchFamily="34" charset="0"/>
-                <a:ea typeface="Aptos" pitchFamily="34" charset="-122"/>
-                <a:cs typeface="Aptos" pitchFamily="34" charset="-120"/>
-              </a:rPr>
-              <a:t>Identify governance questions that should be addressed before using Tribal data or AI tools in public.</a:t>
+                  <a:srgbClr val="003A63"/>
+                </a:solidFill>
+                <a:latin typeface="Aptos" pitchFamily="34" charset="0"/>
+                <a:ea typeface="Aptos" pitchFamily="34" charset="-122"/>
+                <a:cs typeface="Aptos" pitchFamily="34" charset="-120"/>
+              </a:rPr>
+              <a:t>• Identify governance questions that should be addressed before using Tribal data or AI tools in.</a:t>
             </a:r>
             <a:endParaRPr lang="en-US" sz="2100" dirty="0"/>
           </a:p>
@@ -20444,17 +20836,17 @@
         </p:nvSpPr>
         <p:spPr>
           <a:xfrm>
-            <a:off x="7799832" y="1828800"/>
-            <a:ext cx="3145536" cy="685800"/>
-          </a:xfrm>
-          <a:prstGeom prst="rect">
-            <a:avLst/>
-          </a:prstGeom>
-          <a:noFill/>
-          <a:ln/>
-        </p:spPr>
-        <p:txBody>
-          <a:bodyPr wrap="square" lIns="0" tIns="0" rIns="0" bIns="0" rtlCol="0" anchor="t">
+            <a:off x="7799832" y="1801368"/>
+            <a:ext cx="3145536" cy="758952"/>
+          </a:xfrm>
+          <a:prstGeom prst="rect">
+            <a:avLst/>
+          </a:prstGeom>
+          <a:noFill/>
+          <a:ln/>
+        </p:spPr>
+        <p:txBody>
+          <a:bodyPr wrap="square" lIns="254" tIns="254" rIns="254" bIns="254" rtlCol="0" anchor="t">
             <a:normAutofit/>
           </a:bodyPr>
           <a:lstStyle/>
@@ -20463,7 +20855,7 @@
               <a:buNone/>
             </a:pPr>
             <a:r>
-              <a:rPr lang="en-US" sz="1550" dirty="0">
+              <a:rPr lang="en-US" sz="1320" dirty="0">
                 <a:solidFill>
                   <a:srgbClr val="17364A"/>
                 </a:solidFill>
@@ -20473,7 +20865,7 @@
               </a:rPr>
               <a:t>Explain why Tribal sovereignty must be considered before starting AI projects that involve Tribal.</a:t>
             </a:r>
-            <a:endParaRPr lang="en-US" sz="1550" dirty="0"/>
+            <a:endParaRPr lang="en-US" sz="1320" dirty="0"/>
           </a:p>
         </p:txBody>
       </p:sp>
@@ -20561,13 +20953,16 @@
           <a:ln/>
         </p:spPr>
         <p:txBody>
-          <a:bodyPr wrap="square" lIns="254" tIns="254" rIns="254" bIns="254" rtlCol="0" anchor="t">
+          <a:bodyPr wrap="square" lIns="508" tIns="508" rIns="508" bIns="508" rtlCol="0" anchor="t">
             <a:normAutofit/>
           </a:bodyPr>
           <a:lstStyle/>
           <a:p>
-            <a:r>
-              <a:rPr lang="en-US" sz="1380" dirty="0">
+            <a:pPr indent="0" marL="0">
+              <a:buNone/>
+            </a:pPr>
+            <a:r>
+              <a:rPr lang="en-US" sz="1220" dirty="0">
                 <a:solidFill>
                   <a:srgbClr val="17364A"/>
                 </a:solidFill>
@@ -20575,13 +20970,16 @@
                 <a:ea typeface="Aptos" pitchFamily="34" charset="-122"/>
                 <a:cs typeface="Aptos" pitchFamily="34" charset="-120"/>
               </a:rPr>
-              <a:t>Explain why Tribal sovereignty must be considered before starting AI projects that involve.</a:t>
-            </a:r>
-            <a:endParaRPr lang="en-US" sz="1380" dirty="0"/>
-          </a:p>
-          <a:p>
-            <a:r>
-              <a:rPr lang="en-US" sz="1380" dirty="0">
+              <a:t>Explain why Tribal sovereignty must be considered before starting.</a:t>
+            </a:r>
+            <a:endParaRPr lang="en-US" sz="1220" dirty="0"/>
+          </a:p>
+          <a:p>
+            <a:pPr indent="0" marL="0">
+              <a:buNone/>
+            </a:pPr>
+            <a:r>
+              <a:rPr lang="en-US" sz="1220" dirty="0">
                 <a:solidFill>
                   <a:srgbClr val="17364A"/>
                 </a:solidFill>
@@ -20589,13 +20987,16 @@
                 <a:ea typeface="Aptos" pitchFamily="34" charset="-122"/>
                 <a:cs typeface="Aptos" pitchFamily="34" charset="-120"/>
               </a:rPr>
-              <a:t>Describe Indigenous Data Sovereignty, Indigenous Data Governance, Digital Sovereignty, and.</a:t>
-            </a:r>
-            <a:endParaRPr lang="en-US" sz="1380" dirty="0"/>
-          </a:p>
-          <a:p>
-            <a:r>
-              <a:rPr lang="en-US" sz="1380" dirty="0">
+              <a:t>Describe Indigenous Data Sovereignty, Indigenous Data Governance,.</a:t>
+            </a:r>
+            <a:endParaRPr lang="en-US" sz="1220" dirty="0"/>
+          </a:p>
+          <a:p>
+            <a:pPr indent="0" marL="0">
+              <a:buNone/>
+            </a:pPr>
+            <a:r>
+              <a:rPr lang="en-US" sz="1220" dirty="0">
                 <a:solidFill>
                   <a:srgbClr val="17364A"/>
                 </a:solidFill>
@@ -20603,9 +21004,9 @@
                 <a:ea typeface="Aptos" pitchFamily="34" charset="-122"/>
                 <a:cs typeface="Aptos" pitchFamily="34" charset="-120"/>
               </a:rPr>
-              <a:t>Identify governance questions that should be addressed before using Tribal data or AI.</a:t>
-            </a:r>
-            <a:endParaRPr lang="en-US" sz="1380" dirty="0"/>
+              <a:t>Identify governance questions that should be addressed before.</a:t>
+            </a:r>
+            <a:endParaRPr lang="en-US" sz="1220" dirty="0"/>
           </a:p>
         </p:txBody>
       </p:sp>
@@ -20683,17 +21084,17 @@
         </p:nvSpPr>
         <p:spPr>
           <a:xfrm>
-            <a:off x="7799832" y="5001768"/>
-            <a:ext cx="3145536" cy="502920"/>
-          </a:xfrm>
-          <a:prstGeom prst="rect">
-            <a:avLst/>
-          </a:prstGeom>
-          <a:noFill/>
-          <a:ln/>
-        </p:spPr>
-        <p:txBody>
-          <a:bodyPr wrap="square" lIns="0" tIns="0" rIns="0" bIns="0" rtlCol="0" anchor="t">
+            <a:off x="7799832" y="4974336"/>
+            <a:ext cx="3145536" cy="576072"/>
+          </a:xfrm>
+          <a:prstGeom prst="rect">
+            <a:avLst/>
+          </a:prstGeom>
+          <a:noFill/>
+          <a:ln/>
+        </p:spPr>
+        <p:txBody>
+          <a:bodyPr wrap="square" lIns="254" tIns="254" rIns="254" bIns="254" rtlCol="0" anchor="t">
             <a:normAutofit/>
           </a:bodyPr>
           <a:lstStyle/>
@@ -20702,7 +21103,7 @@
               <a:buNone/>
             </a:pPr>
             <a:r>
-              <a:rPr lang="en-US" sz="1550" dirty="0">
+              <a:rPr lang="en-US" sz="1320" dirty="0">
                 <a:solidFill>
                   <a:srgbClr val="17364A"/>
                 </a:solidFill>
@@ -20710,9 +21111,9 @@
                 <a:ea typeface="Aptos" pitchFamily="34" charset="-122"/>
                 <a:cs typeface="Aptos" pitchFamily="34" charset="-120"/>
               </a:rPr>
-              <a:t>Use the assignment to test whether you can explain the concept, apply it to a realistic public health situation, and identify what would need review before the work moves forward.</a:t>
-            </a:r>
-            <a:endParaRPr lang="en-US" sz="1550" dirty="0"/>
+              <a:t>Use the assignment to test whether you can explain the concept, apply it to a realistic public health situation, and.</a:t>
+            </a:r>
+            <a:endParaRPr lang="en-US" sz="1320" dirty="0"/>
           </a:p>
         </p:txBody>
       </p:sp>
@@ -21013,35 +21414,41 @@
           <a:ln/>
         </p:spPr>
         <p:txBody>
-          <a:bodyPr wrap="square" lIns="635" tIns="635" rIns="635" bIns="635" rtlCol="0" anchor="t">
+          <a:bodyPr wrap="square" lIns="1016" tIns="1016" rIns="1016" bIns="1016" rtlCol="0" anchor="t">
             <a:normAutofit/>
           </a:bodyPr>
           <a:lstStyle/>
           <a:p>
+            <a:pPr indent="0" marL="0">
+              <a:buNone/>
+            </a:pPr>
             <a:r>
               <a:rPr lang="en-US" sz="2100" dirty="0">
                 <a:solidFill>
-                  <a:srgbClr val="17364A"/>
-                </a:solidFill>
-                <a:latin typeface="Aptos" pitchFamily="34" charset="0"/>
-                <a:ea typeface="Aptos" pitchFamily="34" charset="-122"/>
-                <a:cs typeface="Aptos" pitchFamily="34" charset="-120"/>
-              </a:rPr>
-              <a:t>Connect sovereignty protections to practical project artifacts, including Tribal data sharing.</a:t>
+                  <a:srgbClr val="003A63"/>
+                </a:solidFill>
+                <a:latin typeface="Aptos" pitchFamily="34" charset="0"/>
+                <a:ea typeface="Aptos" pitchFamily="34" charset="-122"/>
+                <a:cs typeface="Aptos" pitchFamily="34" charset="-120"/>
+              </a:rPr>
+              <a:t>• Connect sovereignty protections to practical project artifacts, including Tribal data sharing.</a:t>
             </a:r>
             <a:endParaRPr lang="en-US" sz="2100" dirty="0"/>
           </a:p>
           <a:p>
+            <a:pPr indent="0" marL="0">
+              <a:buNone/>
+            </a:pPr>
             <a:r>
               <a:rPr lang="en-US" sz="2100" dirty="0">
                 <a:solidFill>
-                  <a:srgbClr val="17364A"/>
-                </a:solidFill>
-                <a:latin typeface="Aptos" pitchFamily="34" charset="0"/>
-                <a:ea typeface="Aptos" pitchFamily="34" charset="-122"/>
-                <a:cs typeface="Aptos" pitchFamily="34" charset="-120"/>
-              </a:rPr>
-              <a:t>Draft an initial Tribal sovereignty and Indigenous data governance screening memo for a proposed.</a:t>
+                  <a:srgbClr val="003A63"/>
+                </a:solidFill>
+                <a:latin typeface="Aptos" pitchFamily="34" charset="0"/>
+                <a:ea typeface="Aptos" pitchFamily="34" charset="-122"/>
+                <a:cs typeface="Aptos" pitchFamily="34" charset="-120"/>
+              </a:rPr>
+              <a:t>• Draft an initial Tribal sovereignty and Indigenous data governance screening memo for a.</a:t>
             </a:r>
             <a:endParaRPr lang="en-US" sz="2100" dirty="0"/>
           </a:p>
@@ -21121,17 +21528,17 @@
         </p:nvSpPr>
         <p:spPr>
           <a:xfrm>
-            <a:off x="7799832" y="1828800"/>
-            <a:ext cx="3145536" cy="685800"/>
-          </a:xfrm>
-          <a:prstGeom prst="rect">
-            <a:avLst/>
-          </a:prstGeom>
-          <a:noFill/>
-          <a:ln/>
-        </p:spPr>
-        <p:txBody>
-          <a:bodyPr wrap="square" lIns="0" tIns="0" rIns="0" bIns="0" rtlCol="0" anchor="t">
+            <a:off x="7799832" y="1801368"/>
+            <a:ext cx="3145536" cy="758952"/>
+          </a:xfrm>
+          <a:prstGeom prst="rect">
+            <a:avLst/>
+          </a:prstGeom>
+          <a:noFill/>
+          <a:ln/>
+        </p:spPr>
+        <p:txBody>
+          <a:bodyPr wrap="square" lIns="254" tIns="254" rIns="254" bIns="254" rtlCol="0" anchor="t">
             <a:normAutofit/>
           </a:bodyPr>
           <a:lstStyle/>
@@ -21140,7 +21547,7 @@
               <a:buNone/>
             </a:pPr>
             <a:r>
-              <a:rPr lang="en-US" sz="1550" dirty="0">
+              <a:rPr lang="en-US" sz="1320" dirty="0">
                 <a:solidFill>
                   <a:srgbClr val="17364A"/>
                 </a:solidFill>
@@ -21150,7 +21557,7 @@
               </a:rPr>
               <a:t>Connect sovereignty protections to practical project artifacts, including Tribal data sharing.</a:t>
             </a:r>
-            <a:endParaRPr lang="en-US" sz="1550" dirty="0"/>
+            <a:endParaRPr lang="en-US" sz="1320" dirty="0"/>
           </a:p>
         </p:txBody>
       </p:sp>
@@ -21238,13 +21645,16 @@
           <a:ln/>
         </p:spPr>
         <p:txBody>
-          <a:bodyPr wrap="square" lIns="254" tIns="254" rIns="254" bIns="254" rtlCol="0" anchor="t">
+          <a:bodyPr wrap="square" lIns="508" tIns="508" rIns="508" bIns="508" rtlCol="0" anchor="t">
             <a:normAutofit/>
           </a:bodyPr>
           <a:lstStyle/>
           <a:p>
-            <a:r>
-              <a:rPr lang="en-US" sz="1380" dirty="0">
+            <a:pPr indent="0" marL="0">
+              <a:buNone/>
+            </a:pPr>
+            <a:r>
+              <a:rPr lang="en-US" sz="1220" dirty="0">
                 <a:solidFill>
                   <a:srgbClr val="17364A"/>
                 </a:solidFill>
@@ -21252,13 +21662,16 @@
                 <a:ea typeface="Aptos" pitchFamily="34" charset="-122"/>
                 <a:cs typeface="Aptos" pitchFamily="34" charset="-120"/>
               </a:rPr>
-              <a:t>Connect sovereignty protections to practical project artifacts, including Tribal data.</a:t>
-            </a:r>
-            <a:endParaRPr lang="en-US" sz="1380" dirty="0"/>
-          </a:p>
-          <a:p>
-            <a:r>
-              <a:rPr lang="en-US" sz="1380" dirty="0">
+              <a:t>Connect sovereignty protections to practical project artifacts,.</a:t>
+            </a:r>
+            <a:endParaRPr lang="en-US" sz="1220" dirty="0"/>
+          </a:p>
+          <a:p>
+            <a:pPr indent="0" marL="0">
+              <a:buNone/>
+            </a:pPr>
+            <a:r>
+              <a:rPr lang="en-US" sz="1220" dirty="0">
                 <a:solidFill>
                   <a:srgbClr val="17364A"/>
                 </a:solidFill>
@@ -21266,9 +21679,9 @@
                 <a:ea typeface="Aptos" pitchFamily="34" charset="-122"/>
                 <a:cs typeface="Aptos" pitchFamily="34" charset="-120"/>
               </a:rPr>
-              <a:t>Draft an initial Tribal sovereignty and Indigenous data governance screening memo for a.</a:t>
-            </a:r>
-            <a:endParaRPr lang="en-US" sz="1380" dirty="0"/>
+              <a:t>Draft an initial Tribal sovereignty and Indigenous data governance.</a:t>
+            </a:r>
+            <a:endParaRPr lang="en-US" sz="1220" dirty="0"/>
           </a:p>
         </p:txBody>
       </p:sp>
@@ -21346,17 +21759,17 @@
         </p:nvSpPr>
         <p:spPr>
           <a:xfrm>
-            <a:off x="7799832" y="5001768"/>
-            <a:ext cx="3145536" cy="502920"/>
-          </a:xfrm>
-          <a:prstGeom prst="rect">
-            <a:avLst/>
-          </a:prstGeom>
-          <a:noFill/>
-          <a:ln/>
-        </p:spPr>
-        <p:txBody>
-          <a:bodyPr wrap="square" lIns="0" tIns="0" rIns="0" bIns="0" rtlCol="0" anchor="t">
+            <a:off x="7799832" y="4974336"/>
+            <a:ext cx="3145536" cy="576072"/>
+          </a:xfrm>
+          <a:prstGeom prst="rect">
+            <a:avLst/>
+          </a:prstGeom>
+          <a:noFill/>
+          <a:ln/>
+        </p:spPr>
+        <p:txBody>
+          <a:bodyPr wrap="square" lIns="254" tIns="254" rIns="254" bIns="254" rtlCol="0" anchor="t">
             <a:normAutofit/>
           </a:bodyPr>
           <a:lstStyle/>
@@ -21365,7 +21778,7 @@
               <a:buNone/>
             </a:pPr>
             <a:r>
-              <a:rPr lang="en-US" sz="1550" dirty="0">
+              <a:rPr lang="en-US" sz="1320" dirty="0">
                 <a:solidFill>
                   <a:srgbClr val="17364A"/>
                 </a:solidFill>
@@ -21373,9 +21786,9 @@
                 <a:ea typeface="Aptos" pitchFamily="34" charset="-122"/>
                 <a:cs typeface="Aptos" pitchFamily="34" charset="-120"/>
               </a:rPr>
-              <a:t>Use the assignment to test whether you can explain the concept, apply it to a realistic public health situation, and identify what would need review before the work moves forward.</a:t>
-            </a:r>
-            <a:endParaRPr lang="en-US" sz="1550" dirty="0"/>
+              <a:t>Use the assignment to test whether you can explain the concept, apply it to a realistic public health situation, and.</a:t>
+            </a:r>
+            <a:endParaRPr lang="en-US" sz="1320" dirty="0"/>
           </a:p>
         </p:txBody>
       </p:sp>
@@ -21676,49 +22089,58 @@
           <a:ln/>
         </p:spPr>
         <p:txBody>
-          <a:bodyPr wrap="square" lIns="635" tIns="635" rIns="635" bIns="635" rtlCol="0" anchor="t">
+          <a:bodyPr wrap="square" lIns="1016" tIns="1016" rIns="1016" bIns="1016" rtlCol="0" anchor="t">
             <a:normAutofit/>
           </a:bodyPr>
           <a:lstStyle/>
           <a:p>
+            <a:pPr indent="0" marL="0">
+              <a:buNone/>
+            </a:pPr>
             <a:r>
               <a:rPr lang="en-US" sz="2100" dirty="0">
                 <a:solidFill>
-                  <a:srgbClr val="17364A"/>
-                </a:solidFill>
-                <a:latin typeface="Aptos" pitchFamily="34" charset="0"/>
-                <a:ea typeface="Aptos" pitchFamily="34" charset="-122"/>
-                <a:cs typeface="Aptos" pitchFamily="34" charset="-120"/>
-              </a:rPr>
-              <a:t>This module introduces public health staff to the responsibilities that arise when AI projects involve.</a:t>
+                  <a:srgbClr val="003A63"/>
+                </a:solidFill>
+                <a:latin typeface="Aptos" pitchFamily="34" charset="0"/>
+                <a:ea typeface="Aptos" pitchFamily="34" charset="-122"/>
+                <a:cs typeface="Aptos" pitchFamily="34" charset="-120"/>
+              </a:rPr>
+              <a:t>• This module introduces public health staff to the responsibilities that arise when AI projects.</a:t>
             </a:r>
             <a:endParaRPr lang="en-US" sz="2100" dirty="0"/>
           </a:p>
           <a:p>
+            <a:pPr indent="0" marL="0">
+              <a:buNone/>
+            </a:pPr>
             <a:r>
               <a:rPr lang="en-US" sz="2100" dirty="0">
                 <a:solidFill>
-                  <a:srgbClr val="17364A"/>
-                </a:solidFill>
-                <a:latin typeface="Aptos" pitchFamily="34" charset="0"/>
-                <a:ea typeface="Aptos" pitchFamily="34" charset="-122"/>
-                <a:cs typeface="Aptos" pitchFamily="34" charset="-120"/>
-              </a:rPr>
-              <a:t>The central message is that Tribal Nations are sovereign governments, not stakeholder groups, and their.</a:t>
+                  <a:srgbClr val="003A63"/>
+                </a:solidFill>
+                <a:latin typeface="Aptos" pitchFamily="34" charset="0"/>
+                <a:ea typeface="Aptos" pitchFamily="34" charset="-122"/>
+                <a:cs typeface="Aptos" pitchFamily="34" charset="-120"/>
+              </a:rPr>
+              <a:t>• The central message is that Tribal Nations are sovereign governments, not stakeholder groups,.</a:t>
             </a:r>
             <a:endParaRPr lang="en-US" sz="2100" dirty="0"/>
           </a:p>
           <a:p>
+            <a:pPr indent="0" marL="0">
+              <a:buNone/>
+            </a:pPr>
             <a:r>
               <a:rPr lang="en-US" sz="2100" dirty="0">
                 <a:solidFill>
-                  <a:srgbClr val="17364A"/>
-                </a:solidFill>
-                <a:latin typeface="Aptos" pitchFamily="34" charset="0"/>
-                <a:ea typeface="Aptos" pitchFamily="34" charset="-122"/>
-                <a:cs typeface="Aptos" pitchFamily="34" charset="-120"/>
-              </a:rPr>
-              <a:t>AI projects must be shaped through early consultation, formal partnership, and clear agreements before.</a:t>
+                  <a:srgbClr val="003A63"/>
+                </a:solidFill>
+                <a:latin typeface="Aptos" pitchFamily="34" charset="0"/>
+                <a:ea typeface="Aptos" pitchFamily="34" charset="-122"/>
+                <a:cs typeface="Aptos" pitchFamily="34" charset="-120"/>
+              </a:rPr>
+              <a:t>• AI projects must be shaped through early consultation, formal partnership, and clear.</a:t>
             </a:r>
             <a:endParaRPr lang="en-US" sz="2100" dirty="0"/>
           </a:p>
@@ -21798,17 +22220,17 @@
         </p:nvSpPr>
         <p:spPr>
           <a:xfrm>
-            <a:off x="7799832" y="1828800"/>
-            <a:ext cx="3145536" cy="685800"/>
-          </a:xfrm>
-          <a:prstGeom prst="rect">
-            <a:avLst/>
-          </a:prstGeom>
-          <a:noFill/>
-          <a:ln/>
-        </p:spPr>
-        <p:txBody>
-          <a:bodyPr wrap="square" lIns="0" tIns="0" rIns="0" bIns="0" rtlCol="0" anchor="t">
+            <a:off x="7799832" y="1801368"/>
+            <a:ext cx="3145536" cy="758952"/>
+          </a:xfrm>
+          <a:prstGeom prst="rect">
+            <a:avLst/>
+          </a:prstGeom>
+          <a:noFill/>
+          <a:ln/>
+        </p:spPr>
+        <p:txBody>
+          <a:bodyPr wrap="square" lIns="254" tIns="254" rIns="254" bIns="254" rtlCol="0" anchor="t">
             <a:normAutofit/>
           </a:bodyPr>
           <a:lstStyle/>
@@ -21817,7 +22239,7 @@
               <a:buNone/>
             </a:pPr>
             <a:r>
-              <a:rPr lang="en-US" sz="1550" dirty="0">
+              <a:rPr lang="en-US" sz="1320" dirty="0">
                 <a:solidFill>
                   <a:srgbClr val="17364A"/>
                 </a:solidFill>
@@ -21827,7 +22249,7 @@
               </a:rPr>
               <a:t>This module introduces public health staff to the responsibilities that arise when AI projects involve.</a:t>
             </a:r>
-            <a:endParaRPr lang="en-US" sz="1550" dirty="0"/>
+            <a:endParaRPr lang="en-US" sz="1320" dirty="0"/>
           </a:p>
         </p:txBody>
       </p:sp>
@@ -21915,13 +22337,16 @@
           <a:ln/>
         </p:spPr>
         <p:txBody>
-          <a:bodyPr wrap="square" lIns="254" tIns="254" rIns="254" bIns="254" rtlCol="0" anchor="t">
+          <a:bodyPr wrap="square" lIns="508" tIns="508" rIns="508" bIns="508" rtlCol="0" anchor="t">
             <a:normAutofit/>
           </a:bodyPr>
           <a:lstStyle/>
           <a:p>
-            <a:r>
-              <a:rPr lang="en-US" sz="1380" dirty="0">
+            <a:pPr indent="0" marL="0">
+              <a:buNone/>
+            </a:pPr>
+            <a:r>
+              <a:rPr lang="en-US" sz="1220" dirty="0">
                 <a:solidFill>
                   <a:srgbClr val="17364A"/>
                 </a:solidFill>
@@ -21929,13 +22354,16 @@
                 <a:ea typeface="Aptos" pitchFamily="34" charset="-122"/>
                 <a:cs typeface="Aptos" pitchFamily="34" charset="-120"/>
               </a:rPr>
-              <a:t>This module introduces public health staff to the responsibilities that arise when AI.</a:t>
-            </a:r>
-            <a:endParaRPr lang="en-US" sz="1380" dirty="0"/>
-          </a:p>
-          <a:p>
-            <a:r>
-              <a:rPr lang="en-US" sz="1380" dirty="0">
+              <a:t>This module introduces public health staff to the responsibilities.</a:t>
+            </a:r>
+            <a:endParaRPr lang="en-US" sz="1220" dirty="0"/>
+          </a:p>
+          <a:p>
+            <a:pPr indent="0" marL="0">
+              <a:buNone/>
+            </a:pPr>
+            <a:r>
+              <a:rPr lang="en-US" sz="1220" dirty="0">
                 <a:solidFill>
                   <a:srgbClr val="17364A"/>
                 </a:solidFill>
@@ -21943,13 +22371,16 @@
                 <a:ea typeface="Aptos" pitchFamily="34" charset="-122"/>
                 <a:cs typeface="Aptos" pitchFamily="34" charset="-120"/>
               </a:rPr>
-              <a:t>The central message is that Tribal Nations are sovereign governments, not stakeholder.</a:t>
-            </a:r>
-            <a:endParaRPr lang="en-US" sz="1380" dirty="0"/>
-          </a:p>
-          <a:p>
-            <a:r>
-              <a:rPr lang="en-US" sz="1380" dirty="0">
+              <a:t>The central message is that Tribal Nations are sovereign.</a:t>
+            </a:r>
+            <a:endParaRPr lang="en-US" sz="1220" dirty="0"/>
+          </a:p>
+          <a:p>
+            <a:pPr indent="0" marL="0">
+              <a:buNone/>
+            </a:pPr>
+            <a:r>
+              <a:rPr lang="en-US" sz="1220" dirty="0">
                 <a:solidFill>
                   <a:srgbClr val="17364A"/>
                 </a:solidFill>
@@ -21957,9 +22388,9 @@
                 <a:ea typeface="Aptos" pitchFamily="34" charset="-122"/>
                 <a:cs typeface="Aptos" pitchFamily="34" charset="-120"/>
               </a:rPr>
-              <a:t>AI projects must be shaped through early consultation, formal partnership, and clear.</a:t>
-            </a:r>
-            <a:endParaRPr lang="en-US" sz="1380" dirty="0"/>
+              <a:t>AI projects must be shaped through early consultation, formal.</a:t>
+            </a:r>
+            <a:endParaRPr lang="en-US" sz="1220" dirty="0"/>
           </a:p>
         </p:txBody>
       </p:sp>
@@ -22037,17 +22468,17 @@
         </p:nvSpPr>
         <p:spPr>
           <a:xfrm>
-            <a:off x="7799832" y="5001768"/>
-            <a:ext cx="3145536" cy="502920"/>
-          </a:xfrm>
-          <a:prstGeom prst="rect">
-            <a:avLst/>
-          </a:prstGeom>
-          <a:noFill/>
-          <a:ln/>
-        </p:spPr>
-        <p:txBody>
-          <a:bodyPr wrap="square" lIns="0" tIns="0" rIns="0" bIns="0" rtlCol="0" anchor="t">
+            <a:off x="7799832" y="4974336"/>
+            <a:ext cx="3145536" cy="576072"/>
+          </a:xfrm>
+          <a:prstGeom prst="rect">
+            <a:avLst/>
+          </a:prstGeom>
+          <a:noFill/>
+          <a:ln/>
+        </p:spPr>
+        <p:txBody>
+          <a:bodyPr wrap="square" lIns="254" tIns="254" rIns="254" bIns="254" rtlCol="0" anchor="t">
             <a:normAutofit/>
           </a:bodyPr>
           <a:lstStyle/>
@@ -22056,7 +22487,7 @@
               <a:buNone/>
             </a:pPr>
             <a:r>
-              <a:rPr lang="en-US" sz="1550" dirty="0">
+              <a:rPr lang="en-US" sz="1320" dirty="0">
                 <a:solidFill>
                   <a:srgbClr val="17364A"/>
                 </a:solidFill>
@@ -22064,9 +22495,9 @@
                 <a:ea typeface="Aptos" pitchFamily="34" charset="-122"/>
                 <a:cs typeface="Aptos" pitchFamily="34" charset="-120"/>
               </a:rPr>
-              <a:t>Translate this concept into clear decision rights, review steps, documentation expectations, and escalation paths before an AI-supported workflow is approved.</a:t>
-            </a:r>
-            <a:endParaRPr lang="en-US" sz="1550" dirty="0"/>
+              <a:t>Translate this concept into clear decision rights, review steps, documentation expectations, and escalation paths before.</a:t>
+            </a:r>
+            <a:endParaRPr lang="en-US" sz="1320" dirty="0"/>
           </a:p>
         </p:txBody>
       </p:sp>
@@ -22367,49 +22798,58 @@
           <a:ln/>
         </p:spPr>
         <p:txBody>
-          <a:bodyPr wrap="square" lIns="635" tIns="635" rIns="635" bIns="635" rtlCol="0" anchor="t">
+          <a:bodyPr wrap="square" lIns="1016" tIns="1016" rIns="1016" bIns="1016" rtlCol="0" anchor="t">
             <a:normAutofit/>
           </a:bodyPr>
           <a:lstStyle/>
           <a:p>
+            <a:pPr indent="0" marL="0">
+              <a:buNone/>
+            </a:pPr>
             <a:r>
               <a:rPr lang="en-US" sz="2100" dirty="0">
                 <a:solidFill>
-                  <a:srgbClr val="17364A"/>
-                </a:solidFill>
-                <a:latin typeface="Aptos" pitchFamily="34" charset="0"/>
-                <a:ea typeface="Aptos" pitchFamily="34" charset="-122"/>
-                <a:cs typeface="Aptos" pitchFamily="34" charset="-120"/>
-              </a:rPr>
-              <a:t>Tribal sovereignty: The inherent authority of Tribal Nations to govern themselves and protect the.</a:t>
+                  <a:srgbClr val="003A63"/>
+                </a:solidFill>
+                <a:latin typeface="Aptos" pitchFamily="34" charset="0"/>
+                <a:ea typeface="Aptos" pitchFamily="34" charset="-122"/>
+                <a:cs typeface="Aptos" pitchFamily="34" charset="-120"/>
+              </a:rPr>
+              <a:t>• Tribal sovereignty: The inherent authority of Tribal Nations to govern themselves and protect.</a:t>
             </a:r>
             <a:endParaRPr lang="en-US" sz="2100" dirty="0"/>
           </a:p>
           <a:p>
+            <a:pPr indent="0" marL="0">
+              <a:buNone/>
+            </a:pPr>
             <a:r>
               <a:rPr lang="en-US" sz="2100" dirty="0">
                 <a:solidFill>
-                  <a:srgbClr val="17364A"/>
-                </a:solidFill>
-                <a:latin typeface="Aptos" pitchFamily="34" charset="0"/>
-                <a:ea typeface="Aptos" pitchFamily="34" charset="-122"/>
-                <a:cs typeface="Aptos" pitchFamily="34" charset="-120"/>
-              </a:rPr>
-              <a:t>Indigenous Data Sovereignty: The right of Indigenous Peoples and Nations to govern data about them,.</a:t>
+                  <a:srgbClr val="003A63"/>
+                </a:solidFill>
+                <a:latin typeface="Aptos" pitchFamily="34" charset="0"/>
+                <a:ea typeface="Aptos" pitchFamily="34" charset="-122"/>
+                <a:cs typeface="Aptos" pitchFamily="34" charset="-120"/>
+              </a:rPr>
+              <a:t>• Indigenous Data Sovereignty: The right of Indigenous Peoples and Nations to govern data about.</a:t>
             </a:r>
             <a:endParaRPr lang="en-US" sz="2100" dirty="0"/>
           </a:p>
           <a:p>
+            <a:pPr indent="0" marL="0">
+              <a:buNone/>
+            </a:pPr>
             <a:r>
               <a:rPr lang="en-US" sz="2100" dirty="0">
                 <a:solidFill>
-                  <a:srgbClr val="17364A"/>
-                </a:solidFill>
-                <a:latin typeface="Aptos" pitchFamily="34" charset="0"/>
-                <a:ea typeface="Aptos" pitchFamily="34" charset="-122"/>
-                <a:cs typeface="Aptos" pitchFamily="34" charset="-120"/>
-              </a:rPr>
-              <a:t>Indigenous Data Governance: The policies, agreements, relationships, roles, and oversight mechanisms.</a:t>
+                  <a:srgbClr val="003A63"/>
+                </a:solidFill>
+                <a:latin typeface="Aptos" pitchFamily="34" charset="0"/>
+                <a:ea typeface="Aptos" pitchFamily="34" charset="-122"/>
+                <a:cs typeface="Aptos" pitchFamily="34" charset="-120"/>
+              </a:rPr>
+              <a:t>• Indigenous Data Governance: The policies, agreements, relationships, roles, and oversight.</a:t>
             </a:r>
             <a:endParaRPr lang="en-US" sz="2100" dirty="0"/>
           </a:p>
@@ -22489,17 +22929,17 @@
         </p:nvSpPr>
         <p:spPr>
           <a:xfrm>
-            <a:off x="7799832" y="1828800"/>
-            <a:ext cx="3145536" cy="685800"/>
-          </a:xfrm>
-          <a:prstGeom prst="rect">
-            <a:avLst/>
-          </a:prstGeom>
-          <a:noFill/>
-          <a:ln/>
-        </p:spPr>
-        <p:txBody>
-          <a:bodyPr wrap="square" lIns="0" tIns="0" rIns="0" bIns="0" rtlCol="0" anchor="t">
+            <a:off x="7799832" y="1801368"/>
+            <a:ext cx="3145536" cy="758952"/>
+          </a:xfrm>
+          <a:prstGeom prst="rect">
+            <a:avLst/>
+          </a:prstGeom>
+          <a:noFill/>
+          <a:ln/>
+        </p:spPr>
+        <p:txBody>
+          <a:bodyPr wrap="square" lIns="254" tIns="254" rIns="254" bIns="254" rtlCol="0" anchor="t">
             <a:normAutofit/>
           </a:bodyPr>
           <a:lstStyle/>
@@ -22508,7 +22948,7 @@
               <a:buNone/>
             </a:pPr>
             <a:r>
-              <a:rPr lang="en-US" sz="1550" dirty="0">
+              <a:rPr lang="en-US" sz="1320" dirty="0">
                 <a:solidFill>
                   <a:srgbClr val="17364A"/>
                 </a:solidFill>
@@ -22518,7 +22958,7 @@
               </a:rPr>
               <a:t>Tribal sovereignty: The inherent authority of Tribal Nations to govern themselves and protect the.</a:t>
             </a:r>
-            <a:endParaRPr lang="en-US" sz="1550" dirty="0"/>
+            <a:endParaRPr lang="en-US" sz="1320" dirty="0"/>
           </a:p>
         </p:txBody>
       </p:sp>
@@ -22606,13 +23046,16 @@
           <a:ln/>
         </p:spPr>
         <p:txBody>
-          <a:bodyPr wrap="square" lIns="254" tIns="254" rIns="254" bIns="254" rtlCol="0" anchor="t">
+          <a:bodyPr wrap="square" lIns="508" tIns="508" rIns="508" bIns="508" rtlCol="0" anchor="t">
             <a:normAutofit/>
           </a:bodyPr>
           <a:lstStyle/>
           <a:p>
-            <a:r>
-              <a:rPr lang="en-US" sz="1380" dirty="0">
+            <a:pPr indent="0" marL="0">
+              <a:buNone/>
+            </a:pPr>
+            <a:r>
+              <a:rPr lang="en-US" sz="1220" dirty="0">
                 <a:solidFill>
                   <a:srgbClr val="17364A"/>
                 </a:solidFill>
@@ -22620,13 +23063,16 @@
                 <a:ea typeface="Aptos" pitchFamily="34" charset="-122"/>
                 <a:cs typeface="Aptos" pitchFamily="34" charset="-120"/>
               </a:rPr>
-              <a:t>Tribal sovereignty: The inherent authority of Tribal Nations to govern themselves and.</a:t>
-            </a:r>
-            <a:endParaRPr lang="en-US" sz="1380" dirty="0"/>
-          </a:p>
-          <a:p>
-            <a:r>
-              <a:rPr lang="en-US" sz="1380" dirty="0">
+              <a:t>Tribal sovereignty: The inherent authority of Tribal Nations to.</a:t>
+            </a:r>
+            <a:endParaRPr lang="en-US" sz="1220" dirty="0"/>
+          </a:p>
+          <a:p>
+            <a:pPr indent="0" marL="0">
+              <a:buNone/>
+            </a:pPr>
+            <a:r>
+              <a:rPr lang="en-US" sz="1220" dirty="0">
                 <a:solidFill>
                   <a:srgbClr val="17364A"/>
                 </a:solidFill>
@@ -22634,13 +23080,16 @@
                 <a:ea typeface="Aptos" pitchFamily="34" charset="-122"/>
                 <a:cs typeface="Aptos" pitchFamily="34" charset="-120"/>
               </a:rPr>
-              <a:t>Indigenous Data Sovereignty: The right of Indigenous Peoples and Nations to govern data.</a:t>
-            </a:r>
-            <a:endParaRPr lang="en-US" sz="1380" dirty="0"/>
-          </a:p>
-          <a:p>
-            <a:r>
-              <a:rPr lang="en-US" sz="1380" dirty="0">
+              <a:t>Indigenous Data Sovereignty: The right of Indigenous Peoples and.</a:t>
+            </a:r>
+            <a:endParaRPr lang="en-US" sz="1220" dirty="0"/>
+          </a:p>
+          <a:p>
+            <a:pPr indent="0" marL="0">
+              <a:buNone/>
+            </a:pPr>
+            <a:r>
+              <a:rPr lang="en-US" sz="1220" dirty="0">
                 <a:solidFill>
                   <a:srgbClr val="17364A"/>
                 </a:solidFill>
@@ -22648,9 +23097,9 @@
                 <a:ea typeface="Aptos" pitchFamily="34" charset="-122"/>
                 <a:cs typeface="Aptos" pitchFamily="34" charset="-120"/>
               </a:rPr>
-              <a:t>Indigenous Data Governance: The policies, agreements, relationships, roles, and oversight.</a:t>
-            </a:r>
-            <a:endParaRPr lang="en-US" sz="1380" dirty="0"/>
+              <a:t>Indigenous Data Governance: The policies, agreements,.</a:t>
+            </a:r>
+            <a:endParaRPr lang="en-US" sz="1220" dirty="0"/>
           </a:p>
         </p:txBody>
       </p:sp>
@@ -22728,17 +23177,17 @@
         </p:nvSpPr>
         <p:spPr>
           <a:xfrm>
-            <a:off x="7799832" y="5001768"/>
-            <a:ext cx="3145536" cy="502920"/>
-          </a:xfrm>
-          <a:prstGeom prst="rect">
-            <a:avLst/>
-          </a:prstGeom>
-          <a:noFill/>
-          <a:ln/>
-        </p:spPr>
-        <p:txBody>
-          <a:bodyPr wrap="square" lIns="0" tIns="0" rIns="0" bIns="0" rtlCol="0" anchor="t">
+            <a:off x="7799832" y="4974336"/>
+            <a:ext cx="3145536" cy="576072"/>
+          </a:xfrm>
+          <a:prstGeom prst="rect">
+            <a:avLst/>
+          </a:prstGeom>
+          <a:noFill/>
+          <a:ln/>
+        </p:spPr>
+        <p:txBody>
+          <a:bodyPr wrap="square" lIns="254" tIns="254" rIns="254" bIns="254" rtlCol="0" anchor="t">
             <a:normAutofit/>
           </a:bodyPr>
           <a:lstStyle/>
@@ -22747,7 +23196,7 @@
               <a:buNone/>
             </a:pPr>
             <a:r>
-              <a:rPr lang="en-US" sz="1550" dirty="0">
+              <a:rPr lang="en-US" sz="1320" dirty="0">
                 <a:solidFill>
                   <a:srgbClr val="17364A"/>
                 </a:solidFill>
@@ -22755,9 +23204,9 @@
                 <a:ea typeface="Aptos" pitchFamily="34" charset="-122"/>
                 <a:cs typeface="Aptos" pitchFamily="34" charset="-120"/>
               </a:rPr>
-              <a:t>Translate this concept into clear decision rights, review steps, documentation expectations, and escalation paths before an AI-supported workflow is approved.</a:t>
-            </a:r>
-            <a:endParaRPr lang="en-US" sz="1550" dirty="0"/>
+              <a:t>Translate this concept into clear decision rights, review steps, documentation expectations, and escalation paths before.</a:t>
+            </a:r>
+            <a:endParaRPr lang="en-US" sz="1320" dirty="0"/>
           </a:p>
         </p:txBody>
       </p:sp>
@@ -23058,21 +23507,24 @@
           <a:ln/>
         </p:spPr>
         <p:txBody>
-          <a:bodyPr wrap="square" lIns="635" tIns="635" rIns="635" bIns="635" rtlCol="0" anchor="t">
+          <a:bodyPr wrap="square" lIns="1016" tIns="1016" rIns="1016" bIns="1016" rtlCol="0" anchor="t">
             <a:normAutofit/>
           </a:bodyPr>
           <a:lstStyle/>
           <a:p>
+            <a:pPr indent="0" marL="0">
+              <a:buNone/>
+            </a:pPr>
             <a:r>
               <a:rPr lang="en-US" sz="2100" dirty="0">
                 <a:solidFill>
-                  <a:srgbClr val="17364A"/>
-                </a:solidFill>
-                <a:latin typeface="Aptos" pitchFamily="34" charset="0"/>
-                <a:ea typeface="Aptos" pitchFamily="34" charset="-122"/>
-                <a:cs typeface="Aptos" pitchFamily="34" charset="-120"/>
-              </a:rPr>
-              <a:t>Cultural humility: An ongoing practice of learning, accountability, and respect that recognizes power.</a:t>
+                  <a:srgbClr val="003A63"/>
+                </a:solidFill>
+                <a:latin typeface="Aptos" pitchFamily="34" charset="0"/>
+                <a:ea typeface="Aptos" pitchFamily="34" charset="-122"/>
+                <a:cs typeface="Aptos" pitchFamily="34" charset="-120"/>
+              </a:rPr>
+              <a:t>• Cultural humility: An ongoing practice of learning, accountability, and respect that.</a:t>
             </a:r>
             <a:endParaRPr lang="en-US" sz="2100" dirty="0"/>
           </a:p>
@@ -23152,17 +23604,17 @@
         </p:nvSpPr>
         <p:spPr>
           <a:xfrm>
-            <a:off x="7799832" y="1828800"/>
-            <a:ext cx="3145536" cy="685800"/>
-          </a:xfrm>
-          <a:prstGeom prst="rect">
-            <a:avLst/>
-          </a:prstGeom>
-          <a:noFill/>
-          <a:ln/>
-        </p:spPr>
-        <p:txBody>
-          <a:bodyPr wrap="square" lIns="0" tIns="0" rIns="0" bIns="0" rtlCol="0" anchor="t">
+            <a:off x="7799832" y="1801368"/>
+            <a:ext cx="3145536" cy="758952"/>
+          </a:xfrm>
+          <a:prstGeom prst="rect">
+            <a:avLst/>
+          </a:prstGeom>
+          <a:noFill/>
+          <a:ln/>
+        </p:spPr>
+        <p:txBody>
+          <a:bodyPr wrap="square" lIns="254" tIns="254" rIns="254" bIns="254" rtlCol="0" anchor="t">
             <a:normAutofit/>
           </a:bodyPr>
           <a:lstStyle/>
@@ -23171,7 +23623,7 @@
               <a:buNone/>
             </a:pPr>
             <a:r>
-              <a:rPr lang="en-US" sz="1550" dirty="0">
+              <a:rPr lang="en-US" sz="1320" dirty="0">
                 <a:solidFill>
                   <a:srgbClr val="17364A"/>
                 </a:solidFill>
@@ -23181,7 +23633,7 @@
               </a:rPr>
               <a:t>Cultural humility: An ongoing practice of learning, accountability, and respect that recognizes power.</a:t>
             </a:r>
-            <a:endParaRPr lang="en-US" sz="1550" dirty="0"/>
+            <a:endParaRPr lang="en-US" sz="1320" dirty="0"/>
           </a:p>
         </p:txBody>
       </p:sp>
@@ -23269,13 +23721,16 @@
           <a:ln/>
         </p:spPr>
         <p:txBody>
-          <a:bodyPr wrap="square" lIns="254" tIns="254" rIns="254" bIns="254" rtlCol="0" anchor="t">
+          <a:bodyPr wrap="square" lIns="508" tIns="508" rIns="508" bIns="508" rtlCol="0" anchor="t">
             <a:normAutofit/>
           </a:bodyPr>
           <a:lstStyle/>
           <a:p>
-            <a:r>
-              <a:rPr lang="en-US" sz="1380" dirty="0">
+            <a:pPr indent="0" marL="0">
+              <a:buNone/>
+            </a:pPr>
+            <a:r>
+              <a:rPr lang="en-US" sz="1220" dirty="0">
                 <a:solidFill>
                   <a:srgbClr val="17364A"/>
                 </a:solidFill>
@@ -23283,9 +23738,9 @@
                 <a:ea typeface="Aptos" pitchFamily="34" charset="-122"/>
                 <a:cs typeface="Aptos" pitchFamily="34" charset="-120"/>
               </a:rPr>
-              <a:t>Cultural humility: An ongoing practice of learning, accountability, and respect that.</a:t>
-            </a:r>
-            <a:endParaRPr lang="en-US" sz="1380" dirty="0"/>
+              <a:t>Cultural humility: An ongoing practice of learning,.</a:t>
+            </a:r>
+            <a:endParaRPr lang="en-US" sz="1220" dirty="0"/>
           </a:p>
         </p:txBody>
       </p:sp>
@@ -23363,17 +23818,17 @@
         </p:nvSpPr>
         <p:spPr>
           <a:xfrm>
-            <a:off x="7799832" y="5001768"/>
-            <a:ext cx="3145536" cy="502920"/>
-          </a:xfrm>
-          <a:prstGeom prst="rect">
-            <a:avLst/>
-          </a:prstGeom>
-          <a:noFill/>
-          <a:ln/>
-        </p:spPr>
-        <p:txBody>
-          <a:bodyPr wrap="square" lIns="0" tIns="0" rIns="0" bIns="0" rtlCol="0" anchor="t">
+            <a:off x="7799832" y="4974336"/>
+            <a:ext cx="3145536" cy="576072"/>
+          </a:xfrm>
+          <a:prstGeom prst="rect">
+            <a:avLst/>
+          </a:prstGeom>
+          <a:noFill/>
+          <a:ln/>
+        </p:spPr>
+        <p:txBody>
+          <a:bodyPr wrap="square" lIns="254" tIns="254" rIns="254" bIns="254" rtlCol="0" anchor="t">
             <a:normAutofit/>
           </a:bodyPr>
           <a:lstStyle/>
@@ -23382,7 +23837,7 @@
               <a:buNone/>
             </a:pPr>
             <a:r>
-              <a:rPr lang="en-US" sz="1550" dirty="0">
+              <a:rPr lang="en-US" sz="1320" dirty="0">
                 <a:solidFill>
                   <a:srgbClr val="17364A"/>
                 </a:solidFill>
@@ -23390,9 +23845,9 @@
                 <a:ea typeface="Aptos" pitchFamily="34" charset="-122"/>
                 <a:cs typeface="Aptos" pitchFamily="34" charset="-120"/>
               </a:rPr>
-              <a:t>Translate this concept into clear decision rights, review steps, documentation expectations, and escalation paths before an AI-supported workflow is approved.</a:t>
-            </a:r>
-            <a:endParaRPr lang="en-US" sz="1550" dirty="0"/>
+              <a:t>Translate this concept into clear decision rights, review steps, documentation expectations, and escalation paths before.</a:t>
+            </a:r>
+            <a:endParaRPr lang="en-US" sz="1320" dirty="0"/>
           </a:p>
         </p:txBody>
       </p:sp>

--- a/downloads/presentations/modules/gov-110.pptx
+++ b/downloads/presentations/modules/gov-110.pptx
@@ -4161,11 +4161,11 @@
         <p:spPr>
           <a:xfrm>
             <a:off x="7635240" y="1325880"/>
-            <a:ext cx="3474720" cy="1325880"/>
+            <a:ext cx="3474720" cy="1207008"/>
           </a:xfrm>
           <a:prstGeom prst="roundRect">
             <a:avLst>
-              <a:gd name="adj" fmla="val 8276"/>
+              <a:gd name="adj" fmla="val 9091"/>
             </a:avLst>
           </a:prstGeom>
           <a:solidFill>
@@ -4227,7 +4227,7 @@
         <p:spPr>
           <a:xfrm>
             <a:off x="7799832" y="1801368"/>
-            <a:ext cx="3145536" cy="758952"/>
+            <a:ext cx="3145536" cy="640080"/>
           </a:xfrm>
           <a:prstGeom prst="rect">
             <a:avLst/>
@@ -4267,12 +4267,12 @@
         </p:nvSpPr>
         <p:spPr>
           <a:xfrm>
-            <a:off x="7635240" y="2788920"/>
-            <a:ext cx="3474720" cy="1536192"/>
+            <a:off x="7635240" y="2670048"/>
+            <a:ext cx="3474720" cy="1377086"/>
           </a:xfrm>
           <a:prstGeom prst="roundRect">
             <a:avLst>
-              <a:gd name="adj" fmla="val 7143"/>
+              <a:gd name="adj" fmla="val 7968"/>
             </a:avLst>
           </a:prstGeom>
           <a:solidFill>
@@ -4294,8 +4294,8 @@
         </p:nvSpPr>
         <p:spPr>
           <a:xfrm>
-            <a:off x="7799832" y="2935224"/>
-            <a:ext cx="3145536" cy="256032"/>
+            <a:off x="7799832" y="2798064"/>
+            <a:ext cx="3145536" cy="237744"/>
           </a:xfrm>
           <a:prstGeom prst="rect">
             <a:avLst/>
@@ -4311,7 +4311,7 @@
               <a:buNone/>
             </a:pPr>
             <a:r>
-              <a:rPr lang="en-US" sz="1300" b="1" dirty="0">
+              <a:rPr lang="en-US" sz="1250" b="1" dirty="0">
                 <a:solidFill>
                   <a:srgbClr val="0068B7"/>
                 </a:solidFill>
@@ -4319,101 +4319,317 @@
                 <a:ea typeface="Aptos" pitchFamily="34" charset="-122"/>
                 <a:cs typeface="Aptos" pitchFamily="34" charset="-120"/>
               </a:rPr>
-              <a:t>Concept checkpoints</a:t>
-            </a:r>
-            <a:endParaRPr lang="en-US" sz="1300" dirty="0"/>
-          </a:p>
-        </p:txBody>
-      </p:sp>
-      <p:sp>
-        <p:nvSpPr>
-          <p:cNvPr id="15" name="Text 13"/>
-          <p:cNvSpPr/>
-          <p:nvPr/>
-        </p:nvSpPr>
-        <p:spPr>
-          <a:xfrm>
-            <a:off x="7818120" y="3300984"/>
-            <a:ext cx="3090672" cy="877824"/>
-          </a:xfrm>
-          <a:prstGeom prst="rect">
-            <a:avLst/>
-          </a:prstGeom>
-          <a:noFill/>
-          <a:ln/>
-        </p:spPr>
-        <p:txBody>
-          <a:bodyPr wrap="square" lIns="508" tIns="508" rIns="508" bIns="508" rtlCol="0" anchor="t">
+              <a:t>Governance pathway</a:t>
+            </a:r>
+            <a:endParaRPr lang="en-US" sz="1250" dirty="0"/>
+          </a:p>
+        </p:txBody>
+      </p:sp>
+      <p:sp>
+        <p:nvSpPr>
+          <p:cNvPr id="15" name="Shape 13"/>
+          <p:cNvSpPr/>
+          <p:nvPr/>
+        </p:nvSpPr>
+        <p:spPr>
+          <a:xfrm>
+            <a:off x="8763000" y="3351276"/>
+            <a:ext cx="164592" cy="0"/>
+          </a:xfrm>
+          <a:prstGeom prst="line">
+            <a:avLst/>
+          </a:prstGeom>
+          <a:noFill/>
+          <a:ln w="15240">
+            <a:solidFill>
+              <a:srgbClr val="8ABBD8"/>
+            </a:solidFill>
+            <a:prstDash val="solid"/>
+          </a:ln>
+        </p:spPr>
+      </p:sp>
+      <p:sp>
+        <p:nvSpPr>
+          <p:cNvPr id="16" name="Shape 14"/>
+          <p:cNvSpPr/>
+          <p:nvPr/>
+        </p:nvSpPr>
+        <p:spPr>
+          <a:xfrm>
+            <a:off x="7872984" y="3200400"/>
+            <a:ext cx="890016" cy="301752"/>
+          </a:xfrm>
+          <a:prstGeom prst="roundRect">
+            <a:avLst>
+              <a:gd name="adj" fmla="val 24242"/>
+            </a:avLst>
+          </a:prstGeom>
+          <a:solidFill>
+            <a:srgbClr val="0068B7"/>
+          </a:solidFill>
+          <a:ln w="12700">
+            <a:solidFill>
+              <a:srgbClr val="0068B7"/>
+            </a:solidFill>
+            <a:prstDash val="solid"/>
+          </a:ln>
+        </p:spPr>
+      </p:sp>
+      <p:sp>
+        <p:nvSpPr>
+          <p:cNvPr id="17" name="Text 15"/>
+          <p:cNvSpPr/>
+          <p:nvPr/>
+        </p:nvSpPr>
+        <p:spPr>
+          <a:xfrm>
+            <a:off x="7909560" y="3273552"/>
+            <a:ext cx="816864" cy="146304"/>
+          </a:xfrm>
+          <a:prstGeom prst="rect">
+            <a:avLst/>
+          </a:prstGeom>
+          <a:noFill/>
+          <a:ln/>
+        </p:spPr>
+        <p:txBody>
+          <a:bodyPr wrap="square" lIns="0" tIns="0" rIns="0" bIns="0" rtlCol="0" anchor="ctr">
             <a:normAutofit/>
           </a:bodyPr>
           <a:lstStyle/>
           <a:p>
-            <a:pPr indent="0" marL="0">
-              <a:buNone/>
-            </a:pPr>
-            <a:r>
-              <a:rPr lang="en-US" sz="1220" dirty="0">
-                <a:solidFill>
-                  <a:srgbClr val="17364A"/>
-                </a:solidFill>
-                <a:latin typeface="Aptos" pitchFamily="34" charset="0"/>
-                <a:ea typeface="Aptos" pitchFamily="34" charset="-122"/>
-                <a:cs typeface="Aptos" pitchFamily="34" charset="-120"/>
-              </a:rPr>
-              <a:t>It does not replace Tribal law, Tribal policy, Tribal.</a:t>
-            </a:r>
-            <a:endParaRPr lang="en-US" sz="1220" dirty="0"/>
-          </a:p>
-          <a:p>
-            <a:pPr indent="0" marL="0">
-              <a:buNone/>
-            </a:pPr>
-            <a:r>
-              <a:rPr lang="en-US" sz="1220" dirty="0">
-                <a:solidFill>
-                  <a:srgbClr val="17364A"/>
-                </a:solidFill>
-                <a:latin typeface="Aptos" pitchFamily="34" charset="0"/>
-                <a:ea typeface="Aptos" pitchFamily="34" charset="-122"/>
-                <a:cs typeface="Aptos" pitchFamily="34" charset="-120"/>
-              </a:rPr>
-              <a:t>Requirements may vary by Tribal Nation, jurisdiction, funding.</a:t>
-            </a:r>
-            <a:endParaRPr lang="en-US" sz="1220" dirty="0"/>
-          </a:p>
-          <a:p>
-            <a:pPr indent="0" marL="0">
-              <a:buNone/>
-            </a:pPr>
-            <a:r>
-              <a:rPr lang="en-US" sz="1220" dirty="0">
-                <a:solidFill>
-                  <a:srgbClr val="17364A"/>
-                </a:solidFill>
-                <a:latin typeface="Aptos" pitchFamily="34" charset="0"/>
-                <a:ea typeface="Aptos" pitchFamily="34" charset="-122"/>
-                <a:cs typeface="Aptos" pitchFamily="34" charset="-120"/>
-              </a:rPr>
-              <a:t>Learners should confirm applicable requirements before approving,.</a:t>
-            </a:r>
-            <a:endParaRPr lang="en-US" sz="1220" dirty="0"/>
-          </a:p>
-        </p:txBody>
-      </p:sp>
-      <p:sp>
-        <p:nvSpPr>
-          <p:cNvPr id="16" name="Shape 14"/>
-          <p:cNvSpPr/>
-          <p:nvPr/>
-        </p:nvSpPr>
-        <p:spPr>
-          <a:xfrm>
-            <a:off x="7635240" y="4498848"/>
-            <a:ext cx="3474720" cy="1143000"/>
+            <a:pPr algn="ctr" indent="0" marL="0">
+              <a:buNone/>
+            </a:pPr>
+            <a:r>
+              <a:rPr lang="en-US" sz="880" b="1" dirty="0">
+                <a:solidFill>
+                  <a:srgbClr val="FFFFFF"/>
+                </a:solidFill>
+                <a:latin typeface="Aptos" pitchFamily="34" charset="0"/>
+                <a:ea typeface="Aptos" pitchFamily="34" charset="-122"/>
+                <a:cs typeface="Aptos" pitchFamily="34" charset="-120"/>
+              </a:rPr>
+              <a:t>Submit</a:t>
+            </a:r>
+            <a:endParaRPr lang="en-US" sz="880" dirty="0"/>
+          </a:p>
+        </p:txBody>
+      </p:sp>
+      <p:sp>
+        <p:nvSpPr>
+          <p:cNvPr id="18" name="Shape 16"/>
+          <p:cNvSpPr/>
+          <p:nvPr/>
+        </p:nvSpPr>
+        <p:spPr>
+          <a:xfrm>
+            <a:off x="9817608" y="3351276"/>
+            <a:ext cx="164592" cy="0"/>
+          </a:xfrm>
+          <a:prstGeom prst="line">
+            <a:avLst/>
+          </a:prstGeom>
+          <a:noFill/>
+          <a:ln w="15240">
+            <a:solidFill>
+              <a:srgbClr val="8ABBD8"/>
+            </a:solidFill>
+            <a:prstDash val="solid"/>
+          </a:ln>
+        </p:spPr>
+      </p:sp>
+      <p:sp>
+        <p:nvSpPr>
+          <p:cNvPr id="19" name="Shape 17"/>
+          <p:cNvSpPr/>
+          <p:nvPr/>
+        </p:nvSpPr>
+        <p:spPr>
+          <a:xfrm>
+            <a:off x="8927592" y="3200400"/>
+            <a:ext cx="890016" cy="301752"/>
           </a:xfrm>
           <a:prstGeom prst="roundRect">
             <a:avLst>
-              <a:gd name="adj" fmla="val 9600"/>
+              <a:gd name="adj" fmla="val 24242"/>
+            </a:avLst>
+          </a:prstGeom>
+          <a:solidFill>
+            <a:srgbClr val="2F8A28"/>
+          </a:solidFill>
+          <a:ln w="12700">
+            <a:solidFill>
+              <a:srgbClr val="2F8A28"/>
+            </a:solidFill>
+            <a:prstDash val="solid"/>
+          </a:ln>
+        </p:spPr>
+      </p:sp>
+      <p:sp>
+        <p:nvSpPr>
+          <p:cNvPr id="20" name="Text 18"/>
+          <p:cNvSpPr/>
+          <p:nvPr/>
+        </p:nvSpPr>
+        <p:spPr>
+          <a:xfrm>
+            <a:off x="8964168" y="3273552"/>
+            <a:ext cx="816864" cy="146304"/>
+          </a:xfrm>
+          <a:prstGeom prst="rect">
+            <a:avLst/>
+          </a:prstGeom>
+          <a:noFill/>
+          <a:ln/>
+        </p:spPr>
+        <p:txBody>
+          <a:bodyPr wrap="square" lIns="0" tIns="0" rIns="0" bIns="0" rtlCol="0" anchor="ctr">
+            <a:normAutofit/>
+          </a:bodyPr>
+          <a:lstStyle/>
+          <a:p>
+            <a:pPr algn="ctr" indent="0" marL="0">
+              <a:buNone/>
+            </a:pPr>
+            <a:r>
+              <a:rPr lang="en-US" sz="880" b="1" dirty="0">
+                <a:solidFill>
+                  <a:srgbClr val="FFFFFF"/>
+                </a:solidFill>
+                <a:latin typeface="Aptos" pitchFamily="34" charset="0"/>
+                <a:ea typeface="Aptos" pitchFamily="34" charset="-122"/>
+                <a:cs typeface="Aptos" pitchFamily="34" charset="-120"/>
+              </a:rPr>
+              <a:t>Review</a:t>
+            </a:r>
+            <a:endParaRPr lang="en-US" sz="880" dirty="0"/>
+          </a:p>
+        </p:txBody>
+      </p:sp>
+      <p:sp>
+        <p:nvSpPr>
+          <p:cNvPr id="21" name="Shape 19"/>
+          <p:cNvSpPr/>
+          <p:nvPr/>
+        </p:nvSpPr>
+        <p:spPr>
+          <a:xfrm>
+            <a:off x="9982200" y="3200400"/>
+            <a:ext cx="890016" cy="301752"/>
+          </a:xfrm>
+          <a:prstGeom prst="roundRect">
+            <a:avLst>
+              <a:gd name="adj" fmla="val 24242"/>
+            </a:avLst>
+          </a:prstGeom>
+          <a:solidFill>
+            <a:srgbClr val="6A4CA3"/>
+          </a:solidFill>
+          <a:ln w="12700">
+            <a:solidFill>
+              <a:srgbClr val="6A4CA3"/>
+            </a:solidFill>
+            <a:prstDash val="solid"/>
+          </a:ln>
+        </p:spPr>
+      </p:sp>
+      <p:sp>
+        <p:nvSpPr>
+          <p:cNvPr id="22" name="Text 20"/>
+          <p:cNvSpPr/>
+          <p:nvPr/>
+        </p:nvSpPr>
+        <p:spPr>
+          <a:xfrm>
+            <a:off x="10018776" y="3273552"/>
+            <a:ext cx="816864" cy="146304"/>
+          </a:xfrm>
+          <a:prstGeom prst="rect">
+            <a:avLst/>
+          </a:prstGeom>
+          <a:noFill/>
+          <a:ln/>
+        </p:spPr>
+        <p:txBody>
+          <a:bodyPr wrap="square" lIns="0" tIns="0" rIns="0" bIns="0" rtlCol="0" anchor="ctr">
+            <a:normAutofit/>
+          </a:bodyPr>
+          <a:lstStyle/>
+          <a:p>
+            <a:pPr algn="ctr" indent="0" marL="0">
+              <a:buNone/>
+            </a:pPr>
+            <a:r>
+              <a:rPr lang="en-US" sz="880" b="1" dirty="0">
+                <a:solidFill>
+                  <a:srgbClr val="FFFFFF"/>
+                </a:solidFill>
+                <a:latin typeface="Aptos" pitchFamily="34" charset="0"/>
+                <a:ea typeface="Aptos" pitchFamily="34" charset="-122"/>
+                <a:cs typeface="Aptos" pitchFamily="34" charset="-120"/>
+              </a:rPr>
+              <a:t>Oversee</a:t>
+            </a:r>
+            <a:endParaRPr lang="en-US" sz="880" dirty="0"/>
+          </a:p>
+        </p:txBody>
+      </p:sp>
+      <p:sp>
+        <p:nvSpPr>
+          <p:cNvPr id="23" name="Text 21"/>
+          <p:cNvSpPr/>
+          <p:nvPr/>
+        </p:nvSpPr>
+        <p:spPr>
+          <a:xfrm>
+            <a:off x="7854696" y="3694176"/>
+            <a:ext cx="3035808" cy="206654"/>
+          </a:xfrm>
+          <a:prstGeom prst="rect">
+            <a:avLst/>
+          </a:prstGeom>
+          <a:noFill/>
+          <a:ln/>
+        </p:spPr>
+        <p:txBody>
+          <a:bodyPr wrap="square" lIns="254" tIns="254" rIns="254" bIns="254" rtlCol="0" anchor="t">
+            <a:normAutofit/>
+          </a:bodyPr>
+          <a:lstStyle/>
+          <a:p>
+            <a:pPr indent="0" marL="0">
+              <a:buNone/>
+            </a:pPr>
+            <a:r>
+              <a:rPr lang="en-US" sz="1120" dirty="0">
+                <a:solidFill>
+                  <a:srgbClr val="17364A"/>
+                </a:solidFill>
+                <a:latin typeface="Aptos" pitchFamily="34" charset="0"/>
+                <a:ea typeface="Aptos" pitchFamily="34" charset="-122"/>
+                <a:cs typeface="Aptos" pitchFamily="34" charset="-120"/>
+              </a:rPr>
+              <a:t>A proposed AI use should move through documented review before it becomes an operational workflow.</a:t>
+            </a:r>
+            <a:endParaRPr lang="en-US" sz="1120" dirty="0"/>
+          </a:p>
+        </p:txBody>
+      </p:sp>
+      <p:sp>
+        <p:nvSpPr>
+          <p:cNvPr id="24" name="Shape 22"/>
+          <p:cNvSpPr/>
+          <p:nvPr/>
+        </p:nvSpPr>
+        <p:spPr>
+          <a:xfrm>
+            <a:off x="7635240" y="4184294"/>
+            <a:ext cx="3474720" cy="1466698"/>
+          </a:xfrm>
+          <a:prstGeom prst="roundRect">
+            <a:avLst>
+              <a:gd name="adj" fmla="val 7481"/>
             </a:avLst>
           </a:prstGeom>
           <a:solidFill>
@@ -4429,13 +4645,13 @@
       </p:sp>
       <p:sp>
         <p:nvSpPr>
-          <p:cNvPr id="17" name="Text 15"/>
-          <p:cNvSpPr/>
-          <p:nvPr/>
-        </p:nvSpPr>
-        <p:spPr>
-          <a:xfrm>
-            <a:off x="7799832" y="4645152"/>
+          <p:cNvPr id="25" name="Text 23"/>
+          <p:cNvSpPr/>
+          <p:nvPr/>
+        </p:nvSpPr>
+        <p:spPr>
+          <a:xfrm>
+            <a:off x="7799832" y="4330598"/>
             <a:ext cx="3145536" cy="256032"/>
           </a:xfrm>
           <a:prstGeom prst="rect">
@@ -4468,14 +4684,14 @@
       </p:sp>
       <p:sp>
         <p:nvSpPr>
-          <p:cNvPr id="18" name="Text 16"/>
-          <p:cNvSpPr/>
-          <p:nvPr/>
-        </p:nvSpPr>
-        <p:spPr>
-          <a:xfrm>
-            <a:off x="7799832" y="4974336"/>
-            <a:ext cx="3145536" cy="576072"/>
+          <p:cNvPr id="26" name="Text 24"/>
+          <p:cNvSpPr/>
+          <p:nvPr/>
+        </p:nvSpPr>
+        <p:spPr>
+          <a:xfrm>
+            <a:off x="7799832" y="4659782"/>
+            <a:ext cx="3145536" cy="899770"/>
           </a:xfrm>
           <a:prstGeom prst="rect">
             <a:avLst/>
@@ -4501,7 +4717,7 @@
                 <a:ea typeface="Aptos" pitchFamily="34" charset="-122"/>
                 <a:cs typeface="Aptos" pitchFamily="34" charset="-120"/>
               </a:rPr>
-              <a:t>Translate this concept into clear decision rights, review steps, documentation expectations, and escalation paths before.</a:t>
+              <a:t>Translate this concept into clear decision rights, review steps, documentation expectations, and escalation paths before an AI-supported workflow is approved.</a:t>
             </a:r>
             <a:endParaRPr lang="en-US" sz="1320" dirty="0"/>
           </a:p>
@@ -4870,11 +5086,11 @@
         <p:spPr>
           <a:xfrm>
             <a:off x="7635240" y="1325880"/>
-            <a:ext cx="3474720" cy="1325880"/>
+            <a:ext cx="3474720" cy="1255471"/>
           </a:xfrm>
           <a:prstGeom prst="roundRect">
             <a:avLst>
-              <a:gd name="adj" fmla="val 8276"/>
+              <a:gd name="adj" fmla="val 8740"/>
             </a:avLst>
           </a:prstGeom>
           <a:solidFill>
@@ -4936,7 +5152,7 @@
         <p:spPr>
           <a:xfrm>
             <a:off x="7799832" y="1801368"/>
-            <a:ext cx="3145536" cy="758952"/>
+            <a:ext cx="3145536" cy="688543"/>
           </a:xfrm>
           <a:prstGeom prst="rect">
             <a:avLst/>
@@ -4976,12 +5192,12 @@
         </p:nvSpPr>
         <p:spPr>
           <a:xfrm>
-            <a:off x="7635240" y="2788920"/>
-            <a:ext cx="3474720" cy="1536192"/>
+            <a:off x="7635240" y="2718511"/>
+            <a:ext cx="3474720" cy="1328623"/>
           </a:xfrm>
           <a:prstGeom prst="roundRect">
             <a:avLst>
-              <a:gd name="adj" fmla="val 7143"/>
+              <a:gd name="adj" fmla="val 8259"/>
             </a:avLst>
           </a:prstGeom>
           <a:solidFill>
@@ -5003,8 +5219,8 @@
         </p:nvSpPr>
         <p:spPr>
           <a:xfrm>
-            <a:off x="7799832" y="2935224"/>
-            <a:ext cx="3145536" cy="256032"/>
+            <a:off x="7799832" y="2846527"/>
+            <a:ext cx="3145536" cy="237744"/>
           </a:xfrm>
           <a:prstGeom prst="rect">
             <a:avLst/>
@@ -5020,7 +5236,7 @@
               <a:buNone/>
             </a:pPr>
             <a:r>
-              <a:rPr lang="en-US" sz="1300" b="1" dirty="0">
+              <a:rPr lang="en-US" sz="1250" b="1" dirty="0">
                 <a:solidFill>
                   <a:srgbClr val="0068B7"/>
                 </a:solidFill>
@@ -5028,101 +5244,317 @@
                 <a:ea typeface="Aptos" pitchFamily="34" charset="-122"/>
                 <a:cs typeface="Aptos" pitchFamily="34" charset="-120"/>
               </a:rPr>
-              <a:t>Concept checkpoints</a:t>
-            </a:r>
-            <a:endParaRPr lang="en-US" sz="1300" dirty="0"/>
-          </a:p>
-        </p:txBody>
-      </p:sp>
-      <p:sp>
-        <p:nvSpPr>
-          <p:cNvPr id="15" name="Text 13"/>
-          <p:cNvSpPr/>
-          <p:nvPr/>
-        </p:nvSpPr>
-        <p:spPr>
-          <a:xfrm>
-            <a:off x="7818120" y="3300984"/>
-            <a:ext cx="3090672" cy="877824"/>
-          </a:xfrm>
-          <a:prstGeom prst="rect">
-            <a:avLst/>
-          </a:prstGeom>
-          <a:noFill/>
-          <a:ln/>
-        </p:spPr>
-        <p:txBody>
-          <a:bodyPr wrap="square" lIns="508" tIns="508" rIns="508" bIns="508" rtlCol="0" anchor="t">
+              <a:t>Governance pathway</a:t>
+            </a:r>
+            <a:endParaRPr lang="en-US" sz="1250" dirty="0"/>
+          </a:p>
+        </p:txBody>
+      </p:sp>
+      <p:sp>
+        <p:nvSpPr>
+          <p:cNvPr id="15" name="Shape 13"/>
+          <p:cNvSpPr/>
+          <p:nvPr/>
+        </p:nvSpPr>
+        <p:spPr>
+          <a:xfrm>
+            <a:off x="8763000" y="3399739"/>
+            <a:ext cx="164592" cy="0"/>
+          </a:xfrm>
+          <a:prstGeom prst="line">
+            <a:avLst/>
+          </a:prstGeom>
+          <a:noFill/>
+          <a:ln w="15240">
+            <a:solidFill>
+              <a:srgbClr val="8ABBD8"/>
+            </a:solidFill>
+            <a:prstDash val="solid"/>
+          </a:ln>
+        </p:spPr>
+      </p:sp>
+      <p:sp>
+        <p:nvSpPr>
+          <p:cNvPr id="16" name="Shape 14"/>
+          <p:cNvSpPr/>
+          <p:nvPr/>
+        </p:nvSpPr>
+        <p:spPr>
+          <a:xfrm>
+            <a:off x="7872984" y="3248863"/>
+            <a:ext cx="890016" cy="301752"/>
+          </a:xfrm>
+          <a:prstGeom prst="roundRect">
+            <a:avLst>
+              <a:gd name="adj" fmla="val 24242"/>
+            </a:avLst>
+          </a:prstGeom>
+          <a:solidFill>
+            <a:srgbClr val="0068B7"/>
+          </a:solidFill>
+          <a:ln w="12700">
+            <a:solidFill>
+              <a:srgbClr val="0068B7"/>
+            </a:solidFill>
+            <a:prstDash val="solid"/>
+          </a:ln>
+        </p:spPr>
+      </p:sp>
+      <p:sp>
+        <p:nvSpPr>
+          <p:cNvPr id="17" name="Text 15"/>
+          <p:cNvSpPr/>
+          <p:nvPr/>
+        </p:nvSpPr>
+        <p:spPr>
+          <a:xfrm>
+            <a:off x="7909560" y="3322015"/>
+            <a:ext cx="816864" cy="146304"/>
+          </a:xfrm>
+          <a:prstGeom prst="rect">
+            <a:avLst/>
+          </a:prstGeom>
+          <a:noFill/>
+          <a:ln/>
+        </p:spPr>
+        <p:txBody>
+          <a:bodyPr wrap="square" lIns="0" tIns="0" rIns="0" bIns="0" rtlCol="0" anchor="ctr">
             <a:normAutofit/>
           </a:bodyPr>
           <a:lstStyle/>
           <a:p>
-            <a:pPr indent="0" marL="0">
-              <a:buNone/>
-            </a:pPr>
-            <a:r>
-              <a:rPr lang="en-US" sz="1220" dirty="0">
-                <a:solidFill>
-                  <a:srgbClr val="17364A"/>
-                </a:solidFill>
-                <a:latin typeface="Aptos" pitchFamily="34" charset="0"/>
-                <a:ea typeface="Aptos" pitchFamily="34" charset="-122"/>
-                <a:cs typeface="Aptos" pitchFamily="34" charset="-120"/>
-              </a:rPr>
-              <a:t>AI projects can magnify the consequences of weak data governance.</a:t>
-            </a:r>
-            <a:endParaRPr lang="en-US" sz="1220" dirty="0"/>
-          </a:p>
-          <a:p>
-            <a:pPr indent="0" marL="0">
-              <a:buNone/>
-            </a:pPr>
-            <a:r>
-              <a:rPr lang="en-US" sz="1220" dirty="0">
-                <a:solidFill>
-                  <a:srgbClr val="17364A"/>
-                </a:solidFill>
-                <a:latin typeface="Aptos" pitchFamily="34" charset="0"/>
-                <a:ea typeface="Aptos" pitchFamily="34" charset="-122"/>
-                <a:cs typeface="Aptos" pitchFamily="34" charset="-120"/>
-              </a:rPr>
-              <a:t>When health data involve Tribal Nations or AI/AN participants,.</a:t>
-            </a:r>
-            <a:endParaRPr lang="en-US" sz="1220" dirty="0"/>
-          </a:p>
-          <a:p>
-            <a:pPr indent="0" marL="0">
-              <a:buNone/>
-            </a:pPr>
-            <a:r>
-              <a:rPr lang="en-US" sz="1220" dirty="0">
-                <a:solidFill>
-                  <a:srgbClr val="17364A"/>
-                </a:solidFill>
-                <a:latin typeface="Aptos" pitchFamily="34" charset="0"/>
-                <a:ea typeface="Aptos" pitchFamily="34" charset="-122"/>
-                <a:cs typeface="Aptos" pitchFamily="34" charset="-120"/>
-              </a:rPr>
-              <a:t>Public health agencies may intend to improve services, reduce.</a:t>
-            </a:r>
-            <a:endParaRPr lang="en-US" sz="1220" dirty="0"/>
-          </a:p>
-        </p:txBody>
-      </p:sp>
-      <p:sp>
-        <p:nvSpPr>
-          <p:cNvPr id="16" name="Shape 14"/>
-          <p:cNvSpPr/>
-          <p:nvPr/>
-        </p:nvSpPr>
-        <p:spPr>
-          <a:xfrm>
-            <a:off x="7635240" y="4498848"/>
-            <a:ext cx="3474720" cy="1143000"/>
+            <a:pPr algn="ctr" indent="0" marL="0">
+              <a:buNone/>
+            </a:pPr>
+            <a:r>
+              <a:rPr lang="en-US" sz="880" b="1" dirty="0">
+                <a:solidFill>
+                  <a:srgbClr val="FFFFFF"/>
+                </a:solidFill>
+                <a:latin typeface="Aptos" pitchFamily="34" charset="0"/>
+                <a:ea typeface="Aptos" pitchFamily="34" charset="-122"/>
+                <a:cs typeface="Aptos" pitchFamily="34" charset="-120"/>
+              </a:rPr>
+              <a:t>Submit</a:t>
+            </a:r>
+            <a:endParaRPr lang="en-US" sz="880" dirty="0"/>
+          </a:p>
+        </p:txBody>
+      </p:sp>
+      <p:sp>
+        <p:nvSpPr>
+          <p:cNvPr id="18" name="Shape 16"/>
+          <p:cNvSpPr/>
+          <p:nvPr/>
+        </p:nvSpPr>
+        <p:spPr>
+          <a:xfrm>
+            <a:off x="9817608" y="3399739"/>
+            <a:ext cx="164592" cy="0"/>
+          </a:xfrm>
+          <a:prstGeom prst="line">
+            <a:avLst/>
+          </a:prstGeom>
+          <a:noFill/>
+          <a:ln w="15240">
+            <a:solidFill>
+              <a:srgbClr val="8ABBD8"/>
+            </a:solidFill>
+            <a:prstDash val="solid"/>
+          </a:ln>
+        </p:spPr>
+      </p:sp>
+      <p:sp>
+        <p:nvSpPr>
+          <p:cNvPr id="19" name="Shape 17"/>
+          <p:cNvSpPr/>
+          <p:nvPr/>
+        </p:nvSpPr>
+        <p:spPr>
+          <a:xfrm>
+            <a:off x="8927592" y="3248863"/>
+            <a:ext cx="890016" cy="301752"/>
           </a:xfrm>
           <a:prstGeom prst="roundRect">
             <a:avLst>
-              <a:gd name="adj" fmla="val 9600"/>
+              <a:gd name="adj" fmla="val 24242"/>
+            </a:avLst>
+          </a:prstGeom>
+          <a:solidFill>
+            <a:srgbClr val="2F8A28"/>
+          </a:solidFill>
+          <a:ln w="12700">
+            <a:solidFill>
+              <a:srgbClr val="2F8A28"/>
+            </a:solidFill>
+            <a:prstDash val="solid"/>
+          </a:ln>
+        </p:spPr>
+      </p:sp>
+      <p:sp>
+        <p:nvSpPr>
+          <p:cNvPr id="20" name="Text 18"/>
+          <p:cNvSpPr/>
+          <p:nvPr/>
+        </p:nvSpPr>
+        <p:spPr>
+          <a:xfrm>
+            <a:off x="8964168" y="3322015"/>
+            <a:ext cx="816864" cy="146304"/>
+          </a:xfrm>
+          <a:prstGeom prst="rect">
+            <a:avLst/>
+          </a:prstGeom>
+          <a:noFill/>
+          <a:ln/>
+        </p:spPr>
+        <p:txBody>
+          <a:bodyPr wrap="square" lIns="0" tIns="0" rIns="0" bIns="0" rtlCol="0" anchor="ctr">
+            <a:normAutofit/>
+          </a:bodyPr>
+          <a:lstStyle/>
+          <a:p>
+            <a:pPr algn="ctr" indent="0" marL="0">
+              <a:buNone/>
+            </a:pPr>
+            <a:r>
+              <a:rPr lang="en-US" sz="880" b="1" dirty="0">
+                <a:solidFill>
+                  <a:srgbClr val="FFFFFF"/>
+                </a:solidFill>
+                <a:latin typeface="Aptos" pitchFamily="34" charset="0"/>
+                <a:ea typeface="Aptos" pitchFamily="34" charset="-122"/>
+                <a:cs typeface="Aptos" pitchFamily="34" charset="-120"/>
+              </a:rPr>
+              <a:t>Review</a:t>
+            </a:r>
+            <a:endParaRPr lang="en-US" sz="880" dirty="0"/>
+          </a:p>
+        </p:txBody>
+      </p:sp>
+      <p:sp>
+        <p:nvSpPr>
+          <p:cNvPr id="21" name="Shape 19"/>
+          <p:cNvSpPr/>
+          <p:nvPr/>
+        </p:nvSpPr>
+        <p:spPr>
+          <a:xfrm>
+            <a:off x="9982200" y="3248863"/>
+            <a:ext cx="890016" cy="301752"/>
+          </a:xfrm>
+          <a:prstGeom prst="roundRect">
+            <a:avLst>
+              <a:gd name="adj" fmla="val 24242"/>
+            </a:avLst>
+          </a:prstGeom>
+          <a:solidFill>
+            <a:srgbClr val="6A4CA3"/>
+          </a:solidFill>
+          <a:ln w="12700">
+            <a:solidFill>
+              <a:srgbClr val="6A4CA3"/>
+            </a:solidFill>
+            <a:prstDash val="solid"/>
+          </a:ln>
+        </p:spPr>
+      </p:sp>
+      <p:sp>
+        <p:nvSpPr>
+          <p:cNvPr id="22" name="Text 20"/>
+          <p:cNvSpPr/>
+          <p:nvPr/>
+        </p:nvSpPr>
+        <p:spPr>
+          <a:xfrm>
+            <a:off x="10018776" y="3322015"/>
+            <a:ext cx="816864" cy="146304"/>
+          </a:xfrm>
+          <a:prstGeom prst="rect">
+            <a:avLst/>
+          </a:prstGeom>
+          <a:noFill/>
+          <a:ln/>
+        </p:spPr>
+        <p:txBody>
+          <a:bodyPr wrap="square" lIns="0" tIns="0" rIns="0" bIns="0" rtlCol="0" anchor="ctr">
+            <a:normAutofit/>
+          </a:bodyPr>
+          <a:lstStyle/>
+          <a:p>
+            <a:pPr algn="ctr" indent="0" marL="0">
+              <a:buNone/>
+            </a:pPr>
+            <a:r>
+              <a:rPr lang="en-US" sz="880" b="1" dirty="0">
+                <a:solidFill>
+                  <a:srgbClr val="FFFFFF"/>
+                </a:solidFill>
+                <a:latin typeface="Aptos" pitchFamily="34" charset="0"/>
+                <a:ea typeface="Aptos" pitchFamily="34" charset="-122"/>
+                <a:cs typeface="Aptos" pitchFamily="34" charset="-120"/>
+              </a:rPr>
+              <a:t>Oversee</a:t>
+            </a:r>
+            <a:endParaRPr lang="en-US" sz="880" dirty="0"/>
+          </a:p>
+        </p:txBody>
+      </p:sp>
+      <p:sp>
+        <p:nvSpPr>
+          <p:cNvPr id="23" name="Text 21"/>
+          <p:cNvSpPr/>
+          <p:nvPr/>
+        </p:nvSpPr>
+        <p:spPr>
+          <a:xfrm>
+            <a:off x="7854696" y="3742639"/>
+            <a:ext cx="3035808" cy="158191"/>
+          </a:xfrm>
+          <a:prstGeom prst="rect">
+            <a:avLst/>
+          </a:prstGeom>
+          <a:noFill/>
+          <a:ln/>
+        </p:spPr>
+        <p:txBody>
+          <a:bodyPr wrap="square" lIns="254" tIns="254" rIns="254" bIns="254" rtlCol="0" anchor="t">
+            <a:normAutofit/>
+          </a:bodyPr>
+          <a:lstStyle/>
+          <a:p>
+            <a:pPr indent="0" marL="0">
+              <a:buNone/>
+            </a:pPr>
+            <a:r>
+              <a:rPr lang="en-US" sz="1120" dirty="0">
+                <a:solidFill>
+                  <a:srgbClr val="17364A"/>
+                </a:solidFill>
+                <a:latin typeface="Aptos" pitchFamily="34" charset="0"/>
+                <a:ea typeface="Aptos" pitchFamily="34" charset="-122"/>
+                <a:cs typeface="Aptos" pitchFamily="34" charset="-120"/>
+              </a:rPr>
+              <a:t>A proposed AI use should move through documented review before it becomes an operational workflow.</a:t>
+            </a:r>
+            <a:endParaRPr lang="en-US" sz="1120" dirty="0"/>
+          </a:p>
+        </p:txBody>
+      </p:sp>
+      <p:sp>
+        <p:nvSpPr>
+          <p:cNvPr id="24" name="Shape 22"/>
+          <p:cNvSpPr/>
+          <p:nvPr/>
+        </p:nvSpPr>
+        <p:spPr>
+          <a:xfrm>
+            <a:off x="7635240" y="4184294"/>
+            <a:ext cx="3474720" cy="1466698"/>
+          </a:xfrm>
+          <a:prstGeom prst="roundRect">
+            <a:avLst>
+              <a:gd name="adj" fmla="val 7481"/>
             </a:avLst>
           </a:prstGeom>
           <a:solidFill>
@@ -5138,13 +5570,13 @@
       </p:sp>
       <p:sp>
         <p:nvSpPr>
-          <p:cNvPr id="17" name="Text 15"/>
-          <p:cNvSpPr/>
-          <p:nvPr/>
-        </p:nvSpPr>
-        <p:spPr>
-          <a:xfrm>
-            <a:off x="7799832" y="4645152"/>
+          <p:cNvPr id="25" name="Text 23"/>
+          <p:cNvSpPr/>
+          <p:nvPr/>
+        </p:nvSpPr>
+        <p:spPr>
+          <a:xfrm>
+            <a:off x="7799832" y="4330598"/>
             <a:ext cx="3145536" cy="256032"/>
           </a:xfrm>
           <a:prstGeom prst="rect">
@@ -5177,14 +5609,14 @@
       </p:sp>
       <p:sp>
         <p:nvSpPr>
-          <p:cNvPr id="18" name="Text 16"/>
-          <p:cNvSpPr/>
-          <p:nvPr/>
-        </p:nvSpPr>
-        <p:spPr>
-          <a:xfrm>
-            <a:off x="7799832" y="4974336"/>
-            <a:ext cx="3145536" cy="576072"/>
+          <p:cNvPr id="26" name="Text 24"/>
+          <p:cNvSpPr/>
+          <p:nvPr/>
+        </p:nvSpPr>
+        <p:spPr>
+          <a:xfrm>
+            <a:off x="7799832" y="4659782"/>
+            <a:ext cx="3145536" cy="899770"/>
           </a:xfrm>
           <a:prstGeom prst="rect">
             <a:avLst/>
@@ -5210,7 +5642,7 @@
                 <a:ea typeface="Aptos" pitchFamily="34" charset="-122"/>
                 <a:cs typeface="Aptos" pitchFamily="34" charset="-120"/>
               </a:rPr>
-              <a:t>Translate this concept into clear decision rights, review steps, documentation expectations, and escalation paths before.</a:t>
+              <a:t>Translate this concept into clear decision rights, review steps, documentation expectations, and escalation paths before an AI-supported workflow is approved.</a:t>
             </a:r>
             <a:endParaRPr lang="en-US" sz="1320" dirty="0"/>
           </a:p>
@@ -5579,11 +6011,11 @@
         <p:spPr>
           <a:xfrm>
             <a:off x="7635240" y="1325880"/>
-            <a:ext cx="3474720" cy="1325880"/>
+            <a:ext cx="3474720" cy="1255471"/>
           </a:xfrm>
           <a:prstGeom prst="roundRect">
             <a:avLst>
-              <a:gd name="adj" fmla="val 8276"/>
+              <a:gd name="adj" fmla="val 8740"/>
             </a:avLst>
           </a:prstGeom>
           <a:solidFill>
@@ -5645,7 +6077,7 @@
         <p:spPr>
           <a:xfrm>
             <a:off x="7799832" y="1801368"/>
-            <a:ext cx="3145536" cy="758952"/>
+            <a:ext cx="3145536" cy="688543"/>
           </a:xfrm>
           <a:prstGeom prst="rect">
             <a:avLst/>
@@ -5685,12 +6117,12 @@
         </p:nvSpPr>
         <p:spPr>
           <a:xfrm>
-            <a:off x="7635240" y="2788920"/>
-            <a:ext cx="3474720" cy="1536192"/>
+            <a:off x="7635240" y="2718511"/>
+            <a:ext cx="3474720" cy="1328623"/>
           </a:xfrm>
           <a:prstGeom prst="roundRect">
             <a:avLst>
-              <a:gd name="adj" fmla="val 7143"/>
+              <a:gd name="adj" fmla="val 8259"/>
             </a:avLst>
           </a:prstGeom>
           <a:solidFill>
@@ -5712,7 +6144,7 @@
         </p:nvSpPr>
         <p:spPr>
           <a:xfrm>
-            <a:off x="7799832" y="2935224"/>
+            <a:off x="7799832" y="2864815"/>
             <a:ext cx="3145536" cy="256032"/>
           </a:xfrm>
           <a:prstGeom prst="rect">
@@ -5751,8 +6183,8 @@
         </p:nvSpPr>
         <p:spPr>
           <a:xfrm>
-            <a:off x="7818120" y="3300984"/>
-            <a:ext cx="3090672" cy="877824"/>
+            <a:off x="7818120" y="3230575"/>
+            <a:ext cx="3090672" cy="670255"/>
           </a:xfrm>
           <a:prstGeom prst="rect">
             <a:avLst/>
@@ -5826,12 +6258,12 @@
         </p:nvSpPr>
         <p:spPr>
           <a:xfrm>
-            <a:off x="7635240" y="4498848"/>
-            <a:ext cx="3474720" cy="1143000"/>
+            <a:off x="7635240" y="4184294"/>
+            <a:ext cx="3474720" cy="1466698"/>
           </a:xfrm>
           <a:prstGeom prst="roundRect">
             <a:avLst>
-              <a:gd name="adj" fmla="val 9600"/>
+              <a:gd name="adj" fmla="val 7481"/>
             </a:avLst>
           </a:prstGeom>
           <a:solidFill>
@@ -5853,7 +6285,7 @@
         </p:nvSpPr>
         <p:spPr>
           <a:xfrm>
-            <a:off x="7799832" y="4645152"/>
+            <a:off x="7799832" y="4330598"/>
             <a:ext cx="3145536" cy="256032"/>
           </a:xfrm>
           <a:prstGeom prst="rect">
@@ -5892,8 +6324,8 @@
         </p:nvSpPr>
         <p:spPr>
           <a:xfrm>
-            <a:off x="7799832" y="4974336"/>
-            <a:ext cx="3145536" cy="576072"/>
+            <a:off x="7799832" y="4659782"/>
+            <a:ext cx="3145536" cy="899770"/>
           </a:xfrm>
           <a:prstGeom prst="rect">
             <a:avLst/>
@@ -5919,7 +6351,7 @@
                 <a:ea typeface="Aptos" pitchFamily="34" charset="-122"/>
                 <a:cs typeface="Aptos" pitchFamily="34" charset="-120"/>
               </a:rPr>
-              <a:t>Translate this concept into clear decision rights, review steps, documentation expectations, and escalation paths before.</a:t>
+              <a:t>Translate this concept into clear decision rights, review steps, documentation expectations, and escalation paths before an AI-supported workflow is approved.</a:t>
             </a:r>
             <a:endParaRPr lang="en-US" sz="1320" dirty="0"/>
           </a:p>
@@ -6288,11 +6720,11 @@
         <p:spPr>
           <a:xfrm>
             <a:off x="7635240" y="1325880"/>
-            <a:ext cx="3474720" cy="1325880"/>
+            <a:ext cx="3474720" cy="1255471"/>
           </a:xfrm>
           <a:prstGeom prst="roundRect">
             <a:avLst>
-              <a:gd name="adj" fmla="val 8276"/>
+              <a:gd name="adj" fmla="val 8740"/>
             </a:avLst>
           </a:prstGeom>
           <a:solidFill>
@@ -6354,7 +6786,7 @@
         <p:spPr>
           <a:xfrm>
             <a:off x="7799832" y="1801368"/>
-            <a:ext cx="3145536" cy="758952"/>
+            <a:ext cx="3145536" cy="688543"/>
           </a:xfrm>
           <a:prstGeom prst="rect">
             <a:avLst/>
@@ -6394,12 +6826,12 @@
         </p:nvSpPr>
         <p:spPr>
           <a:xfrm>
-            <a:off x="7635240" y="2788920"/>
-            <a:ext cx="3474720" cy="1536192"/>
+            <a:off x="7635240" y="2718511"/>
+            <a:ext cx="3474720" cy="1328623"/>
           </a:xfrm>
           <a:prstGeom prst="roundRect">
             <a:avLst>
-              <a:gd name="adj" fmla="val 7143"/>
+              <a:gd name="adj" fmla="val 8259"/>
             </a:avLst>
           </a:prstGeom>
           <a:solidFill>
@@ -6421,7 +6853,7 @@
         </p:nvSpPr>
         <p:spPr>
           <a:xfrm>
-            <a:off x="7799832" y="2935224"/>
+            <a:off x="7799832" y="2864815"/>
             <a:ext cx="3145536" cy="256032"/>
           </a:xfrm>
           <a:prstGeom prst="rect">
@@ -6460,8 +6892,8 @@
         </p:nvSpPr>
         <p:spPr>
           <a:xfrm>
-            <a:off x="7818120" y="3300984"/>
-            <a:ext cx="3090672" cy="877824"/>
+            <a:off x="7818120" y="3230575"/>
+            <a:ext cx="3090672" cy="670255"/>
           </a:xfrm>
           <a:prstGeom prst="rect">
             <a:avLst/>
@@ -6535,12 +6967,12 @@
         </p:nvSpPr>
         <p:spPr>
           <a:xfrm>
-            <a:off x="7635240" y="4498848"/>
-            <a:ext cx="3474720" cy="1143000"/>
+            <a:off x="7635240" y="4184294"/>
+            <a:ext cx="3474720" cy="1466698"/>
           </a:xfrm>
           <a:prstGeom prst="roundRect">
             <a:avLst>
-              <a:gd name="adj" fmla="val 9600"/>
+              <a:gd name="adj" fmla="val 7481"/>
             </a:avLst>
           </a:prstGeom>
           <a:solidFill>
@@ -6562,7 +6994,7 @@
         </p:nvSpPr>
         <p:spPr>
           <a:xfrm>
-            <a:off x="7799832" y="4645152"/>
+            <a:off x="7799832" y="4330598"/>
             <a:ext cx="3145536" cy="256032"/>
           </a:xfrm>
           <a:prstGeom prst="rect">
@@ -6601,8 +7033,8 @@
         </p:nvSpPr>
         <p:spPr>
           <a:xfrm>
-            <a:off x="7799832" y="4974336"/>
-            <a:ext cx="3145536" cy="576072"/>
+            <a:off x="7799832" y="4659782"/>
+            <a:ext cx="3145536" cy="899770"/>
           </a:xfrm>
           <a:prstGeom prst="rect">
             <a:avLst/>
@@ -6628,7 +7060,7 @@
                 <a:ea typeface="Aptos" pitchFamily="34" charset="-122"/>
                 <a:cs typeface="Aptos" pitchFamily="34" charset="-120"/>
               </a:rPr>
-              <a:t>Translate this concept into clear decision rights, review steps, documentation expectations, and escalation paths before.</a:t>
+              <a:t>Translate this concept into clear decision rights, review steps, documentation expectations, and escalation paths before an AI-supported workflow is approved.</a:t>
             </a:r>
             <a:endParaRPr lang="en-US" sz="1320" dirty="0"/>
           </a:p>
@@ -6997,11 +7429,11 @@
         <p:spPr>
           <a:xfrm>
             <a:off x="7635240" y="1325880"/>
-            <a:ext cx="3474720" cy="1325880"/>
+            <a:ext cx="3474720" cy="1255471"/>
           </a:xfrm>
           <a:prstGeom prst="roundRect">
             <a:avLst>
-              <a:gd name="adj" fmla="val 8276"/>
+              <a:gd name="adj" fmla="val 8740"/>
             </a:avLst>
           </a:prstGeom>
           <a:solidFill>
@@ -7063,7 +7495,7 @@
         <p:spPr>
           <a:xfrm>
             <a:off x="7799832" y="1801368"/>
-            <a:ext cx="3145536" cy="758952"/>
+            <a:ext cx="3145536" cy="688543"/>
           </a:xfrm>
           <a:prstGeom prst="rect">
             <a:avLst/>
@@ -7103,12 +7535,12 @@
         </p:nvSpPr>
         <p:spPr>
           <a:xfrm>
-            <a:off x="7635240" y="2788920"/>
-            <a:ext cx="3474720" cy="1536192"/>
+            <a:off x="7635240" y="2718511"/>
+            <a:ext cx="3474720" cy="1328623"/>
           </a:xfrm>
           <a:prstGeom prst="roundRect">
             <a:avLst>
-              <a:gd name="adj" fmla="val 7143"/>
+              <a:gd name="adj" fmla="val 8259"/>
             </a:avLst>
           </a:prstGeom>
           <a:solidFill>
@@ -7130,7 +7562,7 @@
         </p:nvSpPr>
         <p:spPr>
           <a:xfrm>
-            <a:off x="7799832" y="2935224"/>
+            <a:off x="7799832" y="2864815"/>
             <a:ext cx="3145536" cy="256032"/>
           </a:xfrm>
           <a:prstGeom prst="rect">
@@ -7169,8 +7601,8 @@
         </p:nvSpPr>
         <p:spPr>
           <a:xfrm>
-            <a:off x="7818120" y="3300984"/>
-            <a:ext cx="3090672" cy="877824"/>
+            <a:off x="7818120" y="3230575"/>
+            <a:ext cx="3090672" cy="670255"/>
           </a:xfrm>
           <a:prstGeom prst="rect">
             <a:avLst/>
@@ -7244,12 +7676,12 @@
         </p:nvSpPr>
         <p:spPr>
           <a:xfrm>
-            <a:off x="7635240" y="4498848"/>
-            <a:ext cx="3474720" cy="1143000"/>
+            <a:off x="7635240" y="4184294"/>
+            <a:ext cx="3474720" cy="1466698"/>
           </a:xfrm>
           <a:prstGeom prst="roundRect">
             <a:avLst>
-              <a:gd name="adj" fmla="val 9600"/>
+              <a:gd name="adj" fmla="val 7481"/>
             </a:avLst>
           </a:prstGeom>
           <a:solidFill>
@@ -7271,7 +7703,7 @@
         </p:nvSpPr>
         <p:spPr>
           <a:xfrm>
-            <a:off x="7799832" y="4645152"/>
+            <a:off x="7799832" y="4330598"/>
             <a:ext cx="3145536" cy="256032"/>
           </a:xfrm>
           <a:prstGeom prst="rect">
@@ -7310,8 +7742,8 @@
         </p:nvSpPr>
         <p:spPr>
           <a:xfrm>
-            <a:off x="7799832" y="4974336"/>
-            <a:ext cx="3145536" cy="576072"/>
+            <a:off x="7799832" y="4659782"/>
+            <a:ext cx="3145536" cy="899770"/>
           </a:xfrm>
           <a:prstGeom prst="rect">
             <a:avLst/>
@@ -7337,7 +7769,7 @@
                 <a:ea typeface="Aptos" pitchFamily="34" charset="-122"/>
                 <a:cs typeface="Aptos" pitchFamily="34" charset="-120"/>
               </a:rPr>
-              <a:t>Translate this concept into clear decision rights, review steps, documentation expectations, and escalation paths before.</a:t>
+              <a:t>Translate this concept into clear decision rights, review steps, documentation expectations, and escalation paths before an AI-supported workflow is approved.</a:t>
             </a:r>
             <a:endParaRPr lang="en-US" sz="1320" dirty="0"/>
           </a:p>
@@ -7706,11 +8138,11 @@
         <p:spPr>
           <a:xfrm>
             <a:off x="7635240" y="1325880"/>
-            <a:ext cx="3474720" cy="1325880"/>
+            <a:ext cx="3474720" cy="1255471"/>
           </a:xfrm>
           <a:prstGeom prst="roundRect">
             <a:avLst>
-              <a:gd name="adj" fmla="val 8276"/>
+              <a:gd name="adj" fmla="val 8740"/>
             </a:avLst>
           </a:prstGeom>
           <a:solidFill>
@@ -7772,7 +8204,7 @@
         <p:spPr>
           <a:xfrm>
             <a:off x="7799832" y="1801368"/>
-            <a:ext cx="3145536" cy="758952"/>
+            <a:ext cx="3145536" cy="688543"/>
           </a:xfrm>
           <a:prstGeom prst="rect">
             <a:avLst/>
@@ -7812,12 +8244,12 @@
         </p:nvSpPr>
         <p:spPr>
           <a:xfrm>
-            <a:off x="7635240" y="2788920"/>
-            <a:ext cx="3474720" cy="1536192"/>
+            <a:off x="7635240" y="2718511"/>
+            <a:ext cx="3474720" cy="1328623"/>
           </a:xfrm>
           <a:prstGeom prst="roundRect">
             <a:avLst>
-              <a:gd name="adj" fmla="val 7143"/>
+              <a:gd name="adj" fmla="val 8259"/>
             </a:avLst>
           </a:prstGeom>
           <a:solidFill>
@@ -7839,7 +8271,7 @@
         </p:nvSpPr>
         <p:spPr>
           <a:xfrm>
-            <a:off x="7799832" y="2935224"/>
+            <a:off x="7799832" y="2864815"/>
             <a:ext cx="3145536" cy="256032"/>
           </a:xfrm>
           <a:prstGeom prst="rect">
@@ -7878,8 +8310,8 @@
         </p:nvSpPr>
         <p:spPr>
           <a:xfrm>
-            <a:off x="7818120" y="3300984"/>
-            <a:ext cx="3090672" cy="877824"/>
+            <a:off x="7818120" y="3230575"/>
+            <a:ext cx="3090672" cy="670255"/>
           </a:xfrm>
           <a:prstGeom prst="rect">
             <a:avLst/>
@@ -7953,12 +8385,12 @@
         </p:nvSpPr>
         <p:spPr>
           <a:xfrm>
-            <a:off x="7635240" y="4498848"/>
-            <a:ext cx="3474720" cy="1143000"/>
+            <a:off x="7635240" y="4184294"/>
+            <a:ext cx="3474720" cy="1466698"/>
           </a:xfrm>
           <a:prstGeom prst="roundRect">
             <a:avLst>
-              <a:gd name="adj" fmla="val 9600"/>
+              <a:gd name="adj" fmla="val 7481"/>
             </a:avLst>
           </a:prstGeom>
           <a:solidFill>
@@ -7980,7 +8412,7 @@
         </p:nvSpPr>
         <p:spPr>
           <a:xfrm>
-            <a:off x="7799832" y="4645152"/>
+            <a:off x="7799832" y="4330598"/>
             <a:ext cx="3145536" cy="256032"/>
           </a:xfrm>
           <a:prstGeom prst="rect">
@@ -8019,8 +8451,8 @@
         </p:nvSpPr>
         <p:spPr>
           <a:xfrm>
-            <a:off x="7799832" y="4974336"/>
-            <a:ext cx="3145536" cy="576072"/>
+            <a:off x="7799832" y="4659782"/>
+            <a:ext cx="3145536" cy="899770"/>
           </a:xfrm>
           <a:prstGeom prst="rect">
             <a:avLst/>
@@ -8046,7 +8478,7 @@
                 <a:ea typeface="Aptos" pitchFamily="34" charset="-122"/>
                 <a:cs typeface="Aptos" pitchFamily="34" charset="-120"/>
               </a:rPr>
-              <a:t>Translate this concept into clear decision rights, review steps, documentation expectations, and escalation paths before.</a:t>
+              <a:t>Translate this concept into clear decision rights, review steps, documentation expectations, and escalation paths before an AI-supported workflow is approved.</a:t>
             </a:r>
             <a:endParaRPr lang="en-US" sz="1320" dirty="0"/>
           </a:p>
@@ -8415,11 +8847,11 @@
         <p:spPr>
           <a:xfrm>
             <a:off x="7635240" y="1325880"/>
-            <a:ext cx="3474720" cy="1325880"/>
+            <a:ext cx="3474720" cy="1255471"/>
           </a:xfrm>
           <a:prstGeom prst="roundRect">
             <a:avLst>
-              <a:gd name="adj" fmla="val 8276"/>
+              <a:gd name="adj" fmla="val 8740"/>
             </a:avLst>
           </a:prstGeom>
           <a:solidFill>
@@ -8481,7 +8913,7 @@
         <p:spPr>
           <a:xfrm>
             <a:off x="7799832" y="1801368"/>
-            <a:ext cx="3145536" cy="758952"/>
+            <a:ext cx="3145536" cy="688543"/>
           </a:xfrm>
           <a:prstGeom prst="rect">
             <a:avLst/>
@@ -8521,12 +8953,12 @@
         </p:nvSpPr>
         <p:spPr>
           <a:xfrm>
-            <a:off x="7635240" y="2788920"/>
-            <a:ext cx="3474720" cy="1536192"/>
+            <a:off x="7635240" y="2718511"/>
+            <a:ext cx="3474720" cy="1328623"/>
           </a:xfrm>
           <a:prstGeom prst="roundRect">
             <a:avLst>
-              <a:gd name="adj" fmla="val 7143"/>
+              <a:gd name="adj" fmla="val 8259"/>
             </a:avLst>
           </a:prstGeom>
           <a:solidFill>
@@ -8548,7 +8980,7 @@
         </p:nvSpPr>
         <p:spPr>
           <a:xfrm>
-            <a:off x="7799832" y="2935224"/>
+            <a:off x="7799832" y="2864815"/>
             <a:ext cx="3145536" cy="256032"/>
           </a:xfrm>
           <a:prstGeom prst="rect">
@@ -8587,8 +9019,8 @@
         </p:nvSpPr>
         <p:spPr>
           <a:xfrm>
-            <a:off x="7818120" y="3300984"/>
-            <a:ext cx="3090672" cy="877824"/>
+            <a:off x="7818120" y="3230575"/>
+            <a:ext cx="3090672" cy="670255"/>
           </a:xfrm>
           <a:prstGeom prst="rect">
             <a:avLst/>
@@ -8662,12 +9094,12 @@
         </p:nvSpPr>
         <p:spPr>
           <a:xfrm>
-            <a:off x="7635240" y="4498848"/>
-            <a:ext cx="3474720" cy="1143000"/>
+            <a:off x="7635240" y="4184294"/>
+            <a:ext cx="3474720" cy="1466698"/>
           </a:xfrm>
           <a:prstGeom prst="roundRect">
             <a:avLst>
-              <a:gd name="adj" fmla="val 9600"/>
+              <a:gd name="adj" fmla="val 7481"/>
             </a:avLst>
           </a:prstGeom>
           <a:solidFill>
@@ -8689,7 +9121,7 @@
         </p:nvSpPr>
         <p:spPr>
           <a:xfrm>
-            <a:off x="7799832" y="4645152"/>
+            <a:off x="7799832" y="4330598"/>
             <a:ext cx="3145536" cy="256032"/>
           </a:xfrm>
           <a:prstGeom prst="rect">
@@ -8728,8 +9160,8 @@
         </p:nvSpPr>
         <p:spPr>
           <a:xfrm>
-            <a:off x="7799832" y="4974336"/>
-            <a:ext cx="3145536" cy="576072"/>
+            <a:off x="7799832" y="4659782"/>
+            <a:ext cx="3145536" cy="899770"/>
           </a:xfrm>
           <a:prstGeom prst="rect">
             <a:avLst/>
@@ -8755,7 +9187,7 @@
                 <a:ea typeface="Aptos" pitchFamily="34" charset="-122"/>
                 <a:cs typeface="Aptos" pitchFamily="34" charset="-120"/>
               </a:rPr>
-              <a:t>Translate this concept into clear decision rights, review steps, documentation expectations, and escalation paths before.</a:t>
+              <a:t>Translate this concept into clear decision rights, review steps, documentation expectations, and escalation paths before an AI-supported workflow is approved.</a:t>
             </a:r>
             <a:endParaRPr lang="en-US" sz="1320" dirty="0"/>
           </a:p>
@@ -9124,11 +9556,11 @@
         <p:spPr>
           <a:xfrm>
             <a:off x="7635240" y="1325880"/>
-            <a:ext cx="3474720" cy="1325880"/>
+            <a:ext cx="3474720" cy="1255471"/>
           </a:xfrm>
           <a:prstGeom prst="roundRect">
             <a:avLst>
-              <a:gd name="adj" fmla="val 8276"/>
+              <a:gd name="adj" fmla="val 8740"/>
             </a:avLst>
           </a:prstGeom>
           <a:solidFill>
@@ -9190,7 +9622,7 @@
         <p:spPr>
           <a:xfrm>
             <a:off x="7799832" y="1801368"/>
-            <a:ext cx="3145536" cy="758952"/>
+            <a:ext cx="3145536" cy="688543"/>
           </a:xfrm>
           <a:prstGeom prst="rect">
             <a:avLst/>
@@ -9230,12 +9662,12 @@
         </p:nvSpPr>
         <p:spPr>
           <a:xfrm>
-            <a:off x="7635240" y="2788920"/>
-            <a:ext cx="3474720" cy="1536192"/>
+            <a:off x="7635240" y="2718511"/>
+            <a:ext cx="3474720" cy="1328623"/>
           </a:xfrm>
           <a:prstGeom prst="roundRect">
             <a:avLst>
-              <a:gd name="adj" fmla="val 7143"/>
+              <a:gd name="adj" fmla="val 8259"/>
             </a:avLst>
           </a:prstGeom>
           <a:solidFill>
@@ -9257,7 +9689,7 @@
         </p:nvSpPr>
         <p:spPr>
           <a:xfrm>
-            <a:off x="7799832" y="2935224"/>
+            <a:off x="7799832" y="2864815"/>
             <a:ext cx="3145536" cy="256032"/>
           </a:xfrm>
           <a:prstGeom prst="rect">
@@ -9296,8 +9728,8 @@
         </p:nvSpPr>
         <p:spPr>
           <a:xfrm>
-            <a:off x="7818120" y="3300984"/>
-            <a:ext cx="3090672" cy="877824"/>
+            <a:off x="7818120" y="3230575"/>
+            <a:ext cx="3090672" cy="670255"/>
           </a:xfrm>
           <a:prstGeom prst="rect">
             <a:avLst/>
@@ -9371,12 +9803,12 @@
         </p:nvSpPr>
         <p:spPr>
           <a:xfrm>
-            <a:off x="7635240" y="4498848"/>
-            <a:ext cx="3474720" cy="1143000"/>
+            <a:off x="7635240" y="4184294"/>
+            <a:ext cx="3474720" cy="1466698"/>
           </a:xfrm>
           <a:prstGeom prst="roundRect">
             <a:avLst>
-              <a:gd name="adj" fmla="val 9600"/>
+              <a:gd name="adj" fmla="val 7481"/>
             </a:avLst>
           </a:prstGeom>
           <a:solidFill>
@@ -9398,7 +9830,7 @@
         </p:nvSpPr>
         <p:spPr>
           <a:xfrm>
-            <a:off x="7799832" y="4645152"/>
+            <a:off x="7799832" y="4330598"/>
             <a:ext cx="3145536" cy="256032"/>
           </a:xfrm>
           <a:prstGeom prst="rect">
@@ -9437,8 +9869,8 @@
         </p:nvSpPr>
         <p:spPr>
           <a:xfrm>
-            <a:off x="7799832" y="4974336"/>
-            <a:ext cx="3145536" cy="576072"/>
+            <a:off x="7799832" y="4659782"/>
+            <a:ext cx="3145536" cy="899770"/>
           </a:xfrm>
           <a:prstGeom prst="rect">
             <a:avLst/>
@@ -9464,7 +9896,7 @@
                 <a:ea typeface="Aptos" pitchFamily="34" charset="-122"/>
                 <a:cs typeface="Aptos" pitchFamily="34" charset="-120"/>
               </a:rPr>
-              <a:t>Translate this concept into clear decision rights, review steps, documentation expectations, and escalation paths before.</a:t>
+              <a:t>Translate this concept into clear decision rights, review steps, documentation expectations, and escalation paths before an AI-supported workflow is approved.</a:t>
             </a:r>
             <a:endParaRPr lang="en-US" sz="1320" dirty="0"/>
           </a:p>
@@ -9833,11 +10265,11 @@
         <p:spPr>
           <a:xfrm>
             <a:off x="7635240" y="1325880"/>
-            <a:ext cx="3474720" cy="1325880"/>
+            <a:ext cx="3474720" cy="1255471"/>
           </a:xfrm>
           <a:prstGeom prst="roundRect">
             <a:avLst>
-              <a:gd name="adj" fmla="val 8276"/>
+              <a:gd name="adj" fmla="val 8740"/>
             </a:avLst>
           </a:prstGeom>
           <a:solidFill>
@@ -9899,7 +10331,7 @@
         <p:spPr>
           <a:xfrm>
             <a:off x="7799832" y="1801368"/>
-            <a:ext cx="3145536" cy="758952"/>
+            <a:ext cx="3145536" cy="688543"/>
           </a:xfrm>
           <a:prstGeom prst="rect">
             <a:avLst/>
@@ -9939,12 +10371,12 @@
         </p:nvSpPr>
         <p:spPr>
           <a:xfrm>
-            <a:off x="7635240" y="2788920"/>
-            <a:ext cx="3474720" cy="1536192"/>
+            <a:off x="7635240" y="2718511"/>
+            <a:ext cx="3474720" cy="1328623"/>
           </a:xfrm>
           <a:prstGeom prst="roundRect">
             <a:avLst>
-              <a:gd name="adj" fmla="val 7143"/>
+              <a:gd name="adj" fmla="val 8259"/>
             </a:avLst>
           </a:prstGeom>
           <a:solidFill>
@@ -9966,7 +10398,7 @@
         </p:nvSpPr>
         <p:spPr>
           <a:xfrm>
-            <a:off x="7799832" y="2935224"/>
+            <a:off x="7799832" y="2864815"/>
             <a:ext cx="3145536" cy="256032"/>
           </a:xfrm>
           <a:prstGeom prst="rect">
@@ -10005,8 +10437,8 @@
         </p:nvSpPr>
         <p:spPr>
           <a:xfrm>
-            <a:off x="7818120" y="3300984"/>
-            <a:ext cx="3090672" cy="877824"/>
+            <a:off x="7818120" y="3230575"/>
+            <a:ext cx="3090672" cy="670255"/>
           </a:xfrm>
           <a:prstGeom prst="rect">
             <a:avLst/>
@@ -10080,12 +10512,12 @@
         </p:nvSpPr>
         <p:spPr>
           <a:xfrm>
-            <a:off x="7635240" y="4498848"/>
-            <a:ext cx="3474720" cy="1143000"/>
+            <a:off x="7635240" y="4184294"/>
+            <a:ext cx="3474720" cy="1466698"/>
           </a:xfrm>
           <a:prstGeom prst="roundRect">
             <a:avLst>
-              <a:gd name="adj" fmla="val 9600"/>
+              <a:gd name="adj" fmla="val 7481"/>
             </a:avLst>
           </a:prstGeom>
           <a:solidFill>
@@ -10107,7 +10539,7 @@
         </p:nvSpPr>
         <p:spPr>
           <a:xfrm>
-            <a:off x="7799832" y="4645152"/>
+            <a:off x="7799832" y="4330598"/>
             <a:ext cx="3145536" cy="256032"/>
           </a:xfrm>
           <a:prstGeom prst="rect">
@@ -10146,8 +10578,8 @@
         </p:nvSpPr>
         <p:spPr>
           <a:xfrm>
-            <a:off x="7799832" y="4974336"/>
-            <a:ext cx="3145536" cy="576072"/>
+            <a:off x="7799832" y="4659782"/>
+            <a:ext cx="3145536" cy="899770"/>
           </a:xfrm>
           <a:prstGeom prst="rect">
             <a:avLst/>
@@ -10173,7 +10605,7 @@
                 <a:ea typeface="Aptos" pitchFamily="34" charset="-122"/>
                 <a:cs typeface="Aptos" pitchFamily="34" charset="-120"/>
               </a:rPr>
-              <a:t>Translate this concept into clear decision rights, review steps, documentation expectations, and escalation paths before.</a:t>
+              <a:t>Translate this concept into clear decision rights, review steps, documentation expectations, and escalation paths before an AI-supported workflow is approved.</a:t>
             </a:r>
             <a:endParaRPr lang="en-US" sz="1320" dirty="0"/>
           </a:p>
@@ -10542,11 +10974,11 @@
         <p:spPr>
           <a:xfrm>
             <a:off x="7635240" y="1325880"/>
-            <a:ext cx="3474720" cy="1325880"/>
+            <a:ext cx="3474720" cy="1207008"/>
           </a:xfrm>
           <a:prstGeom prst="roundRect">
             <a:avLst>
-              <a:gd name="adj" fmla="val 8276"/>
+              <a:gd name="adj" fmla="val 9091"/>
             </a:avLst>
           </a:prstGeom>
           <a:solidFill>
@@ -10608,7 +11040,7 @@
         <p:spPr>
           <a:xfrm>
             <a:off x="7799832" y="1801368"/>
-            <a:ext cx="3145536" cy="758952"/>
+            <a:ext cx="3145536" cy="640080"/>
           </a:xfrm>
           <a:prstGeom prst="rect">
             <a:avLst/>
@@ -10648,12 +11080,12 @@
         </p:nvSpPr>
         <p:spPr>
           <a:xfrm>
-            <a:off x="7635240" y="2788920"/>
-            <a:ext cx="3474720" cy="1536192"/>
+            <a:off x="7635240" y="2670048"/>
+            <a:ext cx="3474720" cy="1377086"/>
           </a:xfrm>
           <a:prstGeom prst="roundRect">
             <a:avLst>
-              <a:gd name="adj" fmla="val 7143"/>
+              <a:gd name="adj" fmla="val 7968"/>
             </a:avLst>
           </a:prstGeom>
           <a:solidFill>
@@ -10675,7 +11107,7 @@
         </p:nvSpPr>
         <p:spPr>
           <a:xfrm>
-            <a:off x="7799832" y="2935224"/>
+            <a:off x="7799832" y="2816352"/>
             <a:ext cx="3145536" cy="256032"/>
           </a:xfrm>
           <a:prstGeom prst="rect">
@@ -10714,8 +11146,8 @@
         </p:nvSpPr>
         <p:spPr>
           <a:xfrm>
-            <a:off x="7818120" y="3300984"/>
-            <a:ext cx="3090672" cy="877824"/>
+            <a:off x="7818120" y="3182112"/>
+            <a:ext cx="3090672" cy="718718"/>
           </a:xfrm>
           <a:prstGeom prst="rect">
             <a:avLst/>
@@ -10789,12 +11221,12 @@
         </p:nvSpPr>
         <p:spPr>
           <a:xfrm>
-            <a:off x="7635240" y="4498848"/>
-            <a:ext cx="3474720" cy="1143000"/>
+            <a:off x="7635240" y="4184294"/>
+            <a:ext cx="3474720" cy="1466698"/>
           </a:xfrm>
           <a:prstGeom prst="roundRect">
             <a:avLst>
-              <a:gd name="adj" fmla="val 9600"/>
+              <a:gd name="adj" fmla="val 7481"/>
             </a:avLst>
           </a:prstGeom>
           <a:solidFill>
@@ -10816,7 +11248,7 @@
         </p:nvSpPr>
         <p:spPr>
           <a:xfrm>
-            <a:off x="7799832" y="4645152"/>
+            <a:off x="7799832" y="4330598"/>
             <a:ext cx="3145536" cy="256032"/>
           </a:xfrm>
           <a:prstGeom prst="rect">
@@ -10855,8 +11287,8 @@
         </p:nvSpPr>
         <p:spPr>
           <a:xfrm>
-            <a:off x="7799832" y="4974336"/>
-            <a:ext cx="3145536" cy="576072"/>
+            <a:off x="7799832" y="4659782"/>
+            <a:ext cx="3145536" cy="899770"/>
           </a:xfrm>
           <a:prstGeom prst="rect">
             <a:avLst/>
@@ -10882,7 +11314,7 @@
                 <a:ea typeface="Aptos" pitchFamily="34" charset="-122"/>
                 <a:cs typeface="Aptos" pitchFamily="34" charset="-120"/>
               </a:rPr>
-              <a:t>Translate this concept into clear decision rights, review steps, documentation expectations, and escalation paths before.</a:t>
+              <a:t>Translate this concept into clear decision rights, review steps, documentation expectations, and escalation paths before an AI-supported workflow is approved.</a:t>
             </a:r>
             <a:endParaRPr lang="en-US" sz="1320" dirty="0"/>
           </a:p>
@@ -11343,7 +11775,7 @@
                 <a:ea typeface="Aptos" pitchFamily="34" charset="-122"/>
                 <a:cs typeface="Aptos" pitchFamily="34" charset="-120"/>
               </a:rPr>
-              <a:t>Level: Introductory Primary track: Governance and Security Appears in tracks: shared-foundational, governance-security,.</a:t>
+              <a:t>Level: Introductory Primary track: Governance and Security Appears in tracks: shared-foundational, governance-security, policy, program-management</a:t>
             </a:r>
             <a:endParaRPr lang="en-US" sz="1320" dirty="0"/>
           </a:p>
@@ -11853,11 +12285,11 @@
         <p:spPr>
           <a:xfrm>
             <a:off x="7635240" y="1325880"/>
-            <a:ext cx="3474720" cy="1325880"/>
+            <a:ext cx="3474720" cy="1255471"/>
           </a:xfrm>
           <a:prstGeom prst="roundRect">
             <a:avLst>
-              <a:gd name="adj" fmla="val 8276"/>
+              <a:gd name="adj" fmla="val 8740"/>
             </a:avLst>
           </a:prstGeom>
           <a:solidFill>
@@ -11919,7 +12351,7 @@
         <p:spPr>
           <a:xfrm>
             <a:off x="7799832" y="1801368"/>
-            <a:ext cx="3145536" cy="758952"/>
+            <a:ext cx="3145536" cy="688543"/>
           </a:xfrm>
           <a:prstGeom prst="rect">
             <a:avLst/>
@@ -11959,12 +12391,12 @@
         </p:nvSpPr>
         <p:spPr>
           <a:xfrm>
-            <a:off x="7635240" y="2788920"/>
-            <a:ext cx="3474720" cy="1536192"/>
+            <a:off x="7635240" y="2718511"/>
+            <a:ext cx="3474720" cy="1328623"/>
           </a:xfrm>
           <a:prstGeom prst="roundRect">
             <a:avLst>
-              <a:gd name="adj" fmla="val 7143"/>
+              <a:gd name="adj" fmla="val 8259"/>
             </a:avLst>
           </a:prstGeom>
           <a:solidFill>
@@ -11986,7 +12418,7 @@
         </p:nvSpPr>
         <p:spPr>
           <a:xfrm>
-            <a:off x="7799832" y="2935224"/>
+            <a:off x="7799832" y="2864815"/>
             <a:ext cx="3145536" cy="256032"/>
           </a:xfrm>
           <a:prstGeom prst="rect">
@@ -12025,8 +12457,8 @@
         </p:nvSpPr>
         <p:spPr>
           <a:xfrm>
-            <a:off x="7818120" y="3300984"/>
-            <a:ext cx="3090672" cy="877824"/>
+            <a:off x="7818120" y="3230575"/>
+            <a:ext cx="3090672" cy="670255"/>
           </a:xfrm>
           <a:prstGeom prst="rect">
             <a:avLst/>
@@ -12100,12 +12532,12 @@
         </p:nvSpPr>
         <p:spPr>
           <a:xfrm>
-            <a:off x="7635240" y="4498848"/>
-            <a:ext cx="3474720" cy="1143000"/>
+            <a:off x="7635240" y="4184294"/>
+            <a:ext cx="3474720" cy="1466698"/>
           </a:xfrm>
           <a:prstGeom prst="roundRect">
             <a:avLst>
-              <a:gd name="adj" fmla="val 9600"/>
+              <a:gd name="adj" fmla="val 7481"/>
             </a:avLst>
           </a:prstGeom>
           <a:solidFill>
@@ -12127,7 +12559,7 @@
         </p:nvSpPr>
         <p:spPr>
           <a:xfrm>
-            <a:off x="7799832" y="4645152"/>
+            <a:off x="7799832" y="4330598"/>
             <a:ext cx="3145536" cy="256032"/>
           </a:xfrm>
           <a:prstGeom prst="rect">
@@ -12166,8 +12598,8 @@
         </p:nvSpPr>
         <p:spPr>
           <a:xfrm>
-            <a:off x="7799832" y="4974336"/>
-            <a:ext cx="3145536" cy="576072"/>
+            <a:off x="7799832" y="4659782"/>
+            <a:ext cx="3145536" cy="899770"/>
           </a:xfrm>
           <a:prstGeom prst="rect">
             <a:avLst/>
@@ -12193,7 +12625,7 @@
                 <a:ea typeface="Aptos" pitchFamily="34" charset="-122"/>
                 <a:cs typeface="Aptos" pitchFamily="34" charset="-120"/>
               </a:rPr>
-              <a:t>Translate this concept into clear decision rights, review steps, documentation expectations, and escalation paths before.</a:t>
+              <a:t>Translate this concept into clear decision rights, review steps, documentation expectations, and escalation paths before an AI-supported workflow is approved.</a:t>
             </a:r>
             <a:endParaRPr lang="en-US" sz="1320" dirty="0"/>
           </a:p>
@@ -12562,11 +12994,11 @@
         <p:spPr>
           <a:xfrm>
             <a:off x="7635240" y="1325880"/>
-            <a:ext cx="3474720" cy="1325880"/>
+            <a:ext cx="3474720" cy="1255471"/>
           </a:xfrm>
           <a:prstGeom prst="roundRect">
             <a:avLst>
-              <a:gd name="adj" fmla="val 8276"/>
+              <a:gd name="adj" fmla="val 8740"/>
             </a:avLst>
           </a:prstGeom>
           <a:solidFill>
@@ -12628,7 +13060,7 @@
         <p:spPr>
           <a:xfrm>
             <a:off x="7799832" y="1801368"/>
-            <a:ext cx="3145536" cy="758952"/>
+            <a:ext cx="3145536" cy="688543"/>
           </a:xfrm>
           <a:prstGeom prst="rect">
             <a:avLst/>
@@ -12668,12 +13100,12 @@
         </p:nvSpPr>
         <p:spPr>
           <a:xfrm>
-            <a:off x="7635240" y="2788920"/>
-            <a:ext cx="3474720" cy="1536192"/>
+            <a:off x="7635240" y="2718511"/>
+            <a:ext cx="3474720" cy="1328623"/>
           </a:xfrm>
           <a:prstGeom prst="roundRect">
             <a:avLst>
-              <a:gd name="adj" fmla="val 7143"/>
+              <a:gd name="adj" fmla="val 8259"/>
             </a:avLst>
           </a:prstGeom>
           <a:solidFill>
@@ -12695,7 +13127,7 @@
         </p:nvSpPr>
         <p:spPr>
           <a:xfrm>
-            <a:off x="7799832" y="2935224"/>
+            <a:off x="7799832" y="2864815"/>
             <a:ext cx="3145536" cy="256032"/>
           </a:xfrm>
           <a:prstGeom prst="rect">
@@ -12734,8 +13166,8 @@
         </p:nvSpPr>
         <p:spPr>
           <a:xfrm>
-            <a:off x="7818120" y="3300984"/>
-            <a:ext cx="3090672" cy="877824"/>
+            <a:off x="7818120" y="3230575"/>
+            <a:ext cx="3090672" cy="670255"/>
           </a:xfrm>
           <a:prstGeom prst="rect">
             <a:avLst/>
@@ -12809,12 +13241,12 @@
         </p:nvSpPr>
         <p:spPr>
           <a:xfrm>
-            <a:off x="7635240" y="4498848"/>
-            <a:ext cx="3474720" cy="1143000"/>
+            <a:off x="7635240" y="4184294"/>
+            <a:ext cx="3474720" cy="1466698"/>
           </a:xfrm>
           <a:prstGeom prst="roundRect">
             <a:avLst>
-              <a:gd name="adj" fmla="val 9600"/>
+              <a:gd name="adj" fmla="val 7481"/>
             </a:avLst>
           </a:prstGeom>
           <a:solidFill>
@@ -12836,7 +13268,7 @@
         </p:nvSpPr>
         <p:spPr>
           <a:xfrm>
-            <a:off x="7799832" y="4645152"/>
+            <a:off x="7799832" y="4330598"/>
             <a:ext cx="3145536" cy="256032"/>
           </a:xfrm>
           <a:prstGeom prst="rect">
@@ -12875,8 +13307,8 @@
         </p:nvSpPr>
         <p:spPr>
           <a:xfrm>
-            <a:off x="7799832" y="4974336"/>
-            <a:ext cx="3145536" cy="576072"/>
+            <a:off x="7799832" y="4659782"/>
+            <a:ext cx="3145536" cy="899770"/>
           </a:xfrm>
           <a:prstGeom prst="rect">
             <a:avLst/>
@@ -12902,7 +13334,7 @@
                 <a:ea typeface="Aptos" pitchFamily="34" charset="-122"/>
                 <a:cs typeface="Aptos" pitchFamily="34" charset="-120"/>
               </a:rPr>
-              <a:t>Translate this concept into clear decision rights, review steps, documentation expectations, and escalation paths before.</a:t>
+              <a:t>Translate this concept into clear decision rights, review steps, documentation expectations, and escalation paths before an AI-supported workflow is approved.</a:t>
             </a:r>
             <a:endParaRPr lang="en-US" sz="1320" dirty="0"/>
           </a:p>
@@ -13271,11 +13703,11 @@
         <p:spPr>
           <a:xfrm>
             <a:off x="7635240" y="1325880"/>
-            <a:ext cx="3474720" cy="1325880"/>
+            <a:ext cx="3474720" cy="1207008"/>
           </a:xfrm>
           <a:prstGeom prst="roundRect">
             <a:avLst>
-              <a:gd name="adj" fmla="val 8276"/>
+              <a:gd name="adj" fmla="val 9091"/>
             </a:avLst>
           </a:prstGeom>
           <a:solidFill>
@@ -13337,7 +13769,7 @@
         <p:spPr>
           <a:xfrm>
             <a:off x="7799832" y="1801368"/>
-            <a:ext cx="3145536" cy="758952"/>
+            <a:ext cx="3145536" cy="640080"/>
           </a:xfrm>
           <a:prstGeom prst="rect">
             <a:avLst/>
@@ -13363,7 +13795,7 @@
                 <a:ea typeface="Aptos" pitchFamily="34" charset="-122"/>
                 <a:cs typeface="Aptos" pitchFamily="34" charset="-120"/>
               </a:rPr>
-              <a:t>Select a proposed AI-supported public health project that could involve Tribal Nations, AI/AN.</a:t>
+              <a:t>Select a proposed AI-supported public health project that could involve Tribal.</a:t>
             </a:r>
             <a:endParaRPr lang="en-US" sz="1320" dirty="0"/>
           </a:p>
@@ -13377,12 +13809,12 @@
         </p:nvSpPr>
         <p:spPr>
           <a:xfrm>
-            <a:off x="7635240" y="2788920"/>
-            <a:ext cx="3474720" cy="1536192"/>
+            <a:off x="7635240" y="2670048"/>
+            <a:ext cx="3474720" cy="1377086"/>
           </a:xfrm>
           <a:prstGeom prst="roundRect">
             <a:avLst>
-              <a:gd name="adj" fmla="val 7143"/>
+              <a:gd name="adj" fmla="val 7968"/>
             </a:avLst>
           </a:prstGeom>
           <a:solidFill>
@@ -13404,7 +13836,7 @@
         </p:nvSpPr>
         <p:spPr>
           <a:xfrm>
-            <a:off x="7799832" y="2935224"/>
+            <a:off x="7799832" y="2816352"/>
             <a:ext cx="3145536" cy="256032"/>
           </a:xfrm>
           <a:prstGeom prst="rect">
@@ -13443,8 +13875,8 @@
         </p:nvSpPr>
         <p:spPr>
           <a:xfrm>
-            <a:off x="7818120" y="3300984"/>
-            <a:ext cx="3090672" cy="877824"/>
+            <a:off x="7818120" y="3182112"/>
+            <a:ext cx="3090672" cy="718718"/>
           </a:xfrm>
           <a:prstGeom prst="rect">
             <a:avLst/>
@@ -13518,12 +13950,12 @@
         </p:nvSpPr>
         <p:spPr>
           <a:xfrm>
-            <a:off x="7635240" y="4498848"/>
-            <a:ext cx="3474720" cy="1143000"/>
+            <a:off x="7635240" y="4184294"/>
+            <a:ext cx="3474720" cy="1466698"/>
           </a:xfrm>
           <a:prstGeom prst="roundRect">
             <a:avLst>
-              <a:gd name="adj" fmla="val 9600"/>
+              <a:gd name="adj" fmla="val 7481"/>
             </a:avLst>
           </a:prstGeom>
           <a:solidFill>
@@ -13545,7 +13977,7 @@
         </p:nvSpPr>
         <p:spPr>
           <a:xfrm>
-            <a:off x="7799832" y="4645152"/>
+            <a:off x="7799832" y="4330598"/>
             <a:ext cx="3145536" cy="256032"/>
           </a:xfrm>
           <a:prstGeom prst="rect">
@@ -13584,8 +14016,8 @@
         </p:nvSpPr>
         <p:spPr>
           <a:xfrm>
-            <a:off x="7799832" y="4974336"/>
-            <a:ext cx="3145536" cy="576072"/>
+            <a:off x="7799832" y="4659782"/>
+            <a:ext cx="3145536" cy="899770"/>
           </a:xfrm>
           <a:prstGeom prst="rect">
             <a:avLst/>
@@ -13611,7 +14043,7 @@
                 <a:ea typeface="Aptos" pitchFamily="34" charset="-122"/>
                 <a:cs typeface="Aptos" pitchFamily="34" charset="-120"/>
               </a:rPr>
-              <a:t>Use the assignment to test whether you can explain the concept, apply it to a realistic public health situation, and.</a:t>
+              <a:t>Use the assignment to test whether you can explain the concept, apply it to a realistic public health situation, and identify what would need review before the work moves forward.</a:t>
             </a:r>
             <a:endParaRPr lang="en-US" sz="1320" dirty="0"/>
           </a:p>
@@ -13980,11 +14412,11 @@
         <p:spPr>
           <a:xfrm>
             <a:off x="7635240" y="1325880"/>
-            <a:ext cx="3474720" cy="1325880"/>
+            <a:ext cx="3474720" cy="1255471"/>
           </a:xfrm>
           <a:prstGeom prst="roundRect">
             <a:avLst>
-              <a:gd name="adj" fmla="val 8276"/>
+              <a:gd name="adj" fmla="val 8740"/>
             </a:avLst>
           </a:prstGeom>
           <a:solidFill>
@@ -14046,7 +14478,7 @@
         <p:spPr>
           <a:xfrm>
             <a:off x="7799832" y="1801368"/>
-            <a:ext cx="3145536" cy="758952"/>
+            <a:ext cx="3145536" cy="688543"/>
           </a:xfrm>
           <a:prstGeom prst="rect">
             <a:avLst/>
@@ -14086,12 +14518,12 @@
         </p:nvSpPr>
         <p:spPr>
           <a:xfrm>
-            <a:off x="7635240" y="2788920"/>
-            <a:ext cx="3474720" cy="1536192"/>
+            <a:off x="7635240" y="2718511"/>
+            <a:ext cx="3474720" cy="1328623"/>
           </a:xfrm>
           <a:prstGeom prst="roundRect">
             <a:avLst>
-              <a:gd name="adj" fmla="val 7143"/>
+              <a:gd name="adj" fmla="val 8259"/>
             </a:avLst>
           </a:prstGeom>
           <a:solidFill>
@@ -14113,7 +14545,7 @@
         </p:nvSpPr>
         <p:spPr>
           <a:xfrm>
-            <a:off x="7799832" y="2935224"/>
+            <a:off x="7799832" y="2864815"/>
             <a:ext cx="3145536" cy="256032"/>
           </a:xfrm>
           <a:prstGeom prst="rect">
@@ -14152,8 +14584,8 @@
         </p:nvSpPr>
         <p:spPr>
           <a:xfrm>
-            <a:off x="7818120" y="3300984"/>
-            <a:ext cx="3090672" cy="877824"/>
+            <a:off x="7818120" y="3230575"/>
+            <a:ext cx="3090672" cy="670255"/>
           </a:xfrm>
           <a:prstGeom prst="rect">
             <a:avLst/>
@@ -14227,12 +14659,12 @@
         </p:nvSpPr>
         <p:spPr>
           <a:xfrm>
-            <a:off x="7635240" y="4498848"/>
-            <a:ext cx="3474720" cy="1143000"/>
+            <a:off x="7635240" y="4184294"/>
+            <a:ext cx="3474720" cy="1466698"/>
           </a:xfrm>
           <a:prstGeom prst="roundRect">
             <a:avLst>
-              <a:gd name="adj" fmla="val 9600"/>
+              <a:gd name="adj" fmla="val 7481"/>
             </a:avLst>
           </a:prstGeom>
           <a:solidFill>
@@ -14254,7 +14686,7 @@
         </p:nvSpPr>
         <p:spPr>
           <a:xfrm>
-            <a:off x="7799832" y="4645152"/>
+            <a:off x="7799832" y="4330598"/>
             <a:ext cx="3145536" cy="256032"/>
           </a:xfrm>
           <a:prstGeom prst="rect">
@@ -14293,8 +14725,8 @@
         </p:nvSpPr>
         <p:spPr>
           <a:xfrm>
-            <a:off x="7799832" y="4974336"/>
-            <a:ext cx="3145536" cy="576072"/>
+            <a:off x="7799832" y="4659782"/>
+            <a:ext cx="3145536" cy="899770"/>
           </a:xfrm>
           <a:prstGeom prst="rect">
             <a:avLst/>
@@ -14320,7 +14752,7 @@
                 <a:ea typeface="Aptos" pitchFamily="34" charset="-122"/>
                 <a:cs typeface="Aptos" pitchFamily="34" charset="-120"/>
               </a:rPr>
-              <a:t>Translate this concept into clear decision rights, review steps, documentation expectations, and escalation paths before.</a:t>
+              <a:t>Translate this concept into clear decision rights, review steps, documentation expectations, and escalation paths before an AI-supported workflow is approved.</a:t>
             </a:r>
             <a:endParaRPr lang="en-US" sz="1320" dirty="0"/>
           </a:p>
@@ -14689,11 +15121,11 @@
         <p:spPr>
           <a:xfrm>
             <a:off x="7635240" y="1325880"/>
-            <a:ext cx="3474720" cy="1325880"/>
+            <a:ext cx="3474720" cy="1207008"/>
           </a:xfrm>
           <a:prstGeom prst="roundRect">
             <a:avLst>
-              <a:gd name="adj" fmla="val 8276"/>
+              <a:gd name="adj" fmla="val 9091"/>
             </a:avLst>
           </a:prstGeom>
           <a:solidFill>
@@ -14755,7 +15187,7 @@
         <p:spPr>
           <a:xfrm>
             <a:off x="7799832" y="1801368"/>
-            <a:ext cx="3145536" cy="758952"/>
+            <a:ext cx="3145536" cy="640080"/>
           </a:xfrm>
           <a:prstGeom prst="rect">
             <a:avLst/>
@@ -14795,12 +15227,12 @@
         </p:nvSpPr>
         <p:spPr>
           <a:xfrm>
-            <a:off x="7635240" y="2788920"/>
-            <a:ext cx="3474720" cy="1536192"/>
+            <a:off x="7635240" y="2670048"/>
+            <a:ext cx="3474720" cy="1377086"/>
           </a:xfrm>
           <a:prstGeom prst="roundRect">
             <a:avLst>
-              <a:gd name="adj" fmla="val 7143"/>
+              <a:gd name="adj" fmla="val 7968"/>
             </a:avLst>
           </a:prstGeom>
           <a:solidFill>
@@ -14822,7 +15254,7 @@
         </p:nvSpPr>
         <p:spPr>
           <a:xfrm>
-            <a:off x="7799832" y="2935224"/>
+            <a:off x="7799832" y="2816352"/>
             <a:ext cx="3145536" cy="256032"/>
           </a:xfrm>
           <a:prstGeom prst="rect">
@@ -14861,8 +15293,8 @@
         </p:nvSpPr>
         <p:spPr>
           <a:xfrm>
-            <a:off x="7818120" y="3300984"/>
-            <a:ext cx="3090672" cy="877824"/>
+            <a:off x="7818120" y="3182112"/>
+            <a:ext cx="3090672" cy="718718"/>
           </a:xfrm>
           <a:prstGeom prst="rect">
             <a:avLst/>
@@ -14936,12 +15368,12 @@
         </p:nvSpPr>
         <p:spPr>
           <a:xfrm>
-            <a:off x="7635240" y="4498848"/>
-            <a:ext cx="3474720" cy="1143000"/>
+            <a:off x="7635240" y="4184294"/>
+            <a:ext cx="3474720" cy="1466698"/>
           </a:xfrm>
           <a:prstGeom prst="roundRect">
             <a:avLst>
-              <a:gd name="adj" fmla="val 9600"/>
+              <a:gd name="adj" fmla="val 7481"/>
             </a:avLst>
           </a:prstGeom>
           <a:solidFill>
@@ -14963,7 +15395,7 @@
         </p:nvSpPr>
         <p:spPr>
           <a:xfrm>
-            <a:off x="7799832" y="4645152"/>
+            <a:off x="7799832" y="4330598"/>
             <a:ext cx="3145536" cy="256032"/>
           </a:xfrm>
           <a:prstGeom prst="rect">
@@ -15002,8 +15434,8 @@
         </p:nvSpPr>
         <p:spPr>
           <a:xfrm>
-            <a:off x="7799832" y="4974336"/>
-            <a:ext cx="3145536" cy="576072"/>
+            <a:off x="7799832" y="4659782"/>
+            <a:ext cx="3145536" cy="899770"/>
           </a:xfrm>
           <a:prstGeom prst="rect">
             <a:avLst/>
@@ -15029,7 +15461,7 @@
                 <a:ea typeface="Aptos" pitchFamily="34" charset="-122"/>
                 <a:cs typeface="Aptos" pitchFamily="34" charset="-120"/>
               </a:rPr>
-              <a:t>Translate this concept into clear decision rights, review steps, documentation expectations, and escalation paths before.</a:t>
+              <a:t>Translate this concept into clear decision rights, review steps, documentation expectations, and escalation paths before an AI-supported workflow is approved.</a:t>
             </a:r>
             <a:endParaRPr lang="en-US" sz="1320" dirty="0"/>
           </a:p>
@@ -15398,11 +15830,11 @@
         <p:spPr>
           <a:xfrm>
             <a:off x="7635240" y="1325880"/>
-            <a:ext cx="3474720" cy="1325880"/>
+            <a:ext cx="3474720" cy="1207008"/>
           </a:xfrm>
           <a:prstGeom prst="roundRect">
             <a:avLst>
-              <a:gd name="adj" fmla="val 8276"/>
+              <a:gd name="adj" fmla="val 9091"/>
             </a:avLst>
           </a:prstGeom>
           <a:solidFill>
@@ -15464,7 +15896,7 @@
         <p:spPr>
           <a:xfrm>
             <a:off x="7799832" y="1801368"/>
-            <a:ext cx="3145536" cy="758952"/>
+            <a:ext cx="3145536" cy="640080"/>
           </a:xfrm>
           <a:prstGeom prst="rect">
             <a:avLst/>
@@ -15504,12 +15936,12 @@
         </p:nvSpPr>
         <p:spPr>
           <a:xfrm>
-            <a:off x="7635240" y="2788920"/>
-            <a:ext cx="3474720" cy="1536192"/>
+            <a:off x="7635240" y="2670048"/>
+            <a:ext cx="3474720" cy="1377086"/>
           </a:xfrm>
           <a:prstGeom prst="roundRect">
             <a:avLst>
-              <a:gd name="adj" fmla="val 7143"/>
+              <a:gd name="adj" fmla="val 7968"/>
             </a:avLst>
           </a:prstGeom>
           <a:solidFill>
@@ -15531,7 +15963,7 @@
         </p:nvSpPr>
         <p:spPr>
           <a:xfrm>
-            <a:off x="7799832" y="2935224"/>
+            <a:off x="7799832" y="2816352"/>
             <a:ext cx="3145536" cy="256032"/>
           </a:xfrm>
           <a:prstGeom prst="rect">
@@ -15570,8 +16002,8 @@
         </p:nvSpPr>
         <p:spPr>
           <a:xfrm>
-            <a:off x="7818120" y="3300984"/>
-            <a:ext cx="3090672" cy="877824"/>
+            <a:off x="7818120" y="3182112"/>
+            <a:ext cx="3090672" cy="718718"/>
           </a:xfrm>
           <a:prstGeom prst="rect">
             <a:avLst/>
@@ -15645,12 +16077,12 @@
         </p:nvSpPr>
         <p:spPr>
           <a:xfrm>
-            <a:off x="7635240" y="4498848"/>
-            <a:ext cx="3474720" cy="1143000"/>
+            <a:off x="7635240" y="4184294"/>
+            <a:ext cx="3474720" cy="1466698"/>
           </a:xfrm>
           <a:prstGeom prst="roundRect">
             <a:avLst>
-              <a:gd name="adj" fmla="val 9600"/>
+              <a:gd name="adj" fmla="val 7481"/>
             </a:avLst>
           </a:prstGeom>
           <a:solidFill>
@@ -15672,7 +16104,7 @@
         </p:nvSpPr>
         <p:spPr>
           <a:xfrm>
-            <a:off x="7799832" y="4645152"/>
+            <a:off x="7799832" y="4330598"/>
             <a:ext cx="3145536" cy="256032"/>
           </a:xfrm>
           <a:prstGeom prst="rect">
@@ -15711,8 +16143,8 @@
         </p:nvSpPr>
         <p:spPr>
           <a:xfrm>
-            <a:off x="7799832" y="4974336"/>
-            <a:ext cx="3145536" cy="576072"/>
+            <a:off x="7799832" y="4659782"/>
+            <a:ext cx="3145536" cy="899770"/>
           </a:xfrm>
           <a:prstGeom prst="rect">
             <a:avLst/>
@@ -15738,7 +16170,7 @@
                 <a:ea typeface="Aptos" pitchFamily="34" charset="-122"/>
                 <a:cs typeface="Aptos" pitchFamily="34" charset="-120"/>
               </a:rPr>
-              <a:t>Translate this concept into clear decision rights, review steps, documentation expectations, and escalation paths before.</a:t>
+              <a:t>Translate this concept into clear decision rights, review steps, documentation expectations, and escalation paths before an AI-supported workflow is approved.</a:t>
             </a:r>
             <a:endParaRPr lang="en-US" sz="1320" dirty="0"/>
           </a:p>
@@ -16090,11 +16522,11 @@
         <p:spPr>
           <a:xfrm>
             <a:off x="7635240" y="1325880"/>
-            <a:ext cx="3474720" cy="1325880"/>
+            <a:ext cx="3474720" cy="1207008"/>
           </a:xfrm>
           <a:prstGeom prst="roundRect">
             <a:avLst>
-              <a:gd name="adj" fmla="val 8276"/>
+              <a:gd name="adj" fmla="val 9091"/>
             </a:avLst>
           </a:prstGeom>
           <a:solidFill>
@@ -16156,7 +16588,7 @@
         <p:spPr>
           <a:xfrm>
             <a:off x="7799832" y="1801368"/>
-            <a:ext cx="3145536" cy="758952"/>
+            <a:ext cx="3145536" cy="640080"/>
           </a:xfrm>
           <a:prstGeom prst="rect">
             <a:avLst/>
@@ -16196,12 +16628,12 @@
         </p:nvSpPr>
         <p:spPr>
           <a:xfrm>
-            <a:off x="7635240" y="2788920"/>
-            <a:ext cx="3474720" cy="1536192"/>
+            <a:off x="7635240" y="2670048"/>
+            <a:ext cx="3474720" cy="1377086"/>
           </a:xfrm>
           <a:prstGeom prst="roundRect">
             <a:avLst>
-              <a:gd name="adj" fmla="val 7143"/>
+              <a:gd name="adj" fmla="val 7968"/>
             </a:avLst>
           </a:prstGeom>
           <a:solidFill>
@@ -16223,7 +16655,7 @@
         </p:nvSpPr>
         <p:spPr>
           <a:xfrm>
-            <a:off x="7799832" y="2935224"/>
+            <a:off x="7799832" y="2816352"/>
             <a:ext cx="3145536" cy="256032"/>
           </a:xfrm>
           <a:prstGeom prst="rect">
@@ -16262,8 +16694,8 @@
         </p:nvSpPr>
         <p:spPr>
           <a:xfrm>
-            <a:off x="7818120" y="3300984"/>
-            <a:ext cx="3090672" cy="877824"/>
+            <a:off x="7818120" y="3182112"/>
+            <a:ext cx="3090672" cy="718718"/>
           </a:xfrm>
           <a:prstGeom prst="rect">
             <a:avLst/>
@@ -16320,12 +16752,12 @@
         </p:nvSpPr>
         <p:spPr>
           <a:xfrm>
-            <a:off x="7635240" y="4498848"/>
-            <a:ext cx="3474720" cy="1143000"/>
+            <a:off x="7635240" y="4184294"/>
+            <a:ext cx="3474720" cy="1466698"/>
           </a:xfrm>
           <a:prstGeom prst="roundRect">
             <a:avLst>
-              <a:gd name="adj" fmla="val 9600"/>
+              <a:gd name="adj" fmla="val 7481"/>
             </a:avLst>
           </a:prstGeom>
           <a:solidFill>
@@ -16347,7 +16779,7 @@
         </p:nvSpPr>
         <p:spPr>
           <a:xfrm>
-            <a:off x="7799832" y="4645152"/>
+            <a:off x="7799832" y="4330598"/>
             <a:ext cx="3145536" cy="256032"/>
           </a:xfrm>
           <a:prstGeom prst="rect">
@@ -16386,8 +16818,8 @@
         </p:nvSpPr>
         <p:spPr>
           <a:xfrm>
-            <a:off x="7799832" y="4974336"/>
-            <a:ext cx="3145536" cy="576072"/>
+            <a:off x="7799832" y="4659782"/>
+            <a:ext cx="3145536" cy="899770"/>
           </a:xfrm>
           <a:prstGeom prst="rect">
             <a:avLst/>
@@ -16413,7 +16845,7 @@
                 <a:ea typeface="Aptos" pitchFamily="34" charset="-122"/>
                 <a:cs typeface="Aptos" pitchFamily="34" charset="-120"/>
               </a:rPr>
-              <a:t>Translate this concept into clear decision rights, review steps, documentation expectations, and escalation paths before.</a:t>
+              <a:t>Translate this concept into clear decision rights, review steps, documentation expectations, and escalation paths before an AI-supported workflow is approved.</a:t>
             </a:r>
             <a:endParaRPr lang="en-US" sz="1320" dirty="0"/>
           </a:p>
@@ -16748,11 +17180,11 @@
         <p:spPr>
           <a:xfrm>
             <a:off x="7635240" y="1325880"/>
-            <a:ext cx="3474720" cy="1325880"/>
+            <a:ext cx="3474720" cy="1207008"/>
           </a:xfrm>
           <a:prstGeom prst="roundRect">
             <a:avLst>
-              <a:gd name="adj" fmla="val 8276"/>
+              <a:gd name="adj" fmla="val 9091"/>
             </a:avLst>
           </a:prstGeom>
           <a:solidFill>
@@ -16814,7 +17246,7 @@
         <p:spPr>
           <a:xfrm>
             <a:off x="7799832" y="1801368"/>
-            <a:ext cx="3145536" cy="758952"/>
+            <a:ext cx="3145536" cy="640080"/>
           </a:xfrm>
           <a:prstGeom prst="rect">
             <a:avLst/>
@@ -16854,12 +17286,12 @@
         </p:nvSpPr>
         <p:spPr>
           <a:xfrm>
-            <a:off x="7635240" y="2788920"/>
-            <a:ext cx="3474720" cy="1536192"/>
+            <a:off x="7635240" y="2670048"/>
+            <a:ext cx="3474720" cy="1377086"/>
           </a:xfrm>
           <a:prstGeom prst="roundRect">
             <a:avLst>
-              <a:gd name="adj" fmla="val 7143"/>
+              <a:gd name="adj" fmla="val 7968"/>
             </a:avLst>
           </a:prstGeom>
           <a:solidFill>
@@ -16881,7 +17313,7 @@
         </p:nvSpPr>
         <p:spPr>
           <a:xfrm>
-            <a:off x="7799832" y="2935224"/>
+            <a:off x="7799832" y="2816352"/>
             <a:ext cx="3145536" cy="256032"/>
           </a:xfrm>
           <a:prstGeom prst="rect">
@@ -16920,8 +17352,8 @@
         </p:nvSpPr>
         <p:spPr>
           <a:xfrm>
-            <a:off x="7818120" y="3300984"/>
-            <a:ext cx="3090672" cy="877824"/>
+            <a:off x="7818120" y="3182112"/>
+            <a:ext cx="3090672" cy="718718"/>
           </a:xfrm>
           <a:prstGeom prst="rect">
             <a:avLst/>
@@ -16961,12 +17393,12 @@
         </p:nvSpPr>
         <p:spPr>
           <a:xfrm>
-            <a:off x="7635240" y="4498848"/>
-            <a:ext cx="3474720" cy="1143000"/>
+            <a:off x="7635240" y="4184294"/>
+            <a:ext cx="3474720" cy="1466698"/>
           </a:xfrm>
           <a:prstGeom prst="roundRect">
             <a:avLst>
-              <a:gd name="adj" fmla="val 9600"/>
+              <a:gd name="adj" fmla="val 7481"/>
             </a:avLst>
           </a:prstGeom>
           <a:solidFill>
@@ -16988,7 +17420,7 @@
         </p:nvSpPr>
         <p:spPr>
           <a:xfrm>
-            <a:off x="7799832" y="4645152"/>
+            <a:off x="7799832" y="4330598"/>
             <a:ext cx="3145536" cy="256032"/>
           </a:xfrm>
           <a:prstGeom prst="rect">
@@ -17027,8 +17459,8 @@
         </p:nvSpPr>
         <p:spPr>
           <a:xfrm>
-            <a:off x="7799832" y="4974336"/>
-            <a:ext cx="3145536" cy="576072"/>
+            <a:off x="7799832" y="4659782"/>
+            <a:ext cx="3145536" cy="899770"/>
           </a:xfrm>
           <a:prstGeom prst="rect">
             <a:avLst/>
@@ -17054,7 +17486,7 @@
                 <a:ea typeface="Aptos" pitchFamily="34" charset="-122"/>
                 <a:cs typeface="Aptos" pitchFamily="34" charset="-120"/>
               </a:rPr>
-              <a:t>Use the assignment to test whether you can explain the concept, apply it to a realistic public health situation, and.</a:t>
+              <a:t>Use the assignment to test whether you can explain the concept, apply it to a realistic public health situation, and identify what would need review before the work moves forward.</a:t>
             </a:r>
             <a:endParaRPr lang="en-US" sz="1320" dirty="0"/>
           </a:p>
@@ -17423,11 +17855,11 @@
         <p:spPr>
           <a:xfrm>
             <a:off x="7635240" y="1325880"/>
-            <a:ext cx="3474720" cy="1325880"/>
+            <a:ext cx="3474720" cy="1207008"/>
           </a:xfrm>
           <a:prstGeom prst="roundRect">
             <a:avLst>
-              <a:gd name="adj" fmla="val 8276"/>
+              <a:gd name="adj" fmla="val 9091"/>
             </a:avLst>
           </a:prstGeom>
           <a:solidFill>
@@ -17489,7 +17921,7 @@
         <p:spPr>
           <a:xfrm>
             <a:off x="7799832" y="1801368"/>
-            <a:ext cx="3145536" cy="758952"/>
+            <a:ext cx="3145536" cy="640080"/>
           </a:xfrm>
           <a:prstGeom prst="rect">
             <a:avLst/>
@@ -17515,7 +17947,7 @@
                 <a:ea typeface="Aptos" pitchFamily="34" charset="-122"/>
                 <a:cs typeface="Aptos" pitchFamily="34" charset="-120"/>
               </a:rPr>
-              <a:t>1. Why should Tribal sovereignty be considered before an AI project with health data begins?</a:t>
+              <a:t>1. Why should Tribal sovereignty be considered before an AI project with health data.</a:t>
             </a:r>
             <a:endParaRPr lang="en-US" sz="1320" dirty="0"/>
           </a:p>
@@ -17529,12 +17961,12 @@
         </p:nvSpPr>
         <p:spPr>
           <a:xfrm>
-            <a:off x="7635240" y="2788920"/>
-            <a:ext cx="3474720" cy="1536192"/>
+            <a:off x="7635240" y="2670048"/>
+            <a:ext cx="3474720" cy="1377086"/>
           </a:xfrm>
           <a:prstGeom prst="roundRect">
             <a:avLst>
-              <a:gd name="adj" fmla="val 7143"/>
+              <a:gd name="adj" fmla="val 7968"/>
             </a:avLst>
           </a:prstGeom>
           <a:solidFill>
@@ -17556,7 +17988,7 @@
         </p:nvSpPr>
         <p:spPr>
           <a:xfrm>
-            <a:off x="7799832" y="2935224"/>
+            <a:off x="7799832" y="2816352"/>
             <a:ext cx="3145536" cy="256032"/>
           </a:xfrm>
           <a:prstGeom prst="rect">
@@ -17595,8 +18027,8 @@
         </p:nvSpPr>
         <p:spPr>
           <a:xfrm>
-            <a:off x="7818120" y="3300984"/>
-            <a:ext cx="3090672" cy="877824"/>
+            <a:off x="7818120" y="3182112"/>
+            <a:ext cx="3090672" cy="718718"/>
           </a:xfrm>
           <a:prstGeom prst="rect">
             <a:avLst/>
@@ -17670,12 +18102,12 @@
         </p:nvSpPr>
         <p:spPr>
           <a:xfrm>
-            <a:off x="7635240" y="4498848"/>
-            <a:ext cx="3474720" cy="1143000"/>
+            <a:off x="7635240" y="4184294"/>
+            <a:ext cx="3474720" cy="1466698"/>
           </a:xfrm>
           <a:prstGeom prst="roundRect">
             <a:avLst>
-              <a:gd name="adj" fmla="val 9600"/>
+              <a:gd name="adj" fmla="val 7481"/>
             </a:avLst>
           </a:prstGeom>
           <a:solidFill>
@@ -17697,7 +18129,7 @@
         </p:nvSpPr>
         <p:spPr>
           <a:xfrm>
-            <a:off x="7799832" y="4645152"/>
+            <a:off x="7799832" y="4330598"/>
             <a:ext cx="3145536" cy="256032"/>
           </a:xfrm>
           <a:prstGeom prst="rect">
@@ -17736,8 +18168,8 @@
         </p:nvSpPr>
         <p:spPr>
           <a:xfrm>
-            <a:off x="7799832" y="4974336"/>
-            <a:ext cx="3145536" cy="576072"/>
+            <a:off x="7799832" y="4659782"/>
+            <a:ext cx="3145536" cy="899770"/>
           </a:xfrm>
           <a:prstGeom prst="rect">
             <a:avLst/>
@@ -17763,7 +18195,7 @@
                 <a:ea typeface="Aptos" pitchFamily="34" charset="-122"/>
                 <a:cs typeface="Aptos" pitchFamily="34" charset="-120"/>
               </a:rPr>
-              <a:t>Use the assignment to test whether you can explain the concept, apply it to a realistic public health situation, and.</a:t>
+              <a:t>Use the assignment to test whether you can explain the concept, apply it to a realistic public health situation, and identify what would need review before the work moves forward.</a:t>
             </a:r>
             <a:endParaRPr lang="en-US" sz="1320" dirty="0"/>
           </a:p>
@@ -18132,11 +18564,11 @@
         <p:spPr>
           <a:xfrm>
             <a:off x="7635240" y="1325880"/>
-            <a:ext cx="3474720" cy="1325880"/>
+            <a:ext cx="3474720" cy="1207008"/>
           </a:xfrm>
           <a:prstGeom prst="roundRect">
             <a:avLst>
-              <a:gd name="adj" fmla="val 8276"/>
+              <a:gd name="adj" fmla="val 9091"/>
             </a:avLst>
           </a:prstGeom>
           <a:solidFill>
@@ -18198,7 +18630,7 @@
         <p:spPr>
           <a:xfrm>
             <a:off x="7799832" y="1801368"/>
-            <a:ext cx="3145536" cy="758952"/>
+            <a:ext cx="3145536" cy="640080"/>
           </a:xfrm>
           <a:prstGeom prst="rect">
             <a:avLst/>
@@ -18238,12 +18670,12 @@
         </p:nvSpPr>
         <p:spPr>
           <a:xfrm>
-            <a:off x="7635240" y="2788920"/>
-            <a:ext cx="3474720" cy="1536192"/>
+            <a:off x="7635240" y="2670048"/>
+            <a:ext cx="3474720" cy="1377086"/>
           </a:xfrm>
           <a:prstGeom prst="roundRect">
             <a:avLst>
-              <a:gd name="adj" fmla="val 7143"/>
+              <a:gd name="adj" fmla="val 7968"/>
             </a:avLst>
           </a:prstGeom>
           <a:solidFill>
@@ -18265,7 +18697,7 @@
         </p:nvSpPr>
         <p:spPr>
           <a:xfrm>
-            <a:off x="7799832" y="2935224"/>
+            <a:off x="7799832" y="2816352"/>
             <a:ext cx="3145536" cy="256032"/>
           </a:xfrm>
           <a:prstGeom prst="rect">
@@ -18304,8 +18736,8 @@
         </p:nvSpPr>
         <p:spPr>
           <a:xfrm>
-            <a:off x="7818120" y="3300984"/>
-            <a:ext cx="3090672" cy="877824"/>
+            <a:off x="7818120" y="3182112"/>
+            <a:ext cx="3090672" cy="718718"/>
           </a:xfrm>
           <a:prstGeom prst="rect">
             <a:avLst/>
@@ -18379,12 +18811,12 @@
         </p:nvSpPr>
         <p:spPr>
           <a:xfrm>
-            <a:off x="7635240" y="4498848"/>
-            <a:ext cx="3474720" cy="1143000"/>
+            <a:off x="7635240" y="4184294"/>
+            <a:ext cx="3474720" cy="1466698"/>
           </a:xfrm>
           <a:prstGeom prst="roundRect">
             <a:avLst>
-              <a:gd name="adj" fmla="val 9600"/>
+              <a:gd name="adj" fmla="val 7481"/>
             </a:avLst>
           </a:prstGeom>
           <a:solidFill>
@@ -18406,7 +18838,7 @@
         </p:nvSpPr>
         <p:spPr>
           <a:xfrm>
-            <a:off x="7799832" y="4645152"/>
+            <a:off x="7799832" y="4330598"/>
             <a:ext cx="3145536" cy="256032"/>
           </a:xfrm>
           <a:prstGeom prst="rect">
@@ -18445,8 +18877,8 @@
         </p:nvSpPr>
         <p:spPr>
           <a:xfrm>
-            <a:off x="7799832" y="4974336"/>
-            <a:ext cx="3145536" cy="576072"/>
+            <a:off x="7799832" y="4659782"/>
+            <a:ext cx="3145536" cy="899770"/>
           </a:xfrm>
           <a:prstGeom prst="rect">
             <a:avLst/>
@@ -18472,7 +18904,7 @@
                 <a:ea typeface="Aptos" pitchFamily="34" charset="-122"/>
                 <a:cs typeface="Aptos" pitchFamily="34" charset="-120"/>
               </a:rPr>
-              <a:t>Translate this concept into clear decision rights, review steps, documentation expectations, and escalation paths before.</a:t>
+              <a:t>Translate this concept into clear decision rights, review steps, documentation expectations, and escalation paths before an AI-supported workflow is approved.</a:t>
             </a:r>
             <a:endParaRPr lang="en-US" sz="1320" dirty="0"/>
           </a:p>
@@ -18950,7 +19382,7 @@
                 <a:ea typeface="Aptos" pitchFamily="34" charset="-122"/>
                 <a:cs typeface="Aptos" pitchFamily="34" charset="-120"/>
               </a:rPr>
-              <a:t>Use the related plays to identify decisions, participants, timing, approvals, and documentation needed for responsible.</a:t>
+              <a:t>Use the related plays to identify decisions, participants, timing, approvals, and documentation needed for responsible implementation.</a:t>
             </a:r>
             <a:endParaRPr lang="en-US" sz="1320" dirty="0"/>
           </a:p>
@@ -19443,11 +19875,11 @@
         <p:spPr>
           <a:xfrm>
             <a:off x="7635240" y="1325880"/>
-            <a:ext cx="3474720" cy="1325880"/>
+            <a:ext cx="3474720" cy="1255471"/>
           </a:xfrm>
           <a:prstGeom prst="roundRect">
             <a:avLst>
-              <a:gd name="adj" fmla="val 8276"/>
+              <a:gd name="adj" fmla="val 8740"/>
             </a:avLst>
           </a:prstGeom>
           <a:solidFill>
@@ -19509,7 +19941,7 @@
         <p:spPr>
           <a:xfrm>
             <a:off x="7799832" y="1801368"/>
-            <a:ext cx="3145536" cy="758952"/>
+            <a:ext cx="3145536" cy="688543"/>
           </a:xfrm>
           <a:prstGeom prst="rect">
             <a:avLst/>
@@ -19549,12 +19981,12 @@
         </p:nvSpPr>
         <p:spPr>
           <a:xfrm>
-            <a:off x="7635240" y="2788920"/>
-            <a:ext cx="3474720" cy="1536192"/>
+            <a:off x="7635240" y="2718511"/>
+            <a:ext cx="3474720" cy="1328623"/>
           </a:xfrm>
           <a:prstGeom prst="roundRect">
             <a:avLst>
-              <a:gd name="adj" fmla="val 7143"/>
+              <a:gd name="adj" fmla="val 8259"/>
             </a:avLst>
           </a:prstGeom>
           <a:solidFill>
@@ -19576,7 +20008,7 @@
         </p:nvSpPr>
         <p:spPr>
           <a:xfrm>
-            <a:off x="7799832" y="2935224"/>
+            <a:off x="7799832" y="2864815"/>
             <a:ext cx="3145536" cy="256032"/>
           </a:xfrm>
           <a:prstGeom prst="rect">
@@ -19615,8 +20047,8 @@
         </p:nvSpPr>
         <p:spPr>
           <a:xfrm>
-            <a:off x="7818120" y="3300984"/>
-            <a:ext cx="3090672" cy="877824"/>
+            <a:off x="7818120" y="3230575"/>
+            <a:ext cx="3090672" cy="670255"/>
           </a:xfrm>
           <a:prstGeom prst="rect">
             <a:avLst/>
@@ -19690,12 +20122,12 @@
         </p:nvSpPr>
         <p:spPr>
           <a:xfrm>
-            <a:off x="7635240" y="4498848"/>
-            <a:ext cx="3474720" cy="1143000"/>
+            <a:off x="7635240" y="4184294"/>
+            <a:ext cx="3474720" cy="1466698"/>
           </a:xfrm>
           <a:prstGeom prst="roundRect">
             <a:avLst>
-              <a:gd name="adj" fmla="val 9600"/>
+              <a:gd name="adj" fmla="val 7481"/>
             </a:avLst>
           </a:prstGeom>
           <a:solidFill>
@@ -19717,7 +20149,7 @@
         </p:nvSpPr>
         <p:spPr>
           <a:xfrm>
-            <a:off x="7799832" y="4645152"/>
+            <a:off x="7799832" y="4330598"/>
             <a:ext cx="3145536" cy="256032"/>
           </a:xfrm>
           <a:prstGeom prst="rect">
@@ -19756,8 +20188,8 @@
         </p:nvSpPr>
         <p:spPr>
           <a:xfrm>
-            <a:off x="7799832" y="4974336"/>
-            <a:ext cx="3145536" cy="576072"/>
+            <a:off x="7799832" y="4659782"/>
+            <a:ext cx="3145536" cy="899770"/>
           </a:xfrm>
           <a:prstGeom prst="rect">
             <a:avLst/>
@@ -19783,7 +20215,7 @@
                 <a:ea typeface="Aptos" pitchFamily="34" charset="-122"/>
                 <a:cs typeface="Aptos" pitchFamily="34" charset="-120"/>
               </a:rPr>
-              <a:t>Translate this concept into clear decision rights, review steps, documentation expectations, and escalation paths before.</a:t>
+              <a:t>Translate this concept into clear decision rights, review steps, documentation expectations, and escalation paths before an AI-supported workflow is approved.</a:t>
             </a:r>
             <a:endParaRPr lang="en-US" sz="1320" dirty="0"/>
           </a:p>
@@ -20261,7 +20693,7 @@
                 <a:ea typeface="Aptos" pitchFamily="34" charset="-122"/>
                 <a:cs typeface="Aptos" pitchFamily="34" charset="-120"/>
               </a:rPr>
-              <a:t>Use linked tools when your department needs a structured worksheet, template, checklist, review process, or.</a:t>
+              <a:t>Use linked tools when your department needs a structured worksheet, template, checklist, review process, or documentation artifact.</a:t>
             </a:r>
             <a:endParaRPr lang="en-US" sz="1320" dirty="0"/>
           </a:p>
@@ -20771,11 +21203,11 @@
         <p:spPr>
           <a:xfrm>
             <a:off x="7635240" y="1325880"/>
-            <a:ext cx="3474720" cy="1325880"/>
+            <a:ext cx="3474720" cy="1255471"/>
           </a:xfrm>
           <a:prstGeom prst="roundRect">
             <a:avLst>
-              <a:gd name="adj" fmla="val 8276"/>
+              <a:gd name="adj" fmla="val 8740"/>
             </a:avLst>
           </a:prstGeom>
           <a:solidFill>
@@ -20837,7 +21269,7 @@
         <p:spPr>
           <a:xfrm>
             <a:off x="7799832" y="1801368"/>
-            <a:ext cx="3145536" cy="758952"/>
+            <a:ext cx="3145536" cy="688543"/>
           </a:xfrm>
           <a:prstGeom prst="rect">
             <a:avLst/>
@@ -20877,12 +21309,12 @@
         </p:nvSpPr>
         <p:spPr>
           <a:xfrm>
-            <a:off x="7635240" y="2788920"/>
-            <a:ext cx="3474720" cy="1536192"/>
+            <a:off x="7635240" y="2718511"/>
+            <a:ext cx="3474720" cy="1328623"/>
           </a:xfrm>
           <a:prstGeom prst="roundRect">
             <a:avLst>
-              <a:gd name="adj" fmla="val 7143"/>
+              <a:gd name="adj" fmla="val 8259"/>
             </a:avLst>
           </a:prstGeom>
           <a:solidFill>
@@ -20904,7 +21336,7 @@
         </p:nvSpPr>
         <p:spPr>
           <a:xfrm>
-            <a:off x="7799832" y="2935224"/>
+            <a:off x="7799832" y="2864815"/>
             <a:ext cx="3145536" cy="256032"/>
           </a:xfrm>
           <a:prstGeom prst="rect">
@@ -20943,8 +21375,8 @@
         </p:nvSpPr>
         <p:spPr>
           <a:xfrm>
-            <a:off x="7818120" y="3300984"/>
-            <a:ext cx="3090672" cy="877824"/>
+            <a:off x="7818120" y="3230575"/>
+            <a:ext cx="3090672" cy="670255"/>
           </a:xfrm>
           <a:prstGeom prst="rect">
             <a:avLst/>
@@ -21018,12 +21450,12 @@
         </p:nvSpPr>
         <p:spPr>
           <a:xfrm>
-            <a:off x="7635240" y="4498848"/>
-            <a:ext cx="3474720" cy="1143000"/>
+            <a:off x="7635240" y="4184294"/>
+            <a:ext cx="3474720" cy="1466698"/>
           </a:xfrm>
           <a:prstGeom prst="roundRect">
             <a:avLst>
-              <a:gd name="adj" fmla="val 9600"/>
+              <a:gd name="adj" fmla="val 7481"/>
             </a:avLst>
           </a:prstGeom>
           <a:solidFill>
@@ -21045,7 +21477,7 @@
         </p:nvSpPr>
         <p:spPr>
           <a:xfrm>
-            <a:off x="7799832" y="4645152"/>
+            <a:off x="7799832" y="4330598"/>
             <a:ext cx="3145536" cy="256032"/>
           </a:xfrm>
           <a:prstGeom prst="rect">
@@ -21084,8 +21516,8 @@
         </p:nvSpPr>
         <p:spPr>
           <a:xfrm>
-            <a:off x="7799832" y="4974336"/>
-            <a:ext cx="3145536" cy="576072"/>
+            <a:off x="7799832" y="4659782"/>
+            <a:ext cx="3145536" cy="899770"/>
           </a:xfrm>
           <a:prstGeom prst="rect">
             <a:avLst/>
@@ -21111,7 +21543,7 @@
                 <a:ea typeface="Aptos" pitchFamily="34" charset="-122"/>
                 <a:cs typeface="Aptos" pitchFamily="34" charset="-120"/>
               </a:rPr>
-              <a:t>Use the assignment to test whether you can explain the concept, apply it to a realistic public health situation, and.</a:t>
+              <a:t>Use the assignment to test whether you can explain the concept, apply it to a realistic public health situation, and identify what would need review before the work moves forward.</a:t>
             </a:r>
             <a:endParaRPr lang="en-US" sz="1320" dirty="0"/>
           </a:p>
@@ -21463,11 +21895,11 @@
         <p:spPr>
           <a:xfrm>
             <a:off x="7635240" y="1325880"/>
-            <a:ext cx="3474720" cy="1325880"/>
+            <a:ext cx="3474720" cy="1207008"/>
           </a:xfrm>
           <a:prstGeom prst="roundRect">
             <a:avLst>
-              <a:gd name="adj" fmla="val 8276"/>
+              <a:gd name="adj" fmla="val 9091"/>
             </a:avLst>
           </a:prstGeom>
           <a:solidFill>
@@ -21529,7 +21961,7 @@
         <p:spPr>
           <a:xfrm>
             <a:off x="7799832" y="1801368"/>
-            <a:ext cx="3145536" cy="758952"/>
+            <a:ext cx="3145536" cy="640080"/>
           </a:xfrm>
           <a:prstGeom prst="rect">
             <a:avLst/>
@@ -21555,7 +21987,7 @@
                 <a:ea typeface="Aptos" pitchFamily="34" charset="-122"/>
                 <a:cs typeface="Aptos" pitchFamily="34" charset="-120"/>
               </a:rPr>
-              <a:t>Connect sovereignty protections to practical project artifacts, including Tribal data sharing.</a:t>
+              <a:t>Connect sovereignty protections to practical project artifacts, including Tribal data.</a:t>
             </a:r>
             <a:endParaRPr lang="en-US" sz="1320" dirty="0"/>
           </a:p>
@@ -21569,12 +22001,12 @@
         </p:nvSpPr>
         <p:spPr>
           <a:xfrm>
-            <a:off x="7635240" y="2788920"/>
-            <a:ext cx="3474720" cy="1536192"/>
+            <a:off x="7635240" y="2670048"/>
+            <a:ext cx="3474720" cy="1377086"/>
           </a:xfrm>
           <a:prstGeom prst="roundRect">
             <a:avLst>
-              <a:gd name="adj" fmla="val 7143"/>
+              <a:gd name="adj" fmla="val 7968"/>
             </a:avLst>
           </a:prstGeom>
           <a:solidFill>
@@ -21596,7 +22028,7 @@
         </p:nvSpPr>
         <p:spPr>
           <a:xfrm>
-            <a:off x="7799832" y="2935224"/>
+            <a:off x="7799832" y="2816352"/>
             <a:ext cx="3145536" cy="256032"/>
           </a:xfrm>
           <a:prstGeom prst="rect">
@@ -21635,8 +22067,8 @@
         </p:nvSpPr>
         <p:spPr>
           <a:xfrm>
-            <a:off x="7818120" y="3300984"/>
-            <a:ext cx="3090672" cy="877824"/>
+            <a:off x="7818120" y="3182112"/>
+            <a:ext cx="3090672" cy="718718"/>
           </a:xfrm>
           <a:prstGeom prst="rect">
             <a:avLst/>
@@ -21693,12 +22125,12 @@
         </p:nvSpPr>
         <p:spPr>
           <a:xfrm>
-            <a:off x="7635240" y="4498848"/>
-            <a:ext cx="3474720" cy="1143000"/>
+            <a:off x="7635240" y="4184294"/>
+            <a:ext cx="3474720" cy="1466698"/>
           </a:xfrm>
           <a:prstGeom prst="roundRect">
             <a:avLst>
-              <a:gd name="adj" fmla="val 9600"/>
+              <a:gd name="adj" fmla="val 7481"/>
             </a:avLst>
           </a:prstGeom>
           <a:solidFill>
@@ -21720,7 +22152,7 @@
         </p:nvSpPr>
         <p:spPr>
           <a:xfrm>
-            <a:off x="7799832" y="4645152"/>
+            <a:off x="7799832" y="4330598"/>
             <a:ext cx="3145536" cy="256032"/>
           </a:xfrm>
           <a:prstGeom prst="rect">
@@ -21759,8 +22191,8 @@
         </p:nvSpPr>
         <p:spPr>
           <a:xfrm>
-            <a:off x="7799832" y="4974336"/>
-            <a:ext cx="3145536" cy="576072"/>
+            <a:off x="7799832" y="4659782"/>
+            <a:ext cx="3145536" cy="899770"/>
           </a:xfrm>
           <a:prstGeom prst="rect">
             <a:avLst/>
@@ -21786,7 +22218,7 @@
                 <a:ea typeface="Aptos" pitchFamily="34" charset="-122"/>
                 <a:cs typeface="Aptos" pitchFamily="34" charset="-120"/>
               </a:rPr>
-              <a:t>Use the assignment to test whether you can explain the concept, apply it to a realistic public health situation, and.</a:t>
+              <a:t>Use the assignment to test whether you can explain the concept, apply it to a realistic public health situation, and identify what would need review before the work moves forward.</a:t>
             </a:r>
             <a:endParaRPr lang="en-US" sz="1320" dirty="0"/>
           </a:p>
@@ -22155,11 +22587,11 @@
         <p:spPr>
           <a:xfrm>
             <a:off x="7635240" y="1325880"/>
-            <a:ext cx="3474720" cy="1325880"/>
+            <a:ext cx="3474720" cy="1255471"/>
           </a:xfrm>
           <a:prstGeom prst="roundRect">
             <a:avLst>
-              <a:gd name="adj" fmla="val 8276"/>
+              <a:gd name="adj" fmla="val 8740"/>
             </a:avLst>
           </a:prstGeom>
           <a:solidFill>
@@ -22221,7 +22653,7 @@
         <p:spPr>
           <a:xfrm>
             <a:off x="7799832" y="1801368"/>
-            <a:ext cx="3145536" cy="758952"/>
+            <a:ext cx="3145536" cy="688543"/>
           </a:xfrm>
           <a:prstGeom prst="rect">
             <a:avLst/>
@@ -22261,12 +22693,12 @@
         </p:nvSpPr>
         <p:spPr>
           <a:xfrm>
-            <a:off x="7635240" y="2788920"/>
-            <a:ext cx="3474720" cy="1536192"/>
+            <a:off x="7635240" y="2718511"/>
+            <a:ext cx="3474720" cy="1328623"/>
           </a:xfrm>
           <a:prstGeom prst="roundRect">
             <a:avLst>
-              <a:gd name="adj" fmla="val 7143"/>
+              <a:gd name="adj" fmla="val 8259"/>
             </a:avLst>
           </a:prstGeom>
           <a:solidFill>
@@ -22288,8 +22720,8 @@
         </p:nvSpPr>
         <p:spPr>
           <a:xfrm>
-            <a:off x="7799832" y="2935224"/>
-            <a:ext cx="3145536" cy="256032"/>
+            <a:off x="7799832" y="2846527"/>
+            <a:ext cx="3145536" cy="237744"/>
           </a:xfrm>
           <a:prstGeom prst="rect">
             <a:avLst/>
@@ -22305,7 +22737,7 @@
               <a:buNone/>
             </a:pPr>
             <a:r>
-              <a:rPr lang="en-US" sz="1300" b="1" dirty="0">
+              <a:rPr lang="en-US" sz="1250" b="1" dirty="0">
                 <a:solidFill>
                   <a:srgbClr val="0068B7"/>
                 </a:solidFill>
@@ -22313,101 +22745,317 @@
                 <a:ea typeface="Aptos" pitchFamily="34" charset="-122"/>
                 <a:cs typeface="Aptos" pitchFamily="34" charset="-120"/>
               </a:rPr>
-              <a:t>Concept checkpoints</a:t>
-            </a:r>
-            <a:endParaRPr lang="en-US" sz="1300" dirty="0"/>
-          </a:p>
-        </p:txBody>
-      </p:sp>
-      <p:sp>
-        <p:nvSpPr>
-          <p:cNvPr id="15" name="Text 13"/>
-          <p:cNvSpPr/>
-          <p:nvPr/>
-        </p:nvSpPr>
-        <p:spPr>
-          <a:xfrm>
-            <a:off x="7818120" y="3300984"/>
-            <a:ext cx="3090672" cy="877824"/>
-          </a:xfrm>
-          <a:prstGeom prst="rect">
-            <a:avLst/>
-          </a:prstGeom>
-          <a:noFill/>
-          <a:ln/>
-        </p:spPr>
-        <p:txBody>
-          <a:bodyPr wrap="square" lIns="508" tIns="508" rIns="508" bIns="508" rtlCol="0" anchor="t">
+              <a:t>Governance pathway</a:t>
+            </a:r>
+            <a:endParaRPr lang="en-US" sz="1250" dirty="0"/>
+          </a:p>
+        </p:txBody>
+      </p:sp>
+      <p:sp>
+        <p:nvSpPr>
+          <p:cNvPr id="15" name="Shape 13"/>
+          <p:cNvSpPr/>
+          <p:nvPr/>
+        </p:nvSpPr>
+        <p:spPr>
+          <a:xfrm>
+            <a:off x="8763000" y="3399739"/>
+            <a:ext cx="164592" cy="0"/>
+          </a:xfrm>
+          <a:prstGeom prst="line">
+            <a:avLst/>
+          </a:prstGeom>
+          <a:noFill/>
+          <a:ln w="15240">
+            <a:solidFill>
+              <a:srgbClr val="8ABBD8"/>
+            </a:solidFill>
+            <a:prstDash val="solid"/>
+          </a:ln>
+        </p:spPr>
+      </p:sp>
+      <p:sp>
+        <p:nvSpPr>
+          <p:cNvPr id="16" name="Shape 14"/>
+          <p:cNvSpPr/>
+          <p:nvPr/>
+        </p:nvSpPr>
+        <p:spPr>
+          <a:xfrm>
+            <a:off x="7872984" y="3248863"/>
+            <a:ext cx="890016" cy="301752"/>
+          </a:xfrm>
+          <a:prstGeom prst="roundRect">
+            <a:avLst>
+              <a:gd name="adj" fmla="val 24242"/>
+            </a:avLst>
+          </a:prstGeom>
+          <a:solidFill>
+            <a:srgbClr val="0068B7"/>
+          </a:solidFill>
+          <a:ln w="12700">
+            <a:solidFill>
+              <a:srgbClr val="0068B7"/>
+            </a:solidFill>
+            <a:prstDash val="solid"/>
+          </a:ln>
+        </p:spPr>
+      </p:sp>
+      <p:sp>
+        <p:nvSpPr>
+          <p:cNvPr id="17" name="Text 15"/>
+          <p:cNvSpPr/>
+          <p:nvPr/>
+        </p:nvSpPr>
+        <p:spPr>
+          <a:xfrm>
+            <a:off x="7909560" y="3322015"/>
+            <a:ext cx="816864" cy="146304"/>
+          </a:xfrm>
+          <a:prstGeom prst="rect">
+            <a:avLst/>
+          </a:prstGeom>
+          <a:noFill/>
+          <a:ln/>
+        </p:spPr>
+        <p:txBody>
+          <a:bodyPr wrap="square" lIns="0" tIns="0" rIns="0" bIns="0" rtlCol="0" anchor="ctr">
             <a:normAutofit/>
           </a:bodyPr>
           <a:lstStyle/>
           <a:p>
-            <a:pPr indent="0" marL="0">
-              <a:buNone/>
-            </a:pPr>
-            <a:r>
-              <a:rPr lang="en-US" sz="1220" dirty="0">
-                <a:solidFill>
-                  <a:srgbClr val="17364A"/>
-                </a:solidFill>
-                <a:latin typeface="Aptos" pitchFamily="34" charset="0"/>
-                <a:ea typeface="Aptos" pitchFamily="34" charset="-122"/>
-                <a:cs typeface="Aptos" pitchFamily="34" charset="-120"/>
-              </a:rPr>
-              <a:t>This module introduces public health staff to the responsibilities.</a:t>
-            </a:r>
-            <a:endParaRPr lang="en-US" sz="1220" dirty="0"/>
-          </a:p>
-          <a:p>
-            <a:pPr indent="0" marL="0">
-              <a:buNone/>
-            </a:pPr>
-            <a:r>
-              <a:rPr lang="en-US" sz="1220" dirty="0">
-                <a:solidFill>
-                  <a:srgbClr val="17364A"/>
-                </a:solidFill>
-                <a:latin typeface="Aptos" pitchFamily="34" charset="0"/>
-                <a:ea typeface="Aptos" pitchFamily="34" charset="-122"/>
-                <a:cs typeface="Aptos" pitchFamily="34" charset="-120"/>
-              </a:rPr>
-              <a:t>The central message is that Tribal Nations are sovereign.</a:t>
-            </a:r>
-            <a:endParaRPr lang="en-US" sz="1220" dirty="0"/>
-          </a:p>
-          <a:p>
-            <a:pPr indent="0" marL="0">
-              <a:buNone/>
-            </a:pPr>
-            <a:r>
-              <a:rPr lang="en-US" sz="1220" dirty="0">
-                <a:solidFill>
-                  <a:srgbClr val="17364A"/>
-                </a:solidFill>
-                <a:latin typeface="Aptos" pitchFamily="34" charset="0"/>
-                <a:ea typeface="Aptos" pitchFamily="34" charset="-122"/>
-                <a:cs typeface="Aptos" pitchFamily="34" charset="-120"/>
-              </a:rPr>
-              <a:t>AI projects must be shaped through early consultation, formal.</a:t>
-            </a:r>
-            <a:endParaRPr lang="en-US" sz="1220" dirty="0"/>
-          </a:p>
-        </p:txBody>
-      </p:sp>
-      <p:sp>
-        <p:nvSpPr>
-          <p:cNvPr id="16" name="Shape 14"/>
-          <p:cNvSpPr/>
-          <p:nvPr/>
-        </p:nvSpPr>
-        <p:spPr>
-          <a:xfrm>
-            <a:off x="7635240" y="4498848"/>
-            <a:ext cx="3474720" cy="1143000"/>
+            <a:pPr algn="ctr" indent="0" marL="0">
+              <a:buNone/>
+            </a:pPr>
+            <a:r>
+              <a:rPr lang="en-US" sz="880" b="1" dirty="0">
+                <a:solidFill>
+                  <a:srgbClr val="FFFFFF"/>
+                </a:solidFill>
+                <a:latin typeface="Aptos" pitchFamily="34" charset="0"/>
+                <a:ea typeface="Aptos" pitchFamily="34" charset="-122"/>
+                <a:cs typeface="Aptos" pitchFamily="34" charset="-120"/>
+              </a:rPr>
+              <a:t>Submit</a:t>
+            </a:r>
+            <a:endParaRPr lang="en-US" sz="880" dirty="0"/>
+          </a:p>
+        </p:txBody>
+      </p:sp>
+      <p:sp>
+        <p:nvSpPr>
+          <p:cNvPr id="18" name="Shape 16"/>
+          <p:cNvSpPr/>
+          <p:nvPr/>
+        </p:nvSpPr>
+        <p:spPr>
+          <a:xfrm>
+            <a:off x="9817608" y="3399739"/>
+            <a:ext cx="164592" cy="0"/>
+          </a:xfrm>
+          <a:prstGeom prst="line">
+            <a:avLst/>
+          </a:prstGeom>
+          <a:noFill/>
+          <a:ln w="15240">
+            <a:solidFill>
+              <a:srgbClr val="8ABBD8"/>
+            </a:solidFill>
+            <a:prstDash val="solid"/>
+          </a:ln>
+        </p:spPr>
+      </p:sp>
+      <p:sp>
+        <p:nvSpPr>
+          <p:cNvPr id="19" name="Shape 17"/>
+          <p:cNvSpPr/>
+          <p:nvPr/>
+        </p:nvSpPr>
+        <p:spPr>
+          <a:xfrm>
+            <a:off x="8927592" y="3248863"/>
+            <a:ext cx="890016" cy="301752"/>
           </a:xfrm>
           <a:prstGeom prst="roundRect">
             <a:avLst>
-              <a:gd name="adj" fmla="val 9600"/>
+              <a:gd name="adj" fmla="val 24242"/>
+            </a:avLst>
+          </a:prstGeom>
+          <a:solidFill>
+            <a:srgbClr val="2F8A28"/>
+          </a:solidFill>
+          <a:ln w="12700">
+            <a:solidFill>
+              <a:srgbClr val="2F8A28"/>
+            </a:solidFill>
+            <a:prstDash val="solid"/>
+          </a:ln>
+        </p:spPr>
+      </p:sp>
+      <p:sp>
+        <p:nvSpPr>
+          <p:cNvPr id="20" name="Text 18"/>
+          <p:cNvSpPr/>
+          <p:nvPr/>
+        </p:nvSpPr>
+        <p:spPr>
+          <a:xfrm>
+            <a:off x="8964168" y="3322015"/>
+            <a:ext cx="816864" cy="146304"/>
+          </a:xfrm>
+          <a:prstGeom prst="rect">
+            <a:avLst/>
+          </a:prstGeom>
+          <a:noFill/>
+          <a:ln/>
+        </p:spPr>
+        <p:txBody>
+          <a:bodyPr wrap="square" lIns="0" tIns="0" rIns="0" bIns="0" rtlCol="0" anchor="ctr">
+            <a:normAutofit/>
+          </a:bodyPr>
+          <a:lstStyle/>
+          <a:p>
+            <a:pPr algn="ctr" indent="0" marL="0">
+              <a:buNone/>
+            </a:pPr>
+            <a:r>
+              <a:rPr lang="en-US" sz="880" b="1" dirty="0">
+                <a:solidFill>
+                  <a:srgbClr val="FFFFFF"/>
+                </a:solidFill>
+                <a:latin typeface="Aptos" pitchFamily="34" charset="0"/>
+                <a:ea typeface="Aptos" pitchFamily="34" charset="-122"/>
+                <a:cs typeface="Aptos" pitchFamily="34" charset="-120"/>
+              </a:rPr>
+              <a:t>Review</a:t>
+            </a:r>
+            <a:endParaRPr lang="en-US" sz="880" dirty="0"/>
+          </a:p>
+        </p:txBody>
+      </p:sp>
+      <p:sp>
+        <p:nvSpPr>
+          <p:cNvPr id="21" name="Shape 19"/>
+          <p:cNvSpPr/>
+          <p:nvPr/>
+        </p:nvSpPr>
+        <p:spPr>
+          <a:xfrm>
+            <a:off x="9982200" y="3248863"/>
+            <a:ext cx="890016" cy="301752"/>
+          </a:xfrm>
+          <a:prstGeom prst="roundRect">
+            <a:avLst>
+              <a:gd name="adj" fmla="val 24242"/>
+            </a:avLst>
+          </a:prstGeom>
+          <a:solidFill>
+            <a:srgbClr val="6A4CA3"/>
+          </a:solidFill>
+          <a:ln w="12700">
+            <a:solidFill>
+              <a:srgbClr val="6A4CA3"/>
+            </a:solidFill>
+            <a:prstDash val="solid"/>
+          </a:ln>
+        </p:spPr>
+      </p:sp>
+      <p:sp>
+        <p:nvSpPr>
+          <p:cNvPr id="22" name="Text 20"/>
+          <p:cNvSpPr/>
+          <p:nvPr/>
+        </p:nvSpPr>
+        <p:spPr>
+          <a:xfrm>
+            <a:off x="10018776" y="3322015"/>
+            <a:ext cx="816864" cy="146304"/>
+          </a:xfrm>
+          <a:prstGeom prst="rect">
+            <a:avLst/>
+          </a:prstGeom>
+          <a:noFill/>
+          <a:ln/>
+        </p:spPr>
+        <p:txBody>
+          <a:bodyPr wrap="square" lIns="0" tIns="0" rIns="0" bIns="0" rtlCol="0" anchor="ctr">
+            <a:normAutofit/>
+          </a:bodyPr>
+          <a:lstStyle/>
+          <a:p>
+            <a:pPr algn="ctr" indent="0" marL="0">
+              <a:buNone/>
+            </a:pPr>
+            <a:r>
+              <a:rPr lang="en-US" sz="880" b="1" dirty="0">
+                <a:solidFill>
+                  <a:srgbClr val="FFFFFF"/>
+                </a:solidFill>
+                <a:latin typeface="Aptos" pitchFamily="34" charset="0"/>
+                <a:ea typeface="Aptos" pitchFamily="34" charset="-122"/>
+                <a:cs typeface="Aptos" pitchFamily="34" charset="-120"/>
+              </a:rPr>
+              <a:t>Oversee</a:t>
+            </a:r>
+            <a:endParaRPr lang="en-US" sz="880" dirty="0"/>
+          </a:p>
+        </p:txBody>
+      </p:sp>
+      <p:sp>
+        <p:nvSpPr>
+          <p:cNvPr id="23" name="Text 21"/>
+          <p:cNvSpPr/>
+          <p:nvPr/>
+        </p:nvSpPr>
+        <p:spPr>
+          <a:xfrm>
+            <a:off x="7854696" y="3742639"/>
+            <a:ext cx="3035808" cy="158191"/>
+          </a:xfrm>
+          <a:prstGeom prst="rect">
+            <a:avLst/>
+          </a:prstGeom>
+          <a:noFill/>
+          <a:ln/>
+        </p:spPr>
+        <p:txBody>
+          <a:bodyPr wrap="square" lIns="254" tIns="254" rIns="254" bIns="254" rtlCol="0" anchor="t">
+            <a:normAutofit/>
+          </a:bodyPr>
+          <a:lstStyle/>
+          <a:p>
+            <a:pPr indent="0" marL="0">
+              <a:buNone/>
+            </a:pPr>
+            <a:r>
+              <a:rPr lang="en-US" sz="1120" dirty="0">
+                <a:solidFill>
+                  <a:srgbClr val="17364A"/>
+                </a:solidFill>
+                <a:latin typeface="Aptos" pitchFamily="34" charset="0"/>
+                <a:ea typeface="Aptos" pitchFamily="34" charset="-122"/>
+                <a:cs typeface="Aptos" pitchFamily="34" charset="-120"/>
+              </a:rPr>
+              <a:t>A proposed AI use should move through documented review before it becomes an operational workflow.</a:t>
+            </a:r>
+            <a:endParaRPr lang="en-US" sz="1120" dirty="0"/>
+          </a:p>
+        </p:txBody>
+      </p:sp>
+      <p:sp>
+        <p:nvSpPr>
+          <p:cNvPr id="24" name="Shape 22"/>
+          <p:cNvSpPr/>
+          <p:nvPr/>
+        </p:nvSpPr>
+        <p:spPr>
+          <a:xfrm>
+            <a:off x="7635240" y="4184294"/>
+            <a:ext cx="3474720" cy="1466698"/>
+          </a:xfrm>
+          <a:prstGeom prst="roundRect">
+            <a:avLst>
+              <a:gd name="adj" fmla="val 7481"/>
             </a:avLst>
           </a:prstGeom>
           <a:solidFill>
@@ -22423,13 +23071,13 @@
       </p:sp>
       <p:sp>
         <p:nvSpPr>
-          <p:cNvPr id="17" name="Text 15"/>
-          <p:cNvSpPr/>
-          <p:nvPr/>
-        </p:nvSpPr>
-        <p:spPr>
-          <a:xfrm>
-            <a:off x="7799832" y="4645152"/>
+          <p:cNvPr id="25" name="Text 23"/>
+          <p:cNvSpPr/>
+          <p:nvPr/>
+        </p:nvSpPr>
+        <p:spPr>
+          <a:xfrm>
+            <a:off x="7799832" y="4330598"/>
             <a:ext cx="3145536" cy="256032"/>
           </a:xfrm>
           <a:prstGeom prst="rect">
@@ -22462,14 +23110,14 @@
       </p:sp>
       <p:sp>
         <p:nvSpPr>
-          <p:cNvPr id="18" name="Text 16"/>
-          <p:cNvSpPr/>
-          <p:nvPr/>
-        </p:nvSpPr>
-        <p:spPr>
-          <a:xfrm>
-            <a:off x="7799832" y="4974336"/>
-            <a:ext cx="3145536" cy="576072"/>
+          <p:cNvPr id="26" name="Text 24"/>
+          <p:cNvSpPr/>
+          <p:nvPr/>
+        </p:nvSpPr>
+        <p:spPr>
+          <a:xfrm>
+            <a:off x="7799832" y="4659782"/>
+            <a:ext cx="3145536" cy="899770"/>
           </a:xfrm>
           <a:prstGeom prst="rect">
             <a:avLst/>
@@ -22495,7 +23143,7 @@
                 <a:ea typeface="Aptos" pitchFamily="34" charset="-122"/>
                 <a:cs typeface="Aptos" pitchFamily="34" charset="-120"/>
               </a:rPr>
-              <a:t>Translate this concept into clear decision rights, review steps, documentation expectations, and escalation paths before.</a:t>
+              <a:t>Translate this concept into clear decision rights, review steps, documentation expectations, and escalation paths before an AI-supported workflow is approved.</a:t>
             </a:r>
             <a:endParaRPr lang="en-US" sz="1320" dirty="0"/>
           </a:p>
@@ -22864,11 +23512,11 @@
         <p:spPr>
           <a:xfrm>
             <a:off x="7635240" y="1325880"/>
-            <a:ext cx="3474720" cy="1325880"/>
+            <a:ext cx="3474720" cy="1255471"/>
           </a:xfrm>
           <a:prstGeom prst="roundRect">
             <a:avLst>
-              <a:gd name="adj" fmla="val 8276"/>
+              <a:gd name="adj" fmla="val 8740"/>
             </a:avLst>
           </a:prstGeom>
           <a:solidFill>
@@ -22930,7 +23578,7 @@
         <p:spPr>
           <a:xfrm>
             <a:off x="7799832" y="1801368"/>
-            <a:ext cx="3145536" cy="758952"/>
+            <a:ext cx="3145536" cy="688543"/>
           </a:xfrm>
           <a:prstGeom prst="rect">
             <a:avLst/>
@@ -22970,12 +23618,12 @@
         </p:nvSpPr>
         <p:spPr>
           <a:xfrm>
-            <a:off x="7635240" y="2788920"/>
-            <a:ext cx="3474720" cy="1536192"/>
+            <a:off x="7635240" y="2718511"/>
+            <a:ext cx="3474720" cy="1328623"/>
           </a:xfrm>
           <a:prstGeom prst="roundRect">
             <a:avLst>
-              <a:gd name="adj" fmla="val 7143"/>
+              <a:gd name="adj" fmla="val 8259"/>
             </a:avLst>
           </a:prstGeom>
           <a:solidFill>
@@ -22997,7 +23645,7 @@
         </p:nvSpPr>
         <p:spPr>
           <a:xfrm>
-            <a:off x="7799832" y="2935224"/>
+            <a:off x="7799832" y="2864815"/>
             <a:ext cx="3145536" cy="256032"/>
           </a:xfrm>
           <a:prstGeom prst="rect">
@@ -23036,8 +23684,8 @@
         </p:nvSpPr>
         <p:spPr>
           <a:xfrm>
-            <a:off x="7818120" y="3300984"/>
-            <a:ext cx="3090672" cy="877824"/>
+            <a:off x="7818120" y="3230575"/>
+            <a:ext cx="3090672" cy="670255"/>
           </a:xfrm>
           <a:prstGeom prst="rect">
             <a:avLst/>
@@ -23111,12 +23759,12 @@
         </p:nvSpPr>
         <p:spPr>
           <a:xfrm>
-            <a:off x="7635240" y="4498848"/>
-            <a:ext cx="3474720" cy="1143000"/>
+            <a:off x="7635240" y="4184294"/>
+            <a:ext cx="3474720" cy="1466698"/>
           </a:xfrm>
           <a:prstGeom prst="roundRect">
             <a:avLst>
-              <a:gd name="adj" fmla="val 9600"/>
+              <a:gd name="adj" fmla="val 7481"/>
             </a:avLst>
           </a:prstGeom>
           <a:solidFill>
@@ -23138,7 +23786,7 @@
         </p:nvSpPr>
         <p:spPr>
           <a:xfrm>
-            <a:off x="7799832" y="4645152"/>
+            <a:off x="7799832" y="4330598"/>
             <a:ext cx="3145536" cy="256032"/>
           </a:xfrm>
           <a:prstGeom prst="rect">
@@ -23177,8 +23825,8 @@
         </p:nvSpPr>
         <p:spPr>
           <a:xfrm>
-            <a:off x="7799832" y="4974336"/>
-            <a:ext cx="3145536" cy="576072"/>
+            <a:off x="7799832" y="4659782"/>
+            <a:ext cx="3145536" cy="899770"/>
           </a:xfrm>
           <a:prstGeom prst="rect">
             <a:avLst/>
@@ -23204,7 +23852,7 @@
                 <a:ea typeface="Aptos" pitchFamily="34" charset="-122"/>
                 <a:cs typeface="Aptos" pitchFamily="34" charset="-120"/>
               </a:rPr>
-              <a:t>Translate this concept into clear decision rights, review steps, documentation expectations, and escalation paths before.</a:t>
+              <a:t>Translate this concept into clear decision rights, review steps, documentation expectations, and escalation paths before an AI-supported workflow is approved.</a:t>
             </a:r>
             <a:endParaRPr lang="en-US" sz="1320" dirty="0"/>
           </a:p>
@@ -23539,11 +24187,11 @@
         <p:spPr>
           <a:xfrm>
             <a:off x="7635240" y="1325880"/>
-            <a:ext cx="3474720" cy="1325880"/>
+            <a:ext cx="3474720" cy="1255471"/>
           </a:xfrm>
           <a:prstGeom prst="roundRect">
             <a:avLst>
-              <a:gd name="adj" fmla="val 8276"/>
+              <a:gd name="adj" fmla="val 8740"/>
             </a:avLst>
           </a:prstGeom>
           <a:solidFill>
@@ -23605,7 +24253,7 @@
         <p:spPr>
           <a:xfrm>
             <a:off x="7799832" y="1801368"/>
-            <a:ext cx="3145536" cy="758952"/>
+            <a:ext cx="3145536" cy="688543"/>
           </a:xfrm>
           <a:prstGeom prst="rect">
             <a:avLst/>
@@ -23645,12 +24293,12 @@
         </p:nvSpPr>
         <p:spPr>
           <a:xfrm>
-            <a:off x="7635240" y="2788920"/>
-            <a:ext cx="3474720" cy="1536192"/>
+            <a:off x="7635240" y="2718511"/>
+            <a:ext cx="3474720" cy="1328623"/>
           </a:xfrm>
           <a:prstGeom prst="roundRect">
             <a:avLst>
-              <a:gd name="adj" fmla="val 7143"/>
+              <a:gd name="adj" fmla="val 8259"/>
             </a:avLst>
           </a:prstGeom>
           <a:solidFill>
@@ -23672,7 +24320,7 @@
         </p:nvSpPr>
         <p:spPr>
           <a:xfrm>
-            <a:off x="7799832" y="2935224"/>
+            <a:off x="7799832" y="2864815"/>
             <a:ext cx="3145536" cy="256032"/>
           </a:xfrm>
           <a:prstGeom prst="rect">
@@ -23711,8 +24359,8 @@
         </p:nvSpPr>
         <p:spPr>
           <a:xfrm>
-            <a:off x="7818120" y="3300984"/>
-            <a:ext cx="3090672" cy="877824"/>
+            <a:off x="7818120" y="3230575"/>
+            <a:ext cx="3090672" cy="670255"/>
           </a:xfrm>
           <a:prstGeom prst="rect">
             <a:avLst/>
@@ -23752,12 +24400,12 @@
         </p:nvSpPr>
         <p:spPr>
           <a:xfrm>
-            <a:off x="7635240" y="4498848"/>
-            <a:ext cx="3474720" cy="1143000"/>
+            <a:off x="7635240" y="4184294"/>
+            <a:ext cx="3474720" cy="1466698"/>
           </a:xfrm>
           <a:prstGeom prst="roundRect">
             <a:avLst>
-              <a:gd name="adj" fmla="val 9600"/>
+              <a:gd name="adj" fmla="val 7481"/>
             </a:avLst>
           </a:prstGeom>
           <a:solidFill>
@@ -23779,7 +24427,7 @@
         </p:nvSpPr>
         <p:spPr>
           <a:xfrm>
-            <a:off x="7799832" y="4645152"/>
+            <a:off x="7799832" y="4330598"/>
             <a:ext cx="3145536" cy="256032"/>
           </a:xfrm>
           <a:prstGeom prst="rect">
@@ -23818,8 +24466,8 @@
         </p:nvSpPr>
         <p:spPr>
           <a:xfrm>
-            <a:off x="7799832" y="4974336"/>
-            <a:ext cx="3145536" cy="576072"/>
+            <a:off x="7799832" y="4659782"/>
+            <a:ext cx="3145536" cy="899770"/>
           </a:xfrm>
           <a:prstGeom prst="rect">
             <a:avLst/>
@@ -23845,7 +24493,7 @@
                 <a:ea typeface="Aptos" pitchFamily="34" charset="-122"/>
                 <a:cs typeface="Aptos" pitchFamily="34" charset="-120"/>
               </a:rPr>
-              <a:t>Translate this concept into clear decision rights, review steps, documentation expectations, and escalation paths before.</a:t>
+              <a:t>Translate this concept into clear decision rights, review steps, documentation expectations, and escalation paths before an AI-supported workflow is approved.</a:t>
             </a:r>
             <a:endParaRPr lang="en-US" sz="1320" dirty="0"/>
           </a:p>

--- a/downloads/presentations/modules/gov-110.pptx
+++ b/downloads/presentations/modules/gov-110.pptx
@@ -17810,7 +17810,7 @@
                 <a:ea typeface="Aptos" pitchFamily="34" charset="-122"/>
                 <a:cs typeface="Aptos" pitchFamily="34" charset="-120"/>
               </a:rPr>
-              <a:t>• 1. Why should Tribal sovereignty be considered before an AI project with.</a:t>
+              <a:t>1. Why should Tribal sovereignty be considered before an AI project with.</a:t>
             </a:r>
             <a:endParaRPr lang="en-US" sz="1920" dirty="0"/>
           </a:p>
@@ -17827,7 +17827,7 @@
                 <a:ea typeface="Aptos" pitchFamily="34" charset="-122"/>
                 <a:cs typeface="Aptos" pitchFamily="34" charset="-120"/>
               </a:rPr>
-              <a:t>• 2. Which statement best reflects Indigenous Data Sovereignty?</a:t>
+              <a:t>2. Which statement best reflects Indigenous Data Sovereignty?</a:t>
             </a:r>
             <a:endParaRPr lang="en-US" sz="1920" dirty="0"/>
           </a:p>
@@ -17844,7 +17844,7 @@
                 <a:ea typeface="Aptos" pitchFamily="34" charset="-122"/>
                 <a:cs typeface="Aptos" pitchFamily="34" charset="-120"/>
               </a:rPr>
-              <a:t>• 3. Which AI practice should be avoided unless explicitly approved through.</a:t>
+              <a:t>3. Which AI practice should be avoided unless explicitly approved through.</a:t>
             </a:r>
             <a:endParaRPr lang="en-US" sz="1920" dirty="0"/>
           </a:p>
@@ -17951,7 +17951,7 @@
                 <a:ea typeface="Aptos" pitchFamily="34" charset="-122"/>
                 <a:cs typeface="Aptos" pitchFamily="34" charset="-120"/>
               </a:rPr>
-              <a:t>1. Why should Tribal sovereignty be considered before an AI project with health.</a:t>
+              <a:t>Why should Tribal sovereignty be considered before an AI project with health.</a:t>
             </a:r>
             <a:endParaRPr lang="en-US" sz="1220" dirty="0"/>
           </a:p>
@@ -18058,41 +18058,7 @@
                 <a:ea typeface="Aptos" pitchFamily="34" charset="-122"/>
                 <a:cs typeface="Aptos" pitchFamily="34" charset="-120"/>
               </a:rPr>
-              <a:t>1.</a:t>
-            </a:r>
-            <a:endParaRPr lang="en-US" sz="1140" dirty="0"/>
-          </a:p>
-          <a:p>
-            <a:pPr indent="0" marL="0">
-              <a:buNone/>
-            </a:pPr>
-            <a:r>
-              <a:rPr lang="en-US" sz="1140" dirty="0">
-                <a:solidFill>
-                  <a:srgbClr val="17364A"/>
-                </a:solidFill>
-                <a:latin typeface="Aptos" pitchFamily="34" charset="0"/>
-                <a:ea typeface="Aptos" pitchFamily="34" charset="-122"/>
-                <a:cs typeface="Aptos" pitchFamily="34" charset="-120"/>
-              </a:rPr>
               <a:t>Why should Tribal sovereignty be considered before.</a:t>
-            </a:r>
-            <a:endParaRPr lang="en-US" sz="1140" dirty="0"/>
-          </a:p>
-          <a:p>
-            <a:pPr indent="0" marL="0">
-              <a:buNone/>
-            </a:pPr>
-            <a:r>
-              <a:rPr lang="en-US" sz="1140" dirty="0">
-                <a:solidFill>
-                  <a:srgbClr val="17364A"/>
-                </a:solidFill>
-                <a:latin typeface="Aptos" pitchFamily="34" charset="0"/>
-                <a:ea typeface="Aptos" pitchFamily="34" charset="-122"/>
-                <a:cs typeface="Aptos" pitchFamily="34" charset="-120"/>
-              </a:rPr>
-              <a:t>2.</a:t>
             </a:r>
             <a:endParaRPr lang="en-US" sz="1140" dirty="0"/>
           </a:p>

--- a/downloads/presentations/modules/gov-110.pptx
+++ b/downloads/presentations/modules/gov-110.pptx
@@ -30,14 +30,9 @@
     <p:sldId id="278" r:id="rId24"/>
     <p:sldId id="279" r:id="rId25"/>
     <p:sldId id="280" r:id="rId26"/>
-    <p:sldId id="281" r:id="rId27"/>
-    <p:sldId id="282" r:id="rId28"/>
-    <p:sldId id="283" r:id="rId29"/>
-    <p:sldId id="284" r:id="rId30"/>
-    <p:sldId id="285" r:id="rId31"/>
   </p:sldIdLst>
   <p:notesMasterIdLst>
-    <p:notesMasterId r:id="rId32"/>
+    <p:notesMasterId r:id="rId27"/>
   </p:notesMasterIdLst>
   <p:sldSz cx="12192000" cy="6858000"/>
   <p:notesSz cx="6858000" cy="12192000"/>
@@ -802,10 +797,10 @@
           <a:p>
             <a:r>
               <a:rPr lang="en-US" dirty="0"/>
-              <a:t>Definitions / Core Concepts
-Tribal sovereignty means the inherent authority of Tribal Nations to govern themselves and protect the health, safety, welfare, and future of their citizens. In public health AI work, this means a Tribal Nation may have its own laws, research codes, review bodies, data governance requirements, consent expectations, publication review processes, and conditions for data access or reuse. Public health staff should not treat Tribal input as optional stakeholder feedback when Tribal authority is implicated. The appropriate posture is government-to-government respect, early engagement, and formal agreement.
-Indigenous Data Sovereignty refers to the right of Indigenous Peoples and Nations to govern the collection, ownership, interpretation, management, access, sharing, and application of data about them, their citizens, lands, resources, knowledge, and communities. Health data can be Indigenous data even when it is held by a public health agency, university, vendor, researcher, hospital, or federal program. AI projects raise special concerns because data may be reused for model training, linked to other data sources, summarized by third-party tools, or used to generate outputs that shape decisions. Sovereignty requires that these uses be governed by the Indigenous Peoples and Nations whose data are involved.
-Indigenous Data Governance is the set of policies, relationships, processes, agreements, roles, and oversight mechanisms that put Indigenous Data Sovereignty into practice. Governance may include Tribal IRB review, research review committees, Tribal council resolutions, data sharing agreements, publication review, data storage requirements, access controls, benefit sharing, and requirements for returning results to the community. It also includes decisions about whether a project should proceed at all. In AI projects, governance must cover the full lifecycle from use case intake through data preparation, modeling, validation, deployment, monitoring, dissemination, and retirement.
+              <a:t>Public Health Example
+A state health department wants to develop an AI-assisted analytics workflow to summarize emergency department syndromic surveillance notes and identify patterns related to respiratory illness. The initial technical design includes free-text chief complaint data, facility location, ZIP code, race and ethnicity fields, and model-generated summaries by county. Several counties include Tribal lands, and some small-area summaries could indirectly identify Tribal communities or lead staff to infer Tribal affiliation from residence, facility use, or geography. The project team initially views the work as routine surveillance improvement, but the intake review identifies that Tribal sovereignty and Indigenous data governance must be addressed before development proceeds.
+A sovereignty-centered approach would pause the technical build and begin with appropriate Tribal consultation and partnership discussions. The team would identify which Tribal Nations may be affected, whether Tribal public health authorities already receive or govern relevant data, whether Tribal laws or review processes apply, and what limitations should be placed on geographic analysis, small-number reporting, public dissemination, and AI-generated interpretation. The project would not use external AI platforms to process identifiable or potentially sensitive data unless the environment, data use, retention terms, and review pathway were approved. The team would also document whether the project creates community benefit defined by Tribal partners, not only operational benefit for the state agency.
+The final project might look different from the original proposal. Tribal partners could request a Tribal-specific data sharing agreement, a joint review group, suppression rules for small numbers, limits on geospatial inference, local review before public summaries, a requirement to return results in a useful format, or a decision that some data should not be used for AI modeling. The project may also identify capacity-building opportunities, such as supporting Tribal epidemiology staff, providing access to relevant outputs, or co-developing monitoring measures. The key lesson is that sovereignty review does not merely add a compliance step; it can reshape the purpose, design, governance, and success measures of the AI project.
 Application guidance: Translate this concept into clear decision rights, review steps, documentation expectations, and escalation paths before an AI-supported workflow is approved.</a:t>
             </a:r>
             <a:endParaRPr lang="en-US" dirty="0"/>
@@ -894,10 +889,10 @@
           <a:p>
             <a:r>
               <a:rPr lang="en-US" dirty="0"/>
-              <a:t>Definitions / Core Concepts
-The CARE Principles for Indigenous Data Governance provide a practical framework for aligning data work with Indigenous rights and interests. CARE stands for Collective Benefit, Authority to Control, Responsibility, and Ethics. These principles complement FAIR data practices by adding attention to people, purpose, power, historical context, and self-determination. For AI projects, CARE can be used as a review lens for deciding whether a proposed data use benefits Tribal communities, respects Tribal authority, assigns responsibilities, and avoids extractive or harmful uses.
-Digital Sovereignty extends data sovereignty into the digital environments, platforms, infrastructure, and technical systems that store, move, process, analyze, and expose data. For Tribal Nations, this may include control over where data are stored, who administers systems, what cloud or vendor environments are approved, whether data leave a Tribal or trusted environment, and how AI tools access or retain prompts, files, metadata, or outputs. Digital sovereignty matters because an AI project can respect a data sharing agreement on paper while still undermining Tribal control through external platforms, opaque model behavior, or uncontrolled secondary use. Technical architecture is therefore part of sovereignty, not a separate IT detail.
-Cultural competence is often described as knowledge about cultural histories, values, practices, and communication norms, but it is not enough by itself for AI projects with Tribal Nations. A more appropriate operating standard is cultural humility, which requires ongoing learning, recognition of power imbalances, willingness to be corrected, and respect for each Tribal Nation’s specific protocols. Staff should avoid pan-Indigenous assumptions because Tribal Nations differ in governance structures, histories, languages, legal requirements, data priorities, and relationships with public health agencies. Cultural humility should be visible in timelines, budgets, consultation processes, meeting practices, authorship decisions, dissemination plans, and how the project responds when Tribal partners raise concerns.
+              <a:t>Technical, Programmatic, and Operational Deep Dive
+AI project teams should begin by asking whether the proposed use involves Tribal Nations, Tribal citizens, AI/AN participants, Tribal lands, Tribal service settings, Tribal public health authorities, or data elements that could be used to infer Tribal affiliation. This question should be asked during use case intake, not after a data set has been assembled. The answer may not be obvious because Tribal relevance can appear through geography, facility relationships, program participation, small-area reporting, environmental exposure data, biospecimens, genetic information, language data, or community narratives. If the answer is uncertain, the team should treat the project as requiring additional review rather than assuming no Tribal implications exist.
+Early consultation should occur before AI development, procurement, vendor demonstrations, pilot testing, or publication planning. Consultation is not the same as sending a completed plan for comment. It should allow Tribal Nations to influence the project purpose, data scope, roles, benefits, risks, consent expectations, storage location, review process, and dissemination strategy. Timelines and budgets should recognize that government-to-government consultation, community review, and relationship building require time and resources.
+Formal agreements are essential because AI projects create many opportunities for data reuse and secondary interpretation. Agreements may need to address data ownership or stewardship, permitted uses, prohibited uses, data retention, destruction or return, access rights, cloud or vendor environments, model training restrictions, publication review, benefit sharing, incident response, and conditions for future use. Where NIH-funded research is involved, the Data Management and Sharing Plan should incorporate AI/AN data management and sharing practices and Tribal preferences. For operational public health projects outside NIH research, similar principles should still guide data sharing agreements, memoranda of understanding, and governance records.
 Application guidance: Translate this concept into clear decision rights, review steps, documentation expectations, and escalation paths before an AI-supported workflow is approved.</a:t>
             </a:r>
             <a:endParaRPr lang="en-US" dirty="0"/>
@@ -986,10 +981,10 @@
           <a:p>
             <a:r>
               <a:rPr lang="en-US" dirty="0"/>
-              <a:t>Public Health Example
-A state health department wants to develop an AI-assisted analytics workflow to summarize emergency department syndromic surveillance notes and identify patterns related to respiratory illness. The initial technical design includes free-text chief complaint data, facility location, ZIP code, race and ethnicity fields, and model-generated summaries by county. Several counties include Tribal lands, and some small-area summaries could indirectly identify Tribal communities or lead staff to infer Tribal affiliation from residence, facility use, or geography. The project team initially views the work as routine surveillance improvement, but the intake review identifies that Tribal sovereignty and Indigenous data governance must be addressed before development proceeds.
-A sovereignty-centered approach would pause the technical build and begin with appropriate Tribal consultation and partnership discussions. The team would identify which Tribal Nations may be affected, whether Tribal public health authorities already receive or govern relevant data, whether Tribal laws or review processes apply, and what limitations should be placed on geographic analysis, small-number reporting, public dissemination, and AI-generated interpretation. The project would not use external AI platforms to process identifiable or potentially sensitive data unless the environment, data use, retention terms, and review pathway were approved. The team would also document whether the project creates community benefit defined by Tribal partners, not only operational benefit for the state agency.
-The final project might look different from the original proposal. Tribal partners could request a Tribal-specific data sharing agreement, a joint review group, suppression rules for small numbers, limits on geospatial inference, local review before public summaries, a requirement to return results in a useful format, or a decision that some data should not be used for AI modeling. The project may also identify capacity-building opportunities, such as supporting Tribal epidemiology staff, providing access to relevant outputs, or co-developing monitoring measures. The key lesson is that sovereignty review does not merely add a compliance step; it can reshape the purpose, design, governance, and success measures of the AI project.
+              <a:t>Technical, Programmatic, and Operational Deep Dive
+AI teams should not infer Tribal affiliation from residential location, ZIP code, facility use, names, language, or other proxy variables unless that inference has been explicitly approved and is necessary for a mutually agreed public health purpose. Proxy inference can create privacy risk, misclassification, and community harm. It can also undermine Tribal authority if outside organizations create AI-derived labels about Tribal identity or community membership without consent. If affiliation or Tribal relevance is needed, the project should address how that information is defined, who controls it, whether it should be collected, and whether the Tribal Nation approves the method.
+Data management controls should be designed before data are extracted or transformed for AI use. Teams should classify data sensitivity, separate identifiable data from analytic data when appropriate, minimize variables, restrict access, log use, and define approved environments. External AI tools, automated transcription services, large language models, coding assistants, and cloud platforms should not receive Tribal data, identifiable information, sensitive community information, or non-public operational details unless the tool and environment have been reviewed and approved. Contract terms should address retention, vendor access, model training, subcontractors, data location, deletion, incident notification, and audit rights.
+Model development and evaluation should include sovereignty-aware validation questions. The team should ask whether training data represent the community appropriately, whether small sample sizes make results unreliable, whether model outputs could stigmatize a Tribal Nation, and whether performance should be reported separately or suppressed. The team should also ask who has authority to interpret findings and what contextual knowledge is needed to avoid harmful conclusions. Evaluation should include human review by people with appropriate community, program, epidemiologic, technical, and governance expertise.
 Application guidance: Translate this concept into clear decision rights, review steps, documentation expectations, and escalation paths before an AI-supported workflow is approved.</a:t>
             </a:r>
             <a:endParaRPr lang="en-US" dirty="0"/>
@@ -1078,10 +1073,9 @@
           <a:p>
             <a:r>
               <a:rPr lang="en-US" dirty="0"/>
-              <a:t>Technical, Leadership, and Operational Deep Dive
-AI project teams should begin by asking whether the proposed use involves Tribal Nations, Tribal citizens, AI/AN participants, Tribal lands, Tribal service settings, Tribal public health authorities, or data elements that could be used to infer Tribal affiliation. This question should be asked during use case intake, not after a data set has been assembled. The answer may not be obvious because Tribal relevance can appear through geography, facility relationships, program participation, small-area reporting, environmental exposure data, biospecimens, genetic information, language data, or community narratives. If the answer is uncertain, the team should treat the project as requiring additional review rather than assuming no Tribal implications exist.
-Early consultation should occur before AI development, procurement, vendor demonstrations, pilot testing, or publication planning. Consultation is not the same as sending a completed plan for comment. It should allow Tribal Nations to influence the project purpose, data scope, roles, benefits, risks, consent expectations, storage location, review process, and dissemination strategy. Timelines and budgets should recognize that government-to-government consultation, community review, and relationship building require time and resources.
-Formal agreements are essential because AI projects create many opportunities for data reuse and secondary interpretation. Agreements may need to address data ownership or stewardship, permitted uses, prohibited uses, data retention, destruction or return, access rights, cloud or vendor environments, model training restrictions, publication review, benefit sharing, incident response, and conditions for future use. Where NIH-funded research is involved, the Data Management and Sharing Plan should incorporate AI/AN data management and sharing practices and Tribal preferences. For operational public health projects outside NIH research, similar principles should still guide data sharing agreements, memoranda of understanding, and governance records.
+              <a:t>Technical, Programmatic, and Operational Deep Dive
+Communication and dissemination require special care because AI outputs can be polished, confident, and wrong. Public-facing summaries, dashboards, maps, chatbots, and reports may create harm if they identify small communities, imply causation without evidence, frame disparities as community deficits, or omit historical and structural context. Tribal partners may require pre-review of reports, presentations, manuscripts, dashboard text, public advisories, or model documentation. Teams should document dissemination approvals and avoid treating public release as a default endpoint.
+Cultural humility should be built into the project operating model. Staff should learn the history, governance structure, communication protocols, and preferred engagement processes of the Tribal Nation they are working with, while recognizing that this knowledge does not make them authorities on the community. Meetings should be scheduled and facilitated in ways that respect Tribal leadership, community priorities, and local decision-making processes. Compensation, authorship, data access, capacity building, and benefit sharing should reflect the value of Tribal expertise and partnership.
 Application guidance: Translate this concept into clear decision rights, review steps, documentation expectations, and escalation paths before an AI-supported workflow is approved.</a:t>
             </a:r>
             <a:endParaRPr lang="en-US" dirty="0"/>
@@ -1170,10 +1164,10 @@
           <a:p>
             <a:r>
               <a:rPr lang="en-US" dirty="0"/>
-              <a:t>Technical, Leadership, and Operational Deep Dive
-AI teams should not infer Tribal affiliation from residential location, ZIP code, facility use, names, language, or other proxy variables unless that inference has been explicitly approved and is necessary for a mutually agreed public health purpose. Proxy inference can create privacy risk, misclassification, and community harm. It can also undermine Tribal authority if outside organizations create AI-derived labels about Tribal identity or community membership without consent. If affiliation or Tribal relevance is needed, the project should address how that information is defined, who controls it, whether it should be collected, and whether the Tribal Nation approves the method.
-Data management controls should be designed before data are extracted or transformed for AI use. Teams should classify data sensitivity, separate identifiable data from analytic data when appropriate, minimize variables, restrict access, log use, and define approved environments. External AI tools, automated transcription services, large language models, coding assistants, and cloud platforms should not receive Tribal data, identifiable information, sensitive community information, or non-public operational details unless the tool and environment have been reviewed and approved. Contract terms should address retention, vendor access, model training, subcontractors, data location, deletion, incident notification, and audit rights.
-Model development and evaluation should include sovereignty-aware validation questions. The team should ask whether training data represent the community appropriately, whether small sample sizes make results unreliable, whether model outputs could stigmatize a Tribal Nation, and whether performance should be reported separately or suppressed. The team should also ask who has authority to interpret findings and what contextual knowledge is needed to avoid harmful conclusions. Evaluation should include human review by people with appropriate community, program, epidemiologic, technical, and governance expertise.
+              <a:t>Risks, Failure Modes, and Guardrails
+A major risk is treating Tribal health data as if it were ordinary administrative or research data controlled solely by the institution that currently holds it. This can lead to AI development without Tribal consultation, data sharing without appropriate authority, or model outputs that affect Tribal communities without Tribal review. The failure mode is often procedural rather than malicious: staff follow routine analytics practices without recognizing that sovereignty changes the decision pathway. The guardrail is to require Tribal sovereignty screening during AI use case intake and to route potentially relevant projects for legal, privacy, governance, and Tribal consultation review before data are used.
+Another risk is using external AI platforms for transcription, summarization, coding, translation, or drafting with sensitive Tribal data or community information. These tools may retain prompts, store uploaded files, expose information to vendors or subcontractors, or use content in ways that are not transparent to the user. Even de-identified text can contain place names, small population details, cultural references, or contextual clues that create re-identification or group harm. The guardrail is to prohibit use of non-approved external AI tools with Tribal data and to require approved environments, contract review, and data minimization before any AI processing occurs.
+A third risk is allowing model outputs to create or reinforce harmful narratives about Tribal communities. Predictive models, cluster analyses, risk scores, geospatial maps, or AI-generated summaries may overemphasize deficits, ignore structural determinants, misinterpret small numbers, or produce misleading comparisons. These outputs can affect public trust, funding decisions, program priorities, or media narratives. The guardrail is to require sovereignty-aware review of model purpose, variables, outputs, interpretation, dissemination, and monitoring before results are shared or used operationally.
 Application guidance: Translate this concept into clear decision rights, review steps, documentation expectations, and escalation paths before an AI-supported workflow is approved.</a:t>
             </a:r>
             <a:endParaRPr lang="en-US" dirty="0"/>
@@ -1262,9 +1256,10 @@
           <a:p>
             <a:r>
               <a:rPr lang="en-US" dirty="0"/>
-              <a:t>Technical, Leadership, and Operational Deep Dive
-Communication and dissemination require special care because AI outputs can be polished, confident, and wrong. Public-facing summaries, dashboards, maps, chatbots, and reports may create harm if they identify small communities, imply causation without evidence, frame disparities as community deficits, or omit historical and structural context. Tribal partners may require pre-review of reports, presentations, manuscripts, dashboard text, public advisories, or model documentation. Teams should document dissemination approvals and avoid treating public release as a default endpoint.
-Cultural humility should be built into the project operating model. Staff should learn the history, governance structure, communication protocols, and preferred engagement processes of the Tribal Nation they are working with, while recognizing that this knowledge does not make them authorities on the community. Meetings should be scheduled and facilitated in ways that respect Tribal leadership, community priorities, and local decision-making processes. Compensation, authorship, data access, capacity building, and benefit sharing should reflect the value of Tribal expertise and partnership.
+              <a:t>Risks, Failure Modes, and Guardrails
+A fourth risk is considering equity, accessibility, and community benefit too late. If the project is already funded, contracted, designed, or near deployment before Tribal partners are engaged, meaningful changes may be difficult. This can create extractive relationships in which data and expertise flow outward while benefits, authority, and infrastructure do not flow back to the community. The guardrail is to define community benefit, capacity building, shared decision-making, and return-of-results expectations at the beginning of the project.
+A fifth risk is assuming that one Tribal engagement process applies to all Tribal Nations. Each Tribal Nation has its own government, history, legal requirements, research review expectations, cultural protocols, and data priorities. A process accepted by one Tribal Nation cannot be generalized to another without permission. The guardrail is to identify each affected Tribal Nation and confirm the appropriate consultation, approval, and documentation pathway for each one.
+A sixth risk is failing to maintain accountability after deployment. AI systems may change as data pipelines, vendors, model versions, workflows, community conditions, or public health priorities change. Without lifecycle governance, a use that was conditionally approved may drift beyond the original agreement. The guardrail is to maintain an inventory of AI uses involving Tribal data, monitor compliance with approval conditions, review incidents, revisit agreements when scope changes, and retire or pause systems when they no longer align with Tribal preferences or public health benefit.
 Application guidance: Translate this concept into clear decision rights, review steps, documentation expectations, and escalation paths before an AI-supported workflow is approved.</a:t>
             </a:r>
             <a:endParaRPr lang="en-US" dirty="0"/>
@@ -1353,10 +1348,10 @@
           <a:p>
             <a:r>
               <a:rPr lang="en-US" dirty="0"/>
-              <a:t>Risks, Failure Modes, and Guardrails
-A major risk is treating Tribal health data as if it were ordinary administrative or research data controlled solely by the institution that currently holds it. This can lead to AI development without Tribal consultation, data sharing without appropriate authority, or model outputs that affect Tribal communities without Tribal review. The failure mode is often procedural rather than malicious: staff follow routine analytics practices without recognizing that sovereignty changes the decision pathway. The guardrail is to require Tribal sovereignty screening during AI use case intake and to route potentially relevant projects for legal, privacy, governance, and Tribal consultation review before data are used.
-Another risk is using external AI platforms for transcription, summarization, coding, translation, or drafting with sensitive Tribal data or community information. These tools may retain prompts, store uploaded files, expose information to vendors or subcontractors, or use content in ways that are not transparent to the user. Even de-identified text can contain place names, small population details, cultural references, or contextual clues that create re-identification or group harm. The guardrail is to prohibit use of non-approved external AI tools with Tribal data and to require approved environments, contract review, and data minimization before any AI processing occurs.
-A third risk is allowing model outputs to create or reinforce harmful narratives about Tribal communities. Predictive models, cluster analyses, risk scores, geospatial maps, or AI-generated summaries may overemphasize deficits, ignore structural determinants, misinterpret small numbers, or produce misleading comparisons. These outputs can affect public trust, funding decisions, program priorities, or media narratives. The guardrail is to require sovereignty-aware review of model purpose, variables, outputs, interpretation, dissemination, and monitoring before results are shared or used operationally.
+              <a:t>Application to AI-Supported Workflows
+For AI use case intake, teams should add screening questions that identify whether the proposed project involves Tribal Nations, AI/AN participant data, Tribal lands, Tribal service settings, Tribal public health authorities, small-area geography, biospecimens, genetic data, environmental exposure data, or other information that could affect Tribal communities. The intake form should require the proposer to identify known Tribal partners, anticipated benefits, possible harms, data sources, external tools, and whether consultation has occurred. A project should not advance to procurement, model development, pilot testing, or public release until the sovereignty screening has been resolved. This makes Tribal sovereignty a front-end design requirement rather than a late-stage approval issue.
+For data preparation and model development, teams should document permitted data uses and technical restrictions before creating analytic files. This includes rules for variable selection, de-identification, linkage, geospatial analysis, small number suppression, feature engineering, model training, validation, storage, access, and deletion. Teams should also decide whether data can be used in model training, whether outputs can be reused in future projects, and whether a model trained with Tribal data can be transferred to other jurisdictions or use cases. These decisions should be made through formal agreement, not by default technical convenience.
+For deployment and monitoring, teams should define who reviews outputs, who receives results, who can change the system, and who can decide that the system should pause or stop. Monitoring should include accuracy, fairness, usability, community impact, privacy incidents, scope creep, and compliance with Tribal agreements. If the AI tool supports public communication, resource prioritization, surveillance interpretation, or program decisions, Tribal partners should have a clear pathway to question or challenge outputs. The system should be designed to preserve Tribal authority throughout the lifecycle, not only during initial approval.
 Application guidance: Translate this concept into clear decision rights, review steps, documentation expectations, and escalation paths before an AI-supported workflow is approved.</a:t>
             </a:r>
             <a:endParaRPr lang="en-US" dirty="0"/>
@@ -1445,10 +1440,9 @@
           <a:p>
             <a:r>
               <a:rPr lang="en-US" dirty="0"/>
-              <a:t>Risks, Failure Modes, and Guardrails
-A fourth risk is considering equity, accessibility, and community benefit too late. If the project is already funded, contracted, designed, or near deployment before Tribal partners are engaged, meaningful changes may be difficult. This can create extractive relationships in which data and expertise flow outward while benefits, authority, and infrastructure do not flow back to the community. The guardrail is to define community benefit, capacity building, shared decision-making, and return-of-results expectations at the beginning of the project.
-A fifth risk is assuming that one Tribal engagement process applies to all Tribal Nations. Each Tribal Nation has its own government, history, legal requirements, research review expectations, cultural protocols, and data priorities. A process accepted by one Tribal Nation cannot be generalized to another without permission. The guardrail is to identify each affected Tribal Nation and confirm the appropriate consultation, approval, and documentation pathway for each one.
-A sixth risk is failing to maintain accountability after deployment. AI systems may change as data pipelines, vendors, model versions, workflows, community conditions, or public health priorities change. Without lifecycle governance, a use that was conditionally approved may drift beyond the original agreement. The guardrail is to maintain an inventory of AI uses involving Tribal data, monitor compliance with approval conditions, review incidents, revisit agreements when scope changes, and retire or pause systems when they no longer align with Tribal preferences or public health benefit.
+              <a:t>Reflection Questions
+Before using AI with health data that may involve Tribal Nations or AI/AN participants, learners should pause and consider whether they know who has authority to approve the use. They should ask whether the project has identified affected Tribal Nations, relevant Tribal laws or review processes, and the appropriate form of consultation or partnership. They should also consider whether the proposed AI use creates community benefit as defined by Tribal partners, rather than only efficiency for an external agency. These questions help teams recognize that sovereignty is a design condition, not a courtesy step.
+Learners should also reflect on how the project could create harm even if no individual is directly identified. Could the AI output stigmatize a community, reveal small-area patterns, infer Tribal affiliation, misinterpret cultural context, or support decisions that affect services or resources? Could an external AI tool retain or reuse information that the project team does not have authority to share? These questions should be answered before development begins, when the project can still be changed.
 Application guidance: Translate this concept into clear decision rights, review steps, documentation expectations, and escalation paths before an AI-supported workflow is approved.</a:t>
             </a:r>
             <a:endParaRPr lang="en-US" dirty="0"/>
@@ -1540,7 +1534,7 @@
               <a:t>Module Context
 Level: Introductory
 Primary track: Governance and Security
-Appears in tracks: shared-foundational, governance-security, policy, program-management
+Appears in tracks: governance-security, shared-foundational, policy, program-management
 This module introduces public health staff to the responsibilities that arise when AI projects involve Tribal Nations, American Indian and Alaska Native participants, or health data that may describe Tribal citizens, communities, lands, services, or priorities. The central message is that Tribal Nations are sovereign governments, not stakeholder groups, and their health data cannot be treated as ordinary administrative information. AI projects must be shaped through early consultation, formal partnership, and clear agreements before data are collected, transformed, analyzed, shared, or used to train, test, or deploy AI systems. This module is intended for programmatic, technical, analytic, governance, policy, communications, and leadership staff who may participate in AI planning or implementation. The module emphasizes Indigenous Data Sovereignty, Indigenous Data Governance, Digital Sovereignty, and cultural humility as core public health AI competencies. Learners will examine how AI project decisions can affect Tribal authority, community trust, privacy, group harm, health equity, interpretation of findings, and control over future data use. The module also addresses practical safeguards for working with AI tools, including large language models, automated transcription, data linkage, geospatial analysis, predictive models, and external platforms. The goal is not to make every learner an expert in Tribal law, but to help staff recognize when Tribal sovereignty is implicated and when formal Tribal engagement, legal review, and governance review are required.</a:t>
             </a:r>
             <a:endParaRPr lang="en-US" dirty="0"/>
@@ -1629,11 +1623,10 @@
           <a:p>
             <a:r>
               <a:rPr lang="en-US" dirty="0"/>
-              <a:t>Application to AI-Supported Workflows
-For AI use case intake, teams should add screening questions that identify whether the proposed project involves Tribal Nations, AI/AN participant data, Tribal lands, Tribal service settings, Tribal public health authorities, small-area geography, biospecimens, genetic data, environmental exposure data, or other information that could affect Tribal communities. The intake form should require the proposer to identify known Tribal partners, anticipated benefits, possible harms, data sources, external tools, and whether consultation has occurred. A project should not advance to procurement, model development, pilot testing, or public release until the sovereignty screening has been resolved. This makes Tribal sovereignty a front-end design requirement rather than a late-stage approval issue.
-For data preparation and model development, teams should document permitted data uses and technical restrictions before creating analytic files. This includes rules for variable selection, de-identification, linkage, geospatial analysis, small number suppression, feature engineering, model training, validation, storage, access, and deletion. Teams should also decide whether data can be used in model training, whether outputs can be reused in future projects, and whether a model trained with Tribal data can be transferred to other jurisdictions or use cases. These decisions should be made through formal agreement, not by default technical convenience.
-For deployment and monitoring, teams should define who reviews outputs, who receives results, who can change the system, and who can decide that the system should pause or stop. Monitoring should include accuracy, fairness, usability, community impact, privacy incidents, scope creep, and compliance with Tribal agreements. If the AI tool supports public communication, resource prioritization, surveillance interpretation, or program decisions, Tribal partners should have a clear pathway to question or challenge outputs. The system should be designed to preserve Tribal authority throughout the lifecycle, not only during initial approval.
-Application guidance: Translate this concept into clear decision rights, review steps, documentation expectations, and escalation paths before an AI-supported workflow is approved.</a:t>
+              <a:t>Practical Exercise
+Select a proposed AI-supported public health project that could involve Tribal Nations, AI/AN participant data, Tribal lands, Tribal service settings, or data that could indirectly identify or affect Tribal communities. The project may be a surveillance summary tool, predictive model, automated transcription workflow, chatbot, public communication assistant, environmental health mapping project, data linkage project, or research analysis. Complete a Tribal sovereignty and Indigenous data governance screening memo for the project. The memo should identify the public health purpose, data sources, affected communities, potential Tribal authority concerns, consultation needs, data management safeguards, external platform risks, review bodies, and recommended next steps.
+Example response: A state agency proposes to use an AI tool to summarize open-text case investigation notes for emerging respiratory illness trends. The initial data include case narratives, county, ZIP code, facility, race and ethnicity, and outbreak location fields, and several records may involve Tribal service areas or small communities near Tribal lands. The screening memo identifies that the project should not send free-text notes to an external AI platform, should not infer Tribal affiliation from geography, and should not produce small-area summaries until Tribal consultation and legal review occur. The recommended next step is to meet with potentially affected Tribal public health authorities to determine whether the project has a mutually agreed purpose, what data may be used, what outputs are useful, what findings require pre-review, and what safeguards should be documented in a data sharing agreement.
+Application guidance: Use the assignment to test whether you can explain the concept, apply it to a realistic public health situation, and identify what would need review before the work moves forward.</a:t>
             </a:r>
             <a:endParaRPr lang="en-US" dirty="0"/>
           </a:p>
@@ -1721,9 +1714,9 @@
           <a:p>
             <a:r>
               <a:rPr lang="en-US" dirty="0"/>
-              <a:t>Reflection Questions
-Before using AI with health data that may involve Tribal Nations or AI/AN participants, learners should pause and consider whether they know who has authority to approve the use. They should ask whether the project has identified affected Tribal Nations, relevant Tribal laws or review processes, and the appropriate form of consultation or partnership. They should also consider whether the proposed AI use creates community benefit as defined by Tribal partners, rather than only efficiency for an external agency. These questions help teams recognize that sovereignty is a design condition, not a courtesy step.
-Learners should also reflect on how the project could create harm even if no individual is directly identified. Could the AI output stigmatize a community, reveal small-area patterns, infer Tribal affiliation, misinterpret cultural context, or support decisions that affect services or resources? Could an external AI tool retain or reuse information that the project team does not have authority to share? These questions should be answered before development begins, when the project can still be changed.
+              <a:t>Expected Artifact or Evidence
+The expected artifact is a Tribal Sovereignty and Indigenous Data Governance Screening Memo for one AI-supported public health use case. The memo should be complete enough for a supervisor, AI governance body, Tribal liaison, legal counsel, privacy officer, security lead, equity reviewer, or Tribal partner to understand why the project may implicate Tribal sovereignty. It should distinguish known facts from assumptions and identify what cannot be decided until appropriate Tribal consultation occurs. The memo should not include protected health information, personally identifiable information, or confidential Tribal information.
+A strong memo includes the proposed AI use, public health purpose, data sources, affected Tribal Nations or uncertainty about Tribal relevance, AI tools or vendors under consideration, data storage and processing environment, anticipated outputs, potential benefits, potential harms, and recommended review pathway. It should address CARE Principles, data management expectations, cultural humility, consultation needs, and whether formal agreements are required before the project proceeds. The artifact may be used as an intake attachment, governance briefing, or planning document, but it does not replace Tribal approval or formal legal review.
 Application guidance: Translate this concept into clear decision rights, review steps, documentation expectations, and escalation paths before an AI-supported workflow is approved.</a:t>
             </a:r>
             <a:endParaRPr lang="en-US" dirty="0"/>
@@ -1812,9 +1805,8 @@
           <a:p>
             <a:r>
               <a:rPr lang="en-US" dirty="0"/>
-              <a:t>Practical Exercise
-Select a proposed AI-supported public health project that could involve Tribal Nations, AI/AN participant data, Tribal lands, Tribal service settings, or data that could indirectly identify or affect Tribal communities. The project may be a surveillance summary tool, predictive model, automated transcription workflow, chatbot, public communication assistant, environmental health mapping project, data linkage project, or research analysis. Complete a Tribal sovereignty and Indigenous data governance screening memo for the project. The memo should identify the public health purpose, data sources, affected communities, potential Tribal authority concerns, consultation needs, data management safeguards, external platform risks, review bodies, and recommended next steps.
-Example response: A state agency proposes to use an AI tool to summarize open-text case investigation notes for emerging respiratory illness trends. The initial data include case narratives, county, ZIP code, facility, race and ethnicity, and outbreak location fields, and several records may involve Tribal service areas or small communities near Tribal lands. The screening memo identifies that the project should not send free-text notes to an external AI platform, should not infer Tribal affiliation from geography, and should not produce small-area summaries until Tribal consultation and legal review occur. The recommended next step is to meet with potentially affected Tribal public health authorities to determine whether the project has a mutually agreed purpose, what data may be used, what outputs are useful, what findings require pre-review, and what safeguards should be documented in a data sharing agreement.
+              <a:t>Expected Assignment
+Tribal Sovereignty and Indigenous Data Governance Screening Memo
 Application guidance: Use the assignment to test whether you can explain the concept, apply it to a realistic public health situation, and identify what would need review before the work moves forward.</a:t>
             </a:r>
             <a:endParaRPr lang="en-US" dirty="0"/>
@@ -1903,10 +1895,13 @@
           <a:p>
             <a:r>
               <a:rPr lang="en-US" dirty="0"/>
-              <a:t>Expected Artifact or Evidence
-The expected artifact is a Tribal Sovereignty and Indigenous Data Governance Screening Memo for one AI-supported public health use case. The memo should be complete enough for a supervisor, AI governance body, Tribal liaison, legal counsel, privacy officer, security lead, equity reviewer, or Tribal partner to understand why the project may implicate Tribal sovereignty. It should distinguish known facts from assumptions and identify what cannot be decided until appropriate Tribal consultation occurs. The memo should not include protected health information, personally identifiable information, or confidential Tribal information.
-A strong memo includes the proposed AI use, public health purpose, data sources, affected Tribal Nations or uncertainty about Tribal relevance, AI tools or vendors under consideration, data storage and processing environment, anticipated outputs, potential benefits, potential harms, and recommended review pathway. It should address CARE Principles, data management expectations, cultural humility, consultation needs, and whether formal agreements are required before the project proceeds. The artifact may be used as an intake attachment, governance briefing, or planning document, but it does not replace Tribal approval or formal legal review.
-Application guidance: Translate this concept into clear decision rights, review steps, documentation expectations, and escalation paths before an AI-supported workflow is approved.</a:t>
+              <a:t>Knowledge Check
+1. Why should Tribal sovereignty be considered before an AI project with health data begins?
+2. Which statement best reflects Indigenous Data Sovereignty?
+3. Which AI practice should be avoided unless explicitly approved through the appropriate governance pathway?
+4. What is the strongest reason to involve Tribal partners early in the AI lifecycle?
+5. What should a sovereignty-aware AI project do when Tribal relevance is uncertain?
+Application guidance: Use the assignment to test whether you can explain the concept, apply it to a realistic public health situation, and identify what would need review before the work moves forward.</a:t>
             </a:r>
             <a:endParaRPr lang="en-US" dirty="0"/>
           </a:p>
@@ -1994,10 +1989,12 @@
           <a:p>
             <a:r>
               <a:rPr lang="en-US" dirty="0"/>
-              <a:t>References and Resources for Additional Information
-Global Indigenous Data Alliance. CARE Principles for Indigenous Data Governance. https://www.gida-global.org/care
-National Institutes of Health. NOT-OD-22-214: Supplemental Information to the NIH Policy for Data Management and Sharing: Responsible Management and Sharing of American Indian/Alaska Native Participant Data. https://grants.nih.gov/grants/guide/notice-files/NOT-OD-22-214.html
-National Institutes of Health Tribal Health Research Office. Tribal Health Research Office resources. https://dpcpsi.nih.gov/thro
+              <a:t>References and Resources
+Global Indigenous Data Alliance. CARE Principles for Indigenous Data Governance.: https://www.gida-global.org/care
+National Institutes of Health. NOT-OD-22-214: Supplemental Information to the NIH Policy for Data Management and Sharing: Responsible Management and Sharing of American Indian/Alaska Native Participant Data.: https://grants.nih.gov/grants/guide/notice-files/NOT-OD-22-214.html
+National Institutes of Health Tribal Health Research Office. Tribal Health Research Office resources.: https://dpcpsi.nih.gov/thro
+United States Indigenous Data Sovereignty Network. Resources and information on Indigenous Data Sovereignty.: https://usindigenousdata.org/
+All of Us Research Program. Tribal engagement and data use resources.: https://www.researchallofus.org/
 Application guidance: Translate this concept into clear decision rights, review steps, documentation expectations, and escalation paths before an AI-supported workflow is approved.</a:t>
             </a:r>
             <a:endParaRPr lang="en-US" dirty="0"/>
@@ -2086,10 +2083,9 @@
           <a:p>
             <a:r>
               <a:rPr lang="en-US" dirty="0"/>
-              <a:t>References and Resources for Additional Information
-United States Indigenous Data Sovereignty Network. Resources and information on Indigenous Data Sovereignty. https://usindigenousdata.org/
-All of Us Research Program. Tribal engagement and data use resources. https://www.researchallofus.org/
+              <a:t>References and Resources
 HHS and CDC Tribal consultation resources. Use relevant agency consultation policies and Tribal liaison guidance before starting projects involving Tribal Nations or AI/AN data.
+Brookings. Digital sovereignty and Indigenous Nations resources.: https://www.brookings.edu/
 Application guidance: Translate this concept into clear decision rights, review steps, documentation expectations, and escalation paths before an AI-supported workflow is approved.</a:t>
             </a:r>
             <a:endParaRPr lang="en-US" dirty="0"/>
@@ -2114,374 +2110,6 @@
             <a:fld id="{F7021451-1387-4CA6-816F-3879F97B5CBC}" type="slidenum">
               <a:rPr lang="en-US"/>
               <a:t>25</a:t>
-            </a:fld>
-            <a:endParaRPr lang="en-US"/>
-          </a:p>
-        </p:txBody>
-      </p:sp>
-    </p:spTree>
-    <p:extLst>
-      <p:ext uri="{BB962C8B-B14F-4D97-AF65-F5344CB8AC3E}">
-        <p14:creationId xmlns:p14="http://schemas.microsoft.com/office/powerpoint/2010/main" val="1024086991"/>
-      </p:ext>
-    </p:extLst>
-  </p:cSld>
-  <p:clrMapOvr>
-    <a:masterClrMapping/>
-  </p:clrMapOvr>
-</p:notes>
-</file>
-
-<file path=ppt/notesSlides/notesSlide26.xml><?xml version="1.0" encoding="utf-8"?>
-<p:notes xmlns:a="http://schemas.openxmlformats.org/drawingml/2006/main" xmlns:r="http://schemas.openxmlformats.org/officeDocument/2006/relationships" xmlns:p="http://schemas.openxmlformats.org/presentationml/2006/main">
-  <p:cSld>
-    <p:spTree>
-      <p:nvGrpSpPr>
-        <p:cNvPr id="1" name=""/>
-        <p:cNvGrpSpPr/>
-        <p:nvPr/>
-      </p:nvGrpSpPr>
-      <p:grpSpPr>
-        <a:xfrm>
-          <a:off x="0" y="0"/>
-          <a:ext cx="0" cy="0"/>
-          <a:chOff x="0" y="0"/>
-          <a:chExt cx="0" cy="0"/>
-        </a:xfrm>
-      </p:grpSpPr>
-      <p:sp>
-        <p:nvSpPr>
-          <p:cNvPr id="2" name="Slide Image Placeholder 1"/>
-          <p:cNvSpPr>
-            <a:spLocks noGrp="1" noRot="1" noChangeAspect="1"/>
-          </p:cNvSpPr>
-          <p:nvPr>
-            <p:ph type="sldImg"/>
-          </p:nvPr>
-        </p:nvSpPr>
-        <p:spPr/>
-      </p:sp>
-      <p:sp>
-        <p:nvSpPr>
-          <p:cNvPr id="3" name="Notes Placeholder 2"/>
-          <p:cNvSpPr>
-            <a:spLocks noGrp="1"/>
-          </p:cNvSpPr>
-          <p:nvPr>
-            <p:ph type="body" idx="1"/>
-          </p:nvPr>
-        </p:nvSpPr>
-        <p:spPr/>
-        <p:txBody>
-          <a:bodyPr/>
-          <a:lstStyle/>
-          <a:p>
-            <a:r>
-              <a:rPr lang="en-US" dirty="0"/>
-              <a:t>References and Resources for Additional Information
-Brookings. Digital sovereignty and Indigenous Nations resources. https://www.brookings.edu/
-Application guidance: Translate this concept into clear decision rights, review steps, documentation expectations, and escalation paths before an AI-supported workflow is approved.</a:t>
-            </a:r>
-            <a:endParaRPr lang="en-US" dirty="0"/>
-          </a:p>
-        </p:txBody>
-      </p:sp>
-      <p:sp>
-        <p:nvSpPr>
-          <p:cNvPr id="4" name="Slide Number Placeholder 3"/>
-          <p:cNvSpPr>
-            <a:spLocks noGrp="1"/>
-          </p:cNvSpPr>
-          <p:nvPr>
-            <p:ph type="sldNum" sz="quarter" idx="10"/>
-          </p:nvPr>
-        </p:nvSpPr>
-        <p:spPr/>
-        <p:txBody>
-          <a:bodyPr/>
-          <a:lstStyle/>
-          <a:p>
-            <a:fld id="{F7021451-1387-4CA6-816F-3879F97B5CBC}" type="slidenum">
-              <a:rPr lang="en-US"/>
-              <a:t>26</a:t>
-            </a:fld>
-            <a:endParaRPr lang="en-US"/>
-          </a:p>
-        </p:txBody>
-      </p:sp>
-    </p:spTree>
-    <p:extLst>
-      <p:ext uri="{BB962C8B-B14F-4D97-AF65-F5344CB8AC3E}">
-        <p14:creationId xmlns:p14="http://schemas.microsoft.com/office/powerpoint/2010/main" val="1024086991"/>
-      </p:ext>
-    </p:extLst>
-  </p:cSld>
-  <p:clrMapOvr>
-    <a:masterClrMapping/>
-  </p:clrMapOvr>
-</p:notes>
-</file>
-
-<file path=ppt/notesSlides/notesSlide27.xml><?xml version="1.0" encoding="utf-8"?>
-<p:notes xmlns:a="http://schemas.openxmlformats.org/drawingml/2006/main" xmlns:r="http://schemas.openxmlformats.org/officeDocument/2006/relationships" xmlns:p="http://schemas.openxmlformats.org/presentationml/2006/main">
-  <p:cSld>
-    <p:spTree>
-      <p:nvGrpSpPr>
-        <p:cNvPr id="1" name=""/>
-        <p:cNvGrpSpPr/>
-        <p:nvPr/>
-      </p:nvGrpSpPr>
-      <p:grpSpPr>
-        <a:xfrm>
-          <a:off x="0" y="0"/>
-          <a:ext cx="0" cy="0"/>
-          <a:chOff x="0" y="0"/>
-          <a:chExt cx="0" cy="0"/>
-        </a:xfrm>
-      </p:grpSpPr>
-      <p:sp>
-        <p:nvSpPr>
-          <p:cNvPr id="2" name="Slide Image Placeholder 1"/>
-          <p:cNvSpPr>
-            <a:spLocks noGrp="1" noRot="1" noChangeAspect="1"/>
-          </p:cNvSpPr>
-          <p:nvPr>
-            <p:ph type="sldImg"/>
-          </p:nvPr>
-        </p:nvSpPr>
-        <p:spPr/>
-      </p:sp>
-      <p:sp>
-        <p:nvSpPr>
-          <p:cNvPr id="3" name="Notes Placeholder 2"/>
-          <p:cNvSpPr>
-            <a:spLocks noGrp="1"/>
-          </p:cNvSpPr>
-          <p:nvPr>
-            <p:ph type="body" idx="1"/>
-          </p:nvPr>
-        </p:nvSpPr>
-        <p:spPr/>
-        <p:txBody>
-          <a:bodyPr/>
-          <a:lstStyle/>
-          <a:p>
-            <a:r>
-              <a:rPr lang="en-US" dirty="0"/>
-              <a:t>Expected Assignment
-Tribal Sovereignty and Indigenous Data Governance Screening Memo
-Application guidance: Use the assignment to test whether you can explain the concept, apply it to a realistic public health situation, and identify what would need review before the work moves forward.</a:t>
-            </a:r>
-            <a:endParaRPr lang="en-US" dirty="0"/>
-          </a:p>
-        </p:txBody>
-      </p:sp>
-      <p:sp>
-        <p:nvSpPr>
-          <p:cNvPr id="4" name="Slide Number Placeholder 3"/>
-          <p:cNvSpPr>
-            <a:spLocks noGrp="1"/>
-          </p:cNvSpPr>
-          <p:nvPr>
-            <p:ph type="sldNum" sz="quarter" idx="10"/>
-          </p:nvPr>
-        </p:nvSpPr>
-        <p:spPr/>
-        <p:txBody>
-          <a:bodyPr/>
-          <a:lstStyle/>
-          <a:p>
-            <a:fld id="{F7021451-1387-4CA6-816F-3879F97B5CBC}" type="slidenum">
-              <a:rPr lang="en-US"/>
-              <a:t>27</a:t>
-            </a:fld>
-            <a:endParaRPr lang="en-US"/>
-          </a:p>
-        </p:txBody>
-      </p:sp>
-    </p:spTree>
-    <p:extLst>
-      <p:ext uri="{BB962C8B-B14F-4D97-AF65-F5344CB8AC3E}">
-        <p14:creationId xmlns:p14="http://schemas.microsoft.com/office/powerpoint/2010/main" val="1024086991"/>
-      </p:ext>
-    </p:extLst>
-  </p:cSld>
-  <p:clrMapOvr>
-    <a:masterClrMapping/>
-  </p:clrMapOvr>
-</p:notes>
-</file>
-
-<file path=ppt/notesSlides/notesSlide28.xml><?xml version="1.0" encoding="utf-8"?>
-<p:notes xmlns:a="http://schemas.openxmlformats.org/drawingml/2006/main" xmlns:r="http://schemas.openxmlformats.org/officeDocument/2006/relationships" xmlns:p="http://schemas.openxmlformats.org/presentationml/2006/main">
-  <p:cSld>
-    <p:spTree>
-      <p:nvGrpSpPr>
-        <p:cNvPr id="1" name=""/>
-        <p:cNvGrpSpPr/>
-        <p:nvPr/>
-      </p:nvGrpSpPr>
-      <p:grpSpPr>
-        <a:xfrm>
-          <a:off x="0" y="0"/>
-          <a:ext cx="0" cy="0"/>
-          <a:chOff x="0" y="0"/>
-          <a:chExt cx="0" cy="0"/>
-        </a:xfrm>
-      </p:grpSpPr>
-      <p:sp>
-        <p:nvSpPr>
-          <p:cNvPr id="2" name="Slide Image Placeholder 1"/>
-          <p:cNvSpPr>
-            <a:spLocks noGrp="1" noRot="1" noChangeAspect="1"/>
-          </p:cNvSpPr>
-          <p:nvPr>
-            <p:ph type="sldImg"/>
-          </p:nvPr>
-        </p:nvSpPr>
-        <p:spPr/>
-      </p:sp>
-      <p:sp>
-        <p:nvSpPr>
-          <p:cNvPr id="3" name="Notes Placeholder 2"/>
-          <p:cNvSpPr>
-            <a:spLocks noGrp="1"/>
-          </p:cNvSpPr>
-          <p:nvPr>
-            <p:ph type="body" idx="1"/>
-          </p:nvPr>
-        </p:nvSpPr>
-        <p:spPr/>
-        <p:txBody>
-          <a:bodyPr/>
-          <a:lstStyle/>
-          <a:p>
-            <a:r>
-              <a:rPr lang="en-US" dirty="0"/>
-              <a:t>Knowledge Check
-1. Why should Tribal sovereignty be considered before an AI project with health data begins?
-2. Which statement best reflects Indigenous Data Sovereignty?
-3. Which AI practice should be avoided unless explicitly approved through the appropriate governance pathway?
-4. What is the strongest reason to involve Tribal partners early in the AI lifecycle?
-5. What should a sovereignty-aware AI project do when Tribal relevance is uncertain?
-Application guidance: Use the assignment to test whether you can explain the concept, apply it to a realistic public health situation, and identify what would need review before the work moves forward.</a:t>
-            </a:r>
-            <a:endParaRPr lang="en-US" dirty="0"/>
-          </a:p>
-        </p:txBody>
-      </p:sp>
-      <p:sp>
-        <p:nvSpPr>
-          <p:cNvPr id="4" name="Slide Number Placeholder 3"/>
-          <p:cNvSpPr>
-            <a:spLocks noGrp="1"/>
-          </p:cNvSpPr>
-          <p:nvPr>
-            <p:ph type="sldNum" sz="quarter" idx="10"/>
-          </p:nvPr>
-        </p:nvSpPr>
-        <p:spPr/>
-        <p:txBody>
-          <a:bodyPr/>
-          <a:lstStyle/>
-          <a:p>
-            <a:fld id="{F7021451-1387-4CA6-816F-3879F97B5CBC}" type="slidenum">
-              <a:rPr lang="en-US"/>
-              <a:t>28</a:t>
-            </a:fld>
-            <a:endParaRPr lang="en-US"/>
-          </a:p>
-        </p:txBody>
-      </p:sp>
-    </p:spTree>
-    <p:extLst>
-      <p:ext uri="{BB962C8B-B14F-4D97-AF65-F5344CB8AC3E}">
-        <p14:creationId xmlns:p14="http://schemas.microsoft.com/office/powerpoint/2010/main" val="1024086991"/>
-      </p:ext>
-    </p:extLst>
-  </p:cSld>
-  <p:clrMapOvr>
-    <a:masterClrMapping/>
-  </p:clrMapOvr>
-</p:notes>
-</file>
-
-<file path=ppt/notesSlides/notesSlide29.xml><?xml version="1.0" encoding="utf-8"?>
-<p:notes xmlns:a="http://schemas.openxmlformats.org/drawingml/2006/main" xmlns:r="http://schemas.openxmlformats.org/officeDocument/2006/relationships" xmlns:p="http://schemas.openxmlformats.org/presentationml/2006/main">
-  <p:cSld>
-    <p:spTree>
-      <p:nvGrpSpPr>
-        <p:cNvPr id="1" name=""/>
-        <p:cNvGrpSpPr/>
-        <p:nvPr/>
-      </p:nvGrpSpPr>
-      <p:grpSpPr>
-        <a:xfrm>
-          <a:off x="0" y="0"/>
-          <a:ext cx="0" cy="0"/>
-          <a:chOff x="0" y="0"/>
-          <a:chExt cx="0" cy="0"/>
-        </a:xfrm>
-      </p:grpSpPr>
-      <p:sp>
-        <p:nvSpPr>
-          <p:cNvPr id="2" name="Slide Image Placeholder 1"/>
-          <p:cNvSpPr>
-            <a:spLocks noGrp="1" noRot="1" noChangeAspect="1"/>
-          </p:cNvSpPr>
-          <p:nvPr>
-            <p:ph type="sldImg"/>
-          </p:nvPr>
-        </p:nvSpPr>
-        <p:spPr/>
-      </p:sp>
-      <p:sp>
-        <p:nvSpPr>
-          <p:cNvPr id="3" name="Notes Placeholder 2"/>
-          <p:cNvSpPr>
-            <a:spLocks noGrp="1"/>
-          </p:cNvSpPr>
-          <p:nvPr>
-            <p:ph type="body" idx="1"/>
-          </p:nvPr>
-        </p:nvSpPr>
-        <p:spPr/>
-        <p:txBody>
-          <a:bodyPr/>
-          <a:lstStyle/>
-          <a:p>
-            <a:r>
-              <a:rPr lang="en-US" dirty="0"/>
-              <a:t>References and Resources
-Global Indigenous Data Alliance. CARE Principles for Indigenous Data Governance.: https://www.gida-global.org/care
-National Institutes of Health. NOT-OD-22-214: Supplemental Information to the NIH Policy for Data Management and Sharing: Responsible Management and Sharing of American Indian/Alaska Native Participant Data.: https://grants.nih.gov/grants/guide/notice-files/NOT-OD-22-214.html
-National Institutes of Health Tribal Health Research Office. Tribal Health Research Office resources.: https://dpcpsi.nih.gov/thro
-United States Indigenous Data Sovereignty Network. Resources and information on Indigenous Data Sovereignty.: https://usindigenousdata.org/
-All of Us Research Program. Tribal engagement and data use resources.: https://www.researchallofus.org/
-Application guidance: Translate this concept into clear decision rights, review steps, documentation expectations, and escalation paths before an AI-supported workflow is approved.</a:t>
-            </a:r>
-            <a:endParaRPr lang="en-US" dirty="0"/>
-          </a:p>
-        </p:txBody>
-      </p:sp>
-      <p:sp>
-        <p:nvSpPr>
-          <p:cNvPr id="4" name="Slide Number Placeholder 3"/>
-          <p:cNvSpPr>
-            <a:spLocks noGrp="1"/>
-          </p:cNvSpPr>
-          <p:nvPr>
-            <p:ph type="sldNum" sz="quarter" idx="10"/>
-          </p:nvPr>
-        </p:nvSpPr>
-        <p:spPr/>
-        <p:txBody>
-          <a:bodyPr/>
-          <a:lstStyle/>
-          <a:p>
-            <a:fld id="{F7021451-1387-4CA6-816F-3879F97B5CBC}" type="slidenum">
-              <a:rPr lang="en-US"/>
-              <a:t>29</a:t>
             </a:fld>
             <a:endParaRPr lang="en-US"/>
           </a:p>
@@ -2574,97 +2202,6 @@
             <a:fld id="{F7021451-1387-4CA6-816F-3879F97B5CBC}" type="slidenum">
               <a:rPr lang="en-US"/>
               <a:t>3</a:t>
-            </a:fld>
-            <a:endParaRPr lang="en-US"/>
-          </a:p>
-        </p:txBody>
-      </p:sp>
-    </p:spTree>
-    <p:extLst>
-      <p:ext uri="{BB962C8B-B14F-4D97-AF65-F5344CB8AC3E}">
-        <p14:creationId xmlns:p14="http://schemas.microsoft.com/office/powerpoint/2010/main" val="1024086991"/>
-      </p:ext>
-    </p:extLst>
-  </p:cSld>
-  <p:clrMapOvr>
-    <a:masterClrMapping/>
-  </p:clrMapOvr>
-</p:notes>
-</file>
-
-<file path=ppt/notesSlides/notesSlide30.xml><?xml version="1.0" encoding="utf-8"?>
-<p:notes xmlns:a="http://schemas.openxmlformats.org/drawingml/2006/main" xmlns:r="http://schemas.openxmlformats.org/officeDocument/2006/relationships" xmlns:p="http://schemas.openxmlformats.org/presentationml/2006/main">
-  <p:cSld>
-    <p:spTree>
-      <p:nvGrpSpPr>
-        <p:cNvPr id="1" name=""/>
-        <p:cNvGrpSpPr/>
-        <p:nvPr/>
-      </p:nvGrpSpPr>
-      <p:grpSpPr>
-        <a:xfrm>
-          <a:off x="0" y="0"/>
-          <a:ext cx="0" cy="0"/>
-          <a:chOff x="0" y="0"/>
-          <a:chExt cx="0" cy="0"/>
-        </a:xfrm>
-      </p:grpSpPr>
-      <p:sp>
-        <p:nvSpPr>
-          <p:cNvPr id="2" name="Slide Image Placeholder 1"/>
-          <p:cNvSpPr>
-            <a:spLocks noGrp="1" noRot="1" noChangeAspect="1"/>
-          </p:cNvSpPr>
-          <p:nvPr>
-            <p:ph type="sldImg"/>
-          </p:nvPr>
-        </p:nvSpPr>
-        <p:spPr/>
-      </p:sp>
-      <p:sp>
-        <p:nvSpPr>
-          <p:cNvPr id="3" name="Notes Placeholder 2"/>
-          <p:cNvSpPr>
-            <a:spLocks noGrp="1"/>
-          </p:cNvSpPr>
-          <p:nvPr>
-            <p:ph type="body" idx="1"/>
-          </p:nvPr>
-        </p:nvSpPr>
-        <p:spPr/>
-        <p:txBody>
-          <a:bodyPr/>
-          <a:lstStyle/>
-          <a:p>
-            <a:r>
-              <a:rPr lang="en-US" dirty="0"/>
-              <a:t>References and Resources
-HHS and CDC Tribal consultation resources. Use relevant agency consultation policies and Tribal liaison guidance before starting projects involving Tribal Nations or AI/AN data.
-Brookings. Digital sovereignty and Indigenous Nations resources.: https://www.brookings.edu/
-Application guidance: Translate this concept into clear decision rights, review steps, documentation expectations, and escalation paths before an AI-supported workflow is approved.</a:t>
-            </a:r>
-            <a:endParaRPr lang="en-US" dirty="0"/>
-          </a:p>
-        </p:txBody>
-      </p:sp>
-      <p:sp>
-        <p:nvSpPr>
-          <p:cNvPr id="4" name="Slide Number Placeholder 3"/>
-          <p:cNvSpPr>
-            <a:spLocks noGrp="1"/>
-          </p:cNvSpPr>
-          <p:nvPr>
-            <p:ph type="sldNum" sz="quarter" idx="10"/>
-          </p:nvPr>
-        </p:nvSpPr>
-        <p:spPr/>
-        <p:txBody>
-          <a:bodyPr/>
-          <a:lstStyle/>
-          <a:p>
-            <a:fld id="{F7021451-1387-4CA6-816F-3879F97B5CBC}" type="slidenum">
-              <a:rPr lang="en-US"/>
-              <a:t>30</a:t>
             </a:fld>
             <a:endParaRPr lang="en-US"/>
           </a:p>
@@ -5925,7 +5462,7 @@
                 <a:ea typeface="Aptos Display" pitchFamily="34" charset="-122"/>
                 <a:cs typeface="Aptos Display" pitchFamily="34" charset="-120"/>
               </a:rPr>
-              <a:t>Definitions / Core Concepts</a:t>
+              <a:t>Public Health Example</a:t>
             </a:r>
             <a:endParaRPr lang="en-US" sz="3400" dirty="0"/>
           </a:p>
@@ -5966,7 +5503,7 @@
                 <a:ea typeface="Aptos" pitchFamily="34" charset="-122"/>
                 <a:cs typeface="Aptos" pitchFamily="34" charset="-120"/>
               </a:rPr>
-              <a:t>• Tribal sovereignty means the inherent authority of Tribal Nations to govern.</a:t>
+              <a:t>• A state health department wants to develop an AI-assisted analytics workflow.</a:t>
             </a:r>
             <a:endParaRPr lang="en-US" sz="1920" dirty="0"/>
           </a:p>
@@ -5983,7 +5520,7 @@
                 <a:ea typeface="Aptos" pitchFamily="34" charset="-122"/>
                 <a:cs typeface="Aptos" pitchFamily="34" charset="-120"/>
               </a:rPr>
-              <a:t>• In public health AI work, this means a Tribal Nation may have its own laws,.</a:t>
+              <a:t>• The initial technical design includes free-text chief complaint data,.</a:t>
             </a:r>
             <a:endParaRPr lang="en-US" sz="1920" dirty="0"/>
           </a:p>
@@ -6000,7 +5537,7 @@
                 <a:ea typeface="Aptos" pitchFamily="34" charset="-122"/>
                 <a:cs typeface="Aptos" pitchFamily="34" charset="-120"/>
               </a:rPr>
-              <a:t>• Public health staff should not treat Tribal input as optional stakeholder.</a:t>
+              <a:t>• Several counties include Tribal lands, and some small-area summaries could.</a:t>
             </a:r>
             <a:endParaRPr lang="en-US" sz="1920" dirty="0"/>
           </a:p>
@@ -6107,7 +5644,7 @@
                 <a:ea typeface="Aptos" pitchFamily="34" charset="-122"/>
                 <a:cs typeface="Aptos" pitchFamily="34" charset="-120"/>
               </a:rPr>
-              <a:t>Tribal sovereignty means the inherent authority of Tribal Nations to govern.</a:t>
+              <a:t>A state health department wants to develop an AI-assisted analytics workflow to.</a:t>
             </a:r>
             <a:endParaRPr lang="en-US" sz="1220" dirty="0"/>
           </a:p>
@@ -6214,7 +5751,7 @@
                 <a:ea typeface="Aptos" pitchFamily="34" charset="-122"/>
                 <a:cs typeface="Aptos" pitchFamily="34" charset="-120"/>
               </a:rPr>
-              <a:t>Tribal sovereignty means the inherent authority of.</a:t>
+              <a:t>A state health department wants to develop an.</a:t>
             </a:r>
             <a:endParaRPr lang="en-US" sz="1140" dirty="0"/>
           </a:p>
@@ -6231,7 +5768,7 @@
                 <a:ea typeface="Aptos" pitchFamily="34" charset="-122"/>
                 <a:cs typeface="Aptos" pitchFamily="34" charset="-120"/>
               </a:rPr>
-              <a:t>In public health AI work, this means a Tribal.</a:t>
+              <a:t>The initial technical design includes free-text.</a:t>
             </a:r>
             <a:endParaRPr lang="en-US" sz="1140" dirty="0"/>
           </a:p>
@@ -6248,7 +5785,7 @@
                 <a:ea typeface="Aptos" pitchFamily="34" charset="-122"/>
                 <a:cs typeface="Aptos" pitchFamily="34" charset="-120"/>
               </a:rPr>
-              <a:t>Public health staff should not treat Tribal input.</a:t>
+              <a:t>Several counties include Tribal lands, and some.</a:t>
             </a:r>
             <a:endParaRPr lang="en-US" sz="1140" dirty="0"/>
           </a:p>
@@ -6634,7 +6171,7 @@
                 <a:ea typeface="Aptos Display" pitchFamily="34" charset="-122"/>
                 <a:cs typeface="Aptos Display" pitchFamily="34" charset="-120"/>
               </a:rPr>
-              <a:t>Definitions / Core Concepts Continued</a:t>
+              <a:t>Technical, Programmatic, and Operational Deep Dive</a:t>
             </a:r>
             <a:endParaRPr lang="en-US" sz="3400" dirty="0"/>
           </a:p>
@@ -6675,7 +6212,7 @@
                 <a:ea typeface="Aptos" pitchFamily="34" charset="-122"/>
                 <a:cs typeface="Aptos" pitchFamily="34" charset="-120"/>
               </a:rPr>
-              <a:t>• The CARE Principles for Indigenous Data Governance provide a practical.</a:t>
+              <a:t>• AI project teams should begin by asking whether the proposed use involves.</a:t>
             </a:r>
             <a:endParaRPr lang="en-US" sz="1920" dirty="0"/>
           </a:p>
@@ -6692,7 +6229,7 @@
                 <a:ea typeface="Aptos" pitchFamily="34" charset="-122"/>
                 <a:cs typeface="Aptos" pitchFamily="34" charset="-120"/>
               </a:rPr>
-              <a:t>• CARE stands for Collective Benefit, Authority to Control, Responsibility,.</a:t>
+              <a:t>• This question should be asked during use case intake, not after a data set.</a:t>
             </a:r>
             <a:endParaRPr lang="en-US" sz="1920" dirty="0"/>
           </a:p>
@@ -6709,7 +6246,7 @@
                 <a:ea typeface="Aptos" pitchFamily="34" charset="-122"/>
                 <a:cs typeface="Aptos" pitchFamily="34" charset="-120"/>
               </a:rPr>
-              <a:t>• These principles complement FAIR data practices by adding attention to.</a:t>
+              <a:t>• The answer may not be obvious because Tribal relevance can appear through.</a:t>
             </a:r>
             <a:endParaRPr lang="en-US" sz="1920" dirty="0"/>
           </a:p>
@@ -6816,7 +6353,7 @@
                 <a:ea typeface="Aptos" pitchFamily="34" charset="-122"/>
                 <a:cs typeface="Aptos" pitchFamily="34" charset="-120"/>
               </a:rPr>
-              <a:t>The CARE Principles for Indigenous Data Governance provide a practical framework.</a:t>
+              <a:t>AI project teams should begin by asking whether the proposed use involves Tribal.</a:t>
             </a:r>
             <a:endParaRPr lang="en-US" sz="1220" dirty="0"/>
           </a:p>
@@ -6923,7 +6460,7 @@
                 <a:ea typeface="Aptos" pitchFamily="34" charset="-122"/>
                 <a:cs typeface="Aptos" pitchFamily="34" charset="-120"/>
               </a:rPr>
-              <a:t>The CARE Principles for Indigenous Data Governance.</a:t>
+              <a:t>AI project teams should begin by asking whether.</a:t>
             </a:r>
             <a:endParaRPr lang="en-US" sz="1140" dirty="0"/>
           </a:p>
@@ -6940,7 +6477,7 @@
                 <a:ea typeface="Aptos" pitchFamily="34" charset="-122"/>
                 <a:cs typeface="Aptos" pitchFamily="34" charset="-120"/>
               </a:rPr>
-              <a:t>These principles complement FAIR data practices by.</a:t>
+              <a:t>The answer may not be obvious because Tribal.</a:t>
             </a:r>
             <a:endParaRPr lang="en-US" sz="1140" dirty="0"/>
           </a:p>
@@ -6957,7 +6494,7 @@
                 <a:ea typeface="Aptos" pitchFamily="34" charset="-122"/>
                 <a:cs typeface="Aptos" pitchFamily="34" charset="-120"/>
               </a:rPr>
-              <a:t>For AI projects, CARE can be used as a review lens.</a:t>
+              <a:t>If the answer is uncertain, the team should treat.</a:t>
             </a:r>
             <a:endParaRPr lang="en-US" sz="1140" dirty="0"/>
           </a:p>
@@ -7343,7 +6880,7 @@
                 <a:ea typeface="Aptos Display" pitchFamily="34" charset="-122"/>
                 <a:cs typeface="Aptos Display" pitchFamily="34" charset="-120"/>
               </a:rPr>
-              <a:t>Public Health Example</a:t>
+              <a:t>Technical, Programmatic, and Operational Deep Dive Continued</a:t>
             </a:r>
             <a:endParaRPr lang="en-US" sz="3400" dirty="0"/>
           </a:p>
@@ -7384,7 +6921,7 @@
                 <a:ea typeface="Aptos" pitchFamily="34" charset="-122"/>
                 <a:cs typeface="Aptos" pitchFamily="34" charset="-120"/>
               </a:rPr>
-              <a:t>• A state health department wants to develop an AI-assisted analytics workflow.</a:t>
+              <a:t>• AI teams should not infer Tribal affiliation from residential location, ZIP.</a:t>
             </a:r>
             <a:endParaRPr lang="en-US" sz="1920" dirty="0"/>
           </a:p>
@@ -7401,7 +6938,7 @@
                 <a:ea typeface="Aptos" pitchFamily="34" charset="-122"/>
                 <a:cs typeface="Aptos" pitchFamily="34" charset="-120"/>
               </a:rPr>
-              <a:t>• The initial technical design includes free-text chief complaint data,.</a:t>
+              <a:t>• Proxy inference can create privacy risk, misclassification, and community.</a:t>
             </a:r>
             <a:endParaRPr lang="en-US" sz="1920" dirty="0"/>
           </a:p>
@@ -7418,7 +6955,7 @@
                 <a:ea typeface="Aptos" pitchFamily="34" charset="-122"/>
                 <a:cs typeface="Aptos" pitchFamily="34" charset="-120"/>
               </a:rPr>
-              <a:t>• Several counties include Tribal lands, and some small-area summaries could.</a:t>
+              <a:t>• It can also undermine Tribal authority if outside organizations create.</a:t>
             </a:r>
             <a:endParaRPr lang="en-US" sz="1920" dirty="0"/>
           </a:p>
@@ -7525,7 +7062,7 @@
                 <a:ea typeface="Aptos" pitchFamily="34" charset="-122"/>
                 <a:cs typeface="Aptos" pitchFamily="34" charset="-120"/>
               </a:rPr>
-              <a:t>A state health department wants to develop an AI-assisted analytics workflow to.</a:t>
+              <a:t>AI teams should not infer Tribal affiliation from residential location, ZIP.</a:t>
             </a:r>
             <a:endParaRPr lang="en-US" sz="1220" dirty="0"/>
           </a:p>
@@ -7632,7 +7169,7 @@
                 <a:ea typeface="Aptos" pitchFamily="34" charset="-122"/>
                 <a:cs typeface="Aptos" pitchFamily="34" charset="-120"/>
               </a:rPr>
-              <a:t>A state health department wants to develop an.</a:t>
+              <a:t>AI teams should not infer Tribal affiliation from.</a:t>
             </a:r>
             <a:endParaRPr lang="en-US" sz="1140" dirty="0"/>
           </a:p>
@@ -7649,7 +7186,7 @@
                 <a:ea typeface="Aptos" pitchFamily="34" charset="-122"/>
                 <a:cs typeface="Aptos" pitchFamily="34" charset="-120"/>
               </a:rPr>
-              <a:t>The initial technical design includes free-text.</a:t>
+              <a:t>It can also undermine Tribal authority if outside.</a:t>
             </a:r>
             <a:endParaRPr lang="en-US" sz="1140" dirty="0"/>
           </a:p>
@@ -7666,7 +7203,7 @@
                 <a:ea typeface="Aptos" pitchFamily="34" charset="-122"/>
                 <a:cs typeface="Aptos" pitchFamily="34" charset="-120"/>
               </a:rPr>
-              <a:t>Several counties include Tribal lands, and some.</a:t>
+              <a:t>If affiliation or Tribal relevance is needed, the.</a:t>
             </a:r>
             <a:endParaRPr lang="en-US" sz="1140" dirty="0"/>
           </a:p>
@@ -8052,7 +7589,7 @@
                 <a:ea typeface="Aptos Display" pitchFamily="34" charset="-122"/>
                 <a:cs typeface="Aptos Display" pitchFamily="34" charset="-120"/>
               </a:rPr>
-              <a:t>Technical, Leadership, and Operational Deep Dive</a:t>
+              <a:t>Technical, Programmatic, and Operational Deep Dive Continued</a:t>
             </a:r>
             <a:endParaRPr lang="en-US" sz="3400" dirty="0"/>
           </a:p>
@@ -8093,7 +7630,7 @@
                 <a:ea typeface="Aptos" pitchFamily="34" charset="-122"/>
                 <a:cs typeface="Aptos" pitchFamily="34" charset="-120"/>
               </a:rPr>
-              <a:t>• AI project teams should begin by asking whether the proposed use involves.</a:t>
+              <a:t>• Communication and dissemination require special care because AI outputs can.</a:t>
             </a:r>
             <a:endParaRPr lang="en-US" sz="1920" dirty="0"/>
           </a:p>
@@ -8110,7 +7647,7 @@
                 <a:ea typeface="Aptos" pitchFamily="34" charset="-122"/>
                 <a:cs typeface="Aptos" pitchFamily="34" charset="-120"/>
               </a:rPr>
-              <a:t>• This question should be asked during use case intake, not after a data set.</a:t>
+              <a:t>• Public-facing summaries, dashboards, maps, chatbots, and reports may create.</a:t>
             </a:r>
             <a:endParaRPr lang="en-US" sz="1920" dirty="0"/>
           </a:p>
@@ -8127,7 +7664,7 @@
                 <a:ea typeface="Aptos" pitchFamily="34" charset="-122"/>
                 <a:cs typeface="Aptos" pitchFamily="34" charset="-120"/>
               </a:rPr>
-              <a:t>• The answer may not be obvious because Tribal relevance can appear through.</a:t>
+              <a:t>• Tribal partners may require pre-review of reports, presentations,.</a:t>
             </a:r>
             <a:endParaRPr lang="en-US" sz="1920" dirty="0"/>
           </a:p>
@@ -8234,7 +7771,7 @@
                 <a:ea typeface="Aptos" pitchFamily="34" charset="-122"/>
                 <a:cs typeface="Aptos" pitchFamily="34" charset="-120"/>
               </a:rPr>
-              <a:t>AI project teams should begin by asking whether the proposed use involves Tribal.</a:t>
+              <a:t>Communication and dissemination require special care because AI outputs can be.</a:t>
             </a:r>
             <a:endParaRPr lang="en-US" sz="1220" dirty="0"/>
           </a:p>
@@ -8341,7 +7878,7 @@
                 <a:ea typeface="Aptos" pitchFamily="34" charset="-122"/>
                 <a:cs typeface="Aptos" pitchFamily="34" charset="-120"/>
               </a:rPr>
-              <a:t>AI project teams should begin by asking whether.</a:t>
+              <a:t>Communication and dissemination require special.</a:t>
             </a:r>
             <a:endParaRPr lang="en-US" sz="1140" dirty="0"/>
           </a:p>
@@ -8358,7 +7895,7 @@
                 <a:ea typeface="Aptos" pitchFamily="34" charset="-122"/>
                 <a:cs typeface="Aptos" pitchFamily="34" charset="-120"/>
               </a:rPr>
-              <a:t>The answer may not be obvious because Tribal.</a:t>
+              <a:t>Public-facing summaries, dashboards, maps,.</a:t>
             </a:r>
             <a:endParaRPr lang="en-US" sz="1140" dirty="0"/>
           </a:p>
@@ -8375,7 +7912,7 @@
                 <a:ea typeface="Aptos" pitchFamily="34" charset="-122"/>
                 <a:cs typeface="Aptos" pitchFamily="34" charset="-120"/>
               </a:rPr>
-              <a:t>If the answer is uncertain, the team should treat.</a:t>
+              <a:t>Tribal partners may require pre-review of reports,.</a:t>
             </a:r>
             <a:endParaRPr lang="en-US" sz="1140" dirty="0"/>
           </a:p>
@@ -8761,7 +8298,7 @@
                 <a:ea typeface="Aptos Display" pitchFamily="34" charset="-122"/>
                 <a:cs typeface="Aptos Display" pitchFamily="34" charset="-120"/>
               </a:rPr>
-              <a:t>Technical, Leadership, and Operational Deep Dive Continued</a:t>
+              <a:t>Risks, Failure Modes, and Guardrails</a:t>
             </a:r>
             <a:endParaRPr lang="en-US" sz="3400" dirty="0"/>
           </a:p>
@@ -8802,7 +8339,7 @@
                 <a:ea typeface="Aptos" pitchFamily="34" charset="-122"/>
                 <a:cs typeface="Aptos" pitchFamily="34" charset="-120"/>
               </a:rPr>
-              <a:t>• AI teams should not infer Tribal affiliation from residential location, ZIP.</a:t>
+              <a:t>• A major risk is treating Tribal health data as if it were ordinary.</a:t>
             </a:r>
             <a:endParaRPr lang="en-US" sz="1920" dirty="0"/>
           </a:p>
@@ -8819,7 +8356,7 @@
                 <a:ea typeface="Aptos" pitchFamily="34" charset="-122"/>
                 <a:cs typeface="Aptos" pitchFamily="34" charset="-120"/>
               </a:rPr>
-              <a:t>• Proxy inference can create privacy risk, misclassification, and community.</a:t>
+              <a:t>• This can lead to AI development without Tribal consultation, data sharing.</a:t>
             </a:r>
             <a:endParaRPr lang="en-US" sz="1920" dirty="0"/>
           </a:p>
@@ -8836,7 +8373,7 @@
                 <a:ea typeface="Aptos" pitchFamily="34" charset="-122"/>
                 <a:cs typeface="Aptos" pitchFamily="34" charset="-120"/>
               </a:rPr>
-              <a:t>• It can also undermine Tribal authority if outside organizations create.</a:t>
+              <a:t>• The failure mode is often procedural rather than malicious: staff follow.</a:t>
             </a:r>
             <a:endParaRPr lang="en-US" sz="1920" dirty="0"/>
           </a:p>
@@ -8943,7 +8480,7 @@
                 <a:ea typeface="Aptos" pitchFamily="34" charset="-122"/>
                 <a:cs typeface="Aptos" pitchFamily="34" charset="-120"/>
               </a:rPr>
-              <a:t>AI teams should not infer Tribal affiliation from residential location, ZIP.</a:t>
+              <a:t>A major risk is treating Tribal health data as if it were ordinary.</a:t>
             </a:r>
             <a:endParaRPr lang="en-US" sz="1220" dirty="0"/>
           </a:p>
@@ -9050,7 +8587,7 @@
                 <a:ea typeface="Aptos" pitchFamily="34" charset="-122"/>
                 <a:cs typeface="Aptos" pitchFamily="34" charset="-120"/>
               </a:rPr>
-              <a:t>AI teams should not infer Tribal affiliation from.</a:t>
+              <a:t>A major risk is treating Tribal health data as if.</a:t>
             </a:r>
             <a:endParaRPr lang="en-US" sz="1140" dirty="0"/>
           </a:p>
@@ -9067,7 +8604,7 @@
                 <a:ea typeface="Aptos" pitchFamily="34" charset="-122"/>
                 <a:cs typeface="Aptos" pitchFamily="34" charset="-120"/>
               </a:rPr>
-              <a:t>It can also undermine Tribal authority if outside.</a:t>
+              <a:t>This can lead to AI development without Tribal.</a:t>
             </a:r>
             <a:endParaRPr lang="en-US" sz="1140" dirty="0"/>
           </a:p>
@@ -9084,7 +8621,7 @@
                 <a:ea typeface="Aptos" pitchFamily="34" charset="-122"/>
                 <a:cs typeface="Aptos" pitchFamily="34" charset="-120"/>
               </a:rPr>
-              <a:t>If affiliation or Tribal relevance is needed, the.</a:t>
+              <a:t>The failure mode is often procedural rather than.</a:t>
             </a:r>
             <a:endParaRPr lang="en-US" sz="1140" dirty="0"/>
           </a:p>
@@ -9470,7 +9007,7 @@
                 <a:ea typeface="Aptos Display" pitchFamily="34" charset="-122"/>
                 <a:cs typeface="Aptos Display" pitchFamily="34" charset="-120"/>
               </a:rPr>
-              <a:t>Technical, Leadership, and Operational Deep Dive Continued</a:t>
+              <a:t>Risks, Failure Modes, and Guardrails Continued</a:t>
             </a:r>
             <a:endParaRPr lang="en-US" sz="3400" dirty="0"/>
           </a:p>
@@ -9511,7 +9048,7 @@
                 <a:ea typeface="Aptos" pitchFamily="34" charset="-122"/>
                 <a:cs typeface="Aptos" pitchFamily="34" charset="-120"/>
               </a:rPr>
-              <a:t>• Communication and dissemination require special care because AI outputs can.</a:t>
+              <a:t>• A fourth risk is considering equity, accessibility, and community benefit.</a:t>
             </a:r>
             <a:endParaRPr lang="en-US" sz="1920" dirty="0"/>
           </a:p>
@@ -9528,7 +9065,7 @@
                 <a:ea typeface="Aptos" pitchFamily="34" charset="-122"/>
                 <a:cs typeface="Aptos" pitchFamily="34" charset="-120"/>
               </a:rPr>
-              <a:t>• Public-facing summaries, dashboards, maps, chatbots, and reports may create.</a:t>
+              <a:t>• If the project is already funded, contracted, designed, or near deployment.</a:t>
             </a:r>
             <a:endParaRPr lang="en-US" sz="1920" dirty="0"/>
           </a:p>
@@ -9545,7 +9082,7 @@
                 <a:ea typeface="Aptos" pitchFamily="34" charset="-122"/>
                 <a:cs typeface="Aptos" pitchFamily="34" charset="-120"/>
               </a:rPr>
-              <a:t>• Tribal partners may require pre-review of reports, presentations,.</a:t>
+              <a:t>• This can create extractive relationships in which data and expertise flow.</a:t>
             </a:r>
             <a:endParaRPr lang="en-US" sz="1920" dirty="0"/>
           </a:p>
@@ -9652,7 +9189,7 @@
                 <a:ea typeface="Aptos" pitchFamily="34" charset="-122"/>
                 <a:cs typeface="Aptos" pitchFamily="34" charset="-120"/>
               </a:rPr>
-              <a:t>Communication and dissemination require special care because AI outputs can be.</a:t>
+              <a:t>A fourth risk is considering equity, accessibility, and community benefit too.</a:t>
             </a:r>
             <a:endParaRPr lang="en-US" sz="1220" dirty="0"/>
           </a:p>
@@ -9759,7 +9296,7 @@
                 <a:ea typeface="Aptos" pitchFamily="34" charset="-122"/>
                 <a:cs typeface="Aptos" pitchFamily="34" charset="-120"/>
               </a:rPr>
-              <a:t>Communication and dissemination require special.</a:t>
+              <a:t>If the project is already funded, contracted,.</a:t>
             </a:r>
             <a:endParaRPr lang="en-US" sz="1140" dirty="0"/>
           </a:p>
@@ -9776,7 +9313,7 @@
                 <a:ea typeface="Aptos" pitchFamily="34" charset="-122"/>
                 <a:cs typeface="Aptos" pitchFamily="34" charset="-120"/>
               </a:rPr>
-              <a:t>Public-facing summaries, dashboards, maps,.</a:t>
+              <a:t>This can create extractive relationships in which.</a:t>
             </a:r>
             <a:endParaRPr lang="en-US" sz="1140" dirty="0"/>
           </a:p>
@@ -9793,7 +9330,7 @@
                 <a:ea typeface="Aptos" pitchFamily="34" charset="-122"/>
                 <a:cs typeface="Aptos" pitchFamily="34" charset="-120"/>
               </a:rPr>
-              <a:t>Tribal partners may require pre-review of reports,.</a:t>
+              <a:t>The guardrail is to define community benefit,.</a:t>
             </a:r>
             <a:endParaRPr lang="en-US" sz="1140" dirty="0"/>
           </a:p>
@@ -10179,7 +9716,7 @@
                 <a:ea typeface="Aptos Display" pitchFamily="34" charset="-122"/>
                 <a:cs typeface="Aptos Display" pitchFamily="34" charset="-120"/>
               </a:rPr>
-              <a:t>Risks, Failure Modes, and Guardrails</a:t>
+              <a:t>Application to AI-Supported Workflows</a:t>
             </a:r>
             <a:endParaRPr lang="en-US" sz="3400" dirty="0"/>
           </a:p>
@@ -10220,7 +9757,7 @@
                 <a:ea typeface="Aptos" pitchFamily="34" charset="-122"/>
                 <a:cs typeface="Aptos" pitchFamily="34" charset="-120"/>
               </a:rPr>
-              <a:t>• A major risk is treating Tribal health data as if it were ordinary.</a:t>
+              <a:t>• For AI use case intake, teams should add screening questions that identify.</a:t>
             </a:r>
             <a:endParaRPr lang="en-US" sz="1920" dirty="0"/>
           </a:p>
@@ -10237,7 +9774,7 @@
                 <a:ea typeface="Aptos" pitchFamily="34" charset="-122"/>
                 <a:cs typeface="Aptos" pitchFamily="34" charset="-120"/>
               </a:rPr>
-              <a:t>• This can lead to AI development without Tribal consultation, data sharing.</a:t>
+              <a:t>• The intake form should require the proposer to identify known Tribal.</a:t>
             </a:r>
             <a:endParaRPr lang="en-US" sz="1920" dirty="0"/>
           </a:p>
@@ -10254,7 +9791,7 @@
                 <a:ea typeface="Aptos" pitchFamily="34" charset="-122"/>
                 <a:cs typeface="Aptos" pitchFamily="34" charset="-120"/>
               </a:rPr>
-              <a:t>• The failure mode is often procedural rather than malicious: staff follow.</a:t>
+              <a:t>• A project should not advance to procurement, model development, pilot.</a:t>
             </a:r>
             <a:endParaRPr lang="en-US" sz="1920" dirty="0"/>
           </a:p>
@@ -10361,7 +9898,7 @@
                 <a:ea typeface="Aptos" pitchFamily="34" charset="-122"/>
                 <a:cs typeface="Aptos" pitchFamily="34" charset="-120"/>
               </a:rPr>
-              <a:t>A major risk is treating Tribal health data as if it were ordinary.</a:t>
+              <a:t>For AI use case intake, teams should add screening questions that identify.</a:t>
             </a:r>
             <a:endParaRPr lang="en-US" sz="1220" dirty="0"/>
           </a:p>
@@ -10468,7 +10005,7 @@
                 <a:ea typeface="Aptos" pitchFamily="34" charset="-122"/>
                 <a:cs typeface="Aptos" pitchFamily="34" charset="-120"/>
               </a:rPr>
-              <a:t>A major risk is treating Tribal health data as if.</a:t>
+              <a:t>For AI use case intake, teams should add screening.</a:t>
             </a:r>
             <a:endParaRPr lang="en-US" sz="1140" dirty="0"/>
           </a:p>
@@ -10485,7 +10022,7 @@
                 <a:ea typeface="Aptos" pitchFamily="34" charset="-122"/>
                 <a:cs typeface="Aptos" pitchFamily="34" charset="-120"/>
               </a:rPr>
-              <a:t>This can lead to AI development without Tribal.</a:t>
+              <a:t>The intake form should require the proposer to.</a:t>
             </a:r>
             <a:endParaRPr lang="en-US" sz="1140" dirty="0"/>
           </a:p>
@@ -10502,7 +10039,7 @@
                 <a:ea typeface="Aptos" pitchFamily="34" charset="-122"/>
                 <a:cs typeface="Aptos" pitchFamily="34" charset="-120"/>
               </a:rPr>
-              <a:t>The failure mode is often procedural rather than.</a:t>
+              <a:t>A project should not advance to procurement, model.</a:t>
             </a:r>
             <a:endParaRPr lang="en-US" sz="1140" dirty="0"/>
           </a:p>
@@ -10888,7 +10425,7 @@
                 <a:ea typeface="Aptos Display" pitchFamily="34" charset="-122"/>
                 <a:cs typeface="Aptos Display" pitchFamily="34" charset="-120"/>
               </a:rPr>
-              <a:t>Risks, Failure Modes, and Guardrails Continued</a:t>
+              <a:t>Reflection Questions</a:t>
             </a:r>
             <a:endParaRPr lang="en-US" sz="3400" dirty="0"/>
           </a:p>
@@ -10929,7 +10466,7 @@
                 <a:ea typeface="Aptos" pitchFamily="34" charset="-122"/>
                 <a:cs typeface="Aptos" pitchFamily="34" charset="-120"/>
               </a:rPr>
-              <a:t>• A fourth risk is considering equity, accessibility, and community benefit.</a:t>
+              <a:t>• Before using AI with health data that may involve Tribal Nations or AI/AN.</a:t>
             </a:r>
             <a:endParaRPr lang="en-US" sz="1920" dirty="0"/>
           </a:p>
@@ -10946,7 +10483,7 @@
                 <a:ea typeface="Aptos" pitchFamily="34" charset="-122"/>
                 <a:cs typeface="Aptos" pitchFamily="34" charset="-120"/>
               </a:rPr>
-              <a:t>• If the project is already funded, contracted, designed, or near deployment.</a:t>
+              <a:t>• They should ask whether the project has identified affected Tribal Nations,.</a:t>
             </a:r>
             <a:endParaRPr lang="en-US" sz="1920" dirty="0"/>
           </a:p>
@@ -10963,7 +10500,7 @@
                 <a:ea typeface="Aptos" pitchFamily="34" charset="-122"/>
                 <a:cs typeface="Aptos" pitchFamily="34" charset="-120"/>
               </a:rPr>
-              <a:t>• This can create extractive relationships in which data and expertise flow.</a:t>
+              <a:t>• They should also consider whether the proposed AI use creates community.</a:t>
             </a:r>
             <a:endParaRPr lang="en-US" sz="1920" dirty="0"/>
           </a:p>
@@ -11070,7 +10607,7 @@
                 <a:ea typeface="Aptos" pitchFamily="34" charset="-122"/>
                 <a:cs typeface="Aptos" pitchFamily="34" charset="-120"/>
               </a:rPr>
-              <a:t>A fourth risk is considering equity, accessibility, and community benefit too.</a:t>
+              <a:t>Before using AI with health data that may involve Tribal Nations or AI/AN.</a:t>
             </a:r>
             <a:endParaRPr lang="en-US" sz="1220" dirty="0"/>
           </a:p>
@@ -11177,7 +10714,7 @@
                 <a:ea typeface="Aptos" pitchFamily="34" charset="-122"/>
                 <a:cs typeface="Aptos" pitchFamily="34" charset="-120"/>
               </a:rPr>
-              <a:t>If the project is already funded, contracted,.</a:t>
+              <a:t>Before using AI with health data that may involve.</a:t>
             </a:r>
             <a:endParaRPr lang="en-US" sz="1140" dirty="0"/>
           </a:p>
@@ -11194,7 +10731,7 @@
                 <a:ea typeface="Aptos" pitchFamily="34" charset="-122"/>
                 <a:cs typeface="Aptos" pitchFamily="34" charset="-120"/>
               </a:rPr>
-              <a:t>This can create extractive relationships in which.</a:t>
+              <a:t>They should ask whether the project has identified.</a:t>
             </a:r>
             <a:endParaRPr lang="en-US" sz="1140" dirty="0"/>
           </a:p>
@@ -11211,7 +10748,7 @@
                 <a:ea typeface="Aptos" pitchFamily="34" charset="-122"/>
                 <a:cs typeface="Aptos" pitchFamily="34" charset="-120"/>
               </a:rPr>
-              <a:t>The guardrail is to define community benefit,.</a:t>
+              <a:t>They should also consider whether the proposed AI.</a:t>
             </a:r>
             <a:endParaRPr lang="en-US" sz="1140" dirty="0"/>
           </a:p>
@@ -12199,7 +11736,7 @@
                 <a:ea typeface="Aptos Display" pitchFamily="34" charset="-122"/>
                 <a:cs typeface="Aptos Display" pitchFamily="34" charset="-120"/>
               </a:rPr>
-              <a:t>Application to AI-Supported Workflows</a:t>
+              <a:t>Practical Exercise</a:t>
             </a:r>
             <a:endParaRPr lang="en-US" sz="3400" dirty="0"/>
           </a:p>
@@ -12240,7 +11777,7 @@
                 <a:ea typeface="Aptos" pitchFamily="34" charset="-122"/>
                 <a:cs typeface="Aptos" pitchFamily="34" charset="-120"/>
               </a:rPr>
-              <a:t>• For AI use case intake, teams should add screening questions that identify.</a:t>
+              <a:t>• Select a proposed AI-supported public health project that could involve.</a:t>
             </a:r>
             <a:endParaRPr lang="en-US" sz="1920" dirty="0"/>
           </a:p>
@@ -12257,7 +11794,7 @@
                 <a:ea typeface="Aptos" pitchFamily="34" charset="-122"/>
                 <a:cs typeface="Aptos" pitchFamily="34" charset="-120"/>
               </a:rPr>
-              <a:t>• The intake form should require the proposer to identify known Tribal.</a:t>
+              <a:t>• The project may be a surveillance summary tool, predictive model, automated.</a:t>
             </a:r>
             <a:endParaRPr lang="en-US" sz="1920" dirty="0"/>
           </a:p>
@@ -12274,7 +11811,7 @@
                 <a:ea typeface="Aptos" pitchFamily="34" charset="-122"/>
                 <a:cs typeface="Aptos" pitchFamily="34" charset="-120"/>
               </a:rPr>
-              <a:t>• A project should not advance to procurement, model development, pilot.</a:t>
+              <a:t>• Complete a Tribal sovereignty and Indigenous data governance screening memo.</a:t>
             </a:r>
             <a:endParaRPr lang="en-US" sz="1920" dirty="0"/>
           </a:p>
@@ -12381,7 +11918,7 @@
                 <a:ea typeface="Aptos" pitchFamily="34" charset="-122"/>
                 <a:cs typeface="Aptos" pitchFamily="34" charset="-120"/>
               </a:rPr>
-              <a:t>For AI use case intake, teams should add screening questions that identify.</a:t>
+              <a:t>Select a proposed AI-supported public health project that could involve Tribal.</a:t>
             </a:r>
             <a:endParaRPr lang="en-US" sz="1220" dirty="0"/>
           </a:p>
@@ -12488,7 +12025,7 @@
                 <a:ea typeface="Aptos" pitchFamily="34" charset="-122"/>
                 <a:cs typeface="Aptos" pitchFamily="34" charset="-120"/>
               </a:rPr>
-              <a:t>For AI use case intake, teams should add screening.</a:t>
+              <a:t>Select a proposed AI-supported public health.</a:t>
             </a:r>
             <a:endParaRPr lang="en-US" sz="1140" dirty="0"/>
           </a:p>
@@ -12505,7 +12042,7 @@
                 <a:ea typeface="Aptos" pitchFamily="34" charset="-122"/>
                 <a:cs typeface="Aptos" pitchFamily="34" charset="-120"/>
               </a:rPr>
-              <a:t>The intake form should require the proposer to.</a:t>
+              <a:t>The project may be a surveillance summary tool,.</a:t>
             </a:r>
             <a:endParaRPr lang="en-US" sz="1140" dirty="0"/>
           </a:p>
@@ -12522,7 +12059,7 @@
                 <a:ea typeface="Aptos" pitchFamily="34" charset="-122"/>
                 <a:cs typeface="Aptos" pitchFamily="34" charset="-120"/>
               </a:rPr>
-              <a:t>A project should not advance to procurement, model.</a:t>
+              <a:t>The memo should identify the public health.</a:t>
             </a:r>
             <a:endParaRPr lang="en-US" sz="1140" dirty="0"/>
           </a:p>
@@ -12629,7 +12166,7 @@
                 <a:ea typeface="Aptos" pitchFamily="34" charset="-122"/>
                 <a:cs typeface="Aptos" pitchFamily="34" charset="-120"/>
               </a:rPr>
-              <a:t>Translate this concept into clear decision rights, review steps, documentation.</a:t>
+              <a:t>Use the assignment to test whether you can explain the concept, apply it to a.</a:t>
             </a:r>
             <a:endParaRPr lang="en-US" sz="1220" dirty="0"/>
           </a:p>
@@ -12908,7 +12445,7 @@
                 <a:ea typeface="Aptos Display" pitchFamily="34" charset="-122"/>
                 <a:cs typeface="Aptos Display" pitchFamily="34" charset="-120"/>
               </a:rPr>
-              <a:t>Reflection Questions</a:t>
+              <a:t>Expected Artifact or Evidence</a:t>
             </a:r>
             <a:endParaRPr lang="en-US" sz="3400" dirty="0"/>
           </a:p>
@@ -12949,7 +12486,7 @@
                 <a:ea typeface="Aptos" pitchFamily="34" charset="-122"/>
                 <a:cs typeface="Aptos" pitchFamily="34" charset="-120"/>
               </a:rPr>
-              <a:t>• Before using AI with health data that may involve Tribal Nations or AI/AN.</a:t>
+              <a:t>• The expected artifact is a Tribal Sovereignty and Indigenous Data Governance.</a:t>
             </a:r>
             <a:endParaRPr lang="en-US" sz="1920" dirty="0"/>
           </a:p>
@@ -12966,7 +12503,7 @@
                 <a:ea typeface="Aptos" pitchFamily="34" charset="-122"/>
                 <a:cs typeface="Aptos" pitchFamily="34" charset="-120"/>
               </a:rPr>
-              <a:t>• They should ask whether the project has identified affected Tribal Nations,.</a:t>
+              <a:t>• The memo should be complete enough for a supervisor, AI governance body,.</a:t>
             </a:r>
             <a:endParaRPr lang="en-US" sz="1920" dirty="0"/>
           </a:p>
@@ -12983,7 +12520,7 @@
                 <a:ea typeface="Aptos" pitchFamily="34" charset="-122"/>
                 <a:cs typeface="Aptos" pitchFamily="34" charset="-120"/>
               </a:rPr>
-              <a:t>• They should also consider whether the proposed AI use creates community.</a:t>
+              <a:t>• It should distinguish known facts from assumptions and identify what cannot.</a:t>
             </a:r>
             <a:endParaRPr lang="en-US" sz="1920" dirty="0"/>
           </a:p>
@@ -13090,7 +12627,7 @@
                 <a:ea typeface="Aptos" pitchFamily="34" charset="-122"/>
                 <a:cs typeface="Aptos" pitchFamily="34" charset="-120"/>
               </a:rPr>
-              <a:t>Before using AI with health data that may involve Tribal Nations or AI/AN.</a:t>
+              <a:t>The expected artifact is a Tribal Sovereignty and Indigenous Data Governance.</a:t>
             </a:r>
             <a:endParaRPr lang="en-US" sz="1220" dirty="0"/>
           </a:p>
@@ -13197,7 +12734,7 @@
                 <a:ea typeface="Aptos" pitchFamily="34" charset="-122"/>
                 <a:cs typeface="Aptos" pitchFamily="34" charset="-120"/>
               </a:rPr>
-              <a:t>Before using AI with health data that may involve.</a:t>
+              <a:t>The expected artifact is a Tribal Sovereignty and.</a:t>
             </a:r>
             <a:endParaRPr lang="en-US" sz="1140" dirty="0"/>
           </a:p>
@@ -13214,7 +12751,7 @@
                 <a:ea typeface="Aptos" pitchFamily="34" charset="-122"/>
                 <a:cs typeface="Aptos" pitchFamily="34" charset="-120"/>
               </a:rPr>
-              <a:t>They should ask whether the project has identified.</a:t>
+              <a:t>The memo should be complete enough for a.</a:t>
             </a:r>
             <a:endParaRPr lang="en-US" sz="1140" dirty="0"/>
           </a:p>
@@ -13231,7 +12768,7 @@
                 <a:ea typeface="Aptos" pitchFamily="34" charset="-122"/>
                 <a:cs typeface="Aptos" pitchFamily="34" charset="-120"/>
               </a:rPr>
-              <a:t>They should also consider whether the proposed AI.</a:t>
+              <a:t>It should distinguish known facts from assumptions.</a:t>
             </a:r>
             <a:endParaRPr lang="en-US" sz="1140" dirty="0"/>
           </a:p>
@@ -13617,7 +13154,7 @@
                 <a:ea typeface="Aptos Display" pitchFamily="34" charset="-122"/>
                 <a:cs typeface="Aptos Display" pitchFamily="34" charset="-120"/>
               </a:rPr>
-              <a:t>Practical Exercise</a:t>
+              <a:t>Expected Assignment</a:t>
             </a:r>
             <a:endParaRPr lang="en-US" sz="3400" dirty="0"/>
           </a:p>
@@ -13658,41 +13195,7 @@
                 <a:ea typeface="Aptos" pitchFamily="34" charset="-122"/>
                 <a:cs typeface="Aptos" pitchFamily="34" charset="-120"/>
               </a:rPr>
-              <a:t>• Select a proposed AI-supported public health project that could involve.</a:t>
-            </a:r>
-            <a:endParaRPr lang="en-US" sz="1920" dirty="0"/>
-          </a:p>
-          <a:p>
-            <a:pPr indent="0" marL="0">
-              <a:buNone/>
-            </a:pPr>
-            <a:r>
-              <a:rPr lang="en-US" sz="1920" dirty="0">
-                <a:solidFill>
-                  <a:srgbClr val="003A63"/>
-                </a:solidFill>
-                <a:latin typeface="Aptos" pitchFamily="34" charset="0"/>
-                <a:ea typeface="Aptos" pitchFamily="34" charset="-122"/>
-                <a:cs typeface="Aptos" pitchFamily="34" charset="-120"/>
-              </a:rPr>
-              <a:t>• The project may be a surveillance summary tool, predictive model, automated.</a:t>
-            </a:r>
-            <a:endParaRPr lang="en-US" sz="1920" dirty="0"/>
-          </a:p>
-          <a:p>
-            <a:pPr indent="0" marL="0">
-              <a:buNone/>
-            </a:pPr>
-            <a:r>
-              <a:rPr lang="en-US" sz="1920" dirty="0">
-                <a:solidFill>
-                  <a:srgbClr val="003A63"/>
-                </a:solidFill>
-                <a:latin typeface="Aptos" pitchFamily="34" charset="0"/>
-                <a:ea typeface="Aptos" pitchFamily="34" charset="-122"/>
-                <a:cs typeface="Aptos" pitchFamily="34" charset="-120"/>
-              </a:rPr>
-              <a:t>• Complete a Tribal sovereignty and Indigenous data governance screening memo.</a:t>
+              <a:t>• Tribal Sovereignty and Indigenous Data Governance Screening Memo</a:t>
             </a:r>
             <a:endParaRPr lang="en-US" sz="1920" dirty="0"/>
           </a:p>
@@ -13799,7 +13302,7 @@
                 <a:ea typeface="Aptos" pitchFamily="34" charset="-122"/>
                 <a:cs typeface="Aptos" pitchFamily="34" charset="-120"/>
               </a:rPr>
-              <a:t>Select a proposed AI-supported public health project that could involve Tribal.</a:t>
+              <a:t>Tribal Sovereignty and Indigenous Data Governance Screening Memo</a:t>
             </a:r>
             <a:endParaRPr lang="en-US" sz="1220" dirty="0"/>
           </a:p>
@@ -13906,41 +13409,7 @@
                 <a:ea typeface="Aptos" pitchFamily="34" charset="-122"/>
                 <a:cs typeface="Aptos" pitchFamily="34" charset="-120"/>
               </a:rPr>
-              <a:t>Select a proposed AI-supported public health.</a:t>
-            </a:r>
-            <a:endParaRPr lang="en-US" sz="1140" dirty="0"/>
-          </a:p>
-          <a:p>
-            <a:pPr indent="0" marL="0">
-              <a:buNone/>
-            </a:pPr>
-            <a:r>
-              <a:rPr lang="en-US" sz="1140" dirty="0">
-                <a:solidFill>
-                  <a:srgbClr val="17364A"/>
-                </a:solidFill>
-                <a:latin typeface="Aptos" pitchFamily="34" charset="0"/>
-                <a:ea typeface="Aptos" pitchFamily="34" charset="-122"/>
-                <a:cs typeface="Aptos" pitchFamily="34" charset="-120"/>
-              </a:rPr>
-              <a:t>The project may be a surveillance summary tool,.</a:t>
-            </a:r>
-            <a:endParaRPr lang="en-US" sz="1140" dirty="0"/>
-          </a:p>
-          <a:p>
-            <a:pPr indent="0" marL="0">
-              <a:buNone/>
-            </a:pPr>
-            <a:r>
-              <a:rPr lang="en-US" sz="1140" dirty="0">
-                <a:solidFill>
-                  <a:srgbClr val="17364A"/>
-                </a:solidFill>
-                <a:latin typeface="Aptos" pitchFamily="34" charset="0"/>
-                <a:ea typeface="Aptos" pitchFamily="34" charset="-122"/>
-                <a:cs typeface="Aptos" pitchFamily="34" charset="-120"/>
-              </a:rPr>
-              <a:t>The memo should identify the public health.</a:t>
+              <a:t>Tribal Sovereignty and Indigenous Data Governance.</a:t>
             </a:r>
             <a:endParaRPr lang="en-US" sz="1140" dirty="0"/>
           </a:p>
@@ -14326,7 +13795,7 @@
                 <a:ea typeface="Aptos Display" pitchFamily="34" charset="-122"/>
                 <a:cs typeface="Aptos Display" pitchFamily="34" charset="-120"/>
               </a:rPr>
-              <a:t>Expected Artifact or Evidence</a:t>
+              <a:t>Knowledge Check</a:t>
             </a:r>
             <a:endParaRPr lang="en-US" sz="3400" dirty="0"/>
           </a:p>
@@ -14367,7 +13836,7 @@
                 <a:ea typeface="Aptos" pitchFamily="34" charset="-122"/>
                 <a:cs typeface="Aptos" pitchFamily="34" charset="-120"/>
               </a:rPr>
-              <a:t>• The expected artifact is a Tribal Sovereignty and Indigenous Data Governance.</a:t>
+              <a:t>1. Why should Tribal sovereignty be considered before an AI project with.</a:t>
             </a:r>
             <a:endParaRPr lang="en-US" sz="1920" dirty="0"/>
           </a:p>
@@ -14384,7 +13853,7 @@
                 <a:ea typeface="Aptos" pitchFamily="34" charset="-122"/>
                 <a:cs typeface="Aptos" pitchFamily="34" charset="-120"/>
               </a:rPr>
-              <a:t>• The memo should be complete enough for a supervisor, AI governance body,.</a:t>
+              <a:t>2. Which statement best reflects Indigenous Data Sovereignty?</a:t>
             </a:r>
             <a:endParaRPr lang="en-US" sz="1920" dirty="0"/>
           </a:p>
@@ -14401,7 +13870,7 @@
                 <a:ea typeface="Aptos" pitchFamily="34" charset="-122"/>
                 <a:cs typeface="Aptos" pitchFamily="34" charset="-120"/>
               </a:rPr>
-              <a:t>• It should distinguish known facts from assumptions and identify what cannot.</a:t>
+              <a:t>3. Which AI practice should be avoided unless explicitly approved through.</a:t>
             </a:r>
             <a:endParaRPr lang="en-US" sz="1920" dirty="0"/>
           </a:p>
@@ -14508,7 +13977,7 @@
                 <a:ea typeface="Aptos" pitchFamily="34" charset="-122"/>
                 <a:cs typeface="Aptos" pitchFamily="34" charset="-120"/>
               </a:rPr>
-              <a:t>The expected artifact is a Tribal Sovereignty and Indigenous Data Governance.</a:t>
+              <a:t>Why should Tribal sovereignty be considered before an AI project with health.</a:t>
             </a:r>
             <a:endParaRPr lang="en-US" sz="1220" dirty="0"/>
           </a:p>
@@ -14615,41 +14084,7 @@
                 <a:ea typeface="Aptos" pitchFamily="34" charset="-122"/>
                 <a:cs typeface="Aptos" pitchFamily="34" charset="-120"/>
               </a:rPr>
-              <a:t>The expected artifact is a Tribal Sovereignty and.</a:t>
-            </a:r>
-            <a:endParaRPr lang="en-US" sz="1140" dirty="0"/>
-          </a:p>
-          <a:p>
-            <a:pPr indent="0" marL="0">
-              <a:buNone/>
-            </a:pPr>
-            <a:r>
-              <a:rPr lang="en-US" sz="1140" dirty="0">
-                <a:solidFill>
-                  <a:srgbClr val="17364A"/>
-                </a:solidFill>
-                <a:latin typeface="Aptos" pitchFamily="34" charset="0"/>
-                <a:ea typeface="Aptos" pitchFamily="34" charset="-122"/>
-                <a:cs typeface="Aptos" pitchFamily="34" charset="-120"/>
-              </a:rPr>
-              <a:t>The memo should be complete enough for a.</a:t>
-            </a:r>
-            <a:endParaRPr lang="en-US" sz="1140" dirty="0"/>
-          </a:p>
-          <a:p>
-            <a:pPr indent="0" marL="0">
-              <a:buNone/>
-            </a:pPr>
-            <a:r>
-              <a:rPr lang="en-US" sz="1140" dirty="0">
-                <a:solidFill>
-                  <a:srgbClr val="17364A"/>
-                </a:solidFill>
-                <a:latin typeface="Aptos" pitchFamily="34" charset="0"/>
-                <a:ea typeface="Aptos" pitchFamily="34" charset="-122"/>
-                <a:cs typeface="Aptos" pitchFamily="34" charset="-120"/>
-              </a:rPr>
-              <a:t>It should distinguish known facts from assumptions.</a:t>
+              <a:t>Why should Tribal sovereignty be considered before.</a:t>
             </a:r>
             <a:endParaRPr lang="en-US" sz="1140" dirty="0"/>
           </a:p>
@@ -14756,7 +14191,7 @@
                 <a:ea typeface="Aptos" pitchFamily="34" charset="-122"/>
                 <a:cs typeface="Aptos" pitchFamily="34" charset="-120"/>
               </a:rPr>
-              <a:t>Translate this concept into clear decision rights, review steps, documentation.</a:t>
+              <a:t>Use the assignment to test whether you can explain the concept, apply it to a.</a:t>
             </a:r>
             <a:endParaRPr lang="en-US" sz="1220" dirty="0"/>
           </a:p>
@@ -15035,7 +14470,7 @@
                 <a:ea typeface="Aptos Display" pitchFamily="34" charset="-122"/>
                 <a:cs typeface="Aptos Display" pitchFamily="34" charset="-120"/>
               </a:rPr>
-              <a:t>References and Resources for Additional Information</a:t>
+              <a:t>References and Resources</a:t>
             </a:r>
             <a:endParaRPr lang="en-US" sz="3400" dirty="0"/>
           </a:p>
@@ -15076,7 +14511,7 @@
                 <a:ea typeface="Aptos" pitchFamily="34" charset="-122"/>
                 <a:cs typeface="Aptos" pitchFamily="34" charset="-120"/>
               </a:rPr>
-              <a:t>• Global Indigenous Data Alliance.</a:t>
+              <a:t>• Global Indigenous Data Alliance. CARE Principles for Indigenous Data.</a:t>
             </a:r>
             <a:endParaRPr lang="en-US" sz="1920" dirty="0"/>
           </a:p>
@@ -15093,7 +14528,7 @@
                 <a:ea typeface="Aptos" pitchFamily="34" charset="-122"/>
                 <a:cs typeface="Aptos" pitchFamily="34" charset="-120"/>
               </a:rPr>
-              <a:t>• CARE Principles for Indigenous Data Governance..</a:t>
+              <a:t>• National Institutes of Health. NOT-OD-22-214: Supplemental Information to.</a:t>
             </a:r>
             <a:endParaRPr lang="en-US" sz="1920" dirty="0"/>
           </a:p>
@@ -15110,7 +14545,7 @@
                 <a:ea typeface="Aptos" pitchFamily="34" charset="-122"/>
                 <a:cs typeface="Aptos" pitchFamily="34" charset="-120"/>
               </a:rPr>
-              <a:t>• National Institutes of Health.</a:t>
+              <a:t>• National Institutes of Health Tribal Health Research Office. Tribal Health.</a:t>
             </a:r>
             <a:endParaRPr lang="en-US" sz="1920" dirty="0"/>
           </a:p>
@@ -15217,7 +14652,7 @@
                 <a:ea typeface="Aptos" pitchFamily="34" charset="-122"/>
                 <a:cs typeface="Aptos" pitchFamily="34" charset="-120"/>
               </a:rPr>
-              <a:t>Global Indigenous Data Alliance.</a:t>
+              <a:t>Global Indigenous Data Alliance. CARE Principles for Indigenous Data Governance.:.</a:t>
             </a:r>
             <a:endParaRPr lang="en-US" sz="1220" dirty="0"/>
           </a:p>
@@ -15324,7 +14759,7 @@
                 <a:ea typeface="Aptos" pitchFamily="34" charset="-122"/>
                 <a:cs typeface="Aptos" pitchFamily="34" charset="-120"/>
               </a:rPr>
-              <a:t>NOT-OD-22-214: Supplemental Information to the NIH.</a:t>
+              <a:t>Global Indigenous Data Alliance.</a:t>
             </a:r>
             <a:endParaRPr lang="en-US" sz="1140" dirty="0"/>
           </a:p>
@@ -15341,7 +14776,7 @@
                 <a:ea typeface="Aptos" pitchFamily="34" charset="-122"/>
                 <a:cs typeface="Aptos" pitchFamily="34" charset="-120"/>
               </a:rPr>
-              <a:t>National Institutes of Health Tribal Health.</a:t>
+              <a:t>CARE Principles for Indigenous Data Governance.:.</a:t>
             </a:r>
             <a:endParaRPr lang="en-US" sz="1140" dirty="0"/>
           </a:p>
@@ -15358,7 +14793,7 @@
                 <a:ea typeface="Aptos" pitchFamily="34" charset="-122"/>
                 <a:cs typeface="Aptos" pitchFamily="34" charset="-120"/>
               </a:rPr>
-              <a:t>Tribal Health Research Office resources..</a:t>
+              <a:t>National Institutes of Health.</a:t>
             </a:r>
             <a:endParaRPr lang="en-US" sz="1140" dirty="0"/>
           </a:p>
@@ -15744,7 +15179,7 @@
                 <a:ea typeface="Aptos Display" pitchFamily="34" charset="-122"/>
                 <a:cs typeface="Aptos Display" pitchFamily="34" charset="-120"/>
               </a:rPr>
-              <a:t>References and Resources for Additional Information Continued</a:t>
+              <a:t>References and Resources Continued</a:t>
             </a:r>
             <a:endParaRPr lang="en-US" sz="3400" dirty="0"/>
           </a:p>
@@ -15785,7 +15220,7 @@
                 <a:ea typeface="Aptos" pitchFamily="34" charset="-122"/>
                 <a:cs typeface="Aptos" pitchFamily="34" charset="-120"/>
               </a:rPr>
-              <a:t>• United States Indigenous Data Sovereignty Network.</a:t>
+              <a:t>• HHS and CDC Tribal consultation resources. Use relevant agency consultation.</a:t>
             </a:r>
             <a:endParaRPr lang="en-US" sz="1920" dirty="0"/>
           </a:p>
@@ -15802,24 +15237,7 @@
                 <a:ea typeface="Aptos" pitchFamily="34" charset="-122"/>
                 <a:cs typeface="Aptos" pitchFamily="34" charset="-120"/>
               </a:rPr>
-              <a:t>• Resources and information on Indigenous Data Sovereignty..</a:t>
-            </a:r>
-            <a:endParaRPr lang="en-US" sz="1920" dirty="0"/>
-          </a:p>
-          <a:p>
-            <a:pPr indent="0" marL="0">
-              <a:buNone/>
-            </a:pPr>
-            <a:r>
-              <a:rPr lang="en-US" sz="1920" dirty="0">
-                <a:solidFill>
-                  <a:srgbClr val="003A63"/>
-                </a:solidFill>
-                <a:latin typeface="Aptos" pitchFamily="34" charset="0"/>
-                <a:ea typeface="Aptos" pitchFamily="34" charset="-122"/>
-                <a:cs typeface="Aptos" pitchFamily="34" charset="-120"/>
-              </a:rPr>
-              <a:t>• All of Us Research Program.</a:t>
+              <a:t>• Brookings. Digital sovereignty and Indigenous Nations resources.:.</a:t>
             </a:r>
             <a:endParaRPr lang="en-US" sz="1920" dirty="0"/>
           </a:p>
@@ -15926,7 +15344,7 @@
                 <a:ea typeface="Aptos" pitchFamily="34" charset="-122"/>
                 <a:cs typeface="Aptos" pitchFamily="34" charset="-120"/>
               </a:rPr>
-              <a:t>United States Indigenous Data Sovereignty Network.</a:t>
+              <a:t>HHS and CDC Tribal consultation resources. Use relevant agency consultation.</a:t>
             </a:r>
             <a:endParaRPr lang="en-US" sz="1220" dirty="0"/>
           </a:p>
@@ -16033,7 +15451,7 @@
                 <a:ea typeface="Aptos" pitchFamily="34" charset="-122"/>
                 <a:cs typeface="Aptos" pitchFamily="34" charset="-120"/>
               </a:rPr>
-              <a:t>Tribal engagement and data use resources..</a:t>
+              <a:t>HHS and CDC Tribal consultation resources.</a:t>
             </a:r>
             <a:endParaRPr lang="en-US" sz="1140" dirty="0"/>
           </a:p>
@@ -16050,7 +15468,7 @@
                 <a:ea typeface="Aptos" pitchFamily="34" charset="-122"/>
                 <a:cs typeface="Aptos" pitchFamily="34" charset="-120"/>
               </a:rPr>
-              <a:t>HHS and CDC Tribal consultation resources.</a:t>
+              <a:t>Use relevant agency consultation policies and.</a:t>
             </a:r>
             <a:endParaRPr lang="en-US" sz="1140" dirty="0"/>
           </a:p>
@@ -16067,2707 +15485,7 @@
                 <a:ea typeface="Aptos" pitchFamily="34" charset="-122"/>
                 <a:cs typeface="Aptos" pitchFamily="34" charset="-120"/>
               </a:rPr>
-              <a:t>Use relevant agency consultation policies and.</a:t>
-            </a:r>
-            <a:endParaRPr lang="en-US" sz="1140" dirty="0"/>
-          </a:p>
-        </p:txBody>
-      </p:sp>
-      <p:sp>
-        <p:nvSpPr>
-          <p:cNvPr id="16" name="Shape 14"/>
-          <p:cNvSpPr/>
-          <p:nvPr/>
-        </p:nvSpPr>
-        <p:spPr>
-          <a:xfrm>
-            <a:off x="7543800" y="4389120"/>
-            <a:ext cx="3611880" cy="1261872"/>
-          </a:xfrm>
-          <a:prstGeom prst="roundRect">
-            <a:avLst>
-              <a:gd name="adj" fmla="val 8696"/>
-            </a:avLst>
-          </a:prstGeom>
-          <a:solidFill>
-            <a:srgbClr val="EAF6F8"/>
-          </a:solidFill>
-          <a:ln w="12700">
-            <a:solidFill>
-              <a:srgbClr val="B9D7E6"/>
-            </a:solidFill>
-            <a:prstDash val="solid"/>
-          </a:ln>
-        </p:spPr>
-      </p:sp>
-      <p:sp>
-        <p:nvSpPr>
-          <p:cNvPr id="17" name="Text 15"/>
-          <p:cNvSpPr/>
-          <p:nvPr/>
-        </p:nvSpPr>
-        <p:spPr>
-          <a:xfrm>
-            <a:off x="7708392" y="4517136"/>
-            <a:ext cx="3282696" cy="228600"/>
-          </a:xfrm>
-          <a:prstGeom prst="rect">
-            <a:avLst/>
-          </a:prstGeom>
-          <a:noFill/>
-          <a:ln/>
-        </p:spPr>
-        <p:txBody>
-          <a:bodyPr wrap="square" lIns="0" tIns="0" rIns="0" bIns="0" rtlCol="0" anchor="ctr"/>
-          <a:lstStyle/>
-          <a:p>
-            <a:pPr indent="0" marL="0">
-              <a:buNone/>
-            </a:pPr>
-            <a:r>
-              <a:rPr lang="en-US" sz="1220" b="1" dirty="0">
-                <a:solidFill>
-                  <a:srgbClr val="0068B7"/>
-                </a:solidFill>
-                <a:latin typeface="Aptos" pitchFamily="34" charset="0"/>
-                <a:ea typeface="Aptos" pitchFamily="34" charset="-122"/>
-                <a:cs typeface="Aptos" pitchFamily="34" charset="-120"/>
-              </a:rPr>
-              <a:t>What to document</a:t>
-            </a:r>
-            <a:endParaRPr lang="en-US" sz="1220" dirty="0"/>
-          </a:p>
-        </p:txBody>
-      </p:sp>
-      <p:sp>
-        <p:nvSpPr>
-          <p:cNvPr id="18" name="Text 16"/>
-          <p:cNvSpPr/>
-          <p:nvPr/>
-        </p:nvSpPr>
-        <p:spPr>
-          <a:xfrm>
-            <a:off x="7708392" y="4828032"/>
-            <a:ext cx="3282696" cy="749808"/>
-          </a:xfrm>
-          <a:prstGeom prst="rect">
-            <a:avLst/>
-          </a:prstGeom>
-          <a:noFill/>
-          <a:ln/>
-        </p:spPr>
-        <p:txBody>
-          <a:bodyPr wrap="square" lIns="254" tIns="254" rIns="254" bIns="254" rtlCol="0" anchor="t">
-            <a:normAutofit/>
-          </a:bodyPr>
-          <a:lstStyle/>
-          <a:p>
-            <a:pPr indent="0" marL="0">
-              <a:buNone/>
-            </a:pPr>
-            <a:r>
-              <a:rPr lang="en-US" sz="1220" dirty="0">
-                <a:solidFill>
-                  <a:srgbClr val="17364A"/>
-                </a:solidFill>
-                <a:latin typeface="Aptos" pitchFamily="34" charset="0"/>
-                <a:ea typeface="Aptos" pitchFamily="34" charset="-122"/>
-                <a:cs typeface="Aptos" pitchFamily="34" charset="-120"/>
-              </a:rPr>
-              <a:t>Translate this concept into clear decision rights, review steps, documentation.</a:t>
-            </a:r>
-            <a:endParaRPr lang="en-US" sz="1220" dirty="0"/>
-          </a:p>
-        </p:txBody>
-      </p:sp>
-    </p:spTree>
-  </p:cSld>
-  <p:clrMapOvr>
-    <a:masterClrMapping/>
-  </p:clrMapOvr>
-</p:sld>
-</file>
-
-<file path=ppt/slides/slide26.xml><?xml version="1.0" encoding="utf-8"?>
-<p:sld xmlns:a="http://schemas.openxmlformats.org/drawingml/2006/main" xmlns:r="http://schemas.openxmlformats.org/officeDocument/2006/relationships" xmlns:p="http://schemas.openxmlformats.org/presentationml/2006/main">
-  <p:cSld name="Slide 26">
-    <p:bg>
-      <p:bgPr>
-        <a:solidFill>
-          <a:srgbClr val="F7FBFD"/>
-        </a:solidFill>
-      </p:bgPr>
-    </p:bg>
-    <p:spTree>
-      <p:nvGrpSpPr>
-        <p:cNvPr id="1" name=""/>
-        <p:cNvGrpSpPr/>
-        <p:nvPr/>
-      </p:nvGrpSpPr>
-      <p:grpSpPr>
-        <a:xfrm>
-          <a:off x="0" y="0"/>
-          <a:ext cx="0" cy="0"/>
-          <a:chOff x="0" y="0"/>
-          <a:chExt cx="0" cy="0"/>
-        </a:xfrm>
-      </p:grpSpPr>
-      <p:sp>
-        <p:nvSpPr>
-          <p:cNvPr id="2" name="Shape 0"/>
-          <p:cNvSpPr/>
-          <p:nvPr/>
-        </p:nvSpPr>
-        <p:spPr>
-          <a:xfrm>
-            <a:off x="0" y="0"/>
-            <a:ext cx="12191695" cy="164592"/>
-          </a:xfrm>
-          <a:prstGeom prst="rect">
-            <a:avLst/>
-          </a:prstGeom>
-          <a:solidFill>
-            <a:srgbClr val="0068B7"/>
-          </a:solidFill>
-          <a:ln w="12700">
-            <a:solidFill>
-              <a:srgbClr val="0068B7"/>
-            </a:solidFill>
-            <a:prstDash val="solid"/>
-          </a:ln>
-        </p:spPr>
-      </p:sp>
-      <p:sp>
-        <p:nvSpPr>
-          <p:cNvPr id="3" name="Shape 1"/>
-          <p:cNvSpPr/>
-          <p:nvPr/>
-        </p:nvSpPr>
-        <p:spPr>
-          <a:xfrm>
-            <a:off x="0" y="164592"/>
-            <a:ext cx="146304" cy="6693408"/>
-          </a:xfrm>
-          <a:prstGeom prst="rect">
-            <a:avLst/>
-          </a:prstGeom>
-          <a:solidFill>
-            <a:srgbClr val="2F8A28"/>
-          </a:solidFill>
-          <a:ln w="12700">
-            <a:solidFill>
-              <a:srgbClr val="2F8A28"/>
-            </a:solidFill>
-            <a:prstDash val="solid"/>
-          </a:ln>
-        </p:spPr>
-      </p:sp>
-      <p:sp>
-        <p:nvSpPr>
-          <p:cNvPr id="4" name="Text 2"/>
-          <p:cNvSpPr/>
-          <p:nvPr/>
-        </p:nvSpPr>
-        <p:spPr>
-          <a:xfrm>
-            <a:off x="502920" y="292608"/>
-            <a:ext cx="10149840" cy="256032"/>
-          </a:xfrm>
-          <a:prstGeom prst="rect">
-            <a:avLst/>
-          </a:prstGeom>
-          <a:noFill/>
-          <a:ln/>
-        </p:spPr>
-        <p:txBody>
-          <a:bodyPr wrap="square" lIns="0" tIns="0" rIns="0" bIns="0" rtlCol="0" anchor="ctr"/>
-          <a:lstStyle/>
-          <a:p>
-            <a:pPr indent="0" marL="0">
-              <a:buNone/>
-            </a:pPr>
-            <a:r>
-              <a:rPr lang="en-US" sz="900" b="1" dirty="0">
-                <a:solidFill>
-                  <a:srgbClr val="5F7181"/>
-                </a:solidFill>
-                <a:latin typeface="Aptos" pitchFamily="34" charset="0"/>
-                <a:ea typeface="Aptos" pitchFamily="34" charset="-122"/>
-                <a:cs typeface="Aptos" pitchFamily="34" charset="-120"/>
-              </a:rPr>
-              <a:t>Respecting Tribal Sovereignty and Indigenous Data Governance in Public Health AI Projects</a:t>
-            </a:r>
-            <a:endParaRPr lang="en-US" sz="900" dirty="0"/>
-          </a:p>
-        </p:txBody>
-      </p:sp>
-      <p:sp>
-        <p:nvSpPr>
-          <p:cNvPr id="5" name="Text 3"/>
-          <p:cNvSpPr/>
-          <p:nvPr/>
-        </p:nvSpPr>
-        <p:spPr>
-          <a:xfrm>
-            <a:off x="502920" y="6537960"/>
-            <a:ext cx="7772400" cy="201168"/>
-          </a:xfrm>
-          <a:prstGeom prst="rect">
-            <a:avLst/>
-          </a:prstGeom>
-          <a:noFill/>
-          <a:ln/>
-        </p:spPr>
-        <p:txBody>
-          <a:bodyPr wrap="square" lIns="0" tIns="0" rIns="0" bIns="0" rtlCol="0" anchor="ctr"/>
-          <a:lstStyle/>
-          <a:p>
-            <a:pPr indent="0" marL="0">
-              <a:buNone/>
-            </a:pPr>
-            <a:r>
-              <a:rPr lang="en-US" sz="800" dirty="0">
-                <a:solidFill>
-                  <a:srgbClr val="5F7181"/>
-                </a:solidFill>
-                <a:latin typeface="Aptos" pitchFamily="34" charset="0"/>
-                <a:ea typeface="Aptos" pitchFamily="34" charset="-122"/>
-                <a:cs typeface="Aptos" pitchFamily="34" charset="-120"/>
-              </a:rPr>
-              <a:t>AI Playbook and Toolkit for Public Health Departments</a:t>
-            </a:r>
-            <a:endParaRPr lang="en-US" sz="800" dirty="0"/>
-          </a:p>
-        </p:txBody>
-      </p:sp>
-      <p:sp>
-        <p:nvSpPr>
-          <p:cNvPr id="6" name="Text 4"/>
-          <p:cNvSpPr/>
-          <p:nvPr/>
-        </p:nvSpPr>
-        <p:spPr>
-          <a:xfrm>
-            <a:off x="9646920" y="6537960"/>
-            <a:ext cx="1965960" cy="201168"/>
-          </a:xfrm>
-          <a:prstGeom prst="rect">
-            <a:avLst/>
-          </a:prstGeom>
-          <a:noFill/>
-          <a:ln/>
-        </p:spPr>
-        <p:txBody>
-          <a:bodyPr wrap="square" lIns="0" tIns="0" rIns="0" bIns="0" rtlCol="0" anchor="ctr"/>
-          <a:lstStyle/>
-          <a:p>
-            <a:pPr algn="r" indent="0" marL="0">
-              <a:buNone/>
-            </a:pPr>
-            <a:r>
-              <a:rPr lang="en-US" sz="800" dirty="0">
-                <a:solidFill>
-                  <a:srgbClr val="5F7181"/>
-                </a:solidFill>
-                <a:latin typeface="Aptos" pitchFamily="34" charset="0"/>
-                <a:ea typeface="Aptos" pitchFamily="34" charset="-122"/>
-                <a:cs typeface="Aptos" pitchFamily="34" charset="-120"/>
-              </a:rPr>
-              <a:t>Copyright Paula Soper</a:t>
-            </a:r>
-            <a:endParaRPr lang="en-US" sz="800" dirty="0"/>
-          </a:p>
-        </p:txBody>
-      </p:sp>
-      <p:sp>
-        <p:nvSpPr>
-          <p:cNvPr id="7" name="Text 5"/>
-          <p:cNvSpPr/>
-          <p:nvPr/>
-        </p:nvSpPr>
-        <p:spPr>
-          <a:xfrm>
-            <a:off x="11137392" y="6510528"/>
-            <a:ext cx="411480" cy="201168"/>
-          </a:xfrm>
-          <a:prstGeom prst="rect">
-            <a:avLst/>
-          </a:prstGeom>
-          <a:noFill/>
-          <a:ln/>
-        </p:spPr>
-        <p:txBody>
-          <a:bodyPr wrap="square" lIns="0" tIns="0" rIns="0" bIns="0" rtlCol="0" anchor="ctr"/>
-          <a:lstStyle/>
-          <a:p>
-            <a:pPr algn="r" indent="0" marL="0">
-              <a:buNone/>
-            </a:pPr>
-            <a:r>
-              <a:rPr lang="en-US" sz="900" dirty="0">
-                <a:solidFill>
-                  <a:srgbClr val="5F7181"/>
-                </a:solidFill>
-                <a:latin typeface="Aptos" pitchFamily="34" charset="0"/>
-                <a:ea typeface="Aptos" pitchFamily="34" charset="-122"/>
-                <a:cs typeface="Aptos" pitchFamily="34" charset="-120"/>
-              </a:rPr>
-              <a:t>26</a:t>
-            </a:r>
-            <a:endParaRPr lang="en-US" sz="900" dirty="0"/>
-          </a:p>
-        </p:txBody>
-      </p:sp>
-      <p:sp>
-        <p:nvSpPr>
-          <p:cNvPr id="8" name="Text 6"/>
-          <p:cNvSpPr/>
-          <p:nvPr/>
-        </p:nvSpPr>
-        <p:spPr>
-          <a:xfrm>
-            <a:off x="640080" y="658368"/>
-            <a:ext cx="10881360" cy="713232"/>
-          </a:xfrm>
-          <a:prstGeom prst="rect">
-            <a:avLst/>
-          </a:prstGeom>
-          <a:noFill/>
-          <a:ln/>
-        </p:spPr>
-        <p:txBody>
-          <a:bodyPr wrap="square" lIns="0" tIns="0" rIns="0" bIns="0" rtlCol="0" anchor="ctr">
-            <a:normAutofit/>
-          </a:bodyPr>
-          <a:lstStyle/>
-          <a:p>
-            <a:pPr indent="0" marL="0">
-              <a:buNone/>
-            </a:pPr>
-            <a:r>
-              <a:rPr lang="en-US" sz="3400" b="1" dirty="0">
-                <a:solidFill>
-                  <a:srgbClr val="003A63"/>
-                </a:solidFill>
-                <a:latin typeface="Aptos Display" pitchFamily="34" charset="0"/>
-                <a:ea typeface="Aptos Display" pitchFamily="34" charset="-122"/>
-                <a:cs typeface="Aptos Display" pitchFamily="34" charset="-120"/>
-              </a:rPr>
-              <a:t>References and Resources for Additional Information Continued</a:t>
-            </a:r>
-            <a:endParaRPr lang="en-US" sz="3400" dirty="0"/>
-          </a:p>
-        </p:txBody>
-      </p:sp>
-      <p:sp>
-        <p:nvSpPr>
-          <p:cNvPr id="9" name="Text 7"/>
-          <p:cNvSpPr/>
-          <p:nvPr/>
-        </p:nvSpPr>
-        <p:spPr>
-          <a:xfrm>
-            <a:off x="822960" y="1463040"/>
-            <a:ext cx="6565392" cy="4343400"/>
-          </a:xfrm>
-          <a:prstGeom prst="rect">
-            <a:avLst/>
-          </a:prstGeom>
-          <a:noFill/>
-          <a:ln/>
-        </p:spPr>
-        <p:txBody>
-          <a:bodyPr wrap="square" lIns="1016" tIns="1016" rIns="1016" bIns="1016" rtlCol="0" anchor="t">
-            <a:normAutofit/>
-          </a:bodyPr>
-          <a:lstStyle/>
-          <a:p>
-            <a:pPr indent="0" marL="0">
-              <a:buNone/>
-            </a:pPr>
-            <a:r>
-              <a:rPr lang="en-US" sz="1920" dirty="0">
-                <a:solidFill>
-                  <a:srgbClr val="003A63"/>
-                </a:solidFill>
-                <a:latin typeface="Aptos" pitchFamily="34" charset="0"/>
-                <a:ea typeface="Aptos" pitchFamily="34" charset="-122"/>
-                <a:cs typeface="Aptos" pitchFamily="34" charset="-120"/>
-              </a:rPr>
-              <a:t>• Brookings.</a:t>
-            </a:r>
-            <a:endParaRPr lang="en-US" sz="1920" dirty="0"/>
-          </a:p>
-          <a:p>
-            <a:pPr indent="0" marL="0">
-              <a:buNone/>
-            </a:pPr>
-            <a:r>
-              <a:rPr lang="en-US" sz="1920" dirty="0">
-                <a:solidFill>
-                  <a:srgbClr val="003A63"/>
-                </a:solidFill>
-                <a:latin typeface="Aptos" pitchFamily="34" charset="0"/>
-                <a:ea typeface="Aptos" pitchFamily="34" charset="-122"/>
-                <a:cs typeface="Aptos" pitchFamily="34" charset="-120"/>
-              </a:rPr>
-              <a:t>• Digital sovereignty and Indigenous Nations resources..</a:t>
-            </a:r>
-            <a:endParaRPr lang="en-US" sz="1920" dirty="0"/>
-          </a:p>
-        </p:txBody>
-      </p:sp>
-      <p:sp>
-        <p:nvSpPr>
-          <p:cNvPr id="10" name="Shape 8"/>
-          <p:cNvSpPr/>
-          <p:nvPr/>
-        </p:nvSpPr>
-        <p:spPr>
-          <a:xfrm>
-            <a:off x="7543800" y="1325880"/>
-            <a:ext cx="3611880" cy="1261872"/>
-          </a:xfrm>
-          <a:prstGeom prst="roundRect">
-            <a:avLst>
-              <a:gd name="adj" fmla="val 8696"/>
-            </a:avLst>
-          </a:prstGeom>
-          <a:solidFill>
-            <a:srgbClr val="EEF8ED"/>
-          </a:solidFill>
-          <a:ln w="12700">
-            <a:solidFill>
-              <a:srgbClr val="B9D7E6"/>
-            </a:solidFill>
-            <a:prstDash val="solid"/>
-          </a:ln>
-        </p:spPr>
-      </p:sp>
-      <p:sp>
-        <p:nvSpPr>
-          <p:cNvPr id="11" name="Text 9"/>
-          <p:cNvSpPr/>
-          <p:nvPr/>
-        </p:nvSpPr>
-        <p:spPr>
-          <a:xfrm>
-            <a:off x="7708392" y="1453896"/>
-            <a:ext cx="3282696" cy="228600"/>
-          </a:xfrm>
-          <a:prstGeom prst="rect">
-            <a:avLst/>
-          </a:prstGeom>
-          <a:noFill/>
-          <a:ln/>
-        </p:spPr>
-        <p:txBody>
-          <a:bodyPr wrap="square" lIns="0" tIns="0" rIns="0" bIns="0" rtlCol="0" anchor="ctr"/>
-          <a:lstStyle/>
-          <a:p>
-            <a:pPr indent="0" marL="0">
-              <a:buNone/>
-            </a:pPr>
-            <a:r>
-              <a:rPr lang="en-US" sz="1220" b="1" dirty="0">
-                <a:solidFill>
-                  <a:srgbClr val="0068B7"/>
-                </a:solidFill>
-                <a:latin typeface="Aptos" pitchFamily="34" charset="0"/>
-                <a:ea typeface="Aptos" pitchFamily="34" charset="-122"/>
-                <a:cs typeface="Aptos" pitchFamily="34" charset="-120"/>
-              </a:rPr>
-              <a:t>Governance lens</a:t>
-            </a:r>
-            <a:endParaRPr lang="en-US" sz="1220" dirty="0"/>
-          </a:p>
-        </p:txBody>
-      </p:sp>
-      <p:sp>
-        <p:nvSpPr>
-          <p:cNvPr id="12" name="Text 10"/>
-          <p:cNvSpPr/>
-          <p:nvPr/>
-        </p:nvSpPr>
-        <p:spPr>
-          <a:xfrm>
-            <a:off x="7708392" y="1764792"/>
-            <a:ext cx="3282696" cy="749808"/>
-          </a:xfrm>
-          <a:prstGeom prst="rect">
-            <a:avLst/>
-          </a:prstGeom>
-          <a:noFill/>
-          <a:ln/>
-        </p:spPr>
-        <p:txBody>
-          <a:bodyPr wrap="square" lIns="254" tIns="254" rIns="254" bIns="254" rtlCol="0" anchor="t">
-            <a:normAutofit/>
-          </a:bodyPr>
-          <a:lstStyle/>
-          <a:p>
-            <a:pPr indent="0" marL="0">
-              <a:buNone/>
-            </a:pPr>
-            <a:r>
-              <a:rPr lang="en-US" sz="1220" dirty="0">
-                <a:solidFill>
-                  <a:srgbClr val="17364A"/>
-                </a:solidFill>
-                <a:latin typeface="Aptos" pitchFamily="34" charset="0"/>
-                <a:ea typeface="Aptos" pitchFamily="34" charset="-122"/>
-                <a:cs typeface="Aptos" pitchFamily="34" charset="-120"/>
-              </a:rPr>
               <a:t>Brookings.</a:t>
-            </a:r>
-            <a:endParaRPr lang="en-US" sz="1220" dirty="0"/>
-          </a:p>
-        </p:txBody>
-      </p:sp>
-      <p:sp>
-        <p:nvSpPr>
-          <p:cNvPr id="13" name="Shape 11"/>
-          <p:cNvSpPr/>
-          <p:nvPr/>
-        </p:nvSpPr>
-        <p:spPr>
-          <a:xfrm>
-            <a:off x="7543800" y="2724912"/>
-            <a:ext cx="3611880" cy="1527048"/>
-          </a:xfrm>
-          <a:prstGeom prst="roundRect">
-            <a:avLst>
-              <a:gd name="adj" fmla="val 7186"/>
-            </a:avLst>
-          </a:prstGeom>
-          <a:solidFill>
-            <a:srgbClr val="FFFFFF"/>
-          </a:solidFill>
-          <a:ln w="12700">
-            <a:solidFill>
-              <a:srgbClr val="B9D7E6"/>
-            </a:solidFill>
-            <a:prstDash val="solid"/>
-          </a:ln>
-        </p:spPr>
-      </p:sp>
-      <p:sp>
-        <p:nvSpPr>
-          <p:cNvPr id="14" name="Text 12"/>
-          <p:cNvSpPr/>
-          <p:nvPr/>
-        </p:nvSpPr>
-        <p:spPr>
-          <a:xfrm>
-            <a:off x="7708392" y="2852928"/>
-            <a:ext cx="3282696" cy="228600"/>
-          </a:xfrm>
-          <a:prstGeom prst="rect">
-            <a:avLst/>
-          </a:prstGeom>
-          <a:noFill/>
-          <a:ln/>
-        </p:spPr>
-        <p:txBody>
-          <a:bodyPr wrap="square" lIns="0" tIns="0" rIns="0" bIns="0" rtlCol="0" anchor="ctr"/>
-          <a:lstStyle/>
-          <a:p>
-            <a:pPr indent="0" marL="0">
-              <a:buNone/>
-            </a:pPr>
-            <a:r>
-              <a:rPr lang="en-US" sz="1220" b="1" dirty="0">
-                <a:solidFill>
-                  <a:srgbClr val="0068B7"/>
-                </a:solidFill>
-                <a:latin typeface="Aptos" pitchFamily="34" charset="0"/>
-                <a:ea typeface="Aptos" pitchFamily="34" charset="-122"/>
-                <a:cs typeface="Aptos" pitchFamily="34" charset="-120"/>
-              </a:rPr>
-              <a:t>Concept checkpoints</a:t>
-            </a:r>
-            <a:endParaRPr lang="en-US" sz="1220" dirty="0"/>
-          </a:p>
-        </p:txBody>
-      </p:sp>
-      <p:sp>
-        <p:nvSpPr>
-          <p:cNvPr id="15" name="Text 13"/>
-          <p:cNvSpPr/>
-          <p:nvPr/>
-        </p:nvSpPr>
-        <p:spPr>
-          <a:xfrm>
-            <a:off x="7726680" y="3182112"/>
-            <a:ext cx="3227832" cy="960120"/>
-          </a:xfrm>
-          <a:prstGeom prst="rect">
-            <a:avLst/>
-          </a:prstGeom>
-          <a:noFill/>
-          <a:ln/>
-        </p:spPr>
-        <p:txBody>
-          <a:bodyPr wrap="square" lIns="508" tIns="508" rIns="508" bIns="508" rtlCol="0" anchor="t">
-            <a:normAutofit/>
-          </a:bodyPr>
-          <a:lstStyle/>
-          <a:p>
-            <a:pPr indent="0" marL="0">
-              <a:buNone/>
-            </a:pPr>
-            <a:r>
-              <a:rPr lang="en-US" sz="1140" dirty="0">
-                <a:solidFill>
-                  <a:srgbClr val="17364A"/>
-                </a:solidFill>
-                <a:latin typeface="Aptos" pitchFamily="34" charset="0"/>
-                <a:ea typeface="Aptos" pitchFamily="34" charset="-122"/>
-                <a:cs typeface="Aptos" pitchFamily="34" charset="-120"/>
-              </a:rPr>
-              <a:t>Brookings.</a:t>
-            </a:r>
-            <a:endParaRPr lang="en-US" sz="1140" dirty="0"/>
-          </a:p>
-          <a:p>
-            <a:pPr indent="0" marL="0">
-              <a:buNone/>
-            </a:pPr>
-            <a:r>
-              <a:rPr lang="en-US" sz="1140" dirty="0">
-                <a:solidFill>
-                  <a:srgbClr val="17364A"/>
-                </a:solidFill>
-                <a:latin typeface="Aptos" pitchFamily="34" charset="0"/>
-                <a:ea typeface="Aptos" pitchFamily="34" charset="-122"/>
-                <a:cs typeface="Aptos" pitchFamily="34" charset="-120"/>
-              </a:rPr>
-              <a:t>Digital sovereignty and Indigenous Nations.</a:t>
-            </a:r>
-            <a:endParaRPr lang="en-US" sz="1140" dirty="0"/>
-          </a:p>
-        </p:txBody>
-      </p:sp>
-      <p:sp>
-        <p:nvSpPr>
-          <p:cNvPr id="16" name="Shape 14"/>
-          <p:cNvSpPr/>
-          <p:nvPr/>
-        </p:nvSpPr>
-        <p:spPr>
-          <a:xfrm>
-            <a:off x="7543800" y="4389120"/>
-            <a:ext cx="3611880" cy="1261872"/>
-          </a:xfrm>
-          <a:prstGeom prst="roundRect">
-            <a:avLst>
-              <a:gd name="adj" fmla="val 8696"/>
-            </a:avLst>
-          </a:prstGeom>
-          <a:solidFill>
-            <a:srgbClr val="EAF6F8"/>
-          </a:solidFill>
-          <a:ln w="12700">
-            <a:solidFill>
-              <a:srgbClr val="B9D7E6"/>
-            </a:solidFill>
-            <a:prstDash val="solid"/>
-          </a:ln>
-        </p:spPr>
-      </p:sp>
-      <p:sp>
-        <p:nvSpPr>
-          <p:cNvPr id="17" name="Text 15"/>
-          <p:cNvSpPr/>
-          <p:nvPr/>
-        </p:nvSpPr>
-        <p:spPr>
-          <a:xfrm>
-            <a:off x="7708392" y="4517136"/>
-            <a:ext cx="3282696" cy="228600"/>
-          </a:xfrm>
-          <a:prstGeom prst="rect">
-            <a:avLst/>
-          </a:prstGeom>
-          <a:noFill/>
-          <a:ln/>
-        </p:spPr>
-        <p:txBody>
-          <a:bodyPr wrap="square" lIns="0" tIns="0" rIns="0" bIns="0" rtlCol="0" anchor="ctr"/>
-          <a:lstStyle/>
-          <a:p>
-            <a:pPr indent="0" marL="0">
-              <a:buNone/>
-            </a:pPr>
-            <a:r>
-              <a:rPr lang="en-US" sz="1220" b="1" dirty="0">
-                <a:solidFill>
-                  <a:srgbClr val="0068B7"/>
-                </a:solidFill>
-                <a:latin typeface="Aptos" pitchFamily="34" charset="0"/>
-                <a:ea typeface="Aptos" pitchFamily="34" charset="-122"/>
-                <a:cs typeface="Aptos" pitchFamily="34" charset="-120"/>
-              </a:rPr>
-              <a:t>What to document</a:t>
-            </a:r>
-            <a:endParaRPr lang="en-US" sz="1220" dirty="0"/>
-          </a:p>
-        </p:txBody>
-      </p:sp>
-      <p:sp>
-        <p:nvSpPr>
-          <p:cNvPr id="18" name="Text 16"/>
-          <p:cNvSpPr/>
-          <p:nvPr/>
-        </p:nvSpPr>
-        <p:spPr>
-          <a:xfrm>
-            <a:off x="7708392" y="4828032"/>
-            <a:ext cx="3282696" cy="749808"/>
-          </a:xfrm>
-          <a:prstGeom prst="rect">
-            <a:avLst/>
-          </a:prstGeom>
-          <a:noFill/>
-          <a:ln/>
-        </p:spPr>
-        <p:txBody>
-          <a:bodyPr wrap="square" lIns="254" tIns="254" rIns="254" bIns="254" rtlCol="0" anchor="t">
-            <a:normAutofit/>
-          </a:bodyPr>
-          <a:lstStyle/>
-          <a:p>
-            <a:pPr indent="0" marL="0">
-              <a:buNone/>
-            </a:pPr>
-            <a:r>
-              <a:rPr lang="en-US" sz="1220" dirty="0">
-                <a:solidFill>
-                  <a:srgbClr val="17364A"/>
-                </a:solidFill>
-                <a:latin typeface="Aptos" pitchFamily="34" charset="0"/>
-                <a:ea typeface="Aptos" pitchFamily="34" charset="-122"/>
-                <a:cs typeface="Aptos" pitchFamily="34" charset="-120"/>
-              </a:rPr>
-              <a:t>Translate this concept into clear decision rights, review steps, documentation.</a:t>
-            </a:r>
-            <a:endParaRPr lang="en-US" sz="1220" dirty="0"/>
-          </a:p>
-        </p:txBody>
-      </p:sp>
-    </p:spTree>
-  </p:cSld>
-  <p:clrMapOvr>
-    <a:masterClrMapping/>
-  </p:clrMapOvr>
-</p:sld>
-</file>
-
-<file path=ppt/slides/slide27.xml><?xml version="1.0" encoding="utf-8"?>
-<p:sld xmlns:a="http://schemas.openxmlformats.org/drawingml/2006/main" xmlns:r="http://schemas.openxmlformats.org/officeDocument/2006/relationships" xmlns:p="http://schemas.openxmlformats.org/presentationml/2006/main">
-  <p:cSld name="Slide 27">
-    <p:bg>
-      <p:bgPr>
-        <a:solidFill>
-          <a:srgbClr val="F7FBFD"/>
-        </a:solidFill>
-      </p:bgPr>
-    </p:bg>
-    <p:spTree>
-      <p:nvGrpSpPr>
-        <p:cNvPr id="1" name=""/>
-        <p:cNvGrpSpPr/>
-        <p:nvPr/>
-      </p:nvGrpSpPr>
-      <p:grpSpPr>
-        <a:xfrm>
-          <a:off x="0" y="0"/>
-          <a:ext cx="0" cy="0"/>
-          <a:chOff x="0" y="0"/>
-          <a:chExt cx="0" cy="0"/>
-        </a:xfrm>
-      </p:grpSpPr>
-      <p:sp>
-        <p:nvSpPr>
-          <p:cNvPr id="2" name="Shape 0"/>
-          <p:cNvSpPr/>
-          <p:nvPr/>
-        </p:nvSpPr>
-        <p:spPr>
-          <a:xfrm>
-            <a:off x="0" y="0"/>
-            <a:ext cx="12191695" cy="164592"/>
-          </a:xfrm>
-          <a:prstGeom prst="rect">
-            <a:avLst/>
-          </a:prstGeom>
-          <a:solidFill>
-            <a:srgbClr val="0068B7"/>
-          </a:solidFill>
-          <a:ln w="12700">
-            <a:solidFill>
-              <a:srgbClr val="0068B7"/>
-            </a:solidFill>
-            <a:prstDash val="solid"/>
-          </a:ln>
-        </p:spPr>
-      </p:sp>
-      <p:sp>
-        <p:nvSpPr>
-          <p:cNvPr id="3" name="Shape 1"/>
-          <p:cNvSpPr/>
-          <p:nvPr/>
-        </p:nvSpPr>
-        <p:spPr>
-          <a:xfrm>
-            <a:off x="0" y="164592"/>
-            <a:ext cx="146304" cy="6693408"/>
-          </a:xfrm>
-          <a:prstGeom prst="rect">
-            <a:avLst/>
-          </a:prstGeom>
-          <a:solidFill>
-            <a:srgbClr val="2F8A28"/>
-          </a:solidFill>
-          <a:ln w="12700">
-            <a:solidFill>
-              <a:srgbClr val="2F8A28"/>
-            </a:solidFill>
-            <a:prstDash val="solid"/>
-          </a:ln>
-        </p:spPr>
-      </p:sp>
-      <p:sp>
-        <p:nvSpPr>
-          <p:cNvPr id="4" name="Text 2"/>
-          <p:cNvSpPr/>
-          <p:nvPr/>
-        </p:nvSpPr>
-        <p:spPr>
-          <a:xfrm>
-            <a:off x="502920" y="292608"/>
-            <a:ext cx="10149840" cy="256032"/>
-          </a:xfrm>
-          <a:prstGeom prst="rect">
-            <a:avLst/>
-          </a:prstGeom>
-          <a:noFill/>
-          <a:ln/>
-        </p:spPr>
-        <p:txBody>
-          <a:bodyPr wrap="square" lIns="0" tIns="0" rIns="0" bIns="0" rtlCol="0" anchor="ctr"/>
-          <a:lstStyle/>
-          <a:p>
-            <a:pPr indent="0" marL="0">
-              <a:buNone/>
-            </a:pPr>
-            <a:r>
-              <a:rPr lang="en-US" sz="900" b="1" dirty="0">
-                <a:solidFill>
-                  <a:srgbClr val="5F7181"/>
-                </a:solidFill>
-                <a:latin typeface="Aptos" pitchFamily="34" charset="0"/>
-                <a:ea typeface="Aptos" pitchFamily="34" charset="-122"/>
-                <a:cs typeface="Aptos" pitchFamily="34" charset="-120"/>
-              </a:rPr>
-              <a:t>Respecting Tribal Sovereignty and Indigenous Data Governance in Public Health AI Projects</a:t>
-            </a:r>
-            <a:endParaRPr lang="en-US" sz="900" dirty="0"/>
-          </a:p>
-        </p:txBody>
-      </p:sp>
-      <p:sp>
-        <p:nvSpPr>
-          <p:cNvPr id="5" name="Text 3"/>
-          <p:cNvSpPr/>
-          <p:nvPr/>
-        </p:nvSpPr>
-        <p:spPr>
-          <a:xfrm>
-            <a:off x="502920" y="6537960"/>
-            <a:ext cx="7772400" cy="201168"/>
-          </a:xfrm>
-          <a:prstGeom prst="rect">
-            <a:avLst/>
-          </a:prstGeom>
-          <a:noFill/>
-          <a:ln/>
-        </p:spPr>
-        <p:txBody>
-          <a:bodyPr wrap="square" lIns="0" tIns="0" rIns="0" bIns="0" rtlCol="0" anchor="ctr"/>
-          <a:lstStyle/>
-          <a:p>
-            <a:pPr indent="0" marL="0">
-              <a:buNone/>
-            </a:pPr>
-            <a:r>
-              <a:rPr lang="en-US" sz="800" dirty="0">
-                <a:solidFill>
-                  <a:srgbClr val="5F7181"/>
-                </a:solidFill>
-                <a:latin typeface="Aptos" pitchFamily="34" charset="0"/>
-                <a:ea typeface="Aptos" pitchFamily="34" charset="-122"/>
-                <a:cs typeface="Aptos" pitchFamily="34" charset="-120"/>
-              </a:rPr>
-              <a:t>AI Playbook and Toolkit for Public Health Departments</a:t>
-            </a:r>
-            <a:endParaRPr lang="en-US" sz="800" dirty="0"/>
-          </a:p>
-        </p:txBody>
-      </p:sp>
-      <p:sp>
-        <p:nvSpPr>
-          <p:cNvPr id="6" name="Text 4"/>
-          <p:cNvSpPr/>
-          <p:nvPr/>
-        </p:nvSpPr>
-        <p:spPr>
-          <a:xfrm>
-            <a:off x="9646920" y="6537960"/>
-            <a:ext cx="1965960" cy="201168"/>
-          </a:xfrm>
-          <a:prstGeom prst="rect">
-            <a:avLst/>
-          </a:prstGeom>
-          <a:noFill/>
-          <a:ln/>
-        </p:spPr>
-        <p:txBody>
-          <a:bodyPr wrap="square" lIns="0" tIns="0" rIns="0" bIns="0" rtlCol="0" anchor="ctr"/>
-          <a:lstStyle/>
-          <a:p>
-            <a:pPr algn="r" indent="0" marL="0">
-              <a:buNone/>
-            </a:pPr>
-            <a:r>
-              <a:rPr lang="en-US" sz="800" dirty="0">
-                <a:solidFill>
-                  <a:srgbClr val="5F7181"/>
-                </a:solidFill>
-                <a:latin typeface="Aptos" pitchFamily="34" charset="0"/>
-                <a:ea typeface="Aptos" pitchFamily="34" charset="-122"/>
-                <a:cs typeface="Aptos" pitchFamily="34" charset="-120"/>
-              </a:rPr>
-              <a:t>Copyright Paula Soper</a:t>
-            </a:r>
-            <a:endParaRPr lang="en-US" sz="800" dirty="0"/>
-          </a:p>
-        </p:txBody>
-      </p:sp>
-      <p:sp>
-        <p:nvSpPr>
-          <p:cNvPr id="7" name="Text 5"/>
-          <p:cNvSpPr/>
-          <p:nvPr/>
-        </p:nvSpPr>
-        <p:spPr>
-          <a:xfrm>
-            <a:off x="11137392" y="6510528"/>
-            <a:ext cx="411480" cy="201168"/>
-          </a:xfrm>
-          <a:prstGeom prst="rect">
-            <a:avLst/>
-          </a:prstGeom>
-          <a:noFill/>
-          <a:ln/>
-        </p:spPr>
-        <p:txBody>
-          <a:bodyPr wrap="square" lIns="0" tIns="0" rIns="0" bIns="0" rtlCol="0" anchor="ctr"/>
-          <a:lstStyle/>
-          <a:p>
-            <a:pPr algn="r" indent="0" marL="0">
-              <a:buNone/>
-            </a:pPr>
-            <a:r>
-              <a:rPr lang="en-US" sz="900" dirty="0">
-                <a:solidFill>
-                  <a:srgbClr val="5F7181"/>
-                </a:solidFill>
-                <a:latin typeface="Aptos" pitchFamily="34" charset="0"/>
-                <a:ea typeface="Aptos" pitchFamily="34" charset="-122"/>
-                <a:cs typeface="Aptos" pitchFamily="34" charset="-120"/>
-              </a:rPr>
-              <a:t>27</a:t>
-            </a:r>
-            <a:endParaRPr lang="en-US" sz="900" dirty="0"/>
-          </a:p>
-        </p:txBody>
-      </p:sp>
-      <p:sp>
-        <p:nvSpPr>
-          <p:cNvPr id="8" name="Text 6"/>
-          <p:cNvSpPr/>
-          <p:nvPr/>
-        </p:nvSpPr>
-        <p:spPr>
-          <a:xfrm>
-            <a:off x="640080" y="658368"/>
-            <a:ext cx="10881360" cy="713232"/>
-          </a:xfrm>
-          <a:prstGeom prst="rect">
-            <a:avLst/>
-          </a:prstGeom>
-          <a:noFill/>
-          <a:ln/>
-        </p:spPr>
-        <p:txBody>
-          <a:bodyPr wrap="square" lIns="0" tIns="0" rIns="0" bIns="0" rtlCol="0" anchor="ctr">
-            <a:normAutofit/>
-          </a:bodyPr>
-          <a:lstStyle/>
-          <a:p>
-            <a:pPr indent="0" marL="0">
-              <a:buNone/>
-            </a:pPr>
-            <a:r>
-              <a:rPr lang="en-US" sz="3400" b="1" dirty="0">
-                <a:solidFill>
-                  <a:srgbClr val="003A63"/>
-                </a:solidFill>
-                <a:latin typeface="Aptos Display" pitchFamily="34" charset="0"/>
-                <a:ea typeface="Aptos Display" pitchFamily="34" charset="-122"/>
-                <a:cs typeface="Aptos Display" pitchFamily="34" charset="-120"/>
-              </a:rPr>
-              <a:t>Expected Assignment</a:t>
-            </a:r>
-            <a:endParaRPr lang="en-US" sz="3400" dirty="0"/>
-          </a:p>
-        </p:txBody>
-      </p:sp>
-      <p:sp>
-        <p:nvSpPr>
-          <p:cNvPr id="9" name="Text 7"/>
-          <p:cNvSpPr/>
-          <p:nvPr/>
-        </p:nvSpPr>
-        <p:spPr>
-          <a:xfrm>
-            <a:off x="822960" y="1463040"/>
-            <a:ext cx="6565392" cy="4343400"/>
-          </a:xfrm>
-          <a:prstGeom prst="rect">
-            <a:avLst/>
-          </a:prstGeom>
-          <a:noFill/>
-          <a:ln/>
-        </p:spPr>
-        <p:txBody>
-          <a:bodyPr wrap="square" lIns="1016" tIns="1016" rIns="1016" bIns="1016" rtlCol="0" anchor="t">
-            <a:normAutofit/>
-          </a:bodyPr>
-          <a:lstStyle/>
-          <a:p>
-            <a:pPr indent="0" marL="0">
-              <a:buNone/>
-            </a:pPr>
-            <a:r>
-              <a:rPr lang="en-US" sz="1920" dirty="0">
-                <a:solidFill>
-                  <a:srgbClr val="003A63"/>
-                </a:solidFill>
-                <a:latin typeface="Aptos" pitchFamily="34" charset="0"/>
-                <a:ea typeface="Aptos" pitchFamily="34" charset="-122"/>
-                <a:cs typeface="Aptos" pitchFamily="34" charset="-120"/>
-              </a:rPr>
-              <a:t>• Tribal Sovereignty and Indigenous Data Governance Screening Memo</a:t>
-            </a:r>
-            <a:endParaRPr lang="en-US" sz="1920" dirty="0"/>
-          </a:p>
-        </p:txBody>
-      </p:sp>
-      <p:sp>
-        <p:nvSpPr>
-          <p:cNvPr id="10" name="Shape 8"/>
-          <p:cNvSpPr/>
-          <p:nvPr/>
-        </p:nvSpPr>
-        <p:spPr>
-          <a:xfrm>
-            <a:off x="7543800" y="1325880"/>
-            <a:ext cx="3611880" cy="1261872"/>
-          </a:xfrm>
-          <a:prstGeom prst="roundRect">
-            <a:avLst>
-              <a:gd name="adj" fmla="val 8696"/>
-            </a:avLst>
-          </a:prstGeom>
-          <a:solidFill>
-            <a:srgbClr val="EEF8ED"/>
-          </a:solidFill>
-          <a:ln w="12700">
-            <a:solidFill>
-              <a:srgbClr val="B9D7E6"/>
-            </a:solidFill>
-            <a:prstDash val="solid"/>
-          </a:ln>
-        </p:spPr>
-      </p:sp>
-      <p:sp>
-        <p:nvSpPr>
-          <p:cNvPr id="11" name="Text 9"/>
-          <p:cNvSpPr/>
-          <p:nvPr/>
-        </p:nvSpPr>
-        <p:spPr>
-          <a:xfrm>
-            <a:off x="7708392" y="1453896"/>
-            <a:ext cx="3282696" cy="228600"/>
-          </a:xfrm>
-          <a:prstGeom prst="rect">
-            <a:avLst/>
-          </a:prstGeom>
-          <a:noFill/>
-          <a:ln/>
-        </p:spPr>
-        <p:txBody>
-          <a:bodyPr wrap="square" lIns="0" tIns="0" rIns="0" bIns="0" rtlCol="0" anchor="ctr"/>
-          <a:lstStyle/>
-          <a:p>
-            <a:pPr indent="0" marL="0">
-              <a:buNone/>
-            </a:pPr>
-            <a:r>
-              <a:rPr lang="en-US" sz="1220" b="1" dirty="0">
-                <a:solidFill>
-                  <a:srgbClr val="0068B7"/>
-                </a:solidFill>
-                <a:latin typeface="Aptos" pitchFamily="34" charset="0"/>
-                <a:ea typeface="Aptos" pitchFamily="34" charset="-122"/>
-                <a:cs typeface="Aptos" pitchFamily="34" charset="-120"/>
-              </a:rPr>
-              <a:t>Governance lens</a:t>
-            </a:r>
-            <a:endParaRPr lang="en-US" sz="1220" dirty="0"/>
-          </a:p>
-        </p:txBody>
-      </p:sp>
-      <p:sp>
-        <p:nvSpPr>
-          <p:cNvPr id="12" name="Text 10"/>
-          <p:cNvSpPr/>
-          <p:nvPr/>
-        </p:nvSpPr>
-        <p:spPr>
-          <a:xfrm>
-            <a:off x="7708392" y="1764792"/>
-            <a:ext cx="3282696" cy="749808"/>
-          </a:xfrm>
-          <a:prstGeom prst="rect">
-            <a:avLst/>
-          </a:prstGeom>
-          <a:noFill/>
-          <a:ln/>
-        </p:spPr>
-        <p:txBody>
-          <a:bodyPr wrap="square" lIns="254" tIns="254" rIns="254" bIns="254" rtlCol="0" anchor="t">
-            <a:normAutofit/>
-          </a:bodyPr>
-          <a:lstStyle/>
-          <a:p>
-            <a:pPr indent="0" marL="0">
-              <a:buNone/>
-            </a:pPr>
-            <a:r>
-              <a:rPr lang="en-US" sz="1220" dirty="0">
-                <a:solidFill>
-                  <a:srgbClr val="17364A"/>
-                </a:solidFill>
-                <a:latin typeface="Aptos" pitchFamily="34" charset="0"/>
-                <a:ea typeface="Aptos" pitchFamily="34" charset="-122"/>
-                <a:cs typeface="Aptos" pitchFamily="34" charset="-120"/>
-              </a:rPr>
-              <a:t>Tribal Sovereignty and Indigenous Data Governance Screening Memo</a:t>
-            </a:r>
-            <a:endParaRPr lang="en-US" sz="1220" dirty="0"/>
-          </a:p>
-        </p:txBody>
-      </p:sp>
-      <p:sp>
-        <p:nvSpPr>
-          <p:cNvPr id="13" name="Shape 11"/>
-          <p:cNvSpPr/>
-          <p:nvPr/>
-        </p:nvSpPr>
-        <p:spPr>
-          <a:xfrm>
-            <a:off x="7543800" y="2724912"/>
-            <a:ext cx="3611880" cy="1527048"/>
-          </a:xfrm>
-          <a:prstGeom prst="roundRect">
-            <a:avLst>
-              <a:gd name="adj" fmla="val 7186"/>
-            </a:avLst>
-          </a:prstGeom>
-          <a:solidFill>
-            <a:srgbClr val="FFFFFF"/>
-          </a:solidFill>
-          <a:ln w="12700">
-            <a:solidFill>
-              <a:srgbClr val="B9D7E6"/>
-            </a:solidFill>
-            <a:prstDash val="solid"/>
-          </a:ln>
-        </p:spPr>
-      </p:sp>
-      <p:sp>
-        <p:nvSpPr>
-          <p:cNvPr id="14" name="Text 12"/>
-          <p:cNvSpPr/>
-          <p:nvPr/>
-        </p:nvSpPr>
-        <p:spPr>
-          <a:xfrm>
-            <a:off x="7708392" y="2852928"/>
-            <a:ext cx="3282696" cy="228600"/>
-          </a:xfrm>
-          <a:prstGeom prst="rect">
-            <a:avLst/>
-          </a:prstGeom>
-          <a:noFill/>
-          <a:ln/>
-        </p:spPr>
-        <p:txBody>
-          <a:bodyPr wrap="square" lIns="0" tIns="0" rIns="0" bIns="0" rtlCol="0" anchor="ctr"/>
-          <a:lstStyle/>
-          <a:p>
-            <a:pPr indent="0" marL="0">
-              <a:buNone/>
-            </a:pPr>
-            <a:r>
-              <a:rPr lang="en-US" sz="1220" b="1" dirty="0">
-                <a:solidFill>
-                  <a:srgbClr val="0068B7"/>
-                </a:solidFill>
-                <a:latin typeface="Aptos" pitchFamily="34" charset="0"/>
-                <a:ea typeface="Aptos" pitchFamily="34" charset="-122"/>
-                <a:cs typeface="Aptos" pitchFamily="34" charset="-120"/>
-              </a:rPr>
-              <a:t>Concept checkpoints</a:t>
-            </a:r>
-            <a:endParaRPr lang="en-US" sz="1220" dirty="0"/>
-          </a:p>
-        </p:txBody>
-      </p:sp>
-      <p:sp>
-        <p:nvSpPr>
-          <p:cNvPr id="15" name="Text 13"/>
-          <p:cNvSpPr/>
-          <p:nvPr/>
-        </p:nvSpPr>
-        <p:spPr>
-          <a:xfrm>
-            <a:off x="7726680" y="3182112"/>
-            <a:ext cx="3227832" cy="960120"/>
-          </a:xfrm>
-          <a:prstGeom prst="rect">
-            <a:avLst/>
-          </a:prstGeom>
-          <a:noFill/>
-          <a:ln/>
-        </p:spPr>
-        <p:txBody>
-          <a:bodyPr wrap="square" lIns="508" tIns="508" rIns="508" bIns="508" rtlCol="0" anchor="t">
-            <a:normAutofit/>
-          </a:bodyPr>
-          <a:lstStyle/>
-          <a:p>
-            <a:pPr indent="0" marL="0">
-              <a:buNone/>
-            </a:pPr>
-            <a:r>
-              <a:rPr lang="en-US" sz="1140" dirty="0">
-                <a:solidFill>
-                  <a:srgbClr val="17364A"/>
-                </a:solidFill>
-                <a:latin typeface="Aptos" pitchFamily="34" charset="0"/>
-                <a:ea typeface="Aptos" pitchFamily="34" charset="-122"/>
-                <a:cs typeface="Aptos" pitchFamily="34" charset="-120"/>
-              </a:rPr>
-              <a:t>Tribal Sovereignty and Indigenous Data Governance.</a:t>
-            </a:r>
-            <a:endParaRPr lang="en-US" sz="1140" dirty="0"/>
-          </a:p>
-        </p:txBody>
-      </p:sp>
-      <p:sp>
-        <p:nvSpPr>
-          <p:cNvPr id="16" name="Shape 14"/>
-          <p:cNvSpPr/>
-          <p:nvPr/>
-        </p:nvSpPr>
-        <p:spPr>
-          <a:xfrm>
-            <a:off x="7543800" y="4389120"/>
-            <a:ext cx="3611880" cy="1261872"/>
-          </a:xfrm>
-          <a:prstGeom prst="roundRect">
-            <a:avLst>
-              <a:gd name="adj" fmla="val 8696"/>
-            </a:avLst>
-          </a:prstGeom>
-          <a:solidFill>
-            <a:srgbClr val="EAF6F8"/>
-          </a:solidFill>
-          <a:ln w="12700">
-            <a:solidFill>
-              <a:srgbClr val="B9D7E6"/>
-            </a:solidFill>
-            <a:prstDash val="solid"/>
-          </a:ln>
-        </p:spPr>
-      </p:sp>
-      <p:sp>
-        <p:nvSpPr>
-          <p:cNvPr id="17" name="Text 15"/>
-          <p:cNvSpPr/>
-          <p:nvPr/>
-        </p:nvSpPr>
-        <p:spPr>
-          <a:xfrm>
-            <a:off x="7708392" y="4517136"/>
-            <a:ext cx="3282696" cy="228600"/>
-          </a:xfrm>
-          <a:prstGeom prst="rect">
-            <a:avLst/>
-          </a:prstGeom>
-          <a:noFill/>
-          <a:ln/>
-        </p:spPr>
-        <p:txBody>
-          <a:bodyPr wrap="square" lIns="0" tIns="0" rIns="0" bIns="0" rtlCol="0" anchor="ctr"/>
-          <a:lstStyle/>
-          <a:p>
-            <a:pPr indent="0" marL="0">
-              <a:buNone/>
-            </a:pPr>
-            <a:r>
-              <a:rPr lang="en-US" sz="1220" b="1" dirty="0">
-                <a:solidFill>
-                  <a:srgbClr val="0068B7"/>
-                </a:solidFill>
-                <a:latin typeface="Aptos" pitchFamily="34" charset="0"/>
-                <a:ea typeface="Aptos" pitchFamily="34" charset="-122"/>
-                <a:cs typeface="Aptos" pitchFamily="34" charset="-120"/>
-              </a:rPr>
-              <a:t>What to document</a:t>
-            </a:r>
-            <a:endParaRPr lang="en-US" sz="1220" dirty="0"/>
-          </a:p>
-        </p:txBody>
-      </p:sp>
-      <p:sp>
-        <p:nvSpPr>
-          <p:cNvPr id="18" name="Text 16"/>
-          <p:cNvSpPr/>
-          <p:nvPr/>
-        </p:nvSpPr>
-        <p:spPr>
-          <a:xfrm>
-            <a:off x="7708392" y="4828032"/>
-            <a:ext cx="3282696" cy="749808"/>
-          </a:xfrm>
-          <a:prstGeom prst="rect">
-            <a:avLst/>
-          </a:prstGeom>
-          <a:noFill/>
-          <a:ln/>
-        </p:spPr>
-        <p:txBody>
-          <a:bodyPr wrap="square" lIns="254" tIns="254" rIns="254" bIns="254" rtlCol="0" anchor="t">
-            <a:normAutofit/>
-          </a:bodyPr>
-          <a:lstStyle/>
-          <a:p>
-            <a:pPr indent="0" marL="0">
-              <a:buNone/>
-            </a:pPr>
-            <a:r>
-              <a:rPr lang="en-US" sz="1220" dirty="0">
-                <a:solidFill>
-                  <a:srgbClr val="17364A"/>
-                </a:solidFill>
-                <a:latin typeface="Aptos" pitchFamily="34" charset="0"/>
-                <a:ea typeface="Aptos" pitchFamily="34" charset="-122"/>
-                <a:cs typeface="Aptos" pitchFamily="34" charset="-120"/>
-              </a:rPr>
-              <a:t>Use the assignment to test whether you can explain the concept, apply it to a.</a:t>
-            </a:r>
-            <a:endParaRPr lang="en-US" sz="1220" dirty="0"/>
-          </a:p>
-        </p:txBody>
-      </p:sp>
-    </p:spTree>
-  </p:cSld>
-  <p:clrMapOvr>
-    <a:masterClrMapping/>
-  </p:clrMapOvr>
-</p:sld>
-</file>
-
-<file path=ppt/slides/slide28.xml><?xml version="1.0" encoding="utf-8"?>
-<p:sld xmlns:a="http://schemas.openxmlformats.org/drawingml/2006/main" xmlns:r="http://schemas.openxmlformats.org/officeDocument/2006/relationships" xmlns:p="http://schemas.openxmlformats.org/presentationml/2006/main">
-  <p:cSld name="Slide 28">
-    <p:bg>
-      <p:bgPr>
-        <a:solidFill>
-          <a:srgbClr val="F7FBFD"/>
-        </a:solidFill>
-      </p:bgPr>
-    </p:bg>
-    <p:spTree>
-      <p:nvGrpSpPr>
-        <p:cNvPr id="1" name=""/>
-        <p:cNvGrpSpPr/>
-        <p:nvPr/>
-      </p:nvGrpSpPr>
-      <p:grpSpPr>
-        <a:xfrm>
-          <a:off x="0" y="0"/>
-          <a:ext cx="0" cy="0"/>
-          <a:chOff x="0" y="0"/>
-          <a:chExt cx="0" cy="0"/>
-        </a:xfrm>
-      </p:grpSpPr>
-      <p:sp>
-        <p:nvSpPr>
-          <p:cNvPr id="2" name="Shape 0"/>
-          <p:cNvSpPr/>
-          <p:nvPr/>
-        </p:nvSpPr>
-        <p:spPr>
-          <a:xfrm>
-            <a:off x="0" y="0"/>
-            <a:ext cx="12191695" cy="164592"/>
-          </a:xfrm>
-          <a:prstGeom prst="rect">
-            <a:avLst/>
-          </a:prstGeom>
-          <a:solidFill>
-            <a:srgbClr val="0068B7"/>
-          </a:solidFill>
-          <a:ln w="12700">
-            <a:solidFill>
-              <a:srgbClr val="0068B7"/>
-            </a:solidFill>
-            <a:prstDash val="solid"/>
-          </a:ln>
-        </p:spPr>
-      </p:sp>
-      <p:sp>
-        <p:nvSpPr>
-          <p:cNvPr id="3" name="Shape 1"/>
-          <p:cNvSpPr/>
-          <p:nvPr/>
-        </p:nvSpPr>
-        <p:spPr>
-          <a:xfrm>
-            <a:off x="0" y="164592"/>
-            <a:ext cx="146304" cy="6693408"/>
-          </a:xfrm>
-          <a:prstGeom prst="rect">
-            <a:avLst/>
-          </a:prstGeom>
-          <a:solidFill>
-            <a:srgbClr val="2F8A28"/>
-          </a:solidFill>
-          <a:ln w="12700">
-            <a:solidFill>
-              <a:srgbClr val="2F8A28"/>
-            </a:solidFill>
-            <a:prstDash val="solid"/>
-          </a:ln>
-        </p:spPr>
-      </p:sp>
-      <p:sp>
-        <p:nvSpPr>
-          <p:cNvPr id="4" name="Text 2"/>
-          <p:cNvSpPr/>
-          <p:nvPr/>
-        </p:nvSpPr>
-        <p:spPr>
-          <a:xfrm>
-            <a:off x="502920" y="292608"/>
-            <a:ext cx="10149840" cy="256032"/>
-          </a:xfrm>
-          <a:prstGeom prst="rect">
-            <a:avLst/>
-          </a:prstGeom>
-          <a:noFill/>
-          <a:ln/>
-        </p:spPr>
-        <p:txBody>
-          <a:bodyPr wrap="square" lIns="0" tIns="0" rIns="0" bIns="0" rtlCol="0" anchor="ctr"/>
-          <a:lstStyle/>
-          <a:p>
-            <a:pPr indent="0" marL="0">
-              <a:buNone/>
-            </a:pPr>
-            <a:r>
-              <a:rPr lang="en-US" sz="900" b="1" dirty="0">
-                <a:solidFill>
-                  <a:srgbClr val="5F7181"/>
-                </a:solidFill>
-                <a:latin typeface="Aptos" pitchFamily="34" charset="0"/>
-                <a:ea typeface="Aptos" pitchFamily="34" charset="-122"/>
-                <a:cs typeface="Aptos" pitchFamily="34" charset="-120"/>
-              </a:rPr>
-              <a:t>Respecting Tribal Sovereignty and Indigenous Data Governance in Public Health AI Projects</a:t>
-            </a:r>
-            <a:endParaRPr lang="en-US" sz="900" dirty="0"/>
-          </a:p>
-        </p:txBody>
-      </p:sp>
-      <p:sp>
-        <p:nvSpPr>
-          <p:cNvPr id="5" name="Text 3"/>
-          <p:cNvSpPr/>
-          <p:nvPr/>
-        </p:nvSpPr>
-        <p:spPr>
-          <a:xfrm>
-            <a:off x="502920" y="6537960"/>
-            <a:ext cx="7772400" cy="201168"/>
-          </a:xfrm>
-          <a:prstGeom prst="rect">
-            <a:avLst/>
-          </a:prstGeom>
-          <a:noFill/>
-          <a:ln/>
-        </p:spPr>
-        <p:txBody>
-          <a:bodyPr wrap="square" lIns="0" tIns="0" rIns="0" bIns="0" rtlCol="0" anchor="ctr"/>
-          <a:lstStyle/>
-          <a:p>
-            <a:pPr indent="0" marL="0">
-              <a:buNone/>
-            </a:pPr>
-            <a:r>
-              <a:rPr lang="en-US" sz="800" dirty="0">
-                <a:solidFill>
-                  <a:srgbClr val="5F7181"/>
-                </a:solidFill>
-                <a:latin typeface="Aptos" pitchFamily="34" charset="0"/>
-                <a:ea typeface="Aptos" pitchFamily="34" charset="-122"/>
-                <a:cs typeface="Aptos" pitchFamily="34" charset="-120"/>
-              </a:rPr>
-              <a:t>AI Playbook and Toolkit for Public Health Departments</a:t>
-            </a:r>
-            <a:endParaRPr lang="en-US" sz="800" dirty="0"/>
-          </a:p>
-        </p:txBody>
-      </p:sp>
-      <p:sp>
-        <p:nvSpPr>
-          <p:cNvPr id="6" name="Text 4"/>
-          <p:cNvSpPr/>
-          <p:nvPr/>
-        </p:nvSpPr>
-        <p:spPr>
-          <a:xfrm>
-            <a:off x="9646920" y="6537960"/>
-            <a:ext cx="1965960" cy="201168"/>
-          </a:xfrm>
-          <a:prstGeom prst="rect">
-            <a:avLst/>
-          </a:prstGeom>
-          <a:noFill/>
-          <a:ln/>
-        </p:spPr>
-        <p:txBody>
-          <a:bodyPr wrap="square" lIns="0" tIns="0" rIns="0" bIns="0" rtlCol="0" anchor="ctr"/>
-          <a:lstStyle/>
-          <a:p>
-            <a:pPr algn="r" indent="0" marL="0">
-              <a:buNone/>
-            </a:pPr>
-            <a:r>
-              <a:rPr lang="en-US" sz="800" dirty="0">
-                <a:solidFill>
-                  <a:srgbClr val="5F7181"/>
-                </a:solidFill>
-                <a:latin typeface="Aptos" pitchFamily="34" charset="0"/>
-                <a:ea typeface="Aptos" pitchFamily="34" charset="-122"/>
-                <a:cs typeface="Aptos" pitchFamily="34" charset="-120"/>
-              </a:rPr>
-              <a:t>Copyright Paula Soper</a:t>
-            </a:r>
-            <a:endParaRPr lang="en-US" sz="800" dirty="0"/>
-          </a:p>
-        </p:txBody>
-      </p:sp>
-      <p:sp>
-        <p:nvSpPr>
-          <p:cNvPr id="7" name="Text 5"/>
-          <p:cNvSpPr/>
-          <p:nvPr/>
-        </p:nvSpPr>
-        <p:spPr>
-          <a:xfrm>
-            <a:off x="11137392" y="6510528"/>
-            <a:ext cx="411480" cy="201168"/>
-          </a:xfrm>
-          <a:prstGeom prst="rect">
-            <a:avLst/>
-          </a:prstGeom>
-          <a:noFill/>
-          <a:ln/>
-        </p:spPr>
-        <p:txBody>
-          <a:bodyPr wrap="square" lIns="0" tIns="0" rIns="0" bIns="0" rtlCol="0" anchor="ctr"/>
-          <a:lstStyle/>
-          <a:p>
-            <a:pPr algn="r" indent="0" marL="0">
-              <a:buNone/>
-            </a:pPr>
-            <a:r>
-              <a:rPr lang="en-US" sz="900" dirty="0">
-                <a:solidFill>
-                  <a:srgbClr val="5F7181"/>
-                </a:solidFill>
-                <a:latin typeface="Aptos" pitchFamily="34" charset="0"/>
-                <a:ea typeface="Aptos" pitchFamily="34" charset="-122"/>
-                <a:cs typeface="Aptos" pitchFamily="34" charset="-120"/>
-              </a:rPr>
-              <a:t>28</a:t>
-            </a:r>
-            <a:endParaRPr lang="en-US" sz="900" dirty="0"/>
-          </a:p>
-        </p:txBody>
-      </p:sp>
-      <p:sp>
-        <p:nvSpPr>
-          <p:cNvPr id="8" name="Text 6"/>
-          <p:cNvSpPr/>
-          <p:nvPr/>
-        </p:nvSpPr>
-        <p:spPr>
-          <a:xfrm>
-            <a:off x="640080" y="658368"/>
-            <a:ext cx="10881360" cy="713232"/>
-          </a:xfrm>
-          <a:prstGeom prst="rect">
-            <a:avLst/>
-          </a:prstGeom>
-          <a:noFill/>
-          <a:ln/>
-        </p:spPr>
-        <p:txBody>
-          <a:bodyPr wrap="square" lIns="0" tIns="0" rIns="0" bIns="0" rtlCol="0" anchor="ctr">
-            <a:normAutofit/>
-          </a:bodyPr>
-          <a:lstStyle/>
-          <a:p>
-            <a:pPr indent="0" marL="0">
-              <a:buNone/>
-            </a:pPr>
-            <a:r>
-              <a:rPr lang="en-US" sz="3400" b="1" dirty="0">
-                <a:solidFill>
-                  <a:srgbClr val="003A63"/>
-                </a:solidFill>
-                <a:latin typeface="Aptos Display" pitchFamily="34" charset="0"/>
-                <a:ea typeface="Aptos Display" pitchFamily="34" charset="-122"/>
-                <a:cs typeface="Aptos Display" pitchFamily="34" charset="-120"/>
-              </a:rPr>
-              <a:t>Knowledge Check</a:t>
-            </a:r>
-            <a:endParaRPr lang="en-US" sz="3400" dirty="0"/>
-          </a:p>
-        </p:txBody>
-      </p:sp>
-      <p:sp>
-        <p:nvSpPr>
-          <p:cNvPr id="9" name="Text 7"/>
-          <p:cNvSpPr/>
-          <p:nvPr/>
-        </p:nvSpPr>
-        <p:spPr>
-          <a:xfrm>
-            <a:off x="822960" y="1463040"/>
-            <a:ext cx="6565392" cy="4343400"/>
-          </a:xfrm>
-          <a:prstGeom prst="rect">
-            <a:avLst/>
-          </a:prstGeom>
-          <a:noFill/>
-          <a:ln/>
-        </p:spPr>
-        <p:txBody>
-          <a:bodyPr wrap="square" lIns="1016" tIns="1016" rIns="1016" bIns="1016" rtlCol="0" anchor="t">
-            <a:normAutofit/>
-          </a:bodyPr>
-          <a:lstStyle/>
-          <a:p>
-            <a:pPr indent="0" marL="0">
-              <a:buNone/>
-            </a:pPr>
-            <a:r>
-              <a:rPr lang="en-US" sz="1920" dirty="0">
-                <a:solidFill>
-                  <a:srgbClr val="003A63"/>
-                </a:solidFill>
-                <a:latin typeface="Aptos" pitchFamily="34" charset="0"/>
-                <a:ea typeface="Aptos" pitchFamily="34" charset="-122"/>
-                <a:cs typeface="Aptos" pitchFamily="34" charset="-120"/>
-              </a:rPr>
-              <a:t>1. Why should Tribal sovereignty be considered before an AI project with.</a:t>
-            </a:r>
-            <a:endParaRPr lang="en-US" sz="1920" dirty="0"/>
-          </a:p>
-          <a:p>
-            <a:pPr indent="0" marL="0">
-              <a:buNone/>
-            </a:pPr>
-            <a:r>
-              <a:rPr lang="en-US" sz="1920" dirty="0">
-                <a:solidFill>
-                  <a:srgbClr val="003A63"/>
-                </a:solidFill>
-                <a:latin typeface="Aptos" pitchFamily="34" charset="0"/>
-                <a:ea typeface="Aptos" pitchFamily="34" charset="-122"/>
-                <a:cs typeface="Aptos" pitchFamily="34" charset="-120"/>
-              </a:rPr>
-              <a:t>2. Which statement best reflects Indigenous Data Sovereignty?</a:t>
-            </a:r>
-            <a:endParaRPr lang="en-US" sz="1920" dirty="0"/>
-          </a:p>
-          <a:p>
-            <a:pPr indent="0" marL="0">
-              <a:buNone/>
-            </a:pPr>
-            <a:r>
-              <a:rPr lang="en-US" sz="1920" dirty="0">
-                <a:solidFill>
-                  <a:srgbClr val="003A63"/>
-                </a:solidFill>
-                <a:latin typeface="Aptos" pitchFamily="34" charset="0"/>
-                <a:ea typeface="Aptos" pitchFamily="34" charset="-122"/>
-                <a:cs typeface="Aptos" pitchFamily="34" charset="-120"/>
-              </a:rPr>
-              <a:t>3. Which AI practice should be avoided unless explicitly approved through.</a:t>
-            </a:r>
-            <a:endParaRPr lang="en-US" sz="1920" dirty="0"/>
-          </a:p>
-        </p:txBody>
-      </p:sp>
-      <p:sp>
-        <p:nvSpPr>
-          <p:cNvPr id="10" name="Shape 8"/>
-          <p:cNvSpPr/>
-          <p:nvPr/>
-        </p:nvSpPr>
-        <p:spPr>
-          <a:xfrm>
-            <a:off x="7543800" y="1325880"/>
-            <a:ext cx="3611880" cy="1261872"/>
-          </a:xfrm>
-          <a:prstGeom prst="roundRect">
-            <a:avLst>
-              <a:gd name="adj" fmla="val 8696"/>
-            </a:avLst>
-          </a:prstGeom>
-          <a:solidFill>
-            <a:srgbClr val="EEF8ED"/>
-          </a:solidFill>
-          <a:ln w="12700">
-            <a:solidFill>
-              <a:srgbClr val="B9D7E6"/>
-            </a:solidFill>
-            <a:prstDash val="solid"/>
-          </a:ln>
-        </p:spPr>
-      </p:sp>
-      <p:sp>
-        <p:nvSpPr>
-          <p:cNvPr id="11" name="Text 9"/>
-          <p:cNvSpPr/>
-          <p:nvPr/>
-        </p:nvSpPr>
-        <p:spPr>
-          <a:xfrm>
-            <a:off x="7708392" y="1453896"/>
-            <a:ext cx="3282696" cy="228600"/>
-          </a:xfrm>
-          <a:prstGeom prst="rect">
-            <a:avLst/>
-          </a:prstGeom>
-          <a:noFill/>
-          <a:ln/>
-        </p:spPr>
-        <p:txBody>
-          <a:bodyPr wrap="square" lIns="0" tIns="0" rIns="0" bIns="0" rtlCol="0" anchor="ctr"/>
-          <a:lstStyle/>
-          <a:p>
-            <a:pPr indent="0" marL="0">
-              <a:buNone/>
-            </a:pPr>
-            <a:r>
-              <a:rPr lang="en-US" sz="1220" b="1" dirty="0">
-                <a:solidFill>
-                  <a:srgbClr val="0068B7"/>
-                </a:solidFill>
-                <a:latin typeface="Aptos" pitchFamily="34" charset="0"/>
-                <a:ea typeface="Aptos" pitchFamily="34" charset="-122"/>
-                <a:cs typeface="Aptos" pitchFamily="34" charset="-120"/>
-              </a:rPr>
-              <a:t>Governance lens</a:t>
-            </a:r>
-            <a:endParaRPr lang="en-US" sz="1220" dirty="0"/>
-          </a:p>
-        </p:txBody>
-      </p:sp>
-      <p:sp>
-        <p:nvSpPr>
-          <p:cNvPr id="12" name="Text 10"/>
-          <p:cNvSpPr/>
-          <p:nvPr/>
-        </p:nvSpPr>
-        <p:spPr>
-          <a:xfrm>
-            <a:off x="7708392" y="1764792"/>
-            <a:ext cx="3282696" cy="749808"/>
-          </a:xfrm>
-          <a:prstGeom prst="rect">
-            <a:avLst/>
-          </a:prstGeom>
-          <a:noFill/>
-          <a:ln/>
-        </p:spPr>
-        <p:txBody>
-          <a:bodyPr wrap="square" lIns="254" tIns="254" rIns="254" bIns="254" rtlCol="0" anchor="t">
-            <a:normAutofit/>
-          </a:bodyPr>
-          <a:lstStyle/>
-          <a:p>
-            <a:pPr indent="0" marL="0">
-              <a:buNone/>
-            </a:pPr>
-            <a:r>
-              <a:rPr lang="en-US" sz="1220" dirty="0">
-                <a:solidFill>
-                  <a:srgbClr val="17364A"/>
-                </a:solidFill>
-                <a:latin typeface="Aptos" pitchFamily="34" charset="0"/>
-                <a:ea typeface="Aptos" pitchFamily="34" charset="-122"/>
-                <a:cs typeface="Aptos" pitchFamily="34" charset="-120"/>
-              </a:rPr>
-              <a:t>Why should Tribal sovereignty be considered before an AI project with health.</a:t>
-            </a:r>
-            <a:endParaRPr lang="en-US" sz="1220" dirty="0"/>
-          </a:p>
-        </p:txBody>
-      </p:sp>
-      <p:sp>
-        <p:nvSpPr>
-          <p:cNvPr id="13" name="Shape 11"/>
-          <p:cNvSpPr/>
-          <p:nvPr/>
-        </p:nvSpPr>
-        <p:spPr>
-          <a:xfrm>
-            <a:off x="7543800" y="2724912"/>
-            <a:ext cx="3611880" cy="1527048"/>
-          </a:xfrm>
-          <a:prstGeom prst="roundRect">
-            <a:avLst>
-              <a:gd name="adj" fmla="val 7186"/>
-            </a:avLst>
-          </a:prstGeom>
-          <a:solidFill>
-            <a:srgbClr val="FFFFFF"/>
-          </a:solidFill>
-          <a:ln w="12700">
-            <a:solidFill>
-              <a:srgbClr val="B9D7E6"/>
-            </a:solidFill>
-            <a:prstDash val="solid"/>
-          </a:ln>
-        </p:spPr>
-      </p:sp>
-      <p:sp>
-        <p:nvSpPr>
-          <p:cNvPr id="14" name="Text 12"/>
-          <p:cNvSpPr/>
-          <p:nvPr/>
-        </p:nvSpPr>
-        <p:spPr>
-          <a:xfrm>
-            <a:off x="7708392" y="2852928"/>
-            <a:ext cx="3282696" cy="228600"/>
-          </a:xfrm>
-          <a:prstGeom prst="rect">
-            <a:avLst/>
-          </a:prstGeom>
-          <a:noFill/>
-          <a:ln/>
-        </p:spPr>
-        <p:txBody>
-          <a:bodyPr wrap="square" lIns="0" tIns="0" rIns="0" bIns="0" rtlCol="0" anchor="ctr"/>
-          <a:lstStyle/>
-          <a:p>
-            <a:pPr indent="0" marL="0">
-              <a:buNone/>
-            </a:pPr>
-            <a:r>
-              <a:rPr lang="en-US" sz="1220" b="1" dirty="0">
-                <a:solidFill>
-                  <a:srgbClr val="0068B7"/>
-                </a:solidFill>
-                <a:latin typeface="Aptos" pitchFamily="34" charset="0"/>
-                <a:ea typeface="Aptos" pitchFamily="34" charset="-122"/>
-                <a:cs typeface="Aptos" pitchFamily="34" charset="-120"/>
-              </a:rPr>
-              <a:t>Concept checkpoints</a:t>
-            </a:r>
-            <a:endParaRPr lang="en-US" sz="1220" dirty="0"/>
-          </a:p>
-        </p:txBody>
-      </p:sp>
-      <p:sp>
-        <p:nvSpPr>
-          <p:cNvPr id="15" name="Text 13"/>
-          <p:cNvSpPr/>
-          <p:nvPr/>
-        </p:nvSpPr>
-        <p:spPr>
-          <a:xfrm>
-            <a:off x="7726680" y="3182112"/>
-            <a:ext cx="3227832" cy="960120"/>
-          </a:xfrm>
-          <a:prstGeom prst="rect">
-            <a:avLst/>
-          </a:prstGeom>
-          <a:noFill/>
-          <a:ln/>
-        </p:spPr>
-        <p:txBody>
-          <a:bodyPr wrap="square" lIns="508" tIns="508" rIns="508" bIns="508" rtlCol="0" anchor="t">
-            <a:normAutofit/>
-          </a:bodyPr>
-          <a:lstStyle/>
-          <a:p>
-            <a:pPr indent="0" marL="0">
-              <a:buNone/>
-            </a:pPr>
-            <a:r>
-              <a:rPr lang="en-US" sz="1140" dirty="0">
-                <a:solidFill>
-                  <a:srgbClr val="17364A"/>
-                </a:solidFill>
-                <a:latin typeface="Aptos" pitchFamily="34" charset="0"/>
-                <a:ea typeface="Aptos" pitchFamily="34" charset="-122"/>
-                <a:cs typeface="Aptos" pitchFamily="34" charset="-120"/>
-              </a:rPr>
-              <a:t>Why should Tribal sovereignty be considered before.</a:t>
-            </a:r>
-            <a:endParaRPr lang="en-US" sz="1140" dirty="0"/>
-          </a:p>
-        </p:txBody>
-      </p:sp>
-      <p:sp>
-        <p:nvSpPr>
-          <p:cNvPr id="16" name="Shape 14"/>
-          <p:cNvSpPr/>
-          <p:nvPr/>
-        </p:nvSpPr>
-        <p:spPr>
-          <a:xfrm>
-            <a:off x="7543800" y="4389120"/>
-            <a:ext cx="3611880" cy="1261872"/>
-          </a:xfrm>
-          <a:prstGeom prst="roundRect">
-            <a:avLst>
-              <a:gd name="adj" fmla="val 8696"/>
-            </a:avLst>
-          </a:prstGeom>
-          <a:solidFill>
-            <a:srgbClr val="EAF6F8"/>
-          </a:solidFill>
-          <a:ln w="12700">
-            <a:solidFill>
-              <a:srgbClr val="B9D7E6"/>
-            </a:solidFill>
-            <a:prstDash val="solid"/>
-          </a:ln>
-        </p:spPr>
-      </p:sp>
-      <p:sp>
-        <p:nvSpPr>
-          <p:cNvPr id="17" name="Text 15"/>
-          <p:cNvSpPr/>
-          <p:nvPr/>
-        </p:nvSpPr>
-        <p:spPr>
-          <a:xfrm>
-            <a:off x="7708392" y="4517136"/>
-            <a:ext cx="3282696" cy="228600"/>
-          </a:xfrm>
-          <a:prstGeom prst="rect">
-            <a:avLst/>
-          </a:prstGeom>
-          <a:noFill/>
-          <a:ln/>
-        </p:spPr>
-        <p:txBody>
-          <a:bodyPr wrap="square" lIns="0" tIns="0" rIns="0" bIns="0" rtlCol="0" anchor="ctr"/>
-          <a:lstStyle/>
-          <a:p>
-            <a:pPr indent="0" marL="0">
-              <a:buNone/>
-            </a:pPr>
-            <a:r>
-              <a:rPr lang="en-US" sz="1220" b="1" dirty="0">
-                <a:solidFill>
-                  <a:srgbClr val="0068B7"/>
-                </a:solidFill>
-                <a:latin typeface="Aptos" pitchFamily="34" charset="0"/>
-                <a:ea typeface="Aptos" pitchFamily="34" charset="-122"/>
-                <a:cs typeface="Aptos" pitchFamily="34" charset="-120"/>
-              </a:rPr>
-              <a:t>What to document</a:t>
-            </a:r>
-            <a:endParaRPr lang="en-US" sz="1220" dirty="0"/>
-          </a:p>
-        </p:txBody>
-      </p:sp>
-      <p:sp>
-        <p:nvSpPr>
-          <p:cNvPr id="18" name="Text 16"/>
-          <p:cNvSpPr/>
-          <p:nvPr/>
-        </p:nvSpPr>
-        <p:spPr>
-          <a:xfrm>
-            <a:off x="7708392" y="4828032"/>
-            <a:ext cx="3282696" cy="749808"/>
-          </a:xfrm>
-          <a:prstGeom prst="rect">
-            <a:avLst/>
-          </a:prstGeom>
-          <a:noFill/>
-          <a:ln/>
-        </p:spPr>
-        <p:txBody>
-          <a:bodyPr wrap="square" lIns="254" tIns="254" rIns="254" bIns="254" rtlCol="0" anchor="t">
-            <a:normAutofit/>
-          </a:bodyPr>
-          <a:lstStyle/>
-          <a:p>
-            <a:pPr indent="0" marL="0">
-              <a:buNone/>
-            </a:pPr>
-            <a:r>
-              <a:rPr lang="en-US" sz="1220" dirty="0">
-                <a:solidFill>
-                  <a:srgbClr val="17364A"/>
-                </a:solidFill>
-                <a:latin typeface="Aptos" pitchFamily="34" charset="0"/>
-                <a:ea typeface="Aptos" pitchFamily="34" charset="-122"/>
-                <a:cs typeface="Aptos" pitchFamily="34" charset="-120"/>
-              </a:rPr>
-              <a:t>Use the assignment to test whether you can explain the concept, apply it to a.</a:t>
-            </a:r>
-            <a:endParaRPr lang="en-US" sz="1220" dirty="0"/>
-          </a:p>
-        </p:txBody>
-      </p:sp>
-    </p:spTree>
-  </p:cSld>
-  <p:clrMapOvr>
-    <a:masterClrMapping/>
-  </p:clrMapOvr>
-</p:sld>
-</file>
-
-<file path=ppt/slides/slide29.xml><?xml version="1.0" encoding="utf-8"?>
-<p:sld xmlns:a="http://schemas.openxmlformats.org/drawingml/2006/main" xmlns:r="http://schemas.openxmlformats.org/officeDocument/2006/relationships" xmlns:p="http://schemas.openxmlformats.org/presentationml/2006/main">
-  <p:cSld name="Slide 29">
-    <p:bg>
-      <p:bgPr>
-        <a:solidFill>
-          <a:srgbClr val="F7FBFD"/>
-        </a:solidFill>
-      </p:bgPr>
-    </p:bg>
-    <p:spTree>
-      <p:nvGrpSpPr>
-        <p:cNvPr id="1" name=""/>
-        <p:cNvGrpSpPr/>
-        <p:nvPr/>
-      </p:nvGrpSpPr>
-      <p:grpSpPr>
-        <a:xfrm>
-          <a:off x="0" y="0"/>
-          <a:ext cx="0" cy="0"/>
-          <a:chOff x="0" y="0"/>
-          <a:chExt cx="0" cy="0"/>
-        </a:xfrm>
-      </p:grpSpPr>
-      <p:sp>
-        <p:nvSpPr>
-          <p:cNvPr id="2" name="Shape 0"/>
-          <p:cNvSpPr/>
-          <p:nvPr/>
-        </p:nvSpPr>
-        <p:spPr>
-          <a:xfrm>
-            <a:off x="0" y="0"/>
-            <a:ext cx="12191695" cy="164592"/>
-          </a:xfrm>
-          <a:prstGeom prst="rect">
-            <a:avLst/>
-          </a:prstGeom>
-          <a:solidFill>
-            <a:srgbClr val="0068B7"/>
-          </a:solidFill>
-          <a:ln w="12700">
-            <a:solidFill>
-              <a:srgbClr val="0068B7"/>
-            </a:solidFill>
-            <a:prstDash val="solid"/>
-          </a:ln>
-        </p:spPr>
-      </p:sp>
-      <p:sp>
-        <p:nvSpPr>
-          <p:cNvPr id="3" name="Shape 1"/>
-          <p:cNvSpPr/>
-          <p:nvPr/>
-        </p:nvSpPr>
-        <p:spPr>
-          <a:xfrm>
-            <a:off x="0" y="164592"/>
-            <a:ext cx="146304" cy="6693408"/>
-          </a:xfrm>
-          <a:prstGeom prst="rect">
-            <a:avLst/>
-          </a:prstGeom>
-          <a:solidFill>
-            <a:srgbClr val="2F8A28"/>
-          </a:solidFill>
-          <a:ln w="12700">
-            <a:solidFill>
-              <a:srgbClr val="2F8A28"/>
-            </a:solidFill>
-            <a:prstDash val="solid"/>
-          </a:ln>
-        </p:spPr>
-      </p:sp>
-      <p:sp>
-        <p:nvSpPr>
-          <p:cNvPr id="4" name="Text 2"/>
-          <p:cNvSpPr/>
-          <p:nvPr/>
-        </p:nvSpPr>
-        <p:spPr>
-          <a:xfrm>
-            <a:off x="502920" y="292608"/>
-            <a:ext cx="10149840" cy="256032"/>
-          </a:xfrm>
-          <a:prstGeom prst="rect">
-            <a:avLst/>
-          </a:prstGeom>
-          <a:noFill/>
-          <a:ln/>
-        </p:spPr>
-        <p:txBody>
-          <a:bodyPr wrap="square" lIns="0" tIns="0" rIns="0" bIns="0" rtlCol="0" anchor="ctr"/>
-          <a:lstStyle/>
-          <a:p>
-            <a:pPr indent="0" marL="0">
-              <a:buNone/>
-            </a:pPr>
-            <a:r>
-              <a:rPr lang="en-US" sz="900" b="1" dirty="0">
-                <a:solidFill>
-                  <a:srgbClr val="5F7181"/>
-                </a:solidFill>
-                <a:latin typeface="Aptos" pitchFamily="34" charset="0"/>
-                <a:ea typeface="Aptos" pitchFamily="34" charset="-122"/>
-                <a:cs typeface="Aptos" pitchFamily="34" charset="-120"/>
-              </a:rPr>
-              <a:t>Respecting Tribal Sovereignty and Indigenous Data Governance in Public Health AI Projects</a:t>
-            </a:r>
-            <a:endParaRPr lang="en-US" sz="900" dirty="0"/>
-          </a:p>
-        </p:txBody>
-      </p:sp>
-      <p:sp>
-        <p:nvSpPr>
-          <p:cNvPr id="5" name="Text 3"/>
-          <p:cNvSpPr/>
-          <p:nvPr/>
-        </p:nvSpPr>
-        <p:spPr>
-          <a:xfrm>
-            <a:off x="502920" y="6537960"/>
-            <a:ext cx="7772400" cy="201168"/>
-          </a:xfrm>
-          <a:prstGeom prst="rect">
-            <a:avLst/>
-          </a:prstGeom>
-          <a:noFill/>
-          <a:ln/>
-        </p:spPr>
-        <p:txBody>
-          <a:bodyPr wrap="square" lIns="0" tIns="0" rIns="0" bIns="0" rtlCol="0" anchor="ctr"/>
-          <a:lstStyle/>
-          <a:p>
-            <a:pPr indent="0" marL="0">
-              <a:buNone/>
-            </a:pPr>
-            <a:r>
-              <a:rPr lang="en-US" sz="800" dirty="0">
-                <a:solidFill>
-                  <a:srgbClr val="5F7181"/>
-                </a:solidFill>
-                <a:latin typeface="Aptos" pitchFamily="34" charset="0"/>
-                <a:ea typeface="Aptos" pitchFamily="34" charset="-122"/>
-                <a:cs typeface="Aptos" pitchFamily="34" charset="-120"/>
-              </a:rPr>
-              <a:t>AI Playbook and Toolkit for Public Health Departments</a:t>
-            </a:r>
-            <a:endParaRPr lang="en-US" sz="800" dirty="0"/>
-          </a:p>
-        </p:txBody>
-      </p:sp>
-      <p:sp>
-        <p:nvSpPr>
-          <p:cNvPr id="6" name="Text 4"/>
-          <p:cNvSpPr/>
-          <p:nvPr/>
-        </p:nvSpPr>
-        <p:spPr>
-          <a:xfrm>
-            <a:off x="9646920" y="6537960"/>
-            <a:ext cx="1965960" cy="201168"/>
-          </a:xfrm>
-          <a:prstGeom prst="rect">
-            <a:avLst/>
-          </a:prstGeom>
-          <a:noFill/>
-          <a:ln/>
-        </p:spPr>
-        <p:txBody>
-          <a:bodyPr wrap="square" lIns="0" tIns="0" rIns="0" bIns="0" rtlCol="0" anchor="ctr"/>
-          <a:lstStyle/>
-          <a:p>
-            <a:pPr algn="r" indent="0" marL="0">
-              <a:buNone/>
-            </a:pPr>
-            <a:r>
-              <a:rPr lang="en-US" sz="800" dirty="0">
-                <a:solidFill>
-                  <a:srgbClr val="5F7181"/>
-                </a:solidFill>
-                <a:latin typeface="Aptos" pitchFamily="34" charset="0"/>
-                <a:ea typeface="Aptos" pitchFamily="34" charset="-122"/>
-                <a:cs typeface="Aptos" pitchFamily="34" charset="-120"/>
-              </a:rPr>
-              <a:t>Copyright Paula Soper</a:t>
-            </a:r>
-            <a:endParaRPr lang="en-US" sz="800" dirty="0"/>
-          </a:p>
-        </p:txBody>
-      </p:sp>
-      <p:sp>
-        <p:nvSpPr>
-          <p:cNvPr id="7" name="Text 5"/>
-          <p:cNvSpPr/>
-          <p:nvPr/>
-        </p:nvSpPr>
-        <p:spPr>
-          <a:xfrm>
-            <a:off x="11137392" y="6510528"/>
-            <a:ext cx="411480" cy="201168"/>
-          </a:xfrm>
-          <a:prstGeom prst="rect">
-            <a:avLst/>
-          </a:prstGeom>
-          <a:noFill/>
-          <a:ln/>
-        </p:spPr>
-        <p:txBody>
-          <a:bodyPr wrap="square" lIns="0" tIns="0" rIns="0" bIns="0" rtlCol="0" anchor="ctr"/>
-          <a:lstStyle/>
-          <a:p>
-            <a:pPr algn="r" indent="0" marL="0">
-              <a:buNone/>
-            </a:pPr>
-            <a:r>
-              <a:rPr lang="en-US" sz="900" dirty="0">
-                <a:solidFill>
-                  <a:srgbClr val="5F7181"/>
-                </a:solidFill>
-                <a:latin typeface="Aptos" pitchFamily="34" charset="0"/>
-                <a:ea typeface="Aptos" pitchFamily="34" charset="-122"/>
-                <a:cs typeface="Aptos" pitchFamily="34" charset="-120"/>
-              </a:rPr>
-              <a:t>29</a:t>
-            </a:r>
-            <a:endParaRPr lang="en-US" sz="900" dirty="0"/>
-          </a:p>
-        </p:txBody>
-      </p:sp>
-      <p:sp>
-        <p:nvSpPr>
-          <p:cNvPr id="8" name="Text 6"/>
-          <p:cNvSpPr/>
-          <p:nvPr/>
-        </p:nvSpPr>
-        <p:spPr>
-          <a:xfrm>
-            <a:off x="640080" y="658368"/>
-            <a:ext cx="10881360" cy="713232"/>
-          </a:xfrm>
-          <a:prstGeom prst="rect">
-            <a:avLst/>
-          </a:prstGeom>
-          <a:noFill/>
-          <a:ln/>
-        </p:spPr>
-        <p:txBody>
-          <a:bodyPr wrap="square" lIns="0" tIns="0" rIns="0" bIns="0" rtlCol="0" anchor="ctr">
-            <a:normAutofit/>
-          </a:bodyPr>
-          <a:lstStyle/>
-          <a:p>
-            <a:pPr indent="0" marL="0">
-              <a:buNone/>
-            </a:pPr>
-            <a:r>
-              <a:rPr lang="en-US" sz="3400" b="1" dirty="0">
-                <a:solidFill>
-                  <a:srgbClr val="003A63"/>
-                </a:solidFill>
-                <a:latin typeface="Aptos Display" pitchFamily="34" charset="0"/>
-                <a:ea typeface="Aptos Display" pitchFamily="34" charset="-122"/>
-                <a:cs typeface="Aptos Display" pitchFamily="34" charset="-120"/>
-              </a:rPr>
-              <a:t>References and Resources</a:t>
-            </a:r>
-            <a:endParaRPr lang="en-US" sz="3400" dirty="0"/>
-          </a:p>
-        </p:txBody>
-      </p:sp>
-      <p:sp>
-        <p:nvSpPr>
-          <p:cNvPr id="9" name="Text 7"/>
-          <p:cNvSpPr/>
-          <p:nvPr/>
-        </p:nvSpPr>
-        <p:spPr>
-          <a:xfrm>
-            <a:off x="822960" y="1463040"/>
-            <a:ext cx="6565392" cy="4343400"/>
-          </a:xfrm>
-          <a:prstGeom prst="rect">
-            <a:avLst/>
-          </a:prstGeom>
-          <a:noFill/>
-          <a:ln/>
-        </p:spPr>
-        <p:txBody>
-          <a:bodyPr wrap="square" lIns="1016" tIns="1016" rIns="1016" bIns="1016" rtlCol="0" anchor="t">
-            <a:normAutofit/>
-          </a:bodyPr>
-          <a:lstStyle/>
-          <a:p>
-            <a:pPr indent="0" marL="0">
-              <a:buNone/>
-            </a:pPr>
-            <a:r>
-              <a:rPr lang="en-US" sz="1920" dirty="0">
-                <a:solidFill>
-                  <a:srgbClr val="003A63"/>
-                </a:solidFill>
-                <a:latin typeface="Aptos" pitchFamily="34" charset="0"/>
-                <a:ea typeface="Aptos" pitchFamily="34" charset="-122"/>
-                <a:cs typeface="Aptos" pitchFamily="34" charset="-120"/>
-              </a:rPr>
-              <a:t>• Global Indigenous Data Alliance. CARE Principles for Indigenous Data.</a:t>
-            </a:r>
-            <a:endParaRPr lang="en-US" sz="1920" dirty="0"/>
-          </a:p>
-          <a:p>
-            <a:pPr indent="0" marL="0">
-              <a:buNone/>
-            </a:pPr>
-            <a:r>
-              <a:rPr lang="en-US" sz="1920" dirty="0">
-                <a:solidFill>
-                  <a:srgbClr val="003A63"/>
-                </a:solidFill>
-                <a:latin typeface="Aptos" pitchFamily="34" charset="0"/>
-                <a:ea typeface="Aptos" pitchFamily="34" charset="-122"/>
-                <a:cs typeface="Aptos" pitchFamily="34" charset="-120"/>
-              </a:rPr>
-              <a:t>• National Institutes of Health. NOT-OD-22-214: Supplemental Information to.</a:t>
-            </a:r>
-            <a:endParaRPr lang="en-US" sz="1920" dirty="0"/>
-          </a:p>
-          <a:p>
-            <a:pPr indent="0" marL="0">
-              <a:buNone/>
-            </a:pPr>
-            <a:r>
-              <a:rPr lang="en-US" sz="1920" dirty="0">
-                <a:solidFill>
-                  <a:srgbClr val="003A63"/>
-                </a:solidFill>
-                <a:latin typeface="Aptos" pitchFamily="34" charset="0"/>
-                <a:ea typeface="Aptos" pitchFamily="34" charset="-122"/>
-                <a:cs typeface="Aptos" pitchFamily="34" charset="-120"/>
-              </a:rPr>
-              <a:t>• National Institutes of Health Tribal Health Research Office. Tribal Health.</a:t>
-            </a:r>
-            <a:endParaRPr lang="en-US" sz="1920" dirty="0"/>
-          </a:p>
-        </p:txBody>
-      </p:sp>
-      <p:sp>
-        <p:nvSpPr>
-          <p:cNvPr id="10" name="Shape 8"/>
-          <p:cNvSpPr/>
-          <p:nvPr/>
-        </p:nvSpPr>
-        <p:spPr>
-          <a:xfrm>
-            <a:off x="7543800" y="1325880"/>
-            <a:ext cx="3611880" cy="1261872"/>
-          </a:xfrm>
-          <a:prstGeom prst="roundRect">
-            <a:avLst>
-              <a:gd name="adj" fmla="val 8696"/>
-            </a:avLst>
-          </a:prstGeom>
-          <a:solidFill>
-            <a:srgbClr val="EEF8ED"/>
-          </a:solidFill>
-          <a:ln w="12700">
-            <a:solidFill>
-              <a:srgbClr val="B9D7E6"/>
-            </a:solidFill>
-            <a:prstDash val="solid"/>
-          </a:ln>
-        </p:spPr>
-      </p:sp>
-      <p:sp>
-        <p:nvSpPr>
-          <p:cNvPr id="11" name="Text 9"/>
-          <p:cNvSpPr/>
-          <p:nvPr/>
-        </p:nvSpPr>
-        <p:spPr>
-          <a:xfrm>
-            <a:off x="7708392" y="1453896"/>
-            <a:ext cx="3282696" cy="228600"/>
-          </a:xfrm>
-          <a:prstGeom prst="rect">
-            <a:avLst/>
-          </a:prstGeom>
-          <a:noFill/>
-          <a:ln/>
-        </p:spPr>
-        <p:txBody>
-          <a:bodyPr wrap="square" lIns="0" tIns="0" rIns="0" bIns="0" rtlCol="0" anchor="ctr"/>
-          <a:lstStyle/>
-          <a:p>
-            <a:pPr indent="0" marL="0">
-              <a:buNone/>
-            </a:pPr>
-            <a:r>
-              <a:rPr lang="en-US" sz="1220" b="1" dirty="0">
-                <a:solidFill>
-                  <a:srgbClr val="0068B7"/>
-                </a:solidFill>
-                <a:latin typeface="Aptos" pitchFamily="34" charset="0"/>
-                <a:ea typeface="Aptos" pitchFamily="34" charset="-122"/>
-                <a:cs typeface="Aptos" pitchFamily="34" charset="-120"/>
-              </a:rPr>
-              <a:t>Governance lens</a:t>
-            </a:r>
-            <a:endParaRPr lang="en-US" sz="1220" dirty="0"/>
-          </a:p>
-        </p:txBody>
-      </p:sp>
-      <p:sp>
-        <p:nvSpPr>
-          <p:cNvPr id="12" name="Text 10"/>
-          <p:cNvSpPr/>
-          <p:nvPr/>
-        </p:nvSpPr>
-        <p:spPr>
-          <a:xfrm>
-            <a:off x="7708392" y="1764792"/>
-            <a:ext cx="3282696" cy="749808"/>
-          </a:xfrm>
-          <a:prstGeom prst="rect">
-            <a:avLst/>
-          </a:prstGeom>
-          <a:noFill/>
-          <a:ln/>
-        </p:spPr>
-        <p:txBody>
-          <a:bodyPr wrap="square" lIns="254" tIns="254" rIns="254" bIns="254" rtlCol="0" anchor="t">
-            <a:normAutofit/>
-          </a:bodyPr>
-          <a:lstStyle/>
-          <a:p>
-            <a:pPr indent="0" marL="0">
-              <a:buNone/>
-            </a:pPr>
-            <a:r>
-              <a:rPr lang="en-US" sz="1220" dirty="0">
-                <a:solidFill>
-                  <a:srgbClr val="17364A"/>
-                </a:solidFill>
-                <a:latin typeface="Aptos" pitchFamily="34" charset="0"/>
-                <a:ea typeface="Aptos" pitchFamily="34" charset="-122"/>
-                <a:cs typeface="Aptos" pitchFamily="34" charset="-120"/>
-              </a:rPr>
-              <a:t>Global Indigenous Data Alliance. CARE Principles for Indigenous Data Governance.:.</a:t>
-            </a:r>
-            <a:endParaRPr lang="en-US" sz="1220" dirty="0"/>
-          </a:p>
-        </p:txBody>
-      </p:sp>
-      <p:sp>
-        <p:nvSpPr>
-          <p:cNvPr id="13" name="Shape 11"/>
-          <p:cNvSpPr/>
-          <p:nvPr/>
-        </p:nvSpPr>
-        <p:spPr>
-          <a:xfrm>
-            <a:off x="7543800" y="2724912"/>
-            <a:ext cx="3611880" cy="1527048"/>
-          </a:xfrm>
-          <a:prstGeom prst="roundRect">
-            <a:avLst>
-              <a:gd name="adj" fmla="val 7186"/>
-            </a:avLst>
-          </a:prstGeom>
-          <a:solidFill>
-            <a:srgbClr val="FFFFFF"/>
-          </a:solidFill>
-          <a:ln w="12700">
-            <a:solidFill>
-              <a:srgbClr val="B9D7E6"/>
-            </a:solidFill>
-            <a:prstDash val="solid"/>
-          </a:ln>
-        </p:spPr>
-      </p:sp>
-      <p:sp>
-        <p:nvSpPr>
-          <p:cNvPr id="14" name="Text 12"/>
-          <p:cNvSpPr/>
-          <p:nvPr/>
-        </p:nvSpPr>
-        <p:spPr>
-          <a:xfrm>
-            <a:off x="7708392" y="2852928"/>
-            <a:ext cx="3282696" cy="228600"/>
-          </a:xfrm>
-          <a:prstGeom prst="rect">
-            <a:avLst/>
-          </a:prstGeom>
-          <a:noFill/>
-          <a:ln/>
-        </p:spPr>
-        <p:txBody>
-          <a:bodyPr wrap="square" lIns="0" tIns="0" rIns="0" bIns="0" rtlCol="0" anchor="ctr"/>
-          <a:lstStyle/>
-          <a:p>
-            <a:pPr indent="0" marL="0">
-              <a:buNone/>
-            </a:pPr>
-            <a:r>
-              <a:rPr lang="en-US" sz="1220" b="1" dirty="0">
-                <a:solidFill>
-                  <a:srgbClr val="0068B7"/>
-                </a:solidFill>
-                <a:latin typeface="Aptos" pitchFamily="34" charset="0"/>
-                <a:ea typeface="Aptos" pitchFamily="34" charset="-122"/>
-                <a:cs typeface="Aptos" pitchFamily="34" charset="-120"/>
-              </a:rPr>
-              <a:t>Concept checkpoints</a:t>
-            </a:r>
-            <a:endParaRPr lang="en-US" sz="1220" dirty="0"/>
-          </a:p>
-        </p:txBody>
-      </p:sp>
-      <p:sp>
-        <p:nvSpPr>
-          <p:cNvPr id="15" name="Text 13"/>
-          <p:cNvSpPr/>
-          <p:nvPr/>
-        </p:nvSpPr>
-        <p:spPr>
-          <a:xfrm>
-            <a:off x="7726680" y="3182112"/>
-            <a:ext cx="3227832" cy="960120"/>
-          </a:xfrm>
-          <a:prstGeom prst="rect">
-            <a:avLst/>
-          </a:prstGeom>
-          <a:noFill/>
-          <a:ln/>
-        </p:spPr>
-        <p:txBody>
-          <a:bodyPr wrap="square" lIns="508" tIns="508" rIns="508" bIns="508" rtlCol="0" anchor="t">
-            <a:normAutofit/>
-          </a:bodyPr>
-          <a:lstStyle/>
-          <a:p>
-            <a:pPr indent="0" marL="0">
-              <a:buNone/>
-            </a:pPr>
-            <a:r>
-              <a:rPr lang="en-US" sz="1140" dirty="0">
-                <a:solidFill>
-                  <a:srgbClr val="17364A"/>
-                </a:solidFill>
-                <a:latin typeface="Aptos" pitchFamily="34" charset="0"/>
-                <a:ea typeface="Aptos" pitchFamily="34" charset="-122"/>
-                <a:cs typeface="Aptos" pitchFamily="34" charset="-120"/>
-              </a:rPr>
-              <a:t>Global Indigenous Data Alliance.</a:t>
-            </a:r>
-            <a:endParaRPr lang="en-US" sz="1140" dirty="0"/>
-          </a:p>
-          <a:p>
-            <a:pPr indent="0" marL="0">
-              <a:buNone/>
-            </a:pPr>
-            <a:r>
-              <a:rPr lang="en-US" sz="1140" dirty="0">
-                <a:solidFill>
-                  <a:srgbClr val="17364A"/>
-                </a:solidFill>
-                <a:latin typeface="Aptos" pitchFamily="34" charset="0"/>
-                <a:ea typeface="Aptos" pitchFamily="34" charset="-122"/>
-                <a:cs typeface="Aptos" pitchFamily="34" charset="-120"/>
-              </a:rPr>
-              <a:t>CARE Principles for Indigenous Data Governance.:.</a:t>
-            </a:r>
-            <a:endParaRPr lang="en-US" sz="1140" dirty="0"/>
-          </a:p>
-          <a:p>
-            <a:pPr indent="0" marL="0">
-              <a:buNone/>
-            </a:pPr>
-            <a:r>
-              <a:rPr lang="en-US" sz="1140" dirty="0">
-                <a:solidFill>
-                  <a:srgbClr val="17364A"/>
-                </a:solidFill>
-                <a:latin typeface="Aptos" pitchFamily="34" charset="0"/>
-                <a:ea typeface="Aptos" pitchFamily="34" charset="-122"/>
-                <a:cs typeface="Aptos" pitchFamily="34" charset="-120"/>
-              </a:rPr>
-              <a:t>National Institutes of Health.</a:t>
             </a:r>
             <a:endParaRPr lang="en-US" sz="1140" dirty="0"/>
           </a:p>
@@ -19496,698 +16214,6 @@
               <a:t>Document the review, approval, or implementation.</a:t>
             </a:r>
             <a:endParaRPr lang="en-US" sz="1140" dirty="0"/>
-          </a:p>
-        </p:txBody>
-      </p:sp>
-    </p:spTree>
-  </p:cSld>
-  <p:clrMapOvr>
-    <a:masterClrMapping/>
-  </p:clrMapOvr>
-</p:sld>
-</file>
-
-<file path=ppt/slides/slide30.xml><?xml version="1.0" encoding="utf-8"?>
-<p:sld xmlns:a="http://schemas.openxmlformats.org/drawingml/2006/main" xmlns:r="http://schemas.openxmlformats.org/officeDocument/2006/relationships" xmlns:p="http://schemas.openxmlformats.org/presentationml/2006/main">
-  <p:cSld name="Slide 30">
-    <p:bg>
-      <p:bgPr>
-        <a:solidFill>
-          <a:srgbClr val="F7FBFD"/>
-        </a:solidFill>
-      </p:bgPr>
-    </p:bg>
-    <p:spTree>
-      <p:nvGrpSpPr>
-        <p:cNvPr id="1" name=""/>
-        <p:cNvGrpSpPr/>
-        <p:nvPr/>
-      </p:nvGrpSpPr>
-      <p:grpSpPr>
-        <a:xfrm>
-          <a:off x="0" y="0"/>
-          <a:ext cx="0" cy="0"/>
-          <a:chOff x="0" y="0"/>
-          <a:chExt cx="0" cy="0"/>
-        </a:xfrm>
-      </p:grpSpPr>
-      <p:sp>
-        <p:nvSpPr>
-          <p:cNvPr id="2" name="Shape 0"/>
-          <p:cNvSpPr/>
-          <p:nvPr/>
-        </p:nvSpPr>
-        <p:spPr>
-          <a:xfrm>
-            <a:off x="0" y="0"/>
-            <a:ext cx="12191695" cy="164592"/>
-          </a:xfrm>
-          <a:prstGeom prst="rect">
-            <a:avLst/>
-          </a:prstGeom>
-          <a:solidFill>
-            <a:srgbClr val="0068B7"/>
-          </a:solidFill>
-          <a:ln w="12700">
-            <a:solidFill>
-              <a:srgbClr val="0068B7"/>
-            </a:solidFill>
-            <a:prstDash val="solid"/>
-          </a:ln>
-        </p:spPr>
-      </p:sp>
-      <p:sp>
-        <p:nvSpPr>
-          <p:cNvPr id="3" name="Shape 1"/>
-          <p:cNvSpPr/>
-          <p:nvPr/>
-        </p:nvSpPr>
-        <p:spPr>
-          <a:xfrm>
-            <a:off x="0" y="164592"/>
-            <a:ext cx="146304" cy="6693408"/>
-          </a:xfrm>
-          <a:prstGeom prst="rect">
-            <a:avLst/>
-          </a:prstGeom>
-          <a:solidFill>
-            <a:srgbClr val="2F8A28"/>
-          </a:solidFill>
-          <a:ln w="12700">
-            <a:solidFill>
-              <a:srgbClr val="2F8A28"/>
-            </a:solidFill>
-            <a:prstDash val="solid"/>
-          </a:ln>
-        </p:spPr>
-      </p:sp>
-      <p:sp>
-        <p:nvSpPr>
-          <p:cNvPr id="4" name="Text 2"/>
-          <p:cNvSpPr/>
-          <p:nvPr/>
-        </p:nvSpPr>
-        <p:spPr>
-          <a:xfrm>
-            <a:off x="502920" y="292608"/>
-            <a:ext cx="10149840" cy="256032"/>
-          </a:xfrm>
-          <a:prstGeom prst="rect">
-            <a:avLst/>
-          </a:prstGeom>
-          <a:noFill/>
-          <a:ln/>
-        </p:spPr>
-        <p:txBody>
-          <a:bodyPr wrap="square" lIns="0" tIns="0" rIns="0" bIns="0" rtlCol="0" anchor="ctr"/>
-          <a:lstStyle/>
-          <a:p>
-            <a:pPr indent="0" marL="0">
-              <a:buNone/>
-            </a:pPr>
-            <a:r>
-              <a:rPr lang="en-US" sz="900" b="1" dirty="0">
-                <a:solidFill>
-                  <a:srgbClr val="5F7181"/>
-                </a:solidFill>
-                <a:latin typeface="Aptos" pitchFamily="34" charset="0"/>
-                <a:ea typeface="Aptos" pitchFamily="34" charset="-122"/>
-                <a:cs typeface="Aptos" pitchFamily="34" charset="-120"/>
-              </a:rPr>
-              <a:t>Respecting Tribal Sovereignty and Indigenous Data Governance in Public Health AI Projects</a:t>
-            </a:r>
-            <a:endParaRPr lang="en-US" sz="900" dirty="0"/>
-          </a:p>
-        </p:txBody>
-      </p:sp>
-      <p:sp>
-        <p:nvSpPr>
-          <p:cNvPr id="5" name="Text 3"/>
-          <p:cNvSpPr/>
-          <p:nvPr/>
-        </p:nvSpPr>
-        <p:spPr>
-          <a:xfrm>
-            <a:off x="502920" y="6537960"/>
-            <a:ext cx="7772400" cy="201168"/>
-          </a:xfrm>
-          <a:prstGeom prst="rect">
-            <a:avLst/>
-          </a:prstGeom>
-          <a:noFill/>
-          <a:ln/>
-        </p:spPr>
-        <p:txBody>
-          <a:bodyPr wrap="square" lIns="0" tIns="0" rIns="0" bIns="0" rtlCol="0" anchor="ctr"/>
-          <a:lstStyle/>
-          <a:p>
-            <a:pPr indent="0" marL="0">
-              <a:buNone/>
-            </a:pPr>
-            <a:r>
-              <a:rPr lang="en-US" sz="800" dirty="0">
-                <a:solidFill>
-                  <a:srgbClr val="5F7181"/>
-                </a:solidFill>
-                <a:latin typeface="Aptos" pitchFamily="34" charset="0"/>
-                <a:ea typeface="Aptos" pitchFamily="34" charset="-122"/>
-                <a:cs typeface="Aptos" pitchFamily="34" charset="-120"/>
-              </a:rPr>
-              <a:t>AI Playbook and Toolkit for Public Health Departments</a:t>
-            </a:r>
-            <a:endParaRPr lang="en-US" sz="800" dirty="0"/>
-          </a:p>
-        </p:txBody>
-      </p:sp>
-      <p:sp>
-        <p:nvSpPr>
-          <p:cNvPr id="6" name="Text 4"/>
-          <p:cNvSpPr/>
-          <p:nvPr/>
-        </p:nvSpPr>
-        <p:spPr>
-          <a:xfrm>
-            <a:off x="9646920" y="6537960"/>
-            <a:ext cx="1965960" cy="201168"/>
-          </a:xfrm>
-          <a:prstGeom prst="rect">
-            <a:avLst/>
-          </a:prstGeom>
-          <a:noFill/>
-          <a:ln/>
-        </p:spPr>
-        <p:txBody>
-          <a:bodyPr wrap="square" lIns="0" tIns="0" rIns="0" bIns="0" rtlCol="0" anchor="ctr"/>
-          <a:lstStyle/>
-          <a:p>
-            <a:pPr algn="r" indent="0" marL="0">
-              <a:buNone/>
-            </a:pPr>
-            <a:r>
-              <a:rPr lang="en-US" sz="800" dirty="0">
-                <a:solidFill>
-                  <a:srgbClr val="5F7181"/>
-                </a:solidFill>
-                <a:latin typeface="Aptos" pitchFamily="34" charset="0"/>
-                <a:ea typeface="Aptos" pitchFamily="34" charset="-122"/>
-                <a:cs typeface="Aptos" pitchFamily="34" charset="-120"/>
-              </a:rPr>
-              <a:t>Copyright Paula Soper</a:t>
-            </a:r>
-            <a:endParaRPr lang="en-US" sz="800" dirty="0"/>
-          </a:p>
-        </p:txBody>
-      </p:sp>
-      <p:sp>
-        <p:nvSpPr>
-          <p:cNvPr id="7" name="Text 5"/>
-          <p:cNvSpPr/>
-          <p:nvPr/>
-        </p:nvSpPr>
-        <p:spPr>
-          <a:xfrm>
-            <a:off x="11137392" y="6510528"/>
-            <a:ext cx="411480" cy="201168"/>
-          </a:xfrm>
-          <a:prstGeom prst="rect">
-            <a:avLst/>
-          </a:prstGeom>
-          <a:noFill/>
-          <a:ln/>
-        </p:spPr>
-        <p:txBody>
-          <a:bodyPr wrap="square" lIns="0" tIns="0" rIns="0" bIns="0" rtlCol="0" anchor="ctr"/>
-          <a:lstStyle/>
-          <a:p>
-            <a:pPr algn="r" indent="0" marL="0">
-              <a:buNone/>
-            </a:pPr>
-            <a:r>
-              <a:rPr lang="en-US" sz="900" dirty="0">
-                <a:solidFill>
-                  <a:srgbClr val="5F7181"/>
-                </a:solidFill>
-                <a:latin typeface="Aptos" pitchFamily="34" charset="0"/>
-                <a:ea typeface="Aptos" pitchFamily="34" charset="-122"/>
-                <a:cs typeface="Aptos" pitchFamily="34" charset="-120"/>
-              </a:rPr>
-              <a:t>30</a:t>
-            </a:r>
-            <a:endParaRPr lang="en-US" sz="900" dirty="0"/>
-          </a:p>
-        </p:txBody>
-      </p:sp>
-      <p:sp>
-        <p:nvSpPr>
-          <p:cNvPr id="8" name="Text 6"/>
-          <p:cNvSpPr/>
-          <p:nvPr/>
-        </p:nvSpPr>
-        <p:spPr>
-          <a:xfrm>
-            <a:off x="640080" y="658368"/>
-            <a:ext cx="10881360" cy="713232"/>
-          </a:xfrm>
-          <a:prstGeom prst="rect">
-            <a:avLst/>
-          </a:prstGeom>
-          <a:noFill/>
-          <a:ln/>
-        </p:spPr>
-        <p:txBody>
-          <a:bodyPr wrap="square" lIns="0" tIns="0" rIns="0" bIns="0" rtlCol="0" anchor="ctr">
-            <a:normAutofit/>
-          </a:bodyPr>
-          <a:lstStyle/>
-          <a:p>
-            <a:pPr indent="0" marL="0">
-              <a:buNone/>
-            </a:pPr>
-            <a:r>
-              <a:rPr lang="en-US" sz="3400" b="1" dirty="0">
-                <a:solidFill>
-                  <a:srgbClr val="003A63"/>
-                </a:solidFill>
-                <a:latin typeface="Aptos Display" pitchFamily="34" charset="0"/>
-                <a:ea typeface="Aptos Display" pitchFamily="34" charset="-122"/>
-                <a:cs typeface="Aptos Display" pitchFamily="34" charset="-120"/>
-              </a:rPr>
-              <a:t>References and Resources Continued</a:t>
-            </a:r>
-            <a:endParaRPr lang="en-US" sz="3400" dirty="0"/>
-          </a:p>
-        </p:txBody>
-      </p:sp>
-      <p:sp>
-        <p:nvSpPr>
-          <p:cNvPr id="9" name="Text 7"/>
-          <p:cNvSpPr/>
-          <p:nvPr/>
-        </p:nvSpPr>
-        <p:spPr>
-          <a:xfrm>
-            <a:off x="822960" y="1463040"/>
-            <a:ext cx="6565392" cy="4343400"/>
-          </a:xfrm>
-          <a:prstGeom prst="rect">
-            <a:avLst/>
-          </a:prstGeom>
-          <a:noFill/>
-          <a:ln/>
-        </p:spPr>
-        <p:txBody>
-          <a:bodyPr wrap="square" lIns="1016" tIns="1016" rIns="1016" bIns="1016" rtlCol="0" anchor="t">
-            <a:normAutofit/>
-          </a:bodyPr>
-          <a:lstStyle/>
-          <a:p>
-            <a:pPr indent="0" marL="0">
-              <a:buNone/>
-            </a:pPr>
-            <a:r>
-              <a:rPr lang="en-US" sz="1920" dirty="0">
-                <a:solidFill>
-                  <a:srgbClr val="003A63"/>
-                </a:solidFill>
-                <a:latin typeface="Aptos" pitchFamily="34" charset="0"/>
-                <a:ea typeface="Aptos" pitchFamily="34" charset="-122"/>
-                <a:cs typeface="Aptos" pitchFamily="34" charset="-120"/>
-              </a:rPr>
-              <a:t>• HHS and CDC Tribal consultation resources. Use relevant agency consultation.</a:t>
-            </a:r>
-            <a:endParaRPr lang="en-US" sz="1920" dirty="0"/>
-          </a:p>
-          <a:p>
-            <a:pPr indent="0" marL="0">
-              <a:buNone/>
-            </a:pPr>
-            <a:r>
-              <a:rPr lang="en-US" sz="1920" dirty="0">
-                <a:solidFill>
-                  <a:srgbClr val="003A63"/>
-                </a:solidFill>
-                <a:latin typeface="Aptos" pitchFamily="34" charset="0"/>
-                <a:ea typeface="Aptos" pitchFamily="34" charset="-122"/>
-                <a:cs typeface="Aptos" pitchFamily="34" charset="-120"/>
-              </a:rPr>
-              <a:t>• Brookings. Digital sovereignty and Indigenous Nations resources.:.</a:t>
-            </a:r>
-            <a:endParaRPr lang="en-US" sz="1920" dirty="0"/>
-          </a:p>
-        </p:txBody>
-      </p:sp>
-      <p:sp>
-        <p:nvSpPr>
-          <p:cNvPr id="10" name="Shape 8"/>
-          <p:cNvSpPr/>
-          <p:nvPr/>
-        </p:nvSpPr>
-        <p:spPr>
-          <a:xfrm>
-            <a:off x="7543800" y="1325880"/>
-            <a:ext cx="3611880" cy="1261872"/>
-          </a:xfrm>
-          <a:prstGeom prst="roundRect">
-            <a:avLst>
-              <a:gd name="adj" fmla="val 8696"/>
-            </a:avLst>
-          </a:prstGeom>
-          <a:solidFill>
-            <a:srgbClr val="EEF8ED"/>
-          </a:solidFill>
-          <a:ln w="12700">
-            <a:solidFill>
-              <a:srgbClr val="B9D7E6"/>
-            </a:solidFill>
-            <a:prstDash val="solid"/>
-          </a:ln>
-        </p:spPr>
-      </p:sp>
-      <p:sp>
-        <p:nvSpPr>
-          <p:cNvPr id="11" name="Text 9"/>
-          <p:cNvSpPr/>
-          <p:nvPr/>
-        </p:nvSpPr>
-        <p:spPr>
-          <a:xfrm>
-            <a:off x="7708392" y="1453896"/>
-            <a:ext cx="3282696" cy="228600"/>
-          </a:xfrm>
-          <a:prstGeom prst="rect">
-            <a:avLst/>
-          </a:prstGeom>
-          <a:noFill/>
-          <a:ln/>
-        </p:spPr>
-        <p:txBody>
-          <a:bodyPr wrap="square" lIns="0" tIns="0" rIns="0" bIns="0" rtlCol="0" anchor="ctr"/>
-          <a:lstStyle/>
-          <a:p>
-            <a:pPr indent="0" marL="0">
-              <a:buNone/>
-            </a:pPr>
-            <a:r>
-              <a:rPr lang="en-US" sz="1220" b="1" dirty="0">
-                <a:solidFill>
-                  <a:srgbClr val="0068B7"/>
-                </a:solidFill>
-                <a:latin typeface="Aptos" pitchFamily="34" charset="0"/>
-                <a:ea typeface="Aptos" pitchFamily="34" charset="-122"/>
-                <a:cs typeface="Aptos" pitchFamily="34" charset="-120"/>
-              </a:rPr>
-              <a:t>Governance lens</a:t>
-            </a:r>
-            <a:endParaRPr lang="en-US" sz="1220" dirty="0"/>
-          </a:p>
-        </p:txBody>
-      </p:sp>
-      <p:sp>
-        <p:nvSpPr>
-          <p:cNvPr id="12" name="Text 10"/>
-          <p:cNvSpPr/>
-          <p:nvPr/>
-        </p:nvSpPr>
-        <p:spPr>
-          <a:xfrm>
-            <a:off x="7708392" y="1764792"/>
-            <a:ext cx="3282696" cy="749808"/>
-          </a:xfrm>
-          <a:prstGeom prst="rect">
-            <a:avLst/>
-          </a:prstGeom>
-          <a:noFill/>
-          <a:ln/>
-        </p:spPr>
-        <p:txBody>
-          <a:bodyPr wrap="square" lIns="254" tIns="254" rIns="254" bIns="254" rtlCol="0" anchor="t">
-            <a:normAutofit/>
-          </a:bodyPr>
-          <a:lstStyle/>
-          <a:p>
-            <a:pPr indent="0" marL="0">
-              <a:buNone/>
-            </a:pPr>
-            <a:r>
-              <a:rPr lang="en-US" sz="1220" dirty="0">
-                <a:solidFill>
-                  <a:srgbClr val="17364A"/>
-                </a:solidFill>
-                <a:latin typeface="Aptos" pitchFamily="34" charset="0"/>
-                <a:ea typeface="Aptos" pitchFamily="34" charset="-122"/>
-                <a:cs typeface="Aptos" pitchFamily="34" charset="-120"/>
-              </a:rPr>
-              <a:t>HHS and CDC Tribal consultation resources. Use relevant agency consultation.</a:t>
-            </a:r>
-            <a:endParaRPr lang="en-US" sz="1220" dirty="0"/>
-          </a:p>
-        </p:txBody>
-      </p:sp>
-      <p:sp>
-        <p:nvSpPr>
-          <p:cNvPr id="13" name="Shape 11"/>
-          <p:cNvSpPr/>
-          <p:nvPr/>
-        </p:nvSpPr>
-        <p:spPr>
-          <a:xfrm>
-            <a:off x="7543800" y="2724912"/>
-            <a:ext cx="3611880" cy="1527048"/>
-          </a:xfrm>
-          <a:prstGeom prst="roundRect">
-            <a:avLst>
-              <a:gd name="adj" fmla="val 7186"/>
-            </a:avLst>
-          </a:prstGeom>
-          <a:solidFill>
-            <a:srgbClr val="FFFFFF"/>
-          </a:solidFill>
-          <a:ln w="12700">
-            <a:solidFill>
-              <a:srgbClr val="B9D7E6"/>
-            </a:solidFill>
-            <a:prstDash val="solid"/>
-          </a:ln>
-        </p:spPr>
-      </p:sp>
-      <p:sp>
-        <p:nvSpPr>
-          <p:cNvPr id="14" name="Text 12"/>
-          <p:cNvSpPr/>
-          <p:nvPr/>
-        </p:nvSpPr>
-        <p:spPr>
-          <a:xfrm>
-            <a:off x="7708392" y="2852928"/>
-            <a:ext cx="3282696" cy="228600"/>
-          </a:xfrm>
-          <a:prstGeom prst="rect">
-            <a:avLst/>
-          </a:prstGeom>
-          <a:noFill/>
-          <a:ln/>
-        </p:spPr>
-        <p:txBody>
-          <a:bodyPr wrap="square" lIns="0" tIns="0" rIns="0" bIns="0" rtlCol="0" anchor="ctr"/>
-          <a:lstStyle/>
-          <a:p>
-            <a:pPr indent="0" marL="0">
-              <a:buNone/>
-            </a:pPr>
-            <a:r>
-              <a:rPr lang="en-US" sz="1220" b="1" dirty="0">
-                <a:solidFill>
-                  <a:srgbClr val="0068B7"/>
-                </a:solidFill>
-                <a:latin typeface="Aptos" pitchFamily="34" charset="0"/>
-                <a:ea typeface="Aptos" pitchFamily="34" charset="-122"/>
-                <a:cs typeface="Aptos" pitchFamily="34" charset="-120"/>
-              </a:rPr>
-              <a:t>Concept checkpoints</a:t>
-            </a:r>
-            <a:endParaRPr lang="en-US" sz="1220" dirty="0"/>
-          </a:p>
-        </p:txBody>
-      </p:sp>
-      <p:sp>
-        <p:nvSpPr>
-          <p:cNvPr id="15" name="Text 13"/>
-          <p:cNvSpPr/>
-          <p:nvPr/>
-        </p:nvSpPr>
-        <p:spPr>
-          <a:xfrm>
-            <a:off x="7726680" y="3182112"/>
-            <a:ext cx="3227832" cy="960120"/>
-          </a:xfrm>
-          <a:prstGeom prst="rect">
-            <a:avLst/>
-          </a:prstGeom>
-          <a:noFill/>
-          <a:ln/>
-        </p:spPr>
-        <p:txBody>
-          <a:bodyPr wrap="square" lIns="508" tIns="508" rIns="508" bIns="508" rtlCol="0" anchor="t">
-            <a:normAutofit/>
-          </a:bodyPr>
-          <a:lstStyle/>
-          <a:p>
-            <a:pPr indent="0" marL="0">
-              <a:buNone/>
-            </a:pPr>
-            <a:r>
-              <a:rPr lang="en-US" sz="1140" dirty="0">
-                <a:solidFill>
-                  <a:srgbClr val="17364A"/>
-                </a:solidFill>
-                <a:latin typeface="Aptos" pitchFamily="34" charset="0"/>
-                <a:ea typeface="Aptos" pitchFamily="34" charset="-122"/>
-                <a:cs typeface="Aptos" pitchFamily="34" charset="-120"/>
-              </a:rPr>
-              <a:t>HHS and CDC Tribal consultation resources.</a:t>
-            </a:r>
-            <a:endParaRPr lang="en-US" sz="1140" dirty="0"/>
-          </a:p>
-          <a:p>
-            <a:pPr indent="0" marL="0">
-              <a:buNone/>
-            </a:pPr>
-            <a:r>
-              <a:rPr lang="en-US" sz="1140" dirty="0">
-                <a:solidFill>
-                  <a:srgbClr val="17364A"/>
-                </a:solidFill>
-                <a:latin typeface="Aptos" pitchFamily="34" charset="0"/>
-                <a:ea typeface="Aptos" pitchFamily="34" charset="-122"/>
-                <a:cs typeface="Aptos" pitchFamily="34" charset="-120"/>
-              </a:rPr>
-              <a:t>Use relevant agency consultation policies and.</a:t>
-            </a:r>
-            <a:endParaRPr lang="en-US" sz="1140" dirty="0"/>
-          </a:p>
-          <a:p>
-            <a:pPr indent="0" marL="0">
-              <a:buNone/>
-            </a:pPr>
-            <a:r>
-              <a:rPr lang="en-US" sz="1140" dirty="0">
-                <a:solidFill>
-                  <a:srgbClr val="17364A"/>
-                </a:solidFill>
-                <a:latin typeface="Aptos" pitchFamily="34" charset="0"/>
-                <a:ea typeface="Aptos" pitchFamily="34" charset="-122"/>
-                <a:cs typeface="Aptos" pitchFamily="34" charset="-120"/>
-              </a:rPr>
-              <a:t>Brookings.</a:t>
-            </a:r>
-            <a:endParaRPr lang="en-US" sz="1140" dirty="0"/>
-          </a:p>
-        </p:txBody>
-      </p:sp>
-      <p:sp>
-        <p:nvSpPr>
-          <p:cNvPr id="16" name="Shape 14"/>
-          <p:cNvSpPr/>
-          <p:nvPr/>
-        </p:nvSpPr>
-        <p:spPr>
-          <a:xfrm>
-            <a:off x="7543800" y="4389120"/>
-            <a:ext cx="3611880" cy="1261872"/>
-          </a:xfrm>
-          <a:prstGeom prst="roundRect">
-            <a:avLst>
-              <a:gd name="adj" fmla="val 8696"/>
-            </a:avLst>
-          </a:prstGeom>
-          <a:solidFill>
-            <a:srgbClr val="EAF6F8"/>
-          </a:solidFill>
-          <a:ln w="12700">
-            <a:solidFill>
-              <a:srgbClr val="B9D7E6"/>
-            </a:solidFill>
-            <a:prstDash val="solid"/>
-          </a:ln>
-        </p:spPr>
-      </p:sp>
-      <p:sp>
-        <p:nvSpPr>
-          <p:cNvPr id="17" name="Text 15"/>
-          <p:cNvSpPr/>
-          <p:nvPr/>
-        </p:nvSpPr>
-        <p:spPr>
-          <a:xfrm>
-            <a:off x="7708392" y="4517136"/>
-            <a:ext cx="3282696" cy="228600"/>
-          </a:xfrm>
-          <a:prstGeom prst="rect">
-            <a:avLst/>
-          </a:prstGeom>
-          <a:noFill/>
-          <a:ln/>
-        </p:spPr>
-        <p:txBody>
-          <a:bodyPr wrap="square" lIns="0" tIns="0" rIns="0" bIns="0" rtlCol="0" anchor="ctr"/>
-          <a:lstStyle/>
-          <a:p>
-            <a:pPr indent="0" marL="0">
-              <a:buNone/>
-            </a:pPr>
-            <a:r>
-              <a:rPr lang="en-US" sz="1220" b="1" dirty="0">
-                <a:solidFill>
-                  <a:srgbClr val="0068B7"/>
-                </a:solidFill>
-                <a:latin typeface="Aptos" pitchFamily="34" charset="0"/>
-                <a:ea typeface="Aptos" pitchFamily="34" charset="-122"/>
-                <a:cs typeface="Aptos" pitchFamily="34" charset="-120"/>
-              </a:rPr>
-              <a:t>What to document</a:t>
-            </a:r>
-            <a:endParaRPr lang="en-US" sz="1220" dirty="0"/>
-          </a:p>
-        </p:txBody>
-      </p:sp>
-      <p:sp>
-        <p:nvSpPr>
-          <p:cNvPr id="18" name="Text 16"/>
-          <p:cNvSpPr/>
-          <p:nvPr/>
-        </p:nvSpPr>
-        <p:spPr>
-          <a:xfrm>
-            <a:off x="7708392" y="4828032"/>
-            <a:ext cx="3282696" cy="749808"/>
-          </a:xfrm>
-          <a:prstGeom prst="rect">
-            <a:avLst/>
-          </a:prstGeom>
-          <a:noFill/>
-          <a:ln/>
-        </p:spPr>
-        <p:txBody>
-          <a:bodyPr wrap="square" lIns="254" tIns="254" rIns="254" bIns="254" rtlCol="0" anchor="t">
-            <a:normAutofit/>
-          </a:bodyPr>
-          <a:lstStyle/>
-          <a:p>
-            <a:pPr indent="0" marL="0">
-              <a:buNone/>
-            </a:pPr>
-            <a:r>
-              <a:rPr lang="en-US" sz="1220" dirty="0">
-                <a:solidFill>
-                  <a:srgbClr val="17364A"/>
-                </a:solidFill>
-                <a:latin typeface="Aptos" pitchFamily="34" charset="0"/>
-                <a:ea typeface="Aptos" pitchFamily="34" charset="-122"/>
-                <a:cs typeface="Aptos" pitchFamily="34" charset="-120"/>
-              </a:rPr>
-              <a:t>Translate this concept into clear decision rights, review steps, documentation.</a:t>
-            </a:r>
-            <a:endParaRPr lang="en-US" sz="1220" dirty="0"/>
           </a:p>
         </p:txBody>
       </p:sp>
